--- a/CustomTraining/online trainings/training_schedule.pptx
+++ b/CustomTraining/online trainings/training_schedule.pptx
@@ -10,6 +10,8 @@
     <p:sldId id="258" r:id="rId9"/>
     <p:sldId id="259" r:id="rId10"/>
     <p:sldId id="260" r:id="rId11"/>
+    <p:sldId id="261" r:id="rId12"/>
+    <p:sldId id="262" r:id="rId13"/>
   </p:sldIdLst>
   <p:sldSz cx="12188952" cy="6858000" type="screen4x3"/>
   <p:notesSz cx="6858000" cy="9144000"/>
@@ -3206,7 +3208,7 @@
                   <a:srgbClr val="00B4D8"/>
                 </a:solidFill>
               </a:rPr>
-              <a:t>Sumo Logic — Virtual Training Schedule   ·   05 May – 12 May 2026   (1/5)</a:t>
+              <a:t>Sumo Logic — Virtual Training Schedule   ·   05 May – 12 May 2026   (1/7)</a:t>
             </a:r>
           </a:p>
         </p:txBody>
@@ -3240,7 +3242,7 @@
                   <a:srgbClr val="94A3B8"/>
                 </a:solidFill>
               </a:rPr>
-              <a:t>p 1/5</a:t>
+              <a:t>p 1/7</a:t>
             </a:r>
           </a:p>
         </p:txBody>
@@ -6234,7 +6236,7 @@
                   <a:srgbClr val="00B4D8"/>
                 </a:solidFill>
               </a:rPr>
-              <a:t>Sumo Logic — Virtual Training Schedule   ·   12 May – 21 May 2026   (2/5)</a:t>
+              <a:t>Sumo Logic — Virtual Training Schedule   ·   12 May – 21 May 2026   (2/7)</a:t>
             </a:r>
           </a:p>
         </p:txBody>
@@ -6268,7 +6270,7 @@
                   <a:srgbClr val="94A3B8"/>
                 </a:solidFill>
               </a:rPr>
-              <a:t>p 2/5</a:t>
+              <a:t>p 2/7</a:t>
             </a:r>
           </a:p>
         </p:txBody>
@@ -9262,7 +9264,7 @@
                   <a:srgbClr val="00B4D8"/>
                 </a:solidFill>
               </a:rPr>
-              <a:t>Sumo Logic — Virtual Training Schedule   ·   21 May 2026 – 09 Jun 2026   (3/5)</a:t>
+              <a:t>Sumo Logic — Virtual Training Schedule   ·   21 May 2026 – 09 Jun 2026   (3/7)</a:t>
             </a:r>
           </a:p>
         </p:txBody>
@@ -9296,7 +9298,7 @@
                   <a:srgbClr val="94A3B8"/>
                 </a:solidFill>
               </a:rPr>
-              <a:t>p 3/5</a:t>
+              <a:t>p 3/7</a:t>
             </a:r>
           </a:p>
         </p:txBody>
@@ -12290,7 +12292,7 @@
                   <a:srgbClr val="00B4D8"/>
                 </a:solidFill>
               </a:rPr>
-              <a:t>Sumo Logic — Virtual Training Schedule   ·   09 Jun – 18 Jun 2026   (4/5)</a:t>
+              <a:t>Sumo Logic — Virtual Training Schedule   ·   09 Jun – 18 Jun 2026   (4/7)</a:t>
             </a:r>
           </a:p>
         </p:txBody>
@@ -12324,7 +12326,7 @@
                   <a:srgbClr val="94A3B8"/>
                 </a:solidFill>
               </a:rPr>
-              <a:t>p 4/5</a:t>
+              <a:t>p 4/7</a:t>
             </a:r>
           </a:p>
         </p:txBody>
@@ -15318,7 +15320,7 @@
                   <a:srgbClr val="00B4D8"/>
                 </a:solidFill>
               </a:rPr>
-              <a:t>Sumo Logic — Virtual Training Schedule   ·   18 Jun – 18 Jun 2026   (5/5)</a:t>
+              <a:t>Sumo Logic — Virtual Training Schedule   ·   18 Jun 2026 – 07 Jul 2026   (5/7)</a:t>
             </a:r>
           </a:p>
         </p:txBody>
@@ -15352,7 +15354,6063 @@
                   <a:srgbClr val="94A3B8"/>
                 </a:solidFill>
               </a:rPr>
-              <a:t>p 5/5</a:t>
+              <a:t>p 5/7</a:t>
+            </a:r>
+          </a:p>
+        </p:txBody>
+      </p:sp>
+      <p:graphicFrame>
+        <p:nvGraphicFramePr>
+          <p:cNvPr id="6" name="Table 5"/>
+          <p:cNvGraphicFramePr>
+            <a:graphicFrameLocks noGrp="1"/>
+          </p:cNvGraphicFramePr>
+          <p:nvPr/>
+        </p:nvGraphicFramePr>
+        <p:xfrm>
+          <a:off x="164592" y="640080"/>
+          <a:ext cx="11795760" cy="4517136"/>
+        </p:xfrm>
+        <a:graphic>
+          <a:graphicData uri="http://schemas.openxmlformats.org/drawingml/2006/table">
+            <a:tbl>
+              <a:tblPr firstRow="1" bandRow="1">
+                <a:tableStyleId>{5C22544A-7EE6-4342-B048-85BDC9FD1C3A}</a:tableStyleId>
+              </a:tblPr>
+              <a:tblGrid>
+                <a:gridCol w="2286000"/>
+                <a:gridCol w="1920240"/>
+                <a:gridCol w="1920240"/>
+                <a:gridCol w="1920240"/>
+                <a:gridCol w="1920240"/>
+                <a:gridCol w="1828800"/>
+              </a:tblGrid>
+              <a:tr h="310896">
+                <a:tc>
+                  <a:txBody>
+                    <a:bodyPr wrap="square"/>
+                    <a:lstStyle/>
+                    <a:p>
+                      <a:pPr algn="ctr"/>
+                      <a:r>
+                        <a:rPr sz="900" b="1">
+                          <a:solidFill>
+                            <a:srgbClr val="00B4D8"/>
+                          </a:solidFill>
+                        </a:rPr>
+                        <a:t>Course</a:t>
+                      </a:r>
+                    </a:p>
+                  </a:txBody>
+                  <a:tcPr>
+                    <a:solidFill>
+                      <a:srgbClr val="1A1D27"/>
+                    </a:solidFill>
+                    <a:lnL w="6350" cap="flat">
+                      <a:solidFill>
+                        <a:srgbClr val="2E3348"/>
+                      </a:solidFill>
+                    </a:lnL>
+                    <a:lnR w="6350" cap="flat">
+                      <a:solidFill>
+                        <a:srgbClr val="2E3348"/>
+                      </a:solidFill>
+                    </a:lnR>
+                    <a:lnT w="6350" cap="flat">
+                      <a:solidFill>
+                        <a:srgbClr val="2E3348"/>
+                      </a:solidFill>
+                    </a:lnT>
+                    <a:lnB w="6350" cap="flat">
+                      <a:solidFill>
+                        <a:srgbClr val="2E3348"/>
+                      </a:solidFill>
+                    </a:lnB>
+                  </a:tcPr>
+                </a:tc>
+                <a:tc>
+                  <a:txBody>
+                    <a:bodyPr wrap="square"/>
+                    <a:lstStyle/>
+                    <a:p>
+                      <a:pPr algn="ctr"/>
+                      <a:r>
+                        <a:rPr sz="900" b="1">
+                          <a:solidFill>
+                            <a:srgbClr val="00B4D8"/>
+                          </a:solidFill>
+                        </a:rPr>
+                        <a:t>PT  (Los Angeles)</a:t>
+                      </a:r>
+                    </a:p>
+                  </a:txBody>
+                  <a:tcPr>
+                    <a:solidFill>
+                      <a:srgbClr val="1A1D27"/>
+                    </a:solidFill>
+                    <a:lnL w="6350" cap="flat">
+                      <a:solidFill>
+                        <a:srgbClr val="2E3348"/>
+                      </a:solidFill>
+                    </a:lnL>
+                    <a:lnR w="6350" cap="flat">
+                      <a:solidFill>
+                        <a:srgbClr val="2E3348"/>
+                      </a:solidFill>
+                    </a:lnR>
+                    <a:lnT w="6350" cap="flat">
+                      <a:solidFill>
+                        <a:srgbClr val="2E3348"/>
+                      </a:solidFill>
+                    </a:lnT>
+                    <a:lnB w="6350" cap="flat">
+                      <a:solidFill>
+                        <a:srgbClr val="2E3348"/>
+                      </a:solidFill>
+                    </a:lnB>
+                  </a:tcPr>
+                </a:tc>
+                <a:tc>
+                  <a:txBody>
+                    <a:bodyPr wrap="square"/>
+                    <a:lstStyle/>
+                    <a:p>
+                      <a:pPr algn="ctr"/>
+                      <a:r>
+                        <a:rPr sz="900" b="1">
+                          <a:solidFill>
+                            <a:srgbClr val="00B4D8"/>
+                          </a:solidFill>
+                        </a:rPr>
+                        <a:t>NZ  (Auckland)</a:t>
+                      </a:r>
+                    </a:p>
+                  </a:txBody>
+                  <a:tcPr>
+                    <a:solidFill>
+                      <a:srgbClr val="1A1D27"/>
+                    </a:solidFill>
+                    <a:lnL w="6350" cap="flat">
+                      <a:solidFill>
+                        <a:srgbClr val="2E3348"/>
+                      </a:solidFill>
+                    </a:lnL>
+                    <a:lnR w="6350" cap="flat">
+                      <a:solidFill>
+                        <a:srgbClr val="2E3348"/>
+                      </a:solidFill>
+                    </a:lnR>
+                    <a:lnT w="6350" cap="flat">
+                      <a:solidFill>
+                        <a:srgbClr val="2E3348"/>
+                      </a:solidFill>
+                    </a:lnT>
+                    <a:lnB w="6350" cap="flat">
+                      <a:solidFill>
+                        <a:srgbClr val="2E3348"/>
+                      </a:solidFill>
+                    </a:lnB>
+                  </a:tcPr>
+                </a:tc>
+                <a:tc>
+                  <a:txBody>
+                    <a:bodyPr wrap="square"/>
+                    <a:lstStyle/>
+                    <a:p>
+                      <a:pPr algn="ctr"/>
+                      <a:r>
+                        <a:rPr sz="900" b="1">
+                          <a:solidFill>
+                            <a:srgbClr val="00B4D8"/>
+                          </a:solidFill>
+                        </a:rPr>
+                        <a:t>AET  (Sydney)</a:t>
+                      </a:r>
+                    </a:p>
+                  </a:txBody>
+                  <a:tcPr>
+                    <a:solidFill>
+                      <a:srgbClr val="1A1D27"/>
+                    </a:solidFill>
+                    <a:lnL w="6350" cap="flat">
+                      <a:solidFill>
+                        <a:srgbClr val="2E3348"/>
+                      </a:solidFill>
+                    </a:lnL>
+                    <a:lnR w="6350" cap="flat">
+                      <a:solidFill>
+                        <a:srgbClr val="2E3348"/>
+                      </a:solidFill>
+                    </a:lnR>
+                    <a:lnT w="6350" cap="flat">
+                      <a:solidFill>
+                        <a:srgbClr val="2E3348"/>
+                      </a:solidFill>
+                    </a:lnT>
+                    <a:lnB w="6350" cap="flat">
+                      <a:solidFill>
+                        <a:srgbClr val="2E3348"/>
+                      </a:solidFill>
+                    </a:lnB>
+                  </a:tcPr>
+                </a:tc>
+                <a:tc>
+                  <a:txBody>
+                    <a:bodyPr wrap="square"/>
+                    <a:lstStyle/>
+                    <a:p>
+                      <a:pPr algn="ctr"/>
+                      <a:r>
+                        <a:rPr sz="900" b="1">
+                          <a:solidFill>
+                            <a:srgbClr val="00B4D8"/>
+                          </a:solidFill>
+                        </a:rPr>
+                        <a:t>SGT  (Singapore)</a:t>
+                      </a:r>
+                    </a:p>
+                  </a:txBody>
+                  <a:tcPr>
+                    <a:solidFill>
+                      <a:srgbClr val="1A1D27"/>
+                    </a:solidFill>
+                    <a:lnL w="6350" cap="flat">
+                      <a:solidFill>
+                        <a:srgbClr val="2E3348"/>
+                      </a:solidFill>
+                    </a:lnL>
+                    <a:lnR w="6350" cap="flat">
+                      <a:solidFill>
+                        <a:srgbClr val="2E3348"/>
+                      </a:solidFill>
+                    </a:lnR>
+                    <a:lnT w="6350" cap="flat">
+                      <a:solidFill>
+                        <a:srgbClr val="2E3348"/>
+                      </a:solidFill>
+                    </a:lnT>
+                    <a:lnB w="6350" cap="flat">
+                      <a:solidFill>
+                        <a:srgbClr val="2E3348"/>
+                      </a:solidFill>
+                    </a:lnB>
+                  </a:tcPr>
+                </a:tc>
+                <a:tc>
+                  <a:txBody>
+                    <a:bodyPr wrap="square"/>
+                    <a:lstStyle/>
+                    <a:p>
+                      <a:pPr algn="ctr"/>
+                      <a:r>
+                        <a:rPr sz="900" b="1">
+                          <a:solidFill>
+                            <a:srgbClr val="00B4D8"/>
+                          </a:solidFill>
+                        </a:rPr>
+                        <a:t>Register URL</a:t>
+                      </a:r>
+                    </a:p>
+                  </a:txBody>
+                  <a:tcPr>
+                    <a:solidFill>
+                      <a:srgbClr val="1A1D27"/>
+                    </a:solidFill>
+                    <a:lnL w="6350" cap="flat">
+                      <a:solidFill>
+                        <a:srgbClr val="2E3348"/>
+                      </a:solidFill>
+                    </a:lnL>
+                    <a:lnR w="6350" cap="flat">
+                      <a:solidFill>
+                        <a:srgbClr val="2E3348"/>
+                      </a:solidFill>
+                    </a:lnR>
+                    <a:lnT w="6350" cap="flat">
+                      <a:solidFill>
+                        <a:srgbClr val="2E3348"/>
+                      </a:solidFill>
+                    </a:lnT>
+                    <a:lnB w="6350" cap="flat">
+                      <a:solidFill>
+                        <a:srgbClr val="2E3348"/>
+                      </a:solidFill>
+                    </a:lnB>
+                  </a:tcPr>
+                </a:tc>
+              </a:tr>
+              <a:tr h="420624">
+                <a:tc>
+                  <a:txBody>
+                    <a:bodyPr wrap="square"/>
+                    <a:lstStyle/>
+                    <a:p>
+                      <a:pPr algn="l"/>
+                      <a:r>
+                        <a:rPr sz="800" b="0">
+                          <a:solidFill>
+                            <a:srgbClr val="E2E8F0"/>
+                          </a:solidFill>
+                        </a:rPr>
+                        <a:t>Automation Workshop PM</a:t>
+                      </a:r>
+                    </a:p>
+                  </a:txBody>
+                  <a:tcPr>
+                    <a:solidFill>
+                      <a:srgbClr val="0F1117"/>
+                    </a:solidFill>
+                    <a:lnL w="6350" cap="flat">
+                      <a:solidFill>
+                        <a:srgbClr val="2E3348"/>
+                      </a:solidFill>
+                    </a:lnL>
+                    <a:lnR w="6350" cap="flat">
+                      <a:solidFill>
+                        <a:srgbClr val="2E3348"/>
+                      </a:solidFill>
+                    </a:lnR>
+                    <a:lnT w="6350" cap="flat">
+                      <a:solidFill>
+                        <a:srgbClr val="2E3348"/>
+                      </a:solidFill>
+                    </a:lnT>
+                    <a:lnB w="6350" cap="flat">
+                      <a:solidFill>
+                        <a:srgbClr val="2E3348"/>
+                      </a:solidFill>
+                    </a:lnB>
+                  </a:tcPr>
+                </a:tc>
+                <a:tc>
+                  <a:txBody>
+                    <a:bodyPr wrap="none"/>
+                    <a:lstStyle/>
+                    <a:p>
+                      <a:pPr algn="l"/>
+                      <a:r>
+                        <a:rPr sz="800" b="0">
+                          <a:solidFill>
+                            <a:srgbClr val="E2E8F0"/>
+                          </a:solidFill>
+                        </a:rPr>
+                        <a:t>Thu 18 Jun 2026  04:00 PM  →  05:30 PM</a:t>
+                      </a:r>
+                    </a:p>
+                  </a:txBody>
+                  <a:tcPr>
+                    <a:solidFill>
+                      <a:srgbClr val="0F1117"/>
+                    </a:solidFill>
+                    <a:lnL w="6350" cap="flat">
+                      <a:solidFill>
+                        <a:srgbClr val="2E3348"/>
+                      </a:solidFill>
+                    </a:lnL>
+                    <a:lnR w="6350" cap="flat">
+                      <a:solidFill>
+                        <a:srgbClr val="2E3348"/>
+                      </a:solidFill>
+                    </a:lnR>
+                    <a:lnT w="6350" cap="flat">
+                      <a:solidFill>
+                        <a:srgbClr val="2E3348"/>
+                      </a:solidFill>
+                    </a:lnT>
+                    <a:lnB w="6350" cap="flat">
+                      <a:solidFill>
+                        <a:srgbClr val="2E3348"/>
+                      </a:solidFill>
+                    </a:lnB>
+                  </a:tcPr>
+                </a:tc>
+                <a:tc>
+                  <a:txBody>
+                    <a:bodyPr wrap="none"/>
+                    <a:lstStyle/>
+                    <a:p>
+                      <a:pPr algn="l"/>
+                      <a:r>
+                        <a:rPr sz="800" b="0">
+                          <a:solidFill>
+                            <a:srgbClr val="E2E8F0"/>
+                          </a:solidFill>
+                        </a:rPr>
+                        <a:t>Fri 19 Jun 2026  11:00 AM</a:t>
+                      </a:r>
+                    </a:p>
+                  </a:txBody>
+                  <a:tcPr>
+                    <a:solidFill>
+                      <a:srgbClr val="0F1117"/>
+                    </a:solidFill>
+                    <a:lnL w="6350" cap="flat">
+                      <a:solidFill>
+                        <a:srgbClr val="2E3348"/>
+                      </a:solidFill>
+                    </a:lnL>
+                    <a:lnR w="6350" cap="flat">
+                      <a:solidFill>
+                        <a:srgbClr val="2E3348"/>
+                      </a:solidFill>
+                    </a:lnR>
+                    <a:lnT w="6350" cap="flat">
+                      <a:solidFill>
+                        <a:srgbClr val="2E3348"/>
+                      </a:solidFill>
+                    </a:lnT>
+                    <a:lnB w="6350" cap="flat">
+                      <a:solidFill>
+                        <a:srgbClr val="2E3348"/>
+                      </a:solidFill>
+                    </a:lnB>
+                  </a:tcPr>
+                </a:tc>
+                <a:tc>
+                  <a:txBody>
+                    <a:bodyPr wrap="none"/>
+                    <a:lstStyle/>
+                    <a:p>
+                      <a:pPr algn="l"/>
+                      <a:r>
+                        <a:rPr sz="800" b="0">
+                          <a:solidFill>
+                            <a:srgbClr val="E2E8F0"/>
+                          </a:solidFill>
+                        </a:rPr>
+                        <a:t>Fri 19 Jun 2026  09:00 AM</a:t>
+                      </a:r>
+                    </a:p>
+                  </a:txBody>
+                  <a:tcPr>
+                    <a:solidFill>
+                      <a:srgbClr val="0F1117"/>
+                    </a:solidFill>
+                    <a:lnL w="6350" cap="flat">
+                      <a:solidFill>
+                        <a:srgbClr val="2E3348"/>
+                      </a:solidFill>
+                    </a:lnL>
+                    <a:lnR w="6350" cap="flat">
+                      <a:solidFill>
+                        <a:srgbClr val="2E3348"/>
+                      </a:solidFill>
+                    </a:lnR>
+                    <a:lnT w="6350" cap="flat">
+                      <a:solidFill>
+                        <a:srgbClr val="2E3348"/>
+                      </a:solidFill>
+                    </a:lnT>
+                    <a:lnB w="6350" cap="flat">
+                      <a:solidFill>
+                        <a:srgbClr val="2E3348"/>
+                      </a:solidFill>
+                    </a:lnB>
+                  </a:tcPr>
+                </a:tc>
+                <a:tc>
+                  <a:txBody>
+                    <a:bodyPr wrap="none"/>
+                    <a:lstStyle/>
+                    <a:p>
+                      <a:pPr algn="l"/>
+                      <a:r>
+                        <a:rPr sz="800" b="0">
+                          <a:solidFill>
+                            <a:srgbClr val="E2E8F0"/>
+                          </a:solidFill>
+                        </a:rPr>
+                        <a:t>Fri 19 Jun 2026  07:00 AM</a:t>
+                      </a:r>
+                    </a:p>
+                  </a:txBody>
+                  <a:tcPr>
+                    <a:solidFill>
+                      <a:srgbClr val="0F1117"/>
+                    </a:solidFill>
+                    <a:lnL w="6350" cap="flat">
+                      <a:solidFill>
+                        <a:srgbClr val="2E3348"/>
+                      </a:solidFill>
+                    </a:lnL>
+                    <a:lnR w="6350" cap="flat">
+                      <a:solidFill>
+                        <a:srgbClr val="2E3348"/>
+                      </a:solidFill>
+                    </a:lnR>
+                    <a:lnT w="6350" cap="flat">
+                      <a:solidFill>
+                        <a:srgbClr val="2E3348"/>
+                      </a:solidFill>
+                    </a:lnT>
+                    <a:lnB w="6350" cap="flat">
+                      <a:solidFill>
+                        <a:srgbClr val="2E3348"/>
+                      </a:solidFill>
+                    </a:lnB>
+                  </a:tcPr>
+                </a:tc>
+                <a:tc>
+                  <a:txBody>
+                    <a:bodyPr wrap="square"/>
+                    <a:lstStyle/>
+                    <a:p>
+                      <a:pPr algn="l"/>
+                      <a:r>
+                        <a:rPr sz="700" b="0">
+                          <a:solidFill>
+                            <a:srgbClr val="E2E8F0"/>
+                          </a:solidFill>
+                        </a:rPr>
+                        <a:t>https://events.sumologic.com/automationworkshoppm06182026-event-training</a:t>
+                      </a:r>
+                    </a:p>
+                  </a:txBody>
+                  <a:tcPr>
+                    <a:solidFill>
+                      <a:srgbClr val="0F1117"/>
+                    </a:solidFill>
+                    <a:lnL w="6350" cap="flat">
+                      <a:solidFill>
+                        <a:srgbClr val="2E3348"/>
+                      </a:solidFill>
+                    </a:lnL>
+                    <a:lnR w="6350" cap="flat">
+                      <a:solidFill>
+                        <a:srgbClr val="2E3348"/>
+                      </a:solidFill>
+                    </a:lnR>
+                    <a:lnT w="6350" cap="flat">
+                      <a:solidFill>
+                        <a:srgbClr val="2E3348"/>
+                      </a:solidFill>
+                    </a:lnT>
+                    <a:lnB w="6350" cap="flat">
+                      <a:solidFill>
+                        <a:srgbClr val="2E3348"/>
+                      </a:solidFill>
+                    </a:lnB>
+                  </a:tcPr>
+                </a:tc>
+              </a:tr>
+              <a:tr h="420624">
+                <a:tc>
+                  <a:txBody>
+                    <a:bodyPr wrap="square"/>
+                    <a:lstStyle/>
+                    <a:p>
+                      <a:pPr algn="l"/>
+                      <a:r>
+                        <a:rPr sz="800" b="0">
+                          <a:solidFill>
+                            <a:srgbClr val="E2E8F0"/>
+                          </a:solidFill>
+                        </a:rPr>
+                        <a:t>Welcome Webinar AM</a:t>
+                      </a:r>
+                    </a:p>
+                  </a:txBody>
+                  <a:tcPr>
+                    <a:solidFill>
+                      <a:srgbClr val="1A1D27"/>
+                    </a:solidFill>
+                    <a:lnL w="6350" cap="flat">
+                      <a:solidFill>
+                        <a:srgbClr val="2E3348"/>
+                      </a:solidFill>
+                    </a:lnL>
+                    <a:lnR w="6350" cap="flat">
+                      <a:solidFill>
+                        <a:srgbClr val="2E3348"/>
+                      </a:solidFill>
+                    </a:lnR>
+                    <a:lnT w="6350" cap="flat">
+                      <a:solidFill>
+                        <a:srgbClr val="2E3348"/>
+                      </a:solidFill>
+                    </a:lnT>
+                    <a:lnB w="6350" cap="flat">
+                      <a:solidFill>
+                        <a:srgbClr val="2E3348"/>
+                      </a:solidFill>
+                    </a:lnB>
+                  </a:tcPr>
+                </a:tc>
+                <a:tc>
+                  <a:txBody>
+                    <a:bodyPr wrap="none"/>
+                    <a:lstStyle/>
+                    <a:p>
+                      <a:pPr algn="l"/>
+                      <a:r>
+                        <a:rPr sz="800" b="0">
+                          <a:solidFill>
+                            <a:srgbClr val="E2E8F0"/>
+                          </a:solidFill>
+                        </a:rPr>
+                        <a:t>Tue 30 Jun 2026  05:00 AM  →  06:00 AM</a:t>
+                      </a:r>
+                    </a:p>
+                  </a:txBody>
+                  <a:tcPr>
+                    <a:solidFill>
+                      <a:srgbClr val="1A1D27"/>
+                    </a:solidFill>
+                    <a:lnL w="6350" cap="flat">
+                      <a:solidFill>
+                        <a:srgbClr val="2E3348"/>
+                      </a:solidFill>
+                    </a:lnL>
+                    <a:lnR w="6350" cap="flat">
+                      <a:solidFill>
+                        <a:srgbClr val="2E3348"/>
+                      </a:solidFill>
+                    </a:lnR>
+                    <a:lnT w="6350" cap="flat">
+                      <a:solidFill>
+                        <a:srgbClr val="2E3348"/>
+                      </a:solidFill>
+                    </a:lnT>
+                    <a:lnB w="6350" cap="flat">
+                      <a:solidFill>
+                        <a:srgbClr val="2E3348"/>
+                      </a:solidFill>
+                    </a:lnB>
+                  </a:tcPr>
+                </a:tc>
+                <a:tc>
+                  <a:txBody>
+                    <a:bodyPr wrap="none"/>
+                    <a:lstStyle/>
+                    <a:p>
+                      <a:pPr algn="l"/>
+                      <a:r>
+                        <a:rPr sz="800" b="0">
+                          <a:solidFill>
+                            <a:srgbClr val="E2E8F0"/>
+                          </a:solidFill>
+                        </a:rPr>
+                        <a:t>Wed 01 Jul 2026  12:00 AM</a:t>
+                      </a:r>
+                    </a:p>
+                  </a:txBody>
+                  <a:tcPr>
+                    <a:solidFill>
+                      <a:srgbClr val="1A1D27"/>
+                    </a:solidFill>
+                    <a:lnL w="6350" cap="flat">
+                      <a:solidFill>
+                        <a:srgbClr val="2E3348"/>
+                      </a:solidFill>
+                    </a:lnL>
+                    <a:lnR w="6350" cap="flat">
+                      <a:solidFill>
+                        <a:srgbClr val="2E3348"/>
+                      </a:solidFill>
+                    </a:lnR>
+                    <a:lnT w="6350" cap="flat">
+                      <a:solidFill>
+                        <a:srgbClr val="2E3348"/>
+                      </a:solidFill>
+                    </a:lnT>
+                    <a:lnB w="6350" cap="flat">
+                      <a:solidFill>
+                        <a:srgbClr val="2E3348"/>
+                      </a:solidFill>
+                    </a:lnB>
+                  </a:tcPr>
+                </a:tc>
+                <a:tc>
+                  <a:txBody>
+                    <a:bodyPr wrap="none"/>
+                    <a:lstStyle/>
+                    <a:p>
+                      <a:pPr algn="l"/>
+                      <a:r>
+                        <a:rPr sz="800" b="0">
+                          <a:solidFill>
+                            <a:srgbClr val="E2E8F0"/>
+                          </a:solidFill>
+                        </a:rPr>
+                        <a:t>Tue 30 Jun 2026  10:00 PM</a:t>
+                      </a:r>
+                    </a:p>
+                  </a:txBody>
+                  <a:tcPr>
+                    <a:solidFill>
+                      <a:srgbClr val="1A1D27"/>
+                    </a:solidFill>
+                    <a:lnL w="6350" cap="flat">
+                      <a:solidFill>
+                        <a:srgbClr val="2E3348"/>
+                      </a:solidFill>
+                    </a:lnL>
+                    <a:lnR w="6350" cap="flat">
+                      <a:solidFill>
+                        <a:srgbClr val="2E3348"/>
+                      </a:solidFill>
+                    </a:lnR>
+                    <a:lnT w="6350" cap="flat">
+                      <a:solidFill>
+                        <a:srgbClr val="2E3348"/>
+                      </a:solidFill>
+                    </a:lnT>
+                    <a:lnB w="6350" cap="flat">
+                      <a:solidFill>
+                        <a:srgbClr val="2E3348"/>
+                      </a:solidFill>
+                    </a:lnB>
+                  </a:tcPr>
+                </a:tc>
+                <a:tc>
+                  <a:txBody>
+                    <a:bodyPr wrap="none"/>
+                    <a:lstStyle/>
+                    <a:p>
+                      <a:pPr algn="l"/>
+                      <a:r>
+                        <a:rPr sz="800" b="0">
+                          <a:solidFill>
+                            <a:srgbClr val="E2E8F0"/>
+                          </a:solidFill>
+                        </a:rPr>
+                        <a:t>Tue 30 Jun 2026  08:00 PM</a:t>
+                      </a:r>
+                    </a:p>
+                  </a:txBody>
+                  <a:tcPr>
+                    <a:solidFill>
+                      <a:srgbClr val="1A1D27"/>
+                    </a:solidFill>
+                    <a:lnL w="6350" cap="flat">
+                      <a:solidFill>
+                        <a:srgbClr val="2E3348"/>
+                      </a:solidFill>
+                    </a:lnL>
+                    <a:lnR w="6350" cap="flat">
+                      <a:solidFill>
+                        <a:srgbClr val="2E3348"/>
+                      </a:solidFill>
+                    </a:lnR>
+                    <a:lnT w="6350" cap="flat">
+                      <a:solidFill>
+                        <a:srgbClr val="2E3348"/>
+                      </a:solidFill>
+                    </a:lnT>
+                    <a:lnB w="6350" cap="flat">
+                      <a:solidFill>
+                        <a:srgbClr val="2E3348"/>
+                      </a:solidFill>
+                    </a:lnB>
+                  </a:tcPr>
+                </a:tc>
+                <a:tc>
+                  <a:txBody>
+                    <a:bodyPr wrap="square"/>
+                    <a:lstStyle/>
+                    <a:p>
+                      <a:pPr algn="l"/>
+                      <a:r>
+                        <a:rPr sz="700" b="0">
+                          <a:solidFill>
+                            <a:srgbClr val="E2E8F0"/>
+                          </a:solidFill>
+                        </a:rPr>
+                        <a:t>https://events.sumologic.com/welcomewebinaram06302026-event-training</a:t>
+                      </a:r>
+                    </a:p>
+                  </a:txBody>
+                  <a:tcPr>
+                    <a:solidFill>
+                      <a:srgbClr val="1A1D27"/>
+                    </a:solidFill>
+                    <a:lnL w="6350" cap="flat">
+                      <a:solidFill>
+                        <a:srgbClr val="2E3348"/>
+                      </a:solidFill>
+                    </a:lnL>
+                    <a:lnR w="6350" cap="flat">
+                      <a:solidFill>
+                        <a:srgbClr val="2E3348"/>
+                      </a:solidFill>
+                    </a:lnR>
+                    <a:lnT w="6350" cap="flat">
+                      <a:solidFill>
+                        <a:srgbClr val="2E3348"/>
+                      </a:solidFill>
+                    </a:lnT>
+                    <a:lnB w="6350" cap="flat">
+                      <a:solidFill>
+                        <a:srgbClr val="2E3348"/>
+                      </a:solidFill>
+                    </a:lnB>
+                  </a:tcPr>
+                </a:tc>
+              </a:tr>
+              <a:tr h="420624">
+                <a:tc>
+                  <a:txBody>
+                    <a:bodyPr wrap="square"/>
+                    <a:lstStyle/>
+                    <a:p>
+                      <a:pPr algn="l"/>
+                      <a:r>
+                        <a:rPr sz="800" b="0">
+                          <a:solidFill>
+                            <a:srgbClr val="E2E8F0"/>
+                          </a:solidFill>
+                        </a:rPr>
+                        <a:t>Fundamentals AM</a:t>
+                      </a:r>
+                    </a:p>
+                  </a:txBody>
+                  <a:tcPr>
+                    <a:solidFill>
+                      <a:srgbClr val="0F1117"/>
+                    </a:solidFill>
+                    <a:lnL w="6350" cap="flat">
+                      <a:solidFill>
+                        <a:srgbClr val="2E3348"/>
+                      </a:solidFill>
+                    </a:lnL>
+                    <a:lnR w="6350" cap="flat">
+                      <a:solidFill>
+                        <a:srgbClr val="2E3348"/>
+                      </a:solidFill>
+                    </a:lnR>
+                    <a:lnT w="6350" cap="flat">
+                      <a:solidFill>
+                        <a:srgbClr val="2E3348"/>
+                      </a:solidFill>
+                    </a:lnT>
+                    <a:lnB w="6350" cap="flat">
+                      <a:solidFill>
+                        <a:srgbClr val="2E3348"/>
+                      </a:solidFill>
+                    </a:lnB>
+                  </a:tcPr>
+                </a:tc>
+                <a:tc>
+                  <a:txBody>
+                    <a:bodyPr wrap="none"/>
+                    <a:lstStyle/>
+                    <a:p>
+                      <a:pPr algn="l"/>
+                      <a:r>
+                        <a:rPr sz="800" b="0">
+                          <a:solidFill>
+                            <a:srgbClr val="E2E8F0"/>
+                          </a:solidFill>
+                        </a:rPr>
+                        <a:t>Tue 30 Jun 2026  07:00 AM  →  04:00 PM</a:t>
+                      </a:r>
+                    </a:p>
+                  </a:txBody>
+                  <a:tcPr>
+                    <a:solidFill>
+                      <a:srgbClr val="0F1117"/>
+                    </a:solidFill>
+                    <a:lnL w="6350" cap="flat">
+                      <a:solidFill>
+                        <a:srgbClr val="2E3348"/>
+                      </a:solidFill>
+                    </a:lnL>
+                    <a:lnR w="6350" cap="flat">
+                      <a:solidFill>
+                        <a:srgbClr val="2E3348"/>
+                      </a:solidFill>
+                    </a:lnR>
+                    <a:lnT w="6350" cap="flat">
+                      <a:solidFill>
+                        <a:srgbClr val="2E3348"/>
+                      </a:solidFill>
+                    </a:lnT>
+                    <a:lnB w="6350" cap="flat">
+                      <a:solidFill>
+                        <a:srgbClr val="2E3348"/>
+                      </a:solidFill>
+                    </a:lnB>
+                  </a:tcPr>
+                </a:tc>
+                <a:tc>
+                  <a:txBody>
+                    <a:bodyPr wrap="none"/>
+                    <a:lstStyle/>
+                    <a:p>
+                      <a:pPr algn="l"/>
+                      <a:r>
+                        <a:rPr sz="800" b="0">
+                          <a:solidFill>
+                            <a:srgbClr val="E2E8F0"/>
+                          </a:solidFill>
+                        </a:rPr>
+                        <a:t>Wed 01 Jul 2026  02:00 AM</a:t>
+                      </a:r>
+                    </a:p>
+                  </a:txBody>
+                  <a:tcPr>
+                    <a:solidFill>
+                      <a:srgbClr val="0F1117"/>
+                    </a:solidFill>
+                    <a:lnL w="6350" cap="flat">
+                      <a:solidFill>
+                        <a:srgbClr val="2E3348"/>
+                      </a:solidFill>
+                    </a:lnL>
+                    <a:lnR w="6350" cap="flat">
+                      <a:solidFill>
+                        <a:srgbClr val="2E3348"/>
+                      </a:solidFill>
+                    </a:lnR>
+                    <a:lnT w="6350" cap="flat">
+                      <a:solidFill>
+                        <a:srgbClr val="2E3348"/>
+                      </a:solidFill>
+                    </a:lnT>
+                    <a:lnB w="6350" cap="flat">
+                      <a:solidFill>
+                        <a:srgbClr val="2E3348"/>
+                      </a:solidFill>
+                    </a:lnB>
+                  </a:tcPr>
+                </a:tc>
+                <a:tc>
+                  <a:txBody>
+                    <a:bodyPr wrap="none"/>
+                    <a:lstStyle/>
+                    <a:p>
+                      <a:pPr algn="l"/>
+                      <a:r>
+                        <a:rPr sz="800" b="0">
+                          <a:solidFill>
+                            <a:srgbClr val="E2E8F0"/>
+                          </a:solidFill>
+                        </a:rPr>
+                        <a:t>Wed 01 Jul 2026  12:00 AM</a:t>
+                      </a:r>
+                    </a:p>
+                  </a:txBody>
+                  <a:tcPr>
+                    <a:solidFill>
+                      <a:srgbClr val="0F1117"/>
+                    </a:solidFill>
+                    <a:lnL w="6350" cap="flat">
+                      <a:solidFill>
+                        <a:srgbClr val="2E3348"/>
+                      </a:solidFill>
+                    </a:lnL>
+                    <a:lnR w="6350" cap="flat">
+                      <a:solidFill>
+                        <a:srgbClr val="2E3348"/>
+                      </a:solidFill>
+                    </a:lnR>
+                    <a:lnT w="6350" cap="flat">
+                      <a:solidFill>
+                        <a:srgbClr val="2E3348"/>
+                      </a:solidFill>
+                    </a:lnT>
+                    <a:lnB w="6350" cap="flat">
+                      <a:solidFill>
+                        <a:srgbClr val="2E3348"/>
+                      </a:solidFill>
+                    </a:lnB>
+                  </a:tcPr>
+                </a:tc>
+                <a:tc>
+                  <a:txBody>
+                    <a:bodyPr wrap="none"/>
+                    <a:lstStyle/>
+                    <a:p>
+                      <a:pPr algn="l"/>
+                      <a:r>
+                        <a:rPr sz="800" b="0">
+                          <a:solidFill>
+                            <a:srgbClr val="E2E8F0"/>
+                          </a:solidFill>
+                        </a:rPr>
+                        <a:t>Tue 30 Jun 2026  10:00 PM</a:t>
+                      </a:r>
+                    </a:p>
+                  </a:txBody>
+                  <a:tcPr>
+                    <a:solidFill>
+                      <a:srgbClr val="0F1117"/>
+                    </a:solidFill>
+                    <a:lnL w="6350" cap="flat">
+                      <a:solidFill>
+                        <a:srgbClr val="2E3348"/>
+                      </a:solidFill>
+                    </a:lnL>
+                    <a:lnR w="6350" cap="flat">
+                      <a:solidFill>
+                        <a:srgbClr val="2E3348"/>
+                      </a:solidFill>
+                    </a:lnR>
+                    <a:lnT w="6350" cap="flat">
+                      <a:solidFill>
+                        <a:srgbClr val="2E3348"/>
+                      </a:solidFill>
+                    </a:lnT>
+                    <a:lnB w="6350" cap="flat">
+                      <a:solidFill>
+                        <a:srgbClr val="2E3348"/>
+                      </a:solidFill>
+                    </a:lnB>
+                  </a:tcPr>
+                </a:tc>
+                <a:tc>
+                  <a:txBody>
+                    <a:bodyPr wrap="square"/>
+                    <a:lstStyle/>
+                    <a:p>
+                      <a:pPr algn="l"/>
+                      <a:r>
+                        <a:rPr sz="700" b="0">
+                          <a:solidFill>
+                            <a:srgbClr val="E2E8F0"/>
+                          </a:solidFill>
+                        </a:rPr>
+                        <a:t>https://events.sumologic.com/fundamentalsam06302026-event-training</a:t>
+                      </a:r>
+                    </a:p>
+                  </a:txBody>
+                  <a:tcPr>
+                    <a:solidFill>
+                      <a:srgbClr val="0F1117"/>
+                    </a:solidFill>
+                    <a:lnL w="6350" cap="flat">
+                      <a:solidFill>
+                        <a:srgbClr val="2E3348"/>
+                      </a:solidFill>
+                    </a:lnL>
+                    <a:lnR w="6350" cap="flat">
+                      <a:solidFill>
+                        <a:srgbClr val="2E3348"/>
+                      </a:solidFill>
+                    </a:lnR>
+                    <a:lnT w="6350" cap="flat">
+                      <a:solidFill>
+                        <a:srgbClr val="2E3348"/>
+                      </a:solidFill>
+                    </a:lnT>
+                    <a:lnB w="6350" cap="flat">
+                      <a:solidFill>
+                        <a:srgbClr val="2E3348"/>
+                      </a:solidFill>
+                    </a:lnB>
+                  </a:tcPr>
+                </a:tc>
+              </a:tr>
+              <a:tr h="420624">
+                <a:tc>
+                  <a:txBody>
+                    <a:bodyPr wrap="square"/>
+                    <a:lstStyle/>
+                    <a:p>
+                      <a:pPr algn="l"/>
+                      <a:r>
+                        <a:rPr sz="800" b="0">
+                          <a:solidFill>
+                            <a:srgbClr val="E2E8F0"/>
+                          </a:solidFill>
+                        </a:rPr>
+                        <a:t>Welcome Webinar PM</a:t>
+                      </a:r>
+                    </a:p>
+                  </a:txBody>
+                  <a:tcPr>
+                    <a:solidFill>
+                      <a:srgbClr val="1A1D27"/>
+                    </a:solidFill>
+                    <a:lnL w="6350" cap="flat">
+                      <a:solidFill>
+                        <a:srgbClr val="2E3348"/>
+                      </a:solidFill>
+                    </a:lnL>
+                    <a:lnR w="6350" cap="flat">
+                      <a:solidFill>
+                        <a:srgbClr val="2E3348"/>
+                      </a:solidFill>
+                    </a:lnR>
+                    <a:lnT w="6350" cap="flat">
+                      <a:solidFill>
+                        <a:srgbClr val="2E3348"/>
+                      </a:solidFill>
+                    </a:lnT>
+                    <a:lnB w="6350" cap="flat">
+                      <a:solidFill>
+                        <a:srgbClr val="2E3348"/>
+                      </a:solidFill>
+                    </a:lnB>
+                  </a:tcPr>
+                </a:tc>
+                <a:tc>
+                  <a:txBody>
+                    <a:bodyPr wrap="none"/>
+                    <a:lstStyle/>
+                    <a:p>
+                      <a:pPr algn="l"/>
+                      <a:r>
+                        <a:rPr sz="800" b="0">
+                          <a:solidFill>
+                            <a:srgbClr val="E2E8F0"/>
+                          </a:solidFill>
+                        </a:rPr>
+                        <a:t>Tue 30 Jun 2026  10:00 AM  →  03:00 PM</a:t>
+                      </a:r>
+                    </a:p>
+                  </a:txBody>
+                  <a:tcPr>
+                    <a:solidFill>
+                      <a:srgbClr val="1A1D27"/>
+                    </a:solidFill>
+                    <a:lnL w="6350" cap="flat">
+                      <a:solidFill>
+                        <a:srgbClr val="2E3348"/>
+                      </a:solidFill>
+                    </a:lnL>
+                    <a:lnR w="6350" cap="flat">
+                      <a:solidFill>
+                        <a:srgbClr val="2E3348"/>
+                      </a:solidFill>
+                    </a:lnR>
+                    <a:lnT w="6350" cap="flat">
+                      <a:solidFill>
+                        <a:srgbClr val="2E3348"/>
+                      </a:solidFill>
+                    </a:lnT>
+                    <a:lnB w="6350" cap="flat">
+                      <a:solidFill>
+                        <a:srgbClr val="2E3348"/>
+                      </a:solidFill>
+                    </a:lnB>
+                  </a:tcPr>
+                </a:tc>
+                <a:tc>
+                  <a:txBody>
+                    <a:bodyPr wrap="none"/>
+                    <a:lstStyle/>
+                    <a:p>
+                      <a:pPr algn="l"/>
+                      <a:r>
+                        <a:rPr sz="800" b="0">
+                          <a:solidFill>
+                            <a:srgbClr val="E2E8F0"/>
+                          </a:solidFill>
+                        </a:rPr>
+                        <a:t>Wed 01 Jul 2026  05:00 AM</a:t>
+                      </a:r>
+                    </a:p>
+                  </a:txBody>
+                  <a:tcPr>
+                    <a:solidFill>
+                      <a:srgbClr val="1A1D27"/>
+                    </a:solidFill>
+                    <a:lnL w="6350" cap="flat">
+                      <a:solidFill>
+                        <a:srgbClr val="2E3348"/>
+                      </a:solidFill>
+                    </a:lnL>
+                    <a:lnR w="6350" cap="flat">
+                      <a:solidFill>
+                        <a:srgbClr val="2E3348"/>
+                      </a:solidFill>
+                    </a:lnR>
+                    <a:lnT w="6350" cap="flat">
+                      <a:solidFill>
+                        <a:srgbClr val="2E3348"/>
+                      </a:solidFill>
+                    </a:lnT>
+                    <a:lnB w="6350" cap="flat">
+                      <a:solidFill>
+                        <a:srgbClr val="2E3348"/>
+                      </a:solidFill>
+                    </a:lnB>
+                  </a:tcPr>
+                </a:tc>
+                <a:tc>
+                  <a:txBody>
+                    <a:bodyPr wrap="none"/>
+                    <a:lstStyle/>
+                    <a:p>
+                      <a:pPr algn="l"/>
+                      <a:r>
+                        <a:rPr sz="800" b="0">
+                          <a:solidFill>
+                            <a:srgbClr val="E2E8F0"/>
+                          </a:solidFill>
+                        </a:rPr>
+                        <a:t>Wed 01 Jul 2026  03:00 AM</a:t>
+                      </a:r>
+                    </a:p>
+                  </a:txBody>
+                  <a:tcPr>
+                    <a:solidFill>
+                      <a:srgbClr val="1A1D27"/>
+                    </a:solidFill>
+                    <a:lnL w="6350" cap="flat">
+                      <a:solidFill>
+                        <a:srgbClr val="2E3348"/>
+                      </a:solidFill>
+                    </a:lnL>
+                    <a:lnR w="6350" cap="flat">
+                      <a:solidFill>
+                        <a:srgbClr val="2E3348"/>
+                      </a:solidFill>
+                    </a:lnR>
+                    <a:lnT w="6350" cap="flat">
+                      <a:solidFill>
+                        <a:srgbClr val="2E3348"/>
+                      </a:solidFill>
+                    </a:lnT>
+                    <a:lnB w="6350" cap="flat">
+                      <a:solidFill>
+                        <a:srgbClr val="2E3348"/>
+                      </a:solidFill>
+                    </a:lnB>
+                  </a:tcPr>
+                </a:tc>
+                <a:tc>
+                  <a:txBody>
+                    <a:bodyPr wrap="none"/>
+                    <a:lstStyle/>
+                    <a:p>
+                      <a:pPr algn="l"/>
+                      <a:r>
+                        <a:rPr sz="800" b="0">
+                          <a:solidFill>
+                            <a:srgbClr val="E2E8F0"/>
+                          </a:solidFill>
+                        </a:rPr>
+                        <a:t>Wed 01 Jul 2026  01:00 AM</a:t>
+                      </a:r>
+                    </a:p>
+                  </a:txBody>
+                  <a:tcPr>
+                    <a:solidFill>
+                      <a:srgbClr val="1A1D27"/>
+                    </a:solidFill>
+                    <a:lnL w="6350" cap="flat">
+                      <a:solidFill>
+                        <a:srgbClr val="2E3348"/>
+                      </a:solidFill>
+                    </a:lnL>
+                    <a:lnR w="6350" cap="flat">
+                      <a:solidFill>
+                        <a:srgbClr val="2E3348"/>
+                      </a:solidFill>
+                    </a:lnR>
+                    <a:lnT w="6350" cap="flat">
+                      <a:solidFill>
+                        <a:srgbClr val="2E3348"/>
+                      </a:solidFill>
+                    </a:lnT>
+                    <a:lnB w="6350" cap="flat">
+                      <a:solidFill>
+                        <a:srgbClr val="2E3348"/>
+                      </a:solidFill>
+                    </a:lnB>
+                  </a:tcPr>
+                </a:tc>
+                <a:tc>
+                  <a:txBody>
+                    <a:bodyPr wrap="square"/>
+                    <a:lstStyle/>
+                    <a:p>
+                      <a:pPr algn="l"/>
+                      <a:r>
+                        <a:rPr sz="700" b="0">
+                          <a:solidFill>
+                            <a:srgbClr val="E2E8F0"/>
+                          </a:solidFill>
+                        </a:rPr>
+                        <a:t>https://events.sumologic.com/welcomewebinarpm06302026-event-training</a:t>
+                      </a:r>
+                    </a:p>
+                  </a:txBody>
+                  <a:tcPr>
+                    <a:solidFill>
+                      <a:srgbClr val="1A1D27"/>
+                    </a:solidFill>
+                    <a:lnL w="6350" cap="flat">
+                      <a:solidFill>
+                        <a:srgbClr val="2E3348"/>
+                      </a:solidFill>
+                    </a:lnL>
+                    <a:lnR w="6350" cap="flat">
+                      <a:solidFill>
+                        <a:srgbClr val="2E3348"/>
+                      </a:solidFill>
+                    </a:lnR>
+                    <a:lnT w="6350" cap="flat">
+                      <a:solidFill>
+                        <a:srgbClr val="2E3348"/>
+                      </a:solidFill>
+                    </a:lnT>
+                    <a:lnB w="6350" cap="flat">
+                      <a:solidFill>
+                        <a:srgbClr val="2E3348"/>
+                      </a:solidFill>
+                    </a:lnB>
+                  </a:tcPr>
+                </a:tc>
+              </a:tr>
+              <a:tr h="420624">
+                <a:tc>
+                  <a:txBody>
+                    <a:bodyPr wrap="square"/>
+                    <a:lstStyle/>
+                    <a:p>
+                      <a:pPr algn="l"/>
+                      <a:r>
+                        <a:rPr sz="800" b="0">
+                          <a:solidFill>
+                            <a:srgbClr val="E2E8F0"/>
+                          </a:solidFill>
+                        </a:rPr>
+                        <a:t>Fundamentals PM</a:t>
+                      </a:r>
+                    </a:p>
+                  </a:txBody>
+                  <a:tcPr>
+                    <a:solidFill>
+                      <a:srgbClr val="0F1117"/>
+                    </a:solidFill>
+                    <a:lnL w="6350" cap="flat">
+                      <a:solidFill>
+                        <a:srgbClr val="2E3348"/>
+                      </a:solidFill>
+                    </a:lnL>
+                    <a:lnR w="6350" cap="flat">
+                      <a:solidFill>
+                        <a:srgbClr val="2E3348"/>
+                      </a:solidFill>
+                    </a:lnR>
+                    <a:lnT w="6350" cap="flat">
+                      <a:solidFill>
+                        <a:srgbClr val="2E3348"/>
+                      </a:solidFill>
+                    </a:lnT>
+                    <a:lnB w="6350" cap="flat">
+                      <a:solidFill>
+                        <a:srgbClr val="2E3348"/>
+                      </a:solidFill>
+                    </a:lnB>
+                  </a:tcPr>
+                </a:tc>
+                <a:tc>
+                  <a:txBody>
+                    <a:bodyPr wrap="none"/>
+                    <a:lstStyle/>
+                    <a:p>
+                      <a:pPr algn="l"/>
+                      <a:r>
+                        <a:rPr sz="800" b="0">
+                          <a:solidFill>
+                            <a:srgbClr val="E2E8F0"/>
+                          </a:solidFill>
+                        </a:rPr>
+                        <a:t>Tue 30 Jun 2026  04:00 PM  →  07:00 PM</a:t>
+                      </a:r>
+                    </a:p>
+                  </a:txBody>
+                  <a:tcPr>
+                    <a:solidFill>
+                      <a:srgbClr val="0F1117"/>
+                    </a:solidFill>
+                    <a:lnL w="6350" cap="flat">
+                      <a:solidFill>
+                        <a:srgbClr val="2E3348"/>
+                      </a:solidFill>
+                    </a:lnL>
+                    <a:lnR w="6350" cap="flat">
+                      <a:solidFill>
+                        <a:srgbClr val="2E3348"/>
+                      </a:solidFill>
+                    </a:lnR>
+                    <a:lnT w="6350" cap="flat">
+                      <a:solidFill>
+                        <a:srgbClr val="2E3348"/>
+                      </a:solidFill>
+                    </a:lnT>
+                    <a:lnB w="6350" cap="flat">
+                      <a:solidFill>
+                        <a:srgbClr val="2E3348"/>
+                      </a:solidFill>
+                    </a:lnB>
+                  </a:tcPr>
+                </a:tc>
+                <a:tc>
+                  <a:txBody>
+                    <a:bodyPr wrap="none"/>
+                    <a:lstStyle/>
+                    <a:p>
+                      <a:pPr algn="l"/>
+                      <a:r>
+                        <a:rPr sz="800" b="0">
+                          <a:solidFill>
+                            <a:srgbClr val="E2E8F0"/>
+                          </a:solidFill>
+                        </a:rPr>
+                        <a:t>Wed 01 Jul 2026  11:00 AM</a:t>
+                      </a:r>
+                    </a:p>
+                  </a:txBody>
+                  <a:tcPr>
+                    <a:solidFill>
+                      <a:srgbClr val="0F1117"/>
+                    </a:solidFill>
+                    <a:lnL w="6350" cap="flat">
+                      <a:solidFill>
+                        <a:srgbClr val="2E3348"/>
+                      </a:solidFill>
+                    </a:lnL>
+                    <a:lnR w="6350" cap="flat">
+                      <a:solidFill>
+                        <a:srgbClr val="2E3348"/>
+                      </a:solidFill>
+                    </a:lnR>
+                    <a:lnT w="6350" cap="flat">
+                      <a:solidFill>
+                        <a:srgbClr val="2E3348"/>
+                      </a:solidFill>
+                    </a:lnT>
+                    <a:lnB w="6350" cap="flat">
+                      <a:solidFill>
+                        <a:srgbClr val="2E3348"/>
+                      </a:solidFill>
+                    </a:lnB>
+                  </a:tcPr>
+                </a:tc>
+                <a:tc>
+                  <a:txBody>
+                    <a:bodyPr wrap="none"/>
+                    <a:lstStyle/>
+                    <a:p>
+                      <a:pPr algn="l"/>
+                      <a:r>
+                        <a:rPr sz="800" b="0">
+                          <a:solidFill>
+                            <a:srgbClr val="E2E8F0"/>
+                          </a:solidFill>
+                        </a:rPr>
+                        <a:t>Wed 01 Jul 2026  09:00 AM</a:t>
+                      </a:r>
+                    </a:p>
+                  </a:txBody>
+                  <a:tcPr>
+                    <a:solidFill>
+                      <a:srgbClr val="0F1117"/>
+                    </a:solidFill>
+                    <a:lnL w="6350" cap="flat">
+                      <a:solidFill>
+                        <a:srgbClr val="2E3348"/>
+                      </a:solidFill>
+                    </a:lnL>
+                    <a:lnR w="6350" cap="flat">
+                      <a:solidFill>
+                        <a:srgbClr val="2E3348"/>
+                      </a:solidFill>
+                    </a:lnR>
+                    <a:lnT w="6350" cap="flat">
+                      <a:solidFill>
+                        <a:srgbClr val="2E3348"/>
+                      </a:solidFill>
+                    </a:lnT>
+                    <a:lnB w="6350" cap="flat">
+                      <a:solidFill>
+                        <a:srgbClr val="2E3348"/>
+                      </a:solidFill>
+                    </a:lnB>
+                  </a:tcPr>
+                </a:tc>
+                <a:tc>
+                  <a:txBody>
+                    <a:bodyPr wrap="none"/>
+                    <a:lstStyle/>
+                    <a:p>
+                      <a:pPr algn="l"/>
+                      <a:r>
+                        <a:rPr sz="800" b="0">
+                          <a:solidFill>
+                            <a:srgbClr val="E2E8F0"/>
+                          </a:solidFill>
+                        </a:rPr>
+                        <a:t>Wed 01 Jul 2026  07:00 AM</a:t>
+                      </a:r>
+                    </a:p>
+                  </a:txBody>
+                  <a:tcPr>
+                    <a:solidFill>
+                      <a:srgbClr val="0F1117"/>
+                    </a:solidFill>
+                    <a:lnL w="6350" cap="flat">
+                      <a:solidFill>
+                        <a:srgbClr val="2E3348"/>
+                      </a:solidFill>
+                    </a:lnL>
+                    <a:lnR w="6350" cap="flat">
+                      <a:solidFill>
+                        <a:srgbClr val="2E3348"/>
+                      </a:solidFill>
+                    </a:lnR>
+                    <a:lnT w="6350" cap="flat">
+                      <a:solidFill>
+                        <a:srgbClr val="2E3348"/>
+                      </a:solidFill>
+                    </a:lnT>
+                    <a:lnB w="6350" cap="flat">
+                      <a:solidFill>
+                        <a:srgbClr val="2E3348"/>
+                      </a:solidFill>
+                    </a:lnB>
+                  </a:tcPr>
+                </a:tc>
+                <a:tc>
+                  <a:txBody>
+                    <a:bodyPr wrap="square"/>
+                    <a:lstStyle/>
+                    <a:p>
+                      <a:pPr algn="l"/>
+                      <a:r>
+                        <a:rPr sz="700" b="0">
+                          <a:solidFill>
+                            <a:srgbClr val="E2E8F0"/>
+                          </a:solidFill>
+                        </a:rPr>
+                        <a:t>https://events.sumologic.com/fundamentalspm06302026-event-training</a:t>
+                      </a:r>
+                    </a:p>
+                  </a:txBody>
+                  <a:tcPr>
+                    <a:solidFill>
+                      <a:srgbClr val="0F1117"/>
+                    </a:solidFill>
+                    <a:lnL w="6350" cap="flat">
+                      <a:solidFill>
+                        <a:srgbClr val="2E3348"/>
+                      </a:solidFill>
+                    </a:lnL>
+                    <a:lnR w="6350" cap="flat">
+                      <a:solidFill>
+                        <a:srgbClr val="2E3348"/>
+                      </a:solidFill>
+                    </a:lnR>
+                    <a:lnT w="6350" cap="flat">
+                      <a:solidFill>
+                        <a:srgbClr val="2E3348"/>
+                      </a:solidFill>
+                    </a:lnT>
+                    <a:lnB w="6350" cap="flat">
+                      <a:solidFill>
+                        <a:srgbClr val="2E3348"/>
+                      </a:solidFill>
+                    </a:lnB>
+                  </a:tcPr>
+                </a:tc>
+              </a:tr>
+              <a:tr h="420624">
+                <a:tc>
+                  <a:txBody>
+                    <a:bodyPr wrap="square"/>
+                    <a:lstStyle/>
+                    <a:p>
+                      <a:pPr algn="l"/>
+                      <a:r>
+                        <a:rPr sz="800" b="0">
+                          <a:solidFill>
+                            <a:srgbClr val="E2E8F0"/>
+                          </a:solidFill>
+                        </a:rPr>
+                        <a:t>Search Mastery AM</a:t>
+                      </a:r>
+                    </a:p>
+                  </a:txBody>
+                  <a:tcPr>
+                    <a:solidFill>
+                      <a:srgbClr val="1A1D27"/>
+                    </a:solidFill>
+                    <a:lnL w="6350" cap="flat">
+                      <a:solidFill>
+                        <a:srgbClr val="2E3348"/>
+                      </a:solidFill>
+                    </a:lnL>
+                    <a:lnR w="6350" cap="flat">
+                      <a:solidFill>
+                        <a:srgbClr val="2E3348"/>
+                      </a:solidFill>
+                    </a:lnR>
+                    <a:lnT w="6350" cap="flat">
+                      <a:solidFill>
+                        <a:srgbClr val="2E3348"/>
+                      </a:solidFill>
+                    </a:lnT>
+                    <a:lnB w="6350" cap="flat">
+                      <a:solidFill>
+                        <a:srgbClr val="2E3348"/>
+                      </a:solidFill>
+                    </a:lnB>
+                  </a:tcPr>
+                </a:tc>
+                <a:tc>
+                  <a:txBody>
+                    <a:bodyPr wrap="none"/>
+                    <a:lstStyle/>
+                    <a:p>
+                      <a:pPr algn="l"/>
+                      <a:r>
+                        <a:rPr sz="800" b="0">
+                          <a:solidFill>
+                            <a:srgbClr val="E2E8F0"/>
+                          </a:solidFill>
+                        </a:rPr>
+                        <a:t>Wed 01 Jul 2026  07:00 AM  →  10:00 AM</a:t>
+                      </a:r>
+                    </a:p>
+                  </a:txBody>
+                  <a:tcPr>
+                    <a:solidFill>
+                      <a:srgbClr val="1A1D27"/>
+                    </a:solidFill>
+                    <a:lnL w="6350" cap="flat">
+                      <a:solidFill>
+                        <a:srgbClr val="2E3348"/>
+                      </a:solidFill>
+                    </a:lnL>
+                    <a:lnR w="6350" cap="flat">
+                      <a:solidFill>
+                        <a:srgbClr val="2E3348"/>
+                      </a:solidFill>
+                    </a:lnR>
+                    <a:lnT w="6350" cap="flat">
+                      <a:solidFill>
+                        <a:srgbClr val="2E3348"/>
+                      </a:solidFill>
+                    </a:lnT>
+                    <a:lnB w="6350" cap="flat">
+                      <a:solidFill>
+                        <a:srgbClr val="2E3348"/>
+                      </a:solidFill>
+                    </a:lnB>
+                  </a:tcPr>
+                </a:tc>
+                <a:tc>
+                  <a:txBody>
+                    <a:bodyPr wrap="none"/>
+                    <a:lstStyle/>
+                    <a:p>
+                      <a:pPr algn="l"/>
+                      <a:r>
+                        <a:rPr sz="800" b="0">
+                          <a:solidFill>
+                            <a:srgbClr val="E2E8F0"/>
+                          </a:solidFill>
+                        </a:rPr>
+                        <a:t>Thu 02 Jul 2026  02:00 AM</a:t>
+                      </a:r>
+                    </a:p>
+                  </a:txBody>
+                  <a:tcPr>
+                    <a:solidFill>
+                      <a:srgbClr val="1A1D27"/>
+                    </a:solidFill>
+                    <a:lnL w="6350" cap="flat">
+                      <a:solidFill>
+                        <a:srgbClr val="2E3348"/>
+                      </a:solidFill>
+                    </a:lnL>
+                    <a:lnR w="6350" cap="flat">
+                      <a:solidFill>
+                        <a:srgbClr val="2E3348"/>
+                      </a:solidFill>
+                    </a:lnR>
+                    <a:lnT w="6350" cap="flat">
+                      <a:solidFill>
+                        <a:srgbClr val="2E3348"/>
+                      </a:solidFill>
+                    </a:lnT>
+                    <a:lnB w="6350" cap="flat">
+                      <a:solidFill>
+                        <a:srgbClr val="2E3348"/>
+                      </a:solidFill>
+                    </a:lnB>
+                  </a:tcPr>
+                </a:tc>
+                <a:tc>
+                  <a:txBody>
+                    <a:bodyPr wrap="none"/>
+                    <a:lstStyle/>
+                    <a:p>
+                      <a:pPr algn="l"/>
+                      <a:r>
+                        <a:rPr sz="800" b="0">
+                          <a:solidFill>
+                            <a:srgbClr val="E2E8F0"/>
+                          </a:solidFill>
+                        </a:rPr>
+                        <a:t>Thu 02 Jul 2026  12:00 AM</a:t>
+                      </a:r>
+                    </a:p>
+                  </a:txBody>
+                  <a:tcPr>
+                    <a:solidFill>
+                      <a:srgbClr val="1A1D27"/>
+                    </a:solidFill>
+                    <a:lnL w="6350" cap="flat">
+                      <a:solidFill>
+                        <a:srgbClr val="2E3348"/>
+                      </a:solidFill>
+                    </a:lnL>
+                    <a:lnR w="6350" cap="flat">
+                      <a:solidFill>
+                        <a:srgbClr val="2E3348"/>
+                      </a:solidFill>
+                    </a:lnR>
+                    <a:lnT w="6350" cap="flat">
+                      <a:solidFill>
+                        <a:srgbClr val="2E3348"/>
+                      </a:solidFill>
+                    </a:lnT>
+                    <a:lnB w="6350" cap="flat">
+                      <a:solidFill>
+                        <a:srgbClr val="2E3348"/>
+                      </a:solidFill>
+                    </a:lnB>
+                  </a:tcPr>
+                </a:tc>
+                <a:tc>
+                  <a:txBody>
+                    <a:bodyPr wrap="none"/>
+                    <a:lstStyle/>
+                    <a:p>
+                      <a:pPr algn="l"/>
+                      <a:r>
+                        <a:rPr sz="800" b="0">
+                          <a:solidFill>
+                            <a:srgbClr val="E2E8F0"/>
+                          </a:solidFill>
+                        </a:rPr>
+                        <a:t>Wed 01 Jul 2026  10:00 PM</a:t>
+                      </a:r>
+                    </a:p>
+                  </a:txBody>
+                  <a:tcPr>
+                    <a:solidFill>
+                      <a:srgbClr val="1A1D27"/>
+                    </a:solidFill>
+                    <a:lnL w="6350" cap="flat">
+                      <a:solidFill>
+                        <a:srgbClr val="2E3348"/>
+                      </a:solidFill>
+                    </a:lnL>
+                    <a:lnR w="6350" cap="flat">
+                      <a:solidFill>
+                        <a:srgbClr val="2E3348"/>
+                      </a:solidFill>
+                    </a:lnR>
+                    <a:lnT w="6350" cap="flat">
+                      <a:solidFill>
+                        <a:srgbClr val="2E3348"/>
+                      </a:solidFill>
+                    </a:lnT>
+                    <a:lnB w="6350" cap="flat">
+                      <a:solidFill>
+                        <a:srgbClr val="2E3348"/>
+                      </a:solidFill>
+                    </a:lnB>
+                  </a:tcPr>
+                </a:tc>
+                <a:tc>
+                  <a:txBody>
+                    <a:bodyPr wrap="square"/>
+                    <a:lstStyle/>
+                    <a:p>
+                      <a:pPr algn="l"/>
+                      <a:r>
+                        <a:rPr sz="700" b="0">
+                          <a:solidFill>
+                            <a:srgbClr val="E2E8F0"/>
+                          </a:solidFill>
+                        </a:rPr>
+                        <a:t>https://events.sumologic.com/searchmasteryam07012026-event-training</a:t>
+                      </a:r>
+                    </a:p>
+                  </a:txBody>
+                  <a:tcPr>
+                    <a:solidFill>
+                      <a:srgbClr val="1A1D27"/>
+                    </a:solidFill>
+                    <a:lnL w="6350" cap="flat">
+                      <a:solidFill>
+                        <a:srgbClr val="2E3348"/>
+                      </a:solidFill>
+                    </a:lnL>
+                    <a:lnR w="6350" cap="flat">
+                      <a:solidFill>
+                        <a:srgbClr val="2E3348"/>
+                      </a:solidFill>
+                    </a:lnR>
+                    <a:lnT w="6350" cap="flat">
+                      <a:solidFill>
+                        <a:srgbClr val="2E3348"/>
+                      </a:solidFill>
+                    </a:lnT>
+                    <a:lnB w="6350" cap="flat">
+                      <a:solidFill>
+                        <a:srgbClr val="2E3348"/>
+                      </a:solidFill>
+                    </a:lnB>
+                  </a:tcPr>
+                </a:tc>
+              </a:tr>
+              <a:tr h="420624">
+                <a:tc>
+                  <a:txBody>
+                    <a:bodyPr wrap="square"/>
+                    <a:lstStyle/>
+                    <a:p>
+                      <a:pPr algn="l"/>
+                      <a:r>
+                        <a:rPr sz="800" b="0">
+                          <a:solidFill>
+                            <a:srgbClr val="E2E8F0"/>
+                          </a:solidFill>
+                        </a:rPr>
+                        <a:t>Search Mastery PM</a:t>
+                      </a:r>
+                    </a:p>
+                  </a:txBody>
+                  <a:tcPr>
+                    <a:solidFill>
+                      <a:srgbClr val="0F1117"/>
+                    </a:solidFill>
+                    <a:lnL w="6350" cap="flat">
+                      <a:solidFill>
+                        <a:srgbClr val="2E3348"/>
+                      </a:solidFill>
+                    </a:lnL>
+                    <a:lnR w="6350" cap="flat">
+                      <a:solidFill>
+                        <a:srgbClr val="2E3348"/>
+                      </a:solidFill>
+                    </a:lnR>
+                    <a:lnT w="6350" cap="flat">
+                      <a:solidFill>
+                        <a:srgbClr val="2E3348"/>
+                      </a:solidFill>
+                    </a:lnT>
+                    <a:lnB w="6350" cap="flat">
+                      <a:solidFill>
+                        <a:srgbClr val="2E3348"/>
+                      </a:solidFill>
+                    </a:lnB>
+                  </a:tcPr>
+                </a:tc>
+                <a:tc>
+                  <a:txBody>
+                    <a:bodyPr wrap="none"/>
+                    <a:lstStyle/>
+                    <a:p>
+                      <a:pPr algn="l"/>
+                      <a:r>
+                        <a:rPr sz="800" b="0">
+                          <a:solidFill>
+                            <a:srgbClr val="E2E8F0"/>
+                          </a:solidFill>
+                        </a:rPr>
+                        <a:t>Wed 01 Jul 2026  04:00 PM  →  07:00 PM</a:t>
+                      </a:r>
+                    </a:p>
+                  </a:txBody>
+                  <a:tcPr>
+                    <a:solidFill>
+                      <a:srgbClr val="0F1117"/>
+                    </a:solidFill>
+                    <a:lnL w="6350" cap="flat">
+                      <a:solidFill>
+                        <a:srgbClr val="2E3348"/>
+                      </a:solidFill>
+                    </a:lnL>
+                    <a:lnR w="6350" cap="flat">
+                      <a:solidFill>
+                        <a:srgbClr val="2E3348"/>
+                      </a:solidFill>
+                    </a:lnR>
+                    <a:lnT w="6350" cap="flat">
+                      <a:solidFill>
+                        <a:srgbClr val="2E3348"/>
+                      </a:solidFill>
+                    </a:lnT>
+                    <a:lnB w="6350" cap="flat">
+                      <a:solidFill>
+                        <a:srgbClr val="2E3348"/>
+                      </a:solidFill>
+                    </a:lnB>
+                  </a:tcPr>
+                </a:tc>
+                <a:tc>
+                  <a:txBody>
+                    <a:bodyPr wrap="none"/>
+                    <a:lstStyle/>
+                    <a:p>
+                      <a:pPr algn="l"/>
+                      <a:r>
+                        <a:rPr sz="800" b="0">
+                          <a:solidFill>
+                            <a:srgbClr val="E2E8F0"/>
+                          </a:solidFill>
+                        </a:rPr>
+                        <a:t>Thu 02 Jul 2026  11:00 AM</a:t>
+                      </a:r>
+                    </a:p>
+                  </a:txBody>
+                  <a:tcPr>
+                    <a:solidFill>
+                      <a:srgbClr val="0F1117"/>
+                    </a:solidFill>
+                    <a:lnL w="6350" cap="flat">
+                      <a:solidFill>
+                        <a:srgbClr val="2E3348"/>
+                      </a:solidFill>
+                    </a:lnL>
+                    <a:lnR w="6350" cap="flat">
+                      <a:solidFill>
+                        <a:srgbClr val="2E3348"/>
+                      </a:solidFill>
+                    </a:lnR>
+                    <a:lnT w="6350" cap="flat">
+                      <a:solidFill>
+                        <a:srgbClr val="2E3348"/>
+                      </a:solidFill>
+                    </a:lnT>
+                    <a:lnB w="6350" cap="flat">
+                      <a:solidFill>
+                        <a:srgbClr val="2E3348"/>
+                      </a:solidFill>
+                    </a:lnB>
+                  </a:tcPr>
+                </a:tc>
+                <a:tc>
+                  <a:txBody>
+                    <a:bodyPr wrap="none"/>
+                    <a:lstStyle/>
+                    <a:p>
+                      <a:pPr algn="l"/>
+                      <a:r>
+                        <a:rPr sz="800" b="0">
+                          <a:solidFill>
+                            <a:srgbClr val="E2E8F0"/>
+                          </a:solidFill>
+                        </a:rPr>
+                        <a:t>Thu 02 Jul 2026  09:00 AM</a:t>
+                      </a:r>
+                    </a:p>
+                  </a:txBody>
+                  <a:tcPr>
+                    <a:solidFill>
+                      <a:srgbClr val="0F1117"/>
+                    </a:solidFill>
+                    <a:lnL w="6350" cap="flat">
+                      <a:solidFill>
+                        <a:srgbClr val="2E3348"/>
+                      </a:solidFill>
+                    </a:lnL>
+                    <a:lnR w="6350" cap="flat">
+                      <a:solidFill>
+                        <a:srgbClr val="2E3348"/>
+                      </a:solidFill>
+                    </a:lnR>
+                    <a:lnT w="6350" cap="flat">
+                      <a:solidFill>
+                        <a:srgbClr val="2E3348"/>
+                      </a:solidFill>
+                    </a:lnT>
+                    <a:lnB w="6350" cap="flat">
+                      <a:solidFill>
+                        <a:srgbClr val="2E3348"/>
+                      </a:solidFill>
+                    </a:lnB>
+                  </a:tcPr>
+                </a:tc>
+                <a:tc>
+                  <a:txBody>
+                    <a:bodyPr wrap="none"/>
+                    <a:lstStyle/>
+                    <a:p>
+                      <a:pPr algn="l"/>
+                      <a:r>
+                        <a:rPr sz="800" b="0">
+                          <a:solidFill>
+                            <a:srgbClr val="E2E8F0"/>
+                          </a:solidFill>
+                        </a:rPr>
+                        <a:t>Thu 02 Jul 2026  07:00 AM</a:t>
+                      </a:r>
+                    </a:p>
+                  </a:txBody>
+                  <a:tcPr>
+                    <a:solidFill>
+                      <a:srgbClr val="0F1117"/>
+                    </a:solidFill>
+                    <a:lnL w="6350" cap="flat">
+                      <a:solidFill>
+                        <a:srgbClr val="2E3348"/>
+                      </a:solidFill>
+                    </a:lnL>
+                    <a:lnR w="6350" cap="flat">
+                      <a:solidFill>
+                        <a:srgbClr val="2E3348"/>
+                      </a:solidFill>
+                    </a:lnR>
+                    <a:lnT w="6350" cap="flat">
+                      <a:solidFill>
+                        <a:srgbClr val="2E3348"/>
+                      </a:solidFill>
+                    </a:lnT>
+                    <a:lnB w="6350" cap="flat">
+                      <a:solidFill>
+                        <a:srgbClr val="2E3348"/>
+                      </a:solidFill>
+                    </a:lnB>
+                  </a:tcPr>
+                </a:tc>
+                <a:tc>
+                  <a:txBody>
+                    <a:bodyPr wrap="square"/>
+                    <a:lstStyle/>
+                    <a:p>
+                      <a:pPr algn="l"/>
+                      <a:r>
+                        <a:rPr sz="700" b="0">
+                          <a:solidFill>
+                            <a:srgbClr val="E2E8F0"/>
+                          </a:solidFill>
+                        </a:rPr>
+                        <a:t>https://events.sumologic.com/searchmasterypm07012026-event-training</a:t>
+                      </a:r>
+                    </a:p>
+                  </a:txBody>
+                  <a:tcPr>
+                    <a:solidFill>
+                      <a:srgbClr val="0F1117"/>
+                    </a:solidFill>
+                    <a:lnL w="6350" cap="flat">
+                      <a:solidFill>
+                        <a:srgbClr val="2E3348"/>
+                      </a:solidFill>
+                    </a:lnL>
+                    <a:lnR w="6350" cap="flat">
+                      <a:solidFill>
+                        <a:srgbClr val="2E3348"/>
+                      </a:solidFill>
+                    </a:lnR>
+                    <a:lnT w="6350" cap="flat">
+                      <a:solidFill>
+                        <a:srgbClr val="2E3348"/>
+                      </a:solidFill>
+                    </a:lnT>
+                    <a:lnB w="6350" cap="flat">
+                      <a:solidFill>
+                        <a:srgbClr val="2E3348"/>
+                      </a:solidFill>
+                    </a:lnB>
+                  </a:tcPr>
+                </a:tc>
+              </a:tr>
+              <a:tr h="420624">
+                <a:tc>
+                  <a:txBody>
+                    <a:bodyPr wrap="square"/>
+                    <a:lstStyle/>
+                    <a:p>
+                      <a:pPr algn="l"/>
+                      <a:r>
+                        <a:rPr sz="800" b="0">
+                          <a:solidFill>
+                            <a:srgbClr val="E2E8F0"/>
+                          </a:solidFill>
+                        </a:rPr>
+                        <a:t>Best Practice for Query Efficiency AM</a:t>
+                      </a:r>
+                    </a:p>
+                  </a:txBody>
+                  <a:tcPr>
+                    <a:solidFill>
+                      <a:srgbClr val="1A1D27"/>
+                    </a:solidFill>
+                    <a:lnL w="6350" cap="flat">
+                      <a:solidFill>
+                        <a:srgbClr val="2E3348"/>
+                      </a:solidFill>
+                    </a:lnL>
+                    <a:lnR w="6350" cap="flat">
+                      <a:solidFill>
+                        <a:srgbClr val="2E3348"/>
+                      </a:solidFill>
+                    </a:lnR>
+                    <a:lnT w="6350" cap="flat">
+                      <a:solidFill>
+                        <a:srgbClr val="2E3348"/>
+                      </a:solidFill>
+                    </a:lnT>
+                    <a:lnB w="6350" cap="flat">
+                      <a:solidFill>
+                        <a:srgbClr val="2E3348"/>
+                      </a:solidFill>
+                    </a:lnB>
+                  </a:tcPr>
+                </a:tc>
+                <a:tc>
+                  <a:txBody>
+                    <a:bodyPr wrap="none"/>
+                    <a:lstStyle/>
+                    <a:p>
+                      <a:pPr algn="l"/>
+                      <a:r>
+                        <a:rPr sz="800" b="0">
+                          <a:solidFill>
+                            <a:srgbClr val="E2E8F0"/>
+                          </a:solidFill>
+                        </a:rPr>
+                        <a:t>Thu 02 Jul 2026  07:00 AM  →  08:30 AM</a:t>
+                      </a:r>
+                    </a:p>
+                  </a:txBody>
+                  <a:tcPr>
+                    <a:solidFill>
+                      <a:srgbClr val="1A1D27"/>
+                    </a:solidFill>
+                    <a:lnL w="6350" cap="flat">
+                      <a:solidFill>
+                        <a:srgbClr val="2E3348"/>
+                      </a:solidFill>
+                    </a:lnL>
+                    <a:lnR w="6350" cap="flat">
+                      <a:solidFill>
+                        <a:srgbClr val="2E3348"/>
+                      </a:solidFill>
+                    </a:lnR>
+                    <a:lnT w="6350" cap="flat">
+                      <a:solidFill>
+                        <a:srgbClr val="2E3348"/>
+                      </a:solidFill>
+                    </a:lnT>
+                    <a:lnB w="6350" cap="flat">
+                      <a:solidFill>
+                        <a:srgbClr val="2E3348"/>
+                      </a:solidFill>
+                    </a:lnB>
+                  </a:tcPr>
+                </a:tc>
+                <a:tc>
+                  <a:txBody>
+                    <a:bodyPr wrap="none"/>
+                    <a:lstStyle/>
+                    <a:p>
+                      <a:pPr algn="l"/>
+                      <a:r>
+                        <a:rPr sz="800" b="0">
+                          <a:solidFill>
+                            <a:srgbClr val="E2E8F0"/>
+                          </a:solidFill>
+                        </a:rPr>
+                        <a:t>Fri 03 Jul 2026  02:00 AM</a:t>
+                      </a:r>
+                    </a:p>
+                  </a:txBody>
+                  <a:tcPr>
+                    <a:solidFill>
+                      <a:srgbClr val="1A1D27"/>
+                    </a:solidFill>
+                    <a:lnL w="6350" cap="flat">
+                      <a:solidFill>
+                        <a:srgbClr val="2E3348"/>
+                      </a:solidFill>
+                    </a:lnL>
+                    <a:lnR w="6350" cap="flat">
+                      <a:solidFill>
+                        <a:srgbClr val="2E3348"/>
+                      </a:solidFill>
+                    </a:lnR>
+                    <a:lnT w="6350" cap="flat">
+                      <a:solidFill>
+                        <a:srgbClr val="2E3348"/>
+                      </a:solidFill>
+                    </a:lnT>
+                    <a:lnB w="6350" cap="flat">
+                      <a:solidFill>
+                        <a:srgbClr val="2E3348"/>
+                      </a:solidFill>
+                    </a:lnB>
+                  </a:tcPr>
+                </a:tc>
+                <a:tc>
+                  <a:txBody>
+                    <a:bodyPr wrap="none"/>
+                    <a:lstStyle/>
+                    <a:p>
+                      <a:pPr algn="l"/>
+                      <a:r>
+                        <a:rPr sz="800" b="0">
+                          <a:solidFill>
+                            <a:srgbClr val="E2E8F0"/>
+                          </a:solidFill>
+                        </a:rPr>
+                        <a:t>Fri 03 Jul 2026  12:00 AM</a:t>
+                      </a:r>
+                    </a:p>
+                  </a:txBody>
+                  <a:tcPr>
+                    <a:solidFill>
+                      <a:srgbClr val="1A1D27"/>
+                    </a:solidFill>
+                    <a:lnL w="6350" cap="flat">
+                      <a:solidFill>
+                        <a:srgbClr val="2E3348"/>
+                      </a:solidFill>
+                    </a:lnL>
+                    <a:lnR w="6350" cap="flat">
+                      <a:solidFill>
+                        <a:srgbClr val="2E3348"/>
+                      </a:solidFill>
+                    </a:lnR>
+                    <a:lnT w="6350" cap="flat">
+                      <a:solidFill>
+                        <a:srgbClr val="2E3348"/>
+                      </a:solidFill>
+                    </a:lnT>
+                    <a:lnB w="6350" cap="flat">
+                      <a:solidFill>
+                        <a:srgbClr val="2E3348"/>
+                      </a:solidFill>
+                    </a:lnB>
+                  </a:tcPr>
+                </a:tc>
+                <a:tc>
+                  <a:txBody>
+                    <a:bodyPr wrap="none"/>
+                    <a:lstStyle/>
+                    <a:p>
+                      <a:pPr algn="l"/>
+                      <a:r>
+                        <a:rPr sz="800" b="0">
+                          <a:solidFill>
+                            <a:srgbClr val="E2E8F0"/>
+                          </a:solidFill>
+                        </a:rPr>
+                        <a:t>Thu 02 Jul 2026  10:00 PM</a:t>
+                      </a:r>
+                    </a:p>
+                  </a:txBody>
+                  <a:tcPr>
+                    <a:solidFill>
+                      <a:srgbClr val="1A1D27"/>
+                    </a:solidFill>
+                    <a:lnL w="6350" cap="flat">
+                      <a:solidFill>
+                        <a:srgbClr val="2E3348"/>
+                      </a:solidFill>
+                    </a:lnL>
+                    <a:lnR w="6350" cap="flat">
+                      <a:solidFill>
+                        <a:srgbClr val="2E3348"/>
+                      </a:solidFill>
+                    </a:lnR>
+                    <a:lnT w="6350" cap="flat">
+                      <a:solidFill>
+                        <a:srgbClr val="2E3348"/>
+                      </a:solidFill>
+                    </a:lnT>
+                    <a:lnB w="6350" cap="flat">
+                      <a:solidFill>
+                        <a:srgbClr val="2E3348"/>
+                      </a:solidFill>
+                    </a:lnB>
+                  </a:tcPr>
+                </a:tc>
+                <a:tc>
+                  <a:txBody>
+                    <a:bodyPr wrap="square"/>
+                    <a:lstStyle/>
+                    <a:p>
+                      <a:pPr algn="l"/>
+                      <a:r>
+                        <a:rPr sz="700" b="0">
+                          <a:solidFill>
+                            <a:srgbClr val="E2E8F0"/>
+                          </a:solidFill>
+                        </a:rPr>
+                        <a:t>https://events.sumologic.com/bp4qeam07022026-event-training</a:t>
+                      </a:r>
+                    </a:p>
+                  </a:txBody>
+                  <a:tcPr>
+                    <a:solidFill>
+                      <a:srgbClr val="1A1D27"/>
+                    </a:solidFill>
+                    <a:lnL w="6350" cap="flat">
+                      <a:solidFill>
+                        <a:srgbClr val="2E3348"/>
+                      </a:solidFill>
+                    </a:lnL>
+                    <a:lnR w="6350" cap="flat">
+                      <a:solidFill>
+                        <a:srgbClr val="2E3348"/>
+                      </a:solidFill>
+                    </a:lnR>
+                    <a:lnT w="6350" cap="flat">
+                      <a:solidFill>
+                        <a:srgbClr val="2E3348"/>
+                      </a:solidFill>
+                    </a:lnT>
+                    <a:lnB w="6350" cap="flat">
+                      <a:solidFill>
+                        <a:srgbClr val="2E3348"/>
+                      </a:solidFill>
+                    </a:lnB>
+                  </a:tcPr>
+                </a:tc>
+              </a:tr>
+              <a:tr h="420624">
+                <a:tc>
+                  <a:txBody>
+                    <a:bodyPr wrap="square"/>
+                    <a:lstStyle/>
+                    <a:p>
+                      <a:pPr algn="l"/>
+                      <a:r>
+                        <a:rPr sz="800" b="0">
+                          <a:solidFill>
+                            <a:srgbClr val="E2E8F0"/>
+                          </a:solidFill>
+                        </a:rPr>
+                        <a:t>Best Practice for Query Efficiency PM</a:t>
+                      </a:r>
+                    </a:p>
+                  </a:txBody>
+                  <a:tcPr>
+                    <a:solidFill>
+                      <a:srgbClr val="0F1117"/>
+                    </a:solidFill>
+                    <a:lnL w="6350" cap="flat">
+                      <a:solidFill>
+                        <a:srgbClr val="2E3348"/>
+                      </a:solidFill>
+                    </a:lnL>
+                    <a:lnR w="6350" cap="flat">
+                      <a:solidFill>
+                        <a:srgbClr val="2E3348"/>
+                      </a:solidFill>
+                    </a:lnR>
+                    <a:lnT w="6350" cap="flat">
+                      <a:solidFill>
+                        <a:srgbClr val="2E3348"/>
+                      </a:solidFill>
+                    </a:lnT>
+                    <a:lnB w="6350" cap="flat">
+                      <a:solidFill>
+                        <a:srgbClr val="2E3348"/>
+                      </a:solidFill>
+                    </a:lnB>
+                  </a:tcPr>
+                </a:tc>
+                <a:tc>
+                  <a:txBody>
+                    <a:bodyPr wrap="none"/>
+                    <a:lstStyle/>
+                    <a:p>
+                      <a:pPr algn="l"/>
+                      <a:r>
+                        <a:rPr sz="800" b="0">
+                          <a:solidFill>
+                            <a:srgbClr val="E2E8F0"/>
+                          </a:solidFill>
+                        </a:rPr>
+                        <a:t>Thu 02 Jul 2026  04:00 PM  →  05:25 PM</a:t>
+                      </a:r>
+                    </a:p>
+                  </a:txBody>
+                  <a:tcPr>
+                    <a:solidFill>
+                      <a:srgbClr val="0F1117"/>
+                    </a:solidFill>
+                    <a:lnL w="6350" cap="flat">
+                      <a:solidFill>
+                        <a:srgbClr val="2E3348"/>
+                      </a:solidFill>
+                    </a:lnL>
+                    <a:lnR w="6350" cap="flat">
+                      <a:solidFill>
+                        <a:srgbClr val="2E3348"/>
+                      </a:solidFill>
+                    </a:lnR>
+                    <a:lnT w="6350" cap="flat">
+                      <a:solidFill>
+                        <a:srgbClr val="2E3348"/>
+                      </a:solidFill>
+                    </a:lnT>
+                    <a:lnB w="6350" cap="flat">
+                      <a:solidFill>
+                        <a:srgbClr val="2E3348"/>
+                      </a:solidFill>
+                    </a:lnB>
+                  </a:tcPr>
+                </a:tc>
+                <a:tc>
+                  <a:txBody>
+                    <a:bodyPr wrap="none"/>
+                    <a:lstStyle/>
+                    <a:p>
+                      <a:pPr algn="l"/>
+                      <a:r>
+                        <a:rPr sz="800" b="0">
+                          <a:solidFill>
+                            <a:srgbClr val="E2E8F0"/>
+                          </a:solidFill>
+                        </a:rPr>
+                        <a:t>Fri 03 Jul 2026  11:00 AM</a:t>
+                      </a:r>
+                    </a:p>
+                  </a:txBody>
+                  <a:tcPr>
+                    <a:solidFill>
+                      <a:srgbClr val="0F1117"/>
+                    </a:solidFill>
+                    <a:lnL w="6350" cap="flat">
+                      <a:solidFill>
+                        <a:srgbClr val="2E3348"/>
+                      </a:solidFill>
+                    </a:lnL>
+                    <a:lnR w="6350" cap="flat">
+                      <a:solidFill>
+                        <a:srgbClr val="2E3348"/>
+                      </a:solidFill>
+                    </a:lnR>
+                    <a:lnT w="6350" cap="flat">
+                      <a:solidFill>
+                        <a:srgbClr val="2E3348"/>
+                      </a:solidFill>
+                    </a:lnT>
+                    <a:lnB w="6350" cap="flat">
+                      <a:solidFill>
+                        <a:srgbClr val="2E3348"/>
+                      </a:solidFill>
+                    </a:lnB>
+                  </a:tcPr>
+                </a:tc>
+                <a:tc>
+                  <a:txBody>
+                    <a:bodyPr wrap="none"/>
+                    <a:lstStyle/>
+                    <a:p>
+                      <a:pPr algn="l"/>
+                      <a:r>
+                        <a:rPr sz="800" b="0">
+                          <a:solidFill>
+                            <a:srgbClr val="E2E8F0"/>
+                          </a:solidFill>
+                        </a:rPr>
+                        <a:t>Fri 03 Jul 2026  09:00 AM</a:t>
+                      </a:r>
+                    </a:p>
+                  </a:txBody>
+                  <a:tcPr>
+                    <a:solidFill>
+                      <a:srgbClr val="0F1117"/>
+                    </a:solidFill>
+                    <a:lnL w="6350" cap="flat">
+                      <a:solidFill>
+                        <a:srgbClr val="2E3348"/>
+                      </a:solidFill>
+                    </a:lnL>
+                    <a:lnR w="6350" cap="flat">
+                      <a:solidFill>
+                        <a:srgbClr val="2E3348"/>
+                      </a:solidFill>
+                    </a:lnR>
+                    <a:lnT w="6350" cap="flat">
+                      <a:solidFill>
+                        <a:srgbClr val="2E3348"/>
+                      </a:solidFill>
+                    </a:lnT>
+                    <a:lnB w="6350" cap="flat">
+                      <a:solidFill>
+                        <a:srgbClr val="2E3348"/>
+                      </a:solidFill>
+                    </a:lnB>
+                  </a:tcPr>
+                </a:tc>
+                <a:tc>
+                  <a:txBody>
+                    <a:bodyPr wrap="none"/>
+                    <a:lstStyle/>
+                    <a:p>
+                      <a:pPr algn="l"/>
+                      <a:r>
+                        <a:rPr sz="800" b="0">
+                          <a:solidFill>
+                            <a:srgbClr val="E2E8F0"/>
+                          </a:solidFill>
+                        </a:rPr>
+                        <a:t>Fri 03 Jul 2026  07:00 AM</a:t>
+                      </a:r>
+                    </a:p>
+                  </a:txBody>
+                  <a:tcPr>
+                    <a:solidFill>
+                      <a:srgbClr val="0F1117"/>
+                    </a:solidFill>
+                    <a:lnL w="6350" cap="flat">
+                      <a:solidFill>
+                        <a:srgbClr val="2E3348"/>
+                      </a:solidFill>
+                    </a:lnL>
+                    <a:lnR w="6350" cap="flat">
+                      <a:solidFill>
+                        <a:srgbClr val="2E3348"/>
+                      </a:solidFill>
+                    </a:lnR>
+                    <a:lnT w="6350" cap="flat">
+                      <a:solidFill>
+                        <a:srgbClr val="2E3348"/>
+                      </a:solidFill>
+                    </a:lnT>
+                    <a:lnB w="6350" cap="flat">
+                      <a:solidFill>
+                        <a:srgbClr val="2E3348"/>
+                      </a:solidFill>
+                    </a:lnB>
+                  </a:tcPr>
+                </a:tc>
+                <a:tc>
+                  <a:txBody>
+                    <a:bodyPr wrap="square"/>
+                    <a:lstStyle/>
+                    <a:p>
+                      <a:pPr algn="l"/>
+                      <a:r>
+                        <a:rPr sz="700" b="0">
+                          <a:solidFill>
+                            <a:srgbClr val="E2E8F0"/>
+                          </a:solidFill>
+                        </a:rPr>
+                        <a:t>https://events.sumologic.com/bp4qepm07022026-event-training</a:t>
+                      </a:r>
+                    </a:p>
+                  </a:txBody>
+                  <a:tcPr>
+                    <a:solidFill>
+                      <a:srgbClr val="0F1117"/>
+                    </a:solidFill>
+                    <a:lnL w="6350" cap="flat">
+                      <a:solidFill>
+                        <a:srgbClr val="2E3348"/>
+                      </a:solidFill>
+                    </a:lnL>
+                    <a:lnR w="6350" cap="flat">
+                      <a:solidFill>
+                        <a:srgbClr val="2E3348"/>
+                      </a:solidFill>
+                    </a:lnR>
+                    <a:lnT w="6350" cap="flat">
+                      <a:solidFill>
+                        <a:srgbClr val="2E3348"/>
+                      </a:solidFill>
+                    </a:lnT>
+                    <a:lnB w="6350" cap="flat">
+                      <a:solidFill>
+                        <a:srgbClr val="2E3348"/>
+                      </a:solidFill>
+                    </a:lnB>
+                  </a:tcPr>
+                </a:tc>
+              </a:tr>
+              <a:tr h="420624">
+                <a:tc>
+                  <a:txBody>
+                    <a:bodyPr wrap="square"/>
+                    <a:lstStyle/>
+                    <a:p>
+                      <a:pPr algn="l"/>
+                      <a:r>
+                        <a:rPr sz="800" b="0">
+                          <a:solidFill>
+                            <a:srgbClr val="E2E8F0"/>
+                          </a:solidFill>
+                        </a:rPr>
+                        <a:t>Administration AM</a:t>
+                      </a:r>
+                    </a:p>
+                  </a:txBody>
+                  <a:tcPr>
+                    <a:solidFill>
+                      <a:srgbClr val="1A1D27"/>
+                    </a:solidFill>
+                    <a:lnL w="6350" cap="flat">
+                      <a:solidFill>
+                        <a:srgbClr val="2E3348"/>
+                      </a:solidFill>
+                    </a:lnL>
+                    <a:lnR w="6350" cap="flat">
+                      <a:solidFill>
+                        <a:srgbClr val="2E3348"/>
+                      </a:solidFill>
+                    </a:lnR>
+                    <a:lnT w="6350" cap="flat">
+                      <a:solidFill>
+                        <a:srgbClr val="2E3348"/>
+                      </a:solidFill>
+                    </a:lnT>
+                    <a:lnB w="6350" cap="flat">
+                      <a:solidFill>
+                        <a:srgbClr val="2E3348"/>
+                      </a:solidFill>
+                    </a:lnB>
+                  </a:tcPr>
+                </a:tc>
+                <a:tc>
+                  <a:txBody>
+                    <a:bodyPr wrap="none"/>
+                    <a:lstStyle/>
+                    <a:p>
+                      <a:pPr algn="l"/>
+                      <a:r>
+                        <a:rPr sz="800" b="0">
+                          <a:solidFill>
+                            <a:srgbClr val="E2E8F0"/>
+                          </a:solidFill>
+                        </a:rPr>
+                        <a:t>Tue 07 Jul 2026  07:00 AM  →  10:00 AM</a:t>
+                      </a:r>
+                    </a:p>
+                  </a:txBody>
+                  <a:tcPr>
+                    <a:solidFill>
+                      <a:srgbClr val="1A1D27"/>
+                    </a:solidFill>
+                    <a:lnL w="6350" cap="flat">
+                      <a:solidFill>
+                        <a:srgbClr val="2E3348"/>
+                      </a:solidFill>
+                    </a:lnL>
+                    <a:lnR w="6350" cap="flat">
+                      <a:solidFill>
+                        <a:srgbClr val="2E3348"/>
+                      </a:solidFill>
+                    </a:lnR>
+                    <a:lnT w="6350" cap="flat">
+                      <a:solidFill>
+                        <a:srgbClr val="2E3348"/>
+                      </a:solidFill>
+                    </a:lnT>
+                    <a:lnB w="6350" cap="flat">
+                      <a:solidFill>
+                        <a:srgbClr val="2E3348"/>
+                      </a:solidFill>
+                    </a:lnB>
+                  </a:tcPr>
+                </a:tc>
+                <a:tc>
+                  <a:txBody>
+                    <a:bodyPr wrap="none"/>
+                    <a:lstStyle/>
+                    <a:p>
+                      <a:pPr algn="l"/>
+                      <a:r>
+                        <a:rPr sz="800" b="0">
+                          <a:solidFill>
+                            <a:srgbClr val="E2E8F0"/>
+                          </a:solidFill>
+                        </a:rPr>
+                        <a:t>Wed 08 Jul 2026  02:00 AM</a:t>
+                      </a:r>
+                    </a:p>
+                  </a:txBody>
+                  <a:tcPr>
+                    <a:solidFill>
+                      <a:srgbClr val="1A1D27"/>
+                    </a:solidFill>
+                    <a:lnL w="6350" cap="flat">
+                      <a:solidFill>
+                        <a:srgbClr val="2E3348"/>
+                      </a:solidFill>
+                    </a:lnL>
+                    <a:lnR w="6350" cap="flat">
+                      <a:solidFill>
+                        <a:srgbClr val="2E3348"/>
+                      </a:solidFill>
+                    </a:lnR>
+                    <a:lnT w="6350" cap="flat">
+                      <a:solidFill>
+                        <a:srgbClr val="2E3348"/>
+                      </a:solidFill>
+                    </a:lnT>
+                    <a:lnB w="6350" cap="flat">
+                      <a:solidFill>
+                        <a:srgbClr val="2E3348"/>
+                      </a:solidFill>
+                    </a:lnB>
+                  </a:tcPr>
+                </a:tc>
+                <a:tc>
+                  <a:txBody>
+                    <a:bodyPr wrap="none"/>
+                    <a:lstStyle/>
+                    <a:p>
+                      <a:pPr algn="l"/>
+                      <a:r>
+                        <a:rPr sz="800" b="0">
+                          <a:solidFill>
+                            <a:srgbClr val="E2E8F0"/>
+                          </a:solidFill>
+                        </a:rPr>
+                        <a:t>Wed 08 Jul 2026  12:00 AM</a:t>
+                      </a:r>
+                    </a:p>
+                  </a:txBody>
+                  <a:tcPr>
+                    <a:solidFill>
+                      <a:srgbClr val="1A1D27"/>
+                    </a:solidFill>
+                    <a:lnL w="6350" cap="flat">
+                      <a:solidFill>
+                        <a:srgbClr val="2E3348"/>
+                      </a:solidFill>
+                    </a:lnL>
+                    <a:lnR w="6350" cap="flat">
+                      <a:solidFill>
+                        <a:srgbClr val="2E3348"/>
+                      </a:solidFill>
+                    </a:lnR>
+                    <a:lnT w="6350" cap="flat">
+                      <a:solidFill>
+                        <a:srgbClr val="2E3348"/>
+                      </a:solidFill>
+                    </a:lnT>
+                    <a:lnB w="6350" cap="flat">
+                      <a:solidFill>
+                        <a:srgbClr val="2E3348"/>
+                      </a:solidFill>
+                    </a:lnB>
+                  </a:tcPr>
+                </a:tc>
+                <a:tc>
+                  <a:txBody>
+                    <a:bodyPr wrap="none"/>
+                    <a:lstStyle/>
+                    <a:p>
+                      <a:pPr algn="l"/>
+                      <a:r>
+                        <a:rPr sz="800" b="0">
+                          <a:solidFill>
+                            <a:srgbClr val="E2E8F0"/>
+                          </a:solidFill>
+                        </a:rPr>
+                        <a:t>Tue 07 Jul 2026  10:00 PM</a:t>
+                      </a:r>
+                    </a:p>
+                  </a:txBody>
+                  <a:tcPr>
+                    <a:solidFill>
+                      <a:srgbClr val="1A1D27"/>
+                    </a:solidFill>
+                    <a:lnL w="6350" cap="flat">
+                      <a:solidFill>
+                        <a:srgbClr val="2E3348"/>
+                      </a:solidFill>
+                    </a:lnL>
+                    <a:lnR w="6350" cap="flat">
+                      <a:solidFill>
+                        <a:srgbClr val="2E3348"/>
+                      </a:solidFill>
+                    </a:lnR>
+                    <a:lnT w="6350" cap="flat">
+                      <a:solidFill>
+                        <a:srgbClr val="2E3348"/>
+                      </a:solidFill>
+                    </a:lnT>
+                    <a:lnB w="6350" cap="flat">
+                      <a:solidFill>
+                        <a:srgbClr val="2E3348"/>
+                      </a:solidFill>
+                    </a:lnB>
+                  </a:tcPr>
+                </a:tc>
+                <a:tc>
+                  <a:txBody>
+                    <a:bodyPr wrap="square"/>
+                    <a:lstStyle/>
+                    <a:p>
+                      <a:pPr algn="l"/>
+                      <a:r>
+                        <a:rPr sz="700" b="0">
+                          <a:solidFill>
+                            <a:srgbClr val="E2E8F0"/>
+                          </a:solidFill>
+                        </a:rPr>
+                        <a:t>https://events.sumologic.com/administrationam07072026-event-training</a:t>
+                      </a:r>
+                    </a:p>
+                  </a:txBody>
+                  <a:tcPr>
+                    <a:solidFill>
+                      <a:srgbClr val="1A1D27"/>
+                    </a:solidFill>
+                    <a:lnL w="6350" cap="flat">
+                      <a:solidFill>
+                        <a:srgbClr val="2E3348"/>
+                      </a:solidFill>
+                    </a:lnL>
+                    <a:lnR w="6350" cap="flat">
+                      <a:solidFill>
+                        <a:srgbClr val="2E3348"/>
+                      </a:solidFill>
+                    </a:lnR>
+                    <a:lnT w="6350" cap="flat">
+                      <a:solidFill>
+                        <a:srgbClr val="2E3348"/>
+                      </a:solidFill>
+                    </a:lnT>
+                    <a:lnB w="6350" cap="flat">
+                      <a:solidFill>
+                        <a:srgbClr val="2E3348"/>
+                      </a:solidFill>
+                    </a:lnB>
+                  </a:tcPr>
+                </a:tc>
+              </a:tr>
+            </a:tbl>
+          </a:graphicData>
+        </a:graphic>
+      </p:graphicFrame>
+      <p:sp>
+        <p:nvSpPr>
+          <p:cNvPr id="7" name="TextBox 6"/>
+          <p:cNvSpPr txBox="1"/>
+          <p:nvPr/>
+        </p:nvSpPr>
+        <p:spPr>
+          <a:xfrm>
+            <a:off x="164592" y="5266944"/>
+            <a:ext cx="11795760" cy="274320"/>
+          </a:xfrm>
+          <a:prstGeom prst="rect">
+            <a:avLst/>
+          </a:prstGeom>
+          <a:noFill/>
+        </p:spPr>
+        <p:txBody>
+          <a:bodyPr wrap="none">
+            <a:spAutoFit/>
+          </a:bodyPr>
+          <a:lstStyle/>
+          <a:p>
+            <a:r>
+              <a:rPr sz="700" i="1">
+                <a:solidFill>
+                  <a:srgbClr val="94A3B8"/>
+                </a:solidFill>
+              </a:rPr>
+              <a:t>Register links are live URLs — click to open in browser.  All times shown as start time; PT column also shows end time.</a:t>
+            </a:r>
+          </a:p>
+        </p:txBody>
+      </p:sp>
+    </p:spTree>
+  </p:cSld>
+  <p:clrMapOvr>
+    <a:masterClrMapping/>
+  </p:clrMapOvr>
+</p:sld>
+</file>
+
+<file path=ppt/slides/slide6.xml><?xml version="1.0" encoding="utf-8"?>
+<p:sld xmlns:a="http://schemas.openxmlformats.org/drawingml/2006/main" xmlns:p="http://schemas.openxmlformats.org/presentationml/2006/main" xmlns:r="http://schemas.openxmlformats.org/officeDocument/2006/relationships">
+  <p:cSld>
+    <p:spTree>
+      <p:nvGrpSpPr>
+        <p:cNvPr id="1" name=""/>
+        <p:cNvGrpSpPr/>
+        <p:nvPr/>
+      </p:nvGrpSpPr>
+      <p:grpSpPr/>
+      <p:sp>
+        <p:nvSpPr>
+          <p:cNvPr id="2" name="Rectangle 1"/>
+          <p:cNvSpPr/>
+          <p:nvPr/>
+        </p:nvSpPr>
+        <p:spPr>
+          <a:xfrm>
+            <a:off x="0" y="0"/>
+            <a:ext cx="12188952" cy="6858000"/>
+          </a:xfrm>
+          <a:prstGeom prst="rect">
+            <a:avLst/>
+          </a:prstGeom>
+          <a:solidFill>
+            <a:srgbClr val="0F1117"/>
+          </a:solidFill>
+          <a:ln>
+            <a:noFill/>
+          </a:ln>
+        </p:spPr>
+        <p:style>
+          <a:lnRef idx="1">
+            <a:schemeClr val="accent1"/>
+          </a:lnRef>
+          <a:fillRef idx="3">
+            <a:schemeClr val="accent1"/>
+          </a:fillRef>
+          <a:effectRef idx="2">
+            <a:schemeClr val="accent1"/>
+          </a:effectRef>
+          <a:fontRef idx="minor">
+            <a:schemeClr val="lt1"/>
+          </a:fontRef>
+        </p:style>
+        <p:txBody>
+          <a:bodyPr rtlCol="0" anchor="ctr"/>
+          <a:lstStyle/>
+          <a:p>
+            <a:pPr algn="ctr"/>
+          </a:p>
+        </p:txBody>
+      </p:sp>
+      <p:sp>
+        <p:nvSpPr>
+          <p:cNvPr id="3" name="Rectangle 2"/>
+          <p:cNvSpPr/>
+          <p:nvPr/>
+        </p:nvSpPr>
+        <p:spPr>
+          <a:xfrm>
+            <a:off x="0" y="0"/>
+            <a:ext cx="12188952" cy="548640"/>
+          </a:xfrm>
+          <a:prstGeom prst="rect">
+            <a:avLst/>
+          </a:prstGeom>
+          <a:solidFill>
+            <a:srgbClr val="1A1D27"/>
+          </a:solidFill>
+          <a:ln>
+            <a:noFill/>
+          </a:ln>
+        </p:spPr>
+        <p:style>
+          <a:lnRef idx="1">
+            <a:schemeClr val="accent1"/>
+          </a:lnRef>
+          <a:fillRef idx="3">
+            <a:schemeClr val="accent1"/>
+          </a:fillRef>
+          <a:effectRef idx="2">
+            <a:schemeClr val="accent1"/>
+          </a:effectRef>
+          <a:fontRef idx="minor">
+            <a:schemeClr val="lt1"/>
+          </a:fontRef>
+        </p:style>
+        <p:txBody>
+          <a:bodyPr rtlCol="0" anchor="ctr"/>
+          <a:lstStyle/>
+          <a:p>
+            <a:pPr algn="ctr"/>
+          </a:p>
+        </p:txBody>
+      </p:sp>
+      <p:sp>
+        <p:nvSpPr>
+          <p:cNvPr id="4" name="TextBox 3"/>
+          <p:cNvSpPr txBox="1"/>
+          <p:nvPr/>
+        </p:nvSpPr>
+        <p:spPr>
+          <a:xfrm>
+            <a:off x="164592" y="73152"/>
+            <a:ext cx="8229600" cy="420624"/>
+          </a:xfrm>
+          <a:prstGeom prst="rect">
+            <a:avLst/>
+          </a:prstGeom>
+          <a:noFill/>
+        </p:spPr>
+        <p:txBody>
+          <a:bodyPr wrap="none">
+            <a:spAutoFit/>
+          </a:bodyPr>
+          <a:lstStyle/>
+          <a:p>
+            <a:r>
+              <a:rPr sz="1300" b="1">
+                <a:solidFill>
+                  <a:srgbClr val="00B4D8"/>
+                </a:solidFill>
+              </a:rPr>
+              <a:t>Sumo Logic — Virtual Training Schedule   ·   07 Jul – 16 Jul 2026   (6/7)</a:t>
+            </a:r>
+          </a:p>
+        </p:txBody>
+      </p:sp>
+      <p:sp>
+        <p:nvSpPr>
+          <p:cNvPr id="5" name="TextBox 4"/>
+          <p:cNvSpPr txBox="1"/>
+          <p:nvPr/>
+        </p:nvSpPr>
+        <p:spPr>
+          <a:xfrm>
+            <a:off x="10908792" y="73152"/>
+            <a:ext cx="1097280" cy="420624"/>
+          </a:xfrm>
+          <a:prstGeom prst="rect">
+            <a:avLst/>
+          </a:prstGeom>
+          <a:noFill/>
+        </p:spPr>
+        <p:txBody>
+          <a:bodyPr wrap="none">
+            <a:spAutoFit/>
+          </a:bodyPr>
+          <a:lstStyle/>
+          <a:p>
+            <a:pPr algn="r"/>
+            <a:r>
+              <a:rPr sz="900">
+                <a:solidFill>
+                  <a:srgbClr val="94A3B8"/>
+                </a:solidFill>
+              </a:rPr>
+              <a:t>p 6/7</a:t>
+            </a:r>
+          </a:p>
+        </p:txBody>
+      </p:sp>
+      <p:graphicFrame>
+        <p:nvGraphicFramePr>
+          <p:cNvPr id="6" name="Table 5"/>
+          <p:cNvGraphicFramePr>
+            <a:graphicFrameLocks noGrp="1"/>
+          </p:cNvGraphicFramePr>
+          <p:nvPr/>
+        </p:nvGraphicFramePr>
+        <p:xfrm>
+          <a:off x="164592" y="640080"/>
+          <a:ext cx="11795760" cy="4517136"/>
+        </p:xfrm>
+        <a:graphic>
+          <a:graphicData uri="http://schemas.openxmlformats.org/drawingml/2006/table">
+            <a:tbl>
+              <a:tblPr firstRow="1" bandRow="1">
+                <a:tableStyleId>{5C22544A-7EE6-4342-B048-85BDC9FD1C3A}</a:tableStyleId>
+              </a:tblPr>
+              <a:tblGrid>
+                <a:gridCol w="2286000"/>
+                <a:gridCol w="1920240"/>
+                <a:gridCol w="1920240"/>
+                <a:gridCol w="1920240"/>
+                <a:gridCol w="1920240"/>
+                <a:gridCol w="1828800"/>
+              </a:tblGrid>
+              <a:tr h="310896">
+                <a:tc>
+                  <a:txBody>
+                    <a:bodyPr wrap="square"/>
+                    <a:lstStyle/>
+                    <a:p>
+                      <a:pPr algn="ctr"/>
+                      <a:r>
+                        <a:rPr sz="900" b="1">
+                          <a:solidFill>
+                            <a:srgbClr val="00B4D8"/>
+                          </a:solidFill>
+                        </a:rPr>
+                        <a:t>Course</a:t>
+                      </a:r>
+                    </a:p>
+                  </a:txBody>
+                  <a:tcPr>
+                    <a:solidFill>
+                      <a:srgbClr val="1A1D27"/>
+                    </a:solidFill>
+                    <a:lnL w="6350" cap="flat">
+                      <a:solidFill>
+                        <a:srgbClr val="2E3348"/>
+                      </a:solidFill>
+                    </a:lnL>
+                    <a:lnR w="6350" cap="flat">
+                      <a:solidFill>
+                        <a:srgbClr val="2E3348"/>
+                      </a:solidFill>
+                    </a:lnR>
+                    <a:lnT w="6350" cap="flat">
+                      <a:solidFill>
+                        <a:srgbClr val="2E3348"/>
+                      </a:solidFill>
+                    </a:lnT>
+                    <a:lnB w="6350" cap="flat">
+                      <a:solidFill>
+                        <a:srgbClr val="2E3348"/>
+                      </a:solidFill>
+                    </a:lnB>
+                  </a:tcPr>
+                </a:tc>
+                <a:tc>
+                  <a:txBody>
+                    <a:bodyPr wrap="square"/>
+                    <a:lstStyle/>
+                    <a:p>
+                      <a:pPr algn="ctr"/>
+                      <a:r>
+                        <a:rPr sz="900" b="1">
+                          <a:solidFill>
+                            <a:srgbClr val="00B4D8"/>
+                          </a:solidFill>
+                        </a:rPr>
+                        <a:t>PT  (Los Angeles)</a:t>
+                      </a:r>
+                    </a:p>
+                  </a:txBody>
+                  <a:tcPr>
+                    <a:solidFill>
+                      <a:srgbClr val="1A1D27"/>
+                    </a:solidFill>
+                    <a:lnL w="6350" cap="flat">
+                      <a:solidFill>
+                        <a:srgbClr val="2E3348"/>
+                      </a:solidFill>
+                    </a:lnL>
+                    <a:lnR w="6350" cap="flat">
+                      <a:solidFill>
+                        <a:srgbClr val="2E3348"/>
+                      </a:solidFill>
+                    </a:lnR>
+                    <a:lnT w="6350" cap="flat">
+                      <a:solidFill>
+                        <a:srgbClr val="2E3348"/>
+                      </a:solidFill>
+                    </a:lnT>
+                    <a:lnB w="6350" cap="flat">
+                      <a:solidFill>
+                        <a:srgbClr val="2E3348"/>
+                      </a:solidFill>
+                    </a:lnB>
+                  </a:tcPr>
+                </a:tc>
+                <a:tc>
+                  <a:txBody>
+                    <a:bodyPr wrap="square"/>
+                    <a:lstStyle/>
+                    <a:p>
+                      <a:pPr algn="ctr"/>
+                      <a:r>
+                        <a:rPr sz="900" b="1">
+                          <a:solidFill>
+                            <a:srgbClr val="00B4D8"/>
+                          </a:solidFill>
+                        </a:rPr>
+                        <a:t>NZ  (Auckland)</a:t>
+                      </a:r>
+                    </a:p>
+                  </a:txBody>
+                  <a:tcPr>
+                    <a:solidFill>
+                      <a:srgbClr val="1A1D27"/>
+                    </a:solidFill>
+                    <a:lnL w="6350" cap="flat">
+                      <a:solidFill>
+                        <a:srgbClr val="2E3348"/>
+                      </a:solidFill>
+                    </a:lnL>
+                    <a:lnR w="6350" cap="flat">
+                      <a:solidFill>
+                        <a:srgbClr val="2E3348"/>
+                      </a:solidFill>
+                    </a:lnR>
+                    <a:lnT w="6350" cap="flat">
+                      <a:solidFill>
+                        <a:srgbClr val="2E3348"/>
+                      </a:solidFill>
+                    </a:lnT>
+                    <a:lnB w="6350" cap="flat">
+                      <a:solidFill>
+                        <a:srgbClr val="2E3348"/>
+                      </a:solidFill>
+                    </a:lnB>
+                  </a:tcPr>
+                </a:tc>
+                <a:tc>
+                  <a:txBody>
+                    <a:bodyPr wrap="square"/>
+                    <a:lstStyle/>
+                    <a:p>
+                      <a:pPr algn="ctr"/>
+                      <a:r>
+                        <a:rPr sz="900" b="1">
+                          <a:solidFill>
+                            <a:srgbClr val="00B4D8"/>
+                          </a:solidFill>
+                        </a:rPr>
+                        <a:t>AET  (Sydney)</a:t>
+                      </a:r>
+                    </a:p>
+                  </a:txBody>
+                  <a:tcPr>
+                    <a:solidFill>
+                      <a:srgbClr val="1A1D27"/>
+                    </a:solidFill>
+                    <a:lnL w="6350" cap="flat">
+                      <a:solidFill>
+                        <a:srgbClr val="2E3348"/>
+                      </a:solidFill>
+                    </a:lnL>
+                    <a:lnR w="6350" cap="flat">
+                      <a:solidFill>
+                        <a:srgbClr val="2E3348"/>
+                      </a:solidFill>
+                    </a:lnR>
+                    <a:lnT w="6350" cap="flat">
+                      <a:solidFill>
+                        <a:srgbClr val="2E3348"/>
+                      </a:solidFill>
+                    </a:lnT>
+                    <a:lnB w="6350" cap="flat">
+                      <a:solidFill>
+                        <a:srgbClr val="2E3348"/>
+                      </a:solidFill>
+                    </a:lnB>
+                  </a:tcPr>
+                </a:tc>
+                <a:tc>
+                  <a:txBody>
+                    <a:bodyPr wrap="square"/>
+                    <a:lstStyle/>
+                    <a:p>
+                      <a:pPr algn="ctr"/>
+                      <a:r>
+                        <a:rPr sz="900" b="1">
+                          <a:solidFill>
+                            <a:srgbClr val="00B4D8"/>
+                          </a:solidFill>
+                        </a:rPr>
+                        <a:t>SGT  (Singapore)</a:t>
+                      </a:r>
+                    </a:p>
+                  </a:txBody>
+                  <a:tcPr>
+                    <a:solidFill>
+                      <a:srgbClr val="1A1D27"/>
+                    </a:solidFill>
+                    <a:lnL w="6350" cap="flat">
+                      <a:solidFill>
+                        <a:srgbClr val="2E3348"/>
+                      </a:solidFill>
+                    </a:lnL>
+                    <a:lnR w="6350" cap="flat">
+                      <a:solidFill>
+                        <a:srgbClr val="2E3348"/>
+                      </a:solidFill>
+                    </a:lnR>
+                    <a:lnT w="6350" cap="flat">
+                      <a:solidFill>
+                        <a:srgbClr val="2E3348"/>
+                      </a:solidFill>
+                    </a:lnT>
+                    <a:lnB w="6350" cap="flat">
+                      <a:solidFill>
+                        <a:srgbClr val="2E3348"/>
+                      </a:solidFill>
+                    </a:lnB>
+                  </a:tcPr>
+                </a:tc>
+                <a:tc>
+                  <a:txBody>
+                    <a:bodyPr wrap="square"/>
+                    <a:lstStyle/>
+                    <a:p>
+                      <a:pPr algn="ctr"/>
+                      <a:r>
+                        <a:rPr sz="900" b="1">
+                          <a:solidFill>
+                            <a:srgbClr val="00B4D8"/>
+                          </a:solidFill>
+                        </a:rPr>
+                        <a:t>Register URL</a:t>
+                      </a:r>
+                    </a:p>
+                  </a:txBody>
+                  <a:tcPr>
+                    <a:solidFill>
+                      <a:srgbClr val="1A1D27"/>
+                    </a:solidFill>
+                    <a:lnL w="6350" cap="flat">
+                      <a:solidFill>
+                        <a:srgbClr val="2E3348"/>
+                      </a:solidFill>
+                    </a:lnL>
+                    <a:lnR w="6350" cap="flat">
+                      <a:solidFill>
+                        <a:srgbClr val="2E3348"/>
+                      </a:solidFill>
+                    </a:lnR>
+                    <a:lnT w="6350" cap="flat">
+                      <a:solidFill>
+                        <a:srgbClr val="2E3348"/>
+                      </a:solidFill>
+                    </a:lnT>
+                    <a:lnB w="6350" cap="flat">
+                      <a:solidFill>
+                        <a:srgbClr val="2E3348"/>
+                      </a:solidFill>
+                    </a:lnB>
+                  </a:tcPr>
+                </a:tc>
+              </a:tr>
+              <a:tr h="420624">
+                <a:tc>
+                  <a:txBody>
+                    <a:bodyPr wrap="square"/>
+                    <a:lstStyle/>
+                    <a:p>
+                      <a:pPr algn="l"/>
+                      <a:r>
+                        <a:rPr sz="800" b="0">
+                          <a:solidFill>
+                            <a:srgbClr val="E2E8F0"/>
+                          </a:solidFill>
+                        </a:rPr>
+                        <a:t>Administration PM</a:t>
+                      </a:r>
+                    </a:p>
+                  </a:txBody>
+                  <a:tcPr>
+                    <a:solidFill>
+                      <a:srgbClr val="0F1117"/>
+                    </a:solidFill>
+                    <a:lnL w="6350" cap="flat">
+                      <a:solidFill>
+                        <a:srgbClr val="2E3348"/>
+                      </a:solidFill>
+                    </a:lnL>
+                    <a:lnR w="6350" cap="flat">
+                      <a:solidFill>
+                        <a:srgbClr val="2E3348"/>
+                      </a:solidFill>
+                    </a:lnR>
+                    <a:lnT w="6350" cap="flat">
+                      <a:solidFill>
+                        <a:srgbClr val="2E3348"/>
+                      </a:solidFill>
+                    </a:lnT>
+                    <a:lnB w="6350" cap="flat">
+                      <a:solidFill>
+                        <a:srgbClr val="2E3348"/>
+                      </a:solidFill>
+                    </a:lnB>
+                  </a:tcPr>
+                </a:tc>
+                <a:tc>
+                  <a:txBody>
+                    <a:bodyPr wrap="none"/>
+                    <a:lstStyle/>
+                    <a:p>
+                      <a:pPr algn="l"/>
+                      <a:r>
+                        <a:rPr sz="800" b="0">
+                          <a:solidFill>
+                            <a:srgbClr val="E2E8F0"/>
+                          </a:solidFill>
+                        </a:rPr>
+                        <a:t>Tue 07 Jul 2026  04:00 PM  →  07:00 PM</a:t>
+                      </a:r>
+                    </a:p>
+                  </a:txBody>
+                  <a:tcPr>
+                    <a:solidFill>
+                      <a:srgbClr val="0F1117"/>
+                    </a:solidFill>
+                    <a:lnL w="6350" cap="flat">
+                      <a:solidFill>
+                        <a:srgbClr val="2E3348"/>
+                      </a:solidFill>
+                    </a:lnL>
+                    <a:lnR w="6350" cap="flat">
+                      <a:solidFill>
+                        <a:srgbClr val="2E3348"/>
+                      </a:solidFill>
+                    </a:lnR>
+                    <a:lnT w="6350" cap="flat">
+                      <a:solidFill>
+                        <a:srgbClr val="2E3348"/>
+                      </a:solidFill>
+                    </a:lnT>
+                    <a:lnB w="6350" cap="flat">
+                      <a:solidFill>
+                        <a:srgbClr val="2E3348"/>
+                      </a:solidFill>
+                    </a:lnB>
+                  </a:tcPr>
+                </a:tc>
+                <a:tc>
+                  <a:txBody>
+                    <a:bodyPr wrap="none"/>
+                    <a:lstStyle/>
+                    <a:p>
+                      <a:pPr algn="l"/>
+                      <a:r>
+                        <a:rPr sz="800" b="0">
+                          <a:solidFill>
+                            <a:srgbClr val="E2E8F0"/>
+                          </a:solidFill>
+                        </a:rPr>
+                        <a:t>Wed 08 Jul 2026  11:00 AM</a:t>
+                      </a:r>
+                    </a:p>
+                  </a:txBody>
+                  <a:tcPr>
+                    <a:solidFill>
+                      <a:srgbClr val="0F1117"/>
+                    </a:solidFill>
+                    <a:lnL w="6350" cap="flat">
+                      <a:solidFill>
+                        <a:srgbClr val="2E3348"/>
+                      </a:solidFill>
+                    </a:lnL>
+                    <a:lnR w="6350" cap="flat">
+                      <a:solidFill>
+                        <a:srgbClr val="2E3348"/>
+                      </a:solidFill>
+                    </a:lnR>
+                    <a:lnT w="6350" cap="flat">
+                      <a:solidFill>
+                        <a:srgbClr val="2E3348"/>
+                      </a:solidFill>
+                    </a:lnT>
+                    <a:lnB w="6350" cap="flat">
+                      <a:solidFill>
+                        <a:srgbClr val="2E3348"/>
+                      </a:solidFill>
+                    </a:lnB>
+                  </a:tcPr>
+                </a:tc>
+                <a:tc>
+                  <a:txBody>
+                    <a:bodyPr wrap="none"/>
+                    <a:lstStyle/>
+                    <a:p>
+                      <a:pPr algn="l"/>
+                      <a:r>
+                        <a:rPr sz="800" b="0">
+                          <a:solidFill>
+                            <a:srgbClr val="E2E8F0"/>
+                          </a:solidFill>
+                        </a:rPr>
+                        <a:t>Wed 08 Jul 2026  09:00 AM</a:t>
+                      </a:r>
+                    </a:p>
+                  </a:txBody>
+                  <a:tcPr>
+                    <a:solidFill>
+                      <a:srgbClr val="0F1117"/>
+                    </a:solidFill>
+                    <a:lnL w="6350" cap="flat">
+                      <a:solidFill>
+                        <a:srgbClr val="2E3348"/>
+                      </a:solidFill>
+                    </a:lnL>
+                    <a:lnR w="6350" cap="flat">
+                      <a:solidFill>
+                        <a:srgbClr val="2E3348"/>
+                      </a:solidFill>
+                    </a:lnR>
+                    <a:lnT w="6350" cap="flat">
+                      <a:solidFill>
+                        <a:srgbClr val="2E3348"/>
+                      </a:solidFill>
+                    </a:lnT>
+                    <a:lnB w="6350" cap="flat">
+                      <a:solidFill>
+                        <a:srgbClr val="2E3348"/>
+                      </a:solidFill>
+                    </a:lnB>
+                  </a:tcPr>
+                </a:tc>
+                <a:tc>
+                  <a:txBody>
+                    <a:bodyPr wrap="none"/>
+                    <a:lstStyle/>
+                    <a:p>
+                      <a:pPr algn="l"/>
+                      <a:r>
+                        <a:rPr sz="800" b="0">
+                          <a:solidFill>
+                            <a:srgbClr val="E2E8F0"/>
+                          </a:solidFill>
+                        </a:rPr>
+                        <a:t>Wed 08 Jul 2026  07:00 AM</a:t>
+                      </a:r>
+                    </a:p>
+                  </a:txBody>
+                  <a:tcPr>
+                    <a:solidFill>
+                      <a:srgbClr val="0F1117"/>
+                    </a:solidFill>
+                    <a:lnL w="6350" cap="flat">
+                      <a:solidFill>
+                        <a:srgbClr val="2E3348"/>
+                      </a:solidFill>
+                    </a:lnL>
+                    <a:lnR w="6350" cap="flat">
+                      <a:solidFill>
+                        <a:srgbClr val="2E3348"/>
+                      </a:solidFill>
+                    </a:lnR>
+                    <a:lnT w="6350" cap="flat">
+                      <a:solidFill>
+                        <a:srgbClr val="2E3348"/>
+                      </a:solidFill>
+                    </a:lnT>
+                    <a:lnB w="6350" cap="flat">
+                      <a:solidFill>
+                        <a:srgbClr val="2E3348"/>
+                      </a:solidFill>
+                    </a:lnB>
+                  </a:tcPr>
+                </a:tc>
+                <a:tc>
+                  <a:txBody>
+                    <a:bodyPr wrap="square"/>
+                    <a:lstStyle/>
+                    <a:p>
+                      <a:pPr algn="l"/>
+                      <a:r>
+                        <a:rPr sz="700" b="0">
+                          <a:solidFill>
+                            <a:srgbClr val="E2E8F0"/>
+                          </a:solidFill>
+                        </a:rPr>
+                        <a:t>https://events.sumologic.com/administrationpm07072026-event-training</a:t>
+                      </a:r>
+                    </a:p>
+                  </a:txBody>
+                  <a:tcPr>
+                    <a:solidFill>
+                      <a:srgbClr val="0F1117"/>
+                    </a:solidFill>
+                    <a:lnL w="6350" cap="flat">
+                      <a:solidFill>
+                        <a:srgbClr val="2E3348"/>
+                      </a:solidFill>
+                    </a:lnL>
+                    <a:lnR w="6350" cap="flat">
+                      <a:solidFill>
+                        <a:srgbClr val="2E3348"/>
+                      </a:solidFill>
+                    </a:lnR>
+                    <a:lnT w="6350" cap="flat">
+                      <a:solidFill>
+                        <a:srgbClr val="2E3348"/>
+                      </a:solidFill>
+                    </a:lnT>
+                    <a:lnB w="6350" cap="flat">
+                      <a:solidFill>
+                        <a:srgbClr val="2E3348"/>
+                      </a:solidFill>
+                    </a:lnB>
+                  </a:tcPr>
+                </a:tc>
+              </a:tr>
+              <a:tr h="420624">
+                <a:tc>
+                  <a:txBody>
+                    <a:bodyPr wrap="square"/>
+                    <a:lstStyle/>
+                    <a:p>
+                      <a:pPr algn="l"/>
+                      <a:r>
+                        <a:rPr sz="800" b="0">
+                          <a:solidFill>
+                            <a:srgbClr val="E2E8F0"/>
+                          </a:solidFill>
+                        </a:rPr>
+                        <a:t>Metric Analytic AM</a:t>
+                      </a:r>
+                    </a:p>
+                  </a:txBody>
+                  <a:tcPr>
+                    <a:solidFill>
+                      <a:srgbClr val="1A1D27"/>
+                    </a:solidFill>
+                    <a:lnL w="6350" cap="flat">
+                      <a:solidFill>
+                        <a:srgbClr val="2E3348"/>
+                      </a:solidFill>
+                    </a:lnL>
+                    <a:lnR w="6350" cap="flat">
+                      <a:solidFill>
+                        <a:srgbClr val="2E3348"/>
+                      </a:solidFill>
+                    </a:lnR>
+                    <a:lnT w="6350" cap="flat">
+                      <a:solidFill>
+                        <a:srgbClr val="2E3348"/>
+                      </a:solidFill>
+                    </a:lnT>
+                    <a:lnB w="6350" cap="flat">
+                      <a:solidFill>
+                        <a:srgbClr val="2E3348"/>
+                      </a:solidFill>
+                    </a:lnB>
+                  </a:tcPr>
+                </a:tc>
+                <a:tc>
+                  <a:txBody>
+                    <a:bodyPr wrap="none"/>
+                    <a:lstStyle/>
+                    <a:p>
+                      <a:pPr algn="l"/>
+                      <a:r>
+                        <a:rPr sz="800" b="0">
+                          <a:solidFill>
+                            <a:srgbClr val="E2E8F0"/>
+                          </a:solidFill>
+                        </a:rPr>
+                        <a:t>Wed 08 Jul 2026  07:00 AM  →  10:00 AM</a:t>
+                      </a:r>
+                    </a:p>
+                  </a:txBody>
+                  <a:tcPr>
+                    <a:solidFill>
+                      <a:srgbClr val="1A1D27"/>
+                    </a:solidFill>
+                    <a:lnL w="6350" cap="flat">
+                      <a:solidFill>
+                        <a:srgbClr val="2E3348"/>
+                      </a:solidFill>
+                    </a:lnL>
+                    <a:lnR w="6350" cap="flat">
+                      <a:solidFill>
+                        <a:srgbClr val="2E3348"/>
+                      </a:solidFill>
+                    </a:lnR>
+                    <a:lnT w="6350" cap="flat">
+                      <a:solidFill>
+                        <a:srgbClr val="2E3348"/>
+                      </a:solidFill>
+                    </a:lnT>
+                    <a:lnB w="6350" cap="flat">
+                      <a:solidFill>
+                        <a:srgbClr val="2E3348"/>
+                      </a:solidFill>
+                    </a:lnB>
+                  </a:tcPr>
+                </a:tc>
+                <a:tc>
+                  <a:txBody>
+                    <a:bodyPr wrap="none"/>
+                    <a:lstStyle/>
+                    <a:p>
+                      <a:pPr algn="l"/>
+                      <a:r>
+                        <a:rPr sz="800" b="0">
+                          <a:solidFill>
+                            <a:srgbClr val="E2E8F0"/>
+                          </a:solidFill>
+                        </a:rPr>
+                        <a:t>Thu 09 Jul 2026  02:00 AM</a:t>
+                      </a:r>
+                    </a:p>
+                  </a:txBody>
+                  <a:tcPr>
+                    <a:solidFill>
+                      <a:srgbClr val="1A1D27"/>
+                    </a:solidFill>
+                    <a:lnL w="6350" cap="flat">
+                      <a:solidFill>
+                        <a:srgbClr val="2E3348"/>
+                      </a:solidFill>
+                    </a:lnL>
+                    <a:lnR w="6350" cap="flat">
+                      <a:solidFill>
+                        <a:srgbClr val="2E3348"/>
+                      </a:solidFill>
+                    </a:lnR>
+                    <a:lnT w="6350" cap="flat">
+                      <a:solidFill>
+                        <a:srgbClr val="2E3348"/>
+                      </a:solidFill>
+                    </a:lnT>
+                    <a:lnB w="6350" cap="flat">
+                      <a:solidFill>
+                        <a:srgbClr val="2E3348"/>
+                      </a:solidFill>
+                    </a:lnB>
+                  </a:tcPr>
+                </a:tc>
+                <a:tc>
+                  <a:txBody>
+                    <a:bodyPr wrap="none"/>
+                    <a:lstStyle/>
+                    <a:p>
+                      <a:pPr algn="l"/>
+                      <a:r>
+                        <a:rPr sz="800" b="0">
+                          <a:solidFill>
+                            <a:srgbClr val="E2E8F0"/>
+                          </a:solidFill>
+                        </a:rPr>
+                        <a:t>Thu 09 Jul 2026  12:00 AM</a:t>
+                      </a:r>
+                    </a:p>
+                  </a:txBody>
+                  <a:tcPr>
+                    <a:solidFill>
+                      <a:srgbClr val="1A1D27"/>
+                    </a:solidFill>
+                    <a:lnL w="6350" cap="flat">
+                      <a:solidFill>
+                        <a:srgbClr val="2E3348"/>
+                      </a:solidFill>
+                    </a:lnL>
+                    <a:lnR w="6350" cap="flat">
+                      <a:solidFill>
+                        <a:srgbClr val="2E3348"/>
+                      </a:solidFill>
+                    </a:lnR>
+                    <a:lnT w="6350" cap="flat">
+                      <a:solidFill>
+                        <a:srgbClr val="2E3348"/>
+                      </a:solidFill>
+                    </a:lnT>
+                    <a:lnB w="6350" cap="flat">
+                      <a:solidFill>
+                        <a:srgbClr val="2E3348"/>
+                      </a:solidFill>
+                    </a:lnB>
+                  </a:tcPr>
+                </a:tc>
+                <a:tc>
+                  <a:txBody>
+                    <a:bodyPr wrap="none"/>
+                    <a:lstStyle/>
+                    <a:p>
+                      <a:pPr algn="l"/>
+                      <a:r>
+                        <a:rPr sz="800" b="0">
+                          <a:solidFill>
+                            <a:srgbClr val="E2E8F0"/>
+                          </a:solidFill>
+                        </a:rPr>
+                        <a:t>Wed 08 Jul 2026  10:00 PM</a:t>
+                      </a:r>
+                    </a:p>
+                  </a:txBody>
+                  <a:tcPr>
+                    <a:solidFill>
+                      <a:srgbClr val="1A1D27"/>
+                    </a:solidFill>
+                    <a:lnL w="6350" cap="flat">
+                      <a:solidFill>
+                        <a:srgbClr val="2E3348"/>
+                      </a:solidFill>
+                    </a:lnL>
+                    <a:lnR w="6350" cap="flat">
+                      <a:solidFill>
+                        <a:srgbClr val="2E3348"/>
+                      </a:solidFill>
+                    </a:lnR>
+                    <a:lnT w="6350" cap="flat">
+                      <a:solidFill>
+                        <a:srgbClr val="2E3348"/>
+                      </a:solidFill>
+                    </a:lnT>
+                    <a:lnB w="6350" cap="flat">
+                      <a:solidFill>
+                        <a:srgbClr val="2E3348"/>
+                      </a:solidFill>
+                    </a:lnB>
+                  </a:tcPr>
+                </a:tc>
+                <a:tc>
+                  <a:txBody>
+                    <a:bodyPr wrap="square"/>
+                    <a:lstStyle/>
+                    <a:p>
+                      <a:pPr algn="l"/>
+                      <a:r>
+                        <a:rPr sz="700" b="0">
+                          <a:solidFill>
+                            <a:srgbClr val="E2E8F0"/>
+                          </a:solidFill>
+                        </a:rPr>
+                        <a:t>https://events.sumologic.com/metricanalyticsam07082026-event-training</a:t>
+                      </a:r>
+                    </a:p>
+                  </a:txBody>
+                  <a:tcPr>
+                    <a:solidFill>
+                      <a:srgbClr val="1A1D27"/>
+                    </a:solidFill>
+                    <a:lnL w="6350" cap="flat">
+                      <a:solidFill>
+                        <a:srgbClr val="2E3348"/>
+                      </a:solidFill>
+                    </a:lnL>
+                    <a:lnR w="6350" cap="flat">
+                      <a:solidFill>
+                        <a:srgbClr val="2E3348"/>
+                      </a:solidFill>
+                    </a:lnR>
+                    <a:lnT w="6350" cap="flat">
+                      <a:solidFill>
+                        <a:srgbClr val="2E3348"/>
+                      </a:solidFill>
+                    </a:lnT>
+                    <a:lnB w="6350" cap="flat">
+                      <a:solidFill>
+                        <a:srgbClr val="2E3348"/>
+                      </a:solidFill>
+                    </a:lnB>
+                  </a:tcPr>
+                </a:tc>
+              </a:tr>
+              <a:tr h="420624">
+                <a:tc>
+                  <a:txBody>
+                    <a:bodyPr wrap="square"/>
+                    <a:lstStyle/>
+                    <a:p>
+                      <a:pPr algn="l"/>
+                      <a:r>
+                        <a:rPr sz="800" b="0">
+                          <a:solidFill>
+                            <a:srgbClr val="E2E8F0"/>
+                          </a:solidFill>
+                        </a:rPr>
+                        <a:t>Metrics Analytic PM</a:t>
+                      </a:r>
+                    </a:p>
+                  </a:txBody>
+                  <a:tcPr>
+                    <a:solidFill>
+                      <a:srgbClr val="0F1117"/>
+                    </a:solidFill>
+                    <a:lnL w="6350" cap="flat">
+                      <a:solidFill>
+                        <a:srgbClr val="2E3348"/>
+                      </a:solidFill>
+                    </a:lnL>
+                    <a:lnR w="6350" cap="flat">
+                      <a:solidFill>
+                        <a:srgbClr val="2E3348"/>
+                      </a:solidFill>
+                    </a:lnR>
+                    <a:lnT w="6350" cap="flat">
+                      <a:solidFill>
+                        <a:srgbClr val="2E3348"/>
+                      </a:solidFill>
+                    </a:lnT>
+                    <a:lnB w="6350" cap="flat">
+                      <a:solidFill>
+                        <a:srgbClr val="2E3348"/>
+                      </a:solidFill>
+                    </a:lnB>
+                  </a:tcPr>
+                </a:tc>
+                <a:tc>
+                  <a:txBody>
+                    <a:bodyPr wrap="none"/>
+                    <a:lstStyle/>
+                    <a:p>
+                      <a:pPr algn="l"/>
+                      <a:r>
+                        <a:rPr sz="800" b="0">
+                          <a:solidFill>
+                            <a:srgbClr val="E2E8F0"/>
+                          </a:solidFill>
+                        </a:rPr>
+                        <a:t>Wed 08 Jul 2026  04:00 PM  →  07:00 PM</a:t>
+                      </a:r>
+                    </a:p>
+                  </a:txBody>
+                  <a:tcPr>
+                    <a:solidFill>
+                      <a:srgbClr val="0F1117"/>
+                    </a:solidFill>
+                    <a:lnL w="6350" cap="flat">
+                      <a:solidFill>
+                        <a:srgbClr val="2E3348"/>
+                      </a:solidFill>
+                    </a:lnL>
+                    <a:lnR w="6350" cap="flat">
+                      <a:solidFill>
+                        <a:srgbClr val="2E3348"/>
+                      </a:solidFill>
+                    </a:lnR>
+                    <a:lnT w="6350" cap="flat">
+                      <a:solidFill>
+                        <a:srgbClr val="2E3348"/>
+                      </a:solidFill>
+                    </a:lnT>
+                    <a:lnB w="6350" cap="flat">
+                      <a:solidFill>
+                        <a:srgbClr val="2E3348"/>
+                      </a:solidFill>
+                    </a:lnB>
+                  </a:tcPr>
+                </a:tc>
+                <a:tc>
+                  <a:txBody>
+                    <a:bodyPr wrap="none"/>
+                    <a:lstStyle/>
+                    <a:p>
+                      <a:pPr algn="l"/>
+                      <a:r>
+                        <a:rPr sz="800" b="0">
+                          <a:solidFill>
+                            <a:srgbClr val="E2E8F0"/>
+                          </a:solidFill>
+                        </a:rPr>
+                        <a:t>Thu 09 Jul 2026  11:00 AM</a:t>
+                      </a:r>
+                    </a:p>
+                  </a:txBody>
+                  <a:tcPr>
+                    <a:solidFill>
+                      <a:srgbClr val="0F1117"/>
+                    </a:solidFill>
+                    <a:lnL w="6350" cap="flat">
+                      <a:solidFill>
+                        <a:srgbClr val="2E3348"/>
+                      </a:solidFill>
+                    </a:lnL>
+                    <a:lnR w="6350" cap="flat">
+                      <a:solidFill>
+                        <a:srgbClr val="2E3348"/>
+                      </a:solidFill>
+                    </a:lnR>
+                    <a:lnT w="6350" cap="flat">
+                      <a:solidFill>
+                        <a:srgbClr val="2E3348"/>
+                      </a:solidFill>
+                    </a:lnT>
+                    <a:lnB w="6350" cap="flat">
+                      <a:solidFill>
+                        <a:srgbClr val="2E3348"/>
+                      </a:solidFill>
+                    </a:lnB>
+                  </a:tcPr>
+                </a:tc>
+                <a:tc>
+                  <a:txBody>
+                    <a:bodyPr wrap="none"/>
+                    <a:lstStyle/>
+                    <a:p>
+                      <a:pPr algn="l"/>
+                      <a:r>
+                        <a:rPr sz="800" b="0">
+                          <a:solidFill>
+                            <a:srgbClr val="E2E8F0"/>
+                          </a:solidFill>
+                        </a:rPr>
+                        <a:t>Thu 09 Jul 2026  09:00 AM</a:t>
+                      </a:r>
+                    </a:p>
+                  </a:txBody>
+                  <a:tcPr>
+                    <a:solidFill>
+                      <a:srgbClr val="0F1117"/>
+                    </a:solidFill>
+                    <a:lnL w="6350" cap="flat">
+                      <a:solidFill>
+                        <a:srgbClr val="2E3348"/>
+                      </a:solidFill>
+                    </a:lnL>
+                    <a:lnR w="6350" cap="flat">
+                      <a:solidFill>
+                        <a:srgbClr val="2E3348"/>
+                      </a:solidFill>
+                    </a:lnR>
+                    <a:lnT w="6350" cap="flat">
+                      <a:solidFill>
+                        <a:srgbClr val="2E3348"/>
+                      </a:solidFill>
+                    </a:lnT>
+                    <a:lnB w="6350" cap="flat">
+                      <a:solidFill>
+                        <a:srgbClr val="2E3348"/>
+                      </a:solidFill>
+                    </a:lnB>
+                  </a:tcPr>
+                </a:tc>
+                <a:tc>
+                  <a:txBody>
+                    <a:bodyPr wrap="none"/>
+                    <a:lstStyle/>
+                    <a:p>
+                      <a:pPr algn="l"/>
+                      <a:r>
+                        <a:rPr sz="800" b="0">
+                          <a:solidFill>
+                            <a:srgbClr val="E2E8F0"/>
+                          </a:solidFill>
+                        </a:rPr>
+                        <a:t>Thu 09 Jul 2026  07:00 AM</a:t>
+                      </a:r>
+                    </a:p>
+                  </a:txBody>
+                  <a:tcPr>
+                    <a:solidFill>
+                      <a:srgbClr val="0F1117"/>
+                    </a:solidFill>
+                    <a:lnL w="6350" cap="flat">
+                      <a:solidFill>
+                        <a:srgbClr val="2E3348"/>
+                      </a:solidFill>
+                    </a:lnL>
+                    <a:lnR w="6350" cap="flat">
+                      <a:solidFill>
+                        <a:srgbClr val="2E3348"/>
+                      </a:solidFill>
+                    </a:lnR>
+                    <a:lnT w="6350" cap="flat">
+                      <a:solidFill>
+                        <a:srgbClr val="2E3348"/>
+                      </a:solidFill>
+                    </a:lnT>
+                    <a:lnB w="6350" cap="flat">
+                      <a:solidFill>
+                        <a:srgbClr val="2E3348"/>
+                      </a:solidFill>
+                    </a:lnB>
+                  </a:tcPr>
+                </a:tc>
+                <a:tc>
+                  <a:txBody>
+                    <a:bodyPr wrap="square"/>
+                    <a:lstStyle/>
+                    <a:p>
+                      <a:pPr algn="l"/>
+                      <a:r>
+                        <a:rPr sz="700" b="0">
+                          <a:solidFill>
+                            <a:srgbClr val="E2E8F0"/>
+                          </a:solidFill>
+                        </a:rPr>
+                        <a:t>https://events.sumologic.com/metricanalyticspm07082026-event-training</a:t>
+                      </a:r>
+                    </a:p>
+                  </a:txBody>
+                  <a:tcPr>
+                    <a:solidFill>
+                      <a:srgbClr val="0F1117"/>
+                    </a:solidFill>
+                    <a:lnL w="6350" cap="flat">
+                      <a:solidFill>
+                        <a:srgbClr val="2E3348"/>
+                      </a:solidFill>
+                    </a:lnL>
+                    <a:lnR w="6350" cap="flat">
+                      <a:solidFill>
+                        <a:srgbClr val="2E3348"/>
+                      </a:solidFill>
+                    </a:lnR>
+                    <a:lnT w="6350" cap="flat">
+                      <a:solidFill>
+                        <a:srgbClr val="2E3348"/>
+                      </a:solidFill>
+                    </a:lnT>
+                    <a:lnB w="6350" cap="flat">
+                      <a:solidFill>
+                        <a:srgbClr val="2E3348"/>
+                      </a:solidFill>
+                    </a:lnB>
+                  </a:tcPr>
+                </a:tc>
+              </a:tr>
+              <a:tr h="420624">
+                <a:tc>
+                  <a:txBody>
+                    <a:bodyPr wrap="square"/>
+                    <a:lstStyle/>
+                    <a:p>
+                      <a:pPr algn="l"/>
+                      <a:r>
+                        <a:rPr sz="800" b="0">
+                          <a:solidFill>
+                            <a:srgbClr val="E2E8F0"/>
+                          </a:solidFill>
+                        </a:rPr>
+                        <a:t>Mobot Essentials AM</a:t>
+                      </a:r>
+                    </a:p>
+                  </a:txBody>
+                  <a:tcPr>
+                    <a:solidFill>
+                      <a:srgbClr val="1A1D27"/>
+                    </a:solidFill>
+                    <a:lnL w="6350" cap="flat">
+                      <a:solidFill>
+                        <a:srgbClr val="2E3348"/>
+                      </a:solidFill>
+                    </a:lnL>
+                    <a:lnR w="6350" cap="flat">
+                      <a:solidFill>
+                        <a:srgbClr val="2E3348"/>
+                      </a:solidFill>
+                    </a:lnR>
+                    <a:lnT w="6350" cap="flat">
+                      <a:solidFill>
+                        <a:srgbClr val="2E3348"/>
+                      </a:solidFill>
+                    </a:lnT>
+                    <a:lnB w="6350" cap="flat">
+                      <a:solidFill>
+                        <a:srgbClr val="2E3348"/>
+                      </a:solidFill>
+                    </a:lnB>
+                  </a:tcPr>
+                </a:tc>
+                <a:tc>
+                  <a:txBody>
+                    <a:bodyPr wrap="none"/>
+                    <a:lstStyle/>
+                    <a:p>
+                      <a:pPr algn="l"/>
+                      <a:r>
+                        <a:rPr sz="800" b="0">
+                          <a:solidFill>
+                            <a:srgbClr val="E2E8F0"/>
+                          </a:solidFill>
+                        </a:rPr>
+                        <a:t>Thu 09 Jul 2026  07:00 AM  →  08:30 AM</a:t>
+                      </a:r>
+                    </a:p>
+                  </a:txBody>
+                  <a:tcPr>
+                    <a:solidFill>
+                      <a:srgbClr val="1A1D27"/>
+                    </a:solidFill>
+                    <a:lnL w="6350" cap="flat">
+                      <a:solidFill>
+                        <a:srgbClr val="2E3348"/>
+                      </a:solidFill>
+                    </a:lnL>
+                    <a:lnR w="6350" cap="flat">
+                      <a:solidFill>
+                        <a:srgbClr val="2E3348"/>
+                      </a:solidFill>
+                    </a:lnR>
+                    <a:lnT w="6350" cap="flat">
+                      <a:solidFill>
+                        <a:srgbClr val="2E3348"/>
+                      </a:solidFill>
+                    </a:lnT>
+                    <a:lnB w="6350" cap="flat">
+                      <a:solidFill>
+                        <a:srgbClr val="2E3348"/>
+                      </a:solidFill>
+                    </a:lnB>
+                  </a:tcPr>
+                </a:tc>
+                <a:tc>
+                  <a:txBody>
+                    <a:bodyPr wrap="none"/>
+                    <a:lstStyle/>
+                    <a:p>
+                      <a:pPr algn="l"/>
+                      <a:r>
+                        <a:rPr sz="800" b="0">
+                          <a:solidFill>
+                            <a:srgbClr val="E2E8F0"/>
+                          </a:solidFill>
+                        </a:rPr>
+                        <a:t>Fri 10 Jul 2026  02:00 AM</a:t>
+                      </a:r>
+                    </a:p>
+                  </a:txBody>
+                  <a:tcPr>
+                    <a:solidFill>
+                      <a:srgbClr val="1A1D27"/>
+                    </a:solidFill>
+                    <a:lnL w="6350" cap="flat">
+                      <a:solidFill>
+                        <a:srgbClr val="2E3348"/>
+                      </a:solidFill>
+                    </a:lnL>
+                    <a:lnR w="6350" cap="flat">
+                      <a:solidFill>
+                        <a:srgbClr val="2E3348"/>
+                      </a:solidFill>
+                    </a:lnR>
+                    <a:lnT w="6350" cap="flat">
+                      <a:solidFill>
+                        <a:srgbClr val="2E3348"/>
+                      </a:solidFill>
+                    </a:lnT>
+                    <a:lnB w="6350" cap="flat">
+                      <a:solidFill>
+                        <a:srgbClr val="2E3348"/>
+                      </a:solidFill>
+                    </a:lnB>
+                  </a:tcPr>
+                </a:tc>
+                <a:tc>
+                  <a:txBody>
+                    <a:bodyPr wrap="none"/>
+                    <a:lstStyle/>
+                    <a:p>
+                      <a:pPr algn="l"/>
+                      <a:r>
+                        <a:rPr sz="800" b="0">
+                          <a:solidFill>
+                            <a:srgbClr val="E2E8F0"/>
+                          </a:solidFill>
+                        </a:rPr>
+                        <a:t>Fri 10 Jul 2026  12:00 AM</a:t>
+                      </a:r>
+                    </a:p>
+                  </a:txBody>
+                  <a:tcPr>
+                    <a:solidFill>
+                      <a:srgbClr val="1A1D27"/>
+                    </a:solidFill>
+                    <a:lnL w="6350" cap="flat">
+                      <a:solidFill>
+                        <a:srgbClr val="2E3348"/>
+                      </a:solidFill>
+                    </a:lnL>
+                    <a:lnR w="6350" cap="flat">
+                      <a:solidFill>
+                        <a:srgbClr val="2E3348"/>
+                      </a:solidFill>
+                    </a:lnR>
+                    <a:lnT w="6350" cap="flat">
+                      <a:solidFill>
+                        <a:srgbClr val="2E3348"/>
+                      </a:solidFill>
+                    </a:lnT>
+                    <a:lnB w="6350" cap="flat">
+                      <a:solidFill>
+                        <a:srgbClr val="2E3348"/>
+                      </a:solidFill>
+                    </a:lnB>
+                  </a:tcPr>
+                </a:tc>
+                <a:tc>
+                  <a:txBody>
+                    <a:bodyPr wrap="none"/>
+                    <a:lstStyle/>
+                    <a:p>
+                      <a:pPr algn="l"/>
+                      <a:r>
+                        <a:rPr sz="800" b="0">
+                          <a:solidFill>
+                            <a:srgbClr val="E2E8F0"/>
+                          </a:solidFill>
+                        </a:rPr>
+                        <a:t>Thu 09 Jul 2026  10:00 PM</a:t>
+                      </a:r>
+                    </a:p>
+                  </a:txBody>
+                  <a:tcPr>
+                    <a:solidFill>
+                      <a:srgbClr val="1A1D27"/>
+                    </a:solidFill>
+                    <a:lnL w="6350" cap="flat">
+                      <a:solidFill>
+                        <a:srgbClr val="2E3348"/>
+                      </a:solidFill>
+                    </a:lnL>
+                    <a:lnR w="6350" cap="flat">
+                      <a:solidFill>
+                        <a:srgbClr val="2E3348"/>
+                      </a:solidFill>
+                    </a:lnR>
+                    <a:lnT w="6350" cap="flat">
+                      <a:solidFill>
+                        <a:srgbClr val="2E3348"/>
+                      </a:solidFill>
+                    </a:lnT>
+                    <a:lnB w="6350" cap="flat">
+                      <a:solidFill>
+                        <a:srgbClr val="2E3348"/>
+                      </a:solidFill>
+                    </a:lnB>
+                  </a:tcPr>
+                </a:tc>
+                <a:tc>
+                  <a:txBody>
+                    <a:bodyPr wrap="square"/>
+                    <a:lstStyle/>
+                    <a:p>
+                      <a:pPr algn="l"/>
+                      <a:r>
+                        <a:rPr sz="700" b="0">
+                          <a:solidFill>
+                            <a:srgbClr val="E2E8F0"/>
+                          </a:solidFill>
+                        </a:rPr>
+                        <a:t>https://events.sumologic.com/mobotam07092026-event-training</a:t>
+                      </a:r>
+                    </a:p>
+                  </a:txBody>
+                  <a:tcPr>
+                    <a:solidFill>
+                      <a:srgbClr val="1A1D27"/>
+                    </a:solidFill>
+                    <a:lnL w="6350" cap="flat">
+                      <a:solidFill>
+                        <a:srgbClr val="2E3348"/>
+                      </a:solidFill>
+                    </a:lnL>
+                    <a:lnR w="6350" cap="flat">
+                      <a:solidFill>
+                        <a:srgbClr val="2E3348"/>
+                      </a:solidFill>
+                    </a:lnR>
+                    <a:lnT w="6350" cap="flat">
+                      <a:solidFill>
+                        <a:srgbClr val="2E3348"/>
+                      </a:solidFill>
+                    </a:lnT>
+                    <a:lnB w="6350" cap="flat">
+                      <a:solidFill>
+                        <a:srgbClr val="2E3348"/>
+                      </a:solidFill>
+                    </a:lnB>
+                  </a:tcPr>
+                </a:tc>
+              </a:tr>
+              <a:tr h="420624">
+                <a:tc>
+                  <a:txBody>
+                    <a:bodyPr wrap="square"/>
+                    <a:lstStyle/>
+                    <a:p>
+                      <a:pPr algn="l"/>
+                      <a:r>
+                        <a:rPr sz="800" b="0">
+                          <a:solidFill>
+                            <a:srgbClr val="E2E8F0"/>
+                          </a:solidFill>
+                        </a:rPr>
+                        <a:t>Mobot Essentials PM</a:t>
+                      </a:r>
+                    </a:p>
+                  </a:txBody>
+                  <a:tcPr>
+                    <a:solidFill>
+                      <a:srgbClr val="0F1117"/>
+                    </a:solidFill>
+                    <a:lnL w="6350" cap="flat">
+                      <a:solidFill>
+                        <a:srgbClr val="2E3348"/>
+                      </a:solidFill>
+                    </a:lnL>
+                    <a:lnR w="6350" cap="flat">
+                      <a:solidFill>
+                        <a:srgbClr val="2E3348"/>
+                      </a:solidFill>
+                    </a:lnR>
+                    <a:lnT w="6350" cap="flat">
+                      <a:solidFill>
+                        <a:srgbClr val="2E3348"/>
+                      </a:solidFill>
+                    </a:lnT>
+                    <a:lnB w="6350" cap="flat">
+                      <a:solidFill>
+                        <a:srgbClr val="2E3348"/>
+                      </a:solidFill>
+                    </a:lnB>
+                  </a:tcPr>
+                </a:tc>
+                <a:tc>
+                  <a:txBody>
+                    <a:bodyPr wrap="none"/>
+                    <a:lstStyle/>
+                    <a:p>
+                      <a:pPr algn="l"/>
+                      <a:r>
+                        <a:rPr sz="800" b="0">
+                          <a:solidFill>
+                            <a:srgbClr val="E2E8F0"/>
+                          </a:solidFill>
+                        </a:rPr>
+                        <a:t>Thu 09 Jul 2026  04:00 PM  →  05:30 PM</a:t>
+                      </a:r>
+                    </a:p>
+                  </a:txBody>
+                  <a:tcPr>
+                    <a:solidFill>
+                      <a:srgbClr val="0F1117"/>
+                    </a:solidFill>
+                    <a:lnL w="6350" cap="flat">
+                      <a:solidFill>
+                        <a:srgbClr val="2E3348"/>
+                      </a:solidFill>
+                    </a:lnL>
+                    <a:lnR w="6350" cap="flat">
+                      <a:solidFill>
+                        <a:srgbClr val="2E3348"/>
+                      </a:solidFill>
+                    </a:lnR>
+                    <a:lnT w="6350" cap="flat">
+                      <a:solidFill>
+                        <a:srgbClr val="2E3348"/>
+                      </a:solidFill>
+                    </a:lnT>
+                    <a:lnB w="6350" cap="flat">
+                      <a:solidFill>
+                        <a:srgbClr val="2E3348"/>
+                      </a:solidFill>
+                    </a:lnB>
+                  </a:tcPr>
+                </a:tc>
+                <a:tc>
+                  <a:txBody>
+                    <a:bodyPr wrap="none"/>
+                    <a:lstStyle/>
+                    <a:p>
+                      <a:pPr algn="l"/>
+                      <a:r>
+                        <a:rPr sz="800" b="0">
+                          <a:solidFill>
+                            <a:srgbClr val="E2E8F0"/>
+                          </a:solidFill>
+                        </a:rPr>
+                        <a:t>Fri 10 Jul 2026  11:00 AM</a:t>
+                      </a:r>
+                    </a:p>
+                  </a:txBody>
+                  <a:tcPr>
+                    <a:solidFill>
+                      <a:srgbClr val="0F1117"/>
+                    </a:solidFill>
+                    <a:lnL w="6350" cap="flat">
+                      <a:solidFill>
+                        <a:srgbClr val="2E3348"/>
+                      </a:solidFill>
+                    </a:lnL>
+                    <a:lnR w="6350" cap="flat">
+                      <a:solidFill>
+                        <a:srgbClr val="2E3348"/>
+                      </a:solidFill>
+                    </a:lnR>
+                    <a:lnT w="6350" cap="flat">
+                      <a:solidFill>
+                        <a:srgbClr val="2E3348"/>
+                      </a:solidFill>
+                    </a:lnT>
+                    <a:lnB w="6350" cap="flat">
+                      <a:solidFill>
+                        <a:srgbClr val="2E3348"/>
+                      </a:solidFill>
+                    </a:lnB>
+                  </a:tcPr>
+                </a:tc>
+                <a:tc>
+                  <a:txBody>
+                    <a:bodyPr wrap="none"/>
+                    <a:lstStyle/>
+                    <a:p>
+                      <a:pPr algn="l"/>
+                      <a:r>
+                        <a:rPr sz="800" b="0">
+                          <a:solidFill>
+                            <a:srgbClr val="E2E8F0"/>
+                          </a:solidFill>
+                        </a:rPr>
+                        <a:t>Fri 10 Jul 2026  09:00 AM</a:t>
+                      </a:r>
+                    </a:p>
+                  </a:txBody>
+                  <a:tcPr>
+                    <a:solidFill>
+                      <a:srgbClr val="0F1117"/>
+                    </a:solidFill>
+                    <a:lnL w="6350" cap="flat">
+                      <a:solidFill>
+                        <a:srgbClr val="2E3348"/>
+                      </a:solidFill>
+                    </a:lnL>
+                    <a:lnR w="6350" cap="flat">
+                      <a:solidFill>
+                        <a:srgbClr val="2E3348"/>
+                      </a:solidFill>
+                    </a:lnR>
+                    <a:lnT w="6350" cap="flat">
+                      <a:solidFill>
+                        <a:srgbClr val="2E3348"/>
+                      </a:solidFill>
+                    </a:lnT>
+                    <a:lnB w="6350" cap="flat">
+                      <a:solidFill>
+                        <a:srgbClr val="2E3348"/>
+                      </a:solidFill>
+                    </a:lnB>
+                  </a:tcPr>
+                </a:tc>
+                <a:tc>
+                  <a:txBody>
+                    <a:bodyPr wrap="none"/>
+                    <a:lstStyle/>
+                    <a:p>
+                      <a:pPr algn="l"/>
+                      <a:r>
+                        <a:rPr sz="800" b="0">
+                          <a:solidFill>
+                            <a:srgbClr val="E2E8F0"/>
+                          </a:solidFill>
+                        </a:rPr>
+                        <a:t>Fri 10 Jul 2026  07:00 AM</a:t>
+                      </a:r>
+                    </a:p>
+                  </a:txBody>
+                  <a:tcPr>
+                    <a:solidFill>
+                      <a:srgbClr val="0F1117"/>
+                    </a:solidFill>
+                    <a:lnL w="6350" cap="flat">
+                      <a:solidFill>
+                        <a:srgbClr val="2E3348"/>
+                      </a:solidFill>
+                    </a:lnL>
+                    <a:lnR w="6350" cap="flat">
+                      <a:solidFill>
+                        <a:srgbClr val="2E3348"/>
+                      </a:solidFill>
+                    </a:lnR>
+                    <a:lnT w="6350" cap="flat">
+                      <a:solidFill>
+                        <a:srgbClr val="2E3348"/>
+                      </a:solidFill>
+                    </a:lnT>
+                    <a:lnB w="6350" cap="flat">
+                      <a:solidFill>
+                        <a:srgbClr val="2E3348"/>
+                      </a:solidFill>
+                    </a:lnB>
+                  </a:tcPr>
+                </a:tc>
+                <a:tc>
+                  <a:txBody>
+                    <a:bodyPr wrap="square"/>
+                    <a:lstStyle/>
+                    <a:p>
+                      <a:pPr algn="l"/>
+                      <a:r>
+                        <a:rPr sz="700" b="0">
+                          <a:solidFill>
+                            <a:srgbClr val="E2E8F0"/>
+                          </a:solidFill>
+                        </a:rPr>
+                        <a:t>https://events.sumologic.com/mobotessentialspm07092026-event-training</a:t>
+                      </a:r>
+                    </a:p>
+                  </a:txBody>
+                  <a:tcPr>
+                    <a:solidFill>
+                      <a:srgbClr val="0F1117"/>
+                    </a:solidFill>
+                    <a:lnL w="6350" cap="flat">
+                      <a:solidFill>
+                        <a:srgbClr val="2E3348"/>
+                      </a:solidFill>
+                    </a:lnL>
+                    <a:lnR w="6350" cap="flat">
+                      <a:solidFill>
+                        <a:srgbClr val="2E3348"/>
+                      </a:solidFill>
+                    </a:lnR>
+                    <a:lnT w="6350" cap="flat">
+                      <a:solidFill>
+                        <a:srgbClr val="2E3348"/>
+                      </a:solidFill>
+                    </a:lnT>
+                    <a:lnB w="6350" cap="flat">
+                      <a:solidFill>
+                        <a:srgbClr val="2E3348"/>
+                      </a:solidFill>
+                    </a:lnB>
+                  </a:tcPr>
+                </a:tc>
+              </a:tr>
+              <a:tr h="420624">
+                <a:tc>
+                  <a:txBody>
+                    <a:bodyPr wrap="square"/>
+                    <a:lstStyle/>
+                    <a:p>
+                      <a:pPr algn="l"/>
+                      <a:r>
+                        <a:rPr sz="800" b="0">
+                          <a:solidFill>
+                            <a:srgbClr val="E2E8F0"/>
+                          </a:solidFill>
+                        </a:rPr>
+                        <a:t>Essential Cloud SIEM skills for SOC Analysts AM</a:t>
+                      </a:r>
+                    </a:p>
+                  </a:txBody>
+                  <a:tcPr>
+                    <a:solidFill>
+                      <a:srgbClr val="1A1D27"/>
+                    </a:solidFill>
+                    <a:lnL w="6350" cap="flat">
+                      <a:solidFill>
+                        <a:srgbClr val="2E3348"/>
+                      </a:solidFill>
+                    </a:lnL>
+                    <a:lnR w="6350" cap="flat">
+                      <a:solidFill>
+                        <a:srgbClr val="2E3348"/>
+                      </a:solidFill>
+                    </a:lnR>
+                    <a:lnT w="6350" cap="flat">
+                      <a:solidFill>
+                        <a:srgbClr val="2E3348"/>
+                      </a:solidFill>
+                    </a:lnT>
+                    <a:lnB w="6350" cap="flat">
+                      <a:solidFill>
+                        <a:srgbClr val="2E3348"/>
+                      </a:solidFill>
+                    </a:lnB>
+                  </a:tcPr>
+                </a:tc>
+                <a:tc>
+                  <a:txBody>
+                    <a:bodyPr wrap="none"/>
+                    <a:lstStyle/>
+                    <a:p>
+                      <a:pPr algn="l"/>
+                      <a:r>
+                        <a:rPr sz="800" b="0">
+                          <a:solidFill>
+                            <a:srgbClr val="E2E8F0"/>
+                          </a:solidFill>
+                        </a:rPr>
+                        <a:t>Tue 14 Jul 2026  07:00 AM  →  08:30 AM</a:t>
+                      </a:r>
+                    </a:p>
+                  </a:txBody>
+                  <a:tcPr>
+                    <a:solidFill>
+                      <a:srgbClr val="1A1D27"/>
+                    </a:solidFill>
+                    <a:lnL w="6350" cap="flat">
+                      <a:solidFill>
+                        <a:srgbClr val="2E3348"/>
+                      </a:solidFill>
+                    </a:lnL>
+                    <a:lnR w="6350" cap="flat">
+                      <a:solidFill>
+                        <a:srgbClr val="2E3348"/>
+                      </a:solidFill>
+                    </a:lnR>
+                    <a:lnT w="6350" cap="flat">
+                      <a:solidFill>
+                        <a:srgbClr val="2E3348"/>
+                      </a:solidFill>
+                    </a:lnT>
+                    <a:lnB w="6350" cap="flat">
+                      <a:solidFill>
+                        <a:srgbClr val="2E3348"/>
+                      </a:solidFill>
+                    </a:lnB>
+                  </a:tcPr>
+                </a:tc>
+                <a:tc>
+                  <a:txBody>
+                    <a:bodyPr wrap="none"/>
+                    <a:lstStyle/>
+                    <a:p>
+                      <a:pPr algn="l"/>
+                      <a:r>
+                        <a:rPr sz="800" b="0">
+                          <a:solidFill>
+                            <a:srgbClr val="E2E8F0"/>
+                          </a:solidFill>
+                        </a:rPr>
+                        <a:t>Wed 15 Jul 2026  02:00 AM</a:t>
+                      </a:r>
+                    </a:p>
+                  </a:txBody>
+                  <a:tcPr>
+                    <a:solidFill>
+                      <a:srgbClr val="1A1D27"/>
+                    </a:solidFill>
+                    <a:lnL w="6350" cap="flat">
+                      <a:solidFill>
+                        <a:srgbClr val="2E3348"/>
+                      </a:solidFill>
+                    </a:lnL>
+                    <a:lnR w="6350" cap="flat">
+                      <a:solidFill>
+                        <a:srgbClr val="2E3348"/>
+                      </a:solidFill>
+                    </a:lnR>
+                    <a:lnT w="6350" cap="flat">
+                      <a:solidFill>
+                        <a:srgbClr val="2E3348"/>
+                      </a:solidFill>
+                    </a:lnT>
+                    <a:lnB w="6350" cap="flat">
+                      <a:solidFill>
+                        <a:srgbClr val="2E3348"/>
+                      </a:solidFill>
+                    </a:lnB>
+                  </a:tcPr>
+                </a:tc>
+                <a:tc>
+                  <a:txBody>
+                    <a:bodyPr wrap="none"/>
+                    <a:lstStyle/>
+                    <a:p>
+                      <a:pPr algn="l"/>
+                      <a:r>
+                        <a:rPr sz="800" b="0">
+                          <a:solidFill>
+                            <a:srgbClr val="E2E8F0"/>
+                          </a:solidFill>
+                        </a:rPr>
+                        <a:t>Wed 15 Jul 2026  12:00 AM</a:t>
+                      </a:r>
+                    </a:p>
+                  </a:txBody>
+                  <a:tcPr>
+                    <a:solidFill>
+                      <a:srgbClr val="1A1D27"/>
+                    </a:solidFill>
+                    <a:lnL w="6350" cap="flat">
+                      <a:solidFill>
+                        <a:srgbClr val="2E3348"/>
+                      </a:solidFill>
+                    </a:lnL>
+                    <a:lnR w="6350" cap="flat">
+                      <a:solidFill>
+                        <a:srgbClr val="2E3348"/>
+                      </a:solidFill>
+                    </a:lnR>
+                    <a:lnT w="6350" cap="flat">
+                      <a:solidFill>
+                        <a:srgbClr val="2E3348"/>
+                      </a:solidFill>
+                    </a:lnT>
+                    <a:lnB w="6350" cap="flat">
+                      <a:solidFill>
+                        <a:srgbClr val="2E3348"/>
+                      </a:solidFill>
+                    </a:lnB>
+                  </a:tcPr>
+                </a:tc>
+                <a:tc>
+                  <a:txBody>
+                    <a:bodyPr wrap="none"/>
+                    <a:lstStyle/>
+                    <a:p>
+                      <a:pPr algn="l"/>
+                      <a:r>
+                        <a:rPr sz="800" b="0">
+                          <a:solidFill>
+                            <a:srgbClr val="E2E8F0"/>
+                          </a:solidFill>
+                        </a:rPr>
+                        <a:t>Tue 14 Jul 2026  10:00 PM</a:t>
+                      </a:r>
+                    </a:p>
+                  </a:txBody>
+                  <a:tcPr>
+                    <a:solidFill>
+                      <a:srgbClr val="1A1D27"/>
+                    </a:solidFill>
+                    <a:lnL w="6350" cap="flat">
+                      <a:solidFill>
+                        <a:srgbClr val="2E3348"/>
+                      </a:solidFill>
+                    </a:lnL>
+                    <a:lnR w="6350" cap="flat">
+                      <a:solidFill>
+                        <a:srgbClr val="2E3348"/>
+                      </a:solidFill>
+                    </a:lnR>
+                    <a:lnT w="6350" cap="flat">
+                      <a:solidFill>
+                        <a:srgbClr val="2E3348"/>
+                      </a:solidFill>
+                    </a:lnT>
+                    <a:lnB w="6350" cap="flat">
+                      <a:solidFill>
+                        <a:srgbClr val="2E3348"/>
+                      </a:solidFill>
+                    </a:lnB>
+                  </a:tcPr>
+                </a:tc>
+                <a:tc>
+                  <a:txBody>
+                    <a:bodyPr wrap="square"/>
+                    <a:lstStyle/>
+                    <a:p>
+                      <a:pPr algn="l"/>
+                      <a:r>
+                        <a:rPr sz="700" b="0">
+                          <a:solidFill>
+                            <a:srgbClr val="E2E8F0"/>
+                          </a:solidFill>
+                        </a:rPr>
+                        <a:t>https://events.sumologic.com/esscloudsiemam07142026-event-training</a:t>
+                      </a:r>
+                    </a:p>
+                  </a:txBody>
+                  <a:tcPr>
+                    <a:solidFill>
+                      <a:srgbClr val="1A1D27"/>
+                    </a:solidFill>
+                    <a:lnL w="6350" cap="flat">
+                      <a:solidFill>
+                        <a:srgbClr val="2E3348"/>
+                      </a:solidFill>
+                    </a:lnL>
+                    <a:lnR w="6350" cap="flat">
+                      <a:solidFill>
+                        <a:srgbClr val="2E3348"/>
+                      </a:solidFill>
+                    </a:lnR>
+                    <a:lnT w="6350" cap="flat">
+                      <a:solidFill>
+                        <a:srgbClr val="2E3348"/>
+                      </a:solidFill>
+                    </a:lnT>
+                    <a:lnB w="6350" cap="flat">
+                      <a:solidFill>
+                        <a:srgbClr val="2E3348"/>
+                      </a:solidFill>
+                    </a:lnB>
+                  </a:tcPr>
+                </a:tc>
+              </a:tr>
+              <a:tr h="420624">
+                <a:tc>
+                  <a:txBody>
+                    <a:bodyPr wrap="square"/>
+                    <a:lstStyle/>
+                    <a:p>
+                      <a:pPr algn="l"/>
+                      <a:r>
+                        <a:rPr sz="800" b="0">
+                          <a:solidFill>
+                            <a:srgbClr val="E2E8F0"/>
+                          </a:solidFill>
+                        </a:rPr>
+                        <a:t>Essential Cloud SIEM skills for SOC Analysts PM</a:t>
+                      </a:r>
+                    </a:p>
+                  </a:txBody>
+                  <a:tcPr>
+                    <a:solidFill>
+                      <a:srgbClr val="0F1117"/>
+                    </a:solidFill>
+                    <a:lnL w="6350" cap="flat">
+                      <a:solidFill>
+                        <a:srgbClr val="2E3348"/>
+                      </a:solidFill>
+                    </a:lnL>
+                    <a:lnR w="6350" cap="flat">
+                      <a:solidFill>
+                        <a:srgbClr val="2E3348"/>
+                      </a:solidFill>
+                    </a:lnR>
+                    <a:lnT w="6350" cap="flat">
+                      <a:solidFill>
+                        <a:srgbClr val="2E3348"/>
+                      </a:solidFill>
+                    </a:lnT>
+                    <a:lnB w="6350" cap="flat">
+                      <a:solidFill>
+                        <a:srgbClr val="2E3348"/>
+                      </a:solidFill>
+                    </a:lnB>
+                  </a:tcPr>
+                </a:tc>
+                <a:tc>
+                  <a:txBody>
+                    <a:bodyPr wrap="none"/>
+                    <a:lstStyle/>
+                    <a:p>
+                      <a:pPr algn="l"/>
+                      <a:r>
+                        <a:rPr sz="800" b="0">
+                          <a:solidFill>
+                            <a:srgbClr val="E2E8F0"/>
+                          </a:solidFill>
+                        </a:rPr>
+                        <a:t>Tue 14 Jul 2026  04:00 PM  →  05:30 PM</a:t>
+                      </a:r>
+                    </a:p>
+                  </a:txBody>
+                  <a:tcPr>
+                    <a:solidFill>
+                      <a:srgbClr val="0F1117"/>
+                    </a:solidFill>
+                    <a:lnL w="6350" cap="flat">
+                      <a:solidFill>
+                        <a:srgbClr val="2E3348"/>
+                      </a:solidFill>
+                    </a:lnL>
+                    <a:lnR w="6350" cap="flat">
+                      <a:solidFill>
+                        <a:srgbClr val="2E3348"/>
+                      </a:solidFill>
+                    </a:lnR>
+                    <a:lnT w="6350" cap="flat">
+                      <a:solidFill>
+                        <a:srgbClr val="2E3348"/>
+                      </a:solidFill>
+                    </a:lnT>
+                    <a:lnB w="6350" cap="flat">
+                      <a:solidFill>
+                        <a:srgbClr val="2E3348"/>
+                      </a:solidFill>
+                    </a:lnB>
+                  </a:tcPr>
+                </a:tc>
+                <a:tc>
+                  <a:txBody>
+                    <a:bodyPr wrap="none"/>
+                    <a:lstStyle/>
+                    <a:p>
+                      <a:pPr algn="l"/>
+                      <a:r>
+                        <a:rPr sz="800" b="0">
+                          <a:solidFill>
+                            <a:srgbClr val="E2E8F0"/>
+                          </a:solidFill>
+                        </a:rPr>
+                        <a:t>Wed 15 Jul 2026  11:00 AM</a:t>
+                      </a:r>
+                    </a:p>
+                  </a:txBody>
+                  <a:tcPr>
+                    <a:solidFill>
+                      <a:srgbClr val="0F1117"/>
+                    </a:solidFill>
+                    <a:lnL w="6350" cap="flat">
+                      <a:solidFill>
+                        <a:srgbClr val="2E3348"/>
+                      </a:solidFill>
+                    </a:lnL>
+                    <a:lnR w="6350" cap="flat">
+                      <a:solidFill>
+                        <a:srgbClr val="2E3348"/>
+                      </a:solidFill>
+                    </a:lnR>
+                    <a:lnT w="6350" cap="flat">
+                      <a:solidFill>
+                        <a:srgbClr val="2E3348"/>
+                      </a:solidFill>
+                    </a:lnT>
+                    <a:lnB w="6350" cap="flat">
+                      <a:solidFill>
+                        <a:srgbClr val="2E3348"/>
+                      </a:solidFill>
+                    </a:lnB>
+                  </a:tcPr>
+                </a:tc>
+                <a:tc>
+                  <a:txBody>
+                    <a:bodyPr wrap="none"/>
+                    <a:lstStyle/>
+                    <a:p>
+                      <a:pPr algn="l"/>
+                      <a:r>
+                        <a:rPr sz="800" b="0">
+                          <a:solidFill>
+                            <a:srgbClr val="E2E8F0"/>
+                          </a:solidFill>
+                        </a:rPr>
+                        <a:t>Wed 15 Jul 2026  09:00 AM</a:t>
+                      </a:r>
+                    </a:p>
+                  </a:txBody>
+                  <a:tcPr>
+                    <a:solidFill>
+                      <a:srgbClr val="0F1117"/>
+                    </a:solidFill>
+                    <a:lnL w="6350" cap="flat">
+                      <a:solidFill>
+                        <a:srgbClr val="2E3348"/>
+                      </a:solidFill>
+                    </a:lnL>
+                    <a:lnR w="6350" cap="flat">
+                      <a:solidFill>
+                        <a:srgbClr val="2E3348"/>
+                      </a:solidFill>
+                    </a:lnR>
+                    <a:lnT w="6350" cap="flat">
+                      <a:solidFill>
+                        <a:srgbClr val="2E3348"/>
+                      </a:solidFill>
+                    </a:lnT>
+                    <a:lnB w="6350" cap="flat">
+                      <a:solidFill>
+                        <a:srgbClr val="2E3348"/>
+                      </a:solidFill>
+                    </a:lnB>
+                  </a:tcPr>
+                </a:tc>
+                <a:tc>
+                  <a:txBody>
+                    <a:bodyPr wrap="none"/>
+                    <a:lstStyle/>
+                    <a:p>
+                      <a:pPr algn="l"/>
+                      <a:r>
+                        <a:rPr sz="800" b="0">
+                          <a:solidFill>
+                            <a:srgbClr val="E2E8F0"/>
+                          </a:solidFill>
+                        </a:rPr>
+                        <a:t>Wed 15 Jul 2026  07:00 AM</a:t>
+                      </a:r>
+                    </a:p>
+                  </a:txBody>
+                  <a:tcPr>
+                    <a:solidFill>
+                      <a:srgbClr val="0F1117"/>
+                    </a:solidFill>
+                    <a:lnL w="6350" cap="flat">
+                      <a:solidFill>
+                        <a:srgbClr val="2E3348"/>
+                      </a:solidFill>
+                    </a:lnL>
+                    <a:lnR w="6350" cap="flat">
+                      <a:solidFill>
+                        <a:srgbClr val="2E3348"/>
+                      </a:solidFill>
+                    </a:lnR>
+                    <a:lnT w="6350" cap="flat">
+                      <a:solidFill>
+                        <a:srgbClr val="2E3348"/>
+                      </a:solidFill>
+                    </a:lnT>
+                    <a:lnB w="6350" cap="flat">
+                      <a:solidFill>
+                        <a:srgbClr val="2E3348"/>
+                      </a:solidFill>
+                    </a:lnB>
+                  </a:tcPr>
+                </a:tc>
+                <a:tc>
+                  <a:txBody>
+                    <a:bodyPr wrap="square"/>
+                    <a:lstStyle/>
+                    <a:p>
+                      <a:pPr algn="l"/>
+                      <a:r>
+                        <a:rPr sz="700" b="0">
+                          <a:solidFill>
+                            <a:srgbClr val="E2E8F0"/>
+                          </a:solidFill>
+                        </a:rPr>
+                        <a:t>https://events.sumologic.com/esscloudsiem07142026-event-training</a:t>
+                      </a:r>
+                    </a:p>
+                  </a:txBody>
+                  <a:tcPr>
+                    <a:solidFill>
+                      <a:srgbClr val="0F1117"/>
+                    </a:solidFill>
+                    <a:lnL w="6350" cap="flat">
+                      <a:solidFill>
+                        <a:srgbClr val="2E3348"/>
+                      </a:solidFill>
+                    </a:lnL>
+                    <a:lnR w="6350" cap="flat">
+                      <a:solidFill>
+                        <a:srgbClr val="2E3348"/>
+                      </a:solidFill>
+                    </a:lnR>
+                    <a:lnT w="6350" cap="flat">
+                      <a:solidFill>
+                        <a:srgbClr val="2E3348"/>
+                      </a:solidFill>
+                    </a:lnT>
+                    <a:lnB w="6350" cap="flat">
+                      <a:solidFill>
+                        <a:srgbClr val="2E3348"/>
+                      </a:solidFill>
+                    </a:lnB>
+                  </a:tcPr>
+                </a:tc>
+              </a:tr>
+              <a:tr h="420624">
+                <a:tc>
+                  <a:txBody>
+                    <a:bodyPr wrap="square"/>
+                    <a:lstStyle/>
+                    <a:p>
+                      <a:pPr algn="l"/>
+                      <a:r>
+                        <a:rPr sz="800" b="0">
+                          <a:solidFill>
+                            <a:srgbClr val="E2E8F0"/>
+                          </a:solidFill>
+                        </a:rPr>
+                        <a:t>Cloud SIEM AM</a:t>
+                      </a:r>
+                    </a:p>
+                  </a:txBody>
+                  <a:tcPr>
+                    <a:solidFill>
+                      <a:srgbClr val="1A1D27"/>
+                    </a:solidFill>
+                    <a:lnL w="6350" cap="flat">
+                      <a:solidFill>
+                        <a:srgbClr val="2E3348"/>
+                      </a:solidFill>
+                    </a:lnL>
+                    <a:lnR w="6350" cap="flat">
+                      <a:solidFill>
+                        <a:srgbClr val="2E3348"/>
+                      </a:solidFill>
+                    </a:lnR>
+                    <a:lnT w="6350" cap="flat">
+                      <a:solidFill>
+                        <a:srgbClr val="2E3348"/>
+                      </a:solidFill>
+                    </a:lnT>
+                    <a:lnB w="6350" cap="flat">
+                      <a:solidFill>
+                        <a:srgbClr val="2E3348"/>
+                      </a:solidFill>
+                    </a:lnB>
+                  </a:tcPr>
+                </a:tc>
+                <a:tc>
+                  <a:txBody>
+                    <a:bodyPr wrap="none"/>
+                    <a:lstStyle/>
+                    <a:p>
+                      <a:pPr algn="l"/>
+                      <a:r>
+                        <a:rPr sz="800" b="0">
+                          <a:solidFill>
+                            <a:srgbClr val="E2E8F0"/>
+                          </a:solidFill>
+                        </a:rPr>
+                        <a:t>Wed 15 Jul 2026  07:00 AM  →  10:00 AM</a:t>
+                      </a:r>
+                    </a:p>
+                  </a:txBody>
+                  <a:tcPr>
+                    <a:solidFill>
+                      <a:srgbClr val="1A1D27"/>
+                    </a:solidFill>
+                    <a:lnL w="6350" cap="flat">
+                      <a:solidFill>
+                        <a:srgbClr val="2E3348"/>
+                      </a:solidFill>
+                    </a:lnL>
+                    <a:lnR w="6350" cap="flat">
+                      <a:solidFill>
+                        <a:srgbClr val="2E3348"/>
+                      </a:solidFill>
+                    </a:lnR>
+                    <a:lnT w="6350" cap="flat">
+                      <a:solidFill>
+                        <a:srgbClr val="2E3348"/>
+                      </a:solidFill>
+                    </a:lnT>
+                    <a:lnB w="6350" cap="flat">
+                      <a:solidFill>
+                        <a:srgbClr val="2E3348"/>
+                      </a:solidFill>
+                    </a:lnB>
+                  </a:tcPr>
+                </a:tc>
+                <a:tc>
+                  <a:txBody>
+                    <a:bodyPr wrap="none"/>
+                    <a:lstStyle/>
+                    <a:p>
+                      <a:pPr algn="l"/>
+                      <a:r>
+                        <a:rPr sz="800" b="0">
+                          <a:solidFill>
+                            <a:srgbClr val="E2E8F0"/>
+                          </a:solidFill>
+                        </a:rPr>
+                        <a:t>Thu 16 Jul 2026  02:00 AM</a:t>
+                      </a:r>
+                    </a:p>
+                  </a:txBody>
+                  <a:tcPr>
+                    <a:solidFill>
+                      <a:srgbClr val="1A1D27"/>
+                    </a:solidFill>
+                    <a:lnL w="6350" cap="flat">
+                      <a:solidFill>
+                        <a:srgbClr val="2E3348"/>
+                      </a:solidFill>
+                    </a:lnL>
+                    <a:lnR w="6350" cap="flat">
+                      <a:solidFill>
+                        <a:srgbClr val="2E3348"/>
+                      </a:solidFill>
+                    </a:lnR>
+                    <a:lnT w="6350" cap="flat">
+                      <a:solidFill>
+                        <a:srgbClr val="2E3348"/>
+                      </a:solidFill>
+                    </a:lnT>
+                    <a:lnB w="6350" cap="flat">
+                      <a:solidFill>
+                        <a:srgbClr val="2E3348"/>
+                      </a:solidFill>
+                    </a:lnB>
+                  </a:tcPr>
+                </a:tc>
+                <a:tc>
+                  <a:txBody>
+                    <a:bodyPr wrap="none"/>
+                    <a:lstStyle/>
+                    <a:p>
+                      <a:pPr algn="l"/>
+                      <a:r>
+                        <a:rPr sz="800" b="0">
+                          <a:solidFill>
+                            <a:srgbClr val="E2E8F0"/>
+                          </a:solidFill>
+                        </a:rPr>
+                        <a:t>Thu 16 Jul 2026  12:00 AM</a:t>
+                      </a:r>
+                    </a:p>
+                  </a:txBody>
+                  <a:tcPr>
+                    <a:solidFill>
+                      <a:srgbClr val="1A1D27"/>
+                    </a:solidFill>
+                    <a:lnL w="6350" cap="flat">
+                      <a:solidFill>
+                        <a:srgbClr val="2E3348"/>
+                      </a:solidFill>
+                    </a:lnL>
+                    <a:lnR w="6350" cap="flat">
+                      <a:solidFill>
+                        <a:srgbClr val="2E3348"/>
+                      </a:solidFill>
+                    </a:lnR>
+                    <a:lnT w="6350" cap="flat">
+                      <a:solidFill>
+                        <a:srgbClr val="2E3348"/>
+                      </a:solidFill>
+                    </a:lnT>
+                    <a:lnB w="6350" cap="flat">
+                      <a:solidFill>
+                        <a:srgbClr val="2E3348"/>
+                      </a:solidFill>
+                    </a:lnB>
+                  </a:tcPr>
+                </a:tc>
+                <a:tc>
+                  <a:txBody>
+                    <a:bodyPr wrap="none"/>
+                    <a:lstStyle/>
+                    <a:p>
+                      <a:pPr algn="l"/>
+                      <a:r>
+                        <a:rPr sz="800" b="0">
+                          <a:solidFill>
+                            <a:srgbClr val="E2E8F0"/>
+                          </a:solidFill>
+                        </a:rPr>
+                        <a:t>Wed 15 Jul 2026  10:00 PM</a:t>
+                      </a:r>
+                    </a:p>
+                  </a:txBody>
+                  <a:tcPr>
+                    <a:solidFill>
+                      <a:srgbClr val="1A1D27"/>
+                    </a:solidFill>
+                    <a:lnL w="6350" cap="flat">
+                      <a:solidFill>
+                        <a:srgbClr val="2E3348"/>
+                      </a:solidFill>
+                    </a:lnL>
+                    <a:lnR w="6350" cap="flat">
+                      <a:solidFill>
+                        <a:srgbClr val="2E3348"/>
+                      </a:solidFill>
+                    </a:lnR>
+                    <a:lnT w="6350" cap="flat">
+                      <a:solidFill>
+                        <a:srgbClr val="2E3348"/>
+                      </a:solidFill>
+                    </a:lnT>
+                    <a:lnB w="6350" cap="flat">
+                      <a:solidFill>
+                        <a:srgbClr val="2E3348"/>
+                      </a:solidFill>
+                    </a:lnB>
+                  </a:tcPr>
+                </a:tc>
+                <a:tc>
+                  <a:txBody>
+                    <a:bodyPr wrap="square"/>
+                    <a:lstStyle/>
+                    <a:p>
+                      <a:pPr algn="l"/>
+                      <a:r>
+                        <a:rPr sz="700" b="0">
+                          <a:solidFill>
+                            <a:srgbClr val="E2E8F0"/>
+                          </a:solidFill>
+                        </a:rPr>
+                        <a:t>https://events.sumologic.com/cloudsiemam07152026-event-training</a:t>
+                      </a:r>
+                    </a:p>
+                  </a:txBody>
+                  <a:tcPr>
+                    <a:solidFill>
+                      <a:srgbClr val="1A1D27"/>
+                    </a:solidFill>
+                    <a:lnL w="6350" cap="flat">
+                      <a:solidFill>
+                        <a:srgbClr val="2E3348"/>
+                      </a:solidFill>
+                    </a:lnL>
+                    <a:lnR w="6350" cap="flat">
+                      <a:solidFill>
+                        <a:srgbClr val="2E3348"/>
+                      </a:solidFill>
+                    </a:lnR>
+                    <a:lnT w="6350" cap="flat">
+                      <a:solidFill>
+                        <a:srgbClr val="2E3348"/>
+                      </a:solidFill>
+                    </a:lnT>
+                    <a:lnB w="6350" cap="flat">
+                      <a:solidFill>
+                        <a:srgbClr val="2E3348"/>
+                      </a:solidFill>
+                    </a:lnB>
+                  </a:tcPr>
+                </a:tc>
+              </a:tr>
+              <a:tr h="420624">
+                <a:tc>
+                  <a:txBody>
+                    <a:bodyPr wrap="square"/>
+                    <a:lstStyle/>
+                    <a:p>
+                      <a:pPr algn="l"/>
+                      <a:r>
+                        <a:rPr sz="800" b="0">
+                          <a:solidFill>
+                            <a:srgbClr val="E2E8F0"/>
+                          </a:solidFill>
+                        </a:rPr>
+                        <a:t>Cloud SIEM PM</a:t>
+                      </a:r>
+                    </a:p>
+                  </a:txBody>
+                  <a:tcPr>
+                    <a:solidFill>
+                      <a:srgbClr val="0F1117"/>
+                    </a:solidFill>
+                    <a:lnL w="6350" cap="flat">
+                      <a:solidFill>
+                        <a:srgbClr val="2E3348"/>
+                      </a:solidFill>
+                    </a:lnL>
+                    <a:lnR w="6350" cap="flat">
+                      <a:solidFill>
+                        <a:srgbClr val="2E3348"/>
+                      </a:solidFill>
+                    </a:lnR>
+                    <a:lnT w="6350" cap="flat">
+                      <a:solidFill>
+                        <a:srgbClr val="2E3348"/>
+                      </a:solidFill>
+                    </a:lnT>
+                    <a:lnB w="6350" cap="flat">
+                      <a:solidFill>
+                        <a:srgbClr val="2E3348"/>
+                      </a:solidFill>
+                    </a:lnB>
+                  </a:tcPr>
+                </a:tc>
+                <a:tc>
+                  <a:txBody>
+                    <a:bodyPr wrap="none"/>
+                    <a:lstStyle/>
+                    <a:p>
+                      <a:pPr algn="l"/>
+                      <a:r>
+                        <a:rPr sz="800" b="0">
+                          <a:solidFill>
+                            <a:srgbClr val="E2E8F0"/>
+                          </a:solidFill>
+                        </a:rPr>
+                        <a:t>Wed 15 Jul 2026  04:00 PM  →  07:00 PM</a:t>
+                      </a:r>
+                    </a:p>
+                  </a:txBody>
+                  <a:tcPr>
+                    <a:solidFill>
+                      <a:srgbClr val="0F1117"/>
+                    </a:solidFill>
+                    <a:lnL w="6350" cap="flat">
+                      <a:solidFill>
+                        <a:srgbClr val="2E3348"/>
+                      </a:solidFill>
+                    </a:lnL>
+                    <a:lnR w="6350" cap="flat">
+                      <a:solidFill>
+                        <a:srgbClr val="2E3348"/>
+                      </a:solidFill>
+                    </a:lnR>
+                    <a:lnT w="6350" cap="flat">
+                      <a:solidFill>
+                        <a:srgbClr val="2E3348"/>
+                      </a:solidFill>
+                    </a:lnT>
+                    <a:lnB w="6350" cap="flat">
+                      <a:solidFill>
+                        <a:srgbClr val="2E3348"/>
+                      </a:solidFill>
+                    </a:lnB>
+                  </a:tcPr>
+                </a:tc>
+                <a:tc>
+                  <a:txBody>
+                    <a:bodyPr wrap="none"/>
+                    <a:lstStyle/>
+                    <a:p>
+                      <a:pPr algn="l"/>
+                      <a:r>
+                        <a:rPr sz="800" b="0">
+                          <a:solidFill>
+                            <a:srgbClr val="E2E8F0"/>
+                          </a:solidFill>
+                        </a:rPr>
+                        <a:t>Thu 16 Jul 2026  11:00 AM</a:t>
+                      </a:r>
+                    </a:p>
+                  </a:txBody>
+                  <a:tcPr>
+                    <a:solidFill>
+                      <a:srgbClr val="0F1117"/>
+                    </a:solidFill>
+                    <a:lnL w="6350" cap="flat">
+                      <a:solidFill>
+                        <a:srgbClr val="2E3348"/>
+                      </a:solidFill>
+                    </a:lnL>
+                    <a:lnR w="6350" cap="flat">
+                      <a:solidFill>
+                        <a:srgbClr val="2E3348"/>
+                      </a:solidFill>
+                    </a:lnR>
+                    <a:lnT w="6350" cap="flat">
+                      <a:solidFill>
+                        <a:srgbClr val="2E3348"/>
+                      </a:solidFill>
+                    </a:lnT>
+                    <a:lnB w="6350" cap="flat">
+                      <a:solidFill>
+                        <a:srgbClr val="2E3348"/>
+                      </a:solidFill>
+                    </a:lnB>
+                  </a:tcPr>
+                </a:tc>
+                <a:tc>
+                  <a:txBody>
+                    <a:bodyPr wrap="none"/>
+                    <a:lstStyle/>
+                    <a:p>
+                      <a:pPr algn="l"/>
+                      <a:r>
+                        <a:rPr sz="800" b="0">
+                          <a:solidFill>
+                            <a:srgbClr val="E2E8F0"/>
+                          </a:solidFill>
+                        </a:rPr>
+                        <a:t>Thu 16 Jul 2026  09:00 AM</a:t>
+                      </a:r>
+                    </a:p>
+                  </a:txBody>
+                  <a:tcPr>
+                    <a:solidFill>
+                      <a:srgbClr val="0F1117"/>
+                    </a:solidFill>
+                    <a:lnL w="6350" cap="flat">
+                      <a:solidFill>
+                        <a:srgbClr val="2E3348"/>
+                      </a:solidFill>
+                    </a:lnL>
+                    <a:lnR w="6350" cap="flat">
+                      <a:solidFill>
+                        <a:srgbClr val="2E3348"/>
+                      </a:solidFill>
+                    </a:lnR>
+                    <a:lnT w="6350" cap="flat">
+                      <a:solidFill>
+                        <a:srgbClr val="2E3348"/>
+                      </a:solidFill>
+                    </a:lnT>
+                    <a:lnB w="6350" cap="flat">
+                      <a:solidFill>
+                        <a:srgbClr val="2E3348"/>
+                      </a:solidFill>
+                    </a:lnB>
+                  </a:tcPr>
+                </a:tc>
+                <a:tc>
+                  <a:txBody>
+                    <a:bodyPr wrap="none"/>
+                    <a:lstStyle/>
+                    <a:p>
+                      <a:pPr algn="l"/>
+                      <a:r>
+                        <a:rPr sz="800" b="0">
+                          <a:solidFill>
+                            <a:srgbClr val="E2E8F0"/>
+                          </a:solidFill>
+                        </a:rPr>
+                        <a:t>Thu 16 Jul 2026  07:00 AM</a:t>
+                      </a:r>
+                    </a:p>
+                  </a:txBody>
+                  <a:tcPr>
+                    <a:solidFill>
+                      <a:srgbClr val="0F1117"/>
+                    </a:solidFill>
+                    <a:lnL w="6350" cap="flat">
+                      <a:solidFill>
+                        <a:srgbClr val="2E3348"/>
+                      </a:solidFill>
+                    </a:lnL>
+                    <a:lnR w="6350" cap="flat">
+                      <a:solidFill>
+                        <a:srgbClr val="2E3348"/>
+                      </a:solidFill>
+                    </a:lnR>
+                    <a:lnT w="6350" cap="flat">
+                      <a:solidFill>
+                        <a:srgbClr val="2E3348"/>
+                      </a:solidFill>
+                    </a:lnT>
+                    <a:lnB w="6350" cap="flat">
+                      <a:solidFill>
+                        <a:srgbClr val="2E3348"/>
+                      </a:solidFill>
+                    </a:lnB>
+                  </a:tcPr>
+                </a:tc>
+                <a:tc>
+                  <a:txBody>
+                    <a:bodyPr wrap="square"/>
+                    <a:lstStyle/>
+                    <a:p>
+                      <a:pPr algn="l"/>
+                      <a:r>
+                        <a:rPr sz="700" b="0">
+                          <a:solidFill>
+                            <a:srgbClr val="E2E8F0"/>
+                          </a:solidFill>
+                        </a:rPr>
+                        <a:t>https://events.sumologic.com/cloudsiempm07152026-event-training</a:t>
+                      </a:r>
+                    </a:p>
+                  </a:txBody>
+                  <a:tcPr>
+                    <a:solidFill>
+                      <a:srgbClr val="0F1117"/>
+                    </a:solidFill>
+                    <a:lnL w="6350" cap="flat">
+                      <a:solidFill>
+                        <a:srgbClr val="2E3348"/>
+                      </a:solidFill>
+                    </a:lnL>
+                    <a:lnR w="6350" cap="flat">
+                      <a:solidFill>
+                        <a:srgbClr val="2E3348"/>
+                      </a:solidFill>
+                    </a:lnR>
+                    <a:lnT w="6350" cap="flat">
+                      <a:solidFill>
+                        <a:srgbClr val="2E3348"/>
+                      </a:solidFill>
+                    </a:lnT>
+                    <a:lnB w="6350" cap="flat">
+                      <a:solidFill>
+                        <a:srgbClr val="2E3348"/>
+                      </a:solidFill>
+                    </a:lnB>
+                  </a:tcPr>
+                </a:tc>
+              </a:tr>
+              <a:tr h="420624">
+                <a:tc>
+                  <a:txBody>
+                    <a:bodyPr wrap="square"/>
+                    <a:lstStyle/>
+                    <a:p>
+                      <a:pPr algn="l"/>
+                      <a:r>
+                        <a:rPr sz="800" b="0">
+                          <a:solidFill>
+                            <a:srgbClr val="E2E8F0"/>
+                          </a:solidFill>
+                        </a:rPr>
+                        <a:t>Automation AM</a:t>
+                      </a:r>
+                    </a:p>
+                  </a:txBody>
+                  <a:tcPr>
+                    <a:solidFill>
+                      <a:srgbClr val="1A1D27"/>
+                    </a:solidFill>
+                    <a:lnL w="6350" cap="flat">
+                      <a:solidFill>
+                        <a:srgbClr val="2E3348"/>
+                      </a:solidFill>
+                    </a:lnL>
+                    <a:lnR w="6350" cap="flat">
+                      <a:solidFill>
+                        <a:srgbClr val="2E3348"/>
+                      </a:solidFill>
+                    </a:lnR>
+                    <a:lnT w="6350" cap="flat">
+                      <a:solidFill>
+                        <a:srgbClr val="2E3348"/>
+                      </a:solidFill>
+                    </a:lnT>
+                    <a:lnB w="6350" cap="flat">
+                      <a:solidFill>
+                        <a:srgbClr val="2E3348"/>
+                      </a:solidFill>
+                    </a:lnB>
+                  </a:tcPr>
+                </a:tc>
+                <a:tc>
+                  <a:txBody>
+                    <a:bodyPr wrap="none"/>
+                    <a:lstStyle/>
+                    <a:p>
+                      <a:pPr algn="l"/>
+                      <a:r>
+                        <a:rPr sz="800" b="0">
+                          <a:solidFill>
+                            <a:srgbClr val="E2E8F0"/>
+                          </a:solidFill>
+                        </a:rPr>
+                        <a:t>Thu 16 Jul 2026  07:00 AM  →  08:30 AM</a:t>
+                      </a:r>
+                    </a:p>
+                  </a:txBody>
+                  <a:tcPr>
+                    <a:solidFill>
+                      <a:srgbClr val="1A1D27"/>
+                    </a:solidFill>
+                    <a:lnL w="6350" cap="flat">
+                      <a:solidFill>
+                        <a:srgbClr val="2E3348"/>
+                      </a:solidFill>
+                    </a:lnL>
+                    <a:lnR w="6350" cap="flat">
+                      <a:solidFill>
+                        <a:srgbClr val="2E3348"/>
+                      </a:solidFill>
+                    </a:lnR>
+                    <a:lnT w="6350" cap="flat">
+                      <a:solidFill>
+                        <a:srgbClr val="2E3348"/>
+                      </a:solidFill>
+                    </a:lnT>
+                    <a:lnB w="6350" cap="flat">
+                      <a:solidFill>
+                        <a:srgbClr val="2E3348"/>
+                      </a:solidFill>
+                    </a:lnB>
+                  </a:tcPr>
+                </a:tc>
+                <a:tc>
+                  <a:txBody>
+                    <a:bodyPr wrap="none"/>
+                    <a:lstStyle/>
+                    <a:p>
+                      <a:pPr algn="l"/>
+                      <a:r>
+                        <a:rPr sz="800" b="0">
+                          <a:solidFill>
+                            <a:srgbClr val="E2E8F0"/>
+                          </a:solidFill>
+                        </a:rPr>
+                        <a:t>Fri 17 Jul 2026  02:00 AM</a:t>
+                      </a:r>
+                    </a:p>
+                  </a:txBody>
+                  <a:tcPr>
+                    <a:solidFill>
+                      <a:srgbClr val="1A1D27"/>
+                    </a:solidFill>
+                    <a:lnL w="6350" cap="flat">
+                      <a:solidFill>
+                        <a:srgbClr val="2E3348"/>
+                      </a:solidFill>
+                    </a:lnL>
+                    <a:lnR w="6350" cap="flat">
+                      <a:solidFill>
+                        <a:srgbClr val="2E3348"/>
+                      </a:solidFill>
+                    </a:lnR>
+                    <a:lnT w="6350" cap="flat">
+                      <a:solidFill>
+                        <a:srgbClr val="2E3348"/>
+                      </a:solidFill>
+                    </a:lnT>
+                    <a:lnB w="6350" cap="flat">
+                      <a:solidFill>
+                        <a:srgbClr val="2E3348"/>
+                      </a:solidFill>
+                    </a:lnB>
+                  </a:tcPr>
+                </a:tc>
+                <a:tc>
+                  <a:txBody>
+                    <a:bodyPr wrap="none"/>
+                    <a:lstStyle/>
+                    <a:p>
+                      <a:pPr algn="l"/>
+                      <a:r>
+                        <a:rPr sz="800" b="0">
+                          <a:solidFill>
+                            <a:srgbClr val="E2E8F0"/>
+                          </a:solidFill>
+                        </a:rPr>
+                        <a:t>Fri 17 Jul 2026  12:00 AM</a:t>
+                      </a:r>
+                    </a:p>
+                  </a:txBody>
+                  <a:tcPr>
+                    <a:solidFill>
+                      <a:srgbClr val="1A1D27"/>
+                    </a:solidFill>
+                    <a:lnL w="6350" cap="flat">
+                      <a:solidFill>
+                        <a:srgbClr val="2E3348"/>
+                      </a:solidFill>
+                    </a:lnL>
+                    <a:lnR w="6350" cap="flat">
+                      <a:solidFill>
+                        <a:srgbClr val="2E3348"/>
+                      </a:solidFill>
+                    </a:lnR>
+                    <a:lnT w="6350" cap="flat">
+                      <a:solidFill>
+                        <a:srgbClr val="2E3348"/>
+                      </a:solidFill>
+                    </a:lnT>
+                    <a:lnB w="6350" cap="flat">
+                      <a:solidFill>
+                        <a:srgbClr val="2E3348"/>
+                      </a:solidFill>
+                    </a:lnB>
+                  </a:tcPr>
+                </a:tc>
+                <a:tc>
+                  <a:txBody>
+                    <a:bodyPr wrap="none"/>
+                    <a:lstStyle/>
+                    <a:p>
+                      <a:pPr algn="l"/>
+                      <a:r>
+                        <a:rPr sz="800" b="0">
+                          <a:solidFill>
+                            <a:srgbClr val="E2E8F0"/>
+                          </a:solidFill>
+                        </a:rPr>
+                        <a:t>Thu 16 Jul 2026  10:00 PM</a:t>
+                      </a:r>
+                    </a:p>
+                  </a:txBody>
+                  <a:tcPr>
+                    <a:solidFill>
+                      <a:srgbClr val="1A1D27"/>
+                    </a:solidFill>
+                    <a:lnL w="6350" cap="flat">
+                      <a:solidFill>
+                        <a:srgbClr val="2E3348"/>
+                      </a:solidFill>
+                    </a:lnL>
+                    <a:lnR w="6350" cap="flat">
+                      <a:solidFill>
+                        <a:srgbClr val="2E3348"/>
+                      </a:solidFill>
+                    </a:lnR>
+                    <a:lnT w="6350" cap="flat">
+                      <a:solidFill>
+                        <a:srgbClr val="2E3348"/>
+                      </a:solidFill>
+                    </a:lnT>
+                    <a:lnB w="6350" cap="flat">
+                      <a:solidFill>
+                        <a:srgbClr val="2E3348"/>
+                      </a:solidFill>
+                    </a:lnB>
+                  </a:tcPr>
+                </a:tc>
+                <a:tc>
+                  <a:txBody>
+                    <a:bodyPr wrap="square"/>
+                    <a:lstStyle/>
+                    <a:p>
+                      <a:pPr algn="l"/>
+                      <a:r>
+                        <a:rPr sz="700" b="0">
+                          <a:solidFill>
+                            <a:srgbClr val="E2E8F0"/>
+                          </a:solidFill>
+                        </a:rPr>
+                        <a:t>https://events.sumologic.com/automationam07162026-event-training</a:t>
+                      </a:r>
+                    </a:p>
+                  </a:txBody>
+                  <a:tcPr>
+                    <a:solidFill>
+                      <a:srgbClr val="1A1D27"/>
+                    </a:solidFill>
+                    <a:lnL w="6350" cap="flat">
+                      <a:solidFill>
+                        <a:srgbClr val="2E3348"/>
+                      </a:solidFill>
+                    </a:lnL>
+                    <a:lnR w="6350" cap="flat">
+                      <a:solidFill>
+                        <a:srgbClr val="2E3348"/>
+                      </a:solidFill>
+                    </a:lnR>
+                    <a:lnT w="6350" cap="flat">
+                      <a:solidFill>
+                        <a:srgbClr val="2E3348"/>
+                      </a:solidFill>
+                    </a:lnT>
+                    <a:lnB w="6350" cap="flat">
+                      <a:solidFill>
+                        <a:srgbClr val="2E3348"/>
+                      </a:solidFill>
+                    </a:lnB>
+                  </a:tcPr>
+                </a:tc>
+              </a:tr>
+            </a:tbl>
+          </a:graphicData>
+        </a:graphic>
+      </p:graphicFrame>
+      <p:sp>
+        <p:nvSpPr>
+          <p:cNvPr id="7" name="TextBox 6"/>
+          <p:cNvSpPr txBox="1"/>
+          <p:nvPr/>
+        </p:nvSpPr>
+        <p:spPr>
+          <a:xfrm>
+            <a:off x="164592" y="5266944"/>
+            <a:ext cx="11795760" cy="274320"/>
+          </a:xfrm>
+          <a:prstGeom prst="rect">
+            <a:avLst/>
+          </a:prstGeom>
+          <a:noFill/>
+        </p:spPr>
+        <p:txBody>
+          <a:bodyPr wrap="none">
+            <a:spAutoFit/>
+          </a:bodyPr>
+          <a:lstStyle/>
+          <a:p>
+            <a:r>
+              <a:rPr sz="700" i="1">
+                <a:solidFill>
+                  <a:srgbClr val="94A3B8"/>
+                </a:solidFill>
+              </a:rPr>
+              <a:t>Register links are live URLs — click to open in browser.  All times shown as start time; PT column also shows end time.</a:t>
+            </a:r>
+          </a:p>
+        </p:txBody>
+      </p:sp>
+    </p:spTree>
+  </p:cSld>
+  <p:clrMapOvr>
+    <a:masterClrMapping/>
+  </p:clrMapOvr>
+</p:sld>
+</file>
+
+<file path=ppt/slides/slide7.xml><?xml version="1.0" encoding="utf-8"?>
+<p:sld xmlns:a="http://schemas.openxmlformats.org/drawingml/2006/main" xmlns:p="http://schemas.openxmlformats.org/presentationml/2006/main" xmlns:r="http://schemas.openxmlformats.org/officeDocument/2006/relationships">
+  <p:cSld>
+    <p:spTree>
+      <p:nvGrpSpPr>
+        <p:cNvPr id="1" name=""/>
+        <p:cNvGrpSpPr/>
+        <p:nvPr/>
+      </p:nvGrpSpPr>
+      <p:grpSpPr/>
+      <p:sp>
+        <p:nvSpPr>
+          <p:cNvPr id="2" name="Rectangle 1"/>
+          <p:cNvSpPr/>
+          <p:nvPr/>
+        </p:nvSpPr>
+        <p:spPr>
+          <a:xfrm>
+            <a:off x="0" y="0"/>
+            <a:ext cx="12188952" cy="6858000"/>
+          </a:xfrm>
+          <a:prstGeom prst="rect">
+            <a:avLst/>
+          </a:prstGeom>
+          <a:solidFill>
+            <a:srgbClr val="0F1117"/>
+          </a:solidFill>
+          <a:ln>
+            <a:noFill/>
+          </a:ln>
+        </p:spPr>
+        <p:style>
+          <a:lnRef idx="1">
+            <a:schemeClr val="accent1"/>
+          </a:lnRef>
+          <a:fillRef idx="3">
+            <a:schemeClr val="accent1"/>
+          </a:fillRef>
+          <a:effectRef idx="2">
+            <a:schemeClr val="accent1"/>
+          </a:effectRef>
+          <a:fontRef idx="minor">
+            <a:schemeClr val="lt1"/>
+          </a:fontRef>
+        </p:style>
+        <p:txBody>
+          <a:bodyPr rtlCol="0" anchor="ctr"/>
+          <a:lstStyle/>
+          <a:p>
+            <a:pPr algn="ctr"/>
+          </a:p>
+        </p:txBody>
+      </p:sp>
+      <p:sp>
+        <p:nvSpPr>
+          <p:cNvPr id="3" name="Rectangle 2"/>
+          <p:cNvSpPr/>
+          <p:nvPr/>
+        </p:nvSpPr>
+        <p:spPr>
+          <a:xfrm>
+            <a:off x="0" y="0"/>
+            <a:ext cx="12188952" cy="548640"/>
+          </a:xfrm>
+          <a:prstGeom prst="rect">
+            <a:avLst/>
+          </a:prstGeom>
+          <a:solidFill>
+            <a:srgbClr val="1A1D27"/>
+          </a:solidFill>
+          <a:ln>
+            <a:noFill/>
+          </a:ln>
+        </p:spPr>
+        <p:style>
+          <a:lnRef idx="1">
+            <a:schemeClr val="accent1"/>
+          </a:lnRef>
+          <a:fillRef idx="3">
+            <a:schemeClr val="accent1"/>
+          </a:fillRef>
+          <a:effectRef idx="2">
+            <a:schemeClr val="accent1"/>
+          </a:effectRef>
+          <a:fontRef idx="minor">
+            <a:schemeClr val="lt1"/>
+          </a:fontRef>
+        </p:style>
+        <p:txBody>
+          <a:bodyPr rtlCol="0" anchor="ctr"/>
+          <a:lstStyle/>
+          <a:p>
+            <a:pPr algn="ctr"/>
+          </a:p>
+        </p:txBody>
+      </p:sp>
+      <p:sp>
+        <p:nvSpPr>
+          <p:cNvPr id="4" name="TextBox 3"/>
+          <p:cNvSpPr txBox="1"/>
+          <p:nvPr/>
+        </p:nvSpPr>
+        <p:spPr>
+          <a:xfrm>
+            <a:off x="164592" y="73152"/>
+            <a:ext cx="8229600" cy="420624"/>
+          </a:xfrm>
+          <a:prstGeom prst="rect">
+            <a:avLst/>
+          </a:prstGeom>
+          <a:noFill/>
+        </p:spPr>
+        <p:txBody>
+          <a:bodyPr wrap="none">
+            <a:spAutoFit/>
+          </a:bodyPr>
+          <a:lstStyle/>
+          <a:p>
+            <a:r>
+              <a:rPr sz="1300" b="1">
+                <a:solidFill>
+                  <a:srgbClr val="00B4D8"/>
+                </a:solidFill>
+              </a:rPr>
+              <a:t>Sumo Logic — Virtual Training Schedule   ·   16 Jul – 16 Jul 2026   (7/7)</a:t>
+            </a:r>
+          </a:p>
+        </p:txBody>
+      </p:sp>
+      <p:sp>
+        <p:nvSpPr>
+          <p:cNvPr id="5" name="TextBox 4"/>
+          <p:cNvSpPr txBox="1"/>
+          <p:nvPr/>
+        </p:nvSpPr>
+        <p:spPr>
+          <a:xfrm>
+            <a:off x="10908792" y="73152"/>
+            <a:ext cx="1097280" cy="420624"/>
+          </a:xfrm>
+          <a:prstGeom prst="rect">
+            <a:avLst/>
+          </a:prstGeom>
+          <a:noFill/>
+        </p:spPr>
+        <p:txBody>
+          <a:bodyPr wrap="none">
+            <a:spAutoFit/>
+          </a:bodyPr>
+          <a:lstStyle/>
+          <a:p>
+            <a:pPr algn="r"/>
+            <a:r>
+              <a:rPr sz="900">
+                <a:solidFill>
+                  <a:srgbClr val="94A3B8"/>
+                </a:solidFill>
+              </a:rPr>
+              <a:t>p 7/7</a:t>
             </a:r>
           </a:p>
         </p:txBody>
@@ -15650,7 +21708,7 @@
                             <a:srgbClr val="E2E8F0"/>
                           </a:solidFill>
                         </a:rPr>
-                        <a:t>Automation Workshop PM</a:t>
+                        <a:t>Automation PM</a:t>
                       </a:r>
                     </a:p>
                   </a:txBody>
@@ -15692,7 +21750,7 @@
                             <a:srgbClr val="E2E8F0"/>
                           </a:solidFill>
                         </a:rPr>
-                        <a:t>Thu 18 Jun 2026  04:00 PM  →  05:30 PM</a:t>
+                        <a:t>Thu 16 Jul 2026  04:00 PM  →  05:30 PM</a:t>
                       </a:r>
                     </a:p>
                   </a:txBody>
@@ -15734,7 +21792,7 @@
                             <a:srgbClr val="E2E8F0"/>
                           </a:solidFill>
                         </a:rPr>
-                        <a:t>Fri 19 Jun 2026  11:00 AM</a:t>
+                        <a:t>Fri 17 Jul 2026  11:00 AM</a:t>
                       </a:r>
                     </a:p>
                   </a:txBody>
@@ -15776,7 +21834,7 @@
                             <a:srgbClr val="E2E8F0"/>
                           </a:solidFill>
                         </a:rPr>
-                        <a:t>Fri 19 Jun 2026  09:00 AM</a:t>
+                        <a:t>Fri 17 Jul 2026  09:00 AM</a:t>
                       </a:r>
                     </a:p>
                   </a:txBody>
@@ -15818,7 +21876,7 @@
                             <a:srgbClr val="E2E8F0"/>
                           </a:solidFill>
                         </a:rPr>
-                        <a:t>Fri 19 Jun 2026  07:00 AM</a:t>
+                        <a:t>Fri 17 Jul 2026  07:00 AM</a:t>
                       </a:r>
                     </a:p>
                   </a:txBody>
@@ -15860,7 +21918,7 @@
                             <a:srgbClr val="E2E8F0"/>
                           </a:solidFill>
                         </a:rPr>
-                        <a:t>https://events.sumologic.com/automationworkshoppm06182026-event-training</a:t>
+                        <a:t>https://events.sumologic.com/automationpm07162026-event-training</a:t>
                       </a:r>
                     </a:p>
                   </a:txBody>

--- a/CustomTraining/online trainings/training_schedule.pptx
+++ b/CustomTraining/online trainings/training_schedule.pptx
@@ -10,8 +10,6 @@
     <p:sldId id="258" r:id="rId9"/>
     <p:sldId id="259" r:id="rId10"/>
     <p:sldId id="260" r:id="rId11"/>
-    <p:sldId id="261" r:id="rId12"/>
-    <p:sldId id="262" r:id="rId13"/>
   </p:sldIdLst>
   <p:sldSz cx="12188952" cy="6858000" type="screen4x3"/>
   <p:notesSz cx="6858000" cy="9144000"/>
@@ -3208,7 +3206,7 @@
                   <a:srgbClr val="00B4D8"/>
                 </a:solidFill>
               </a:rPr>
-              <a:t>Sumo Logic — Virtual Training Schedule   ·   05 May – 12 May 2026   (1/7)</a:t>
+              <a:t>Sumo Logic — Virtual Training Schedule   ·   19 May 2026 – 02 Jun 2026   (1/5)</a:t>
             </a:r>
           </a:p>
         </p:txBody>
@@ -3242,7 +3240,7 @@
                   <a:srgbClr val="94A3B8"/>
                 </a:solidFill>
               </a:rPr>
-              <a:t>p 1/7</a:t>
+              <a:t>p 1/5</a:t>
             </a:r>
           </a:p>
         </p:txBody>
@@ -3540,7 +3538,7 @@
                             <a:srgbClr val="E2E8F0"/>
                           </a:solidFill>
                         </a:rPr>
-                        <a:t>Welcome Webinar AM</a:t>
+                        <a:t>Logs for Security AM</a:t>
                       </a:r>
                     </a:p>
                   </a:txBody>
@@ -3582,7 +3580,7 @@
                             <a:srgbClr val="E2E8F0"/>
                           </a:solidFill>
                         </a:rPr>
-                        <a:t>Tue 05 May 2026  05:00 AM  →  01:00 PM</a:t>
+                        <a:t>Tue 19 May 2026  07:00 AM  →  10:00 AM</a:t>
                       </a:r>
                     </a:p>
                   </a:txBody>
@@ -3624,7 +3622,7 @@
                             <a:srgbClr val="E2E8F0"/>
                           </a:solidFill>
                         </a:rPr>
-                        <a:t>Wed 06 May 2026  12:00 AM</a:t>
+                        <a:t>Wed 20 May 2026  02:00 AM</a:t>
                       </a:r>
                     </a:p>
                   </a:txBody>
@@ -3666,7 +3664,7 @@
                             <a:srgbClr val="E2E8F0"/>
                           </a:solidFill>
                         </a:rPr>
-                        <a:t>Tue 05 May 2026  10:00 PM</a:t>
+                        <a:t>Wed 20 May 2026  12:00 AM</a:t>
                       </a:r>
                     </a:p>
                   </a:txBody>
@@ -3708,7 +3706,7 @@
                             <a:srgbClr val="E2E8F0"/>
                           </a:solidFill>
                         </a:rPr>
-                        <a:t>Tue 05 May 2026  08:00 PM</a:t>
+                        <a:t>Tue 19 May 2026  10:00 PM</a:t>
                       </a:r>
                     </a:p>
                   </a:txBody>
@@ -3750,7 +3748,7 @@
                             <a:srgbClr val="E2E8F0"/>
                           </a:solidFill>
                         </a:rPr>
-                        <a:t>https://events.sumologic.com/welcomewebinaram05052026-event-training</a:t>
+                        <a:t>https://events.sumologic.com/logsforsecurityam05192026-event-training</a:t>
                       </a:r>
                     </a:p>
                   </a:txBody>
@@ -3794,7 +3792,7 @@
                             <a:srgbClr val="E2E8F0"/>
                           </a:solidFill>
                         </a:rPr>
-                        <a:t>Fundamentals AM</a:t>
+                        <a:t>Logs for Security PM</a:t>
                       </a:r>
                     </a:p>
                   </a:txBody>
@@ -3836,7 +3834,7 @@
                             <a:srgbClr val="E2E8F0"/>
                           </a:solidFill>
                         </a:rPr>
-                        <a:t>Tue 05 May 2026  07:00 AM  →  10:00 AM</a:t>
+                        <a:t>Tue 19 May 2026  04:00 PM  →  07:00 PM</a:t>
                       </a:r>
                     </a:p>
                   </a:txBody>
@@ -3878,7 +3876,7 @@
                             <a:srgbClr val="E2E8F0"/>
                           </a:solidFill>
                         </a:rPr>
-                        <a:t>Wed 06 May 2026  02:00 AM</a:t>
+                        <a:t>Wed 20 May 2026  11:00 AM</a:t>
                       </a:r>
                     </a:p>
                   </a:txBody>
@@ -3920,7 +3918,7 @@
                             <a:srgbClr val="E2E8F0"/>
                           </a:solidFill>
                         </a:rPr>
-                        <a:t>Wed 06 May 2026  12:00 AM</a:t>
+                        <a:t>Wed 20 May 2026  09:00 AM</a:t>
                       </a:r>
                     </a:p>
                   </a:txBody>
@@ -3962,7 +3960,7 @@
                             <a:srgbClr val="E2E8F0"/>
                           </a:solidFill>
                         </a:rPr>
-                        <a:t>Tue 05 May 2026  10:00 PM</a:t>
+                        <a:t>Wed 20 May 2026  07:00 AM</a:t>
                       </a:r>
                     </a:p>
                   </a:txBody>
@@ -4004,7 +4002,7 @@
                             <a:srgbClr val="E2E8F0"/>
                           </a:solidFill>
                         </a:rPr>
-                        <a:t>https://events.sumologic.com/fundamentalsam05052026-event-training</a:t>
+                        <a:t>https://events.sumologic.com/logsforsecuritypm05192026-event-training</a:t>
                       </a:r>
                     </a:p>
                   </a:txBody>
@@ -4048,7 +4046,7 @@
                             <a:srgbClr val="E2E8F0"/>
                           </a:solidFill>
                         </a:rPr>
-                        <a:t>Welcome Webinar PM</a:t>
+                        <a:t>Essential Cloud SIEM Skills for SOC Analysts AM</a:t>
                       </a:r>
                     </a:p>
                   </a:txBody>
@@ -4090,7 +4088,7 @@
                             <a:srgbClr val="E2E8F0"/>
                           </a:solidFill>
                         </a:rPr>
-                        <a:t>Tue 05 May 2026  02:00 PM  →  03:00 PM</a:t>
+                        <a:t>Wed 20 May 2026  07:00 AM  →  08:30 AM</a:t>
                       </a:r>
                     </a:p>
                   </a:txBody>
@@ -4132,7 +4130,7 @@
                             <a:srgbClr val="E2E8F0"/>
                           </a:solidFill>
                         </a:rPr>
-                        <a:t>Wed 06 May 2026  09:00 AM</a:t>
+                        <a:t>Thu 21 May 2026  02:00 AM</a:t>
                       </a:r>
                     </a:p>
                   </a:txBody>
@@ -4174,7 +4172,7 @@
                             <a:srgbClr val="E2E8F0"/>
                           </a:solidFill>
                         </a:rPr>
-                        <a:t>Wed 06 May 2026  07:00 AM</a:t>
+                        <a:t>Thu 21 May 2026  12:00 AM</a:t>
                       </a:r>
                     </a:p>
                   </a:txBody>
@@ -4216,7 +4214,7 @@
                             <a:srgbClr val="E2E8F0"/>
                           </a:solidFill>
                         </a:rPr>
-                        <a:t>Wed 06 May 2026  05:00 AM</a:t>
+                        <a:t>Wed 20 May 2026  10:00 PM</a:t>
                       </a:r>
                     </a:p>
                   </a:txBody>
@@ -4258,7 +4256,7 @@
                             <a:srgbClr val="E2E8F0"/>
                           </a:solidFill>
                         </a:rPr>
-                        <a:t>https://events.sumologic.com/welcomewebinarpm05052026-event-training</a:t>
+                        <a:t>https://events.sumologic.com/esscloudsiemam05202026-event-training</a:t>
                       </a:r>
                     </a:p>
                   </a:txBody>
@@ -4302,7 +4300,7 @@
                             <a:srgbClr val="E2E8F0"/>
                           </a:solidFill>
                         </a:rPr>
-                        <a:t>Fundamentals PM</a:t>
+                        <a:t>Essential Cloud SIEM Skills for SOC Analysts PM</a:t>
                       </a:r>
                     </a:p>
                   </a:txBody>
@@ -4344,7 +4342,7 @@
                             <a:srgbClr val="E2E8F0"/>
                           </a:solidFill>
                         </a:rPr>
-                        <a:t>Tue 05 May 2026  04:00 PM  →  07:00 PM</a:t>
+                        <a:t>Wed 20 May 2026  04:00 PM  →  05:30 PM</a:t>
                       </a:r>
                     </a:p>
                   </a:txBody>
@@ -4386,7 +4384,7 @@
                             <a:srgbClr val="E2E8F0"/>
                           </a:solidFill>
                         </a:rPr>
-                        <a:t>Wed 06 May 2026  11:00 AM</a:t>
+                        <a:t>Thu 21 May 2026  11:00 AM</a:t>
                       </a:r>
                     </a:p>
                   </a:txBody>
@@ -4428,7 +4426,7 @@
                             <a:srgbClr val="E2E8F0"/>
                           </a:solidFill>
                         </a:rPr>
-                        <a:t>Wed 06 May 2026  09:00 AM</a:t>
+                        <a:t>Thu 21 May 2026  09:00 AM</a:t>
                       </a:r>
                     </a:p>
                   </a:txBody>
@@ -4470,7 +4468,7 @@
                             <a:srgbClr val="E2E8F0"/>
                           </a:solidFill>
                         </a:rPr>
-                        <a:t>Wed 06 May 2026  07:00 AM</a:t>
+                        <a:t>Thu 21 May 2026  07:00 AM</a:t>
                       </a:r>
                     </a:p>
                   </a:txBody>
@@ -4512,7 +4510,7 @@
                             <a:srgbClr val="E2E8F0"/>
                           </a:solidFill>
                         </a:rPr>
-                        <a:t>https://events.sumologic.com/fundamentalspm05052026-event-training</a:t>
+                        <a:t>https://events.sumologic.com/esscloudsiempm05202026-event-training</a:t>
                       </a:r>
                     </a:p>
                   </a:txBody>
@@ -4556,7 +4554,7 @@
                             <a:srgbClr val="E2E8F0"/>
                           </a:solidFill>
                         </a:rPr>
-                        <a:t>Search Mastery AM</a:t>
+                        <a:t>Cloud SIEM AM</a:t>
                       </a:r>
                     </a:p>
                   </a:txBody>
@@ -4598,7 +4596,7 @@
                             <a:srgbClr val="E2E8F0"/>
                           </a:solidFill>
                         </a:rPr>
-                        <a:t>Wed 06 May 2026  07:00 AM  →  10:00 AM</a:t>
+                        <a:t>Thu 21 May 2026  07:00 AM  →  10:00 AM</a:t>
                       </a:r>
                     </a:p>
                   </a:txBody>
@@ -4640,7 +4638,7 @@
                             <a:srgbClr val="E2E8F0"/>
                           </a:solidFill>
                         </a:rPr>
-                        <a:t>Thu 07 May 2026  02:00 AM</a:t>
+                        <a:t>Fri 22 May 2026  02:00 AM</a:t>
                       </a:r>
                     </a:p>
                   </a:txBody>
@@ -4682,7 +4680,7 @@
                             <a:srgbClr val="E2E8F0"/>
                           </a:solidFill>
                         </a:rPr>
-                        <a:t>Thu 07 May 2026  12:00 AM</a:t>
+                        <a:t>Fri 22 May 2026  12:00 AM</a:t>
                       </a:r>
                     </a:p>
                   </a:txBody>
@@ -4724,7 +4722,7 @@
                             <a:srgbClr val="E2E8F0"/>
                           </a:solidFill>
                         </a:rPr>
-                        <a:t>Wed 06 May 2026  10:00 PM</a:t>
+                        <a:t>Thu 21 May 2026  10:00 PM</a:t>
                       </a:r>
                     </a:p>
                   </a:txBody>
@@ -4766,7 +4764,7 @@
                             <a:srgbClr val="E2E8F0"/>
                           </a:solidFill>
                         </a:rPr>
-                        <a:t>https://events.sumologic.com/searchmasteryam05062026-event-training</a:t>
+                        <a:t>https://events.sumologic.com/cloudsiemam05212026-event-training</a:t>
                       </a:r>
                     </a:p>
                   </a:txBody>
@@ -4810,7 +4808,7 @@
                             <a:srgbClr val="E2E8F0"/>
                           </a:solidFill>
                         </a:rPr>
-                        <a:t>Search Mastery PM</a:t>
+                        <a:t>Cloud SIEM PM</a:t>
                       </a:r>
                     </a:p>
                   </a:txBody>
@@ -4852,7 +4850,7 @@
                             <a:srgbClr val="E2E8F0"/>
                           </a:solidFill>
                         </a:rPr>
-                        <a:t>Wed 06 May 2026  04:00 PM  →  07:00 PM</a:t>
+                        <a:t>Thu 21 May 2026  04:00 PM  →  07:00 PM</a:t>
                       </a:r>
                     </a:p>
                   </a:txBody>
@@ -4894,7 +4892,7 @@
                             <a:srgbClr val="E2E8F0"/>
                           </a:solidFill>
                         </a:rPr>
-                        <a:t>Thu 07 May 2026  11:00 AM</a:t>
+                        <a:t>Fri 22 May 2026  11:00 AM</a:t>
                       </a:r>
                     </a:p>
                   </a:txBody>
@@ -4936,7 +4934,7 @@
                             <a:srgbClr val="E2E8F0"/>
                           </a:solidFill>
                         </a:rPr>
-                        <a:t>Thu 07 May 2026  09:00 AM</a:t>
+                        <a:t>Fri 22 May 2026  09:00 AM</a:t>
                       </a:r>
                     </a:p>
                   </a:txBody>
@@ -4978,7 +4976,7 @@
                             <a:srgbClr val="E2E8F0"/>
                           </a:solidFill>
                         </a:rPr>
-                        <a:t>Thu 07 May 2026  07:00 AM</a:t>
+                        <a:t>Fri 22 May 2026  07:00 AM</a:t>
                       </a:r>
                     </a:p>
                   </a:txBody>
@@ -5020,7 +5018,7 @@
                             <a:srgbClr val="E2E8F0"/>
                           </a:solidFill>
                         </a:rPr>
-                        <a:t>https://events.sumologic.com/searchmasterypm05062026-event-training</a:t>
+                        <a:t>https://events.sumologic.com/cloudsiempm05212026-event-training</a:t>
                       </a:r>
                     </a:p>
                   </a:txBody>
@@ -5064,7 +5062,7 @@
                             <a:srgbClr val="E2E8F0"/>
                           </a:solidFill>
                         </a:rPr>
-                        <a:t>Best Practice for Query Efficiency AM</a:t>
+                        <a:t>Welcome Webinar AM</a:t>
                       </a:r>
                     </a:p>
                   </a:txBody>
@@ -5106,7 +5104,7 @@
                             <a:srgbClr val="E2E8F0"/>
                           </a:solidFill>
                         </a:rPr>
-                        <a:t>Thu 07 May 2026  07:00 AM  →  08:30 AM</a:t>
+                        <a:t>Tue 02 Jun 2026  05:00 AM  →  06:00 AM</a:t>
                       </a:r>
                     </a:p>
                   </a:txBody>
@@ -5148,7 +5146,7 @@
                             <a:srgbClr val="E2E8F0"/>
                           </a:solidFill>
                         </a:rPr>
-                        <a:t>Fri 08 May 2026  02:00 AM</a:t>
+                        <a:t>Wed 03 Jun 2026  12:00 AM</a:t>
                       </a:r>
                     </a:p>
                   </a:txBody>
@@ -5190,7 +5188,7 @@
                             <a:srgbClr val="E2E8F0"/>
                           </a:solidFill>
                         </a:rPr>
-                        <a:t>Fri 08 May 2026  12:00 AM</a:t>
+                        <a:t>Tue 02 Jun 2026  10:00 PM</a:t>
                       </a:r>
                     </a:p>
                   </a:txBody>
@@ -5232,7 +5230,7 @@
                             <a:srgbClr val="E2E8F0"/>
                           </a:solidFill>
                         </a:rPr>
-                        <a:t>Thu 07 May 2026  10:00 PM</a:t>
+                        <a:t>Tue 02 Jun 2026  08:00 PM</a:t>
                       </a:r>
                     </a:p>
                   </a:txBody>
@@ -5274,7 +5272,7 @@
                             <a:srgbClr val="E2E8F0"/>
                           </a:solidFill>
                         </a:rPr>
-                        <a:t>https://events.sumologic.com/bp4qeam05072026-event-training</a:t>
+                        <a:t>https://events.sumologic.com/welcomewebinaram06022026-event-training</a:t>
                       </a:r>
                     </a:p>
                   </a:txBody>
@@ -5318,7 +5316,7 @@
                             <a:srgbClr val="E2E8F0"/>
                           </a:solidFill>
                         </a:rPr>
-                        <a:t>Best Practice for Query Efficiency PM</a:t>
+                        <a:t>Fundamentals AM</a:t>
                       </a:r>
                     </a:p>
                   </a:txBody>
@@ -5360,7 +5358,7 @@
                             <a:srgbClr val="E2E8F0"/>
                           </a:solidFill>
                         </a:rPr>
-                        <a:t>Thu 07 May 2026  04:00 PM  →  05:30 PM</a:t>
+                        <a:t>Tue 02 Jun 2026  07:00 AM  →  10:00 AM</a:t>
                       </a:r>
                     </a:p>
                   </a:txBody>
@@ -5402,7 +5400,7 @@
                             <a:srgbClr val="E2E8F0"/>
                           </a:solidFill>
                         </a:rPr>
-                        <a:t>Fri 08 May 2026  11:00 AM</a:t>
+                        <a:t>Wed 03 Jun 2026  02:00 AM</a:t>
                       </a:r>
                     </a:p>
                   </a:txBody>
@@ -5444,7 +5442,7 @@
                             <a:srgbClr val="E2E8F0"/>
                           </a:solidFill>
                         </a:rPr>
-                        <a:t>Fri 08 May 2026  09:00 AM</a:t>
+                        <a:t>Wed 03 Jun 2026  12:00 AM</a:t>
                       </a:r>
                     </a:p>
                   </a:txBody>
@@ -5486,7 +5484,7 @@
                             <a:srgbClr val="E2E8F0"/>
                           </a:solidFill>
                         </a:rPr>
-                        <a:t>Fri 08 May 2026  07:00 AM</a:t>
+                        <a:t>Tue 02 Jun 2026  10:00 PM</a:t>
                       </a:r>
                     </a:p>
                   </a:txBody>
@@ -5528,7 +5526,7 @@
                             <a:srgbClr val="E2E8F0"/>
                           </a:solidFill>
                         </a:rPr>
-                        <a:t>https://events.sumologic.com/bp4qepm05072026-event-training</a:t>
+                        <a:t>https://events.sumologic.com/fundamentalsam06022026-event-training</a:t>
                       </a:r>
                     </a:p>
                   </a:txBody>
@@ -5572,7 +5570,7 @@
                             <a:srgbClr val="E2E8F0"/>
                           </a:solidFill>
                         </a:rPr>
-                        <a:t>Observability PM</a:t>
+                        <a:t>Welcome Webinar PM</a:t>
                       </a:r>
                     </a:p>
                   </a:txBody>
@@ -5614,7 +5612,7 @@
                             <a:srgbClr val="E2E8F0"/>
                           </a:solidFill>
                         </a:rPr>
-                        <a:t>Mon 11 May 2026  04:00 PM  →  07:00 PM</a:t>
+                        <a:t>Tue 02 Jun 2026  02:00 PM  →  03:00 PM</a:t>
                       </a:r>
                     </a:p>
                   </a:txBody>
@@ -5656,7 +5654,7 @@
                             <a:srgbClr val="E2E8F0"/>
                           </a:solidFill>
                         </a:rPr>
-                        <a:t>Tue 12 May 2026  11:00 AM</a:t>
+                        <a:t>Wed 03 Jun 2026  09:00 AM</a:t>
                       </a:r>
                     </a:p>
                   </a:txBody>
@@ -5698,7 +5696,7 @@
                             <a:srgbClr val="E2E8F0"/>
                           </a:solidFill>
                         </a:rPr>
-                        <a:t>Tue 12 May 2026  09:00 AM</a:t>
+                        <a:t>Wed 03 Jun 2026  07:00 AM</a:t>
                       </a:r>
                     </a:p>
                   </a:txBody>
@@ -5740,7 +5738,7 @@
                             <a:srgbClr val="E2E8F0"/>
                           </a:solidFill>
                         </a:rPr>
-                        <a:t>Tue 12 May 2026  07:00 AM</a:t>
+                        <a:t>Wed 03 Jun 2026  05:00 AM</a:t>
                       </a:r>
                     </a:p>
                   </a:txBody>
@@ -5782,7 +5780,7 @@
                             <a:srgbClr val="E2E8F0"/>
                           </a:solidFill>
                         </a:rPr>
-                        <a:t>https://events.sumologic.com/observabilitypm05111016-event-training</a:t>
+                        <a:t>https://events.sumologic.com/welcomewebinarpm06022026-event-training</a:t>
                       </a:r>
                     </a:p>
                   </a:txBody>
@@ -5826,7 +5824,7 @@
                             <a:srgbClr val="E2E8F0"/>
                           </a:solidFill>
                         </a:rPr>
-                        <a:t>Administration AM</a:t>
+                        <a:t>Fundamentals PM</a:t>
                       </a:r>
                     </a:p>
                   </a:txBody>
@@ -5868,7 +5866,7 @@
                             <a:srgbClr val="E2E8F0"/>
                           </a:solidFill>
                         </a:rPr>
-                        <a:t>Tue 12 May 2026  07:00 AM  →  10:00 AM</a:t>
+                        <a:t>Tue 02 Jun 2026  04:00 PM  →  07:00 PM</a:t>
                       </a:r>
                     </a:p>
                   </a:txBody>
@@ -5910,7 +5908,7 @@
                             <a:srgbClr val="E2E8F0"/>
                           </a:solidFill>
                         </a:rPr>
-                        <a:t>Wed 13 May 2026  02:00 AM</a:t>
+                        <a:t>Wed 03 Jun 2026  11:00 AM</a:t>
                       </a:r>
                     </a:p>
                   </a:txBody>
@@ -5952,7 +5950,7 @@
                             <a:srgbClr val="E2E8F0"/>
                           </a:solidFill>
                         </a:rPr>
-                        <a:t>Wed 13 May 2026  12:00 AM</a:t>
+                        <a:t>Wed 03 Jun 2026  09:00 AM</a:t>
                       </a:r>
                     </a:p>
                   </a:txBody>
@@ -5994,7 +5992,7 @@
                             <a:srgbClr val="E2E8F0"/>
                           </a:solidFill>
                         </a:rPr>
-                        <a:t>Tue 12 May 2026  10:00 PM</a:t>
+                        <a:t>Wed 03 Jun 2026  07:00 AM</a:t>
                       </a:r>
                     </a:p>
                   </a:txBody>
@@ -6036,7 +6034,7 @@
                             <a:srgbClr val="E2E8F0"/>
                           </a:solidFill>
                         </a:rPr>
-                        <a:t>https://events.sumologic.com/administrationam05122026-event-training</a:t>
+                        <a:t>https://events.sumologic.com/fundamentalspm06022026-event-training</a:t>
                       </a:r>
                     </a:p>
                   </a:txBody>
@@ -6236,7 +6234,7 @@
                   <a:srgbClr val="00B4D8"/>
                 </a:solidFill>
               </a:rPr>
-              <a:t>Sumo Logic — Virtual Training Schedule   ·   12 May – 21 May 2026   (2/7)</a:t>
+              <a:t>Sumo Logic — Virtual Training Schedule   ·   03 Jun – 11 Jun 2026   (2/5)</a:t>
             </a:r>
           </a:p>
         </p:txBody>
@@ -6270,7 +6268,7 @@
                   <a:srgbClr val="94A3B8"/>
                 </a:solidFill>
               </a:rPr>
-              <a:t>p 2/7</a:t>
+              <a:t>p 2/5</a:t>
             </a:r>
           </a:p>
         </p:txBody>
@@ -6568,7 +6566,7 @@
                             <a:srgbClr val="E2E8F0"/>
                           </a:solidFill>
                         </a:rPr>
-                        <a:t>Administration PM</a:t>
+                        <a:t>Search Mastery AM</a:t>
                       </a:r>
                     </a:p>
                   </a:txBody>
@@ -6610,7 +6608,7 @@
                             <a:srgbClr val="E2E8F0"/>
                           </a:solidFill>
                         </a:rPr>
-                        <a:t>Tue 12 May 2026  04:00 PM  →  07:00 PM</a:t>
+                        <a:t>Wed 03 Jun 2026  07:00 AM  →  10:00 AM</a:t>
                       </a:r>
                     </a:p>
                   </a:txBody>
@@ -6652,7 +6650,7 @@
                             <a:srgbClr val="E2E8F0"/>
                           </a:solidFill>
                         </a:rPr>
-                        <a:t>Wed 13 May 2026  11:00 AM</a:t>
+                        <a:t>Thu 04 Jun 2026  02:00 AM</a:t>
                       </a:r>
                     </a:p>
                   </a:txBody>
@@ -6694,7 +6692,7 @@
                             <a:srgbClr val="E2E8F0"/>
                           </a:solidFill>
                         </a:rPr>
-                        <a:t>Wed 13 May 2026  09:00 AM</a:t>
+                        <a:t>Thu 04 Jun 2026  12:00 AM</a:t>
                       </a:r>
                     </a:p>
                   </a:txBody>
@@ -6736,7 +6734,7 @@
                             <a:srgbClr val="E2E8F0"/>
                           </a:solidFill>
                         </a:rPr>
-                        <a:t>Wed 13 May 2026  07:00 AM</a:t>
+                        <a:t>Wed 03 Jun 2026  10:00 PM</a:t>
                       </a:r>
                     </a:p>
                   </a:txBody>
@@ -6778,7 +6776,7 @@
                             <a:srgbClr val="E2E8F0"/>
                           </a:solidFill>
                         </a:rPr>
-                        <a:t>https://events.sumologic.com/administrationpm05122026-event-training</a:t>
+                        <a:t>https://events.sumologic.com/searchmasteryam06032026-event-training</a:t>
                       </a:r>
                     </a:p>
                   </a:txBody>
@@ -6822,7 +6820,7 @@
                             <a:srgbClr val="E2E8F0"/>
                           </a:solidFill>
                         </a:rPr>
-                        <a:t>Metric Analytics AM</a:t>
+                        <a:t>Search Mastery PM</a:t>
                       </a:r>
                     </a:p>
                   </a:txBody>
@@ -6864,7 +6862,7 @@
                             <a:srgbClr val="E2E8F0"/>
                           </a:solidFill>
                         </a:rPr>
-                        <a:t>Wed 13 May 2026  07:00 AM  →  10:00 AM</a:t>
+                        <a:t>Wed 03 Jun 2026  04:00 PM  →  07:00 PM</a:t>
                       </a:r>
                     </a:p>
                   </a:txBody>
@@ -6906,7 +6904,7 @@
                             <a:srgbClr val="E2E8F0"/>
                           </a:solidFill>
                         </a:rPr>
-                        <a:t>Thu 14 May 2026  02:00 AM</a:t>
+                        <a:t>Thu 04 Jun 2026  11:00 AM</a:t>
                       </a:r>
                     </a:p>
                   </a:txBody>
@@ -6948,7 +6946,7 @@
                             <a:srgbClr val="E2E8F0"/>
                           </a:solidFill>
                         </a:rPr>
-                        <a:t>Thu 14 May 2026  12:00 AM</a:t>
+                        <a:t>Thu 04 Jun 2026  09:00 AM</a:t>
                       </a:r>
                     </a:p>
                   </a:txBody>
@@ -6990,7 +6988,7 @@
                             <a:srgbClr val="E2E8F0"/>
                           </a:solidFill>
                         </a:rPr>
-                        <a:t>Wed 13 May 2026  10:00 PM</a:t>
+                        <a:t>Thu 04 Jun 2026  07:00 AM</a:t>
                       </a:r>
                     </a:p>
                   </a:txBody>
@@ -7032,7 +7030,7 @@
                             <a:srgbClr val="E2E8F0"/>
                           </a:solidFill>
                         </a:rPr>
-                        <a:t>https://events.sumologic.com/metricanalyticsam05132026-event-training</a:t>
+                        <a:t>https://events.sumologic.com/searchmasterypm06032026-event-training</a:t>
                       </a:r>
                     </a:p>
                   </a:txBody>
@@ -7076,7 +7074,7 @@
                             <a:srgbClr val="E2E8F0"/>
                           </a:solidFill>
                         </a:rPr>
-                        <a:t>Metric Analytics PM</a:t>
+                        <a:t>Best Practice for Query Efficiency AM</a:t>
                       </a:r>
                     </a:p>
                   </a:txBody>
@@ -7118,7 +7116,7 @@
                             <a:srgbClr val="E2E8F0"/>
                           </a:solidFill>
                         </a:rPr>
-                        <a:t>Wed 13 May 2026  04:00 PM  →  07:00 PM</a:t>
+                        <a:t>Thu 04 Jun 2026  07:00 AM  →  08:30 AM</a:t>
                       </a:r>
                     </a:p>
                   </a:txBody>
@@ -7160,7 +7158,7 @@
                             <a:srgbClr val="E2E8F0"/>
                           </a:solidFill>
                         </a:rPr>
-                        <a:t>Thu 14 May 2026  11:00 AM</a:t>
+                        <a:t>Fri 05 Jun 2026  02:00 AM</a:t>
                       </a:r>
                     </a:p>
                   </a:txBody>
@@ -7202,7 +7200,7 @@
                             <a:srgbClr val="E2E8F0"/>
                           </a:solidFill>
                         </a:rPr>
-                        <a:t>Thu 14 May 2026  09:00 AM</a:t>
+                        <a:t>Fri 05 Jun 2026  12:00 AM</a:t>
                       </a:r>
                     </a:p>
                   </a:txBody>
@@ -7244,7 +7242,7 @@
                             <a:srgbClr val="E2E8F0"/>
                           </a:solidFill>
                         </a:rPr>
-                        <a:t>Thu 14 May 2026  07:00 AM</a:t>
+                        <a:t>Thu 04 Jun 2026  10:00 PM</a:t>
                       </a:r>
                     </a:p>
                   </a:txBody>
@@ -7286,7 +7284,7 @@
                             <a:srgbClr val="E2E8F0"/>
                           </a:solidFill>
                         </a:rPr>
-                        <a:t>https://events.sumologic.com/metricanalyricspm05132026-event-training</a:t>
+                        <a:t>https://events.sumologic.com/bp4qeam06042026-event-training</a:t>
                       </a:r>
                     </a:p>
                   </a:txBody>
@@ -7330,7 +7328,7 @@
                             <a:srgbClr val="E2E8F0"/>
                           </a:solidFill>
                         </a:rPr>
-                        <a:t>Mobot Essentials AM</a:t>
+                        <a:t>Best Practice for Query Efficiency PM</a:t>
                       </a:r>
                     </a:p>
                   </a:txBody>
@@ -7372,7 +7370,7 @@
                             <a:srgbClr val="E2E8F0"/>
                           </a:solidFill>
                         </a:rPr>
-                        <a:t>Thu 14 May 2026  07:00 AM  →  08:30 AM</a:t>
+                        <a:t>Thu 04 Jun 2026  04:00 PM  →  05:30 PM</a:t>
                       </a:r>
                     </a:p>
                   </a:txBody>
@@ -7414,7 +7412,7 @@
                             <a:srgbClr val="E2E8F0"/>
                           </a:solidFill>
                         </a:rPr>
-                        <a:t>Fri 15 May 2026  02:00 AM</a:t>
+                        <a:t>Fri 05 Jun 2026  11:00 AM</a:t>
                       </a:r>
                     </a:p>
                   </a:txBody>
@@ -7456,7 +7454,7 @@
                             <a:srgbClr val="E2E8F0"/>
                           </a:solidFill>
                         </a:rPr>
-                        <a:t>Fri 15 May 2026  12:00 AM</a:t>
+                        <a:t>Fri 05 Jun 2026  09:00 AM</a:t>
                       </a:r>
                     </a:p>
                   </a:txBody>
@@ -7498,7 +7496,7 @@
                             <a:srgbClr val="E2E8F0"/>
                           </a:solidFill>
                         </a:rPr>
-                        <a:t>Thu 14 May 2026  10:00 PM</a:t>
+                        <a:t>Fri 05 Jun 2026  07:00 AM</a:t>
                       </a:r>
                     </a:p>
                   </a:txBody>
@@ -7540,7 +7538,7 @@
                             <a:srgbClr val="E2E8F0"/>
                           </a:solidFill>
                         </a:rPr>
-                        <a:t>https://events.sumologic.com/mobotessentialsam05142026-event-training</a:t>
+                        <a:t>https://events.sumologic.com/bp4qepm06042026-event-training</a:t>
                       </a:r>
                     </a:p>
                   </a:txBody>
@@ -7584,7 +7582,7 @@
                             <a:srgbClr val="E2E8F0"/>
                           </a:solidFill>
                         </a:rPr>
-                        <a:t>Mobot Essentials PM</a:t>
+                        <a:t>Administration AM</a:t>
                       </a:r>
                     </a:p>
                   </a:txBody>
@@ -7626,7 +7624,7 @@
                             <a:srgbClr val="E2E8F0"/>
                           </a:solidFill>
                         </a:rPr>
-                        <a:t>Thu 14 May 2026  04:00 PM  →  05:30 PM</a:t>
+                        <a:t>Tue 09 Jun 2026  07:00 AM  →  10:00 AM</a:t>
                       </a:r>
                     </a:p>
                   </a:txBody>
@@ -7668,7 +7666,7 @@
                             <a:srgbClr val="E2E8F0"/>
                           </a:solidFill>
                         </a:rPr>
-                        <a:t>Fri 15 May 2026  11:00 AM</a:t>
+                        <a:t>Wed 10 Jun 2026  02:00 AM</a:t>
                       </a:r>
                     </a:p>
                   </a:txBody>
@@ -7710,7 +7708,7 @@
                             <a:srgbClr val="E2E8F0"/>
                           </a:solidFill>
                         </a:rPr>
-                        <a:t>Fri 15 May 2026  09:00 AM</a:t>
+                        <a:t>Wed 10 Jun 2026  12:00 AM</a:t>
                       </a:r>
                     </a:p>
                   </a:txBody>
@@ -7752,7 +7750,7 @@
                             <a:srgbClr val="E2E8F0"/>
                           </a:solidFill>
                         </a:rPr>
-                        <a:t>Fri 15 May 2026  07:00 AM</a:t>
+                        <a:t>Tue 09 Jun 2026  10:00 PM</a:t>
                       </a:r>
                     </a:p>
                   </a:txBody>
@@ -7794,7 +7792,7 @@
                             <a:srgbClr val="E2E8F0"/>
                           </a:solidFill>
                         </a:rPr>
-                        <a:t>https://events.sumologic.com/mobotessentialspm05142026-event-training</a:t>
+                        <a:t>https://events.sumologic.com/administrationam06092026-event-training</a:t>
                       </a:r>
                     </a:p>
                   </a:txBody>
@@ -7838,7 +7836,7 @@
                             <a:srgbClr val="E2E8F0"/>
                           </a:solidFill>
                         </a:rPr>
-                        <a:t>Logs for Security AM</a:t>
+                        <a:t>Administration PM</a:t>
                       </a:r>
                     </a:p>
                   </a:txBody>
@@ -7880,7 +7878,7 @@
                             <a:srgbClr val="E2E8F0"/>
                           </a:solidFill>
                         </a:rPr>
-                        <a:t>Tue 19 May 2026  07:00 AM  →  10:00 AM</a:t>
+                        <a:t>Tue 09 Jun 2026  04:00 PM  →  07:00 PM</a:t>
                       </a:r>
                     </a:p>
                   </a:txBody>
@@ -7922,7 +7920,7 @@
                             <a:srgbClr val="E2E8F0"/>
                           </a:solidFill>
                         </a:rPr>
-                        <a:t>Wed 20 May 2026  02:00 AM</a:t>
+                        <a:t>Wed 10 Jun 2026  11:00 AM</a:t>
                       </a:r>
                     </a:p>
                   </a:txBody>
@@ -7964,7 +7962,7 @@
                             <a:srgbClr val="E2E8F0"/>
                           </a:solidFill>
                         </a:rPr>
-                        <a:t>Wed 20 May 2026  12:00 AM</a:t>
+                        <a:t>Wed 10 Jun 2026  09:00 AM</a:t>
                       </a:r>
                     </a:p>
                   </a:txBody>
@@ -8006,7 +8004,7 @@
                             <a:srgbClr val="E2E8F0"/>
                           </a:solidFill>
                         </a:rPr>
-                        <a:t>Tue 19 May 2026  10:00 PM</a:t>
+                        <a:t>Wed 10 Jun 2026  07:00 AM</a:t>
                       </a:r>
                     </a:p>
                   </a:txBody>
@@ -8048,7 +8046,7 @@
                             <a:srgbClr val="E2E8F0"/>
                           </a:solidFill>
                         </a:rPr>
-                        <a:t>https://events.sumologic.com/logsforsecurityam05192026-event-training</a:t>
+                        <a:t>https://events.sumologic.com/administrationpm06092026-event-training</a:t>
                       </a:r>
                     </a:p>
                   </a:txBody>
@@ -8092,7 +8090,7 @@
                             <a:srgbClr val="E2E8F0"/>
                           </a:solidFill>
                         </a:rPr>
-                        <a:t>Logs for Security PM</a:t>
+                        <a:t>Metrics Analytics AM</a:t>
                       </a:r>
                     </a:p>
                   </a:txBody>
@@ -8134,7 +8132,7 @@
                             <a:srgbClr val="E2E8F0"/>
                           </a:solidFill>
                         </a:rPr>
-                        <a:t>Tue 19 May 2026  04:00 PM  →  07:00 PM</a:t>
+                        <a:t>Wed 10 Jun 2026  07:00 AM  →  10:00 AM</a:t>
                       </a:r>
                     </a:p>
                   </a:txBody>
@@ -8176,7 +8174,7 @@
                             <a:srgbClr val="E2E8F0"/>
                           </a:solidFill>
                         </a:rPr>
-                        <a:t>Wed 20 May 2026  11:00 AM</a:t>
+                        <a:t>Thu 11 Jun 2026  02:00 AM</a:t>
                       </a:r>
                     </a:p>
                   </a:txBody>
@@ -8218,7 +8216,7 @@
                             <a:srgbClr val="E2E8F0"/>
                           </a:solidFill>
                         </a:rPr>
-                        <a:t>Wed 20 May 2026  09:00 AM</a:t>
+                        <a:t>Thu 11 Jun 2026  12:00 AM</a:t>
                       </a:r>
                     </a:p>
                   </a:txBody>
@@ -8260,7 +8258,7 @@
                             <a:srgbClr val="E2E8F0"/>
                           </a:solidFill>
                         </a:rPr>
-                        <a:t>Wed 20 May 2026  07:00 AM</a:t>
+                        <a:t>Wed 10 Jun 2026  10:00 PM</a:t>
                       </a:r>
                     </a:p>
                   </a:txBody>
@@ -8302,7 +8300,7 @@
                             <a:srgbClr val="E2E8F0"/>
                           </a:solidFill>
                         </a:rPr>
-                        <a:t>https://events.sumologic.com/logsforsecuritypm05192026-event-training</a:t>
+                        <a:t>https://events.sumologic.com/metricanalyticsam06102026-event-training</a:t>
                       </a:r>
                     </a:p>
                   </a:txBody>
@@ -8346,7 +8344,7 @@
                             <a:srgbClr val="E2E8F0"/>
                           </a:solidFill>
                         </a:rPr>
-                        <a:t>Essential Cloud SIEM Skills for SOC Analysts AM</a:t>
+                        <a:t>Metrics Analytics PM</a:t>
                       </a:r>
                     </a:p>
                   </a:txBody>
@@ -8388,7 +8386,7 @@
                             <a:srgbClr val="E2E8F0"/>
                           </a:solidFill>
                         </a:rPr>
-                        <a:t>Wed 20 May 2026  07:00 AM  →  08:30 AM</a:t>
+                        <a:t>Wed 10 Jun 2026  04:00 PM  →  07:00 PM</a:t>
                       </a:r>
                     </a:p>
                   </a:txBody>
@@ -8430,7 +8428,7 @@
                             <a:srgbClr val="E2E8F0"/>
                           </a:solidFill>
                         </a:rPr>
-                        <a:t>Thu 21 May 2026  02:00 AM</a:t>
+                        <a:t>Thu 11 Jun 2026  11:00 AM</a:t>
                       </a:r>
                     </a:p>
                   </a:txBody>
@@ -8472,7 +8470,7 @@
                             <a:srgbClr val="E2E8F0"/>
                           </a:solidFill>
                         </a:rPr>
-                        <a:t>Thu 21 May 2026  12:00 AM</a:t>
+                        <a:t>Thu 11 Jun 2026  09:00 AM</a:t>
                       </a:r>
                     </a:p>
                   </a:txBody>
@@ -8514,7 +8512,7 @@
                             <a:srgbClr val="E2E8F0"/>
                           </a:solidFill>
                         </a:rPr>
-                        <a:t>Wed 20 May 2026  10:00 PM</a:t>
+                        <a:t>Thu 11 Jun 2026  07:00 AM</a:t>
                       </a:r>
                     </a:p>
                   </a:txBody>
@@ -8556,7 +8554,7 @@
                             <a:srgbClr val="E2E8F0"/>
                           </a:solidFill>
                         </a:rPr>
-                        <a:t>https://events.sumologic.com/esscloudsiemam05202026-event-training</a:t>
+                        <a:t>https://events.sumologic.com/metricanalyticspm06102026-event-training</a:t>
                       </a:r>
                     </a:p>
                   </a:txBody>
@@ -8600,7 +8598,7 @@
                             <a:srgbClr val="E2E8F0"/>
                           </a:solidFill>
                         </a:rPr>
-                        <a:t>Essential Cloud SIEM Skills for SOC Analysts PM</a:t>
+                        <a:t>Mobot Essentials AM</a:t>
                       </a:r>
                     </a:p>
                   </a:txBody>
@@ -8642,7 +8640,7 @@
                             <a:srgbClr val="E2E8F0"/>
                           </a:solidFill>
                         </a:rPr>
-                        <a:t>Wed 20 May 2026  04:00 PM  →  05:30 PM</a:t>
+                        <a:t>Thu 11 Jun 2026  07:00 AM  →  08:30 AM</a:t>
                       </a:r>
                     </a:p>
                   </a:txBody>
@@ -8684,7 +8682,7 @@
                             <a:srgbClr val="E2E8F0"/>
                           </a:solidFill>
                         </a:rPr>
-                        <a:t>Thu 21 May 2026  11:00 AM</a:t>
+                        <a:t>Fri 12 Jun 2026  02:00 AM</a:t>
                       </a:r>
                     </a:p>
                   </a:txBody>
@@ -8726,7 +8724,7 @@
                             <a:srgbClr val="E2E8F0"/>
                           </a:solidFill>
                         </a:rPr>
-                        <a:t>Thu 21 May 2026  09:00 AM</a:t>
+                        <a:t>Fri 12 Jun 2026  12:00 AM</a:t>
                       </a:r>
                     </a:p>
                   </a:txBody>
@@ -8768,7 +8766,7 @@
                             <a:srgbClr val="E2E8F0"/>
                           </a:solidFill>
                         </a:rPr>
-                        <a:t>Thu 21 May 2026  07:00 AM</a:t>
+                        <a:t>Thu 11 Jun 2026  10:00 PM</a:t>
                       </a:r>
                     </a:p>
                   </a:txBody>
@@ -8810,7 +8808,7 @@
                             <a:srgbClr val="E2E8F0"/>
                           </a:solidFill>
                         </a:rPr>
-                        <a:t>https://events.sumologic.com/esscloudsiempm05202026-event-training</a:t>
+                        <a:t>https://events.sumologic.com/mobotessentialsam06112026-event-training</a:t>
                       </a:r>
                     </a:p>
                   </a:txBody>
@@ -8854,7 +8852,7 @@
                             <a:srgbClr val="E2E8F0"/>
                           </a:solidFill>
                         </a:rPr>
-                        <a:t>Cloud SIEM AM</a:t>
+                        <a:t>Mobot Essentials PM</a:t>
                       </a:r>
                     </a:p>
                   </a:txBody>
@@ -8896,7 +8894,7 @@
                             <a:srgbClr val="E2E8F0"/>
                           </a:solidFill>
                         </a:rPr>
-                        <a:t>Thu 21 May 2026  07:00 AM  →  10:00 AM</a:t>
+                        <a:t>Thu 11 Jun 2026  04:00 PM  →  05:30 PM</a:t>
                       </a:r>
                     </a:p>
                   </a:txBody>
@@ -8938,7 +8936,7 @@
                             <a:srgbClr val="E2E8F0"/>
                           </a:solidFill>
                         </a:rPr>
-                        <a:t>Fri 22 May 2026  02:00 AM</a:t>
+                        <a:t>Fri 12 Jun 2026  11:00 AM</a:t>
                       </a:r>
                     </a:p>
                   </a:txBody>
@@ -8980,7 +8978,7 @@
                             <a:srgbClr val="E2E8F0"/>
                           </a:solidFill>
                         </a:rPr>
-                        <a:t>Fri 22 May 2026  12:00 AM</a:t>
+                        <a:t>Fri 12 Jun 2026  09:00 AM</a:t>
                       </a:r>
                     </a:p>
                   </a:txBody>
@@ -9022,7 +9020,7 @@
                             <a:srgbClr val="E2E8F0"/>
                           </a:solidFill>
                         </a:rPr>
-                        <a:t>Thu 21 May 2026  10:00 PM</a:t>
+                        <a:t>Fri 12 Jun 2026  07:00 AM</a:t>
                       </a:r>
                     </a:p>
                   </a:txBody>
@@ -9064,7 +9062,7 @@
                             <a:srgbClr val="E2E8F0"/>
                           </a:solidFill>
                         </a:rPr>
-                        <a:t>https://events.sumologic.com/cloudsiemam05212026-event-training</a:t>
+                        <a:t>https://events.sumologic.com/mobotessentialspm06112026-event-training</a:t>
                       </a:r>
                     </a:p>
                   </a:txBody>
@@ -9264,7 +9262,7 @@
                   <a:srgbClr val="00B4D8"/>
                 </a:solidFill>
               </a:rPr>
-              <a:t>Sumo Logic — Virtual Training Schedule   ·   21 May 2026 – 09 Jun 2026   (3/7)</a:t>
+              <a:t>Sumo Logic — Virtual Training Schedule   ·   16 Jun – 30 Jun 2026   (3/5)</a:t>
             </a:r>
           </a:p>
         </p:txBody>
@@ -9298,7 +9296,7 @@
                   <a:srgbClr val="94A3B8"/>
                 </a:solidFill>
               </a:rPr>
-              <a:t>p 3/7</a:t>
+              <a:t>p 3/5</a:t>
             </a:r>
           </a:p>
         </p:txBody>
@@ -9596,7 +9594,7 @@
                             <a:srgbClr val="E2E8F0"/>
                           </a:solidFill>
                         </a:rPr>
-                        <a:t>Cloud SIEM PM</a:t>
+                        <a:t>Logs for Security AM</a:t>
                       </a:r>
                     </a:p>
                   </a:txBody>
@@ -9638,7 +9636,7 @@
                             <a:srgbClr val="E2E8F0"/>
                           </a:solidFill>
                         </a:rPr>
-                        <a:t>Thu 21 May 2026  04:00 PM  →  07:00 PM</a:t>
+                        <a:t>Tue 16 Jun 2026  07:00 AM  →  10:00 AM</a:t>
                       </a:r>
                     </a:p>
                   </a:txBody>
@@ -9680,7 +9678,7 @@
                             <a:srgbClr val="E2E8F0"/>
                           </a:solidFill>
                         </a:rPr>
-                        <a:t>Fri 22 May 2026  11:00 AM</a:t>
+                        <a:t>Wed 17 Jun 2026  02:00 AM</a:t>
                       </a:r>
                     </a:p>
                   </a:txBody>
@@ -9722,7 +9720,7 @@
                             <a:srgbClr val="E2E8F0"/>
                           </a:solidFill>
                         </a:rPr>
-                        <a:t>Fri 22 May 2026  09:00 AM</a:t>
+                        <a:t>Wed 17 Jun 2026  12:00 AM</a:t>
                       </a:r>
                     </a:p>
                   </a:txBody>
@@ -9764,7 +9762,7 @@
                             <a:srgbClr val="E2E8F0"/>
                           </a:solidFill>
                         </a:rPr>
-                        <a:t>Fri 22 May 2026  07:00 AM</a:t>
+                        <a:t>Tue 16 Jun 2026  10:00 PM</a:t>
                       </a:r>
                     </a:p>
                   </a:txBody>
@@ -9806,7 +9804,7 @@
                             <a:srgbClr val="E2E8F0"/>
                           </a:solidFill>
                         </a:rPr>
-                        <a:t>https://events.sumologic.com/cloudsiempm05212026-event-training</a:t>
+                        <a:t>https://events.sumologic.com/logsforsecurityam06162026-event-training</a:t>
                       </a:r>
                     </a:p>
                   </a:txBody>
@@ -9850,7 +9848,7 @@
                             <a:srgbClr val="E2E8F0"/>
                           </a:solidFill>
                         </a:rPr>
-                        <a:t>Welcome Webinar AM</a:t>
+                        <a:t>Logs for Security PM</a:t>
                       </a:r>
                     </a:p>
                   </a:txBody>
@@ -9892,7 +9890,7 @@
                             <a:srgbClr val="E2E8F0"/>
                           </a:solidFill>
                         </a:rPr>
-                        <a:t>Tue 02 Jun 2026  05:00 AM  →  06:00 AM</a:t>
+                        <a:t>Tue 16 Jun 2026  04:00 PM  →  07:00 PM</a:t>
                       </a:r>
                     </a:p>
                   </a:txBody>
@@ -9934,7 +9932,7 @@
                             <a:srgbClr val="E2E8F0"/>
                           </a:solidFill>
                         </a:rPr>
-                        <a:t>Wed 03 Jun 2026  12:00 AM</a:t>
+                        <a:t>Wed 17 Jun 2026  11:00 AM</a:t>
                       </a:r>
                     </a:p>
                   </a:txBody>
@@ -9976,7 +9974,7 @@
                             <a:srgbClr val="E2E8F0"/>
                           </a:solidFill>
                         </a:rPr>
-                        <a:t>Tue 02 Jun 2026  10:00 PM</a:t>
+                        <a:t>Wed 17 Jun 2026  09:00 AM</a:t>
                       </a:r>
                     </a:p>
                   </a:txBody>
@@ -10018,7 +10016,7 @@
                             <a:srgbClr val="E2E8F0"/>
                           </a:solidFill>
                         </a:rPr>
-                        <a:t>Tue 02 Jun 2026  08:00 PM</a:t>
+                        <a:t>Wed 17 Jun 2026  07:00 AM</a:t>
                       </a:r>
                     </a:p>
                   </a:txBody>
@@ -10060,7 +10058,7 @@
                             <a:srgbClr val="E2E8F0"/>
                           </a:solidFill>
                         </a:rPr>
-                        <a:t>https://events.sumologic.com/welcomewebinaram06022026-event-training</a:t>
+                        <a:t>https://events.sumologic.com/logsforsecuritypm06162026-event-training</a:t>
                       </a:r>
                     </a:p>
                   </a:txBody>
@@ -10104,7 +10102,7 @@
                             <a:srgbClr val="E2E8F0"/>
                           </a:solidFill>
                         </a:rPr>
-                        <a:t>Fundamentals AM</a:t>
+                        <a:t>Cloud SIEM AM</a:t>
                       </a:r>
                     </a:p>
                   </a:txBody>
@@ -10146,7 +10144,7 @@
                             <a:srgbClr val="E2E8F0"/>
                           </a:solidFill>
                         </a:rPr>
-                        <a:t>Tue 02 Jun 2026  07:00 AM  →  10:00 AM</a:t>
+                        <a:t>Wed 17 Jun 2026  07:00 AM  →  10:00 AM</a:t>
                       </a:r>
                     </a:p>
                   </a:txBody>
@@ -10188,7 +10186,7 @@
                             <a:srgbClr val="E2E8F0"/>
                           </a:solidFill>
                         </a:rPr>
-                        <a:t>Wed 03 Jun 2026  02:00 AM</a:t>
+                        <a:t>Thu 18 Jun 2026  02:00 AM</a:t>
                       </a:r>
                     </a:p>
                   </a:txBody>
@@ -10230,7 +10228,7 @@
                             <a:srgbClr val="E2E8F0"/>
                           </a:solidFill>
                         </a:rPr>
-                        <a:t>Wed 03 Jun 2026  12:00 AM</a:t>
+                        <a:t>Thu 18 Jun 2026  12:00 AM</a:t>
                       </a:r>
                     </a:p>
                   </a:txBody>
@@ -10272,7 +10270,7 @@
                             <a:srgbClr val="E2E8F0"/>
                           </a:solidFill>
                         </a:rPr>
-                        <a:t>Tue 02 Jun 2026  10:00 PM</a:t>
+                        <a:t>Wed 17 Jun 2026  10:00 PM</a:t>
                       </a:r>
                     </a:p>
                   </a:txBody>
@@ -10314,7 +10312,7 @@
                             <a:srgbClr val="E2E8F0"/>
                           </a:solidFill>
                         </a:rPr>
-                        <a:t>https://events.sumologic.com/fundamentalsam06022026-event-training</a:t>
+                        <a:t>https://events.sumologic.com/cloudsiemam06172026-event-training</a:t>
                       </a:r>
                     </a:p>
                   </a:txBody>
@@ -10358,7 +10356,7 @@
                             <a:srgbClr val="E2E8F0"/>
                           </a:solidFill>
                         </a:rPr>
-                        <a:t>Welcome Webinar PM</a:t>
+                        <a:t>Cloud SIEM PM</a:t>
                       </a:r>
                     </a:p>
                   </a:txBody>
@@ -10400,7 +10398,7 @@
                             <a:srgbClr val="E2E8F0"/>
                           </a:solidFill>
                         </a:rPr>
-                        <a:t>Tue 02 Jun 2026  02:00 PM  →  03:00 PM</a:t>
+                        <a:t>Wed 17 Jun 2026  04:00 PM  →  07:00 PM</a:t>
                       </a:r>
                     </a:p>
                   </a:txBody>
@@ -10442,7 +10440,7 @@
                             <a:srgbClr val="E2E8F0"/>
                           </a:solidFill>
                         </a:rPr>
-                        <a:t>Wed 03 Jun 2026  09:00 AM</a:t>
+                        <a:t>Thu 18 Jun 2026  11:00 AM</a:t>
                       </a:r>
                     </a:p>
                   </a:txBody>
@@ -10484,7 +10482,7 @@
                             <a:srgbClr val="E2E8F0"/>
                           </a:solidFill>
                         </a:rPr>
-                        <a:t>Wed 03 Jun 2026  07:00 AM</a:t>
+                        <a:t>Thu 18 Jun 2026  09:00 AM</a:t>
                       </a:r>
                     </a:p>
                   </a:txBody>
@@ -10526,7 +10524,7 @@
                             <a:srgbClr val="E2E8F0"/>
                           </a:solidFill>
                         </a:rPr>
-                        <a:t>Wed 03 Jun 2026  05:00 AM</a:t>
+                        <a:t>Thu 18 Jun 2026  07:00 AM</a:t>
                       </a:r>
                     </a:p>
                   </a:txBody>
@@ -10568,7 +10566,7 @@
                             <a:srgbClr val="E2E8F0"/>
                           </a:solidFill>
                         </a:rPr>
-                        <a:t>https://events.sumologic.com/welcomewebinarpm06022026-event-training</a:t>
+                        <a:t>https://events.sumologic.com/cloudsiempm06172026-event-training</a:t>
                       </a:r>
                     </a:p>
                   </a:txBody>
@@ -10612,7 +10610,7 @@
                             <a:srgbClr val="E2E8F0"/>
                           </a:solidFill>
                         </a:rPr>
-                        <a:t>Fundamentals PM</a:t>
+                        <a:t>Automation Workshop AM</a:t>
                       </a:r>
                     </a:p>
                   </a:txBody>
@@ -10654,7 +10652,7 @@
                             <a:srgbClr val="E2E8F0"/>
                           </a:solidFill>
                         </a:rPr>
-                        <a:t>Tue 02 Jun 2026  04:00 PM  →  07:00 PM</a:t>
+                        <a:t>Thu 18 Jun 2026  07:00 AM  →  08:30 AM</a:t>
                       </a:r>
                     </a:p>
                   </a:txBody>
@@ -10696,7 +10694,7 @@
                             <a:srgbClr val="E2E8F0"/>
                           </a:solidFill>
                         </a:rPr>
-                        <a:t>Wed 03 Jun 2026  11:00 AM</a:t>
+                        <a:t>Fri 19 Jun 2026  02:00 AM</a:t>
                       </a:r>
                     </a:p>
                   </a:txBody>
@@ -10738,7 +10736,7 @@
                             <a:srgbClr val="E2E8F0"/>
                           </a:solidFill>
                         </a:rPr>
-                        <a:t>Wed 03 Jun 2026  09:00 AM</a:t>
+                        <a:t>Fri 19 Jun 2026  12:00 AM</a:t>
                       </a:r>
                     </a:p>
                   </a:txBody>
@@ -10780,7 +10778,7 @@
                             <a:srgbClr val="E2E8F0"/>
                           </a:solidFill>
                         </a:rPr>
-                        <a:t>Wed 03 Jun 2026  07:00 AM</a:t>
+                        <a:t>Thu 18 Jun 2026  10:00 PM</a:t>
                       </a:r>
                     </a:p>
                   </a:txBody>
@@ -10822,7 +10820,7 @@
                             <a:srgbClr val="E2E8F0"/>
                           </a:solidFill>
                         </a:rPr>
-                        <a:t>https://events.sumologic.com/fundamentalspm06022026-event-training</a:t>
+                        <a:t>https://events.sumologic.com/automationworkshopam06182026-event-training</a:t>
                       </a:r>
                     </a:p>
                   </a:txBody>
@@ -10866,7 +10864,7 @@
                             <a:srgbClr val="E2E8F0"/>
                           </a:solidFill>
                         </a:rPr>
-                        <a:t>Search Mastery AM</a:t>
+                        <a:t>Automation Workshop PM</a:t>
                       </a:r>
                     </a:p>
                   </a:txBody>
@@ -10908,7 +10906,7 @@
                             <a:srgbClr val="E2E8F0"/>
                           </a:solidFill>
                         </a:rPr>
-                        <a:t>Wed 03 Jun 2026  07:00 AM  →  10:00 AM</a:t>
+                        <a:t>Thu 18 Jun 2026  04:00 PM  →  05:30 PM</a:t>
                       </a:r>
                     </a:p>
                   </a:txBody>
@@ -10950,7 +10948,7 @@
                             <a:srgbClr val="E2E8F0"/>
                           </a:solidFill>
                         </a:rPr>
-                        <a:t>Thu 04 Jun 2026  02:00 AM</a:t>
+                        <a:t>Fri 19 Jun 2026  11:00 AM</a:t>
                       </a:r>
                     </a:p>
                   </a:txBody>
@@ -10992,7 +10990,7 @@
                             <a:srgbClr val="E2E8F0"/>
                           </a:solidFill>
                         </a:rPr>
-                        <a:t>Thu 04 Jun 2026  12:00 AM</a:t>
+                        <a:t>Fri 19 Jun 2026  09:00 AM</a:t>
                       </a:r>
                     </a:p>
                   </a:txBody>
@@ -11034,7 +11032,7 @@
                             <a:srgbClr val="E2E8F0"/>
                           </a:solidFill>
                         </a:rPr>
-                        <a:t>Wed 03 Jun 2026  10:00 PM</a:t>
+                        <a:t>Fri 19 Jun 2026  07:00 AM</a:t>
                       </a:r>
                     </a:p>
                   </a:txBody>
@@ -11076,7 +11074,7 @@
                             <a:srgbClr val="E2E8F0"/>
                           </a:solidFill>
                         </a:rPr>
-                        <a:t>https://events.sumologic.com/searchmasteryam06032026-event-training</a:t>
+                        <a:t>https://events.sumologic.com/automationworkshoppm06182026-event-training</a:t>
                       </a:r>
                     </a:p>
                   </a:txBody>
@@ -11120,7 +11118,7 @@
                             <a:srgbClr val="E2E8F0"/>
                           </a:solidFill>
                         </a:rPr>
-                        <a:t>Search Mastery PM</a:t>
+                        <a:t>Welcome Webinar AM</a:t>
                       </a:r>
                     </a:p>
                   </a:txBody>
@@ -11162,7 +11160,7 @@
                             <a:srgbClr val="E2E8F0"/>
                           </a:solidFill>
                         </a:rPr>
-                        <a:t>Wed 03 Jun 2026  04:00 PM  →  07:00 PM</a:t>
+                        <a:t>Tue 30 Jun 2026  05:00 AM  →  06:00 AM</a:t>
                       </a:r>
                     </a:p>
                   </a:txBody>
@@ -11204,7 +11202,7 @@
                             <a:srgbClr val="E2E8F0"/>
                           </a:solidFill>
                         </a:rPr>
-                        <a:t>Thu 04 Jun 2026  11:00 AM</a:t>
+                        <a:t>Wed 01 Jul 2026  12:00 AM</a:t>
                       </a:r>
                     </a:p>
                   </a:txBody>
@@ -11246,7 +11244,7 @@
                             <a:srgbClr val="E2E8F0"/>
                           </a:solidFill>
                         </a:rPr>
-                        <a:t>Thu 04 Jun 2026  09:00 AM</a:t>
+                        <a:t>Tue 30 Jun 2026  10:00 PM</a:t>
                       </a:r>
                     </a:p>
                   </a:txBody>
@@ -11288,7 +11286,7 @@
                             <a:srgbClr val="E2E8F0"/>
                           </a:solidFill>
                         </a:rPr>
-                        <a:t>Thu 04 Jun 2026  07:00 AM</a:t>
+                        <a:t>Tue 30 Jun 2026  08:00 PM</a:t>
                       </a:r>
                     </a:p>
                   </a:txBody>
@@ -11330,7 +11328,7 @@
                             <a:srgbClr val="E2E8F0"/>
                           </a:solidFill>
                         </a:rPr>
-                        <a:t>https://events.sumologic.com/searchmasterypm06032026-event-training</a:t>
+                        <a:t>https://events.sumologic.com/welcomewebinaram06302026-event-training</a:t>
                       </a:r>
                     </a:p>
                   </a:txBody>
@@ -11374,7 +11372,7 @@
                             <a:srgbClr val="E2E8F0"/>
                           </a:solidFill>
                         </a:rPr>
-                        <a:t>Best Practice for Query Efficiency AM</a:t>
+                        <a:t>Fundamentals AM</a:t>
                       </a:r>
                     </a:p>
                   </a:txBody>
@@ -11416,7 +11414,7 @@
                             <a:srgbClr val="E2E8F0"/>
                           </a:solidFill>
                         </a:rPr>
-                        <a:t>Thu 04 Jun 2026  07:00 AM  →  08:30 AM</a:t>
+                        <a:t>Tue 30 Jun 2026  07:00 AM  →  04:00 PM</a:t>
                       </a:r>
                     </a:p>
                   </a:txBody>
@@ -11458,7 +11456,7 @@
                             <a:srgbClr val="E2E8F0"/>
                           </a:solidFill>
                         </a:rPr>
-                        <a:t>Fri 05 Jun 2026  02:00 AM</a:t>
+                        <a:t>Wed 01 Jul 2026  02:00 AM</a:t>
                       </a:r>
                     </a:p>
                   </a:txBody>
@@ -11500,7 +11498,7 @@
                             <a:srgbClr val="E2E8F0"/>
                           </a:solidFill>
                         </a:rPr>
-                        <a:t>Fri 05 Jun 2026  12:00 AM</a:t>
+                        <a:t>Wed 01 Jul 2026  12:00 AM</a:t>
                       </a:r>
                     </a:p>
                   </a:txBody>
@@ -11542,7 +11540,7 @@
                             <a:srgbClr val="E2E8F0"/>
                           </a:solidFill>
                         </a:rPr>
-                        <a:t>Thu 04 Jun 2026  10:00 PM</a:t>
+                        <a:t>Tue 30 Jun 2026  10:00 PM</a:t>
                       </a:r>
                     </a:p>
                   </a:txBody>
@@ -11584,7 +11582,7 @@
                             <a:srgbClr val="E2E8F0"/>
                           </a:solidFill>
                         </a:rPr>
-                        <a:t>https://events.sumologic.com/bp4qeam06042026-event-training</a:t>
+                        <a:t>https://events.sumologic.com/fundamentalsam06302026-event-training</a:t>
                       </a:r>
                     </a:p>
                   </a:txBody>
@@ -11628,7 +11626,7 @@
                             <a:srgbClr val="E2E8F0"/>
                           </a:solidFill>
                         </a:rPr>
-                        <a:t>Best Practice for Query Efficiency PM</a:t>
+                        <a:t>Welcome Webinar PM</a:t>
                       </a:r>
                     </a:p>
                   </a:txBody>
@@ -11670,7 +11668,7 @@
                             <a:srgbClr val="E2E8F0"/>
                           </a:solidFill>
                         </a:rPr>
-                        <a:t>Thu 04 Jun 2026  04:00 PM  →  05:30 PM</a:t>
+                        <a:t>Tue 30 Jun 2026  10:00 AM  →  03:00 PM</a:t>
                       </a:r>
                     </a:p>
                   </a:txBody>
@@ -11712,7 +11710,7 @@
                             <a:srgbClr val="E2E8F0"/>
                           </a:solidFill>
                         </a:rPr>
-                        <a:t>Fri 05 Jun 2026  11:00 AM</a:t>
+                        <a:t>Wed 01 Jul 2026  05:00 AM</a:t>
                       </a:r>
                     </a:p>
                   </a:txBody>
@@ -11754,7 +11752,7 @@
                             <a:srgbClr val="E2E8F0"/>
                           </a:solidFill>
                         </a:rPr>
-                        <a:t>Fri 05 Jun 2026  09:00 AM</a:t>
+                        <a:t>Wed 01 Jul 2026  03:00 AM</a:t>
                       </a:r>
                     </a:p>
                   </a:txBody>
@@ -11796,7 +11794,7 @@
                             <a:srgbClr val="E2E8F0"/>
                           </a:solidFill>
                         </a:rPr>
-                        <a:t>Fri 05 Jun 2026  07:00 AM</a:t>
+                        <a:t>Wed 01 Jul 2026  01:00 AM</a:t>
                       </a:r>
                     </a:p>
                   </a:txBody>
@@ -11838,7 +11836,7 @@
                             <a:srgbClr val="E2E8F0"/>
                           </a:solidFill>
                         </a:rPr>
-                        <a:t>https://events.sumologic.com/bp4qepm06042026-event-training</a:t>
+                        <a:t>https://events.sumologic.com/welcomewebinarpm06302026-event-training</a:t>
                       </a:r>
                     </a:p>
                   </a:txBody>
@@ -11882,7 +11880,7 @@
                             <a:srgbClr val="E2E8F0"/>
                           </a:solidFill>
                         </a:rPr>
-                        <a:t>Administration AM</a:t>
+                        <a:t>Fundamentals PM</a:t>
                       </a:r>
                     </a:p>
                   </a:txBody>
@@ -11924,7 +11922,7 @@
                             <a:srgbClr val="E2E8F0"/>
                           </a:solidFill>
                         </a:rPr>
-                        <a:t>Tue 09 Jun 2026  07:00 AM  →  10:00 AM</a:t>
+                        <a:t>Tue 30 Jun 2026  04:00 PM  →  07:00 PM</a:t>
                       </a:r>
                     </a:p>
                   </a:txBody>
@@ -11966,7 +11964,7 @@
                             <a:srgbClr val="E2E8F0"/>
                           </a:solidFill>
                         </a:rPr>
-                        <a:t>Wed 10 Jun 2026  02:00 AM</a:t>
+                        <a:t>Wed 01 Jul 2026  11:00 AM</a:t>
                       </a:r>
                     </a:p>
                   </a:txBody>
@@ -12008,7 +12006,7 @@
                             <a:srgbClr val="E2E8F0"/>
                           </a:solidFill>
                         </a:rPr>
-                        <a:t>Wed 10 Jun 2026  12:00 AM</a:t>
+                        <a:t>Wed 01 Jul 2026  09:00 AM</a:t>
                       </a:r>
                     </a:p>
                   </a:txBody>
@@ -12050,7 +12048,7 @@
                             <a:srgbClr val="E2E8F0"/>
                           </a:solidFill>
                         </a:rPr>
-                        <a:t>Tue 09 Jun 2026  10:00 PM</a:t>
+                        <a:t>Wed 01 Jul 2026  07:00 AM</a:t>
                       </a:r>
                     </a:p>
                   </a:txBody>
@@ -12092,7 +12090,7 @@
                             <a:srgbClr val="E2E8F0"/>
                           </a:solidFill>
                         </a:rPr>
-                        <a:t>https://events.sumologic.com/administrationam06092026-event-training</a:t>
+                        <a:t>https://events.sumologic.com/fundamentalspm06302026-event-training</a:t>
                       </a:r>
                     </a:p>
                   </a:txBody>
@@ -12292,7 +12290,7 @@
                   <a:srgbClr val="00B4D8"/>
                 </a:solidFill>
               </a:rPr>
-              <a:t>Sumo Logic — Virtual Training Schedule   ·   09 Jun – 18 Jun 2026   (4/7)</a:t>
+              <a:t>Sumo Logic — Virtual Training Schedule   ·   01 Jul – 09 Jul 2026   (4/5)</a:t>
             </a:r>
           </a:p>
         </p:txBody>
@@ -12326,7 +12324,7 @@
                   <a:srgbClr val="94A3B8"/>
                 </a:solidFill>
               </a:rPr>
-              <a:t>p 4/7</a:t>
+              <a:t>p 4/5</a:t>
             </a:r>
           </a:p>
         </p:txBody>
@@ -12624,7 +12622,7 @@
                             <a:srgbClr val="E2E8F0"/>
                           </a:solidFill>
                         </a:rPr>
-                        <a:t>Administration PM</a:t>
+                        <a:t>Search Mastery AM</a:t>
                       </a:r>
                     </a:p>
                   </a:txBody>
@@ -12666,7 +12664,7 @@
                             <a:srgbClr val="E2E8F0"/>
                           </a:solidFill>
                         </a:rPr>
-                        <a:t>Tue 09 Jun 2026  04:00 PM  →  07:00 PM</a:t>
+                        <a:t>Wed 01 Jul 2026  07:00 AM  →  10:00 AM</a:t>
                       </a:r>
                     </a:p>
                   </a:txBody>
@@ -12708,7 +12706,7 @@
                             <a:srgbClr val="E2E8F0"/>
                           </a:solidFill>
                         </a:rPr>
-                        <a:t>Wed 10 Jun 2026  11:00 AM</a:t>
+                        <a:t>Thu 02 Jul 2026  02:00 AM</a:t>
                       </a:r>
                     </a:p>
                   </a:txBody>
@@ -12750,7 +12748,7 @@
                             <a:srgbClr val="E2E8F0"/>
                           </a:solidFill>
                         </a:rPr>
-                        <a:t>Wed 10 Jun 2026  09:00 AM</a:t>
+                        <a:t>Thu 02 Jul 2026  12:00 AM</a:t>
                       </a:r>
                     </a:p>
                   </a:txBody>
@@ -12792,7 +12790,7 @@
                             <a:srgbClr val="E2E8F0"/>
                           </a:solidFill>
                         </a:rPr>
-                        <a:t>Wed 10 Jun 2026  07:00 AM</a:t>
+                        <a:t>Wed 01 Jul 2026  10:00 PM</a:t>
                       </a:r>
                     </a:p>
                   </a:txBody>
@@ -12834,7 +12832,7 @@
                             <a:srgbClr val="E2E8F0"/>
                           </a:solidFill>
                         </a:rPr>
-                        <a:t>https://events.sumologic.com/administrationpm06092026-event-training</a:t>
+                        <a:t>https://events.sumologic.com/searchmasteryam07012026-event-training</a:t>
                       </a:r>
                     </a:p>
                   </a:txBody>
@@ -12878,7 +12876,7 @@
                             <a:srgbClr val="E2E8F0"/>
                           </a:solidFill>
                         </a:rPr>
-                        <a:t>Metric Analytics AM</a:t>
+                        <a:t>Search Mastery PM</a:t>
                       </a:r>
                     </a:p>
                   </a:txBody>
@@ -12920,7 +12918,7 @@
                             <a:srgbClr val="E2E8F0"/>
                           </a:solidFill>
                         </a:rPr>
-                        <a:t>Wed 10 Jun 2026  07:00 AM  →  10:00 AM</a:t>
+                        <a:t>Wed 01 Jul 2026  04:00 PM  →  07:00 PM</a:t>
                       </a:r>
                     </a:p>
                   </a:txBody>
@@ -12962,7 +12960,7 @@
                             <a:srgbClr val="E2E8F0"/>
                           </a:solidFill>
                         </a:rPr>
-                        <a:t>Thu 11 Jun 2026  02:00 AM</a:t>
+                        <a:t>Thu 02 Jul 2026  11:00 AM</a:t>
                       </a:r>
                     </a:p>
                   </a:txBody>
@@ -13004,7 +13002,7 @@
                             <a:srgbClr val="E2E8F0"/>
                           </a:solidFill>
                         </a:rPr>
-                        <a:t>Thu 11 Jun 2026  12:00 AM</a:t>
+                        <a:t>Thu 02 Jul 2026  09:00 AM</a:t>
                       </a:r>
                     </a:p>
                   </a:txBody>
@@ -13046,7 +13044,7 @@
                             <a:srgbClr val="E2E8F0"/>
                           </a:solidFill>
                         </a:rPr>
-                        <a:t>Wed 10 Jun 2026  10:00 PM</a:t>
+                        <a:t>Thu 02 Jul 2026  07:00 AM</a:t>
                       </a:r>
                     </a:p>
                   </a:txBody>
@@ -13088,7 +13086,7 @@
                             <a:srgbClr val="E2E8F0"/>
                           </a:solidFill>
                         </a:rPr>
-                        <a:t>https://events.sumologic.com/metricanalyticsam06102026-event-training</a:t>
+                        <a:t>https://events.sumologic.com/searchmasterypm07012026-event-training</a:t>
                       </a:r>
                     </a:p>
                   </a:txBody>
@@ -13132,7 +13130,7 @@
                             <a:srgbClr val="E2E8F0"/>
                           </a:solidFill>
                         </a:rPr>
-                        <a:t>Metric Analytics PM</a:t>
+                        <a:t>Best Practice for Query Efficiency AM</a:t>
                       </a:r>
                     </a:p>
                   </a:txBody>
@@ -13174,7 +13172,7 @@
                             <a:srgbClr val="E2E8F0"/>
                           </a:solidFill>
                         </a:rPr>
-                        <a:t>Wed 10 Jun 2026  04:00 PM  →  07:00 PM</a:t>
+                        <a:t>Thu 02 Jul 2026  07:00 AM  →  08:30 AM</a:t>
                       </a:r>
                     </a:p>
                   </a:txBody>
@@ -13216,7 +13214,7 @@
                             <a:srgbClr val="E2E8F0"/>
                           </a:solidFill>
                         </a:rPr>
-                        <a:t>Thu 11 Jun 2026  11:00 AM</a:t>
+                        <a:t>Fri 03 Jul 2026  02:00 AM</a:t>
                       </a:r>
                     </a:p>
                   </a:txBody>
@@ -13258,7 +13256,7 @@
                             <a:srgbClr val="E2E8F0"/>
                           </a:solidFill>
                         </a:rPr>
-                        <a:t>Thu 11 Jun 2026  09:00 AM</a:t>
+                        <a:t>Fri 03 Jul 2026  12:00 AM</a:t>
                       </a:r>
                     </a:p>
                   </a:txBody>
@@ -13300,7 +13298,7 @@
                             <a:srgbClr val="E2E8F0"/>
                           </a:solidFill>
                         </a:rPr>
-                        <a:t>Thu 11 Jun 2026  07:00 AM</a:t>
+                        <a:t>Thu 02 Jul 2026  10:00 PM</a:t>
                       </a:r>
                     </a:p>
                   </a:txBody>
@@ -13342,7 +13340,7 @@
                             <a:srgbClr val="E2E8F0"/>
                           </a:solidFill>
                         </a:rPr>
-                        <a:t>https://events.sumologic.com/metricanalyticspm06102026-event-training</a:t>
+                        <a:t>https://events.sumologic.com/bp4qeam07022026-event-training</a:t>
                       </a:r>
                     </a:p>
                   </a:txBody>
@@ -13386,7 +13384,7 @@
                             <a:srgbClr val="E2E8F0"/>
                           </a:solidFill>
                         </a:rPr>
-                        <a:t>Mobot Essentials AM</a:t>
+                        <a:t>Best Practice for Query Efficiency PM</a:t>
                       </a:r>
                     </a:p>
                   </a:txBody>
@@ -13428,7 +13426,7 @@
                             <a:srgbClr val="E2E8F0"/>
                           </a:solidFill>
                         </a:rPr>
-                        <a:t>Thu 11 Jun 2026  07:00 AM  →  08:30 AM</a:t>
+                        <a:t>Thu 02 Jul 2026  04:00 PM  →  05:25 PM</a:t>
                       </a:r>
                     </a:p>
                   </a:txBody>
@@ -13470,7 +13468,7 @@
                             <a:srgbClr val="E2E8F0"/>
                           </a:solidFill>
                         </a:rPr>
-                        <a:t>Fri 12 Jun 2026  02:00 AM</a:t>
+                        <a:t>Fri 03 Jul 2026  11:00 AM</a:t>
                       </a:r>
                     </a:p>
                   </a:txBody>
@@ -13512,7 +13510,7 @@
                             <a:srgbClr val="E2E8F0"/>
                           </a:solidFill>
                         </a:rPr>
-                        <a:t>Fri 12 Jun 2026  12:00 AM</a:t>
+                        <a:t>Fri 03 Jul 2026  09:00 AM</a:t>
                       </a:r>
                     </a:p>
                   </a:txBody>
@@ -13554,7 +13552,7 @@
                             <a:srgbClr val="E2E8F0"/>
                           </a:solidFill>
                         </a:rPr>
-                        <a:t>Thu 11 Jun 2026  10:00 PM</a:t>
+                        <a:t>Fri 03 Jul 2026  07:00 AM</a:t>
                       </a:r>
                     </a:p>
                   </a:txBody>
@@ -13596,7 +13594,7 @@
                             <a:srgbClr val="E2E8F0"/>
                           </a:solidFill>
                         </a:rPr>
-                        <a:t>https://events.sumologic.com/mobotessentialsam06112026-event-training</a:t>
+                        <a:t>https://events.sumologic.com/bp4qepm07022026-event-training</a:t>
                       </a:r>
                     </a:p>
                   </a:txBody>
@@ -13640,7 +13638,7 @@
                             <a:srgbClr val="E2E8F0"/>
                           </a:solidFill>
                         </a:rPr>
-                        <a:t>Mobot Essentials PM</a:t>
+                        <a:t>Administration AM</a:t>
                       </a:r>
                     </a:p>
                   </a:txBody>
@@ -13682,7 +13680,7 @@
                             <a:srgbClr val="E2E8F0"/>
                           </a:solidFill>
                         </a:rPr>
-                        <a:t>Thu 11 Jun 2026  04:00 PM  →  05:30 PM</a:t>
+                        <a:t>Tue 07 Jul 2026  07:00 AM  →  10:00 AM</a:t>
                       </a:r>
                     </a:p>
                   </a:txBody>
@@ -13724,7 +13722,7 @@
                             <a:srgbClr val="E2E8F0"/>
                           </a:solidFill>
                         </a:rPr>
-                        <a:t>Fri 12 Jun 2026  11:00 AM</a:t>
+                        <a:t>Wed 08 Jul 2026  02:00 AM</a:t>
                       </a:r>
                     </a:p>
                   </a:txBody>
@@ -13766,7 +13764,7 @@
                             <a:srgbClr val="E2E8F0"/>
                           </a:solidFill>
                         </a:rPr>
-                        <a:t>Fri 12 Jun 2026  09:00 AM</a:t>
+                        <a:t>Wed 08 Jul 2026  12:00 AM</a:t>
                       </a:r>
                     </a:p>
                   </a:txBody>
@@ -13808,7 +13806,7 @@
                             <a:srgbClr val="E2E8F0"/>
                           </a:solidFill>
                         </a:rPr>
-                        <a:t>Fri 12 Jun 2026  07:00 AM</a:t>
+                        <a:t>Tue 07 Jul 2026  10:00 PM</a:t>
                       </a:r>
                     </a:p>
                   </a:txBody>
@@ -13850,7 +13848,7 @@
                             <a:srgbClr val="E2E8F0"/>
                           </a:solidFill>
                         </a:rPr>
-                        <a:t>https://events.sumologic.com/mobotessentialspm06112026-event-training</a:t>
+                        <a:t>https://events.sumologic.com/administrationam07072026-event-training</a:t>
                       </a:r>
                     </a:p>
                   </a:txBody>
@@ -13894,7 +13892,7 @@
                             <a:srgbClr val="E2E8F0"/>
                           </a:solidFill>
                         </a:rPr>
-                        <a:t>Logs for Security AM</a:t>
+                        <a:t>Administration PM</a:t>
                       </a:r>
                     </a:p>
                   </a:txBody>
@@ -13936,7 +13934,7 @@
                             <a:srgbClr val="E2E8F0"/>
                           </a:solidFill>
                         </a:rPr>
-                        <a:t>Tue 16 Jun 2026  07:00 AM  →  10:00 AM</a:t>
+                        <a:t>Tue 07 Jul 2026  04:00 PM  →  07:00 PM</a:t>
                       </a:r>
                     </a:p>
                   </a:txBody>
@@ -13978,7 +13976,7 @@
                             <a:srgbClr val="E2E8F0"/>
                           </a:solidFill>
                         </a:rPr>
-                        <a:t>Wed 17 Jun 2026  02:00 AM</a:t>
+                        <a:t>Wed 08 Jul 2026  11:00 AM</a:t>
                       </a:r>
                     </a:p>
                   </a:txBody>
@@ -14020,7 +14018,7 @@
                             <a:srgbClr val="E2E8F0"/>
                           </a:solidFill>
                         </a:rPr>
-                        <a:t>Wed 17 Jun 2026  12:00 AM</a:t>
+                        <a:t>Wed 08 Jul 2026  09:00 AM</a:t>
                       </a:r>
                     </a:p>
                   </a:txBody>
@@ -14062,7 +14060,7 @@
                             <a:srgbClr val="E2E8F0"/>
                           </a:solidFill>
                         </a:rPr>
-                        <a:t>Tue 16 Jun 2026  10:00 PM</a:t>
+                        <a:t>Wed 08 Jul 2026  07:00 AM</a:t>
                       </a:r>
                     </a:p>
                   </a:txBody>
@@ -14104,7 +14102,7 @@
                             <a:srgbClr val="E2E8F0"/>
                           </a:solidFill>
                         </a:rPr>
-                        <a:t>https://events.sumologic.com/logsforsecurityam06162026-event-training</a:t>
+                        <a:t>https://events.sumologic.com/administrationpm07072026-event-training</a:t>
                       </a:r>
                     </a:p>
                   </a:txBody>
@@ -14148,7 +14146,7 @@
                             <a:srgbClr val="E2E8F0"/>
                           </a:solidFill>
                         </a:rPr>
-                        <a:t>Logs for Security PM</a:t>
+                        <a:t>Metrics Analytics AM</a:t>
                       </a:r>
                     </a:p>
                   </a:txBody>
@@ -14190,7 +14188,7 @@
                             <a:srgbClr val="E2E8F0"/>
                           </a:solidFill>
                         </a:rPr>
-                        <a:t>Tue 16 Jun 2026  04:00 PM  →  07:00 PM</a:t>
+                        <a:t>Wed 08 Jul 2026  07:00 AM  →  10:00 AM</a:t>
                       </a:r>
                     </a:p>
                   </a:txBody>
@@ -14232,7 +14230,7 @@
                             <a:srgbClr val="E2E8F0"/>
                           </a:solidFill>
                         </a:rPr>
-                        <a:t>Wed 17 Jun 2026  11:00 AM</a:t>
+                        <a:t>Thu 09 Jul 2026  02:00 AM</a:t>
                       </a:r>
                     </a:p>
                   </a:txBody>
@@ -14274,7 +14272,7 @@
                             <a:srgbClr val="E2E8F0"/>
                           </a:solidFill>
                         </a:rPr>
-                        <a:t>Wed 17 Jun 2026  09:00 AM</a:t>
+                        <a:t>Thu 09 Jul 2026  12:00 AM</a:t>
                       </a:r>
                     </a:p>
                   </a:txBody>
@@ -14316,7 +14314,7 @@
                             <a:srgbClr val="E2E8F0"/>
                           </a:solidFill>
                         </a:rPr>
-                        <a:t>Wed 17 Jun 2026  07:00 AM</a:t>
+                        <a:t>Wed 08 Jul 2026  10:00 PM</a:t>
                       </a:r>
                     </a:p>
                   </a:txBody>
@@ -14358,7 +14356,7 @@
                             <a:srgbClr val="E2E8F0"/>
                           </a:solidFill>
                         </a:rPr>
-                        <a:t>https://events.sumologic.com/logsforsecuritypm06162026-event-training</a:t>
+                        <a:t>https://events.sumologic.com/metricanalyticsam07082026-event-training</a:t>
                       </a:r>
                     </a:p>
                   </a:txBody>
@@ -14402,7 +14400,7 @@
                             <a:srgbClr val="E2E8F0"/>
                           </a:solidFill>
                         </a:rPr>
-                        <a:t>Cloud SIEM AM</a:t>
+                        <a:t>Metrics Analytics PM</a:t>
                       </a:r>
                     </a:p>
                   </a:txBody>
@@ -14444,7 +14442,7 @@
                             <a:srgbClr val="E2E8F0"/>
                           </a:solidFill>
                         </a:rPr>
-                        <a:t>Wed 17 Jun 2026  07:00 AM  →  10:00 AM</a:t>
+                        <a:t>Wed 08 Jul 2026  04:00 PM  →  07:00 PM</a:t>
                       </a:r>
                     </a:p>
                   </a:txBody>
@@ -14486,7 +14484,7 @@
                             <a:srgbClr val="E2E8F0"/>
                           </a:solidFill>
                         </a:rPr>
-                        <a:t>Thu 18 Jun 2026  02:00 AM</a:t>
+                        <a:t>Thu 09 Jul 2026  11:00 AM</a:t>
                       </a:r>
                     </a:p>
                   </a:txBody>
@@ -14528,7 +14526,7 @@
                             <a:srgbClr val="E2E8F0"/>
                           </a:solidFill>
                         </a:rPr>
-                        <a:t>Thu 18 Jun 2026  12:00 AM</a:t>
+                        <a:t>Thu 09 Jul 2026  09:00 AM</a:t>
                       </a:r>
                     </a:p>
                   </a:txBody>
@@ -14570,7 +14568,7 @@
                             <a:srgbClr val="E2E8F0"/>
                           </a:solidFill>
                         </a:rPr>
-                        <a:t>Wed 17 Jun 2026  10:00 PM</a:t>
+                        <a:t>Thu 09 Jul 2026  07:00 AM</a:t>
                       </a:r>
                     </a:p>
                   </a:txBody>
@@ -14612,7 +14610,7 @@
                             <a:srgbClr val="E2E8F0"/>
                           </a:solidFill>
                         </a:rPr>
-                        <a:t>https://events.sumologic.com/cloudsiemam06172026-event-training</a:t>
+                        <a:t>https://events.sumologic.com/metricanalyticspm07082026-event-training</a:t>
                       </a:r>
                     </a:p>
                   </a:txBody>
@@ -14656,7 +14654,7 @@
                             <a:srgbClr val="E2E8F0"/>
                           </a:solidFill>
                         </a:rPr>
-                        <a:t>Cloud SIEM PM</a:t>
+                        <a:t>Mobot Essentials AM</a:t>
                       </a:r>
                     </a:p>
                   </a:txBody>
@@ -14698,7 +14696,7 @@
                             <a:srgbClr val="E2E8F0"/>
                           </a:solidFill>
                         </a:rPr>
-                        <a:t>Wed 17 Jun 2026  04:00 PM  →  07:00 PM</a:t>
+                        <a:t>Thu 09 Jul 2026  07:00 AM  →  08:30 AM</a:t>
                       </a:r>
                     </a:p>
                   </a:txBody>
@@ -14740,7 +14738,7 @@
                             <a:srgbClr val="E2E8F0"/>
                           </a:solidFill>
                         </a:rPr>
-                        <a:t>Thu 18 Jun 2026  11:00 AM</a:t>
+                        <a:t>Fri 10 Jul 2026  02:00 AM</a:t>
                       </a:r>
                     </a:p>
                   </a:txBody>
@@ -14782,7 +14780,7 @@
                             <a:srgbClr val="E2E8F0"/>
                           </a:solidFill>
                         </a:rPr>
-                        <a:t>Thu 18 Jun 2026  09:00 AM</a:t>
+                        <a:t>Fri 10 Jul 2026  12:00 AM</a:t>
                       </a:r>
                     </a:p>
                   </a:txBody>
@@ -14824,7 +14822,7 @@
                             <a:srgbClr val="E2E8F0"/>
                           </a:solidFill>
                         </a:rPr>
-                        <a:t>Thu 18 Jun 2026  07:00 AM</a:t>
+                        <a:t>Thu 09 Jul 2026  10:00 PM</a:t>
                       </a:r>
                     </a:p>
                   </a:txBody>
@@ -14866,7 +14864,7 @@
                             <a:srgbClr val="E2E8F0"/>
                           </a:solidFill>
                         </a:rPr>
-                        <a:t>https://events.sumologic.com/cloudsiempm06172026-event-training</a:t>
+                        <a:t>https://events.sumologic.com/mobotam07092026-event-training</a:t>
                       </a:r>
                     </a:p>
                   </a:txBody>
@@ -14910,7 +14908,7 @@
                             <a:srgbClr val="E2E8F0"/>
                           </a:solidFill>
                         </a:rPr>
-                        <a:t>Automation Workshop AM</a:t>
+                        <a:t>Mobot Essentials PM</a:t>
                       </a:r>
                     </a:p>
                   </a:txBody>
@@ -14952,7 +14950,7 @@
                             <a:srgbClr val="E2E8F0"/>
                           </a:solidFill>
                         </a:rPr>
-                        <a:t>Thu 18 Jun 2026  07:00 AM  →  08:30 AM</a:t>
+                        <a:t>Thu 09 Jul 2026  04:00 PM  →  05:30 PM</a:t>
                       </a:r>
                     </a:p>
                   </a:txBody>
@@ -14994,7 +14992,7 @@
                             <a:srgbClr val="E2E8F0"/>
                           </a:solidFill>
                         </a:rPr>
-                        <a:t>Fri 19 Jun 2026  02:00 AM</a:t>
+                        <a:t>Fri 10 Jul 2026  11:00 AM</a:t>
                       </a:r>
                     </a:p>
                   </a:txBody>
@@ -15036,7 +15034,7 @@
                             <a:srgbClr val="E2E8F0"/>
                           </a:solidFill>
                         </a:rPr>
-                        <a:t>Fri 19 Jun 2026  12:00 AM</a:t>
+                        <a:t>Fri 10 Jul 2026  09:00 AM</a:t>
                       </a:r>
                     </a:p>
                   </a:txBody>
@@ -15078,7 +15076,7 @@
                             <a:srgbClr val="E2E8F0"/>
                           </a:solidFill>
                         </a:rPr>
-                        <a:t>Thu 18 Jun 2026  10:00 PM</a:t>
+                        <a:t>Fri 10 Jul 2026  07:00 AM</a:t>
                       </a:r>
                     </a:p>
                   </a:txBody>
@@ -15120,7 +15118,7 @@
                             <a:srgbClr val="E2E8F0"/>
                           </a:solidFill>
                         </a:rPr>
-                        <a:t>https://events.sumologic.com/automationworkshopam06182026-event-training</a:t>
+                        <a:t>https://events.sumologic.com/mobotessentialspm07092026-event-training</a:t>
                       </a:r>
                     </a:p>
                   </a:txBody>
@@ -15320,7 +15318,7 @@
                   <a:srgbClr val="00B4D8"/>
                 </a:solidFill>
               </a:rPr>
-              <a:t>Sumo Logic — Virtual Training Schedule   ·   18 Jun 2026 – 07 Jul 2026   (5/7)</a:t>
+              <a:t>Sumo Logic — Virtual Training Schedule   ·   14 Jul – 16 Jul 2026   (5/5)</a:t>
             </a:r>
           </a:p>
         </p:txBody>
@@ -15354,7 +15352,7 @@
                   <a:srgbClr val="94A3B8"/>
                 </a:solidFill>
               </a:rPr>
-              <a:t>p 5/7</a:t>
+              <a:t>p 5/5</a:t>
             </a:r>
           </a:p>
         </p:txBody>
@@ -15369,7 +15367,7 @@
         </p:nvGraphicFramePr>
         <p:xfrm>
           <a:off x="164592" y="640080"/>
-          <a:ext cx="11795760" cy="4517136"/>
+          <a:ext cx="11795760" cy="2834640"/>
         </p:xfrm>
         <a:graphic>
           <a:graphicData uri="http://schemas.openxmlformats.org/drawingml/2006/table">
@@ -15652,7 +15650,7 @@
                             <a:srgbClr val="E2E8F0"/>
                           </a:solidFill>
                         </a:rPr>
-                        <a:t>Automation Workshop PM</a:t>
+                        <a:t>Essential Cloud SIEM skills for SOC Analysts AM</a:t>
                       </a:r>
                     </a:p>
                   </a:txBody>
@@ -15694,7 +15692,7 @@
                             <a:srgbClr val="E2E8F0"/>
                           </a:solidFill>
                         </a:rPr>
-                        <a:t>Thu 18 Jun 2026  04:00 PM  →  05:30 PM</a:t>
+                        <a:t>Tue 14 Jul 2026  07:00 AM  →  08:30 AM</a:t>
                       </a:r>
                     </a:p>
                   </a:txBody>
@@ -15736,7 +15734,7 @@
                             <a:srgbClr val="E2E8F0"/>
                           </a:solidFill>
                         </a:rPr>
-                        <a:t>Fri 19 Jun 2026  11:00 AM</a:t>
+                        <a:t>Wed 15 Jul 2026  02:00 AM</a:t>
                       </a:r>
                     </a:p>
                   </a:txBody>
@@ -15778,7 +15776,7 @@
                             <a:srgbClr val="E2E8F0"/>
                           </a:solidFill>
                         </a:rPr>
-                        <a:t>Fri 19 Jun 2026  09:00 AM</a:t>
+                        <a:t>Wed 15 Jul 2026  12:00 AM</a:t>
                       </a:r>
                     </a:p>
                   </a:txBody>
@@ -15820,7 +15818,7 @@
                             <a:srgbClr val="E2E8F0"/>
                           </a:solidFill>
                         </a:rPr>
-                        <a:t>Fri 19 Jun 2026  07:00 AM</a:t>
+                        <a:t>Tue 14 Jul 2026  10:00 PM</a:t>
                       </a:r>
                     </a:p>
                   </a:txBody>
@@ -15862,7 +15860,7 @@
                             <a:srgbClr val="E2E8F0"/>
                           </a:solidFill>
                         </a:rPr>
-                        <a:t>https://events.sumologic.com/automationworkshoppm06182026-event-training</a:t>
+                        <a:t>https://events.sumologic.com/esscloudsiemam07142026-event-training</a:t>
                       </a:r>
                     </a:p>
                   </a:txBody>
@@ -15906,7 +15904,7 @@
                             <a:srgbClr val="E2E8F0"/>
                           </a:solidFill>
                         </a:rPr>
-                        <a:t>Welcome Webinar AM</a:t>
+                        <a:t>Essential Cloud SIEM skills for SOC Analysts PM</a:t>
                       </a:r>
                     </a:p>
                   </a:txBody>
@@ -15948,7 +15946,7 @@
                             <a:srgbClr val="E2E8F0"/>
                           </a:solidFill>
                         </a:rPr>
-                        <a:t>Tue 30 Jun 2026  05:00 AM  →  06:00 AM</a:t>
+                        <a:t>Tue 14 Jul 2026  04:00 PM  →  05:30 PM</a:t>
                       </a:r>
                     </a:p>
                   </a:txBody>
@@ -15990,7 +15988,7 @@
                             <a:srgbClr val="E2E8F0"/>
                           </a:solidFill>
                         </a:rPr>
-                        <a:t>Wed 01 Jul 2026  12:00 AM</a:t>
+                        <a:t>Wed 15 Jul 2026  11:00 AM</a:t>
                       </a:r>
                     </a:p>
                   </a:txBody>
@@ -16032,7 +16030,7 @@
                             <a:srgbClr val="E2E8F0"/>
                           </a:solidFill>
                         </a:rPr>
-                        <a:t>Tue 30 Jun 2026  10:00 PM</a:t>
+                        <a:t>Wed 15 Jul 2026  09:00 AM</a:t>
                       </a:r>
                     </a:p>
                   </a:txBody>
@@ -16074,7 +16072,7 @@
                             <a:srgbClr val="E2E8F0"/>
                           </a:solidFill>
                         </a:rPr>
-                        <a:t>Tue 30 Jun 2026  08:00 PM</a:t>
+                        <a:t>Wed 15 Jul 2026  07:00 AM</a:t>
                       </a:r>
                     </a:p>
                   </a:txBody>
@@ -16116,7 +16114,7 @@
                             <a:srgbClr val="E2E8F0"/>
                           </a:solidFill>
                         </a:rPr>
-                        <a:t>https://events.sumologic.com/welcomewebinaram06302026-event-training</a:t>
+                        <a:t>https://events.sumologic.com/esscloudsiem07142026-event-training</a:t>
                       </a:r>
                     </a:p>
                   </a:txBody>
@@ -16160,7 +16158,7 @@
                             <a:srgbClr val="E2E8F0"/>
                           </a:solidFill>
                         </a:rPr>
-                        <a:t>Fundamentals AM</a:t>
+                        <a:t>Cloud SIEM AM</a:t>
                       </a:r>
                     </a:p>
                   </a:txBody>
@@ -16202,7 +16200,7 @@
                             <a:srgbClr val="E2E8F0"/>
                           </a:solidFill>
                         </a:rPr>
-                        <a:t>Tue 30 Jun 2026  07:00 AM  →  04:00 PM</a:t>
+                        <a:t>Wed 15 Jul 2026  07:00 AM  →  10:00 AM</a:t>
                       </a:r>
                     </a:p>
                   </a:txBody>
@@ -16244,7 +16242,7 @@
                             <a:srgbClr val="E2E8F0"/>
                           </a:solidFill>
                         </a:rPr>
-                        <a:t>Wed 01 Jul 2026  02:00 AM</a:t>
+                        <a:t>Thu 16 Jul 2026  02:00 AM</a:t>
                       </a:r>
                     </a:p>
                   </a:txBody>
@@ -16286,7 +16284,7 @@
                             <a:srgbClr val="E2E8F0"/>
                           </a:solidFill>
                         </a:rPr>
-                        <a:t>Wed 01 Jul 2026  12:00 AM</a:t>
+                        <a:t>Thu 16 Jul 2026  12:00 AM</a:t>
                       </a:r>
                     </a:p>
                   </a:txBody>
@@ -16328,7 +16326,7 @@
                             <a:srgbClr val="E2E8F0"/>
                           </a:solidFill>
                         </a:rPr>
-                        <a:t>Tue 30 Jun 2026  10:00 PM</a:t>
+                        <a:t>Wed 15 Jul 2026  10:00 PM</a:t>
                       </a:r>
                     </a:p>
                   </a:txBody>
@@ -16370,7 +16368,7 @@
                             <a:srgbClr val="E2E8F0"/>
                           </a:solidFill>
                         </a:rPr>
-                        <a:t>https://events.sumologic.com/fundamentalsam06302026-event-training</a:t>
+                        <a:t>https://events.sumologic.com/cloudsiemam07152026-event-training</a:t>
                       </a:r>
                     </a:p>
                   </a:txBody>
@@ -16414,7 +16412,7 @@
                             <a:srgbClr val="E2E8F0"/>
                           </a:solidFill>
                         </a:rPr>
-                        <a:t>Welcome Webinar PM</a:t>
+                        <a:t>Cloud SIEM PM</a:t>
                       </a:r>
                     </a:p>
                   </a:txBody>
@@ -16456,7 +16454,7 @@
                             <a:srgbClr val="E2E8F0"/>
                           </a:solidFill>
                         </a:rPr>
-                        <a:t>Tue 30 Jun 2026  10:00 AM  →  03:00 PM</a:t>
+                        <a:t>Wed 15 Jul 2026  04:00 PM  →  07:00 PM</a:t>
                       </a:r>
                     </a:p>
                   </a:txBody>
@@ -16498,7 +16496,7 @@
                             <a:srgbClr val="E2E8F0"/>
                           </a:solidFill>
                         </a:rPr>
-                        <a:t>Wed 01 Jul 2026  05:00 AM</a:t>
+                        <a:t>Thu 16 Jul 2026  11:00 AM</a:t>
                       </a:r>
                     </a:p>
                   </a:txBody>
@@ -16540,7 +16538,7 @@
                             <a:srgbClr val="E2E8F0"/>
                           </a:solidFill>
                         </a:rPr>
-                        <a:t>Wed 01 Jul 2026  03:00 AM</a:t>
+                        <a:t>Thu 16 Jul 2026  09:00 AM</a:t>
                       </a:r>
                     </a:p>
                   </a:txBody>
@@ -16582,7 +16580,7 @@
                             <a:srgbClr val="E2E8F0"/>
                           </a:solidFill>
                         </a:rPr>
-                        <a:t>Wed 01 Jul 2026  01:00 AM</a:t>
+                        <a:t>Thu 16 Jul 2026  07:00 AM</a:t>
                       </a:r>
                     </a:p>
                   </a:txBody>
@@ -16624,7 +16622,7 @@
                             <a:srgbClr val="E2E8F0"/>
                           </a:solidFill>
                         </a:rPr>
-                        <a:t>https://events.sumologic.com/welcomewebinarpm06302026-event-training</a:t>
+                        <a:t>https://events.sumologic.com/cloudsiempm07152026-event-training</a:t>
                       </a:r>
                     </a:p>
                   </a:txBody>
@@ -16668,7 +16666,7 @@
                             <a:srgbClr val="E2E8F0"/>
                           </a:solidFill>
                         </a:rPr>
-                        <a:t>Fundamentals PM</a:t>
+                        <a:t>Automation AM</a:t>
                       </a:r>
                     </a:p>
                   </a:txBody>
@@ -16710,7 +16708,7 @@
                             <a:srgbClr val="E2E8F0"/>
                           </a:solidFill>
                         </a:rPr>
-                        <a:t>Tue 30 Jun 2026  04:00 PM  →  07:00 PM</a:t>
+                        <a:t>Thu 16 Jul 2026  07:00 AM  →  08:30 AM</a:t>
                       </a:r>
                     </a:p>
                   </a:txBody>
@@ -16752,7 +16750,7 @@
                             <a:srgbClr val="E2E8F0"/>
                           </a:solidFill>
                         </a:rPr>
-                        <a:t>Wed 01 Jul 2026  11:00 AM</a:t>
+                        <a:t>Fri 17 Jul 2026  02:00 AM</a:t>
                       </a:r>
                     </a:p>
                   </a:txBody>
@@ -16794,7 +16792,7 @@
                             <a:srgbClr val="E2E8F0"/>
                           </a:solidFill>
                         </a:rPr>
-                        <a:t>Wed 01 Jul 2026  09:00 AM</a:t>
+                        <a:t>Fri 17 Jul 2026  12:00 AM</a:t>
                       </a:r>
                     </a:p>
                   </a:txBody>
@@ -16836,7 +16834,7 @@
                             <a:srgbClr val="E2E8F0"/>
                           </a:solidFill>
                         </a:rPr>
-                        <a:t>Wed 01 Jul 2026  07:00 AM</a:t>
+                        <a:t>Thu 16 Jul 2026  10:00 PM</a:t>
                       </a:r>
                     </a:p>
                   </a:txBody>
@@ -16878,7 +16876,7 @@
                             <a:srgbClr val="E2E8F0"/>
                           </a:solidFill>
                         </a:rPr>
-                        <a:t>https://events.sumologic.com/fundamentalspm06302026-event-training</a:t>
+                        <a:t>https://events.sumologic.com/automationam07162026-event-training</a:t>
                       </a:r>
                     </a:p>
                   </a:txBody>
@@ -16922,7 +16920,7 @@
                             <a:srgbClr val="E2E8F0"/>
                           </a:solidFill>
                         </a:rPr>
-                        <a:t>Search Mastery AM</a:t>
+                        <a:t>Automation PM</a:t>
                       </a:r>
                     </a:p>
                   </a:txBody>
@@ -16964,7 +16962,7 @@
                             <a:srgbClr val="E2E8F0"/>
                           </a:solidFill>
                         </a:rPr>
-                        <a:t>Wed 01 Jul 2026  07:00 AM  →  10:00 AM</a:t>
+                        <a:t>Thu 16 Jul 2026  04:00 PM  →  05:30 PM</a:t>
                       </a:r>
                     </a:p>
                   </a:txBody>
@@ -17006,7 +17004,7 @@
                             <a:srgbClr val="E2E8F0"/>
                           </a:solidFill>
                         </a:rPr>
-                        <a:t>Thu 02 Jul 2026  02:00 AM</a:t>
+                        <a:t>Fri 17 Jul 2026  11:00 AM</a:t>
                       </a:r>
                     </a:p>
                   </a:txBody>
@@ -17048,7 +17046,7 @@
                             <a:srgbClr val="E2E8F0"/>
                           </a:solidFill>
                         </a:rPr>
-                        <a:t>Thu 02 Jul 2026  12:00 AM</a:t>
+                        <a:t>Fri 17 Jul 2026  09:00 AM</a:t>
                       </a:r>
                     </a:p>
                   </a:txBody>
@@ -17090,7 +17088,7 @@
                             <a:srgbClr val="E2E8F0"/>
                           </a:solidFill>
                         </a:rPr>
-                        <a:t>Wed 01 Jul 2026  10:00 PM</a:t>
+                        <a:t>Fri 17 Jul 2026  07:00 AM</a:t>
                       </a:r>
                     </a:p>
                   </a:txBody>
@@ -17132,1023 +17130,7 @@
                             <a:srgbClr val="E2E8F0"/>
                           </a:solidFill>
                         </a:rPr>
-                        <a:t>https://events.sumologic.com/searchmasteryam07012026-event-training</a:t>
-                      </a:r>
-                    </a:p>
-                  </a:txBody>
-                  <a:tcPr>
-                    <a:solidFill>
-                      <a:srgbClr val="1A1D27"/>
-                    </a:solidFill>
-                    <a:lnL w="6350" cap="flat">
-                      <a:solidFill>
-                        <a:srgbClr val="2E3348"/>
-                      </a:solidFill>
-                    </a:lnL>
-                    <a:lnR w="6350" cap="flat">
-                      <a:solidFill>
-                        <a:srgbClr val="2E3348"/>
-                      </a:solidFill>
-                    </a:lnR>
-                    <a:lnT w="6350" cap="flat">
-                      <a:solidFill>
-                        <a:srgbClr val="2E3348"/>
-                      </a:solidFill>
-                    </a:lnT>
-                    <a:lnB w="6350" cap="flat">
-                      <a:solidFill>
-                        <a:srgbClr val="2E3348"/>
-                      </a:solidFill>
-                    </a:lnB>
-                  </a:tcPr>
-                </a:tc>
-              </a:tr>
-              <a:tr h="420624">
-                <a:tc>
-                  <a:txBody>
-                    <a:bodyPr wrap="square"/>
-                    <a:lstStyle/>
-                    <a:p>
-                      <a:pPr algn="l"/>
-                      <a:r>
-                        <a:rPr sz="800" b="0">
-                          <a:solidFill>
-                            <a:srgbClr val="E2E8F0"/>
-                          </a:solidFill>
-                        </a:rPr>
-                        <a:t>Search Mastery PM</a:t>
-                      </a:r>
-                    </a:p>
-                  </a:txBody>
-                  <a:tcPr>
-                    <a:solidFill>
-                      <a:srgbClr val="0F1117"/>
-                    </a:solidFill>
-                    <a:lnL w="6350" cap="flat">
-                      <a:solidFill>
-                        <a:srgbClr val="2E3348"/>
-                      </a:solidFill>
-                    </a:lnL>
-                    <a:lnR w="6350" cap="flat">
-                      <a:solidFill>
-                        <a:srgbClr val="2E3348"/>
-                      </a:solidFill>
-                    </a:lnR>
-                    <a:lnT w="6350" cap="flat">
-                      <a:solidFill>
-                        <a:srgbClr val="2E3348"/>
-                      </a:solidFill>
-                    </a:lnT>
-                    <a:lnB w="6350" cap="flat">
-                      <a:solidFill>
-                        <a:srgbClr val="2E3348"/>
-                      </a:solidFill>
-                    </a:lnB>
-                  </a:tcPr>
-                </a:tc>
-                <a:tc>
-                  <a:txBody>
-                    <a:bodyPr wrap="none"/>
-                    <a:lstStyle/>
-                    <a:p>
-                      <a:pPr algn="l"/>
-                      <a:r>
-                        <a:rPr sz="800" b="0">
-                          <a:solidFill>
-                            <a:srgbClr val="E2E8F0"/>
-                          </a:solidFill>
-                        </a:rPr>
-                        <a:t>Wed 01 Jul 2026  04:00 PM  →  07:00 PM</a:t>
-                      </a:r>
-                    </a:p>
-                  </a:txBody>
-                  <a:tcPr>
-                    <a:solidFill>
-                      <a:srgbClr val="0F1117"/>
-                    </a:solidFill>
-                    <a:lnL w="6350" cap="flat">
-                      <a:solidFill>
-                        <a:srgbClr val="2E3348"/>
-                      </a:solidFill>
-                    </a:lnL>
-                    <a:lnR w="6350" cap="flat">
-                      <a:solidFill>
-                        <a:srgbClr val="2E3348"/>
-                      </a:solidFill>
-                    </a:lnR>
-                    <a:lnT w="6350" cap="flat">
-                      <a:solidFill>
-                        <a:srgbClr val="2E3348"/>
-                      </a:solidFill>
-                    </a:lnT>
-                    <a:lnB w="6350" cap="flat">
-                      <a:solidFill>
-                        <a:srgbClr val="2E3348"/>
-                      </a:solidFill>
-                    </a:lnB>
-                  </a:tcPr>
-                </a:tc>
-                <a:tc>
-                  <a:txBody>
-                    <a:bodyPr wrap="none"/>
-                    <a:lstStyle/>
-                    <a:p>
-                      <a:pPr algn="l"/>
-                      <a:r>
-                        <a:rPr sz="800" b="0">
-                          <a:solidFill>
-                            <a:srgbClr val="E2E8F0"/>
-                          </a:solidFill>
-                        </a:rPr>
-                        <a:t>Thu 02 Jul 2026  11:00 AM</a:t>
-                      </a:r>
-                    </a:p>
-                  </a:txBody>
-                  <a:tcPr>
-                    <a:solidFill>
-                      <a:srgbClr val="0F1117"/>
-                    </a:solidFill>
-                    <a:lnL w="6350" cap="flat">
-                      <a:solidFill>
-                        <a:srgbClr val="2E3348"/>
-                      </a:solidFill>
-                    </a:lnL>
-                    <a:lnR w="6350" cap="flat">
-                      <a:solidFill>
-                        <a:srgbClr val="2E3348"/>
-                      </a:solidFill>
-                    </a:lnR>
-                    <a:lnT w="6350" cap="flat">
-                      <a:solidFill>
-                        <a:srgbClr val="2E3348"/>
-                      </a:solidFill>
-                    </a:lnT>
-                    <a:lnB w="6350" cap="flat">
-                      <a:solidFill>
-                        <a:srgbClr val="2E3348"/>
-                      </a:solidFill>
-                    </a:lnB>
-                  </a:tcPr>
-                </a:tc>
-                <a:tc>
-                  <a:txBody>
-                    <a:bodyPr wrap="none"/>
-                    <a:lstStyle/>
-                    <a:p>
-                      <a:pPr algn="l"/>
-                      <a:r>
-                        <a:rPr sz="800" b="0">
-                          <a:solidFill>
-                            <a:srgbClr val="E2E8F0"/>
-                          </a:solidFill>
-                        </a:rPr>
-                        <a:t>Thu 02 Jul 2026  09:00 AM</a:t>
-                      </a:r>
-                    </a:p>
-                  </a:txBody>
-                  <a:tcPr>
-                    <a:solidFill>
-                      <a:srgbClr val="0F1117"/>
-                    </a:solidFill>
-                    <a:lnL w="6350" cap="flat">
-                      <a:solidFill>
-                        <a:srgbClr val="2E3348"/>
-                      </a:solidFill>
-                    </a:lnL>
-                    <a:lnR w="6350" cap="flat">
-                      <a:solidFill>
-                        <a:srgbClr val="2E3348"/>
-                      </a:solidFill>
-                    </a:lnR>
-                    <a:lnT w="6350" cap="flat">
-                      <a:solidFill>
-                        <a:srgbClr val="2E3348"/>
-                      </a:solidFill>
-                    </a:lnT>
-                    <a:lnB w="6350" cap="flat">
-                      <a:solidFill>
-                        <a:srgbClr val="2E3348"/>
-                      </a:solidFill>
-                    </a:lnB>
-                  </a:tcPr>
-                </a:tc>
-                <a:tc>
-                  <a:txBody>
-                    <a:bodyPr wrap="none"/>
-                    <a:lstStyle/>
-                    <a:p>
-                      <a:pPr algn="l"/>
-                      <a:r>
-                        <a:rPr sz="800" b="0">
-                          <a:solidFill>
-                            <a:srgbClr val="E2E8F0"/>
-                          </a:solidFill>
-                        </a:rPr>
-                        <a:t>Thu 02 Jul 2026  07:00 AM</a:t>
-                      </a:r>
-                    </a:p>
-                  </a:txBody>
-                  <a:tcPr>
-                    <a:solidFill>
-                      <a:srgbClr val="0F1117"/>
-                    </a:solidFill>
-                    <a:lnL w="6350" cap="flat">
-                      <a:solidFill>
-                        <a:srgbClr val="2E3348"/>
-                      </a:solidFill>
-                    </a:lnL>
-                    <a:lnR w="6350" cap="flat">
-                      <a:solidFill>
-                        <a:srgbClr val="2E3348"/>
-                      </a:solidFill>
-                    </a:lnR>
-                    <a:lnT w="6350" cap="flat">
-                      <a:solidFill>
-                        <a:srgbClr val="2E3348"/>
-                      </a:solidFill>
-                    </a:lnT>
-                    <a:lnB w="6350" cap="flat">
-                      <a:solidFill>
-                        <a:srgbClr val="2E3348"/>
-                      </a:solidFill>
-                    </a:lnB>
-                  </a:tcPr>
-                </a:tc>
-                <a:tc>
-                  <a:txBody>
-                    <a:bodyPr wrap="square"/>
-                    <a:lstStyle/>
-                    <a:p>
-                      <a:pPr algn="l"/>
-                      <a:r>
-                        <a:rPr sz="700" b="0">
-                          <a:solidFill>
-                            <a:srgbClr val="E2E8F0"/>
-                          </a:solidFill>
-                        </a:rPr>
-                        <a:t>https://events.sumologic.com/searchmasterypm07012026-event-training</a:t>
-                      </a:r>
-                    </a:p>
-                  </a:txBody>
-                  <a:tcPr>
-                    <a:solidFill>
-                      <a:srgbClr val="0F1117"/>
-                    </a:solidFill>
-                    <a:lnL w="6350" cap="flat">
-                      <a:solidFill>
-                        <a:srgbClr val="2E3348"/>
-                      </a:solidFill>
-                    </a:lnL>
-                    <a:lnR w="6350" cap="flat">
-                      <a:solidFill>
-                        <a:srgbClr val="2E3348"/>
-                      </a:solidFill>
-                    </a:lnR>
-                    <a:lnT w="6350" cap="flat">
-                      <a:solidFill>
-                        <a:srgbClr val="2E3348"/>
-                      </a:solidFill>
-                    </a:lnT>
-                    <a:lnB w="6350" cap="flat">
-                      <a:solidFill>
-                        <a:srgbClr val="2E3348"/>
-                      </a:solidFill>
-                    </a:lnB>
-                  </a:tcPr>
-                </a:tc>
-              </a:tr>
-              <a:tr h="420624">
-                <a:tc>
-                  <a:txBody>
-                    <a:bodyPr wrap="square"/>
-                    <a:lstStyle/>
-                    <a:p>
-                      <a:pPr algn="l"/>
-                      <a:r>
-                        <a:rPr sz="800" b="0">
-                          <a:solidFill>
-                            <a:srgbClr val="E2E8F0"/>
-                          </a:solidFill>
-                        </a:rPr>
-                        <a:t>Best Practice for Query Efficiency AM</a:t>
-                      </a:r>
-                    </a:p>
-                  </a:txBody>
-                  <a:tcPr>
-                    <a:solidFill>
-                      <a:srgbClr val="1A1D27"/>
-                    </a:solidFill>
-                    <a:lnL w="6350" cap="flat">
-                      <a:solidFill>
-                        <a:srgbClr val="2E3348"/>
-                      </a:solidFill>
-                    </a:lnL>
-                    <a:lnR w="6350" cap="flat">
-                      <a:solidFill>
-                        <a:srgbClr val="2E3348"/>
-                      </a:solidFill>
-                    </a:lnR>
-                    <a:lnT w="6350" cap="flat">
-                      <a:solidFill>
-                        <a:srgbClr val="2E3348"/>
-                      </a:solidFill>
-                    </a:lnT>
-                    <a:lnB w="6350" cap="flat">
-                      <a:solidFill>
-                        <a:srgbClr val="2E3348"/>
-                      </a:solidFill>
-                    </a:lnB>
-                  </a:tcPr>
-                </a:tc>
-                <a:tc>
-                  <a:txBody>
-                    <a:bodyPr wrap="none"/>
-                    <a:lstStyle/>
-                    <a:p>
-                      <a:pPr algn="l"/>
-                      <a:r>
-                        <a:rPr sz="800" b="0">
-                          <a:solidFill>
-                            <a:srgbClr val="E2E8F0"/>
-                          </a:solidFill>
-                        </a:rPr>
-                        <a:t>Thu 02 Jul 2026  07:00 AM  →  08:30 AM</a:t>
-                      </a:r>
-                    </a:p>
-                  </a:txBody>
-                  <a:tcPr>
-                    <a:solidFill>
-                      <a:srgbClr val="1A1D27"/>
-                    </a:solidFill>
-                    <a:lnL w="6350" cap="flat">
-                      <a:solidFill>
-                        <a:srgbClr val="2E3348"/>
-                      </a:solidFill>
-                    </a:lnL>
-                    <a:lnR w="6350" cap="flat">
-                      <a:solidFill>
-                        <a:srgbClr val="2E3348"/>
-                      </a:solidFill>
-                    </a:lnR>
-                    <a:lnT w="6350" cap="flat">
-                      <a:solidFill>
-                        <a:srgbClr val="2E3348"/>
-                      </a:solidFill>
-                    </a:lnT>
-                    <a:lnB w="6350" cap="flat">
-                      <a:solidFill>
-                        <a:srgbClr val="2E3348"/>
-                      </a:solidFill>
-                    </a:lnB>
-                  </a:tcPr>
-                </a:tc>
-                <a:tc>
-                  <a:txBody>
-                    <a:bodyPr wrap="none"/>
-                    <a:lstStyle/>
-                    <a:p>
-                      <a:pPr algn="l"/>
-                      <a:r>
-                        <a:rPr sz="800" b="0">
-                          <a:solidFill>
-                            <a:srgbClr val="E2E8F0"/>
-                          </a:solidFill>
-                        </a:rPr>
-                        <a:t>Fri 03 Jul 2026  02:00 AM</a:t>
-                      </a:r>
-                    </a:p>
-                  </a:txBody>
-                  <a:tcPr>
-                    <a:solidFill>
-                      <a:srgbClr val="1A1D27"/>
-                    </a:solidFill>
-                    <a:lnL w="6350" cap="flat">
-                      <a:solidFill>
-                        <a:srgbClr val="2E3348"/>
-                      </a:solidFill>
-                    </a:lnL>
-                    <a:lnR w="6350" cap="flat">
-                      <a:solidFill>
-                        <a:srgbClr val="2E3348"/>
-                      </a:solidFill>
-                    </a:lnR>
-                    <a:lnT w="6350" cap="flat">
-                      <a:solidFill>
-                        <a:srgbClr val="2E3348"/>
-                      </a:solidFill>
-                    </a:lnT>
-                    <a:lnB w="6350" cap="flat">
-                      <a:solidFill>
-                        <a:srgbClr val="2E3348"/>
-                      </a:solidFill>
-                    </a:lnB>
-                  </a:tcPr>
-                </a:tc>
-                <a:tc>
-                  <a:txBody>
-                    <a:bodyPr wrap="none"/>
-                    <a:lstStyle/>
-                    <a:p>
-                      <a:pPr algn="l"/>
-                      <a:r>
-                        <a:rPr sz="800" b="0">
-                          <a:solidFill>
-                            <a:srgbClr val="E2E8F0"/>
-                          </a:solidFill>
-                        </a:rPr>
-                        <a:t>Fri 03 Jul 2026  12:00 AM</a:t>
-                      </a:r>
-                    </a:p>
-                  </a:txBody>
-                  <a:tcPr>
-                    <a:solidFill>
-                      <a:srgbClr val="1A1D27"/>
-                    </a:solidFill>
-                    <a:lnL w="6350" cap="flat">
-                      <a:solidFill>
-                        <a:srgbClr val="2E3348"/>
-                      </a:solidFill>
-                    </a:lnL>
-                    <a:lnR w="6350" cap="flat">
-                      <a:solidFill>
-                        <a:srgbClr val="2E3348"/>
-                      </a:solidFill>
-                    </a:lnR>
-                    <a:lnT w="6350" cap="flat">
-                      <a:solidFill>
-                        <a:srgbClr val="2E3348"/>
-                      </a:solidFill>
-                    </a:lnT>
-                    <a:lnB w="6350" cap="flat">
-                      <a:solidFill>
-                        <a:srgbClr val="2E3348"/>
-                      </a:solidFill>
-                    </a:lnB>
-                  </a:tcPr>
-                </a:tc>
-                <a:tc>
-                  <a:txBody>
-                    <a:bodyPr wrap="none"/>
-                    <a:lstStyle/>
-                    <a:p>
-                      <a:pPr algn="l"/>
-                      <a:r>
-                        <a:rPr sz="800" b="0">
-                          <a:solidFill>
-                            <a:srgbClr val="E2E8F0"/>
-                          </a:solidFill>
-                        </a:rPr>
-                        <a:t>Thu 02 Jul 2026  10:00 PM</a:t>
-                      </a:r>
-                    </a:p>
-                  </a:txBody>
-                  <a:tcPr>
-                    <a:solidFill>
-                      <a:srgbClr val="1A1D27"/>
-                    </a:solidFill>
-                    <a:lnL w="6350" cap="flat">
-                      <a:solidFill>
-                        <a:srgbClr val="2E3348"/>
-                      </a:solidFill>
-                    </a:lnL>
-                    <a:lnR w="6350" cap="flat">
-                      <a:solidFill>
-                        <a:srgbClr val="2E3348"/>
-                      </a:solidFill>
-                    </a:lnR>
-                    <a:lnT w="6350" cap="flat">
-                      <a:solidFill>
-                        <a:srgbClr val="2E3348"/>
-                      </a:solidFill>
-                    </a:lnT>
-                    <a:lnB w="6350" cap="flat">
-                      <a:solidFill>
-                        <a:srgbClr val="2E3348"/>
-                      </a:solidFill>
-                    </a:lnB>
-                  </a:tcPr>
-                </a:tc>
-                <a:tc>
-                  <a:txBody>
-                    <a:bodyPr wrap="square"/>
-                    <a:lstStyle/>
-                    <a:p>
-                      <a:pPr algn="l"/>
-                      <a:r>
-                        <a:rPr sz="700" b="0">
-                          <a:solidFill>
-                            <a:srgbClr val="E2E8F0"/>
-                          </a:solidFill>
-                        </a:rPr>
-                        <a:t>https://events.sumologic.com/bp4qeam07022026-event-training</a:t>
-                      </a:r>
-                    </a:p>
-                  </a:txBody>
-                  <a:tcPr>
-                    <a:solidFill>
-                      <a:srgbClr val="1A1D27"/>
-                    </a:solidFill>
-                    <a:lnL w="6350" cap="flat">
-                      <a:solidFill>
-                        <a:srgbClr val="2E3348"/>
-                      </a:solidFill>
-                    </a:lnL>
-                    <a:lnR w="6350" cap="flat">
-                      <a:solidFill>
-                        <a:srgbClr val="2E3348"/>
-                      </a:solidFill>
-                    </a:lnR>
-                    <a:lnT w="6350" cap="flat">
-                      <a:solidFill>
-                        <a:srgbClr val="2E3348"/>
-                      </a:solidFill>
-                    </a:lnT>
-                    <a:lnB w="6350" cap="flat">
-                      <a:solidFill>
-                        <a:srgbClr val="2E3348"/>
-                      </a:solidFill>
-                    </a:lnB>
-                  </a:tcPr>
-                </a:tc>
-              </a:tr>
-              <a:tr h="420624">
-                <a:tc>
-                  <a:txBody>
-                    <a:bodyPr wrap="square"/>
-                    <a:lstStyle/>
-                    <a:p>
-                      <a:pPr algn="l"/>
-                      <a:r>
-                        <a:rPr sz="800" b="0">
-                          <a:solidFill>
-                            <a:srgbClr val="E2E8F0"/>
-                          </a:solidFill>
-                        </a:rPr>
-                        <a:t>Best Practice for Query Efficiency PM</a:t>
-                      </a:r>
-                    </a:p>
-                  </a:txBody>
-                  <a:tcPr>
-                    <a:solidFill>
-                      <a:srgbClr val="0F1117"/>
-                    </a:solidFill>
-                    <a:lnL w="6350" cap="flat">
-                      <a:solidFill>
-                        <a:srgbClr val="2E3348"/>
-                      </a:solidFill>
-                    </a:lnL>
-                    <a:lnR w="6350" cap="flat">
-                      <a:solidFill>
-                        <a:srgbClr val="2E3348"/>
-                      </a:solidFill>
-                    </a:lnR>
-                    <a:lnT w="6350" cap="flat">
-                      <a:solidFill>
-                        <a:srgbClr val="2E3348"/>
-                      </a:solidFill>
-                    </a:lnT>
-                    <a:lnB w="6350" cap="flat">
-                      <a:solidFill>
-                        <a:srgbClr val="2E3348"/>
-                      </a:solidFill>
-                    </a:lnB>
-                  </a:tcPr>
-                </a:tc>
-                <a:tc>
-                  <a:txBody>
-                    <a:bodyPr wrap="none"/>
-                    <a:lstStyle/>
-                    <a:p>
-                      <a:pPr algn="l"/>
-                      <a:r>
-                        <a:rPr sz="800" b="0">
-                          <a:solidFill>
-                            <a:srgbClr val="E2E8F0"/>
-                          </a:solidFill>
-                        </a:rPr>
-                        <a:t>Thu 02 Jul 2026  04:00 PM  →  05:25 PM</a:t>
-                      </a:r>
-                    </a:p>
-                  </a:txBody>
-                  <a:tcPr>
-                    <a:solidFill>
-                      <a:srgbClr val="0F1117"/>
-                    </a:solidFill>
-                    <a:lnL w="6350" cap="flat">
-                      <a:solidFill>
-                        <a:srgbClr val="2E3348"/>
-                      </a:solidFill>
-                    </a:lnL>
-                    <a:lnR w="6350" cap="flat">
-                      <a:solidFill>
-                        <a:srgbClr val="2E3348"/>
-                      </a:solidFill>
-                    </a:lnR>
-                    <a:lnT w="6350" cap="flat">
-                      <a:solidFill>
-                        <a:srgbClr val="2E3348"/>
-                      </a:solidFill>
-                    </a:lnT>
-                    <a:lnB w="6350" cap="flat">
-                      <a:solidFill>
-                        <a:srgbClr val="2E3348"/>
-                      </a:solidFill>
-                    </a:lnB>
-                  </a:tcPr>
-                </a:tc>
-                <a:tc>
-                  <a:txBody>
-                    <a:bodyPr wrap="none"/>
-                    <a:lstStyle/>
-                    <a:p>
-                      <a:pPr algn="l"/>
-                      <a:r>
-                        <a:rPr sz="800" b="0">
-                          <a:solidFill>
-                            <a:srgbClr val="E2E8F0"/>
-                          </a:solidFill>
-                        </a:rPr>
-                        <a:t>Fri 03 Jul 2026  11:00 AM</a:t>
-                      </a:r>
-                    </a:p>
-                  </a:txBody>
-                  <a:tcPr>
-                    <a:solidFill>
-                      <a:srgbClr val="0F1117"/>
-                    </a:solidFill>
-                    <a:lnL w="6350" cap="flat">
-                      <a:solidFill>
-                        <a:srgbClr val="2E3348"/>
-                      </a:solidFill>
-                    </a:lnL>
-                    <a:lnR w="6350" cap="flat">
-                      <a:solidFill>
-                        <a:srgbClr val="2E3348"/>
-                      </a:solidFill>
-                    </a:lnR>
-                    <a:lnT w="6350" cap="flat">
-                      <a:solidFill>
-                        <a:srgbClr val="2E3348"/>
-                      </a:solidFill>
-                    </a:lnT>
-                    <a:lnB w="6350" cap="flat">
-                      <a:solidFill>
-                        <a:srgbClr val="2E3348"/>
-                      </a:solidFill>
-                    </a:lnB>
-                  </a:tcPr>
-                </a:tc>
-                <a:tc>
-                  <a:txBody>
-                    <a:bodyPr wrap="none"/>
-                    <a:lstStyle/>
-                    <a:p>
-                      <a:pPr algn="l"/>
-                      <a:r>
-                        <a:rPr sz="800" b="0">
-                          <a:solidFill>
-                            <a:srgbClr val="E2E8F0"/>
-                          </a:solidFill>
-                        </a:rPr>
-                        <a:t>Fri 03 Jul 2026  09:00 AM</a:t>
-                      </a:r>
-                    </a:p>
-                  </a:txBody>
-                  <a:tcPr>
-                    <a:solidFill>
-                      <a:srgbClr val="0F1117"/>
-                    </a:solidFill>
-                    <a:lnL w="6350" cap="flat">
-                      <a:solidFill>
-                        <a:srgbClr val="2E3348"/>
-                      </a:solidFill>
-                    </a:lnL>
-                    <a:lnR w="6350" cap="flat">
-                      <a:solidFill>
-                        <a:srgbClr val="2E3348"/>
-                      </a:solidFill>
-                    </a:lnR>
-                    <a:lnT w="6350" cap="flat">
-                      <a:solidFill>
-                        <a:srgbClr val="2E3348"/>
-                      </a:solidFill>
-                    </a:lnT>
-                    <a:lnB w="6350" cap="flat">
-                      <a:solidFill>
-                        <a:srgbClr val="2E3348"/>
-                      </a:solidFill>
-                    </a:lnB>
-                  </a:tcPr>
-                </a:tc>
-                <a:tc>
-                  <a:txBody>
-                    <a:bodyPr wrap="none"/>
-                    <a:lstStyle/>
-                    <a:p>
-                      <a:pPr algn="l"/>
-                      <a:r>
-                        <a:rPr sz="800" b="0">
-                          <a:solidFill>
-                            <a:srgbClr val="E2E8F0"/>
-                          </a:solidFill>
-                        </a:rPr>
-                        <a:t>Fri 03 Jul 2026  07:00 AM</a:t>
-                      </a:r>
-                    </a:p>
-                  </a:txBody>
-                  <a:tcPr>
-                    <a:solidFill>
-                      <a:srgbClr val="0F1117"/>
-                    </a:solidFill>
-                    <a:lnL w="6350" cap="flat">
-                      <a:solidFill>
-                        <a:srgbClr val="2E3348"/>
-                      </a:solidFill>
-                    </a:lnL>
-                    <a:lnR w="6350" cap="flat">
-                      <a:solidFill>
-                        <a:srgbClr val="2E3348"/>
-                      </a:solidFill>
-                    </a:lnR>
-                    <a:lnT w="6350" cap="flat">
-                      <a:solidFill>
-                        <a:srgbClr val="2E3348"/>
-                      </a:solidFill>
-                    </a:lnT>
-                    <a:lnB w="6350" cap="flat">
-                      <a:solidFill>
-                        <a:srgbClr val="2E3348"/>
-                      </a:solidFill>
-                    </a:lnB>
-                  </a:tcPr>
-                </a:tc>
-                <a:tc>
-                  <a:txBody>
-                    <a:bodyPr wrap="square"/>
-                    <a:lstStyle/>
-                    <a:p>
-                      <a:pPr algn="l"/>
-                      <a:r>
-                        <a:rPr sz="700" b="0">
-                          <a:solidFill>
-                            <a:srgbClr val="E2E8F0"/>
-                          </a:solidFill>
-                        </a:rPr>
-                        <a:t>https://events.sumologic.com/bp4qepm07022026-event-training</a:t>
-                      </a:r>
-                    </a:p>
-                  </a:txBody>
-                  <a:tcPr>
-                    <a:solidFill>
-                      <a:srgbClr val="0F1117"/>
-                    </a:solidFill>
-                    <a:lnL w="6350" cap="flat">
-                      <a:solidFill>
-                        <a:srgbClr val="2E3348"/>
-                      </a:solidFill>
-                    </a:lnL>
-                    <a:lnR w="6350" cap="flat">
-                      <a:solidFill>
-                        <a:srgbClr val="2E3348"/>
-                      </a:solidFill>
-                    </a:lnR>
-                    <a:lnT w="6350" cap="flat">
-                      <a:solidFill>
-                        <a:srgbClr val="2E3348"/>
-                      </a:solidFill>
-                    </a:lnT>
-                    <a:lnB w="6350" cap="flat">
-                      <a:solidFill>
-                        <a:srgbClr val="2E3348"/>
-                      </a:solidFill>
-                    </a:lnB>
-                  </a:tcPr>
-                </a:tc>
-              </a:tr>
-              <a:tr h="420624">
-                <a:tc>
-                  <a:txBody>
-                    <a:bodyPr wrap="square"/>
-                    <a:lstStyle/>
-                    <a:p>
-                      <a:pPr algn="l"/>
-                      <a:r>
-                        <a:rPr sz="800" b="0">
-                          <a:solidFill>
-                            <a:srgbClr val="E2E8F0"/>
-                          </a:solidFill>
-                        </a:rPr>
-                        <a:t>Administration AM</a:t>
-                      </a:r>
-                    </a:p>
-                  </a:txBody>
-                  <a:tcPr>
-                    <a:solidFill>
-                      <a:srgbClr val="1A1D27"/>
-                    </a:solidFill>
-                    <a:lnL w="6350" cap="flat">
-                      <a:solidFill>
-                        <a:srgbClr val="2E3348"/>
-                      </a:solidFill>
-                    </a:lnL>
-                    <a:lnR w="6350" cap="flat">
-                      <a:solidFill>
-                        <a:srgbClr val="2E3348"/>
-                      </a:solidFill>
-                    </a:lnR>
-                    <a:lnT w="6350" cap="flat">
-                      <a:solidFill>
-                        <a:srgbClr val="2E3348"/>
-                      </a:solidFill>
-                    </a:lnT>
-                    <a:lnB w="6350" cap="flat">
-                      <a:solidFill>
-                        <a:srgbClr val="2E3348"/>
-                      </a:solidFill>
-                    </a:lnB>
-                  </a:tcPr>
-                </a:tc>
-                <a:tc>
-                  <a:txBody>
-                    <a:bodyPr wrap="none"/>
-                    <a:lstStyle/>
-                    <a:p>
-                      <a:pPr algn="l"/>
-                      <a:r>
-                        <a:rPr sz="800" b="0">
-                          <a:solidFill>
-                            <a:srgbClr val="E2E8F0"/>
-                          </a:solidFill>
-                        </a:rPr>
-                        <a:t>Tue 07 Jul 2026  07:00 AM  →  10:00 AM</a:t>
-                      </a:r>
-                    </a:p>
-                  </a:txBody>
-                  <a:tcPr>
-                    <a:solidFill>
-                      <a:srgbClr val="1A1D27"/>
-                    </a:solidFill>
-                    <a:lnL w="6350" cap="flat">
-                      <a:solidFill>
-                        <a:srgbClr val="2E3348"/>
-                      </a:solidFill>
-                    </a:lnL>
-                    <a:lnR w="6350" cap="flat">
-                      <a:solidFill>
-                        <a:srgbClr val="2E3348"/>
-                      </a:solidFill>
-                    </a:lnR>
-                    <a:lnT w="6350" cap="flat">
-                      <a:solidFill>
-                        <a:srgbClr val="2E3348"/>
-                      </a:solidFill>
-                    </a:lnT>
-                    <a:lnB w="6350" cap="flat">
-                      <a:solidFill>
-                        <a:srgbClr val="2E3348"/>
-                      </a:solidFill>
-                    </a:lnB>
-                  </a:tcPr>
-                </a:tc>
-                <a:tc>
-                  <a:txBody>
-                    <a:bodyPr wrap="none"/>
-                    <a:lstStyle/>
-                    <a:p>
-                      <a:pPr algn="l"/>
-                      <a:r>
-                        <a:rPr sz="800" b="0">
-                          <a:solidFill>
-                            <a:srgbClr val="E2E8F0"/>
-                          </a:solidFill>
-                        </a:rPr>
-                        <a:t>Wed 08 Jul 2026  02:00 AM</a:t>
-                      </a:r>
-                    </a:p>
-                  </a:txBody>
-                  <a:tcPr>
-                    <a:solidFill>
-                      <a:srgbClr val="1A1D27"/>
-                    </a:solidFill>
-                    <a:lnL w="6350" cap="flat">
-                      <a:solidFill>
-                        <a:srgbClr val="2E3348"/>
-                      </a:solidFill>
-                    </a:lnL>
-                    <a:lnR w="6350" cap="flat">
-                      <a:solidFill>
-                        <a:srgbClr val="2E3348"/>
-                      </a:solidFill>
-                    </a:lnR>
-                    <a:lnT w="6350" cap="flat">
-                      <a:solidFill>
-                        <a:srgbClr val="2E3348"/>
-                      </a:solidFill>
-                    </a:lnT>
-                    <a:lnB w="6350" cap="flat">
-                      <a:solidFill>
-                        <a:srgbClr val="2E3348"/>
-                      </a:solidFill>
-                    </a:lnB>
-                  </a:tcPr>
-                </a:tc>
-                <a:tc>
-                  <a:txBody>
-                    <a:bodyPr wrap="none"/>
-                    <a:lstStyle/>
-                    <a:p>
-                      <a:pPr algn="l"/>
-                      <a:r>
-                        <a:rPr sz="800" b="0">
-                          <a:solidFill>
-                            <a:srgbClr val="E2E8F0"/>
-                          </a:solidFill>
-                        </a:rPr>
-                        <a:t>Wed 08 Jul 2026  12:00 AM</a:t>
-                      </a:r>
-                    </a:p>
-                  </a:txBody>
-                  <a:tcPr>
-                    <a:solidFill>
-                      <a:srgbClr val="1A1D27"/>
-                    </a:solidFill>
-                    <a:lnL w="6350" cap="flat">
-                      <a:solidFill>
-                        <a:srgbClr val="2E3348"/>
-                      </a:solidFill>
-                    </a:lnL>
-                    <a:lnR w="6350" cap="flat">
-                      <a:solidFill>
-                        <a:srgbClr val="2E3348"/>
-                      </a:solidFill>
-                    </a:lnR>
-                    <a:lnT w="6350" cap="flat">
-                      <a:solidFill>
-                        <a:srgbClr val="2E3348"/>
-                      </a:solidFill>
-                    </a:lnT>
-                    <a:lnB w="6350" cap="flat">
-                      <a:solidFill>
-                        <a:srgbClr val="2E3348"/>
-                      </a:solidFill>
-                    </a:lnB>
-                  </a:tcPr>
-                </a:tc>
-                <a:tc>
-                  <a:txBody>
-                    <a:bodyPr wrap="none"/>
-                    <a:lstStyle/>
-                    <a:p>
-                      <a:pPr algn="l"/>
-                      <a:r>
-                        <a:rPr sz="800" b="0">
-                          <a:solidFill>
-                            <a:srgbClr val="E2E8F0"/>
-                          </a:solidFill>
-                        </a:rPr>
-                        <a:t>Tue 07 Jul 2026  10:00 PM</a:t>
-                      </a:r>
-                    </a:p>
-                  </a:txBody>
-                  <a:tcPr>
-                    <a:solidFill>
-                      <a:srgbClr val="1A1D27"/>
-                    </a:solidFill>
-                    <a:lnL w="6350" cap="flat">
-                      <a:solidFill>
-                        <a:srgbClr val="2E3348"/>
-                      </a:solidFill>
-                    </a:lnL>
-                    <a:lnR w="6350" cap="flat">
-                      <a:solidFill>
-                        <a:srgbClr val="2E3348"/>
-                      </a:solidFill>
-                    </a:lnR>
-                    <a:lnT w="6350" cap="flat">
-                      <a:solidFill>
-                        <a:srgbClr val="2E3348"/>
-                      </a:solidFill>
-                    </a:lnT>
-                    <a:lnB w="6350" cap="flat">
-                      <a:solidFill>
-                        <a:srgbClr val="2E3348"/>
-                      </a:solidFill>
-                    </a:lnB>
-                  </a:tcPr>
-                </a:tc>
-                <a:tc>
-                  <a:txBody>
-                    <a:bodyPr wrap="square"/>
-                    <a:lstStyle/>
-                    <a:p>
-                      <a:pPr algn="l"/>
-                      <a:r>
-                        <a:rPr sz="700" b="0">
-                          <a:solidFill>
-                            <a:srgbClr val="E2E8F0"/>
-                          </a:solidFill>
-                        </a:rPr>
-                        <a:t>https://events.sumologic.com/administrationam07072026-event-training</a:t>
+                        <a:t>https://events.sumologic.com/automationpm07162026-event-training</a:t>
                       </a:r>
                     </a:p>
                   </a:txBody>
@@ -18191,3777 +17173,7 @@
         </p:nvSpPr>
         <p:spPr>
           <a:xfrm>
-            <a:off x="164592" y="5266944"/>
-            <a:ext cx="11795760" cy="274320"/>
-          </a:xfrm>
-          <a:prstGeom prst="rect">
-            <a:avLst/>
-          </a:prstGeom>
-          <a:noFill/>
-        </p:spPr>
-        <p:txBody>
-          <a:bodyPr wrap="none">
-            <a:spAutoFit/>
-          </a:bodyPr>
-          <a:lstStyle/>
-          <a:p>
-            <a:r>
-              <a:rPr sz="700" i="1">
-                <a:solidFill>
-                  <a:srgbClr val="94A3B8"/>
-                </a:solidFill>
-              </a:rPr>
-              <a:t>Register links are live URLs — click to open in browser.  All times shown as start time; PT column also shows end time.</a:t>
-            </a:r>
-          </a:p>
-        </p:txBody>
-      </p:sp>
-    </p:spTree>
-  </p:cSld>
-  <p:clrMapOvr>
-    <a:masterClrMapping/>
-  </p:clrMapOvr>
-</p:sld>
-</file>
-
-<file path=ppt/slides/slide6.xml><?xml version="1.0" encoding="utf-8"?>
-<p:sld xmlns:a="http://schemas.openxmlformats.org/drawingml/2006/main" xmlns:p="http://schemas.openxmlformats.org/presentationml/2006/main" xmlns:r="http://schemas.openxmlformats.org/officeDocument/2006/relationships">
-  <p:cSld>
-    <p:spTree>
-      <p:nvGrpSpPr>
-        <p:cNvPr id="1" name=""/>
-        <p:cNvGrpSpPr/>
-        <p:nvPr/>
-      </p:nvGrpSpPr>
-      <p:grpSpPr/>
-      <p:sp>
-        <p:nvSpPr>
-          <p:cNvPr id="2" name="Rectangle 1"/>
-          <p:cNvSpPr/>
-          <p:nvPr/>
-        </p:nvSpPr>
-        <p:spPr>
-          <a:xfrm>
-            <a:off x="0" y="0"/>
-            <a:ext cx="12188952" cy="6858000"/>
-          </a:xfrm>
-          <a:prstGeom prst="rect">
-            <a:avLst/>
-          </a:prstGeom>
-          <a:solidFill>
-            <a:srgbClr val="0F1117"/>
-          </a:solidFill>
-          <a:ln>
-            <a:noFill/>
-          </a:ln>
-        </p:spPr>
-        <p:style>
-          <a:lnRef idx="1">
-            <a:schemeClr val="accent1"/>
-          </a:lnRef>
-          <a:fillRef idx="3">
-            <a:schemeClr val="accent1"/>
-          </a:fillRef>
-          <a:effectRef idx="2">
-            <a:schemeClr val="accent1"/>
-          </a:effectRef>
-          <a:fontRef idx="minor">
-            <a:schemeClr val="lt1"/>
-          </a:fontRef>
-        </p:style>
-        <p:txBody>
-          <a:bodyPr rtlCol="0" anchor="ctr"/>
-          <a:lstStyle/>
-          <a:p>
-            <a:pPr algn="ctr"/>
-          </a:p>
-        </p:txBody>
-      </p:sp>
-      <p:sp>
-        <p:nvSpPr>
-          <p:cNvPr id="3" name="Rectangle 2"/>
-          <p:cNvSpPr/>
-          <p:nvPr/>
-        </p:nvSpPr>
-        <p:spPr>
-          <a:xfrm>
-            <a:off x="0" y="0"/>
-            <a:ext cx="12188952" cy="548640"/>
-          </a:xfrm>
-          <a:prstGeom prst="rect">
-            <a:avLst/>
-          </a:prstGeom>
-          <a:solidFill>
-            <a:srgbClr val="1A1D27"/>
-          </a:solidFill>
-          <a:ln>
-            <a:noFill/>
-          </a:ln>
-        </p:spPr>
-        <p:style>
-          <a:lnRef idx="1">
-            <a:schemeClr val="accent1"/>
-          </a:lnRef>
-          <a:fillRef idx="3">
-            <a:schemeClr val="accent1"/>
-          </a:fillRef>
-          <a:effectRef idx="2">
-            <a:schemeClr val="accent1"/>
-          </a:effectRef>
-          <a:fontRef idx="minor">
-            <a:schemeClr val="lt1"/>
-          </a:fontRef>
-        </p:style>
-        <p:txBody>
-          <a:bodyPr rtlCol="0" anchor="ctr"/>
-          <a:lstStyle/>
-          <a:p>
-            <a:pPr algn="ctr"/>
-          </a:p>
-        </p:txBody>
-      </p:sp>
-      <p:sp>
-        <p:nvSpPr>
-          <p:cNvPr id="4" name="TextBox 3"/>
-          <p:cNvSpPr txBox="1"/>
-          <p:nvPr/>
-        </p:nvSpPr>
-        <p:spPr>
-          <a:xfrm>
-            <a:off x="164592" y="73152"/>
-            <a:ext cx="8229600" cy="420624"/>
-          </a:xfrm>
-          <a:prstGeom prst="rect">
-            <a:avLst/>
-          </a:prstGeom>
-          <a:noFill/>
-        </p:spPr>
-        <p:txBody>
-          <a:bodyPr wrap="none">
-            <a:spAutoFit/>
-          </a:bodyPr>
-          <a:lstStyle/>
-          <a:p>
-            <a:r>
-              <a:rPr sz="1300" b="1">
-                <a:solidFill>
-                  <a:srgbClr val="00B4D8"/>
-                </a:solidFill>
-              </a:rPr>
-              <a:t>Sumo Logic — Virtual Training Schedule   ·   07 Jul – 16 Jul 2026   (6/7)</a:t>
-            </a:r>
-          </a:p>
-        </p:txBody>
-      </p:sp>
-      <p:sp>
-        <p:nvSpPr>
-          <p:cNvPr id="5" name="TextBox 4"/>
-          <p:cNvSpPr txBox="1"/>
-          <p:nvPr/>
-        </p:nvSpPr>
-        <p:spPr>
-          <a:xfrm>
-            <a:off x="10908792" y="73152"/>
-            <a:ext cx="1097280" cy="420624"/>
-          </a:xfrm>
-          <a:prstGeom prst="rect">
-            <a:avLst/>
-          </a:prstGeom>
-          <a:noFill/>
-        </p:spPr>
-        <p:txBody>
-          <a:bodyPr wrap="none">
-            <a:spAutoFit/>
-          </a:bodyPr>
-          <a:lstStyle/>
-          <a:p>
-            <a:pPr algn="r"/>
-            <a:r>
-              <a:rPr sz="900">
-                <a:solidFill>
-                  <a:srgbClr val="94A3B8"/>
-                </a:solidFill>
-              </a:rPr>
-              <a:t>p 6/7</a:t>
-            </a:r>
-          </a:p>
-        </p:txBody>
-      </p:sp>
-      <p:graphicFrame>
-        <p:nvGraphicFramePr>
-          <p:cNvPr id="6" name="Table 5"/>
-          <p:cNvGraphicFramePr>
-            <a:graphicFrameLocks noGrp="1"/>
-          </p:cNvGraphicFramePr>
-          <p:nvPr/>
-        </p:nvGraphicFramePr>
-        <p:xfrm>
-          <a:off x="164592" y="640080"/>
-          <a:ext cx="11795760" cy="4517136"/>
-        </p:xfrm>
-        <a:graphic>
-          <a:graphicData uri="http://schemas.openxmlformats.org/drawingml/2006/table">
-            <a:tbl>
-              <a:tblPr firstRow="1" bandRow="1">
-                <a:tableStyleId>{5C22544A-7EE6-4342-B048-85BDC9FD1C3A}</a:tableStyleId>
-              </a:tblPr>
-              <a:tblGrid>
-                <a:gridCol w="2286000"/>
-                <a:gridCol w="1920240"/>
-                <a:gridCol w="1920240"/>
-                <a:gridCol w="1920240"/>
-                <a:gridCol w="1920240"/>
-                <a:gridCol w="1828800"/>
-              </a:tblGrid>
-              <a:tr h="310896">
-                <a:tc>
-                  <a:txBody>
-                    <a:bodyPr wrap="square"/>
-                    <a:lstStyle/>
-                    <a:p>
-                      <a:pPr algn="ctr"/>
-                      <a:r>
-                        <a:rPr sz="900" b="1">
-                          <a:solidFill>
-                            <a:srgbClr val="00B4D8"/>
-                          </a:solidFill>
-                        </a:rPr>
-                        <a:t>Course</a:t>
-                      </a:r>
-                    </a:p>
-                  </a:txBody>
-                  <a:tcPr>
-                    <a:solidFill>
-                      <a:srgbClr val="1A1D27"/>
-                    </a:solidFill>
-                    <a:lnL w="6350" cap="flat">
-                      <a:solidFill>
-                        <a:srgbClr val="2E3348"/>
-                      </a:solidFill>
-                    </a:lnL>
-                    <a:lnR w="6350" cap="flat">
-                      <a:solidFill>
-                        <a:srgbClr val="2E3348"/>
-                      </a:solidFill>
-                    </a:lnR>
-                    <a:lnT w="6350" cap="flat">
-                      <a:solidFill>
-                        <a:srgbClr val="2E3348"/>
-                      </a:solidFill>
-                    </a:lnT>
-                    <a:lnB w="6350" cap="flat">
-                      <a:solidFill>
-                        <a:srgbClr val="2E3348"/>
-                      </a:solidFill>
-                    </a:lnB>
-                  </a:tcPr>
-                </a:tc>
-                <a:tc>
-                  <a:txBody>
-                    <a:bodyPr wrap="square"/>
-                    <a:lstStyle/>
-                    <a:p>
-                      <a:pPr algn="ctr"/>
-                      <a:r>
-                        <a:rPr sz="900" b="1">
-                          <a:solidFill>
-                            <a:srgbClr val="00B4D8"/>
-                          </a:solidFill>
-                        </a:rPr>
-                        <a:t>PT  (Los Angeles)</a:t>
-                      </a:r>
-                    </a:p>
-                  </a:txBody>
-                  <a:tcPr>
-                    <a:solidFill>
-                      <a:srgbClr val="1A1D27"/>
-                    </a:solidFill>
-                    <a:lnL w="6350" cap="flat">
-                      <a:solidFill>
-                        <a:srgbClr val="2E3348"/>
-                      </a:solidFill>
-                    </a:lnL>
-                    <a:lnR w="6350" cap="flat">
-                      <a:solidFill>
-                        <a:srgbClr val="2E3348"/>
-                      </a:solidFill>
-                    </a:lnR>
-                    <a:lnT w="6350" cap="flat">
-                      <a:solidFill>
-                        <a:srgbClr val="2E3348"/>
-                      </a:solidFill>
-                    </a:lnT>
-                    <a:lnB w="6350" cap="flat">
-                      <a:solidFill>
-                        <a:srgbClr val="2E3348"/>
-                      </a:solidFill>
-                    </a:lnB>
-                  </a:tcPr>
-                </a:tc>
-                <a:tc>
-                  <a:txBody>
-                    <a:bodyPr wrap="square"/>
-                    <a:lstStyle/>
-                    <a:p>
-                      <a:pPr algn="ctr"/>
-                      <a:r>
-                        <a:rPr sz="900" b="1">
-                          <a:solidFill>
-                            <a:srgbClr val="00B4D8"/>
-                          </a:solidFill>
-                        </a:rPr>
-                        <a:t>NZ  (Auckland)</a:t>
-                      </a:r>
-                    </a:p>
-                  </a:txBody>
-                  <a:tcPr>
-                    <a:solidFill>
-                      <a:srgbClr val="1A1D27"/>
-                    </a:solidFill>
-                    <a:lnL w="6350" cap="flat">
-                      <a:solidFill>
-                        <a:srgbClr val="2E3348"/>
-                      </a:solidFill>
-                    </a:lnL>
-                    <a:lnR w="6350" cap="flat">
-                      <a:solidFill>
-                        <a:srgbClr val="2E3348"/>
-                      </a:solidFill>
-                    </a:lnR>
-                    <a:lnT w="6350" cap="flat">
-                      <a:solidFill>
-                        <a:srgbClr val="2E3348"/>
-                      </a:solidFill>
-                    </a:lnT>
-                    <a:lnB w="6350" cap="flat">
-                      <a:solidFill>
-                        <a:srgbClr val="2E3348"/>
-                      </a:solidFill>
-                    </a:lnB>
-                  </a:tcPr>
-                </a:tc>
-                <a:tc>
-                  <a:txBody>
-                    <a:bodyPr wrap="square"/>
-                    <a:lstStyle/>
-                    <a:p>
-                      <a:pPr algn="ctr"/>
-                      <a:r>
-                        <a:rPr sz="900" b="1">
-                          <a:solidFill>
-                            <a:srgbClr val="00B4D8"/>
-                          </a:solidFill>
-                        </a:rPr>
-                        <a:t>AET  (Sydney)</a:t>
-                      </a:r>
-                    </a:p>
-                  </a:txBody>
-                  <a:tcPr>
-                    <a:solidFill>
-                      <a:srgbClr val="1A1D27"/>
-                    </a:solidFill>
-                    <a:lnL w="6350" cap="flat">
-                      <a:solidFill>
-                        <a:srgbClr val="2E3348"/>
-                      </a:solidFill>
-                    </a:lnL>
-                    <a:lnR w="6350" cap="flat">
-                      <a:solidFill>
-                        <a:srgbClr val="2E3348"/>
-                      </a:solidFill>
-                    </a:lnR>
-                    <a:lnT w="6350" cap="flat">
-                      <a:solidFill>
-                        <a:srgbClr val="2E3348"/>
-                      </a:solidFill>
-                    </a:lnT>
-                    <a:lnB w="6350" cap="flat">
-                      <a:solidFill>
-                        <a:srgbClr val="2E3348"/>
-                      </a:solidFill>
-                    </a:lnB>
-                  </a:tcPr>
-                </a:tc>
-                <a:tc>
-                  <a:txBody>
-                    <a:bodyPr wrap="square"/>
-                    <a:lstStyle/>
-                    <a:p>
-                      <a:pPr algn="ctr"/>
-                      <a:r>
-                        <a:rPr sz="900" b="1">
-                          <a:solidFill>
-                            <a:srgbClr val="00B4D8"/>
-                          </a:solidFill>
-                        </a:rPr>
-                        <a:t>SGT  (Singapore)</a:t>
-                      </a:r>
-                    </a:p>
-                  </a:txBody>
-                  <a:tcPr>
-                    <a:solidFill>
-                      <a:srgbClr val="1A1D27"/>
-                    </a:solidFill>
-                    <a:lnL w="6350" cap="flat">
-                      <a:solidFill>
-                        <a:srgbClr val="2E3348"/>
-                      </a:solidFill>
-                    </a:lnL>
-                    <a:lnR w="6350" cap="flat">
-                      <a:solidFill>
-                        <a:srgbClr val="2E3348"/>
-                      </a:solidFill>
-                    </a:lnR>
-                    <a:lnT w="6350" cap="flat">
-                      <a:solidFill>
-                        <a:srgbClr val="2E3348"/>
-                      </a:solidFill>
-                    </a:lnT>
-                    <a:lnB w="6350" cap="flat">
-                      <a:solidFill>
-                        <a:srgbClr val="2E3348"/>
-                      </a:solidFill>
-                    </a:lnB>
-                  </a:tcPr>
-                </a:tc>
-                <a:tc>
-                  <a:txBody>
-                    <a:bodyPr wrap="square"/>
-                    <a:lstStyle/>
-                    <a:p>
-                      <a:pPr algn="ctr"/>
-                      <a:r>
-                        <a:rPr sz="900" b="1">
-                          <a:solidFill>
-                            <a:srgbClr val="00B4D8"/>
-                          </a:solidFill>
-                        </a:rPr>
-                        <a:t>Register URL</a:t>
-                      </a:r>
-                    </a:p>
-                  </a:txBody>
-                  <a:tcPr>
-                    <a:solidFill>
-                      <a:srgbClr val="1A1D27"/>
-                    </a:solidFill>
-                    <a:lnL w="6350" cap="flat">
-                      <a:solidFill>
-                        <a:srgbClr val="2E3348"/>
-                      </a:solidFill>
-                    </a:lnL>
-                    <a:lnR w="6350" cap="flat">
-                      <a:solidFill>
-                        <a:srgbClr val="2E3348"/>
-                      </a:solidFill>
-                    </a:lnR>
-                    <a:lnT w="6350" cap="flat">
-                      <a:solidFill>
-                        <a:srgbClr val="2E3348"/>
-                      </a:solidFill>
-                    </a:lnT>
-                    <a:lnB w="6350" cap="flat">
-                      <a:solidFill>
-                        <a:srgbClr val="2E3348"/>
-                      </a:solidFill>
-                    </a:lnB>
-                  </a:tcPr>
-                </a:tc>
-              </a:tr>
-              <a:tr h="420624">
-                <a:tc>
-                  <a:txBody>
-                    <a:bodyPr wrap="square"/>
-                    <a:lstStyle/>
-                    <a:p>
-                      <a:pPr algn="l"/>
-                      <a:r>
-                        <a:rPr sz="800" b="0">
-                          <a:solidFill>
-                            <a:srgbClr val="E2E8F0"/>
-                          </a:solidFill>
-                        </a:rPr>
-                        <a:t>Administration PM</a:t>
-                      </a:r>
-                    </a:p>
-                  </a:txBody>
-                  <a:tcPr>
-                    <a:solidFill>
-                      <a:srgbClr val="0F1117"/>
-                    </a:solidFill>
-                    <a:lnL w="6350" cap="flat">
-                      <a:solidFill>
-                        <a:srgbClr val="2E3348"/>
-                      </a:solidFill>
-                    </a:lnL>
-                    <a:lnR w="6350" cap="flat">
-                      <a:solidFill>
-                        <a:srgbClr val="2E3348"/>
-                      </a:solidFill>
-                    </a:lnR>
-                    <a:lnT w="6350" cap="flat">
-                      <a:solidFill>
-                        <a:srgbClr val="2E3348"/>
-                      </a:solidFill>
-                    </a:lnT>
-                    <a:lnB w="6350" cap="flat">
-                      <a:solidFill>
-                        <a:srgbClr val="2E3348"/>
-                      </a:solidFill>
-                    </a:lnB>
-                  </a:tcPr>
-                </a:tc>
-                <a:tc>
-                  <a:txBody>
-                    <a:bodyPr wrap="none"/>
-                    <a:lstStyle/>
-                    <a:p>
-                      <a:pPr algn="l"/>
-                      <a:r>
-                        <a:rPr sz="800" b="0">
-                          <a:solidFill>
-                            <a:srgbClr val="E2E8F0"/>
-                          </a:solidFill>
-                        </a:rPr>
-                        <a:t>Tue 07 Jul 2026  04:00 PM  →  07:00 PM</a:t>
-                      </a:r>
-                    </a:p>
-                  </a:txBody>
-                  <a:tcPr>
-                    <a:solidFill>
-                      <a:srgbClr val="0F1117"/>
-                    </a:solidFill>
-                    <a:lnL w="6350" cap="flat">
-                      <a:solidFill>
-                        <a:srgbClr val="2E3348"/>
-                      </a:solidFill>
-                    </a:lnL>
-                    <a:lnR w="6350" cap="flat">
-                      <a:solidFill>
-                        <a:srgbClr val="2E3348"/>
-                      </a:solidFill>
-                    </a:lnR>
-                    <a:lnT w="6350" cap="flat">
-                      <a:solidFill>
-                        <a:srgbClr val="2E3348"/>
-                      </a:solidFill>
-                    </a:lnT>
-                    <a:lnB w="6350" cap="flat">
-                      <a:solidFill>
-                        <a:srgbClr val="2E3348"/>
-                      </a:solidFill>
-                    </a:lnB>
-                  </a:tcPr>
-                </a:tc>
-                <a:tc>
-                  <a:txBody>
-                    <a:bodyPr wrap="none"/>
-                    <a:lstStyle/>
-                    <a:p>
-                      <a:pPr algn="l"/>
-                      <a:r>
-                        <a:rPr sz="800" b="0">
-                          <a:solidFill>
-                            <a:srgbClr val="E2E8F0"/>
-                          </a:solidFill>
-                        </a:rPr>
-                        <a:t>Wed 08 Jul 2026  11:00 AM</a:t>
-                      </a:r>
-                    </a:p>
-                  </a:txBody>
-                  <a:tcPr>
-                    <a:solidFill>
-                      <a:srgbClr val="0F1117"/>
-                    </a:solidFill>
-                    <a:lnL w="6350" cap="flat">
-                      <a:solidFill>
-                        <a:srgbClr val="2E3348"/>
-                      </a:solidFill>
-                    </a:lnL>
-                    <a:lnR w="6350" cap="flat">
-                      <a:solidFill>
-                        <a:srgbClr val="2E3348"/>
-                      </a:solidFill>
-                    </a:lnR>
-                    <a:lnT w="6350" cap="flat">
-                      <a:solidFill>
-                        <a:srgbClr val="2E3348"/>
-                      </a:solidFill>
-                    </a:lnT>
-                    <a:lnB w="6350" cap="flat">
-                      <a:solidFill>
-                        <a:srgbClr val="2E3348"/>
-                      </a:solidFill>
-                    </a:lnB>
-                  </a:tcPr>
-                </a:tc>
-                <a:tc>
-                  <a:txBody>
-                    <a:bodyPr wrap="none"/>
-                    <a:lstStyle/>
-                    <a:p>
-                      <a:pPr algn="l"/>
-                      <a:r>
-                        <a:rPr sz="800" b="0">
-                          <a:solidFill>
-                            <a:srgbClr val="E2E8F0"/>
-                          </a:solidFill>
-                        </a:rPr>
-                        <a:t>Wed 08 Jul 2026  09:00 AM</a:t>
-                      </a:r>
-                    </a:p>
-                  </a:txBody>
-                  <a:tcPr>
-                    <a:solidFill>
-                      <a:srgbClr val="0F1117"/>
-                    </a:solidFill>
-                    <a:lnL w="6350" cap="flat">
-                      <a:solidFill>
-                        <a:srgbClr val="2E3348"/>
-                      </a:solidFill>
-                    </a:lnL>
-                    <a:lnR w="6350" cap="flat">
-                      <a:solidFill>
-                        <a:srgbClr val="2E3348"/>
-                      </a:solidFill>
-                    </a:lnR>
-                    <a:lnT w="6350" cap="flat">
-                      <a:solidFill>
-                        <a:srgbClr val="2E3348"/>
-                      </a:solidFill>
-                    </a:lnT>
-                    <a:lnB w="6350" cap="flat">
-                      <a:solidFill>
-                        <a:srgbClr val="2E3348"/>
-                      </a:solidFill>
-                    </a:lnB>
-                  </a:tcPr>
-                </a:tc>
-                <a:tc>
-                  <a:txBody>
-                    <a:bodyPr wrap="none"/>
-                    <a:lstStyle/>
-                    <a:p>
-                      <a:pPr algn="l"/>
-                      <a:r>
-                        <a:rPr sz="800" b="0">
-                          <a:solidFill>
-                            <a:srgbClr val="E2E8F0"/>
-                          </a:solidFill>
-                        </a:rPr>
-                        <a:t>Wed 08 Jul 2026  07:00 AM</a:t>
-                      </a:r>
-                    </a:p>
-                  </a:txBody>
-                  <a:tcPr>
-                    <a:solidFill>
-                      <a:srgbClr val="0F1117"/>
-                    </a:solidFill>
-                    <a:lnL w="6350" cap="flat">
-                      <a:solidFill>
-                        <a:srgbClr val="2E3348"/>
-                      </a:solidFill>
-                    </a:lnL>
-                    <a:lnR w="6350" cap="flat">
-                      <a:solidFill>
-                        <a:srgbClr val="2E3348"/>
-                      </a:solidFill>
-                    </a:lnR>
-                    <a:lnT w="6350" cap="flat">
-                      <a:solidFill>
-                        <a:srgbClr val="2E3348"/>
-                      </a:solidFill>
-                    </a:lnT>
-                    <a:lnB w="6350" cap="flat">
-                      <a:solidFill>
-                        <a:srgbClr val="2E3348"/>
-                      </a:solidFill>
-                    </a:lnB>
-                  </a:tcPr>
-                </a:tc>
-                <a:tc>
-                  <a:txBody>
-                    <a:bodyPr wrap="square"/>
-                    <a:lstStyle/>
-                    <a:p>
-                      <a:pPr algn="l"/>
-                      <a:r>
-                        <a:rPr sz="700" b="0">
-                          <a:solidFill>
-                            <a:srgbClr val="E2E8F0"/>
-                          </a:solidFill>
-                        </a:rPr>
-                        <a:t>https://events.sumologic.com/administrationpm07072026-event-training</a:t>
-                      </a:r>
-                    </a:p>
-                  </a:txBody>
-                  <a:tcPr>
-                    <a:solidFill>
-                      <a:srgbClr val="0F1117"/>
-                    </a:solidFill>
-                    <a:lnL w="6350" cap="flat">
-                      <a:solidFill>
-                        <a:srgbClr val="2E3348"/>
-                      </a:solidFill>
-                    </a:lnL>
-                    <a:lnR w="6350" cap="flat">
-                      <a:solidFill>
-                        <a:srgbClr val="2E3348"/>
-                      </a:solidFill>
-                    </a:lnR>
-                    <a:lnT w="6350" cap="flat">
-                      <a:solidFill>
-                        <a:srgbClr val="2E3348"/>
-                      </a:solidFill>
-                    </a:lnT>
-                    <a:lnB w="6350" cap="flat">
-                      <a:solidFill>
-                        <a:srgbClr val="2E3348"/>
-                      </a:solidFill>
-                    </a:lnB>
-                  </a:tcPr>
-                </a:tc>
-              </a:tr>
-              <a:tr h="420624">
-                <a:tc>
-                  <a:txBody>
-                    <a:bodyPr wrap="square"/>
-                    <a:lstStyle/>
-                    <a:p>
-                      <a:pPr algn="l"/>
-                      <a:r>
-                        <a:rPr sz="800" b="0">
-                          <a:solidFill>
-                            <a:srgbClr val="E2E8F0"/>
-                          </a:solidFill>
-                        </a:rPr>
-                        <a:t>Metric Analytic AM</a:t>
-                      </a:r>
-                    </a:p>
-                  </a:txBody>
-                  <a:tcPr>
-                    <a:solidFill>
-                      <a:srgbClr val="1A1D27"/>
-                    </a:solidFill>
-                    <a:lnL w="6350" cap="flat">
-                      <a:solidFill>
-                        <a:srgbClr val="2E3348"/>
-                      </a:solidFill>
-                    </a:lnL>
-                    <a:lnR w="6350" cap="flat">
-                      <a:solidFill>
-                        <a:srgbClr val="2E3348"/>
-                      </a:solidFill>
-                    </a:lnR>
-                    <a:lnT w="6350" cap="flat">
-                      <a:solidFill>
-                        <a:srgbClr val="2E3348"/>
-                      </a:solidFill>
-                    </a:lnT>
-                    <a:lnB w="6350" cap="flat">
-                      <a:solidFill>
-                        <a:srgbClr val="2E3348"/>
-                      </a:solidFill>
-                    </a:lnB>
-                  </a:tcPr>
-                </a:tc>
-                <a:tc>
-                  <a:txBody>
-                    <a:bodyPr wrap="none"/>
-                    <a:lstStyle/>
-                    <a:p>
-                      <a:pPr algn="l"/>
-                      <a:r>
-                        <a:rPr sz="800" b="0">
-                          <a:solidFill>
-                            <a:srgbClr val="E2E8F0"/>
-                          </a:solidFill>
-                        </a:rPr>
-                        <a:t>Wed 08 Jul 2026  07:00 AM  →  10:00 AM</a:t>
-                      </a:r>
-                    </a:p>
-                  </a:txBody>
-                  <a:tcPr>
-                    <a:solidFill>
-                      <a:srgbClr val="1A1D27"/>
-                    </a:solidFill>
-                    <a:lnL w="6350" cap="flat">
-                      <a:solidFill>
-                        <a:srgbClr val="2E3348"/>
-                      </a:solidFill>
-                    </a:lnL>
-                    <a:lnR w="6350" cap="flat">
-                      <a:solidFill>
-                        <a:srgbClr val="2E3348"/>
-                      </a:solidFill>
-                    </a:lnR>
-                    <a:lnT w="6350" cap="flat">
-                      <a:solidFill>
-                        <a:srgbClr val="2E3348"/>
-                      </a:solidFill>
-                    </a:lnT>
-                    <a:lnB w="6350" cap="flat">
-                      <a:solidFill>
-                        <a:srgbClr val="2E3348"/>
-                      </a:solidFill>
-                    </a:lnB>
-                  </a:tcPr>
-                </a:tc>
-                <a:tc>
-                  <a:txBody>
-                    <a:bodyPr wrap="none"/>
-                    <a:lstStyle/>
-                    <a:p>
-                      <a:pPr algn="l"/>
-                      <a:r>
-                        <a:rPr sz="800" b="0">
-                          <a:solidFill>
-                            <a:srgbClr val="E2E8F0"/>
-                          </a:solidFill>
-                        </a:rPr>
-                        <a:t>Thu 09 Jul 2026  02:00 AM</a:t>
-                      </a:r>
-                    </a:p>
-                  </a:txBody>
-                  <a:tcPr>
-                    <a:solidFill>
-                      <a:srgbClr val="1A1D27"/>
-                    </a:solidFill>
-                    <a:lnL w="6350" cap="flat">
-                      <a:solidFill>
-                        <a:srgbClr val="2E3348"/>
-                      </a:solidFill>
-                    </a:lnL>
-                    <a:lnR w="6350" cap="flat">
-                      <a:solidFill>
-                        <a:srgbClr val="2E3348"/>
-                      </a:solidFill>
-                    </a:lnR>
-                    <a:lnT w="6350" cap="flat">
-                      <a:solidFill>
-                        <a:srgbClr val="2E3348"/>
-                      </a:solidFill>
-                    </a:lnT>
-                    <a:lnB w="6350" cap="flat">
-                      <a:solidFill>
-                        <a:srgbClr val="2E3348"/>
-                      </a:solidFill>
-                    </a:lnB>
-                  </a:tcPr>
-                </a:tc>
-                <a:tc>
-                  <a:txBody>
-                    <a:bodyPr wrap="none"/>
-                    <a:lstStyle/>
-                    <a:p>
-                      <a:pPr algn="l"/>
-                      <a:r>
-                        <a:rPr sz="800" b="0">
-                          <a:solidFill>
-                            <a:srgbClr val="E2E8F0"/>
-                          </a:solidFill>
-                        </a:rPr>
-                        <a:t>Thu 09 Jul 2026  12:00 AM</a:t>
-                      </a:r>
-                    </a:p>
-                  </a:txBody>
-                  <a:tcPr>
-                    <a:solidFill>
-                      <a:srgbClr val="1A1D27"/>
-                    </a:solidFill>
-                    <a:lnL w="6350" cap="flat">
-                      <a:solidFill>
-                        <a:srgbClr val="2E3348"/>
-                      </a:solidFill>
-                    </a:lnL>
-                    <a:lnR w="6350" cap="flat">
-                      <a:solidFill>
-                        <a:srgbClr val="2E3348"/>
-                      </a:solidFill>
-                    </a:lnR>
-                    <a:lnT w="6350" cap="flat">
-                      <a:solidFill>
-                        <a:srgbClr val="2E3348"/>
-                      </a:solidFill>
-                    </a:lnT>
-                    <a:lnB w="6350" cap="flat">
-                      <a:solidFill>
-                        <a:srgbClr val="2E3348"/>
-                      </a:solidFill>
-                    </a:lnB>
-                  </a:tcPr>
-                </a:tc>
-                <a:tc>
-                  <a:txBody>
-                    <a:bodyPr wrap="none"/>
-                    <a:lstStyle/>
-                    <a:p>
-                      <a:pPr algn="l"/>
-                      <a:r>
-                        <a:rPr sz="800" b="0">
-                          <a:solidFill>
-                            <a:srgbClr val="E2E8F0"/>
-                          </a:solidFill>
-                        </a:rPr>
-                        <a:t>Wed 08 Jul 2026  10:00 PM</a:t>
-                      </a:r>
-                    </a:p>
-                  </a:txBody>
-                  <a:tcPr>
-                    <a:solidFill>
-                      <a:srgbClr val="1A1D27"/>
-                    </a:solidFill>
-                    <a:lnL w="6350" cap="flat">
-                      <a:solidFill>
-                        <a:srgbClr val="2E3348"/>
-                      </a:solidFill>
-                    </a:lnL>
-                    <a:lnR w="6350" cap="flat">
-                      <a:solidFill>
-                        <a:srgbClr val="2E3348"/>
-                      </a:solidFill>
-                    </a:lnR>
-                    <a:lnT w="6350" cap="flat">
-                      <a:solidFill>
-                        <a:srgbClr val="2E3348"/>
-                      </a:solidFill>
-                    </a:lnT>
-                    <a:lnB w="6350" cap="flat">
-                      <a:solidFill>
-                        <a:srgbClr val="2E3348"/>
-                      </a:solidFill>
-                    </a:lnB>
-                  </a:tcPr>
-                </a:tc>
-                <a:tc>
-                  <a:txBody>
-                    <a:bodyPr wrap="square"/>
-                    <a:lstStyle/>
-                    <a:p>
-                      <a:pPr algn="l"/>
-                      <a:r>
-                        <a:rPr sz="700" b="0">
-                          <a:solidFill>
-                            <a:srgbClr val="E2E8F0"/>
-                          </a:solidFill>
-                        </a:rPr>
-                        <a:t>https://events.sumologic.com/metricanalyticsam07082026-event-training</a:t>
-                      </a:r>
-                    </a:p>
-                  </a:txBody>
-                  <a:tcPr>
-                    <a:solidFill>
-                      <a:srgbClr val="1A1D27"/>
-                    </a:solidFill>
-                    <a:lnL w="6350" cap="flat">
-                      <a:solidFill>
-                        <a:srgbClr val="2E3348"/>
-                      </a:solidFill>
-                    </a:lnL>
-                    <a:lnR w="6350" cap="flat">
-                      <a:solidFill>
-                        <a:srgbClr val="2E3348"/>
-                      </a:solidFill>
-                    </a:lnR>
-                    <a:lnT w="6350" cap="flat">
-                      <a:solidFill>
-                        <a:srgbClr val="2E3348"/>
-                      </a:solidFill>
-                    </a:lnT>
-                    <a:lnB w="6350" cap="flat">
-                      <a:solidFill>
-                        <a:srgbClr val="2E3348"/>
-                      </a:solidFill>
-                    </a:lnB>
-                  </a:tcPr>
-                </a:tc>
-              </a:tr>
-              <a:tr h="420624">
-                <a:tc>
-                  <a:txBody>
-                    <a:bodyPr wrap="square"/>
-                    <a:lstStyle/>
-                    <a:p>
-                      <a:pPr algn="l"/>
-                      <a:r>
-                        <a:rPr sz="800" b="0">
-                          <a:solidFill>
-                            <a:srgbClr val="E2E8F0"/>
-                          </a:solidFill>
-                        </a:rPr>
-                        <a:t>Metrics Analytic PM</a:t>
-                      </a:r>
-                    </a:p>
-                  </a:txBody>
-                  <a:tcPr>
-                    <a:solidFill>
-                      <a:srgbClr val="0F1117"/>
-                    </a:solidFill>
-                    <a:lnL w="6350" cap="flat">
-                      <a:solidFill>
-                        <a:srgbClr val="2E3348"/>
-                      </a:solidFill>
-                    </a:lnL>
-                    <a:lnR w="6350" cap="flat">
-                      <a:solidFill>
-                        <a:srgbClr val="2E3348"/>
-                      </a:solidFill>
-                    </a:lnR>
-                    <a:lnT w="6350" cap="flat">
-                      <a:solidFill>
-                        <a:srgbClr val="2E3348"/>
-                      </a:solidFill>
-                    </a:lnT>
-                    <a:lnB w="6350" cap="flat">
-                      <a:solidFill>
-                        <a:srgbClr val="2E3348"/>
-                      </a:solidFill>
-                    </a:lnB>
-                  </a:tcPr>
-                </a:tc>
-                <a:tc>
-                  <a:txBody>
-                    <a:bodyPr wrap="none"/>
-                    <a:lstStyle/>
-                    <a:p>
-                      <a:pPr algn="l"/>
-                      <a:r>
-                        <a:rPr sz="800" b="0">
-                          <a:solidFill>
-                            <a:srgbClr val="E2E8F0"/>
-                          </a:solidFill>
-                        </a:rPr>
-                        <a:t>Wed 08 Jul 2026  04:00 PM  →  07:00 PM</a:t>
-                      </a:r>
-                    </a:p>
-                  </a:txBody>
-                  <a:tcPr>
-                    <a:solidFill>
-                      <a:srgbClr val="0F1117"/>
-                    </a:solidFill>
-                    <a:lnL w="6350" cap="flat">
-                      <a:solidFill>
-                        <a:srgbClr val="2E3348"/>
-                      </a:solidFill>
-                    </a:lnL>
-                    <a:lnR w="6350" cap="flat">
-                      <a:solidFill>
-                        <a:srgbClr val="2E3348"/>
-                      </a:solidFill>
-                    </a:lnR>
-                    <a:lnT w="6350" cap="flat">
-                      <a:solidFill>
-                        <a:srgbClr val="2E3348"/>
-                      </a:solidFill>
-                    </a:lnT>
-                    <a:lnB w="6350" cap="flat">
-                      <a:solidFill>
-                        <a:srgbClr val="2E3348"/>
-                      </a:solidFill>
-                    </a:lnB>
-                  </a:tcPr>
-                </a:tc>
-                <a:tc>
-                  <a:txBody>
-                    <a:bodyPr wrap="none"/>
-                    <a:lstStyle/>
-                    <a:p>
-                      <a:pPr algn="l"/>
-                      <a:r>
-                        <a:rPr sz="800" b="0">
-                          <a:solidFill>
-                            <a:srgbClr val="E2E8F0"/>
-                          </a:solidFill>
-                        </a:rPr>
-                        <a:t>Thu 09 Jul 2026  11:00 AM</a:t>
-                      </a:r>
-                    </a:p>
-                  </a:txBody>
-                  <a:tcPr>
-                    <a:solidFill>
-                      <a:srgbClr val="0F1117"/>
-                    </a:solidFill>
-                    <a:lnL w="6350" cap="flat">
-                      <a:solidFill>
-                        <a:srgbClr val="2E3348"/>
-                      </a:solidFill>
-                    </a:lnL>
-                    <a:lnR w="6350" cap="flat">
-                      <a:solidFill>
-                        <a:srgbClr val="2E3348"/>
-                      </a:solidFill>
-                    </a:lnR>
-                    <a:lnT w="6350" cap="flat">
-                      <a:solidFill>
-                        <a:srgbClr val="2E3348"/>
-                      </a:solidFill>
-                    </a:lnT>
-                    <a:lnB w="6350" cap="flat">
-                      <a:solidFill>
-                        <a:srgbClr val="2E3348"/>
-                      </a:solidFill>
-                    </a:lnB>
-                  </a:tcPr>
-                </a:tc>
-                <a:tc>
-                  <a:txBody>
-                    <a:bodyPr wrap="none"/>
-                    <a:lstStyle/>
-                    <a:p>
-                      <a:pPr algn="l"/>
-                      <a:r>
-                        <a:rPr sz="800" b="0">
-                          <a:solidFill>
-                            <a:srgbClr val="E2E8F0"/>
-                          </a:solidFill>
-                        </a:rPr>
-                        <a:t>Thu 09 Jul 2026  09:00 AM</a:t>
-                      </a:r>
-                    </a:p>
-                  </a:txBody>
-                  <a:tcPr>
-                    <a:solidFill>
-                      <a:srgbClr val="0F1117"/>
-                    </a:solidFill>
-                    <a:lnL w="6350" cap="flat">
-                      <a:solidFill>
-                        <a:srgbClr val="2E3348"/>
-                      </a:solidFill>
-                    </a:lnL>
-                    <a:lnR w="6350" cap="flat">
-                      <a:solidFill>
-                        <a:srgbClr val="2E3348"/>
-                      </a:solidFill>
-                    </a:lnR>
-                    <a:lnT w="6350" cap="flat">
-                      <a:solidFill>
-                        <a:srgbClr val="2E3348"/>
-                      </a:solidFill>
-                    </a:lnT>
-                    <a:lnB w="6350" cap="flat">
-                      <a:solidFill>
-                        <a:srgbClr val="2E3348"/>
-                      </a:solidFill>
-                    </a:lnB>
-                  </a:tcPr>
-                </a:tc>
-                <a:tc>
-                  <a:txBody>
-                    <a:bodyPr wrap="none"/>
-                    <a:lstStyle/>
-                    <a:p>
-                      <a:pPr algn="l"/>
-                      <a:r>
-                        <a:rPr sz="800" b="0">
-                          <a:solidFill>
-                            <a:srgbClr val="E2E8F0"/>
-                          </a:solidFill>
-                        </a:rPr>
-                        <a:t>Thu 09 Jul 2026  07:00 AM</a:t>
-                      </a:r>
-                    </a:p>
-                  </a:txBody>
-                  <a:tcPr>
-                    <a:solidFill>
-                      <a:srgbClr val="0F1117"/>
-                    </a:solidFill>
-                    <a:lnL w="6350" cap="flat">
-                      <a:solidFill>
-                        <a:srgbClr val="2E3348"/>
-                      </a:solidFill>
-                    </a:lnL>
-                    <a:lnR w="6350" cap="flat">
-                      <a:solidFill>
-                        <a:srgbClr val="2E3348"/>
-                      </a:solidFill>
-                    </a:lnR>
-                    <a:lnT w="6350" cap="flat">
-                      <a:solidFill>
-                        <a:srgbClr val="2E3348"/>
-                      </a:solidFill>
-                    </a:lnT>
-                    <a:lnB w="6350" cap="flat">
-                      <a:solidFill>
-                        <a:srgbClr val="2E3348"/>
-                      </a:solidFill>
-                    </a:lnB>
-                  </a:tcPr>
-                </a:tc>
-                <a:tc>
-                  <a:txBody>
-                    <a:bodyPr wrap="square"/>
-                    <a:lstStyle/>
-                    <a:p>
-                      <a:pPr algn="l"/>
-                      <a:r>
-                        <a:rPr sz="700" b="0">
-                          <a:solidFill>
-                            <a:srgbClr val="E2E8F0"/>
-                          </a:solidFill>
-                        </a:rPr>
-                        <a:t>https://events.sumologic.com/metricanalyticspm07082026-event-training</a:t>
-                      </a:r>
-                    </a:p>
-                  </a:txBody>
-                  <a:tcPr>
-                    <a:solidFill>
-                      <a:srgbClr val="0F1117"/>
-                    </a:solidFill>
-                    <a:lnL w="6350" cap="flat">
-                      <a:solidFill>
-                        <a:srgbClr val="2E3348"/>
-                      </a:solidFill>
-                    </a:lnL>
-                    <a:lnR w="6350" cap="flat">
-                      <a:solidFill>
-                        <a:srgbClr val="2E3348"/>
-                      </a:solidFill>
-                    </a:lnR>
-                    <a:lnT w="6350" cap="flat">
-                      <a:solidFill>
-                        <a:srgbClr val="2E3348"/>
-                      </a:solidFill>
-                    </a:lnT>
-                    <a:lnB w="6350" cap="flat">
-                      <a:solidFill>
-                        <a:srgbClr val="2E3348"/>
-                      </a:solidFill>
-                    </a:lnB>
-                  </a:tcPr>
-                </a:tc>
-              </a:tr>
-              <a:tr h="420624">
-                <a:tc>
-                  <a:txBody>
-                    <a:bodyPr wrap="square"/>
-                    <a:lstStyle/>
-                    <a:p>
-                      <a:pPr algn="l"/>
-                      <a:r>
-                        <a:rPr sz="800" b="0">
-                          <a:solidFill>
-                            <a:srgbClr val="E2E8F0"/>
-                          </a:solidFill>
-                        </a:rPr>
-                        <a:t>Mobot Essentials AM</a:t>
-                      </a:r>
-                    </a:p>
-                  </a:txBody>
-                  <a:tcPr>
-                    <a:solidFill>
-                      <a:srgbClr val="1A1D27"/>
-                    </a:solidFill>
-                    <a:lnL w="6350" cap="flat">
-                      <a:solidFill>
-                        <a:srgbClr val="2E3348"/>
-                      </a:solidFill>
-                    </a:lnL>
-                    <a:lnR w="6350" cap="flat">
-                      <a:solidFill>
-                        <a:srgbClr val="2E3348"/>
-                      </a:solidFill>
-                    </a:lnR>
-                    <a:lnT w="6350" cap="flat">
-                      <a:solidFill>
-                        <a:srgbClr val="2E3348"/>
-                      </a:solidFill>
-                    </a:lnT>
-                    <a:lnB w="6350" cap="flat">
-                      <a:solidFill>
-                        <a:srgbClr val="2E3348"/>
-                      </a:solidFill>
-                    </a:lnB>
-                  </a:tcPr>
-                </a:tc>
-                <a:tc>
-                  <a:txBody>
-                    <a:bodyPr wrap="none"/>
-                    <a:lstStyle/>
-                    <a:p>
-                      <a:pPr algn="l"/>
-                      <a:r>
-                        <a:rPr sz="800" b="0">
-                          <a:solidFill>
-                            <a:srgbClr val="E2E8F0"/>
-                          </a:solidFill>
-                        </a:rPr>
-                        <a:t>Thu 09 Jul 2026  07:00 AM  →  08:30 AM</a:t>
-                      </a:r>
-                    </a:p>
-                  </a:txBody>
-                  <a:tcPr>
-                    <a:solidFill>
-                      <a:srgbClr val="1A1D27"/>
-                    </a:solidFill>
-                    <a:lnL w="6350" cap="flat">
-                      <a:solidFill>
-                        <a:srgbClr val="2E3348"/>
-                      </a:solidFill>
-                    </a:lnL>
-                    <a:lnR w="6350" cap="flat">
-                      <a:solidFill>
-                        <a:srgbClr val="2E3348"/>
-                      </a:solidFill>
-                    </a:lnR>
-                    <a:lnT w="6350" cap="flat">
-                      <a:solidFill>
-                        <a:srgbClr val="2E3348"/>
-                      </a:solidFill>
-                    </a:lnT>
-                    <a:lnB w="6350" cap="flat">
-                      <a:solidFill>
-                        <a:srgbClr val="2E3348"/>
-                      </a:solidFill>
-                    </a:lnB>
-                  </a:tcPr>
-                </a:tc>
-                <a:tc>
-                  <a:txBody>
-                    <a:bodyPr wrap="none"/>
-                    <a:lstStyle/>
-                    <a:p>
-                      <a:pPr algn="l"/>
-                      <a:r>
-                        <a:rPr sz="800" b="0">
-                          <a:solidFill>
-                            <a:srgbClr val="E2E8F0"/>
-                          </a:solidFill>
-                        </a:rPr>
-                        <a:t>Fri 10 Jul 2026  02:00 AM</a:t>
-                      </a:r>
-                    </a:p>
-                  </a:txBody>
-                  <a:tcPr>
-                    <a:solidFill>
-                      <a:srgbClr val="1A1D27"/>
-                    </a:solidFill>
-                    <a:lnL w="6350" cap="flat">
-                      <a:solidFill>
-                        <a:srgbClr val="2E3348"/>
-                      </a:solidFill>
-                    </a:lnL>
-                    <a:lnR w="6350" cap="flat">
-                      <a:solidFill>
-                        <a:srgbClr val="2E3348"/>
-                      </a:solidFill>
-                    </a:lnR>
-                    <a:lnT w="6350" cap="flat">
-                      <a:solidFill>
-                        <a:srgbClr val="2E3348"/>
-                      </a:solidFill>
-                    </a:lnT>
-                    <a:lnB w="6350" cap="flat">
-                      <a:solidFill>
-                        <a:srgbClr val="2E3348"/>
-                      </a:solidFill>
-                    </a:lnB>
-                  </a:tcPr>
-                </a:tc>
-                <a:tc>
-                  <a:txBody>
-                    <a:bodyPr wrap="none"/>
-                    <a:lstStyle/>
-                    <a:p>
-                      <a:pPr algn="l"/>
-                      <a:r>
-                        <a:rPr sz="800" b="0">
-                          <a:solidFill>
-                            <a:srgbClr val="E2E8F0"/>
-                          </a:solidFill>
-                        </a:rPr>
-                        <a:t>Fri 10 Jul 2026  12:00 AM</a:t>
-                      </a:r>
-                    </a:p>
-                  </a:txBody>
-                  <a:tcPr>
-                    <a:solidFill>
-                      <a:srgbClr val="1A1D27"/>
-                    </a:solidFill>
-                    <a:lnL w="6350" cap="flat">
-                      <a:solidFill>
-                        <a:srgbClr val="2E3348"/>
-                      </a:solidFill>
-                    </a:lnL>
-                    <a:lnR w="6350" cap="flat">
-                      <a:solidFill>
-                        <a:srgbClr val="2E3348"/>
-                      </a:solidFill>
-                    </a:lnR>
-                    <a:lnT w="6350" cap="flat">
-                      <a:solidFill>
-                        <a:srgbClr val="2E3348"/>
-                      </a:solidFill>
-                    </a:lnT>
-                    <a:lnB w="6350" cap="flat">
-                      <a:solidFill>
-                        <a:srgbClr val="2E3348"/>
-                      </a:solidFill>
-                    </a:lnB>
-                  </a:tcPr>
-                </a:tc>
-                <a:tc>
-                  <a:txBody>
-                    <a:bodyPr wrap="none"/>
-                    <a:lstStyle/>
-                    <a:p>
-                      <a:pPr algn="l"/>
-                      <a:r>
-                        <a:rPr sz="800" b="0">
-                          <a:solidFill>
-                            <a:srgbClr val="E2E8F0"/>
-                          </a:solidFill>
-                        </a:rPr>
-                        <a:t>Thu 09 Jul 2026  10:00 PM</a:t>
-                      </a:r>
-                    </a:p>
-                  </a:txBody>
-                  <a:tcPr>
-                    <a:solidFill>
-                      <a:srgbClr val="1A1D27"/>
-                    </a:solidFill>
-                    <a:lnL w="6350" cap="flat">
-                      <a:solidFill>
-                        <a:srgbClr val="2E3348"/>
-                      </a:solidFill>
-                    </a:lnL>
-                    <a:lnR w="6350" cap="flat">
-                      <a:solidFill>
-                        <a:srgbClr val="2E3348"/>
-                      </a:solidFill>
-                    </a:lnR>
-                    <a:lnT w="6350" cap="flat">
-                      <a:solidFill>
-                        <a:srgbClr val="2E3348"/>
-                      </a:solidFill>
-                    </a:lnT>
-                    <a:lnB w="6350" cap="flat">
-                      <a:solidFill>
-                        <a:srgbClr val="2E3348"/>
-                      </a:solidFill>
-                    </a:lnB>
-                  </a:tcPr>
-                </a:tc>
-                <a:tc>
-                  <a:txBody>
-                    <a:bodyPr wrap="square"/>
-                    <a:lstStyle/>
-                    <a:p>
-                      <a:pPr algn="l"/>
-                      <a:r>
-                        <a:rPr sz="700" b="0">
-                          <a:solidFill>
-                            <a:srgbClr val="E2E8F0"/>
-                          </a:solidFill>
-                        </a:rPr>
-                        <a:t>https://events.sumologic.com/mobotam07092026-event-training</a:t>
-                      </a:r>
-                    </a:p>
-                  </a:txBody>
-                  <a:tcPr>
-                    <a:solidFill>
-                      <a:srgbClr val="1A1D27"/>
-                    </a:solidFill>
-                    <a:lnL w="6350" cap="flat">
-                      <a:solidFill>
-                        <a:srgbClr val="2E3348"/>
-                      </a:solidFill>
-                    </a:lnL>
-                    <a:lnR w="6350" cap="flat">
-                      <a:solidFill>
-                        <a:srgbClr val="2E3348"/>
-                      </a:solidFill>
-                    </a:lnR>
-                    <a:lnT w="6350" cap="flat">
-                      <a:solidFill>
-                        <a:srgbClr val="2E3348"/>
-                      </a:solidFill>
-                    </a:lnT>
-                    <a:lnB w="6350" cap="flat">
-                      <a:solidFill>
-                        <a:srgbClr val="2E3348"/>
-                      </a:solidFill>
-                    </a:lnB>
-                  </a:tcPr>
-                </a:tc>
-              </a:tr>
-              <a:tr h="420624">
-                <a:tc>
-                  <a:txBody>
-                    <a:bodyPr wrap="square"/>
-                    <a:lstStyle/>
-                    <a:p>
-                      <a:pPr algn="l"/>
-                      <a:r>
-                        <a:rPr sz="800" b="0">
-                          <a:solidFill>
-                            <a:srgbClr val="E2E8F0"/>
-                          </a:solidFill>
-                        </a:rPr>
-                        <a:t>Mobot Essentials PM</a:t>
-                      </a:r>
-                    </a:p>
-                  </a:txBody>
-                  <a:tcPr>
-                    <a:solidFill>
-                      <a:srgbClr val="0F1117"/>
-                    </a:solidFill>
-                    <a:lnL w="6350" cap="flat">
-                      <a:solidFill>
-                        <a:srgbClr val="2E3348"/>
-                      </a:solidFill>
-                    </a:lnL>
-                    <a:lnR w="6350" cap="flat">
-                      <a:solidFill>
-                        <a:srgbClr val="2E3348"/>
-                      </a:solidFill>
-                    </a:lnR>
-                    <a:lnT w="6350" cap="flat">
-                      <a:solidFill>
-                        <a:srgbClr val="2E3348"/>
-                      </a:solidFill>
-                    </a:lnT>
-                    <a:lnB w="6350" cap="flat">
-                      <a:solidFill>
-                        <a:srgbClr val="2E3348"/>
-                      </a:solidFill>
-                    </a:lnB>
-                  </a:tcPr>
-                </a:tc>
-                <a:tc>
-                  <a:txBody>
-                    <a:bodyPr wrap="none"/>
-                    <a:lstStyle/>
-                    <a:p>
-                      <a:pPr algn="l"/>
-                      <a:r>
-                        <a:rPr sz="800" b="0">
-                          <a:solidFill>
-                            <a:srgbClr val="E2E8F0"/>
-                          </a:solidFill>
-                        </a:rPr>
-                        <a:t>Thu 09 Jul 2026  04:00 PM  →  05:30 PM</a:t>
-                      </a:r>
-                    </a:p>
-                  </a:txBody>
-                  <a:tcPr>
-                    <a:solidFill>
-                      <a:srgbClr val="0F1117"/>
-                    </a:solidFill>
-                    <a:lnL w="6350" cap="flat">
-                      <a:solidFill>
-                        <a:srgbClr val="2E3348"/>
-                      </a:solidFill>
-                    </a:lnL>
-                    <a:lnR w="6350" cap="flat">
-                      <a:solidFill>
-                        <a:srgbClr val="2E3348"/>
-                      </a:solidFill>
-                    </a:lnR>
-                    <a:lnT w="6350" cap="flat">
-                      <a:solidFill>
-                        <a:srgbClr val="2E3348"/>
-                      </a:solidFill>
-                    </a:lnT>
-                    <a:lnB w="6350" cap="flat">
-                      <a:solidFill>
-                        <a:srgbClr val="2E3348"/>
-                      </a:solidFill>
-                    </a:lnB>
-                  </a:tcPr>
-                </a:tc>
-                <a:tc>
-                  <a:txBody>
-                    <a:bodyPr wrap="none"/>
-                    <a:lstStyle/>
-                    <a:p>
-                      <a:pPr algn="l"/>
-                      <a:r>
-                        <a:rPr sz="800" b="0">
-                          <a:solidFill>
-                            <a:srgbClr val="E2E8F0"/>
-                          </a:solidFill>
-                        </a:rPr>
-                        <a:t>Fri 10 Jul 2026  11:00 AM</a:t>
-                      </a:r>
-                    </a:p>
-                  </a:txBody>
-                  <a:tcPr>
-                    <a:solidFill>
-                      <a:srgbClr val="0F1117"/>
-                    </a:solidFill>
-                    <a:lnL w="6350" cap="flat">
-                      <a:solidFill>
-                        <a:srgbClr val="2E3348"/>
-                      </a:solidFill>
-                    </a:lnL>
-                    <a:lnR w="6350" cap="flat">
-                      <a:solidFill>
-                        <a:srgbClr val="2E3348"/>
-                      </a:solidFill>
-                    </a:lnR>
-                    <a:lnT w="6350" cap="flat">
-                      <a:solidFill>
-                        <a:srgbClr val="2E3348"/>
-                      </a:solidFill>
-                    </a:lnT>
-                    <a:lnB w="6350" cap="flat">
-                      <a:solidFill>
-                        <a:srgbClr val="2E3348"/>
-                      </a:solidFill>
-                    </a:lnB>
-                  </a:tcPr>
-                </a:tc>
-                <a:tc>
-                  <a:txBody>
-                    <a:bodyPr wrap="none"/>
-                    <a:lstStyle/>
-                    <a:p>
-                      <a:pPr algn="l"/>
-                      <a:r>
-                        <a:rPr sz="800" b="0">
-                          <a:solidFill>
-                            <a:srgbClr val="E2E8F0"/>
-                          </a:solidFill>
-                        </a:rPr>
-                        <a:t>Fri 10 Jul 2026  09:00 AM</a:t>
-                      </a:r>
-                    </a:p>
-                  </a:txBody>
-                  <a:tcPr>
-                    <a:solidFill>
-                      <a:srgbClr val="0F1117"/>
-                    </a:solidFill>
-                    <a:lnL w="6350" cap="flat">
-                      <a:solidFill>
-                        <a:srgbClr val="2E3348"/>
-                      </a:solidFill>
-                    </a:lnL>
-                    <a:lnR w="6350" cap="flat">
-                      <a:solidFill>
-                        <a:srgbClr val="2E3348"/>
-                      </a:solidFill>
-                    </a:lnR>
-                    <a:lnT w="6350" cap="flat">
-                      <a:solidFill>
-                        <a:srgbClr val="2E3348"/>
-                      </a:solidFill>
-                    </a:lnT>
-                    <a:lnB w="6350" cap="flat">
-                      <a:solidFill>
-                        <a:srgbClr val="2E3348"/>
-                      </a:solidFill>
-                    </a:lnB>
-                  </a:tcPr>
-                </a:tc>
-                <a:tc>
-                  <a:txBody>
-                    <a:bodyPr wrap="none"/>
-                    <a:lstStyle/>
-                    <a:p>
-                      <a:pPr algn="l"/>
-                      <a:r>
-                        <a:rPr sz="800" b="0">
-                          <a:solidFill>
-                            <a:srgbClr val="E2E8F0"/>
-                          </a:solidFill>
-                        </a:rPr>
-                        <a:t>Fri 10 Jul 2026  07:00 AM</a:t>
-                      </a:r>
-                    </a:p>
-                  </a:txBody>
-                  <a:tcPr>
-                    <a:solidFill>
-                      <a:srgbClr val="0F1117"/>
-                    </a:solidFill>
-                    <a:lnL w="6350" cap="flat">
-                      <a:solidFill>
-                        <a:srgbClr val="2E3348"/>
-                      </a:solidFill>
-                    </a:lnL>
-                    <a:lnR w="6350" cap="flat">
-                      <a:solidFill>
-                        <a:srgbClr val="2E3348"/>
-                      </a:solidFill>
-                    </a:lnR>
-                    <a:lnT w="6350" cap="flat">
-                      <a:solidFill>
-                        <a:srgbClr val="2E3348"/>
-                      </a:solidFill>
-                    </a:lnT>
-                    <a:lnB w="6350" cap="flat">
-                      <a:solidFill>
-                        <a:srgbClr val="2E3348"/>
-                      </a:solidFill>
-                    </a:lnB>
-                  </a:tcPr>
-                </a:tc>
-                <a:tc>
-                  <a:txBody>
-                    <a:bodyPr wrap="square"/>
-                    <a:lstStyle/>
-                    <a:p>
-                      <a:pPr algn="l"/>
-                      <a:r>
-                        <a:rPr sz="700" b="0">
-                          <a:solidFill>
-                            <a:srgbClr val="E2E8F0"/>
-                          </a:solidFill>
-                        </a:rPr>
-                        <a:t>https://events.sumologic.com/mobotessentialspm07092026-event-training</a:t>
-                      </a:r>
-                    </a:p>
-                  </a:txBody>
-                  <a:tcPr>
-                    <a:solidFill>
-                      <a:srgbClr val="0F1117"/>
-                    </a:solidFill>
-                    <a:lnL w="6350" cap="flat">
-                      <a:solidFill>
-                        <a:srgbClr val="2E3348"/>
-                      </a:solidFill>
-                    </a:lnL>
-                    <a:lnR w="6350" cap="flat">
-                      <a:solidFill>
-                        <a:srgbClr val="2E3348"/>
-                      </a:solidFill>
-                    </a:lnR>
-                    <a:lnT w="6350" cap="flat">
-                      <a:solidFill>
-                        <a:srgbClr val="2E3348"/>
-                      </a:solidFill>
-                    </a:lnT>
-                    <a:lnB w="6350" cap="flat">
-                      <a:solidFill>
-                        <a:srgbClr val="2E3348"/>
-                      </a:solidFill>
-                    </a:lnB>
-                  </a:tcPr>
-                </a:tc>
-              </a:tr>
-              <a:tr h="420624">
-                <a:tc>
-                  <a:txBody>
-                    <a:bodyPr wrap="square"/>
-                    <a:lstStyle/>
-                    <a:p>
-                      <a:pPr algn="l"/>
-                      <a:r>
-                        <a:rPr sz="800" b="0">
-                          <a:solidFill>
-                            <a:srgbClr val="E2E8F0"/>
-                          </a:solidFill>
-                        </a:rPr>
-                        <a:t>Essential Cloud SIEM skills for SOC Analysts AM</a:t>
-                      </a:r>
-                    </a:p>
-                  </a:txBody>
-                  <a:tcPr>
-                    <a:solidFill>
-                      <a:srgbClr val="1A1D27"/>
-                    </a:solidFill>
-                    <a:lnL w="6350" cap="flat">
-                      <a:solidFill>
-                        <a:srgbClr val="2E3348"/>
-                      </a:solidFill>
-                    </a:lnL>
-                    <a:lnR w="6350" cap="flat">
-                      <a:solidFill>
-                        <a:srgbClr val="2E3348"/>
-                      </a:solidFill>
-                    </a:lnR>
-                    <a:lnT w="6350" cap="flat">
-                      <a:solidFill>
-                        <a:srgbClr val="2E3348"/>
-                      </a:solidFill>
-                    </a:lnT>
-                    <a:lnB w="6350" cap="flat">
-                      <a:solidFill>
-                        <a:srgbClr val="2E3348"/>
-                      </a:solidFill>
-                    </a:lnB>
-                  </a:tcPr>
-                </a:tc>
-                <a:tc>
-                  <a:txBody>
-                    <a:bodyPr wrap="none"/>
-                    <a:lstStyle/>
-                    <a:p>
-                      <a:pPr algn="l"/>
-                      <a:r>
-                        <a:rPr sz="800" b="0">
-                          <a:solidFill>
-                            <a:srgbClr val="E2E8F0"/>
-                          </a:solidFill>
-                        </a:rPr>
-                        <a:t>Tue 14 Jul 2026  07:00 AM  →  08:30 AM</a:t>
-                      </a:r>
-                    </a:p>
-                  </a:txBody>
-                  <a:tcPr>
-                    <a:solidFill>
-                      <a:srgbClr val="1A1D27"/>
-                    </a:solidFill>
-                    <a:lnL w="6350" cap="flat">
-                      <a:solidFill>
-                        <a:srgbClr val="2E3348"/>
-                      </a:solidFill>
-                    </a:lnL>
-                    <a:lnR w="6350" cap="flat">
-                      <a:solidFill>
-                        <a:srgbClr val="2E3348"/>
-                      </a:solidFill>
-                    </a:lnR>
-                    <a:lnT w="6350" cap="flat">
-                      <a:solidFill>
-                        <a:srgbClr val="2E3348"/>
-                      </a:solidFill>
-                    </a:lnT>
-                    <a:lnB w="6350" cap="flat">
-                      <a:solidFill>
-                        <a:srgbClr val="2E3348"/>
-                      </a:solidFill>
-                    </a:lnB>
-                  </a:tcPr>
-                </a:tc>
-                <a:tc>
-                  <a:txBody>
-                    <a:bodyPr wrap="none"/>
-                    <a:lstStyle/>
-                    <a:p>
-                      <a:pPr algn="l"/>
-                      <a:r>
-                        <a:rPr sz="800" b="0">
-                          <a:solidFill>
-                            <a:srgbClr val="E2E8F0"/>
-                          </a:solidFill>
-                        </a:rPr>
-                        <a:t>Wed 15 Jul 2026  02:00 AM</a:t>
-                      </a:r>
-                    </a:p>
-                  </a:txBody>
-                  <a:tcPr>
-                    <a:solidFill>
-                      <a:srgbClr val="1A1D27"/>
-                    </a:solidFill>
-                    <a:lnL w="6350" cap="flat">
-                      <a:solidFill>
-                        <a:srgbClr val="2E3348"/>
-                      </a:solidFill>
-                    </a:lnL>
-                    <a:lnR w="6350" cap="flat">
-                      <a:solidFill>
-                        <a:srgbClr val="2E3348"/>
-                      </a:solidFill>
-                    </a:lnR>
-                    <a:lnT w="6350" cap="flat">
-                      <a:solidFill>
-                        <a:srgbClr val="2E3348"/>
-                      </a:solidFill>
-                    </a:lnT>
-                    <a:lnB w="6350" cap="flat">
-                      <a:solidFill>
-                        <a:srgbClr val="2E3348"/>
-                      </a:solidFill>
-                    </a:lnB>
-                  </a:tcPr>
-                </a:tc>
-                <a:tc>
-                  <a:txBody>
-                    <a:bodyPr wrap="none"/>
-                    <a:lstStyle/>
-                    <a:p>
-                      <a:pPr algn="l"/>
-                      <a:r>
-                        <a:rPr sz="800" b="0">
-                          <a:solidFill>
-                            <a:srgbClr val="E2E8F0"/>
-                          </a:solidFill>
-                        </a:rPr>
-                        <a:t>Wed 15 Jul 2026  12:00 AM</a:t>
-                      </a:r>
-                    </a:p>
-                  </a:txBody>
-                  <a:tcPr>
-                    <a:solidFill>
-                      <a:srgbClr val="1A1D27"/>
-                    </a:solidFill>
-                    <a:lnL w="6350" cap="flat">
-                      <a:solidFill>
-                        <a:srgbClr val="2E3348"/>
-                      </a:solidFill>
-                    </a:lnL>
-                    <a:lnR w="6350" cap="flat">
-                      <a:solidFill>
-                        <a:srgbClr val="2E3348"/>
-                      </a:solidFill>
-                    </a:lnR>
-                    <a:lnT w="6350" cap="flat">
-                      <a:solidFill>
-                        <a:srgbClr val="2E3348"/>
-                      </a:solidFill>
-                    </a:lnT>
-                    <a:lnB w="6350" cap="flat">
-                      <a:solidFill>
-                        <a:srgbClr val="2E3348"/>
-                      </a:solidFill>
-                    </a:lnB>
-                  </a:tcPr>
-                </a:tc>
-                <a:tc>
-                  <a:txBody>
-                    <a:bodyPr wrap="none"/>
-                    <a:lstStyle/>
-                    <a:p>
-                      <a:pPr algn="l"/>
-                      <a:r>
-                        <a:rPr sz="800" b="0">
-                          <a:solidFill>
-                            <a:srgbClr val="E2E8F0"/>
-                          </a:solidFill>
-                        </a:rPr>
-                        <a:t>Tue 14 Jul 2026  10:00 PM</a:t>
-                      </a:r>
-                    </a:p>
-                  </a:txBody>
-                  <a:tcPr>
-                    <a:solidFill>
-                      <a:srgbClr val="1A1D27"/>
-                    </a:solidFill>
-                    <a:lnL w="6350" cap="flat">
-                      <a:solidFill>
-                        <a:srgbClr val="2E3348"/>
-                      </a:solidFill>
-                    </a:lnL>
-                    <a:lnR w="6350" cap="flat">
-                      <a:solidFill>
-                        <a:srgbClr val="2E3348"/>
-                      </a:solidFill>
-                    </a:lnR>
-                    <a:lnT w="6350" cap="flat">
-                      <a:solidFill>
-                        <a:srgbClr val="2E3348"/>
-                      </a:solidFill>
-                    </a:lnT>
-                    <a:lnB w="6350" cap="flat">
-                      <a:solidFill>
-                        <a:srgbClr val="2E3348"/>
-                      </a:solidFill>
-                    </a:lnB>
-                  </a:tcPr>
-                </a:tc>
-                <a:tc>
-                  <a:txBody>
-                    <a:bodyPr wrap="square"/>
-                    <a:lstStyle/>
-                    <a:p>
-                      <a:pPr algn="l"/>
-                      <a:r>
-                        <a:rPr sz="700" b="0">
-                          <a:solidFill>
-                            <a:srgbClr val="E2E8F0"/>
-                          </a:solidFill>
-                        </a:rPr>
-                        <a:t>https://events.sumologic.com/esscloudsiemam07142026-event-training</a:t>
-                      </a:r>
-                    </a:p>
-                  </a:txBody>
-                  <a:tcPr>
-                    <a:solidFill>
-                      <a:srgbClr val="1A1D27"/>
-                    </a:solidFill>
-                    <a:lnL w="6350" cap="flat">
-                      <a:solidFill>
-                        <a:srgbClr val="2E3348"/>
-                      </a:solidFill>
-                    </a:lnL>
-                    <a:lnR w="6350" cap="flat">
-                      <a:solidFill>
-                        <a:srgbClr val="2E3348"/>
-                      </a:solidFill>
-                    </a:lnR>
-                    <a:lnT w="6350" cap="flat">
-                      <a:solidFill>
-                        <a:srgbClr val="2E3348"/>
-                      </a:solidFill>
-                    </a:lnT>
-                    <a:lnB w="6350" cap="flat">
-                      <a:solidFill>
-                        <a:srgbClr val="2E3348"/>
-                      </a:solidFill>
-                    </a:lnB>
-                  </a:tcPr>
-                </a:tc>
-              </a:tr>
-              <a:tr h="420624">
-                <a:tc>
-                  <a:txBody>
-                    <a:bodyPr wrap="square"/>
-                    <a:lstStyle/>
-                    <a:p>
-                      <a:pPr algn="l"/>
-                      <a:r>
-                        <a:rPr sz="800" b="0">
-                          <a:solidFill>
-                            <a:srgbClr val="E2E8F0"/>
-                          </a:solidFill>
-                        </a:rPr>
-                        <a:t>Essential Cloud SIEM skills for SOC Analysts PM</a:t>
-                      </a:r>
-                    </a:p>
-                  </a:txBody>
-                  <a:tcPr>
-                    <a:solidFill>
-                      <a:srgbClr val="0F1117"/>
-                    </a:solidFill>
-                    <a:lnL w="6350" cap="flat">
-                      <a:solidFill>
-                        <a:srgbClr val="2E3348"/>
-                      </a:solidFill>
-                    </a:lnL>
-                    <a:lnR w="6350" cap="flat">
-                      <a:solidFill>
-                        <a:srgbClr val="2E3348"/>
-                      </a:solidFill>
-                    </a:lnR>
-                    <a:lnT w="6350" cap="flat">
-                      <a:solidFill>
-                        <a:srgbClr val="2E3348"/>
-                      </a:solidFill>
-                    </a:lnT>
-                    <a:lnB w="6350" cap="flat">
-                      <a:solidFill>
-                        <a:srgbClr val="2E3348"/>
-                      </a:solidFill>
-                    </a:lnB>
-                  </a:tcPr>
-                </a:tc>
-                <a:tc>
-                  <a:txBody>
-                    <a:bodyPr wrap="none"/>
-                    <a:lstStyle/>
-                    <a:p>
-                      <a:pPr algn="l"/>
-                      <a:r>
-                        <a:rPr sz="800" b="0">
-                          <a:solidFill>
-                            <a:srgbClr val="E2E8F0"/>
-                          </a:solidFill>
-                        </a:rPr>
-                        <a:t>Tue 14 Jul 2026  04:00 PM  →  05:30 PM</a:t>
-                      </a:r>
-                    </a:p>
-                  </a:txBody>
-                  <a:tcPr>
-                    <a:solidFill>
-                      <a:srgbClr val="0F1117"/>
-                    </a:solidFill>
-                    <a:lnL w="6350" cap="flat">
-                      <a:solidFill>
-                        <a:srgbClr val="2E3348"/>
-                      </a:solidFill>
-                    </a:lnL>
-                    <a:lnR w="6350" cap="flat">
-                      <a:solidFill>
-                        <a:srgbClr val="2E3348"/>
-                      </a:solidFill>
-                    </a:lnR>
-                    <a:lnT w="6350" cap="flat">
-                      <a:solidFill>
-                        <a:srgbClr val="2E3348"/>
-                      </a:solidFill>
-                    </a:lnT>
-                    <a:lnB w="6350" cap="flat">
-                      <a:solidFill>
-                        <a:srgbClr val="2E3348"/>
-                      </a:solidFill>
-                    </a:lnB>
-                  </a:tcPr>
-                </a:tc>
-                <a:tc>
-                  <a:txBody>
-                    <a:bodyPr wrap="none"/>
-                    <a:lstStyle/>
-                    <a:p>
-                      <a:pPr algn="l"/>
-                      <a:r>
-                        <a:rPr sz="800" b="0">
-                          <a:solidFill>
-                            <a:srgbClr val="E2E8F0"/>
-                          </a:solidFill>
-                        </a:rPr>
-                        <a:t>Wed 15 Jul 2026  11:00 AM</a:t>
-                      </a:r>
-                    </a:p>
-                  </a:txBody>
-                  <a:tcPr>
-                    <a:solidFill>
-                      <a:srgbClr val="0F1117"/>
-                    </a:solidFill>
-                    <a:lnL w="6350" cap="flat">
-                      <a:solidFill>
-                        <a:srgbClr val="2E3348"/>
-                      </a:solidFill>
-                    </a:lnL>
-                    <a:lnR w="6350" cap="flat">
-                      <a:solidFill>
-                        <a:srgbClr val="2E3348"/>
-                      </a:solidFill>
-                    </a:lnR>
-                    <a:lnT w="6350" cap="flat">
-                      <a:solidFill>
-                        <a:srgbClr val="2E3348"/>
-                      </a:solidFill>
-                    </a:lnT>
-                    <a:lnB w="6350" cap="flat">
-                      <a:solidFill>
-                        <a:srgbClr val="2E3348"/>
-                      </a:solidFill>
-                    </a:lnB>
-                  </a:tcPr>
-                </a:tc>
-                <a:tc>
-                  <a:txBody>
-                    <a:bodyPr wrap="none"/>
-                    <a:lstStyle/>
-                    <a:p>
-                      <a:pPr algn="l"/>
-                      <a:r>
-                        <a:rPr sz="800" b="0">
-                          <a:solidFill>
-                            <a:srgbClr val="E2E8F0"/>
-                          </a:solidFill>
-                        </a:rPr>
-                        <a:t>Wed 15 Jul 2026  09:00 AM</a:t>
-                      </a:r>
-                    </a:p>
-                  </a:txBody>
-                  <a:tcPr>
-                    <a:solidFill>
-                      <a:srgbClr val="0F1117"/>
-                    </a:solidFill>
-                    <a:lnL w="6350" cap="flat">
-                      <a:solidFill>
-                        <a:srgbClr val="2E3348"/>
-                      </a:solidFill>
-                    </a:lnL>
-                    <a:lnR w="6350" cap="flat">
-                      <a:solidFill>
-                        <a:srgbClr val="2E3348"/>
-                      </a:solidFill>
-                    </a:lnR>
-                    <a:lnT w="6350" cap="flat">
-                      <a:solidFill>
-                        <a:srgbClr val="2E3348"/>
-                      </a:solidFill>
-                    </a:lnT>
-                    <a:lnB w="6350" cap="flat">
-                      <a:solidFill>
-                        <a:srgbClr val="2E3348"/>
-                      </a:solidFill>
-                    </a:lnB>
-                  </a:tcPr>
-                </a:tc>
-                <a:tc>
-                  <a:txBody>
-                    <a:bodyPr wrap="none"/>
-                    <a:lstStyle/>
-                    <a:p>
-                      <a:pPr algn="l"/>
-                      <a:r>
-                        <a:rPr sz="800" b="0">
-                          <a:solidFill>
-                            <a:srgbClr val="E2E8F0"/>
-                          </a:solidFill>
-                        </a:rPr>
-                        <a:t>Wed 15 Jul 2026  07:00 AM</a:t>
-                      </a:r>
-                    </a:p>
-                  </a:txBody>
-                  <a:tcPr>
-                    <a:solidFill>
-                      <a:srgbClr val="0F1117"/>
-                    </a:solidFill>
-                    <a:lnL w="6350" cap="flat">
-                      <a:solidFill>
-                        <a:srgbClr val="2E3348"/>
-                      </a:solidFill>
-                    </a:lnL>
-                    <a:lnR w="6350" cap="flat">
-                      <a:solidFill>
-                        <a:srgbClr val="2E3348"/>
-                      </a:solidFill>
-                    </a:lnR>
-                    <a:lnT w="6350" cap="flat">
-                      <a:solidFill>
-                        <a:srgbClr val="2E3348"/>
-                      </a:solidFill>
-                    </a:lnT>
-                    <a:lnB w="6350" cap="flat">
-                      <a:solidFill>
-                        <a:srgbClr val="2E3348"/>
-                      </a:solidFill>
-                    </a:lnB>
-                  </a:tcPr>
-                </a:tc>
-                <a:tc>
-                  <a:txBody>
-                    <a:bodyPr wrap="square"/>
-                    <a:lstStyle/>
-                    <a:p>
-                      <a:pPr algn="l"/>
-                      <a:r>
-                        <a:rPr sz="700" b="0">
-                          <a:solidFill>
-                            <a:srgbClr val="E2E8F0"/>
-                          </a:solidFill>
-                        </a:rPr>
-                        <a:t>https://events.sumologic.com/esscloudsiem07142026-event-training</a:t>
-                      </a:r>
-                    </a:p>
-                  </a:txBody>
-                  <a:tcPr>
-                    <a:solidFill>
-                      <a:srgbClr val="0F1117"/>
-                    </a:solidFill>
-                    <a:lnL w="6350" cap="flat">
-                      <a:solidFill>
-                        <a:srgbClr val="2E3348"/>
-                      </a:solidFill>
-                    </a:lnL>
-                    <a:lnR w="6350" cap="flat">
-                      <a:solidFill>
-                        <a:srgbClr val="2E3348"/>
-                      </a:solidFill>
-                    </a:lnR>
-                    <a:lnT w="6350" cap="flat">
-                      <a:solidFill>
-                        <a:srgbClr val="2E3348"/>
-                      </a:solidFill>
-                    </a:lnT>
-                    <a:lnB w="6350" cap="flat">
-                      <a:solidFill>
-                        <a:srgbClr val="2E3348"/>
-                      </a:solidFill>
-                    </a:lnB>
-                  </a:tcPr>
-                </a:tc>
-              </a:tr>
-              <a:tr h="420624">
-                <a:tc>
-                  <a:txBody>
-                    <a:bodyPr wrap="square"/>
-                    <a:lstStyle/>
-                    <a:p>
-                      <a:pPr algn="l"/>
-                      <a:r>
-                        <a:rPr sz="800" b="0">
-                          <a:solidFill>
-                            <a:srgbClr val="E2E8F0"/>
-                          </a:solidFill>
-                        </a:rPr>
-                        <a:t>Cloud SIEM AM</a:t>
-                      </a:r>
-                    </a:p>
-                  </a:txBody>
-                  <a:tcPr>
-                    <a:solidFill>
-                      <a:srgbClr val="1A1D27"/>
-                    </a:solidFill>
-                    <a:lnL w="6350" cap="flat">
-                      <a:solidFill>
-                        <a:srgbClr val="2E3348"/>
-                      </a:solidFill>
-                    </a:lnL>
-                    <a:lnR w="6350" cap="flat">
-                      <a:solidFill>
-                        <a:srgbClr val="2E3348"/>
-                      </a:solidFill>
-                    </a:lnR>
-                    <a:lnT w="6350" cap="flat">
-                      <a:solidFill>
-                        <a:srgbClr val="2E3348"/>
-                      </a:solidFill>
-                    </a:lnT>
-                    <a:lnB w="6350" cap="flat">
-                      <a:solidFill>
-                        <a:srgbClr val="2E3348"/>
-                      </a:solidFill>
-                    </a:lnB>
-                  </a:tcPr>
-                </a:tc>
-                <a:tc>
-                  <a:txBody>
-                    <a:bodyPr wrap="none"/>
-                    <a:lstStyle/>
-                    <a:p>
-                      <a:pPr algn="l"/>
-                      <a:r>
-                        <a:rPr sz="800" b="0">
-                          <a:solidFill>
-                            <a:srgbClr val="E2E8F0"/>
-                          </a:solidFill>
-                        </a:rPr>
-                        <a:t>Wed 15 Jul 2026  07:00 AM  →  10:00 AM</a:t>
-                      </a:r>
-                    </a:p>
-                  </a:txBody>
-                  <a:tcPr>
-                    <a:solidFill>
-                      <a:srgbClr val="1A1D27"/>
-                    </a:solidFill>
-                    <a:lnL w="6350" cap="flat">
-                      <a:solidFill>
-                        <a:srgbClr val="2E3348"/>
-                      </a:solidFill>
-                    </a:lnL>
-                    <a:lnR w="6350" cap="flat">
-                      <a:solidFill>
-                        <a:srgbClr val="2E3348"/>
-                      </a:solidFill>
-                    </a:lnR>
-                    <a:lnT w="6350" cap="flat">
-                      <a:solidFill>
-                        <a:srgbClr val="2E3348"/>
-                      </a:solidFill>
-                    </a:lnT>
-                    <a:lnB w="6350" cap="flat">
-                      <a:solidFill>
-                        <a:srgbClr val="2E3348"/>
-                      </a:solidFill>
-                    </a:lnB>
-                  </a:tcPr>
-                </a:tc>
-                <a:tc>
-                  <a:txBody>
-                    <a:bodyPr wrap="none"/>
-                    <a:lstStyle/>
-                    <a:p>
-                      <a:pPr algn="l"/>
-                      <a:r>
-                        <a:rPr sz="800" b="0">
-                          <a:solidFill>
-                            <a:srgbClr val="E2E8F0"/>
-                          </a:solidFill>
-                        </a:rPr>
-                        <a:t>Thu 16 Jul 2026  02:00 AM</a:t>
-                      </a:r>
-                    </a:p>
-                  </a:txBody>
-                  <a:tcPr>
-                    <a:solidFill>
-                      <a:srgbClr val="1A1D27"/>
-                    </a:solidFill>
-                    <a:lnL w="6350" cap="flat">
-                      <a:solidFill>
-                        <a:srgbClr val="2E3348"/>
-                      </a:solidFill>
-                    </a:lnL>
-                    <a:lnR w="6350" cap="flat">
-                      <a:solidFill>
-                        <a:srgbClr val="2E3348"/>
-                      </a:solidFill>
-                    </a:lnR>
-                    <a:lnT w="6350" cap="flat">
-                      <a:solidFill>
-                        <a:srgbClr val="2E3348"/>
-                      </a:solidFill>
-                    </a:lnT>
-                    <a:lnB w="6350" cap="flat">
-                      <a:solidFill>
-                        <a:srgbClr val="2E3348"/>
-                      </a:solidFill>
-                    </a:lnB>
-                  </a:tcPr>
-                </a:tc>
-                <a:tc>
-                  <a:txBody>
-                    <a:bodyPr wrap="none"/>
-                    <a:lstStyle/>
-                    <a:p>
-                      <a:pPr algn="l"/>
-                      <a:r>
-                        <a:rPr sz="800" b="0">
-                          <a:solidFill>
-                            <a:srgbClr val="E2E8F0"/>
-                          </a:solidFill>
-                        </a:rPr>
-                        <a:t>Thu 16 Jul 2026  12:00 AM</a:t>
-                      </a:r>
-                    </a:p>
-                  </a:txBody>
-                  <a:tcPr>
-                    <a:solidFill>
-                      <a:srgbClr val="1A1D27"/>
-                    </a:solidFill>
-                    <a:lnL w="6350" cap="flat">
-                      <a:solidFill>
-                        <a:srgbClr val="2E3348"/>
-                      </a:solidFill>
-                    </a:lnL>
-                    <a:lnR w="6350" cap="flat">
-                      <a:solidFill>
-                        <a:srgbClr val="2E3348"/>
-                      </a:solidFill>
-                    </a:lnR>
-                    <a:lnT w="6350" cap="flat">
-                      <a:solidFill>
-                        <a:srgbClr val="2E3348"/>
-                      </a:solidFill>
-                    </a:lnT>
-                    <a:lnB w="6350" cap="flat">
-                      <a:solidFill>
-                        <a:srgbClr val="2E3348"/>
-                      </a:solidFill>
-                    </a:lnB>
-                  </a:tcPr>
-                </a:tc>
-                <a:tc>
-                  <a:txBody>
-                    <a:bodyPr wrap="none"/>
-                    <a:lstStyle/>
-                    <a:p>
-                      <a:pPr algn="l"/>
-                      <a:r>
-                        <a:rPr sz="800" b="0">
-                          <a:solidFill>
-                            <a:srgbClr val="E2E8F0"/>
-                          </a:solidFill>
-                        </a:rPr>
-                        <a:t>Wed 15 Jul 2026  10:00 PM</a:t>
-                      </a:r>
-                    </a:p>
-                  </a:txBody>
-                  <a:tcPr>
-                    <a:solidFill>
-                      <a:srgbClr val="1A1D27"/>
-                    </a:solidFill>
-                    <a:lnL w="6350" cap="flat">
-                      <a:solidFill>
-                        <a:srgbClr val="2E3348"/>
-                      </a:solidFill>
-                    </a:lnL>
-                    <a:lnR w="6350" cap="flat">
-                      <a:solidFill>
-                        <a:srgbClr val="2E3348"/>
-                      </a:solidFill>
-                    </a:lnR>
-                    <a:lnT w="6350" cap="flat">
-                      <a:solidFill>
-                        <a:srgbClr val="2E3348"/>
-                      </a:solidFill>
-                    </a:lnT>
-                    <a:lnB w="6350" cap="flat">
-                      <a:solidFill>
-                        <a:srgbClr val="2E3348"/>
-                      </a:solidFill>
-                    </a:lnB>
-                  </a:tcPr>
-                </a:tc>
-                <a:tc>
-                  <a:txBody>
-                    <a:bodyPr wrap="square"/>
-                    <a:lstStyle/>
-                    <a:p>
-                      <a:pPr algn="l"/>
-                      <a:r>
-                        <a:rPr sz="700" b="0">
-                          <a:solidFill>
-                            <a:srgbClr val="E2E8F0"/>
-                          </a:solidFill>
-                        </a:rPr>
-                        <a:t>https://events.sumologic.com/cloudsiemam07152026-event-training</a:t>
-                      </a:r>
-                    </a:p>
-                  </a:txBody>
-                  <a:tcPr>
-                    <a:solidFill>
-                      <a:srgbClr val="1A1D27"/>
-                    </a:solidFill>
-                    <a:lnL w="6350" cap="flat">
-                      <a:solidFill>
-                        <a:srgbClr val="2E3348"/>
-                      </a:solidFill>
-                    </a:lnL>
-                    <a:lnR w="6350" cap="flat">
-                      <a:solidFill>
-                        <a:srgbClr val="2E3348"/>
-                      </a:solidFill>
-                    </a:lnR>
-                    <a:lnT w="6350" cap="flat">
-                      <a:solidFill>
-                        <a:srgbClr val="2E3348"/>
-                      </a:solidFill>
-                    </a:lnT>
-                    <a:lnB w="6350" cap="flat">
-                      <a:solidFill>
-                        <a:srgbClr val="2E3348"/>
-                      </a:solidFill>
-                    </a:lnB>
-                  </a:tcPr>
-                </a:tc>
-              </a:tr>
-              <a:tr h="420624">
-                <a:tc>
-                  <a:txBody>
-                    <a:bodyPr wrap="square"/>
-                    <a:lstStyle/>
-                    <a:p>
-                      <a:pPr algn="l"/>
-                      <a:r>
-                        <a:rPr sz="800" b="0">
-                          <a:solidFill>
-                            <a:srgbClr val="E2E8F0"/>
-                          </a:solidFill>
-                        </a:rPr>
-                        <a:t>Cloud SIEM PM</a:t>
-                      </a:r>
-                    </a:p>
-                  </a:txBody>
-                  <a:tcPr>
-                    <a:solidFill>
-                      <a:srgbClr val="0F1117"/>
-                    </a:solidFill>
-                    <a:lnL w="6350" cap="flat">
-                      <a:solidFill>
-                        <a:srgbClr val="2E3348"/>
-                      </a:solidFill>
-                    </a:lnL>
-                    <a:lnR w="6350" cap="flat">
-                      <a:solidFill>
-                        <a:srgbClr val="2E3348"/>
-                      </a:solidFill>
-                    </a:lnR>
-                    <a:lnT w="6350" cap="flat">
-                      <a:solidFill>
-                        <a:srgbClr val="2E3348"/>
-                      </a:solidFill>
-                    </a:lnT>
-                    <a:lnB w="6350" cap="flat">
-                      <a:solidFill>
-                        <a:srgbClr val="2E3348"/>
-                      </a:solidFill>
-                    </a:lnB>
-                  </a:tcPr>
-                </a:tc>
-                <a:tc>
-                  <a:txBody>
-                    <a:bodyPr wrap="none"/>
-                    <a:lstStyle/>
-                    <a:p>
-                      <a:pPr algn="l"/>
-                      <a:r>
-                        <a:rPr sz="800" b="0">
-                          <a:solidFill>
-                            <a:srgbClr val="E2E8F0"/>
-                          </a:solidFill>
-                        </a:rPr>
-                        <a:t>Wed 15 Jul 2026  04:00 PM  →  07:00 PM</a:t>
-                      </a:r>
-                    </a:p>
-                  </a:txBody>
-                  <a:tcPr>
-                    <a:solidFill>
-                      <a:srgbClr val="0F1117"/>
-                    </a:solidFill>
-                    <a:lnL w="6350" cap="flat">
-                      <a:solidFill>
-                        <a:srgbClr val="2E3348"/>
-                      </a:solidFill>
-                    </a:lnL>
-                    <a:lnR w="6350" cap="flat">
-                      <a:solidFill>
-                        <a:srgbClr val="2E3348"/>
-                      </a:solidFill>
-                    </a:lnR>
-                    <a:lnT w="6350" cap="flat">
-                      <a:solidFill>
-                        <a:srgbClr val="2E3348"/>
-                      </a:solidFill>
-                    </a:lnT>
-                    <a:lnB w="6350" cap="flat">
-                      <a:solidFill>
-                        <a:srgbClr val="2E3348"/>
-                      </a:solidFill>
-                    </a:lnB>
-                  </a:tcPr>
-                </a:tc>
-                <a:tc>
-                  <a:txBody>
-                    <a:bodyPr wrap="none"/>
-                    <a:lstStyle/>
-                    <a:p>
-                      <a:pPr algn="l"/>
-                      <a:r>
-                        <a:rPr sz="800" b="0">
-                          <a:solidFill>
-                            <a:srgbClr val="E2E8F0"/>
-                          </a:solidFill>
-                        </a:rPr>
-                        <a:t>Thu 16 Jul 2026  11:00 AM</a:t>
-                      </a:r>
-                    </a:p>
-                  </a:txBody>
-                  <a:tcPr>
-                    <a:solidFill>
-                      <a:srgbClr val="0F1117"/>
-                    </a:solidFill>
-                    <a:lnL w="6350" cap="flat">
-                      <a:solidFill>
-                        <a:srgbClr val="2E3348"/>
-                      </a:solidFill>
-                    </a:lnL>
-                    <a:lnR w="6350" cap="flat">
-                      <a:solidFill>
-                        <a:srgbClr val="2E3348"/>
-                      </a:solidFill>
-                    </a:lnR>
-                    <a:lnT w="6350" cap="flat">
-                      <a:solidFill>
-                        <a:srgbClr val="2E3348"/>
-                      </a:solidFill>
-                    </a:lnT>
-                    <a:lnB w="6350" cap="flat">
-                      <a:solidFill>
-                        <a:srgbClr val="2E3348"/>
-                      </a:solidFill>
-                    </a:lnB>
-                  </a:tcPr>
-                </a:tc>
-                <a:tc>
-                  <a:txBody>
-                    <a:bodyPr wrap="none"/>
-                    <a:lstStyle/>
-                    <a:p>
-                      <a:pPr algn="l"/>
-                      <a:r>
-                        <a:rPr sz="800" b="0">
-                          <a:solidFill>
-                            <a:srgbClr val="E2E8F0"/>
-                          </a:solidFill>
-                        </a:rPr>
-                        <a:t>Thu 16 Jul 2026  09:00 AM</a:t>
-                      </a:r>
-                    </a:p>
-                  </a:txBody>
-                  <a:tcPr>
-                    <a:solidFill>
-                      <a:srgbClr val="0F1117"/>
-                    </a:solidFill>
-                    <a:lnL w="6350" cap="flat">
-                      <a:solidFill>
-                        <a:srgbClr val="2E3348"/>
-                      </a:solidFill>
-                    </a:lnL>
-                    <a:lnR w="6350" cap="flat">
-                      <a:solidFill>
-                        <a:srgbClr val="2E3348"/>
-                      </a:solidFill>
-                    </a:lnR>
-                    <a:lnT w="6350" cap="flat">
-                      <a:solidFill>
-                        <a:srgbClr val="2E3348"/>
-                      </a:solidFill>
-                    </a:lnT>
-                    <a:lnB w="6350" cap="flat">
-                      <a:solidFill>
-                        <a:srgbClr val="2E3348"/>
-                      </a:solidFill>
-                    </a:lnB>
-                  </a:tcPr>
-                </a:tc>
-                <a:tc>
-                  <a:txBody>
-                    <a:bodyPr wrap="none"/>
-                    <a:lstStyle/>
-                    <a:p>
-                      <a:pPr algn="l"/>
-                      <a:r>
-                        <a:rPr sz="800" b="0">
-                          <a:solidFill>
-                            <a:srgbClr val="E2E8F0"/>
-                          </a:solidFill>
-                        </a:rPr>
-                        <a:t>Thu 16 Jul 2026  07:00 AM</a:t>
-                      </a:r>
-                    </a:p>
-                  </a:txBody>
-                  <a:tcPr>
-                    <a:solidFill>
-                      <a:srgbClr val="0F1117"/>
-                    </a:solidFill>
-                    <a:lnL w="6350" cap="flat">
-                      <a:solidFill>
-                        <a:srgbClr val="2E3348"/>
-                      </a:solidFill>
-                    </a:lnL>
-                    <a:lnR w="6350" cap="flat">
-                      <a:solidFill>
-                        <a:srgbClr val="2E3348"/>
-                      </a:solidFill>
-                    </a:lnR>
-                    <a:lnT w="6350" cap="flat">
-                      <a:solidFill>
-                        <a:srgbClr val="2E3348"/>
-                      </a:solidFill>
-                    </a:lnT>
-                    <a:lnB w="6350" cap="flat">
-                      <a:solidFill>
-                        <a:srgbClr val="2E3348"/>
-                      </a:solidFill>
-                    </a:lnB>
-                  </a:tcPr>
-                </a:tc>
-                <a:tc>
-                  <a:txBody>
-                    <a:bodyPr wrap="square"/>
-                    <a:lstStyle/>
-                    <a:p>
-                      <a:pPr algn="l"/>
-                      <a:r>
-                        <a:rPr sz="700" b="0">
-                          <a:solidFill>
-                            <a:srgbClr val="E2E8F0"/>
-                          </a:solidFill>
-                        </a:rPr>
-                        <a:t>https://events.sumologic.com/cloudsiempm07152026-event-training</a:t>
-                      </a:r>
-                    </a:p>
-                  </a:txBody>
-                  <a:tcPr>
-                    <a:solidFill>
-                      <a:srgbClr val="0F1117"/>
-                    </a:solidFill>
-                    <a:lnL w="6350" cap="flat">
-                      <a:solidFill>
-                        <a:srgbClr val="2E3348"/>
-                      </a:solidFill>
-                    </a:lnL>
-                    <a:lnR w="6350" cap="flat">
-                      <a:solidFill>
-                        <a:srgbClr val="2E3348"/>
-                      </a:solidFill>
-                    </a:lnR>
-                    <a:lnT w="6350" cap="flat">
-                      <a:solidFill>
-                        <a:srgbClr val="2E3348"/>
-                      </a:solidFill>
-                    </a:lnT>
-                    <a:lnB w="6350" cap="flat">
-                      <a:solidFill>
-                        <a:srgbClr val="2E3348"/>
-                      </a:solidFill>
-                    </a:lnB>
-                  </a:tcPr>
-                </a:tc>
-              </a:tr>
-              <a:tr h="420624">
-                <a:tc>
-                  <a:txBody>
-                    <a:bodyPr wrap="square"/>
-                    <a:lstStyle/>
-                    <a:p>
-                      <a:pPr algn="l"/>
-                      <a:r>
-                        <a:rPr sz="800" b="0">
-                          <a:solidFill>
-                            <a:srgbClr val="E2E8F0"/>
-                          </a:solidFill>
-                        </a:rPr>
-                        <a:t>Automation AM</a:t>
-                      </a:r>
-                    </a:p>
-                  </a:txBody>
-                  <a:tcPr>
-                    <a:solidFill>
-                      <a:srgbClr val="1A1D27"/>
-                    </a:solidFill>
-                    <a:lnL w="6350" cap="flat">
-                      <a:solidFill>
-                        <a:srgbClr val="2E3348"/>
-                      </a:solidFill>
-                    </a:lnL>
-                    <a:lnR w="6350" cap="flat">
-                      <a:solidFill>
-                        <a:srgbClr val="2E3348"/>
-                      </a:solidFill>
-                    </a:lnR>
-                    <a:lnT w="6350" cap="flat">
-                      <a:solidFill>
-                        <a:srgbClr val="2E3348"/>
-                      </a:solidFill>
-                    </a:lnT>
-                    <a:lnB w="6350" cap="flat">
-                      <a:solidFill>
-                        <a:srgbClr val="2E3348"/>
-                      </a:solidFill>
-                    </a:lnB>
-                  </a:tcPr>
-                </a:tc>
-                <a:tc>
-                  <a:txBody>
-                    <a:bodyPr wrap="none"/>
-                    <a:lstStyle/>
-                    <a:p>
-                      <a:pPr algn="l"/>
-                      <a:r>
-                        <a:rPr sz="800" b="0">
-                          <a:solidFill>
-                            <a:srgbClr val="E2E8F0"/>
-                          </a:solidFill>
-                        </a:rPr>
-                        <a:t>Thu 16 Jul 2026  07:00 AM  →  08:30 AM</a:t>
-                      </a:r>
-                    </a:p>
-                  </a:txBody>
-                  <a:tcPr>
-                    <a:solidFill>
-                      <a:srgbClr val="1A1D27"/>
-                    </a:solidFill>
-                    <a:lnL w="6350" cap="flat">
-                      <a:solidFill>
-                        <a:srgbClr val="2E3348"/>
-                      </a:solidFill>
-                    </a:lnL>
-                    <a:lnR w="6350" cap="flat">
-                      <a:solidFill>
-                        <a:srgbClr val="2E3348"/>
-                      </a:solidFill>
-                    </a:lnR>
-                    <a:lnT w="6350" cap="flat">
-                      <a:solidFill>
-                        <a:srgbClr val="2E3348"/>
-                      </a:solidFill>
-                    </a:lnT>
-                    <a:lnB w="6350" cap="flat">
-                      <a:solidFill>
-                        <a:srgbClr val="2E3348"/>
-                      </a:solidFill>
-                    </a:lnB>
-                  </a:tcPr>
-                </a:tc>
-                <a:tc>
-                  <a:txBody>
-                    <a:bodyPr wrap="none"/>
-                    <a:lstStyle/>
-                    <a:p>
-                      <a:pPr algn="l"/>
-                      <a:r>
-                        <a:rPr sz="800" b="0">
-                          <a:solidFill>
-                            <a:srgbClr val="E2E8F0"/>
-                          </a:solidFill>
-                        </a:rPr>
-                        <a:t>Fri 17 Jul 2026  02:00 AM</a:t>
-                      </a:r>
-                    </a:p>
-                  </a:txBody>
-                  <a:tcPr>
-                    <a:solidFill>
-                      <a:srgbClr val="1A1D27"/>
-                    </a:solidFill>
-                    <a:lnL w="6350" cap="flat">
-                      <a:solidFill>
-                        <a:srgbClr val="2E3348"/>
-                      </a:solidFill>
-                    </a:lnL>
-                    <a:lnR w="6350" cap="flat">
-                      <a:solidFill>
-                        <a:srgbClr val="2E3348"/>
-                      </a:solidFill>
-                    </a:lnR>
-                    <a:lnT w="6350" cap="flat">
-                      <a:solidFill>
-                        <a:srgbClr val="2E3348"/>
-                      </a:solidFill>
-                    </a:lnT>
-                    <a:lnB w="6350" cap="flat">
-                      <a:solidFill>
-                        <a:srgbClr val="2E3348"/>
-                      </a:solidFill>
-                    </a:lnB>
-                  </a:tcPr>
-                </a:tc>
-                <a:tc>
-                  <a:txBody>
-                    <a:bodyPr wrap="none"/>
-                    <a:lstStyle/>
-                    <a:p>
-                      <a:pPr algn="l"/>
-                      <a:r>
-                        <a:rPr sz="800" b="0">
-                          <a:solidFill>
-                            <a:srgbClr val="E2E8F0"/>
-                          </a:solidFill>
-                        </a:rPr>
-                        <a:t>Fri 17 Jul 2026  12:00 AM</a:t>
-                      </a:r>
-                    </a:p>
-                  </a:txBody>
-                  <a:tcPr>
-                    <a:solidFill>
-                      <a:srgbClr val="1A1D27"/>
-                    </a:solidFill>
-                    <a:lnL w="6350" cap="flat">
-                      <a:solidFill>
-                        <a:srgbClr val="2E3348"/>
-                      </a:solidFill>
-                    </a:lnL>
-                    <a:lnR w="6350" cap="flat">
-                      <a:solidFill>
-                        <a:srgbClr val="2E3348"/>
-                      </a:solidFill>
-                    </a:lnR>
-                    <a:lnT w="6350" cap="flat">
-                      <a:solidFill>
-                        <a:srgbClr val="2E3348"/>
-                      </a:solidFill>
-                    </a:lnT>
-                    <a:lnB w="6350" cap="flat">
-                      <a:solidFill>
-                        <a:srgbClr val="2E3348"/>
-                      </a:solidFill>
-                    </a:lnB>
-                  </a:tcPr>
-                </a:tc>
-                <a:tc>
-                  <a:txBody>
-                    <a:bodyPr wrap="none"/>
-                    <a:lstStyle/>
-                    <a:p>
-                      <a:pPr algn="l"/>
-                      <a:r>
-                        <a:rPr sz="800" b="0">
-                          <a:solidFill>
-                            <a:srgbClr val="E2E8F0"/>
-                          </a:solidFill>
-                        </a:rPr>
-                        <a:t>Thu 16 Jul 2026  10:00 PM</a:t>
-                      </a:r>
-                    </a:p>
-                  </a:txBody>
-                  <a:tcPr>
-                    <a:solidFill>
-                      <a:srgbClr val="1A1D27"/>
-                    </a:solidFill>
-                    <a:lnL w="6350" cap="flat">
-                      <a:solidFill>
-                        <a:srgbClr val="2E3348"/>
-                      </a:solidFill>
-                    </a:lnL>
-                    <a:lnR w="6350" cap="flat">
-                      <a:solidFill>
-                        <a:srgbClr val="2E3348"/>
-                      </a:solidFill>
-                    </a:lnR>
-                    <a:lnT w="6350" cap="flat">
-                      <a:solidFill>
-                        <a:srgbClr val="2E3348"/>
-                      </a:solidFill>
-                    </a:lnT>
-                    <a:lnB w="6350" cap="flat">
-                      <a:solidFill>
-                        <a:srgbClr val="2E3348"/>
-                      </a:solidFill>
-                    </a:lnB>
-                  </a:tcPr>
-                </a:tc>
-                <a:tc>
-                  <a:txBody>
-                    <a:bodyPr wrap="square"/>
-                    <a:lstStyle/>
-                    <a:p>
-                      <a:pPr algn="l"/>
-                      <a:r>
-                        <a:rPr sz="700" b="0">
-                          <a:solidFill>
-                            <a:srgbClr val="E2E8F0"/>
-                          </a:solidFill>
-                        </a:rPr>
-                        <a:t>https://events.sumologic.com/automationam07162026-event-training</a:t>
-                      </a:r>
-                    </a:p>
-                  </a:txBody>
-                  <a:tcPr>
-                    <a:solidFill>
-                      <a:srgbClr val="1A1D27"/>
-                    </a:solidFill>
-                    <a:lnL w="6350" cap="flat">
-                      <a:solidFill>
-                        <a:srgbClr val="2E3348"/>
-                      </a:solidFill>
-                    </a:lnL>
-                    <a:lnR w="6350" cap="flat">
-                      <a:solidFill>
-                        <a:srgbClr val="2E3348"/>
-                      </a:solidFill>
-                    </a:lnR>
-                    <a:lnT w="6350" cap="flat">
-                      <a:solidFill>
-                        <a:srgbClr val="2E3348"/>
-                      </a:solidFill>
-                    </a:lnT>
-                    <a:lnB w="6350" cap="flat">
-                      <a:solidFill>
-                        <a:srgbClr val="2E3348"/>
-                      </a:solidFill>
-                    </a:lnB>
-                  </a:tcPr>
-                </a:tc>
-              </a:tr>
-            </a:tbl>
-          </a:graphicData>
-        </a:graphic>
-      </p:graphicFrame>
-      <p:sp>
-        <p:nvSpPr>
-          <p:cNvPr id="7" name="TextBox 6"/>
-          <p:cNvSpPr txBox="1"/>
-          <p:nvPr/>
-        </p:nvSpPr>
-        <p:spPr>
-          <a:xfrm>
-            <a:off x="164592" y="5266944"/>
-            <a:ext cx="11795760" cy="274320"/>
-          </a:xfrm>
-          <a:prstGeom prst="rect">
-            <a:avLst/>
-          </a:prstGeom>
-          <a:noFill/>
-        </p:spPr>
-        <p:txBody>
-          <a:bodyPr wrap="none">
-            <a:spAutoFit/>
-          </a:bodyPr>
-          <a:lstStyle/>
-          <a:p>
-            <a:r>
-              <a:rPr sz="700" i="1">
-                <a:solidFill>
-                  <a:srgbClr val="94A3B8"/>
-                </a:solidFill>
-              </a:rPr>
-              <a:t>Register links are live URLs — click to open in browser.  All times shown as start time; PT column also shows end time.</a:t>
-            </a:r>
-          </a:p>
-        </p:txBody>
-      </p:sp>
-    </p:spTree>
-  </p:cSld>
-  <p:clrMapOvr>
-    <a:masterClrMapping/>
-  </p:clrMapOvr>
-</p:sld>
-</file>
-
-<file path=ppt/slides/slide7.xml><?xml version="1.0" encoding="utf-8"?>
-<p:sld xmlns:a="http://schemas.openxmlformats.org/drawingml/2006/main" xmlns:p="http://schemas.openxmlformats.org/presentationml/2006/main" xmlns:r="http://schemas.openxmlformats.org/officeDocument/2006/relationships">
-  <p:cSld>
-    <p:spTree>
-      <p:nvGrpSpPr>
-        <p:cNvPr id="1" name=""/>
-        <p:cNvGrpSpPr/>
-        <p:nvPr/>
-      </p:nvGrpSpPr>
-      <p:grpSpPr/>
-      <p:sp>
-        <p:nvSpPr>
-          <p:cNvPr id="2" name="Rectangle 1"/>
-          <p:cNvSpPr/>
-          <p:nvPr/>
-        </p:nvSpPr>
-        <p:spPr>
-          <a:xfrm>
-            <a:off x="0" y="0"/>
-            <a:ext cx="12188952" cy="6858000"/>
-          </a:xfrm>
-          <a:prstGeom prst="rect">
-            <a:avLst/>
-          </a:prstGeom>
-          <a:solidFill>
-            <a:srgbClr val="0F1117"/>
-          </a:solidFill>
-          <a:ln>
-            <a:noFill/>
-          </a:ln>
-        </p:spPr>
-        <p:style>
-          <a:lnRef idx="1">
-            <a:schemeClr val="accent1"/>
-          </a:lnRef>
-          <a:fillRef idx="3">
-            <a:schemeClr val="accent1"/>
-          </a:fillRef>
-          <a:effectRef idx="2">
-            <a:schemeClr val="accent1"/>
-          </a:effectRef>
-          <a:fontRef idx="minor">
-            <a:schemeClr val="lt1"/>
-          </a:fontRef>
-        </p:style>
-        <p:txBody>
-          <a:bodyPr rtlCol="0" anchor="ctr"/>
-          <a:lstStyle/>
-          <a:p>
-            <a:pPr algn="ctr"/>
-          </a:p>
-        </p:txBody>
-      </p:sp>
-      <p:sp>
-        <p:nvSpPr>
-          <p:cNvPr id="3" name="Rectangle 2"/>
-          <p:cNvSpPr/>
-          <p:nvPr/>
-        </p:nvSpPr>
-        <p:spPr>
-          <a:xfrm>
-            <a:off x="0" y="0"/>
-            <a:ext cx="12188952" cy="548640"/>
-          </a:xfrm>
-          <a:prstGeom prst="rect">
-            <a:avLst/>
-          </a:prstGeom>
-          <a:solidFill>
-            <a:srgbClr val="1A1D27"/>
-          </a:solidFill>
-          <a:ln>
-            <a:noFill/>
-          </a:ln>
-        </p:spPr>
-        <p:style>
-          <a:lnRef idx="1">
-            <a:schemeClr val="accent1"/>
-          </a:lnRef>
-          <a:fillRef idx="3">
-            <a:schemeClr val="accent1"/>
-          </a:fillRef>
-          <a:effectRef idx="2">
-            <a:schemeClr val="accent1"/>
-          </a:effectRef>
-          <a:fontRef idx="minor">
-            <a:schemeClr val="lt1"/>
-          </a:fontRef>
-        </p:style>
-        <p:txBody>
-          <a:bodyPr rtlCol="0" anchor="ctr"/>
-          <a:lstStyle/>
-          <a:p>
-            <a:pPr algn="ctr"/>
-          </a:p>
-        </p:txBody>
-      </p:sp>
-      <p:sp>
-        <p:nvSpPr>
-          <p:cNvPr id="4" name="TextBox 3"/>
-          <p:cNvSpPr txBox="1"/>
-          <p:nvPr/>
-        </p:nvSpPr>
-        <p:spPr>
-          <a:xfrm>
-            <a:off x="164592" y="73152"/>
-            <a:ext cx="8229600" cy="420624"/>
-          </a:xfrm>
-          <a:prstGeom prst="rect">
-            <a:avLst/>
-          </a:prstGeom>
-          <a:noFill/>
-        </p:spPr>
-        <p:txBody>
-          <a:bodyPr wrap="none">
-            <a:spAutoFit/>
-          </a:bodyPr>
-          <a:lstStyle/>
-          <a:p>
-            <a:r>
-              <a:rPr sz="1300" b="1">
-                <a:solidFill>
-                  <a:srgbClr val="00B4D8"/>
-                </a:solidFill>
-              </a:rPr>
-              <a:t>Sumo Logic — Virtual Training Schedule   ·   16 Jul – 16 Jul 2026   (7/7)</a:t>
-            </a:r>
-          </a:p>
-        </p:txBody>
-      </p:sp>
-      <p:sp>
-        <p:nvSpPr>
-          <p:cNvPr id="5" name="TextBox 4"/>
-          <p:cNvSpPr txBox="1"/>
-          <p:nvPr/>
-        </p:nvSpPr>
-        <p:spPr>
-          <a:xfrm>
-            <a:off x="10908792" y="73152"/>
-            <a:ext cx="1097280" cy="420624"/>
-          </a:xfrm>
-          <a:prstGeom prst="rect">
-            <a:avLst/>
-          </a:prstGeom>
-          <a:noFill/>
-        </p:spPr>
-        <p:txBody>
-          <a:bodyPr wrap="none">
-            <a:spAutoFit/>
-          </a:bodyPr>
-          <a:lstStyle/>
-          <a:p>
-            <a:pPr algn="r"/>
-            <a:r>
-              <a:rPr sz="900">
-                <a:solidFill>
-                  <a:srgbClr val="94A3B8"/>
-                </a:solidFill>
-              </a:rPr>
-              <a:t>p 7/7</a:t>
-            </a:r>
-          </a:p>
-        </p:txBody>
-      </p:sp>
-      <p:graphicFrame>
-        <p:nvGraphicFramePr>
-          <p:cNvPr id="6" name="Table 5"/>
-          <p:cNvGraphicFramePr>
-            <a:graphicFrameLocks noGrp="1"/>
-          </p:cNvGraphicFramePr>
-          <p:nvPr/>
-        </p:nvGraphicFramePr>
-        <p:xfrm>
-          <a:off x="164592" y="640080"/>
-          <a:ext cx="11795760" cy="731520"/>
-        </p:xfrm>
-        <a:graphic>
-          <a:graphicData uri="http://schemas.openxmlformats.org/drawingml/2006/table">
-            <a:tbl>
-              <a:tblPr firstRow="1" bandRow="1">
-                <a:tableStyleId>{5C22544A-7EE6-4342-B048-85BDC9FD1C3A}</a:tableStyleId>
-              </a:tblPr>
-              <a:tblGrid>
-                <a:gridCol w="2286000"/>
-                <a:gridCol w="1920240"/>
-                <a:gridCol w="1920240"/>
-                <a:gridCol w="1920240"/>
-                <a:gridCol w="1920240"/>
-                <a:gridCol w="1828800"/>
-              </a:tblGrid>
-              <a:tr h="310896">
-                <a:tc>
-                  <a:txBody>
-                    <a:bodyPr wrap="square"/>
-                    <a:lstStyle/>
-                    <a:p>
-                      <a:pPr algn="ctr"/>
-                      <a:r>
-                        <a:rPr sz="900" b="1">
-                          <a:solidFill>
-                            <a:srgbClr val="00B4D8"/>
-                          </a:solidFill>
-                        </a:rPr>
-                        <a:t>Course</a:t>
-                      </a:r>
-                    </a:p>
-                  </a:txBody>
-                  <a:tcPr>
-                    <a:solidFill>
-                      <a:srgbClr val="1A1D27"/>
-                    </a:solidFill>
-                    <a:lnL w="6350" cap="flat">
-                      <a:solidFill>
-                        <a:srgbClr val="2E3348"/>
-                      </a:solidFill>
-                    </a:lnL>
-                    <a:lnR w="6350" cap="flat">
-                      <a:solidFill>
-                        <a:srgbClr val="2E3348"/>
-                      </a:solidFill>
-                    </a:lnR>
-                    <a:lnT w="6350" cap="flat">
-                      <a:solidFill>
-                        <a:srgbClr val="2E3348"/>
-                      </a:solidFill>
-                    </a:lnT>
-                    <a:lnB w="6350" cap="flat">
-                      <a:solidFill>
-                        <a:srgbClr val="2E3348"/>
-                      </a:solidFill>
-                    </a:lnB>
-                  </a:tcPr>
-                </a:tc>
-                <a:tc>
-                  <a:txBody>
-                    <a:bodyPr wrap="square"/>
-                    <a:lstStyle/>
-                    <a:p>
-                      <a:pPr algn="ctr"/>
-                      <a:r>
-                        <a:rPr sz="900" b="1">
-                          <a:solidFill>
-                            <a:srgbClr val="00B4D8"/>
-                          </a:solidFill>
-                        </a:rPr>
-                        <a:t>PT  (Los Angeles)</a:t>
-                      </a:r>
-                    </a:p>
-                  </a:txBody>
-                  <a:tcPr>
-                    <a:solidFill>
-                      <a:srgbClr val="1A1D27"/>
-                    </a:solidFill>
-                    <a:lnL w="6350" cap="flat">
-                      <a:solidFill>
-                        <a:srgbClr val="2E3348"/>
-                      </a:solidFill>
-                    </a:lnL>
-                    <a:lnR w="6350" cap="flat">
-                      <a:solidFill>
-                        <a:srgbClr val="2E3348"/>
-                      </a:solidFill>
-                    </a:lnR>
-                    <a:lnT w="6350" cap="flat">
-                      <a:solidFill>
-                        <a:srgbClr val="2E3348"/>
-                      </a:solidFill>
-                    </a:lnT>
-                    <a:lnB w="6350" cap="flat">
-                      <a:solidFill>
-                        <a:srgbClr val="2E3348"/>
-                      </a:solidFill>
-                    </a:lnB>
-                  </a:tcPr>
-                </a:tc>
-                <a:tc>
-                  <a:txBody>
-                    <a:bodyPr wrap="square"/>
-                    <a:lstStyle/>
-                    <a:p>
-                      <a:pPr algn="ctr"/>
-                      <a:r>
-                        <a:rPr sz="900" b="1">
-                          <a:solidFill>
-                            <a:srgbClr val="00B4D8"/>
-                          </a:solidFill>
-                        </a:rPr>
-                        <a:t>NZ  (Auckland)</a:t>
-                      </a:r>
-                    </a:p>
-                  </a:txBody>
-                  <a:tcPr>
-                    <a:solidFill>
-                      <a:srgbClr val="1A1D27"/>
-                    </a:solidFill>
-                    <a:lnL w="6350" cap="flat">
-                      <a:solidFill>
-                        <a:srgbClr val="2E3348"/>
-                      </a:solidFill>
-                    </a:lnL>
-                    <a:lnR w="6350" cap="flat">
-                      <a:solidFill>
-                        <a:srgbClr val="2E3348"/>
-                      </a:solidFill>
-                    </a:lnR>
-                    <a:lnT w="6350" cap="flat">
-                      <a:solidFill>
-                        <a:srgbClr val="2E3348"/>
-                      </a:solidFill>
-                    </a:lnT>
-                    <a:lnB w="6350" cap="flat">
-                      <a:solidFill>
-                        <a:srgbClr val="2E3348"/>
-                      </a:solidFill>
-                    </a:lnB>
-                  </a:tcPr>
-                </a:tc>
-                <a:tc>
-                  <a:txBody>
-                    <a:bodyPr wrap="square"/>
-                    <a:lstStyle/>
-                    <a:p>
-                      <a:pPr algn="ctr"/>
-                      <a:r>
-                        <a:rPr sz="900" b="1">
-                          <a:solidFill>
-                            <a:srgbClr val="00B4D8"/>
-                          </a:solidFill>
-                        </a:rPr>
-                        <a:t>AET  (Sydney)</a:t>
-                      </a:r>
-                    </a:p>
-                  </a:txBody>
-                  <a:tcPr>
-                    <a:solidFill>
-                      <a:srgbClr val="1A1D27"/>
-                    </a:solidFill>
-                    <a:lnL w="6350" cap="flat">
-                      <a:solidFill>
-                        <a:srgbClr val="2E3348"/>
-                      </a:solidFill>
-                    </a:lnL>
-                    <a:lnR w="6350" cap="flat">
-                      <a:solidFill>
-                        <a:srgbClr val="2E3348"/>
-                      </a:solidFill>
-                    </a:lnR>
-                    <a:lnT w="6350" cap="flat">
-                      <a:solidFill>
-                        <a:srgbClr val="2E3348"/>
-                      </a:solidFill>
-                    </a:lnT>
-                    <a:lnB w="6350" cap="flat">
-                      <a:solidFill>
-                        <a:srgbClr val="2E3348"/>
-                      </a:solidFill>
-                    </a:lnB>
-                  </a:tcPr>
-                </a:tc>
-                <a:tc>
-                  <a:txBody>
-                    <a:bodyPr wrap="square"/>
-                    <a:lstStyle/>
-                    <a:p>
-                      <a:pPr algn="ctr"/>
-                      <a:r>
-                        <a:rPr sz="900" b="1">
-                          <a:solidFill>
-                            <a:srgbClr val="00B4D8"/>
-                          </a:solidFill>
-                        </a:rPr>
-                        <a:t>SGT  (Singapore)</a:t>
-                      </a:r>
-                    </a:p>
-                  </a:txBody>
-                  <a:tcPr>
-                    <a:solidFill>
-                      <a:srgbClr val="1A1D27"/>
-                    </a:solidFill>
-                    <a:lnL w="6350" cap="flat">
-                      <a:solidFill>
-                        <a:srgbClr val="2E3348"/>
-                      </a:solidFill>
-                    </a:lnL>
-                    <a:lnR w="6350" cap="flat">
-                      <a:solidFill>
-                        <a:srgbClr val="2E3348"/>
-                      </a:solidFill>
-                    </a:lnR>
-                    <a:lnT w="6350" cap="flat">
-                      <a:solidFill>
-                        <a:srgbClr val="2E3348"/>
-                      </a:solidFill>
-                    </a:lnT>
-                    <a:lnB w="6350" cap="flat">
-                      <a:solidFill>
-                        <a:srgbClr val="2E3348"/>
-                      </a:solidFill>
-                    </a:lnB>
-                  </a:tcPr>
-                </a:tc>
-                <a:tc>
-                  <a:txBody>
-                    <a:bodyPr wrap="square"/>
-                    <a:lstStyle/>
-                    <a:p>
-                      <a:pPr algn="ctr"/>
-                      <a:r>
-                        <a:rPr sz="900" b="1">
-                          <a:solidFill>
-                            <a:srgbClr val="00B4D8"/>
-                          </a:solidFill>
-                        </a:rPr>
-                        <a:t>Register URL</a:t>
-                      </a:r>
-                    </a:p>
-                  </a:txBody>
-                  <a:tcPr>
-                    <a:solidFill>
-                      <a:srgbClr val="1A1D27"/>
-                    </a:solidFill>
-                    <a:lnL w="6350" cap="flat">
-                      <a:solidFill>
-                        <a:srgbClr val="2E3348"/>
-                      </a:solidFill>
-                    </a:lnL>
-                    <a:lnR w="6350" cap="flat">
-                      <a:solidFill>
-                        <a:srgbClr val="2E3348"/>
-                      </a:solidFill>
-                    </a:lnR>
-                    <a:lnT w="6350" cap="flat">
-                      <a:solidFill>
-                        <a:srgbClr val="2E3348"/>
-                      </a:solidFill>
-                    </a:lnT>
-                    <a:lnB w="6350" cap="flat">
-                      <a:solidFill>
-                        <a:srgbClr val="2E3348"/>
-                      </a:solidFill>
-                    </a:lnB>
-                  </a:tcPr>
-                </a:tc>
-              </a:tr>
-              <a:tr h="420624">
-                <a:tc>
-                  <a:txBody>
-                    <a:bodyPr wrap="square"/>
-                    <a:lstStyle/>
-                    <a:p>
-                      <a:pPr algn="l"/>
-                      <a:r>
-                        <a:rPr sz="800" b="0">
-                          <a:solidFill>
-                            <a:srgbClr val="E2E8F0"/>
-                          </a:solidFill>
-                        </a:rPr>
-                        <a:t>Automation PM</a:t>
-                      </a:r>
-                    </a:p>
-                  </a:txBody>
-                  <a:tcPr>
-                    <a:solidFill>
-                      <a:srgbClr val="0F1117"/>
-                    </a:solidFill>
-                    <a:lnL w="6350" cap="flat">
-                      <a:solidFill>
-                        <a:srgbClr val="2E3348"/>
-                      </a:solidFill>
-                    </a:lnL>
-                    <a:lnR w="6350" cap="flat">
-                      <a:solidFill>
-                        <a:srgbClr val="2E3348"/>
-                      </a:solidFill>
-                    </a:lnR>
-                    <a:lnT w="6350" cap="flat">
-                      <a:solidFill>
-                        <a:srgbClr val="2E3348"/>
-                      </a:solidFill>
-                    </a:lnT>
-                    <a:lnB w="6350" cap="flat">
-                      <a:solidFill>
-                        <a:srgbClr val="2E3348"/>
-                      </a:solidFill>
-                    </a:lnB>
-                  </a:tcPr>
-                </a:tc>
-                <a:tc>
-                  <a:txBody>
-                    <a:bodyPr wrap="none"/>
-                    <a:lstStyle/>
-                    <a:p>
-                      <a:pPr algn="l"/>
-                      <a:r>
-                        <a:rPr sz="800" b="0">
-                          <a:solidFill>
-                            <a:srgbClr val="E2E8F0"/>
-                          </a:solidFill>
-                        </a:rPr>
-                        <a:t>Thu 16 Jul 2026  04:00 PM  →  05:30 PM</a:t>
-                      </a:r>
-                    </a:p>
-                  </a:txBody>
-                  <a:tcPr>
-                    <a:solidFill>
-                      <a:srgbClr val="0F1117"/>
-                    </a:solidFill>
-                    <a:lnL w="6350" cap="flat">
-                      <a:solidFill>
-                        <a:srgbClr val="2E3348"/>
-                      </a:solidFill>
-                    </a:lnL>
-                    <a:lnR w="6350" cap="flat">
-                      <a:solidFill>
-                        <a:srgbClr val="2E3348"/>
-                      </a:solidFill>
-                    </a:lnR>
-                    <a:lnT w="6350" cap="flat">
-                      <a:solidFill>
-                        <a:srgbClr val="2E3348"/>
-                      </a:solidFill>
-                    </a:lnT>
-                    <a:lnB w="6350" cap="flat">
-                      <a:solidFill>
-                        <a:srgbClr val="2E3348"/>
-                      </a:solidFill>
-                    </a:lnB>
-                  </a:tcPr>
-                </a:tc>
-                <a:tc>
-                  <a:txBody>
-                    <a:bodyPr wrap="none"/>
-                    <a:lstStyle/>
-                    <a:p>
-                      <a:pPr algn="l"/>
-                      <a:r>
-                        <a:rPr sz="800" b="0">
-                          <a:solidFill>
-                            <a:srgbClr val="E2E8F0"/>
-                          </a:solidFill>
-                        </a:rPr>
-                        <a:t>Fri 17 Jul 2026  11:00 AM</a:t>
-                      </a:r>
-                    </a:p>
-                  </a:txBody>
-                  <a:tcPr>
-                    <a:solidFill>
-                      <a:srgbClr val="0F1117"/>
-                    </a:solidFill>
-                    <a:lnL w="6350" cap="flat">
-                      <a:solidFill>
-                        <a:srgbClr val="2E3348"/>
-                      </a:solidFill>
-                    </a:lnL>
-                    <a:lnR w="6350" cap="flat">
-                      <a:solidFill>
-                        <a:srgbClr val="2E3348"/>
-                      </a:solidFill>
-                    </a:lnR>
-                    <a:lnT w="6350" cap="flat">
-                      <a:solidFill>
-                        <a:srgbClr val="2E3348"/>
-                      </a:solidFill>
-                    </a:lnT>
-                    <a:lnB w="6350" cap="flat">
-                      <a:solidFill>
-                        <a:srgbClr val="2E3348"/>
-                      </a:solidFill>
-                    </a:lnB>
-                  </a:tcPr>
-                </a:tc>
-                <a:tc>
-                  <a:txBody>
-                    <a:bodyPr wrap="none"/>
-                    <a:lstStyle/>
-                    <a:p>
-                      <a:pPr algn="l"/>
-                      <a:r>
-                        <a:rPr sz="800" b="0">
-                          <a:solidFill>
-                            <a:srgbClr val="E2E8F0"/>
-                          </a:solidFill>
-                        </a:rPr>
-                        <a:t>Fri 17 Jul 2026  09:00 AM</a:t>
-                      </a:r>
-                    </a:p>
-                  </a:txBody>
-                  <a:tcPr>
-                    <a:solidFill>
-                      <a:srgbClr val="0F1117"/>
-                    </a:solidFill>
-                    <a:lnL w="6350" cap="flat">
-                      <a:solidFill>
-                        <a:srgbClr val="2E3348"/>
-                      </a:solidFill>
-                    </a:lnL>
-                    <a:lnR w="6350" cap="flat">
-                      <a:solidFill>
-                        <a:srgbClr val="2E3348"/>
-                      </a:solidFill>
-                    </a:lnR>
-                    <a:lnT w="6350" cap="flat">
-                      <a:solidFill>
-                        <a:srgbClr val="2E3348"/>
-                      </a:solidFill>
-                    </a:lnT>
-                    <a:lnB w="6350" cap="flat">
-                      <a:solidFill>
-                        <a:srgbClr val="2E3348"/>
-                      </a:solidFill>
-                    </a:lnB>
-                  </a:tcPr>
-                </a:tc>
-                <a:tc>
-                  <a:txBody>
-                    <a:bodyPr wrap="none"/>
-                    <a:lstStyle/>
-                    <a:p>
-                      <a:pPr algn="l"/>
-                      <a:r>
-                        <a:rPr sz="800" b="0">
-                          <a:solidFill>
-                            <a:srgbClr val="E2E8F0"/>
-                          </a:solidFill>
-                        </a:rPr>
-                        <a:t>Fri 17 Jul 2026  07:00 AM</a:t>
-                      </a:r>
-                    </a:p>
-                  </a:txBody>
-                  <a:tcPr>
-                    <a:solidFill>
-                      <a:srgbClr val="0F1117"/>
-                    </a:solidFill>
-                    <a:lnL w="6350" cap="flat">
-                      <a:solidFill>
-                        <a:srgbClr val="2E3348"/>
-                      </a:solidFill>
-                    </a:lnL>
-                    <a:lnR w="6350" cap="flat">
-                      <a:solidFill>
-                        <a:srgbClr val="2E3348"/>
-                      </a:solidFill>
-                    </a:lnR>
-                    <a:lnT w="6350" cap="flat">
-                      <a:solidFill>
-                        <a:srgbClr val="2E3348"/>
-                      </a:solidFill>
-                    </a:lnT>
-                    <a:lnB w="6350" cap="flat">
-                      <a:solidFill>
-                        <a:srgbClr val="2E3348"/>
-                      </a:solidFill>
-                    </a:lnB>
-                  </a:tcPr>
-                </a:tc>
-                <a:tc>
-                  <a:txBody>
-                    <a:bodyPr wrap="square"/>
-                    <a:lstStyle/>
-                    <a:p>
-                      <a:pPr algn="l"/>
-                      <a:r>
-                        <a:rPr sz="700" b="0">
-                          <a:solidFill>
-                            <a:srgbClr val="E2E8F0"/>
-                          </a:solidFill>
-                        </a:rPr>
-                        <a:t>https://events.sumologic.com/automationpm07162026-event-training</a:t>
-                      </a:r>
-                    </a:p>
-                  </a:txBody>
-                  <a:tcPr>
-                    <a:solidFill>
-                      <a:srgbClr val="0F1117"/>
-                    </a:solidFill>
-                    <a:lnL w="6350" cap="flat">
-                      <a:solidFill>
-                        <a:srgbClr val="2E3348"/>
-                      </a:solidFill>
-                    </a:lnL>
-                    <a:lnR w="6350" cap="flat">
-                      <a:solidFill>
-                        <a:srgbClr val="2E3348"/>
-                      </a:solidFill>
-                    </a:lnR>
-                    <a:lnT w="6350" cap="flat">
-                      <a:solidFill>
-                        <a:srgbClr val="2E3348"/>
-                      </a:solidFill>
-                    </a:lnT>
-                    <a:lnB w="6350" cap="flat">
-                      <a:solidFill>
-                        <a:srgbClr val="2E3348"/>
-                      </a:solidFill>
-                    </a:lnB>
-                  </a:tcPr>
-                </a:tc>
-              </a:tr>
-            </a:tbl>
-          </a:graphicData>
-        </a:graphic>
-      </p:graphicFrame>
-      <p:sp>
-        <p:nvSpPr>
-          <p:cNvPr id="7" name="TextBox 6"/>
-          <p:cNvSpPr txBox="1"/>
-          <p:nvPr/>
-        </p:nvSpPr>
-        <p:spPr>
-          <a:xfrm>
-            <a:off x="164592" y="1481328"/>
+            <a:off x="164592" y="3584448"/>
             <a:ext cx="11795760" cy="274320"/>
           </a:xfrm>
           <a:prstGeom prst="rect">

--- a/CustomTraining/online trainings/training_schedule.pptx
+++ b/CustomTraining/online trainings/training_schedule.pptx
@@ -10,6 +10,7 @@
     <p:sldId id="258" r:id="rId9"/>
     <p:sldId id="259" r:id="rId10"/>
     <p:sldId id="260" r:id="rId11"/>
+    <p:sldId id="261" r:id="rId12"/>
   </p:sldIdLst>
   <p:sldSz cx="12188952" cy="6858000" type="screen4x3"/>
   <p:notesSz cx="6858000" cy="9144000"/>
@@ -3206,7 +3207,7 @@
                   <a:srgbClr val="00B4D8"/>
                 </a:solidFill>
               </a:rPr>
-              <a:t>Sumo Logic — Virtual Training Schedule   ·   19 May 2026 – 02 Jun 2026   (1/5)</a:t>
+              <a:t>Sumo Logic — Virtual Training Schedule   ·   30 Jun 2026 – 07 Jul 2026   (1/6)</a:t>
             </a:r>
           </a:p>
         </p:txBody>
@@ -3240,7 +3241,7 @@
                   <a:srgbClr val="94A3B8"/>
                 </a:solidFill>
               </a:rPr>
-              <a:t>p 1/5</a:t>
+              <a:t>p 1/6</a:t>
             </a:r>
           </a:p>
         </p:txBody>
@@ -3538,7 +3539,7 @@
                             <a:srgbClr val="E2E8F0"/>
                           </a:solidFill>
                         </a:rPr>
-                        <a:t>Logs for Security AM</a:t>
+                        <a:t>Welcome Webinar AM</a:t>
                       </a:r>
                     </a:p>
                   </a:txBody>
@@ -3580,7 +3581,7 @@
                             <a:srgbClr val="E2E8F0"/>
                           </a:solidFill>
                         </a:rPr>
-                        <a:t>Tue 19 May 2026  07:00 AM  →  10:00 AM</a:t>
+                        <a:t>Tue 30 Jun 2026  05:00 AM  →  06:00 AM</a:t>
                       </a:r>
                     </a:p>
                   </a:txBody>
@@ -3622,7 +3623,7 @@
                             <a:srgbClr val="E2E8F0"/>
                           </a:solidFill>
                         </a:rPr>
-                        <a:t>Wed 20 May 2026  02:00 AM</a:t>
+                        <a:t>Wed 01 Jul 2026  12:00 AM</a:t>
                       </a:r>
                     </a:p>
                   </a:txBody>
@@ -3664,7 +3665,7 @@
                             <a:srgbClr val="E2E8F0"/>
                           </a:solidFill>
                         </a:rPr>
-                        <a:t>Wed 20 May 2026  12:00 AM</a:t>
+                        <a:t>Tue 30 Jun 2026  10:00 PM</a:t>
                       </a:r>
                     </a:p>
                   </a:txBody>
@@ -3706,7 +3707,7 @@
                             <a:srgbClr val="E2E8F0"/>
                           </a:solidFill>
                         </a:rPr>
-                        <a:t>Tue 19 May 2026  10:00 PM</a:t>
+                        <a:t>Tue 30 Jun 2026  08:00 PM</a:t>
                       </a:r>
                     </a:p>
                   </a:txBody>
@@ -3748,7 +3749,7 @@
                             <a:srgbClr val="E2E8F0"/>
                           </a:solidFill>
                         </a:rPr>
-                        <a:t>https://events.sumologic.com/logsforsecurityam05192026-event-training</a:t>
+                        <a:t>https://events.sumologic.com/welcomewebinaram06302026-event-training</a:t>
                       </a:r>
                     </a:p>
                   </a:txBody>
@@ -3792,7 +3793,7 @@
                             <a:srgbClr val="E2E8F0"/>
                           </a:solidFill>
                         </a:rPr>
-                        <a:t>Logs for Security PM</a:t>
+                        <a:t>Fundamentals AM</a:t>
                       </a:r>
                     </a:p>
                   </a:txBody>
@@ -3834,7 +3835,7 @@
                             <a:srgbClr val="E2E8F0"/>
                           </a:solidFill>
                         </a:rPr>
-                        <a:t>Tue 19 May 2026  04:00 PM  →  07:00 PM</a:t>
+                        <a:t>Tue 30 Jun 2026  07:00 AM  →  04:00 PM</a:t>
                       </a:r>
                     </a:p>
                   </a:txBody>
@@ -3876,7 +3877,7 @@
                             <a:srgbClr val="E2E8F0"/>
                           </a:solidFill>
                         </a:rPr>
-                        <a:t>Wed 20 May 2026  11:00 AM</a:t>
+                        <a:t>Wed 01 Jul 2026  02:00 AM</a:t>
                       </a:r>
                     </a:p>
                   </a:txBody>
@@ -3918,7 +3919,7 @@
                             <a:srgbClr val="E2E8F0"/>
                           </a:solidFill>
                         </a:rPr>
-                        <a:t>Wed 20 May 2026  09:00 AM</a:t>
+                        <a:t>Wed 01 Jul 2026  12:00 AM</a:t>
                       </a:r>
                     </a:p>
                   </a:txBody>
@@ -3960,7 +3961,7 @@
                             <a:srgbClr val="E2E8F0"/>
                           </a:solidFill>
                         </a:rPr>
-                        <a:t>Wed 20 May 2026  07:00 AM</a:t>
+                        <a:t>Tue 30 Jun 2026  10:00 PM</a:t>
                       </a:r>
                     </a:p>
                   </a:txBody>
@@ -4002,7 +4003,7 @@
                             <a:srgbClr val="E2E8F0"/>
                           </a:solidFill>
                         </a:rPr>
-                        <a:t>https://events.sumologic.com/logsforsecuritypm05192026-event-training</a:t>
+                        <a:t>https://events.sumologic.com/fundamentalsam06302026-event-training</a:t>
                       </a:r>
                     </a:p>
                   </a:txBody>
@@ -4046,7 +4047,7 @@
                             <a:srgbClr val="E2E8F0"/>
                           </a:solidFill>
                         </a:rPr>
-                        <a:t>Essential Cloud SIEM Skills for SOC Analysts AM</a:t>
+                        <a:t>Welcome Webinar PM</a:t>
                       </a:r>
                     </a:p>
                   </a:txBody>
@@ -4088,7 +4089,7 @@
                             <a:srgbClr val="E2E8F0"/>
                           </a:solidFill>
                         </a:rPr>
-                        <a:t>Wed 20 May 2026  07:00 AM  →  08:30 AM</a:t>
+                        <a:t>Tue 30 Jun 2026  10:00 AM  →  03:00 PM</a:t>
                       </a:r>
                     </a:p>
                   </a:txBody>
@@ -4130,7 +4131,7 @@
                             <a:srgbClr val="E2E8F0"/>
                           </a:solidFill>
                         </a:rPr>
-                        <a:t>Thu 21 May 2026  02:00 AM</a:t>
+                        <a:t>Wed 01 Jul 2026  05:00 AM</a:t>
                       </a:r>
                     </a:p>
                   </a:txBody>
@@ -4172,7 +4173,7 @@
                             <a:srgbClr val="E2E8F0"/>
                           </a:solidFill>
                         </a:rPr>
-                        <a:t>Thu 21 May 2026  12:00 AM</a:t>
+                        <a:t>Wed 01 Jul 2026  03:00 AM</a:t>
                       </a:r>
                     </a:p>
                   </a:txBody>
@@ -4214,7 +4215,7 @@
                             <a:srgbClr val="E2E8F0"/>
                           </a:solidFill>
                         </a:rPr>
-                        <a:t>Wed 20 May 2026  10:00 PM</a:t>
+                        <a:t>Wed 01 Jul 2026  01:00 AM</a:t>
                       </a:r>
                     </a:p>
                   </a:txBody>
@@ -4256,7 +4257,7 @@
                             <a:srgbClr val="E2E8F0"/>
                           </a:solidFill>
                         </a:rPr>
-                        <a:t>https://events.sumologic.com/esscloudsiemam05202026-event-training</a:t>
+                        <a:t>https://events.sumologic.com/welcomewebinarpm06302026-event-training</a:t>
                       </a:r>
                     </a:p>
                   </a:txBody>
@@ -4300,7 +4301,7 @@
                             <a:srgbClr val="E2E8F0"/>
                           </a:solidFill>
                         </a:rPr>
-                        <a:t>Essential Cloud SIEM Skills for SOC Analysts PM</a:t>
+                        <a:t>Fundamentals PM</a:t>
                       </a:r>
                     </a:p>
                   </a:txBody>
@@ -4342,7 +4343,7 @@
                             <a:srgbClr val="E2E8F0"/>
                           </a:solidFill>
                         </a:rPr>
-                        <a:t>Wed 20 May 2026  04:00 PM  →  05:30 PM</a:t>
+                        <a:t>Tue 30 Jun 2026  04:00 PM  →  07:00 PM</a:t>
                       </a:r>
                     </a:p>
                   </a:txBody>
@@ -4384,7 +4385,7 @@
                             <a:srgbClr val="E2E8F0"/>
                           </a:solidFill>
                         </a:rPr>
-                        <a:t>Thu 21 May 2026  11:00 AM</a:t>
+                        <a:t>Wed 01 Jul 2026  11:00 AM</a:t>
                       </a:r>
                     </a:p>
                   </a:txBody>
@@ -4426,7 +4427,7 @@
                             <a:srgbClr val="E2E8F0"/>
                           </a:solidFill>
                         </a:rPr>
-                        <a:t>Thu 21 May 2026  09:00 AM</a:t>
+                        <a:t>Wed 01 Jul 2026  09:00 AM</a:t>
                       </a:r>
                     </a:p>
                   </a:txBody>
@@ -4468,7 +4469,7 @@
                             <a:srgbClr val="E2E8F0"/>
                           </a:solidFill>
                         </a:rPr>
-                        <a:t>Thu 21 May 2026  07:00 AM</a:t>
+                        <a:t>Wed 01 Jul 2026  07:00 AM</a:t>
                       </a:r>
                     </a:p>
                   </a:txBody>
@@ -4510,7 +4511,7 @@
                             <a:srgbClr val="E2E8F0"/>
                           </a:solidFill>
                         </a:rPr>
-                        <a:t>https://events.sumologic.com/esscloudsiempm05202026-event-training</a:t>
+                        <a:t>https://events.sumologic.com/fundamentalspm06302026-event-training</a:t>
                       </a:r>
                     </a:p>
                   </a:txBody>
@@ -4554,7 +4555,7 @@
                             <a:srgbClr val="E2E8F0"/>
                           </a:solidFill>
                         </a:rPr>
-                        <a:t>Cloud SIEM AM</a:t>
+                        <a:t>Search Mastery AM</a:t>
                       </a:r>
                     </a:p>
                   </a:txBody>
@@ -4596,7 +4597,7 @@
                             <a:srgbClr val="E2E8F0"/>
                           </a:solidFill>
                         </a:rPr>
-                        <a:t>Thu 21 May 2026  07:00 AM  →  10:00 AM</a:t>
+                        <a:t>Wed 01 Jul 2026  07:00 AM  →  10:00 AM</a:t>
                       </a:r>
                     </a:p>
                   </a:txBody>
@@ -4638,7 +4639,7 @@
                             <a:srgbClr val="E2E8F0"/>
                           </a:solidFill>
                         </a:rPr>
-                        <a:t>Fri 22 May 2026  02:00 AM</a:t>
+                        <a:t>Thu 02 Jul 2026  02:00 AM</a:t>
                       </a:r>
                     </a:p>
                   </a:txBody>
@@ -4680,7 +4681,7 @@
                             <a:srgbClr val="E2E8F0"/>
                           </a:solidFill>
                         </a:rPr>
-                        <a:t>Fri 22 May 2026  12:00 AM</a:t>
+                        <a:t>Thu 02 Jul 2026  12:00 AM</a:t>
                       </a:r>
                     </a:p>
                   </a:txBody>
@@ -4722,7 +4723,7 @@
                             <a:srgbClr val="E2E8F0"/>
                           </a:solidFill>
                         </a:rPr>
-                        <a:t>Thu 21 May 2026  10:00 PM</a:t>
+                        <a:t>Wed 01 Jul 2026  10:00 PM</a:t>
                       </a:r>
                     </a:p>
                   </a:txBody>
@@ -4764,7 +4765,7 @@
                             <a:srgbClr val="E2E8F0"/>
                           </a:solidFill>
                         </a:rPr>
-                        <a:t>https://events.sumologic.com/cloudsiemam05212026-event-training</a:t>
+                        <a:t>https://events.sumologic.com/searchmasteryam07012026-event-training</a:t>
                       </a:r>
                     </a:p>
                   </a:txBody>
@@ -4808,7 +4809,7 @@
                             <a:srgbClr val="E2E8F0"/>
                           </a:solidFill>
                         </a:rPr>
-                        <a:t>Cloud SIEM PM</a:t>
+                        <a:t>Search Mastery PM</a:t>
                       </a:r>
                     </a:p>
                   </a:txBody>
@@ -4850,7 +4851,7 @@
                             <a:srgbClr val="E2E8F0"/>
                           </a:solidFill>
                         </a:rPr>
-                        <a:t>Thu 21 May 2026  04:00 PM  →  07:00 PM</a:t>
+                        <a:t>Wed 01 Jul 2026  04:00 PM  →  07:00 PM</a:t>
                       </a:r>
                     </a:p>
                   </a:txBody>
@@ -4892,7 +4893,7 @@
                             <a:srgbClr val="E2E8F0"/>
                           </a:solidFill>
                         </a:rPr>
-                        <a:t>Fri 22 May 2026  11:00 AM</a:t>
+                        <a:t>Thu 02 Jul 2026  11:00 AM</a:t>
                       </a:r>
                     </a:p>
                   </a:txBody>
@@ -4934,7 +4935,7 @@
                             <a:srgbClr val="E2E8F0"/>
                           </a:solidFill>
                         </a:rPr>
-                        <a:t>Fri 22 May 2026  09:00 AM</a:t>
+                        <a:t>Thu 02 Jul 2026  09:00 AM</a:t>
                       </a:r>
                     </a:p>
                   </a:txBody>
@@ -4976,7 +4977,7 @@
                             <a:srgbClr val="E2E8F0"/>
                           </a:solidFill>
                         </a:rPr>
-                        <a:t>Fri 22 May 2026  07:00 AM</a:t>
+                        <a:t>Thu 02 Jul 2026  07:00 AM</a:t>
                       </a:r>
                     </a:p>
                   </a:txBody>
@@ -5018,7 +5019,7 @@
                             <a:srgbClr val="E2E8F0"/>
                           </a:solidFill>
                         </a:rPr>
-                        <a:t>https://events.sumologic.com/cloudsiempm05212026-event-training</a:t>
+                        <a:t>https://events.sumologic.com/searchmasterypm07012026-event-training</a:t>
                       </a:r>
                     </a:p>
                   </a:txBody>
@@ -5062,7 +5063,7 @@
                             <a:srgbClr val="E2E8F0"/>
                           </a:solidFill>
                         </a:rPr>
-                        <a:t>Welcome Webinar AM</a:t>
+                        <a:t>Best Practice for Query Efficiency AM</a:t>
                       </a:r>
                     </a:p>
                   </a:txBody>
@@ -5104,7 +5105,7 @@
                             <a:srgbClr val="E2E8F0"/>
                           </a:solidFill>
                         </a:rPr>
-                        <a:t>Tue 02 Jun 2026  05:00 AM  →  06:00 AM</a:t>
+                        <a:t>Thu 02 Jul 2026  07:00 AM  →  08:30 AM</a:t>
                       </a:r>
                     </a:p>
                   </a:txBody>
@@ -5146,7 +5147,7 @@
                             <a:srgbClr val="E2E8F0"/>
                           </a:solidFill>
                         </a:rPr>
-                        <a:t>Wed 03 Jun 2026  12:00 AM</a:t>
+                        <a:t>Fri 03 Jul 2026  02:00 AM</a:t>
                       </a:r>
                     </a:p>
                   </a:txBody>
@@ -5188,7 +5189,7 @@
                             <a:srgbClr val="E2E8F0"/>
                           </a:solidFill>
                         </a:rPr>
-                        <a:t>Tue 02 Jun 2026  10:00 PM</a:t>
+                        <a:t>Fri 03 Jul 2026  12:00 AM</a:t>
                       </a:r>
                     </a:p>
                   </a:txBody>
@@ -5230,7 +5231,7 @@
                             <a:srgbClr val="E2E8F0"/>
                           </a:solidFill>
                         </a:rPr>
-                        <a:t>Tue 02 Jun 2026  08:00 PM</a:t>
+                        <a:t>Thu 02 Jul 2026  10:00 PM</a:t>
                       </a:r>
                     </a:p>
                   </a:txBody>
@@ -5272,7 +5273,7 @@
                             <a:srgbClr val="E2E8F0"/>
                           </a:solidFill>
                         </a:rPr>
-                        <a:t>https://events.sumologic.com/welcomewebinaram06022026-event-training</a:t>
+                        <a:t>https://events.sumologic.com/bp4qeam07022026-event-training</a:t>
                       </a:r>
                     </a:p>
                   </a:txBody>
@@ -5316,7 +5317,7 @@
                             <a:srgbClr val="E2E8F0"/>
                           </a:solidFill>
                         </a:rPr>
-                        <a:t>Fundamentals AM</a:t>
+                        <a:t>Best Practice for Query Efficiency PM</a:t>
                       </a:r>
                     </a:p>
                   </a:txBody>
@@ -5358,7 +5359,7 @@
                             <a:srgbClr val="E2E8F0"/>
                           </a:solidFill>
                         </a:rPr>
-                        <a:t>Tue 02 Jun 2026  07:00 AM  →  10:00 AM</a:t>
+                        <a:t>Thu 02 Jul 2026  04:00 PM  →  05:25 PM</a:t>
                       </a:r>
                     </a:p>
                   </a:txBody>
@@ -5400,7 +5401,7 @@
                             <a:srgbClr val="E2E8F0"/>
                           </a:solidFill>
                         </a:rPr>
-                        <a:t>Wed 03 Jun 2026  02:00 AM</a:t>
+                        <a:t>Fri 03 Jul 2026  11:00 AM</a:t>
                       </a:r>
                     </a:p>
                   </a:txBody>
@@ -5442,7 +5443,7 @@
                             <a:srgbClr val="E2E8F0"/>
                           </a:solidFill>
                         </a:rPr>
-                        <a:t>Wed 03 Jun 2026  12:00 AM</a:t>
+                        <a:t>Fri 03 Jul 2026  09:00 AM</a:t>
                       </a:r>
                     </a:p>
                   </a:txBody>
@@ -5484,7 +5485,7 @@
                             <a:srgbClr val="E2E8F0"/>
                           </a:solidFill>
                         </a:rPr>
-                        <a:t>Tue 02 Jun 2026  10:00 PM</a:t>
+                        <a:t>Fri 03 Jul 2026  07:00 AM</a:t>
                       </a:r>
                     </a:p>
                   </a:txBody>
@@ -5526,7 +5527,7 @@
                             <a:srgbClr val="E2E8F0"/>
                           </a:solidFill>
                         </a:rPr>
-                        <a:t>https://events.sumologic.com/fundamentalsam06022026-event-training</a:t>
+                        <a:t>https://events.sumologic.com/bp4qepm07022026-event-training</a:t>
                       </a:r>
                     </a:p>
                   </a:txBody>
@@ -5570,7 +5571,7 @@
                             <a:srgbClr val="E2E8F0"/>
                           </a:solidFill>
                         </a:rPr>
-                        <a:t>Welcome Webinar PM</a:t>
+                        <a:t>Administration AM</a:t>
                       </a:r>
                     </a:p>
                   </a:txBody>
@@ -5612,7 +5613,7 @@
                             <a:srgbClr val="E2E8F0"/>
                           </a:solidFill>
                         </a:rPr>
-                        <a:t>Tue 02 Jun 2026  02:00 PM  →  03:00 PM</a:t>
+                        <a:t>Tue 07 Jul 2026  07:00 AM  →  10:00 AM</a:t>
                       </a:r>
                     </a:p>
                   </a:txBody>
@@ -5654,7 +5655,7 @@
                             <a:srgbClr val="E2E8F0"/>
                           </a:solidFill>
                         </a:rPr>
-                        <a:t>Wed 03 Jun 2026  09:00 AM</a:t>
+                        <a:t>Wed 08 Jul 2026  02:00 AM</a:t>
                       </a:r>
                     </a:p>
                   </a:txBody>
@@ -5696,7 +5697,7 @@
                             <a:srgbClr val="E2E8F0"/>
                           </a:solidFill>
                         </a:rPr>
-                        <a:t>Wed 03 Jun 2026  07:00 AM</a:t>
+                        <a:t>Wed 08 Jul 2026  12:00 AM</a:t>
                       </a:r>
                     </a:p>
                   </a:txBody>
@@ -5738,7 +5739,7 @@
                             <a:srgbClr val="E2E8F0"/>
                           </a:solidFill>
                         </a:rPr>
-                        <a:t>Wed 03 Jun 2026  05:00 AM</a:t>
+                        <a:t>Tue 07 Jul 2026  10:00 PM</a:t>
                       </a:r>
                     </a:p>
                   </a:txBody>
@@ -5780,7 +5781,7 @@
                             <a:srgbClr val="E2E8F0"/>
                           </a:solidFill>
                         </a:rPr>
-                        <a:t>https://events.sumologic.com/welcomewebinarpm06022026-event-training</a:t>
+                        <a:t>https://events.sumologic.com/administrationam07072026-event-training</a:t>
                       </a:r>
                     </a:p>
                   </a:txBody>
@@ -5824,7 +5825,7 @@
                             <a:srgbClr val="E2E8F0"/>
                           </a:solidFill>
                         </a:rPr>
-                        <a:t>Fundamentals PM</a:t>
+                        <a:t>Administration PM</a:t>
                       </a:r>
                     </a:p>
                   </a:txBody>
@@ -5866,7 +5867,7 @@
                             <a:srgbClr val="E2E8F0"/>
                           </a:solidFill>
                         </a:rPr>
-                        <a:t>Tue 02 Jun 2026  04:00 PM  →  07:00 PM</a:t>
+                        <a:t>Tue 07 Jul 2026  04:00 PM  →  07:00 PM</a:t>
                       </a:r>
                     </a:p>
                   </a:txBody>
@@ -5908,7 +5909,7 @@
                             <a:srgbClr val="E2E8F0"/>
                           </a:solidFill>
                         </a:rPr>
-                        <a:t>Wed 03 Jun 2026  11:00 AM</a:t>
+                        <a:t>Wed 08 Jul 2026  11:00 AM</a:t>
                       </a:r>
                     </a:p>
                   </a:txBody>
@@ -5950,7 +5951,7 @@
                             <a:srgbClr val="E2E8F0"/>
                           </a:solidFill>
                         </a:rPr>
-                        <a:t>Wed 03 Jun 2026  09:00 AM</a:t>
+                        <a:t>Wed 08 Jul 2026  09:00 AM</a:t>
                       </a:r>
                     </a:p>
                   </a:txBody>
@@ -5992,7 +5993,7 @@
                             <a:srgbClr val="E2E8F0"/>
                           </a:solidFill>
                         </a:rPr>
-                        <a:t>Wed 03 Jun 2026  07:00 AM</a:t>
+                        <a:t>Wed 08 Jul 2026  07:00 AM</a:t>
                       </a:r>
                     </a:p>
                   </a:txBody>
@@ -6034,7 +6035,7 @@
                             <a:srgbClr val="E2E8F0"/>
                           </a:solidFill>
                         </a:rPr>
-                        <a:t>https://events.sumologic.com/fundamentalspm06022026-event-training</a:t>
+                        <a:t>https://events.sumologic.com/administrationpm07072026-event-training</a:t>
                       </a:r>
                     </a:p>
                   </a:txBody>
@@ -6234,7 +6235,7 @@
                   <a:srgbClr val="00B4D8"/>
                 </a:solidFill>
               </a:rPr>
-              <a:t>Sumo Logic — Virtual Training Schedule   ·   03 Jun – 11 Jun 2026   (2/5)</a:t>
+              <a:t>Sumo Logic — Virtual Training Schedule   ·   08 Jul – 16 Jul 2026   (2/6)</a:t>
             </a:r>
           </a:p>
         </p:txBody>
@@ -6268,7 +6269,7 @@
                   <a:srgbClr val="94A3B8"/>
                 </a:solidFill>
               </a:rPr>
-              <a:t>p 2/5</a:t>
+              <a:t>p 2/6</a:t>
             </a:r>
           </a:p>
         </p:txBody>
@@ -6566,7 +6567,7 @@
                             <a:srgbClr val="E2E8F0"/>
                           </a:solidFill>
                         </a:rPr>
-                        <a:t>Search Mastery AM</a:t>
+                        <a:t>Metrics Analytics AM</a:t>
                       </a:r>
                     </a:p>
                   </a:txBody>
@@ -6608,7 +6609,7 @@
                             <a:srgbClr val="E2E8F0"/>
                           </a:solidFill>
                         </a:rPr>
-                        <a:t>Wed 03 Jun 2026  07:00 AM  →  10:00 AM</a:t>
+                        <a:t>Wed 08 Jul 2026  07:00 AM  →  10:00 AM</a:t>
                       </a:r>
                     </a:p>
                   </a:txBody>
@@ -6650,7 +6651,7 @@
                             <a:srgbClr val="E2E8F0"/>
                           </a:solidFill>
                         </a:rPr>
-                        <a:t>Thu 04 Jun 2026  02:00 AM</a:t>
+                        <a:t>Thu 09 Jul 2026  02:00 AM</a:t>
                       </a:r>
                     </a:p>
                   </a:txBody>
@@ -6692,7 +6693,7 @@
                             <a:srgbClr val="E2E8F0"/>
                           </a:solidFill>
                         </a:rPr>
-                        <a:t>Thu 04 Jun 2026  12:00 AM</a:t>
+                        <a:t>Thu 09 Jul 2026  12:00 AM</a:t>
                       </a:r>
                     </a:p>
                   </a:txBody>
@@ -6734,7 +6735,7 @@
                             <a:srgbClr val="E2E8F0"/>
                           </a:solidFill>
                         </a:rPr>
-                        <a:t>Wed 03 Jun 2026  10:00 PM</a:t>
+                        <a:t>Wed 08 Jul 2026  10:00 PM</a:t>
                       </a:r>
                     </a:p>
                   </a:txBody>
@@ -6776,7 +6777,7 @@
                             <a:srgbClr val="E2E8F0"/>
                           </a:solidFill>
                         </a:rPr>
-                        <a:t>https://events.sumologic.com/searchmasteryam06032026-event-training</a:t>
+                        <a:t>https://events.sumologic.com/metricanalyticsam07082026-event-training</a:t>
                       </a:r>
                     </a:p>
                   </a:txBody>
@@ -6820,7 +6821,7 @@
                             <a:srgbClr val="E2E8F0"/>
                           </a:solidFill>
                         </a:rPr>
-                        <a:t>Search Mastery PM</a:t>
+                        <a:t>Metrics Analytics PM</a:t>
                       </a:r>
                     </a:p>
                   </a:txBody>
@@ -6862,7 +6863,7 @@
                             <a:srgbClr val="E2E8F0"/>
                           </a:solidFill>
                         </a:rPr>
-                        <a:t>Wed 03 Jun 2026  04:00 PM  →  07:00 PM</a:t>
+                        <a:t>Wed 08 Jul 2026  04:00 PM  →  07:00 PM</a:t>
                       </a:r>
                     </a:p>
                   </a:txBody>
@@ -6904,7 +6905,7 @@
                             <a:srgbClr val="E2E8F0"/>
                           </a:solidFill>
                         </a:rPr>
-                        <a:t>Thu 04 Jun 2026  11:00 AM</a:t>
+                        <a:t>Thu 09 Jul 2026  11:00 AM</a:t>
                       </a:r>
                     </a:p>
                   </a:txBody>
@@ -6946,7 +6947,7 @@
                             <a:srgbClr val="E2E8F0"/>
                           </a:solidFill>
                         </a:rPr>
-                        <a:t>Thu 04 Jun 2026  09:00 AM</a:t>
+                        <a:t>Thu 09 Jul 2026  09:00 AM</a:t>
                       </a:r>
                     </a:p>
                   </a:txBody>
@@ -6988,7 +6989,7 @@
                             <a:srgbClr val="E2E8F0"/>
                           </a:solidFill>
                         </a:rPr>
-                        <a:t>Thu 04 Jun 2026  07:00 AM</a:t>
+                        <a:t>Thu 09 Jul 2026  07:00 AM</a:t>
                       </a:r>
                     </a:p>
                   </a:txBody>
@@ -7030,7 +7031,7 @@
                             <a:srgbClr val="E2E8F0"/>
                           </a:solidFill>
                         </a:rPr>
-                        <a:t>https://events.sumologic.com/searchmasterypm06032026-event-training</a:t>
+                        <a:t>https://events.sumologic.com/metricanalyticspm07082026-event-training</a:t>
                       </a:r>
                     </a:p>
                   </a:txBody>
@@ -7074,7 +7075,7 @@
                             <a:srgbClr val="E2E8F0"/>
                           </a:solidFill>
                         </a:rPr>
-                        <a:t>Best Practice for Query Efficiency AM</a:t>
+                        <a:t>Mobot Essentials AM</a:t>
                       </a:r>
                     </a:p>
                   </a:txBody>
@@ -7116,7 +7117,7 @@
                             <a:srgbClr val="E2E8F0"/>
                           </a:solidFill>
                         </a:rPr>
-                        <a:t>Thu 04 Jun 2026  07:00 AM  →  08:30 AM</a:t>
+                        <a:t>Thu 09 Jul 2026  07:00 AM  →  08:30 AM</a:t>
                       </a:r>
                     </a:p>
                   </a:txBody>
@@ -7158,7 +7159,7 @@
                             <a:srgbClr val="E2E8F0"/>
                           </a:solidFill>
                         </a:rPr>
-                        <a:t>Fri 05 Jun 2026  02:00 AM</a:t>
+                        <a:t>Fri 10 Jul 2026  02:00 AM</a:t>
                       </a:r>
                     </a:p>
                   </a:txBody>
@@ -7200,7 +7201,7 @@
                             <a:srgbClr val="E2E8F0"/>
                           </a:solidFill>
                         </a:rPr>
-                        <a:t>Fri 05 Jun 2026  12:00 AM</a:t>
+                        <a:t>Fri 10 Jul 2026  12:00 AM</a:t>
                       </a:r>
                     </a:p>
                   </a:txBody>
@@ -7242,7 +7243,7 @@
                             <a:srgbClr val="E2E8F0"/>
                           </a:solidFill>
                         </a:rPr>
-                        <a:t>Thu 04 Jun 2026  10:00 PM</a:t>
+                        <a:t>Thu 09 Jul 2026  10:00 PM</a:t>
                       </a:r>
                     </a:p>
                   </a:txBody>
@@ -7284,7 +7285,7 @@
                             <a:srgbClr val="E2E8F0"/>
                           </a:solidFill>
                         </a:rPr>
-                        <a:t>https://events.sumologic.com/bp4qeam06042026-event-training</a:t>
+                        <a:t>https://events.sumologic.com/mobotam07092026-event-training</a:t>
                       </a:r>
                     </a:p>
                   </a:txBody>
@@ -7328,7 +7329,7 @@
                             <a:srgbClr val="E2E8F0"/>
                           </a:solidFill>
                         </a:rPr>
-                        <a:t>Best Practice for Query Efficiency PM</a:t>
+                        <a:t>Mobot Essentials PM</a:t>
                       </a:r>
                     </a:p>
                   </a:txBody>
@@ -7370,7 +7371,7 @@
                             <a:srgbClr val="E2E8F0"/>
                           </a:solidFill>
                         </a:rPr>
-                        <a:t>Thu 04 Jun 2026  04:00 PM  →  05:30 PM</a:t>
+                        <a:t>Thu 09 Jul 2026  04:00 PM  →  05:30 PM</a:t>
                       </a:r>
                     </a:p>
                   </a:txBody>
@@ -7412,7 +7413,7 @@
                             <a:srgbClr val="E2E8F0"/>
                           </a:solidFill>
                         </a:rPr>
-                        <a:t>Fri 05 Jun 2026  11:00 AM</a:t>
+                        <a:t>Fri 10 Jul 2026  11:00 AM</a:t>
                       </a:r>
                     </a:p>
                   </a:txBody>
@@ -7454,7 +7455,7 @@
                             <a:srgbClr val="E2E8F0"/>
                           </a:solidFill>
                         </a:rPr>
-                        <a:t>Fri 05 Jun 2026  09:00 AM</a:t>
+                        <a:t>Fri 10 Jul 2026  09:00 AM</a:t>
                       </a:r>
                     </a:p>
                   </a:txBody>
@@ -7496,7 +7497,7 @@
                             <a:srgbClr val="E2E8F0"/>
                           </a:solidFill>
                         </a:rPr>
-                        <a:t>Fri 05 Jun 2026  07:00 AM</a:t>
+                        <a:t>Fri 10 Jul 2026  07:00 AM</a:t>
                       </a:r>
                     </a:p>
                   </a:txBody>
@@ -7538,7 +7539,7 @@
                             <a:srgbClr val="E2E8F0"/>
                           </a:solidFill>
                         </a:rPr>
-                        <a:t>https://events.sumologic.com/bp4qepm06042026-event-training</a:t>
+                        <a:t>https://events.sumologic.com/mobotessentialspm07092026-event-training</a:t>
                       </a:r>
                     </a:p>
                   </a:txBody>
@@ -7582,7 +7583,7 @@
                             <a:srgbClr val="E2E8F0"/>
                           </a:solidFill>
                         </a:rPr>
-                        <a:t>Administration AM</a:t>
+                        <a:t>Essential Cloud SIEM skills for SOC Analysts AM</a:t>
                       </a:r>
                     </a:p>
                   </a:txBody>
@@ -7624,7 +7625,7 @@
                             <a:srgbClr val="E2E8F0"/>
                           </a:solidFill>
                         </a:rPr>
-                        <a:t>Tue 09 Jun 2026  07:00 AM  →  10:00 AM</a:t>
+                        <a:t>Tue 14 Jul 2026  07:00 AM  →  08:30 AM</a:t>
                       </a:r>
                     </a:p>
                   </a:txBody>
@@ -7666,7 +7667,7 @@
                             <a:srgbClr val="E2E8F0"/>
                           </a:solidFill>
                         </a:rPr>
-                        <a:t>Wed 10 Jun 2026  02:00 AM</a:t>
+                        <a:t>Wed 15 Jul 2026  02:00 AM</a:t>
                       </a:r>
                     </a:p>
                   </a:txBody>
@@ -7708,7 +7709,7 @@
                             <a:srgbClr val="E2E8F0"/>
                           </a:solidFill>
                         </a:rPr>
-                        <a:t>Wed 10 Jun 2026  12:00 AM</a:t>
+                        <a:t>Wed 15 Jul 2026  12:00 AM</a:t>
                       </a:r>
                     </a:p>
                   </a:txBody>
@@ -7750,7 +7751,7 @@
                             <a:srgbClr val="E2E8F0"/>
                           </a:solidFill>
                         </a:rPr>
-                        <a:t>Tue 09 Jun 2026  10:00 PM</a:t>
+                        <a:t>Tue 14 Jul 2026  10:00 PM</a:t>
                       </a:r>
                     </a:p>
                   </a:txBody>
@@ -7792,7 +7793,7 @@
                             <a:srgbClr val="E2E8F0"/>
                           </a:solidFill>
                         </a:rPr>
-                        <a:t>https://events.sumologic.com/administrationam06092026-event-training</a:t>
+                        <a:t>https://events.sumologic.com/esscloudsiemam07142026-event-training</a:t>
                       </a:r>
                     </a:p>
                   </a:txBody>
@@ -7836,7 +7837,7 @@
                             <a:srgbClr val="E2E8F0"/>
                           </a:solidFill>
                         </a:rPr>
-                        <a:t>Administration PM</a:t>
+                        <a:t>Essential Cloud SIEM skills for SOC Analysts PM</a:t>
                       </a:r>
                     </a:p>
                   </a:txBody>
@@ -7878,7 +7879,7 @@
                             <a:srgbClr val="E2E8F0"/>
                           </a:solidFill>
                         </a:rPr>
-                        <a:t>Tue 09 Jun 2026  04:00 PM  →  07:00 PM</a:t>
+                        <a:t>Tue 14 Jul 2026  04:00 PM  →  05:30 PM</a:t>
                       </a:r>
                     </a:p>
                   </a:txBody>
@@ -7920,7 +7921,7 @@
                             <a:srgbClr val="E2E8F0"/>
                           </a:solidFill>
                         </a:rPr>
-                        <a:t>Wed 10 Jun 2026  11:00 AM</a:t>
+                        <a:t>Wed 15 Jul 2026  11:00 AM</a:t>
                       </a:r>
                     </a:p>
                   </a:txBody>
@@ -7962,7 +7963,7 @@
                             <a:srgbClr val="E2E8F0"/>
                           </a:solidFill>
                         </a:rPr>
-                        <a:t>Wed 10 Jun 2026  09:00 AM</a:t>
+                        <a:t>Wed 15 Jul 2026  09:00 AM</a:t>
                       </a:r>
                     </a:p>
                   </a:txBody>
@@ -8004,7 +8005,7 @@
                             <a:srgbClr val="E2E8F0"/>
                           </a:solidFill>
                         </a:rPr>
-                        <a:t>Wed 10 Jun 2026  07:00 AM</a:t>
+                        <a:t>Wed 15 Jul 2026  07:00 AM</a:t>
                       </a:r>
                     </a:p>
                   </a:txBody>
@@ -8046,7 +8047,7 @@
                             <a:srgbClr val="E2E8F0"/>
                           </a:solidFill>
                         </a:rPr>
-                        <a:t>https://events.sumologic.com/administrationpm06092026-event-training</a:t>
+                        <a:t>https://events.sumologic.com/esscloudsiem07142026-event-training</a:t>
                       </a:r>
                     </a:p>
                   </a:txBody>
@@ -8090,7 +8091,7 @@
                             <a:srgbClr val="E2E8F0"/>
                           </a:solidFill>
                         </a:rPr>
-                        <a:t>Metrics Analytics AM</a:t>
+                        <a:t>Cloud SIEM AM</a:t>
                       </a:r>
                     </a:p>
                   </a:txBody>
@@ -8132,7 +8133,7 @@
                             <a:srgbClr val="E2E8F0"/>
                           </a:solidFill>
                         </a:rPr>
-                        <a:t>Wed 10 Jun 2026  07:00 AM  →  10:00 AM</a:t>
+                        <a:t>Wed 15 Jul 2026  07:00 AM  →  10:00 AM</a:t>
                       </a:r>
                     </a:p>
                   </a:txBody>
@@ -8174,7 +8175,7 @@
                             <a:srgbClr val="E2E8F0"/>
                           </a:solidFill>
                         </a:rPr>
-                        <a:t>Thu 11 Jun 2026  02:00 AM</a:t>
+                        <a:t>Thu 16 Jul 2026  02:00 AM</a:t>
                       </a:r>
                     </a:p>
                   </a:txBody>
@@ -8216,7 +8217,7 @@
                             <a:srgbClr val="E2E8F0"/>
                           </a:solidFill>
                         </a:rPr>
-                        <a:t>Thu 11 Jun 2026  12:00 AM</a:t>
+                        <a:t>Thu 16 Jul 2026  12:00 AM</a:t>
                       </a:r>
                     </a:p>
                   </a:txBody>
@@ -8258,7 +8259,7 @@
                             <a:srgbClr val="E2E8F0"/>
                           </a:solidFill>
                         </a:rPr>
-                        <a:t>Wed 10 Jun 2026  10:00 PM</a:t>
+                        <a:t>Wed 15 Jul 2026  10:00 PM</a:t>
                       </a:r>
                     </a:p>
                   </a:txBody>
@@ -8300,7 +8301,7 @@
                             <a:srgbClr val="E2E8F0"/>
                           </a:solidFill>
                         </a:rPr>
-                        <a:t>https://events.sumologic.com/metricanalyticsam06102026-event-training</a:t>
+                        <a:t>https://events.sumologic.com/cloudsiemam07152026-event-training</a:t>
                       </a:r>
                     </a:p>
                   </a:txBody>
@@ -8344,7 +8345,7 @@
                             <a:srgbClr val="E2E8F0"/>
                           </a:solidFill>
                         </a:rPr>
-                        <a:t>Metrics Analytics PM</a:t>
+                        <a:t>Cloud SIEM PM</a:t>
                       </a:r>
                     </a:p>
                   </a:txBody>
@@ -8386,7 +8387,7 @@
                             <a:srgbClr val="E2E8F0"/>
                           </a:solidFill>
                         </a:rPr>
-                        <a:t>Wed 10 Jun 2026  04:00 PM  →  07:00 PM</a:t>
+                        <a:t>Wed 15 Jul 2026  04:00 PM  →  07:00 PM</a:t>
                       </a:r>
                     </a:p>
                   </a:txBody>
@@ -8428,7 +8429,7 @@
                             <a:srgbClr val="E2E8F0"/>
                           </a:solidFill>
                         </a:rPr>
-                        <a:t>Thu 11 Jun 2026  11:00 AM</a:t>
+                        <a:t>Thu 16 Jul 2026  11:00 AM</a:t>
                       </a:r>
                     </a:p>
                   </a:txBody>
@@ -8470,7 +8471,7 @@
                             <a:srgbClr val="E2E8F0"/>
                           </a:solidFill>
                         </a:rPr>
-                        <a:t>Thu 11 Jun 2026  09:00 AM</a:t>
+                        <a:t>Thu 16 Jul 2026  09:00 AM</a:t>
                       </a:r>
                     </a:p>
                   </a:txBody>
@@ -8512,7 +8513,7 @@
                             <a:srgbClr val="E2E8F0"/>
                           </a:solidFill>
                         </a:rPr>
-                        <a:t>Thu 11 Jun 2026  07:00 AM</a:t>
+                        <a:t>Thu 16 Jul 2026  07:00 AM</a:t>
                       </a:r>
                     </a:p>
                   </a:txBody>
@@ -8554,7 +8555,7 @@
                             <a:srgbClr val="E2E8F0"/>
                           </a:solidFill>
                         </a:rPr>
-                        <a:t>https://events.sumologic.com/metricanalyticspm06102026-event-training</a:t>
+                        <a:t>https://events.sumologic.com/cloudsiempm07152026-event-training</a:t>
                       </a:r>
                     </a:p>
                   </a:txBody>
@@ -8598,7 +8599,7 @@
                             <a:srgbClr val="E2E8F0"/>
                           </a:solidFill>
                         </a:rPr>
-                        <a:t>Mobot Essentials AM</a:t>
+                        <a:t>Automation AM</a:t>
                       </a:r>
                     </a:p>
                   </a:txBody>
@@ -8640,7 +8641,7 @@
                             <a:srgbClr val="E2E8F0"/>
                           </a:solidFill>
                         </a:rPr>
-                        <a:t>Thu 11 Jun 2026  07:00 AM  →  08:30 AM</a:t>
+                        <a:t>Thu 16 Jul 2026  07:00 AM  →  08:30 AM</a:t>
                       </a:r>
                     </a:p>
                   </a:txBody>
@@ -8682,7 +8683,7 @@
                             <a:srgbClr val="E2E8F0"/>
                           </a:solidFill>
                         </a:rPr>
-                        <a:t>Fri 12 Jun 2026  02:00 AM</a:t>
+                        <a:t>Fri 17 Jul 2026  02:00 AM</a:t>
                       </a:r>
                     </a:p>
                   </a:txBody>
@@ -8724,7 +8725,7 @@
                             <a:srgbClr val="E2E8F0"/>
                           </a:solidFill>
                         </a:rPr>
-                        <a:t>Fri 12 Jun 2026  12:00 AM</a:t>
+                        <a:t>Fri 17 Jul 2026  12:00 AM</a:t>
                       </a:r>
                     </a:p>
                   </a:txBody>
@@ -8766,7 +8767,7 @@
                             <a:srgbClr val="E2E8F0"/>
                           </a:solidFill>
                         </a:rPr>
-                        <a:t>Thu 11 Jun 2026  10:00 PM</a:t>
+                        <a:t>Thu 16 Jul 2026  10:00 PM</a:t>
                       </a:r>
                     </a:p>
                   </a:txBody>
@@ -8808,7 +8809,7 @@
                             <a:srgbClr val="E2E8F0"/>
                           </a:solidFill>
                         </a:rPr>
-                        <a:t>https://events.sumologic.com/mobotessentialsam06112026-event-training</a:t>
+                        <a:t>https://events.sumologic.com/automationam07162026-event-training</a:t>
                       </a:r>
                     </a:p>
                   </a:txBody>
@@ -8852,7 +8853,7 @@
                             <a:srgbClr val="E2E8F0"/>
                           </a:solidFill>
                         </a:rPr>
-                        <a:t>Mobot Essentials PM</a:t>
+                        <a:t>Automation PM</a:t>
                       </a:r>
                     </a:p>
                   </a:txBody>
@@ -8894,7 +8895,7 @@
                             <a:srgbClr val="E2E8F0"/>
                           </a:solidFill>
                         </a:rPr>
-                        <a:t>Thu 11 Jun 2026  04:00 PM  →  05:30 PM</a:t>
+                        <a:t>Thu 16 Jul 2026  04:00 PM  →  05:30 PM</a:t>
                       </a:r>
                     </a:p>
                   </a:txBody>
@@ -8936,7 +8937,7 @@
                             <a:srgbClr val="E2E8F0"/>
                           </a:solidFill>
                         </a:rPr>
-                        <a:t>Fri 12 Jun 2026  11:00 AM</a:t>
+                        <a:t>Fri 17 Jul 2026  11:00 AM</a:t>
                       </a:r>
                     </a:p>
                   </a:txBody>
@@ -8978,7 +8979,7 @@
                             <a:srgbClr val="E2E8F0"/>
                           </a:solidFill>
                         </a:rPr>
-                        <a:t>Fri 12 Jun 2026  09:00 AM</a:t>
+                        <a:t>Fri 17 Jul 2026  09:00 AM</a:t>
                       </a:r>
                     </a:p>
                   </a:txBody>
@@ -9020,7 +9021,7 @@
                             <a:srgbClr val="E2E8F0"/>
                           </a:solidFill>
                         </a:rPr>
-                        <a:t>Fri 12 Jun 2026  07:00 AM</a:t>
+                        <a:t>Fri 17 Jul 2026  07:00 AM</a:t>
                       </a:r>
                     </a:p>
                   </a:txBody>
@@ -9062,7 +9063,7 @@
                             <a:srgbClr val="E2E8F0"/>
                           </a:solidFill>
                         </a:rPr>
-                        <a:t>https://events.sumologic.com/mobotessentialspm06112026-event-training</a:t>
+                        <a:t>https://events.sumologic.com/automationpm07162026-event-training</a:t>
                       </a:r>
                     </a:p>
                   </a:txBody>
@@ -9262,7 +9263,7 @@
                   <a:srgbClr val="00B4D8"/>
                 </a:solidFill>
               </a:rPr>
-              <a:t>Sumo Logic — Virtual Training Schedule   ·   16 Jun – 30 Jun 2026   (3/5)</a:t>
+              <a:t>Sumo Logic — Virtual Training Schedule   ·   04 Aug – 11 Aug 2026   (3/6)</a:t>
             </a:r>
           </a:p>
         </p:txBody>
@@ -9296,7 +9297,7 @@
                   <a:srgbClr val="94A3B8"/>
                 </a:solidFill>
               </a:rPr>
-              <a:t>p 3/5</a:t>
+              <a:t>p 3/6</a:t>
             </a:r>
           </a:p>
         </p:txBody>
@@ -9594,7 +9595,7 @@
                             <a:srgbClr val="E2E8F0"/>
                           </a:solidFill>
                         </a:rPr>
-                        <a:t>Logs for Security AM</a:t>
+                        <a:t>Welcome Webinar AM</a:t>
                       </a:r>
                     </a:p>
                   </a:txBody>
@@ -9636,7 +9637,7 @@
                             <a:srgbClr val="E2E8F0"/>
                           </a:solidFill>
                         </a:rPr>
-                        <a:t>Tue 16 Jun 2026  07:00 AM  →  10:00 AM</a:t>
+                        <a:t>Tue 04 Aug 2026  05:00 AM  →  06:00 AM</a:t>
                       </a:r>
                     </a:p>
                   </a:txBody>
@@ -9678,7 +9679,7 @@
                             <a:srgbClr val="E2E8F0"/>
                           </a:solidFill>
                         </a:rPr>
-                        <a:t>Wed 17 Jun 2026  02:00 AM</a:t>
+                        <a:t>Wed 05 Aug 2026  12:00 AM</a:t>
                       </a:r>
                     </a:p>
                   </a:txBody>
@@ -9720,7 +9721,7 @@
                             <a:srgbClr val="E2E8F0"/>
                           </a:solidFill>
                         </a:rPr>
-                        <a:t>Wed 17 Jun 2026  12:00 AM</a:t>
+                        <a:t>Tue 04 Aug 2026  10:00 PM</a:t>
                       </a:r>
                     </a:p>
                   </a:txBody>
@@ -9762,7 +9763,7 @@
                             <a:srgbClr val="E2E8F0"/>
                           </a:solidFill>
                         </a:rPr>
-                        <a:t>Tue 16 Jun 2026  10:00 PM</a:t>
+                        <a:t>Tue 04 Aug 2026  08:00 PM</a:t>
                       </a:r>
                     </a:p>
                   </a:txBody>
@@ -9804,7 +9805,7 @@
                             <a:srgbClr val="E2E8F0"/>
                           </a:solidFill>
                         </a:rPr>
-                        <a:t>https://events.sumologic.com/logsforsecurityam06162026-event-training</a:t>
+                        <a:t>https://events.sumologic.com/welcomewebinaram08042026-event-training</a:t>
                       </a:r>
                     </a:p>
                   </a:txBody>
@@ -9848,7 +9849,7 @@
                             <a:srgbClr val="E2E8F0"/>
                           </a:solidFill>
                         </a:rPr>
-                        <a:t>Logs for Security PM</a:t>
+                        <a:t>Fundamentals AM</a:t>
                       </a:r>
                     </a:p>
                   </a:txBody>
@@ -9890,7 +9891,7 @@
                             <a:srgbClr val="E2E8F0"/>
                           </a:solidFill>
                         </a:rPr>
-                        <a:t>Tue 16 Jun 2026  04:00 PM  →  07:00 PM</a:t>
+                        <a:t>Tue 04 Aug 2026  07:00 AM  →  10:00 AM</a:t>
                       </a:r>
                     </a:p>
                   </a:txBody>
@@ -9932,7 +9933,7 @@
                             <a:srgbClr val="E2E8F0"/>
                           </a:solidFill>
                         </a:rPr>
-                        <a:t>Wed 17 Jun 2026  11:00 AM</a:t>
+                        <a:t>Wed 05 Aug 2026  02:00 AM</a:t>
                       </a:r>
                     </a:p>
                   </a:txBody>
@@ -9974,7 +9975,7 @@
                             <a:srgbClr val="E2E8F0"/>
                           </a:solidFill>
                         </a:rPr>
-                        <a:t>Wed 17 Jun 2026  09:00 AM</a:t>
+                        <a:t>Wed 05 Aug 2026  12:00 AM</a:t>
                       </a:r>
                     </a:p>
                   </a:txBody>
@@ -10016,7 +10017,7 @@
                             <a:srgbClr val="E2E8F0"/>
                           </a:solidFill>
                         </a:rPr>
-                        <a:t>Wed 17 Jun 2026  07:00 AM</a:t>
+                        <a:t>Tue 04 Aug 2026  10:00 PM</a:t>
                       </a:r>
                     </a:p>
                   </a:txBody>
@@ -10058,7 +10059,7 @@
                             <a:srgbClr val="E2E8F0"/>
                           </a:solidFill>
                         </a:rPr>
-                        <a:t>https://events.sumologic.com/logsforsecuritypm06162026-event-training</a:t>
+                        <a:t>https://events.sumologic.com/fundamentalsam08042026-event-training</a:t>
                       </a:r>
                     </a:p>
                   </a:txBody>
@@ -10102,7 +10103,7 @@
                             <a:srgbClr val="E2E8F0"/>
                           </a:solidFill>
                         </a:rPr>
-                        <a:t>Cloud SIEM AM</a:t>
+                        <a:t>Welcome Webinars PM</a:t>
                       </a:r>
                     </a:p>
                   </a:txBody>
@@ -10144,7 +10145,7 @@
                             <a:srgbClr val="E2E8F0"/>
                           </a:solidFill>
                         </a:rPr>
-                        <a:t>Wed 17 Jun 2026  07:00 AM  →  10:00 AM</a:t>
+                        <a:t>Tue 04 Aug 2026  02:00 PM  →  03:00 PM</a:t>
                       </a:r>
                     </a:p>
                   </a:txBody>
@@ -10186,7 +10187,7 @@
                             <a:srgbClr val="E2E8F0"/>
                           </a:solidFill>
                         </a:rPr>
-                        <a:t>Thu 18 Jun 2026  02:00 AM</a:t>
+                        <a:t>Wed 05 Aug 2026  09:00 AM</a:t>
                       </a:r>
                     </a:p>
                   </a:txBody>
@@ -10228,7 +10229,7 @@
                             <a:srgbClr val="E2E8F0"/>
                           </a:solidFill>
                         </a:rPr>
-                        <a:t>Thu 18 Jun 2026  12:00 AM</a:t>
+                        <a:t>Wed 05 Aug 2026  07:00 AM</a:t>
                       </a:r>
                     </a:p>
                   </a:txBody>
@@ -10270,7 +10271,7 @@
                             <a:srgbClr val="E2E8F0"/>
                           </a:solidFill>
                         </a:rPr>
-                        <a:t>Wed 17 Jun 2026  10:00 PM</a:t>
+                        <a:t>Wed 05 Aug 2026  05:00 AM</a:t>
                       </a:r>
                     </a:p>
                   </a:txBody>
@@ -10312,7 +10313,7 @@
                             <a:srgbClr val="E2E8F0"/>
                           </a:solidFill>
                         </a:rPr>
-                        <a:t>https://events.sumologic.com/cloudsiemam06172026-event-training</a:t>
+                        <a:t>https://events.sumologic.com/welcomewebinarpm08042026-event-training</a:t>
                       </a:r>
                     </a:p>
                   </a:txBody>
@@ -10356,7 +10357,7 @@
                             <a:srgbClr val="E2E8F0"/>
                           </a:solidFill>
                         </a:rPr>
-                        <a:t>Cloud SIEM PM</a:t>
+                        <a:t>Fundamentals PM</a:t>
                       </a:r>
                     </a:p>
                   </a:txBody>
@@ -10398,7 +10399,7 @@
                             <a:srgbClr val="E2E8F0"/>
                           </a:solidFill>
                         </a:rPr>
-                        <a:t>Wed 17 Jun 2026  04:00 PM  →  07:00 PM</a:t>
+                        <a:t>Tue 04 Aug 2026  04:00 PM  →  07:00 PM</a:t>
                       </a:r>
                     </a:p>
                   </a:txBody>
@@ -10440,7 +10441,7 @@
                             <a:srgbClr val="E2E8F0"/>
                           </a:solidFill>
                         </a:rPr>
-                        <a:t>Thu 18 Jun 2026  11:00 AM</a:t>
+                        <a:t>Wed 05 Aug 2026  11:00 AM</a:t>
                       </a:r>
                     </a:p>
                   </a:txBody>
@@ -10482,7 +10483,7 @@
                             <a:srgbClr val="E2E8F0"/>
                           </a:solidFill>
                         </a:rPr>
-                        <a:t>Thu 18 Jun 2026  09:00 AM</a:t>
+                        <a:t>Wed 05 Aug 2026  09:00 AM</a:t>
                       </a:r>
                     </a:p>
                   </a:txBody>
@@ -10524,7 +10525,7 @@
                             <a:srgbClr val="E2E8F0"/>
                           </a:solidFill>
                         </a:rPr>
-                        <a:t>Thu 18 Jun 2026  07:00 AM</a:t>
+                        <a:t>Wed 05 Aug 2026  07:00 AM</a:t>
                       </a:r>
                     </a:p>
                   </a:txBody>
@@ -10566,7 +10567,7 @@
                             <a:srgbClr val="E2E8F0"/>
                           </a:solidFill>
                         </a:rPr>
-                        <a:t>https://events.sumologic.com/cloudsiempm06172026-event-training</a:t>
+                        <a:t>https://events.sumologic.com/fundamentalspm08042026-event-training</a:t>
                       </a:r>
                     </a:p>
                   </a:txBody>
@@ -10610,7 +10611,7 @@
                             <a:srgbClr val="E2E8F0"/>
                           </a:solidFill>
                         </a:rPr>
-                        <a:t>Automation Workshop AM</a:t>
+                        <a:t>Search Mastery AM</a:t>
                       </a:r>
                     </a:p>
                   </a:txBody>
@@ -10652,7 +10653,7 @@
                             <a:srgbClr val="E2E8F0"/>
                           </a:solidFill>
                         </a:rPr>
-                        <a:t>Thu 18 Jun 2026  07:00 AM  →  08:30 AM</a:t>
+                        <a:t>Wed 05 Aug 2026  07:00 AM  →  10:00 AM</a:t>
                       </a:r>
                     </a:p>
                   </a:txBody>
@@ -10694,7 +10695,7 @@
                             <a:srgbClr val="E2E8F0"/>
                           </a:solidFill>
                         </a:rPr>
-                        <a:t>Fri 19 Jun 2026  02:00 AM</a:t>
+                        <a:t>Thu 06 Aug 2026  02:00 AM</a:t>
                       </a:r>
                     </a:p>
                   </a:txBody>
@@ -10736,7 +10737,7 @@
                             <a:srgbClr val="E2E8F0"/>
                           </a:solidFill>
                         </a:rPr>
-                        <a:t>Fri 19 Jun 2026  12:00 AM</a:t>
+                        <a:t>Thu 06 Aug 2026  12:00 AM</a:t>
                       </a:r>
                     </a:p>
                   </a:txBody>
@@ -10778,7 +10779,7 @@
                             <a:srgbClr val="E2E8F0"/>
                           </a:solidFill>
                         </a:rPr>
-                        <a:t>Thu 18 Jun 2026  10:00 PM</a:t>
+                        <a:t>Wed 05 Aug 2026  10:00 PM</a:t>
                       </a:r>
                     </a:p>
                   </a:txBody>
@@ -10820,7 +10821,7 @@
                             <a:srgbClr val="E2E8F0"/>
                           </a:solidFill>
                         </a:rPr>
-                        <a:t>https://events.sumologic.com/automationworkshopam06182026-event-training</a:t>
+                        <a:t>https://events.sumologic.com/searchmasteryam08052026-event-training</a:t>
                       </a:r>
                     </a:p>
                   </a:txBody>
@@ -10864,7 +10865,7 @@
                             <a:srgbClr val="E2E8F0"/>
                           </a:solidFill>
                         </a:rPr>
-                        <a:t>Automation Workshop PM</a:t>
+                        <a:t>Search Mastery PM</a:t>
                       </a:r>
                     </a:p>
                   </a:txBody>
@@ -10906,7 +10907,7 @@
                             <a:srgbClr val="E2E8F0"/>
                           </a:solidFill>
                         </a:rPr>
-                        <a:t>Thu 18 Jun 2026  04:00 PM  →  05:30 PM</a:t>
+                        <a:t>Wed 05 Aug 2026  04:00 PM  →  07:00 PM</a:t>
                       </a:r>
                     </a:p>
                   </a:txBody>
@@ -10948,7 +10949,7 @@
                             <a:srgbClr val="E2E8F0"/>
                           </a:solidFill>
                         </a:rPr>
-                        <a:t>Fri 19 Jun 2026  11:00 AM</a:t>
+                        <a:t>Thu 06 Aug 2026  11:00 AM</a:t>
                       </a:r>
                     </a:p>
                   </a:txBody>
@@ -10990,7 +10991,7 @@
                             <a:srgbClr val="E2E8F0"/>
                           </a:solidFill>
                         </a:rPr>
-                        <a:t>Fri 19 Jun 2026  09:00 AM</a:t>
+                        <a:t>Thu 06 Aug 2026  09:00 AM</a:t>
                       </a:r>
                     </a:p>
                   </a:txBody>
@@ -11032,7 +11033,7 @@
                             <a:srgbClr val="E2E8F0"/>
                           </a:solidFill>
                         </a:rPr>
-                        <a:t>Fri 19 Jun 2026  07:00 AM</a:t>
+                        <a:t>Thu 06 Aug 2026  07:00 AM</a:t>
                       </a:r>
                     </a:p>
                   </a:txBody>
@@ -11074,7 +11075,7 @@
                             <a:srgbClr val="E2E8F0"/>
                           </a:solidFill>
                         </a:rPr>
-                        <a:t>https://events.sumologic.com/automationworkshoppm06182026-event-training</a:t>
+                        <a:t>https://events.sumologic.com/searchmasterypm08052026-event-training</a:t>
                       </a:r>
                     </a:p>
                   </a:txBody>
@@ -11118,7 +11119,7 @@
                             <a:srgbClr val="E2E8F0"/>
                           </a:solidFill>
                         </a:rPr>
-                        <a:t>Welcome Webinar AM</a:t>
+                        <a:t>Best Practices for Query Efficiency AM</a:t>
                       </a:r>
                     </a:p>
                   </a:txBody>
@@ -11160,7 +11161,7 @@
                             <a:srgbClr val="E2E8F0"/>
                           </a:solidFill>
                         </a:rPr>
-                        <a:t>Tue 30 Jun 2026  05:00 AM  →  06:00 AM</a:t>
+                        <a:t>Thu 06 Aug 2026  07:00 AM  →  08:30 AM</a:t>
                       </a:r>
                     </a:p>
                   </a:txBody>
@@ -11202,7 +11203,7 @@
                             <a:srgbClr val="E2E8F0"/>
                           </a:solidFill>
                         </a:rPr>
-                        <a:t>Wed 01 Jul 2026  12:00 AM</a:t>
+                        <a:t>Fri 07 Aug 2026  02:00 AM</a:t>
                       </a:r>
                     </a:p>
                   </a:txBody>
@@ -11244,7 +11245,7 @@
                             <a:srgbClr val="E2E8F0"/>
                           </a:solidFill>
                         </a:rPr>
-                        <a:t>Tue 30 Jun 2026  10:00 PM</a:t>
+                        <a:t>Fri 07 Aug 2026  12:00 AM</a:t>
                       </a:r>
                     </a:p>
                   </a:txBody>
@@ -11286,7 +11287,7 @@
                             <a:srgbClr val="E2E8F0"/>
                           </a:solidFill>
                         </a:rPr>
-                        <a:t>Tue 30 Jun 2026  08:00 PM</a:t>
+                        <a:t>Thu 06 Aug 2026  10:00 PM</a:t>
                       </a:r>
                     </a:p>
                   </a:txBody>
@@ -11328,7 +11329,7 @@
                             <a:srgbClr val="E2E8F0"/>
                           </a:solidFill>
                         </a:rPr>
-                        <a:t>https://events.sumologic.com/welcomewebinaram06302026-event-training</a:t>
+                        <a:t>https://events.sumologic.com/bp4qeam08062026-event-training</a:t>
                       </a:r>
                     </a:p>
                   </a:txBody>
@@ -11372,7 +11373,7 @@
                             <a:srgbClr val="E2E8F0"/>
                           </a:solidFill>
                         </a:rPr>
-                        <a:t>Fundamentals AM</a:t>
+                        <a:t>Best Practices for Query Efficiency PM</a:t>
                       </a:r>
                     </a:p>
                   </a:txBody>
@@ -11414,7 +11415,7 @@
                             <a:srgbClr val="E2E8F0"/>
                           </a:solidFill>
                         </a:rPr>
-                        <a:t>Tue 30 Jun 2026  07:00 AM  →  04:00 PM</a:t>
+                        <a:t>Thu 06 Aug 2026  04:00 PM  →  05:28 PM</a:t>
                       </a:r>
                     </a:p>
                   </a:txBody>
@@ -11456,7 +11457,7 @@
                             <a:srgbClr val="E2E8F0"/>
                           </a:solidFill>
                         </a:rPr>
-                        <a:t>Wed 01 Jul 2026  02:00 AM</a:t>
+                        <a:t>Fri 07 Aug 2026  11:00 AM</a:t>
                       </a:r>
                     </a:p>
                   </a:txBody>
@@ -11498,7 +11499,7 @@
                             <a:srgbClr val="E2E8F0"/>
                           </a:solidFill>
                         </a:rPr>
-                        <a:t>Wed 01 Jul 2026  12:00 AM</a:t>
+                        <a:t>Fri 07 Aug 2026  09:00 AM</a:t>
                       </a:r>
                     </a:p>
                   </a:txBody>
@@ -11540,7 +11541,7 @@
                             <a:srgbClr val="E2E8F0"/>
                           </a:solidFill>
                         </a:rPr>
-                        <a:t>Tue 30 Jun 2026  10:00 PM</a:t>
+                        <a:t>Fri 07 Aug 2026  07:00 AM</a:t>
                       </a:r>
                     </a:p>
                   </a:txBody>
@@ -11582,7 +11583,7 @@
                             <a:srgbClr val="E2E8F0"/>
                           </a:solidFill>
                         </a:rPr>
-                        <a:t>https://events.sumologic.com/fundamentalsam06302026-event-training</a:t>
+                        <a:t>https://events.sumologic.com/bp4qepm08062026-event-training</a:t>
                       </a:r>
                     </a:p>
                   </a:txBody>
@@ -11626,7 +11627,7 @@
                             <a:srgbClr val="E2E8F0"/>
                           </a:solidFill>
                         </a:rPr>
-                        <a:t>Welcome Webinar PM</a:t>
+                        <a:t>Administration AM</a:t>
                       </a:r>
                     </a:p>
                   </a:txBody>
@@ -11668,7 +11669,7 @@
                             <a:srgbClr val="E2E8F0"/>
                           </a:solidFill>
                         </a:rPr>
-                        <a:t>Tue 30 Jun 2026  10:00 AM  →  03:00 PM</a:t>
+                        <a:t>Tue 11 Aug 2026  07:00 AM  →  10:00 AM</a:t>
                       </a:r>
                     </a:p>
                   </a:txBody>
@@ -11710,7 +11711,7 @@
                             <a:srgbClr val="E2E8F0"/>
                           </a:solidFill>
                         </a:rPr>
-                        <a:t>Wed 01 Jul 2026  05:00 AM</a:t>
+                        <a:t>Wed 12 Aug 2026  02:00 AM</a:t>
                       </a:r>
                     </a:p>
                   </a:txBody>
@@ -11752,7 +11753,7 @@
                             <a:srgbClr val="E2E8F0"/>
                           </a:solidFill>
                         </a:rPr>
-                        <a:t>Wed 01 Jul 2026  03:00 AM</a:t>
+                        <a:t>Wed 12 Aug 2026  12:00 AM</a:t>
                       </a:r>
                     </a:p>
                   </a:txBody>
@@ -11794,7 +11795,7 @@
                             <a:srgbClr val="E2E8F0"/>
                           </a:solidFill>
                         </a:rPr>
-                        <a:t>Wed 01 Jul 2026  01:00 AM</a:t>
+                        <a:t>Tue 11 Aug 2026  10:00 PM</a:t>
                       </a:r>
                     </a:p>
                   </a:txBody>
@@ -11836,7 +11837,7 @@
                             <a:srgbClr val="E2E8F0"/>
                           </a:solidFill>
                         </a:rPr>
-                        <a:t>https://events.sumologic.com/welcomewebinarpm06302026-event-training</a:t>
+                        <a:t>https://events.sumologic.com/administrationam08112026-event-training</a:t>
                       </a:r>
                     </a:p>
                   </a:txBody>
@@ -11880,7 +11881,7 @@
                             <a:srgbClr val="E2E8F0"/>
                           </a:solidFill>
                         </a:rPr>
-                        <a:t>Fundamentals PM</a:t>
+                        <a:t>Administration PM</a:t>
                       </a:r>
                     </a:p>
                   </a:txBody>
@@ -11922,7 +11923,7 @@
                             <a:srgbClr val="E2E8F0"/>
                           </a:solidFill>
                         </a:rPr>
-                        <a:t>Tue 30 Jun 2026  04:00 PM  →  07:00 PM</a:t>
+                        <a:t>Tue 11 Aug 2026  04:00 PM  →  07:00 PM</a:t>
                       </a:r>
                     </a:p>
                   </a:txBody>
@@ -11964,7 +11965,7 @@
                             <a:srgbClr val="E2E8F0"/>
                           </a:solidFill>
                         </a:rPr>
-                        <a:t>Wed 01 Jul 2026  11:00 AM</a:t>
+                        <a:t>Wed 12 Aug 2026  11:00 AM</a:t>
                       </a:r>
                     </a:p>
                   </a:txBody>
@@ -12006,7 +12007,7 @@
                             <a:srgbClr val="E2E8F0"/>
                           </a:solidFill>
                         </a:rPr>
-                        <a:t>Wed 01 Jul 2026  09:00 AM</a:t>
+                        <a:t>Wed 12 Aug 2026  09:00 AM</a:t>
                       </a:r>
                     </a:p>
                   </a:txBody>
@@ -12048,7 +12049,7 @@
                             <a:srgbClr val="E2E8F0"/>
                           </a:solidFill>
                         </a:rPr>
-                        <a:t>Wed 01 Jul 2026  07:00 AM</a:t>
+                        <a:t>Wed 12 Aug 2026  07:00 AM</a:t>
                       </a:r>
                     </a:p>
                   </a:txBody>
@@ -12090,7 +12091,7 @@
                             <a:srgbClr val="E2E8F0"/>
                           </a:solidFill>
                         </a:rPr>
-                        <a:t>https://events.sumologic.com/fundamentalspm06302026-event-training</a:t>
+                        <a:t>https://events.sumologic.com/administrationpm08112026-event-training</a:t>
                       </a:r>
                     </a:p>
                   </a:txBody>
@@ -12290,7 +12291,7 @@
                   <a:srgbClr val="00B4D8"/>
                 </a:solidFill>
               </a:rPr>
-              <a:t>Sumo Logic — Virtual Training Schedule   ·   01 Jul – 09 Jul 2026   (4/5)</a:t>
+              <a:t>Sumo Logic — Virtual Training Schedule   ·   12 Aug 2026 – 08 Sep 2026   (4/6)</a:t>
             </a:r>
           </a:p>
         </p:txBody>
@@ -12324,7 +12325,7 @@
                   <a:srgbClr val="94A3B8"/>
                 </a:solidFill>
               </a:rPr>
-              <a:t>p 4/5</a:t>
+              <a:t>p 4/6</a:t>
             </a:r>
           </a:p>
         </p:txBody>
@@ -12622,7 +12623,7 @@
                             <a:srgbClr val="E2E8F0"/>
                           </a:solidFill>
                         </a:rPr>
-                        <a:t>Search Mastery AM</a:t>
+                        <a:t>Metrics Analytics AM</a:t>
                       </a:r>
                     </a:p>
                   </a:txBody>
@@ -12664,7 +12665,7 @@
                             <a:srgbClr val="E2E8F0"/>
                           </a:solidFill>
                         </a:rPr>
-                        <a:t>Wed 01 Jul 2026  07:00 AM  →  10:00 AM</a:t>
+                        <a:t>Wed 12 Aug 2026  07:00 AM  →  10:00 AM</a:t>
                       </a:r>
                     </a:p>
                   </a:txBody>
@@ -12706,7 +12707,7 @@
                             <a:srgbClr val="E2E8F0"/>
                           </a:solidFill>
                         </a:rPr>
-                        <a:t>Thu 02 Jul 2026  02:00 AM</a:t>
+                        <a:t>Thu 13 Aug 2026  02:00 AM</a:t>
                       </a:r>
                     </a:p>
                   </a:txBody>
@@ -12748,7 +12749,7 @@
                             <a:srgbClr val="E2E8F0"/>
                           </a:solidFill>
                         </a:rPr>
-                        <a:t>Thu 02 Jul 2026  12:00 AM</a:t>
+                        <a:t>Thu 13 Aug 2026  12:00 AM</a:t>
                       </a:r>
                     </a:p>
                   </a:txBody>
@@ -12790,7 +12791,7 @@
                             <a:srgbClr val="E2E8F0"/>
                           </a:solidFill>
                         </a:rPr>
-                        <a:t>Wed 01 Jul 2026  10:00 PM</a:t>
+                        <a:t>Wed 12 Aug 2026  10:00 PM</a:t>
                       </a:r>
                     </a:p>
                   </a:txBody>
@@ -12832,7 +12833,7 @@
                             <a:srgbClr val="E2E8F0"/>
                           </a:solidFill>
                         </a:rPr>
-                        <a:t>https://events.sumologic.com/searchmasteryam07012026-event-training</a:t>
+                        <a:t>https://events.sumologic.com/metricsanalyticsam08122026-event-training</a:t>
                       </a:r>
                     </a:p>
                   </a:txBody>
@@ -12876,7 +12877,7 @@
                             <a:srgbClr val="E2E8F0"/>
                           </a:solidFill>
                         </a:rPr>
-                        <a:t>Search Mastery PM</a:t>
+                        <a:t>Metrics Analytics PM</a:t>
                       </a:r>
                     </a:p>
                   </a:txBody>
@@ -12918,7 +12919,7 @@
                             <a:srgbClr val="E2E8F0"/>
                           </a:solidFill>
                         </a:rPr>
-                        <a:t>Wed 01 Jul 2026  04:00 PM  →  07:00 PM</a:t>
+                        <a:t>Wed 12 Aug 2026  04:00 PM  →  07:00 PM</a:t>
                       </a:r>
                     </a:p>
                   </a:txBody>
@@ -12960,7 +12961,7 @@
                             <a:srgbClr val="E2E8F0"/>
                           </a:solidFill>
                         </a:rPr>
-                        <a:t>Thu 02 Jul 2026  11:00 AM</a:t>
+                        <a:t>Thu 13 Aug 2026  11:00 AM</a:t>
                       </a:r>
                     </a:p>
                   </a:txBody>
@@ -13002,7 +13003,7 @@
                             <a:srgbClr val="E2E8F0"/>
                           </a:solidFill>
                         </a:rPr>
-                        <a:t>Thu 02 Jul 2026  09:00 AM</a:t>
+                        <a:t>Thu 13 Aug 2026  09:00 AM</a:t>
                       </a:r>
                     </a:p>
                   </a:txBody>
@@ -13044,7 +13045,7 @@
                             <a:srgbClr val="E2E8F0"/>
                           </a:solidFill>
                         </a:rPr>
-                        <a:t>Thu 02 Jul 2026  07:00 AM</a:t>
+                        <a:t>Thu 13 Aug 2026  07:00 AM</a:t>
                       </a:r>
                     </a:p>
                   </a:txBody>
@@ -13086,7 +13087,7 @@
                             <a:srgbClr val="E2E8F0"/>
                           </a:solidFill>
                         </a:rPr>
-                        <a:t>https://events.sumologic.com/searchmasterypm07012026-event-training</a:t>
+                        <a:t>https://events.sumologic.com/metricsanalyticspm08122026-event-training</a:t>
                       </a:r>
                     </a:p>
                   </a:txBody>
@@ -13130,7 +13131,7 @@
                             <a:srgbClr val="E2E8F0"/>
                           </a:solidFill>
                         </a:rPr>
-                        <a:t>Best Practice for Query Efficiency AM</a:t>
+                        <a:t>Mobot Essentials AM</a:t>
                       </a:r>
                     </a:p>
                   </a:txBody>
@@ -13172,7 +13173,7 @@
                             <a:srgbClr val="E2E8F0"/>
                           </a:solidFill>
                         </a:rPr>
-                        <a:t>Thu 02 Jul 2026  07:00 AM  →  08:30 AM</a:t>
+                        <a:t>Thu 13 Aug 2026  07:00 AM  →  08:30 AM</a:t>
                       </a:r>
                     </a:p>
                   </a:txBody>
@@ -13214,7 +13215,7 @@
                             <a:srgbClr val="E2E8F0"/>
                           </a:solidFill>
                         </a:rPr>
-                        <a:t>Fri 03 Jul 2026  02:00 AM</a:t>
+                        <a:t>Fri 14 Aug 2026  02:00 AM</a:t>
                       </a:r>
                     </a:p>
                   </a:txBody>
@@ -13256,7 +13257,7 @@
                             <a:srgbClr val="E2E8F0"/>
                           </a:solidFill>
                         </a:rPr>
-                        <a:t>Fri 03 Jul 2026  12:00 AM</a:t>
+                        <a:t>Fri 14 Aug 2026  12:00 AM</a:t>
                       </a:r>
                     </a:p>
                   </a:txBody>
@@ -13298,7 +13299,7 @@
                             <a:srgbClr val="E2E8F0"/>
                           </a:solidFill>
                         </a:rPr>
-                        <a:t>Thu 02 Jul 2026  10:00 PM</a:t>
+                        <a:t>Thu 13 Aug 2026  10:00 PM</a:t>
                       </a:r>
                     </a:p>
                   </a:txBody>
@@ -13340,7 +13341,7 @@
                             <a:srgbClr val="E2E8F0"/>
                           </a:solidFill>
                         </a:rPr>
-                        <a:t>https://events.sumologic.com/bp4qeam07022026-event-training</a:t>
+                        <a:t>https://events.sumologic.com/mobotessentialsam08132026-event-training</a:t>
                       </a:r>
                     </a:p>
                   </a:txBody>
@@ -13384,7 +13385,7 @@
                             <a:srgbClr val="E2E8F0"/>
                           </a:solidFill>
                         </a:rPr>
-                        <a:t>Best Practice for Query Efficiency PM</a:t>
+                        <a:t>Mobot Essentials PM</a:t>
                       </a:r>
                     </a:p>
                   </a:txBody>
@@ -13426,7 +13427,7 @@
                             <a:srgbClr val="E2E8F0"/>
                           </a:solidFill>
                         </a:rPr>
-                        <a:t>Thu 02 Jul 2026  04:00 PM  →  05:25 PM</a:t>
+                        <a:t>Thu 13 Aug 2026  04:00 PM  →  05:30 PM</a:t>
                       </a:r>
                     </a:p>
                   </a:txBody>
@@ -13468,7 +13469,7 @@
                             <a:srgbClr val="E2E8F0"/>
                           </a:solidFill>
                         </a:rPr>
-                        <a:t>Fri 03 Jul 2026  11:00 AM</a:t>
+                        <a:t>Fri 14 Aug 2026  11:00 AM</a:t>
                       </a:r>
                     </a:p>
                   </a:txBody>
@@ -13510,7 +13511,7 @@
                             <a:srgbClr val="E2E8F0"/>
                           </a:solidFill>
                         </a:rPr>
-                        <a:t>Fri 03 Jul 2026  09:00 AM</a:t>
+                        <a:t>Fri 14 Aug 2026  09:00 AM</a:t>
                       </a:r>
                     </a:p>
                   </a:txBody>
@@ -13552,7 +13553,7 @@
                             <a:srgbClr val="E2E8F0"/>
                           </a:solidFill>
                         </a:rPr>
-                        <a:t>Fri 03 Jul 2026  07:00 AM</a:t>
+                        <a:t>Fri 14 Aug 2026  07:00 AM</a:t>
                       </a:r>
                     </a:p>
                   </a:txBody>
@@ -13594,7 +13595,7 @@
                             <a:srgbClr val="E2E8F0"/>
                           </a:solidFill>
                         </a:rPr>
-                        <a:t>https://events.sumologic.com/bp4qepm07022026-event-training</a:t>
+                        <a:t>https://events.sumologic.com/mobotessentialspm08132026-event-training</a:t>
                       </a:r>
                     </a:p>
                   </a:txBody>
@@ -13638,7 +13639,7 @@
                             <a:srgbClr val="E2E8F0"/>
                           </a:solidFill>
                         </a:rPr>
-                        <a:t>Administration AM</a:t>
+                        <a:t>Essential Cloud SIEM Skills for SOC Analysts AM</a:t>
                       </a:r>
                     </a:p>
                   </a:txBody>
@@ -13680,7 +13681,7 @@
                             <a:srgbClr val="E2E8F0"/>
                           </a:solidFill>
                         </a:rPr>
-                        <a:t>Tue 07 Jul 2026  07:00 AM  →  10:00 AM</a:t>
+                        <a:t>Tue 18 Aug 2026  07:00 AM  →  08:30 AM</a:t>
                       </a:r>
                     </a:p>
                   </a:txBody>
@@ -13722,7 +13723,7 @@
                             <a:srgbClr val="E2E8F0"/>
                           </a:solidFill>
                         </a:rPr>
-                        <a:t>Wed 08 Jul 2026  02:00 AM</a:t>
+                        <a:t>Wed 19 Aug 2026  02:00 AM</a:t>
                       </a:r>
                     </a:p>
                   </a:txBody>
@@ -13764,7 +13765,7 @@
                             <a:srgbClr val="E2E8F0"/>
                           </a:solidFill>
                         </a:rPr>
-                        <a:t>Wed 08 Jul 2026  12:00 AM</a:t>
+                        <a:t>Wed 19 Aug 2026  12:00 AM</a:t>
                       </a:r>
                     </a:p>
                   </a:txBody>
@@ -13806,7 +13807,7 @@
                             <a:srgbClr val="E2E8F0"/>
                           </a:solidFill>
                         </a:rPr>
-                        <a:t>Tue 07 Jul 2026  10:00 PM</a:t>
+                        <a:t>Tue 18 Aug 2026  10:00 PM</a:t>
                       </a:r>
                     </a:p>
                   </a:txBody>
@@ -13848,7 +13849,7 @@
                             <a:srgbClr val="E2E8F0"/>
                           </a:solidFill>
                         </a:rPr>
-                        <a:t>https://events.sumologic.com/administrationam07072026-event-training</a:t>
+                        <a:t>https://events.sumologic.com/esscloudsiemam08182026-event-training</a:t>
                       </a:r>
                     </a:p>
                   </a:txBody>
@@ -13892,7 +13893,7 @@
                             <a:srgbClr val="E2E8F0"/>
                           </a:solidFill>
                         </a:rPr>
-                        <a:t>Administration PM</a:t>
+                        <a:t>Essential Cloud SIEM Skills for SOC Analysts PM</a:t>
                       </a:r>
                     </a:p>
                   </a:txBody>
@@ -13934,7 +13935,7 @@
                             <a:srgbClr val="E2E8F0"/>
                           </a:solidFill>
                         </a:rPr>
-                        <a:t>Tue 07 Jul 2026  04:00 PM  →  07:00 PM</a:t>
+                        <a:t>Tue 18 Aug 2026  04:00 PM  →  05:30 PM</a:t>
                       </a:r>
                     </a:p>
                   </a:txBody>
@@ -13976,7 +13977,7 @@
                             <a:srgbClr val="E2E8F0"/>
                           </a:solidFill>
                         </a:rPr>
-                        <a:t>Wed 08 Jul 2026  11:00 AM</a:t>
+                        <a:t>Wed 19 Aug 2026  11:00 AM</a:t>
                       </a:r>
                     </a:p>
                   </a:txBody>
@@ -14018,7 +14019,7 @@
                             <a:srgbClr val="E2E8F0"/>
                           </a:solidFill>
                         </a:rPr>
-                        <a:t>Wed 08 Jul 2026  09:00 AM</a:t>
+                        <a:t>Wed 19 Aug 2026  09:00 AM</a:t>
                       </a:r>
                     </a:p>
                   </a:txBody>
@@ -14060,7 +14061,7 @@
                             <a:srgbClr val="E2E8F0"/>
                           </a:solidFill>
                         </a:rPr>
-                        <a:t>Wed 08 Jul 2026  07:00 AM</a:t>
+                        <a:t>Wed 19 Aug 2026  07:00 AM</a:t>
                       </a:r>
                     </a:p>
                   </a:txBody>
@@ -14102,7 +14103,7 @@
                             <a:srgbClr val="E2E8F0"/>
                           </a:solidFill>
                         </a:rPr>
-                        <a:t>https://events.sumologic.com/administrationpm07072026-event-training</a:t>
+                        <a:t>https://events.sumologic.com/esscloudsiempm08182026-event-training</a:t>
                       </a:r>
                     </a:p>
                   </a:txBody>
@@ -14146,7 +14147,7 @@
                             <a:srgbClr val="E2E8F0"/>
                           </a:solidFill>
                         </a:rPr>
-                        <a:t>Metrics Analytics AM</a:t>
+                        <a:t>Cloud SIEM AM</a:t>
                       </a:r>
                     </a:p>
                   </a:txBody>
@@ -14188,7 +14189,7 @@
                             <a:srgbClr val="E2E8F0"/>
                           </a:solidFill>
                         </a:rPr>
-                        <a:t>Wed 08 Jul 2026  07:00 AM  →  10:00 AM</a:t>
+                        <a:t>Wed 19 Aug 2026  07:00 AM  →  10:00 AM</a:t>
                       </a:r>
                     </a:p>
                   </a:txBody>
@@ -14230,7 +14231,7 @@
                             <a:srgbClr val="E2E8F0"/>
                           </a:solidFill>
                         </a:rPr>
-                        <a:t>Thu 09 Jul 2026  02:00 AM</a:t>
+                        <a:t>Thu 20 Aug 2026  02:00 AM</a:t>
                       </a:r>
                     </a:p>
                   </a:txBody>
@@ -14272,7 +14273,7 @@
                             <a:srgbClr val="E2E8F0"/>
                           </a:solidFill>
                         </a:rPr>
-                        <a:t>Thu 09 Jul 2026  12:00 AM</a:t>
+                        <a:t>Thu 20 Aug 2026  12:00 AM</a:t>
                       </a:r>
                     </a:p>
                   </a:txBody>
@@ -14314,7 +14315,7 @@
                             <a:srgbClr val="E2E8F0"/>
                           </a:solidFill>
                         </a:rPr>
-                        <a:t>Wed 08 Jul 2026  10:00 PM</a:t>
+                        <a:t>Wed 19 Aug 2026  10:00 PM</a:t>
                       </a:r>
                     </a:p>
                   </a:txBody>
@@ -14356,7 +14357,7 @@
                             <a:srgbClr val="E2E8F0"/>
                           </a:solidFill>
                         </a:rPr>
-                        <a:t>https://events.sumologic.com/metricanalyticsam07082026-event-training</a:t>
+                        <a:t>https://events.sumologic.com/cloudsiemam08192026-event-training</a:t>
                       </a:r>
                     </a:p>
                   </a:txBody>
@@ -14400,7 +14401,7 @@
                             <a:srgbClr val="E2E8F0"/>
                           </a:solidFill>
                         </a:rPr>
-                        <a:t>Metrics Analytics PM</a:t>
+                        <a:t>Cloud SIEM PM</a:t>
                       </a:r>
                     </a:p>
                   </a:txBody>
@@ -14442,7 +14443,7 @@
                             <a:srgbClr val="E2E8F0"/>
                           </a:solidFill>
                         </a:rPr>
-                        <a:t>Wed 08 Jul 2026  04:00 PM  →  07:00 PM</a:t>
+                        <a:t>Wed 19 Aug 2026  04:00 PM  →  07:00 PM</a:t>
                       </a:r>
                     </a:p>
                   </a:txBody>
@@ -14484,7 +14485,7 @@
                             <a:srgbClr val="E2E8F0"/>
                           </a:solidFill>
                         </a:rPr>
-                        <a:t>Thu 09 Jul 2026  11:00 AM</a:t>
+                        <a:t>Thu 20 Aug 2026  11:00 AM</a:t>
                       </a:r>
                     </a:p>
                   </a:txBody>
@@ -14526,7 +14527,7 @@
                             <a:srgbClr val="E2E8F0"/>
                           </a:solidFill>
                         </a:rPr>
-                        <a:t>Thu 09 Jul 2026  09:00 AM</a:t>
+                        <a:t>Thu 20 Aug 2026  09:00 AM</a:t>
                       </a:r>
                     </a:p>
                   </a:txBody>
@@ -14568,7 +14569,7 @@
                             <a:srgbClr val="E2E8F0"/>
                           </a:solidFill>
                         </a:rPr>
-                        <a:t>Thu 09 Jul 2026  07:00 AM</a:t>
+                        <a:t>Thu 20 Aug 2026  07:00 AM</a:t>
                       </a:r>
                     </a:p>
                   </a:txBody>
@@ -14610,7 +14611,7 @@
                             <a:srgbClr val="E2E8F0"/>
                           </a:solidFill>
                         </a:rPr>
-                        <a:t>https://events.sumologic.com/metricanalyticspm07082026-event-training</a:t>
+                        <a:t>https://events.sumologic.com/cloudsiempm08192026-event-training</a:t>
                       </a:r>
                     </a:p>
                   </a:txBody>
@@ -14654,7 +14655,7 @@
                             <a:srgbClr val="E2E8F0"/>
                           </a:solidFill>
                         </a:rPr>
-                        <a:t>Mobot Essentials AM</a:t>
+                        <a:t>Welcome Webinar AM</a:t>
                       </a:r>
                     </a:p>
                   </a:txBody>
@@ -14696,7 +14697,7 @@
                             <a:srgbClr val="E2E8F0"/>
                           </a:solidFill>
                         </a:rPr>
-                        <a:t>Thu 09 Jul 2026  07:00 AM  →  08:30 AM</a:t>
+                        <a:t>Tue 08 Sep 2026  05:00 AM  →  06:00 AM</a:t>
                       </a:r>
                     </a:p>
                   </a:txBody>
@@ -14738,7 +14739,7 @@
                             <a:srgbClr val="E2E8F0"/>
                           </a:solidFill>
                         </a:rPr>
-                        <a:t>Fri 10 Jul 2026  02:00 AM</a:t>
+                        <a:t>Wed 09 Sep 2026  12:00 AM</a:t>
                       </a:r>
                     </a:p>
                   </a:txBody>
@@ -14780,7 +14781,7 @@
                             <a:srgbClr val="E2E8F0"/>
                           </a:solidFill>
                         </a:rPr>
-                        <a:t>Fri 10 Jul 2026  12:00 AM</a:t>
+                        <a:t>Tue 08 Sep 2026  10:00 PM</a:t>
                       </a:r>
                     </a:p>
                   </a:txBody>
@@ -14822,7 +14823,7 @@
                             <a:srgbClr val="E2E8F0"/>
                           </a:solidFill>
                         </a:rPr>
-                        <a:t>Thu 09 Jul 2026  10:00 PM</a:t>
+                        <a:t>Tue 08 Sep 2026  08:00 PM</a:t>
                       </a:r>
                     </a:p>
                   </a:txBody>
@@ -14864,7 +14865,7 @@
                             <a:srgbClr val="E2E8F0"/>
                           </a:solidFill>
                         </a:rPr>
-                        <a:t>https://events.sumologic.com/mobotam07092026-event-training</a:t>
+                        <a:t>https://events.sumologic.com/welcomewebinaram09082026-event-training</a:t>
                       </a:r>
                     </a:p>
                   </a:txBody>
@@ -14908,7 +14909,7 @@
                             <a:srgbClr val="E2E8F0"/>
                           </a:solidFill>
                         </a:rPr>
-                        <a:t>Mobot Essentials PM</a:t>
+                        <a:t>Fundamentals AM</a:t>
                       </a:r>
                     </a:p>
                   </a:txBody>
@@ -14950,7 +14951,7 @@
                             <a:srgbClr val="E2E8F0"/>
                           </a:solidFill>
                         </a:rPr>
-                        <a:t>Thu 09 Jul 2026  04:00 PM  →  05:30 PM</a:t>
+                        <a:t>Tue 08 Sep 2026  07:00 AM  →  10:00 AM</a:t>
                       </a:r>
                     </a:p>
                   </a:txBody>
@@ -14992,7 +14993,7 @@
                             <a:srgbClr val="E2E8F0"/>
                           </a:solidFill>
                         </a:rPr>
-                        <a:t>Fri 10 Jul 2026  11:00 AM</a:t>
+                        <a:t>Wed 09 Sep 2026  02:00 AM</a:t>
                       </a:r>
                     </a:p>
                   </a:txBody>
@@ -15034,7 +15035,7 @@
                             <a:srgbClr val="E2E8F0"/>
                           </a:solidFill>
                         </a:rPr>
-                        <a:t>Fri 10 Jul 2026  09:00 AM</a:t>
+                        <a:t>Wed 09 Sep 2026  12:00 AM</a:t>
                       </a:r>
                     </a:p>
                   </a:txBody>
@@ -15076,7 +15077,7 @@
                             <a:srgbClr val="E2E8F0"/>
                           </a:solidFill>
                         </a:rPr>
-                        <a:t>Fri 10 Jul 2026  07:00 AM</a:t>
+                        <a:t>Tue 08 Sep 2026  10:00 PM</a:t>
                       </a:r>
                     </a:p>
                   </a:txBody>
@@ -15118,7 +15119,7 @@
                             <a:srgbClr val="E2E8F0"/>
                           </a:solidFill>
                         </a:rPr>
-                        <a:t>https://events.sumologic.com/mobotessentialspm07092026-event-training</a:t>
+                        <a:t>https://events.sumologic.com/fundamentalsam09082026-event-training</a:t>
                       </a:r>
                     </a:p>
                   </a:txBody>
@@ -15318,7 +15319,7 @@
                   <a:srgbClr val="00B4D8"/>
                 </a:solidFill>
               </a:rPr>
-              <a:t>Sumo Logic — Virtual Training Schedule   ·   14 Jul – 16 Jul 2026   (5/5)</a:t>
+              <a:t>Sumo Logic — Virtual Training Schedule   ·   08 Sep – 16 Sep 2026   (5/6)</a:t>
             </a:r>
           </a:p>
         </p:txBody>
@@ -15352,7 +15353,7 @@
                   <a:srgbClr val="94A3B8"/>
                 </a:solidFill>
               </a:rPr>
-              <a:t>p 5/5</a:t>
+              <a:t>p 5/6</a:t>
             </a:r>
           </a:p>
         </p:txBody>
@@ -15367,7 +15368,7 @@
         </p:nvGraphicFramePr>
         <p:xfrm>
           <a:off x="164592" y="640080"/>
-          <a:ext cx="11795760" cy="2834640"/>
+          <a:ext cx="11795760" cy="4517136"/>
         </p:xfrm>
         <a:graphic>
           <a:graphicData uri="http://schemas.openxmlformats.org/drawingml/2006/table">
@@ -15650,7 +15651,7 @@
                             <a:srgbClr val="E2E8F0"/>
                           </a:solidFill>
                         </a:rPr>
-                        <a:t>Essential Cloud SIEM skills for SOC Analysts AM</a:t>
+                        <a:t>Welcome Webinar PM</a:t>
                       </a:r>
                     </a:p>
                   </a:txBody>
@@ -15692,7 +15693,7 @@
                             <a:srgbClr val="E2E8F0"/>
                           </a:solidFill>
                         </a:rPr>
-                        <a:t>Tue 14 Jul 2026  07:00 AM  →  08:30 AM</a:t>
+                        <a:t>Tue 08 Sep 2026  02:00 PM  →  03:00 PM</a:t>
                       </a:r>
                     </a:p>
                   </a:txBody>
@@ -15734,7 +15735,7 @@
                             <a:srgbClr val="E2E8F0"/>
                           </a:solidFill>
                         </a:rPr>
-                        <a:t>Wed 15 Jul 2026  02:00 AM</a:t>
+                        <a:t>Wed 09 Sep 2026  09:00 AM</a:t>
                       </a:r>
                     </a:p>
                   </a:txBody>
@@ -15776,7 +15777,7 @@
                             <a:srgbClr val="E2E8F0"/>
                           </a:solidFill>
                         </a:rPr>
-                        <a:t>Wed 15 Jul 2026  12:00 AM</a:t>
+                        <a:t>Wed 09 Sep 2026  07:00 AM</a:t>
                       </a:r>
                     </a:p>
                   </a:txBody>
@@ -15818,7 +15819,7 @@
                             <a:srgbClr val="E2E8F0"/>
                           </a:solidFill>
                         </a:rPr>
-                        <a:t>Tue 14 Jul 2026  10:00 PM</a:t>
+                        <a:t>Wed 09 Sep 2026  05:00 AM</a:t>
                       </a:r>
                     </a:p>
                   </a:txBody>
@@ -15860,7 +15861,7 @@
                             <a:srgbClr val="E2E8F0"/>
                           </a:solidFill>
                         </a:rPr>
-                        <a:t>https://events.sumologic.com/esscloudsiemam07142026-event-training</a:t>
+                        <a:t>https://events.sumologic.com/welcomewebinarpm09082026-event-training</a:t>
                       </a:r>
                     </a:p>
                   </a:txBody>
@@ -15904,7 +15905,7 @@
                             <a:srgbClr val="E2E8F0"/>
                           </a:solidFill>
                         </a:rPr>
-                        <a:t>Essential Cloud SIEM skills for SOC Analysts PM</a:t>
+                        <a:t>Fundamentals PM</a:t>
                       </a:r>
                     </a:p>
                   </a:txBody>
@@ -15946,7 +15947,7 @@
                             <a:srgbClr val="E2E8F0"/>
                           </a:solidFill>
                         </a:rPr>
-                        <a:t>Tue 14 Jul 2026  04:00 PM  →  05:30 PM</a:t>
+                        <a:t>Tue 08 Sep 2026  04:00 PM  →  07:00 PM</a:t>
                       </a:r>
                     </a:p>
                   </a:txBody>
@@ -15988,7 +15989,7 @@
                             <a:srgbClr val="E2E8F0"/>
                           </a:solidFill>
                         </a:rPr>
-                        <a:t>Wed 15 Jul 2026  11:00 AM</a:t>
+                        <a:t>Wed 09 Sep 2026  11:00 AM</a:t>
                       </a:r>
                     </a:p>
                   </a:txBody>
@@ -16030,7 +16031,7 @@
                             <a:srgbClr val="E2E8F0"/>
                           </a:solidFill>
                         </a:rPr>
-                        <a:t>Wed 15 Jul 2026  09:00 AM</a:t>
+                        <a:t>Wed 09 Sep 2026  09:00 AM</a:t>
                       </a:r>
                     </a:p>
                   </a:txBody>
@@ -16072,7 +16073,7 @@
                             <a:srgbClr val="E2E8F0"/>
                           </a:solidFill>
                         </a:rPr>
-                        <a:t>Wed 15 Jul 2026  07:00 AM</a:t>
+                        <a:t>Wed 09 Sep 2026  07:00 AM</a:t>
                       </a:r>
                     </a:p>
                   </a:txBody>
@@ -16114,7 +16115,7 @@
                             <a:srgbClr val="E2E8F0"/>
                           </a:solidFill>
                         </a:rPr>
-                        <a:t>https://events.sumologic.com/esscloudsiem07142026-event-training</a:t>
+                        <a:t>https://events.sumologic.com/fundamentalspm09082026-event-training</a:t>
                       </a:r>
                     </a:p>
                   </a:txBody>
@@ -16158,7 +16159,7 @@
                             <a:srgbClr val="E2E8F0"/>
                           </a:solidFill>
                         </a:rPr>
-                        <a:t>Cloud SIEM AM</a:t>
+                        <a:t>Search Mastery AM</a:t>
                       </a:r>
                     </a:p>
                   </a:txBody>
@@ -16200,7 +16201,7 @@
                             <a:srgbClr val="E2E8F0"/>
                           </a:solidFill>
                         </a:rPr>
-                        <a:t>Wed 15 Jul 2026  07:00 AM  →  10:00 AM</a:t>
+                        <a:t>Wed 09 Sep 2026  07:00 AM  →  10:00 AM</a:t>
                       </a:r>
                     </a:p>
                   </a:txBody>
@@ -16242,7 +16243,7 @@
                             <a:srgbClr val="E2E8F0"/>
                           </a:solidFill>
                         </a:rPr>
-                        <a:t>Thu 16 Jul 2026  02:00 AM</a:t>
+                        <a:t>Thu 10 Sep 2026  02:00 AM</a:t>
                       </a:r>
                     </a:p>
                   </a:txBody>
@@ -16284,7 +16285,7 @@
                             <a:srgbClr val="E2E8F0"/>
                           </a:solidFill>
                         </a:rPr>
-                        <a:t>Thu 16 Jul 2026  12:00 AM</a:t>
+                        <a:t>Thu 10 Sep 2026  12:00 AM</a:t>
                       </a:r>
                     </a:p>
                   </a:txBody>
@@ -16326,7 +16327,7 @@
                             <a:srgbClr val="E2E8F0"/>
                           </a:solidFill>
                         </a:rPr>
-                        <a:t>Wed 15 Jul 2026  10:00 PM</a:t>
+                        <a:t>Wed 09 Sep 2026  10:00 PM</a:t>
                       </a:r>
                     </a:p>
                   </a:txBody>
@@ -16368,7 +16369,7 @@
                             <a:srgbClr val="E2E8F0"/>
                           </a:solidFill>
                         </a:rPr>
-                        <a:t>https://events.sumologic.com/cloudsiemam07152026-event-training</a:t>
+                        <a:t>https://events.sumologic.com/searchmasteryam09092026-event-training</a:t>
                       </a:r>
                     </a:p>
                   </a:txBody>
@@ -16412,7 +16413,7 @@
                             <a:srgbClr val="E2E8F0"/>
                           </a:solidFill>
                         </a:rPr>
-                        <a:t>Cloud SIEM PM</a:t>
+                        <a:t>Search Mastery PM</a:t>
                       </a:r>
                     </a:p>
                   </a:txBody>
@@ -16454,7 +16455,7 @@
                             <a:srgbClr val="E2E8F0"/>
                           </a:solidFill>
                         </a:rPr>
-                        <a:t>Wed 15 Jul 2026  04:00 PM  →  07:00 PM</a:t>
+                        <a:t>Wed 09 Sep 2026  04:00 PM  →  07:00 PM</a:t>
                       </a:r>
                     </a:p>
                   </a:txBody>
@@ -16496,7 +16497,7 @@
                             <a:srgbClr val="E2E8F0"/>
                           </a:solidFill>
                         </a:rPr>
-                        <a:t>Thu 16 Jul 2026  11:00 AM</a:t>
+                        <a:t>Thu 10 Sep 2026  11:00 AM</a:t>
                       </a:r>
                     </a:p>
                   </a:txBody>
@@ -16538,7 +16539,7 @@
                             <a:srgbClr val="E2E8F0"/>
                           </a:solidFill>
                         </a:rPr>
-                        <a:t>Thu 16 Jul 2026  09:00 AM</a:t>
+                        <a:t>Thu 10 Sep 2026  09:00 AM</a:t>
                       </a:r>
                     </a:p>
                   </a:txBody>
@@ -16580,7 +16581,7 @@
                             <a:srgbClr val="E2E8F0"/>
                           </a:solidFill>
                         </a:rPr>
-                        <a:t>Thu 16 Jul 2026  07:00 AM</a:t>
+                        <a:t>Thu 10 Sep 2026  07:00 AM</a:t>
                       </a:r>
                     </a:p>
                   </a:txBody>
@@ -16622,7 +16623,7 @@
                             <a:srgbClr val="E2E8F0"/>
                           </a:solidFill>
                         </a:rPr>
-                        <a:t>https://events.sumologic.com/cloudsiempm07152026-event-training</a:t>
+                        <a:t>https://events.sumologic.com/searchmasterypm09092026-event-training</a:t>
                       </a:r>
                     </a:p>
                   </a:txBody>
@@ -16666,7 +16667,7 @@
                             <a:srgbClr val="E2E8F0"/>
                           </a:solidFill>
                         </a:rPr>
-                        <a:t>Automation AM</a:t>
+                        <a:t>Best Practices for Query Efficiency AM</a:t>
                       </a:r>
                     </a:p>
                   </a:txBody>
@@ -16708,7 +16709,7 @@
                             <a:srgbClr val="E2E8F0"/>
                           </a:solidFill>
                         </a:rPr>
-                        <a:t>Thu 16 Jul 2026  07:00 AM  →  08:30 AM</a:t>
+                        <a:t>Thu 10 Sep 2026  07:00 AM  →  08:30 AM</a:t>
                       </a:r>
                     </a:p>
                   </a:txBody>
@@ -16750,7 +16751,7 @@
                             <a:srgbClr val="E2E8F0"/>
                           </a:solidFill>
                         </a:rPr>
-                        <a:t>Fri 17 Jul 2026  02:00 AM</a:t>
+                        <a:t>Fri 11 Sep 2026  02:00 AM</a:t>
                       </a:r>
                     </a:p>
                   </a:txBody>
@@ -16792,7 +16793,7 @@
                             <a:srgbClr val="E2E8F0"/>
                           </a:solidFill>
                         </a:rPr>
-                        <a:t>Fri 17 Jul 2026  12:00 AM</a:t>
+                        <a:t>Fri 11 Sep 2026  12:00 AM</a:t>
                       </a:r>
                     </a:p>
                   </a:txBody>
@@ -16834,7 +16835,7 @@
                             <a:srgbClr val="E2E8F0"/>
                           </a:solidFill>
                         </a:rPr>
-                        <a:t>Thu 16 Jul 2026  10:00 PM</a:t>
+                        <a:t>Thu 10 Sep 2026  10:00 PM</a:t>
                       </a:r>
                     </a:p>
                   </a:txBody>
@@ -16876,7 +16877,7 @@
                             <a:srgbClr val="E2E8F0"/>
                           </a:solidFill>
                         </a:rPr>
-                        <a:t>https://events.sumologic.com/automationam07162026-event-training</a:t>
+                        <a:t>https://events.sumologic.com/bp4qeam09102026-event-training</a:t>
                       </a:r>
                     </a:p>
                   </a:txBody>
@@ -16920,7 +16921,7 @@
                             <a:srgbClr val="E2E8F0"/>
                           </a:solidFill>
                         </a:rPr>
-                        <a:t>Automation PM</a:t>
+                        <a:t>Best Practices for Query Efficiency PM</a:t>
                       </a:r>
                     </a:p>
                   </a:txBody>
@@ -16962,7 +16963,7 @@
                             <a:srgbClr val="E2E8F0"/>
                           </a:solidFill>
                         </a:rPr>
-                        <a:t>Thu 16 Jul 2026  04:00 PM  →  05:30 PM</a:t>
+                        <a:t>Thu 10 Sep 2026  04:00 PM  →  05:30 PM</a:t>
                       </a:r>
                     </a:p>
                   </a:txBody>
@@ -17004,7 +17005,7 @@
                             <a:srgbClr val="E2E8F0"/>
                           </a:solidFill>
                         </a:rPr>
-                        <a:t>Fri 17 Jul 2026  11:00 AM</a:t>
+                        <a:t>Fri 11 Sep 2026  11:00 AM</a:t>
                       </a:r>
                     </a:p>
                   </a:txBody>
@@ -17046,7 +17047,7 @@
                             <a:srgbClr val="E2E8F0"/>
                           </a:solidFill>
                         </a:rPr>
-                        <a:t>Fri 17 Jul 2026  09:00 AM</a:t>
+                        <a:t>Fri 11 Sep 2026  09:00 AM</a:t>
                       </a:r>
                     </a:p>
                   </a:txBody>
@@ -17088,7 +17089,7 @@
                             <a:srgbClr val="E2E8F0"/>
                           </a:solidFill>
                         </a:rPr>
-                        <a:t>Fri 17 Jul 2026  07:00 AM</a:t>
+                        <a:t>Fri 11 Sep 2026  07:00 AM</a:t>
                       </a:r>
                     </a:p>
                   </a:txBody>
@@ -17130,7 +17131,1023 @@
                             <a:srgbClr val="E2E8F0"/>
                           </a:solidFill>
                         </a:rPr>
-                        <a:t>https://events.sumologic.com/automationpm07162026-event-training</a:t>
+                        <a:t>https://events.sumologic.com/bp4qepm09102026-event-training</a:t>
+                      </a:r>
+                    </a:p>
+                  </a:txBody>
+                  <a:tcPr>
+                    <a:solidFill>
+                      <a:srgbClr val="1A1D27"/>
+                    </a:solidFill>
+                    <a:lnL w="6350" cap="flat">
+                      <a:solidFill>
+                        <a:srgbClr val="2E3348"/>
+                      </a:solidFill>
+                    </a:lnL>
+                    <a:lnR w="6350" cap="flat">
+                      <a:solidFill>
+                        <a:srgbClr val="2E3348"/>
+                      </a:solidFill>
+                    </a:lnR>
+                    <a:lnT w="6350" cap="flat">
+                      <a:solidFill>
+                        <a:srgbClr val="2E3348"/>
+                      </a:solidFill>
+                    </a:lnT>
+                    <a:lnB w="6350" cap="flat">
+                      <a:solidFill>
+                        <a:srgbClr val="2E3348"/>
+                      </a:solidFill>
+                    </a:lnB>
+                  </a:tcPr>
+                </a:tc>
+              </a:tr>
+              <a:tr h="420624">
+                <a:tc>
+                  <a:txBody>
+                    <a:bodyPr wrap="square"/>
+                    <a:lstStyle/>
+                    <a:p>
+                      <a:pPr algn="l"/>
+                      <a:r>
+                        <a:rPr sz="800" b="0">
+                          <a:solidFill>
+                            <a:srgbClr val="E2E8F0"/>
+                          </a:solidFill>
+                        </a:rPr>
+                        <a:t>Administration AM</a:t>
+                      </a:r>
+                    </a:p>
+                  </a:txBody>
+                  <a:tcPr>
+                    <a:solidFill>
+                      <a:srgbClr val="0F1117"/>
+                    </a:solidFill>
+                    <a:lnL w="6350" cap="flat">
+                      <a:solidFill>
+                        <a:srgbClr val="2E3348"/>
+                      </a:solidFill>
+                    </a:lnL>
+                    <a:lnR w="6350" cap="flat">
+                      <a:solidFill>
+                        <a:srgbClr val="2E3348"/>
+                      </a:solidFill>
+                    </a:lnR>
+                    <a:lnT w="6350" cap="flat">
+                      <a:solidFill>
+                        <a:srgbClr val="2E3348"/>
+                      </a:solidFill>
+                    </a:lnT>
+                    <a:lnB w="6350" cap="flat">
+                      <a:solidFill>
+                        <a:srgbClr val="2E3348"/>
+                      </a:solidFill>
+                    </a:lnB>
+                  </a:tcPr>
+                </a:tc>
+                <a:tc>
+                  <a:txBody>
+                    <a:bodyPr wrap="none"/>
+                    <a:lstStyle/>
+                    <a:p>
+                      <a:pPr algn="l"/>
+                      <a:r>
+                        <a:rPr sz="800" b="0">
+                          <a:solidFill>
+                            <a:srgbClr val="E2E8F0"/>
+                          </a:solidFill>
+                        </a:rPr>
+                        <a:t>Tue 15 Sep 2026  07:00 AM  →  10:00 AM</a:t>
+                      </a:r>
+                    </a:p>
+                  </a:txBody>
+                  <a:tcPr>
+                    <a:solidFill>
+                      <a:srgbClr val="0F1117"/>
+                    </a:solidFill>
+                    <a:lnL w="6350" cap="flat">
+                      <a:solidFill>
+                        <a:srgbClr val="2E3348"/>
+                      </a:solidFill>
+                    </a:lnL>
+                    <a:lnR w="6350" cap="flat">
+                      <a:solidFill>
+                        <a:srgbClr val="2E3348"/>
+                      </a:solidFill>
+                    </a:lnR>
+                    <a:lnT w="6350" cap="flat">
+                      <a:solidFill>
+                        <a:srgbClr val="2E3348"/>
+                      </a:solidFill>
+                    </a:lnT>
+                    <a:lnB w="6350" cap="flat">
+                      <a:solidFill>
+                        <a:srgbClr val="2E3348"/>
+                      </a:solidFill>
+                    </a:lnB>
+                  </a:tcPr>
+                </a:tc>
+                <a:tc>
+                  <a:txBody>
+                    <a:bodyPr wrap="none"/>
+                    <a:lstStyle/>
+                    <a:p>
+                      <a:pPr algn="l"/>
+                      <a:r>
+                        <a:rPr sz="800" b="0">
+                          <a:solidFill>
+                            <a:srgbClr val="E2E8F0"/>
+                          </a:solidFill>
+                        </a:rPr>
+                        <a:t>Wed 16 Sep 2026  02:00 AM</a:t>
+                      </a:r>
+                    </a:p>
+                  </a:txBody>
+                  <a:tcPr>
+                    <a:solidFill>
+                      <a:srgbClr val="0F1117"/>
+                    </a:solidFill>
+                    <a:lnL w="6350" cap="flat">
+                      <a:solidFill>
+                        <a:srgbClr val="2E3348"/>
+                      </a:solidFill>
+                    </a:lnL>
+                    <a:lnR w="6350" cap="flat">
+                      <a:solidFill>
+                        <a:srgbClr val="2E3348"/>
+                      </a:solidFill>
+                    </a:lnR>
+                    <a:lnT w="6350" cap="flat">
+                      <a:solidFill>
+                        <a:srgbClr val="2E3348"/>
+                      </a:solidFill>
+                    </a:lnT>
+                    <a:lnB w="6350" cap="flat">
+                      <a:solidFill>
+                        <a:srgbClr val="2E3348"/>
+                      </a:solidFill>
+                    </a:lnB>
+                  </a:tcPr>
+                </a:tc>
+                <a:tc>
+                  <a:txBody>
+                    <a:bodyPr wrap="none"/>
+                    <a:lstStyle/>
+                    <a:p>
+                      <a:pPr algn="l"/>
+                      <a:r>
+                        <a:rPr sz="800" b="0">
+                          <a:solidFill>
+                            <a:srgbClr val="E2E8F0"/>
+                          </a:solidFill>
+                        </a:rPr>
+                        <a:t>Wed 16 Sep 2026  12:00 AM</a:t>
+                      </a:r>
+                    </a:p>
+                  </a:txBody>
+                  <a:tcPr>
+                    <a:solidFill>
+                      <a:srgbClr val="0F1117"/>
+                    </a:solidFill>
+                    <a:lnL w="6350" cap="flat">
+                      <a:solidFill>
+                        <a:srgbClr val="2E3348"/>
+                      </a:solidFill>
+                    </a:lnL>
+                    <a:lnR w="6350" cap="flat">
+                      <a:solidFill>
+                        <a:srgbClr val="2E3348"/>
+                      </a:solidFill>
+                    </a:lnR>
+                    <a:lnT w="6350" cap="flat">
+                      <a:solidFill>
+                        <a:srgbClr val="2E3348"/>
+                      </a:solidFill>
+                    </a:lnT>
+                    <a:lnB w="6350" cap="flat">
+                      <a:solidFill>
+                        <a:srgbClr val="2E3348"/>
+                      </a:solidFill>
+                    </a:lnB>
+                  </a:tcPr>
+                </a:tc>
+                <a:tc>
+                  <a:txBody>
+                    <a:bodyPr wrap="none"/>
+                    <a:lstStyle/>
+                    <a:p>
+                      <a:pPr algn="l"/>
+                      <a:r>
+                        <a:rPr sz="800" b="0">
+                          <a:solidFill>
+                            <a:srgbClr val="E2E8F0"/>
+                          </a:solidFill>
+                        </a:rPr>
+                        <a:t>Tue 15 Sep 2026  10:00 PM</a:t>
+                      </a:r>
+                    </a:p>
+                  </a:txBody>
+                  <a:tcPr>
+                    <a:solidFill>
+                      <a:srgbClr val="0F1117"/>
+                    </a:solidFill>
+                    <a:lnL w="6350" cap="flat">
+                      <a:solidFill>
+                        <a:srgbClr val="2E3348"/>
+                      </a:solidFill>
+                    </a:lnL>
+                    <a:lnR w="6350" cap="flat">
+                      <a:solidFill>
+                        <a:srgbClr val="2E3348"/>
+                      </a:solidFill>
+                    </a:lnR>
+                    <a:lnT w="6350" cap="flat">
+                      <a:solidFill>
+                        <a:srgbClr val="2E3348"/>
+                      </a:solidFill>
+                    </a:lnT>
+                    <a:lnB w="6350" cap="flat">
+                      <a:solidFill>
+                        <a:srgbClr val="2E3348"/>
+                      </a:solidFill>
+                    </a:lnB>
+                  </a:tcPr>
+                </a:tc>
+                <a:tc>
+                  <a:txBody>
+                    <a:bodyPr wrap="square"/>
+                    <a:lstStyle/>
+                    <a:p>
+                      <a:pPr algn="l"/>
+                      <a:r>
+                        <a:rPr sz="700" b="0">
+                          <a:solidFill>
+                            <a:srgbClr val="E2E8F0"/>
+                          </a:solidFill>
+                        </a:rPr>
+                        <a:t>https://events.sumologic.com/administrationam09152026-event-training</a:t>
+                      </a:r>
+                    </a:p>
+                  </a:txBody>
+                  <a:tcPr>
+                    <a:solidFill>
+                      <a:srgbClr val="0F1117"/>
+                    </a:solidFill>
+                    <a:lnL w="6350" cap="flat">
+                      <a:solidFill>
+                        <a:srgbClr val="2E3348"/>
+                      </a:solidFill>
+                    </a:lnL>
+                    <a:lnR w="6350" cap="flat">
+                      <a:solidFill>
+                        <a:srgbClr val="2E3348"/>
+                      </a:solidFill>
+                    </a:lnR>
+                    <a:lnT w="6350" cap="flat">
+                      <a:solidFill>
+                        <a:srgbClr val="2E3348"/>
+                      </a:solidFill>
+                    </a:lnT>
+                    <a:lnB w="6350" cap="flat">
+                      <a:solidFill>
+                        <a:srgbClr val="2E3348"/>
+                      </a:solidFill>
+                    </a:lnB>
+                  </a:tcPr>
+                </a:tc>
+              </a:tr>
+              <a:tr h="420624">
+                <a:tc>
+                  <a:txBody>
+                    <a:bodyPr wrap="square"/>
+                    <a:lstStyle/>
+                    <a:p>
+                      <a:pPr algn="l"/>
+                      <a:r>
+                        <a:rPr sz="800" b="0">
+                          <a:solidFill>
+                            <a:srgbClr val="E2E8F0"/>
+                          </a:solidFill>
+                        </a:rPr>
+                        <a:t>Administration PM</a:t>
+                      </a:r>
+                    </a:p>
+                  </a:txBody>
+                  <a:tcPr>
+                    <a:solidFill>
+                      <a:srgbClr val="1A1D27"/>
+                    </a:solidFill>
+                    <a:lnL w="6350" cap="flat">
+                      <a:solidFill>
+                        <a:srgbClr val="2E3348"/>
+                      </a:solidFill>
+                    </a:lnL>
+                    <a:lnR w="6350" cap="flat">
+                      <a:solidFill>
+                        <a:srgbClr val="2E3348"/>
+                      </a:solidFill>
+                    </a:lnR>
+                    <a:lnT w="6350" cap="flat">
+                      <a:solidFill>
+                        <a:srgbClr val="2E3348"/>
+                      </a:solidFill>
+                    </a:lnT>
+                    <a:lnB w="6350" cap="flat">
+                      <a:solidFill>
+                        <a:srgbClr val="2E3348"/>
+                      </a:solidFill>
+                    </a:lnB>
+                  </a:tcPr>
+                </a:tc>
+                <a:tc>
+                  <a:txBody>
+                    <a:bodyPr wrap="none"/>
+                    <a:lstStyle/>
+                    <a:p>
+                      <a:pPr algn="l"/>
+                      <a:r>
+                        <a:rPr sz="800" b="0">
+                          <a:solidFill>
+                            <a:srgbClr val="E2E8F0"/>
+                          </a:solidFill>
+                        </a:rPr>
+                        <a:t>Tue 15 Sep 2026  04:00 PM  →  07:00 PM</a:t>
+                      </a:r>
+                    </a:p>
+                  </a:txBody>
+                  <a:tcPr>
+                    <a:solidFill>
+                      <a:srgbClr val="1A1D27"/>
+                    </a:solidFill>
+                    <a:lnL w="6350" cap="flat">
+                      <a:solidFill>
+                        <a:srgbClr val="2E3348"/>
+                      </a:solidFill>
+                    </a:lnL>
+                    <a:lnR w="6350" cap="flat">
+                      <a:solidFill>
+                        <a:srgbClr val="2E3348"/>
+                      </a:solidFill>
+                    </a:lnR>
+                    <a:lnT w="6350" cap="flat">
+                      <a:solidFill>
+                        <a:srgbClr val="2E3348"/>
+                      </a:solidFill>
+                    </a:lnT>
+                    <a:lnB w="6350" cap="flat">
+                      <a:solidFill>
+                        <a:srgbClr val="2E3348"/>
+                      </a:solidFill>
+                    </a:lnB>
+                  </a:tcPr>
+                </a:tc>
+                <a:tc>
+                  <a:txBody>
+                    <a:bodyPr wrap="none"/>
+                    <a:lstStyle/>
+                    <a:p>
+                      <a:pPr algn="l"/>
+                      <a:r>
+                        <a:rPr sz="800" b="0">
+                          <a:solidFill>
+                            <a:srgbClr val="E2E8F0"/>
+                          </a:solidFill>
+                        </a:rPr>
+                        <a:t>Wed 16 Sep 2026  11:00 AM</a:t>
+                      </a:r>
+                    </a:p>
+                  </a:txBody>
+                  <a:tcPr>
+                    <a:solidFill>
+                      <a:srgbClr val="1A1D27"/>
+                    </a:solidFill>
+                    <a:lnL w="6350" cap="flat">
+                      <a:solidFill>
+                        <a:srgbClr val="2E3348"/>
+                      </a:solidFill>
+                    </a:lnL>
+                    <a:lnR w="6350" cap="flat">
+                      <a:solidFill>
+                        <a:srgbClr val="2E3348"/>
+                      </a:solidFill>
+                    </a:lnR>
+                    <a:lnT w="6350" cap="flat">
+                      <a:solidFill>
+                        <a:srgbClr val="2E3348"/>
+                      </a:solidFill>
+                    </a:lnT>
+                    <a:lnB w="6350" cap="flat">
+                      <a:solidFill>
+                        <a:srgbClr val="2E3348"/>
+                      </a:solidFill>
+                    </a:lnB>
+                  </a:tcPr>
+                </a:tc>
+                <a:tc>
+                  <a:txBody>
+                    <a:bodyPr wrap="none"/>
+                    <a:lstStyle/>
+                    <a:p>
+                      <a:pPr algn="l"/>
+                      <a:r>
+                        <a:rPr sz="800" b="0">
+                          <a:solidFill>
+                            <a:srgbClr val="E2E8F0"/>
+                          </a:solidFill>
+                        </a:rPr>
+                        <a:t>Wed 16 Sep 2026  09:00 AM</a:t>
+                      </a:r>
+                    </a:p>
+                  </a:txBody>
+                  <a:tcPr>
+                    <a:solidFill>
+                      <a:srgbClr val="1A1D27"/>
+                    </a:solidFill>
+                    <a:lnL w="6350" cap="flat">
+                      <a:solidFill>
+                        <a:srgbClr val="2E3348"/>
+                      </a:solidFill>
+                    </a:lnL>
+                    <a:lnR w="6350" cap="flat">
+                      <a:solidFill>
+                        <a:srgbClr val="2E3348"/>
+                      </a:solidFill>
+                    </a:lnR>
+                    <a:lnT w="6350" cap="flat">
+                      <a:solidFill>
+                        <a:srgbClr val="2E3348"/>
+                      </a:solidFill>
+                    </a:lnT>
+                    <a:lnB w="6350" cap="flat">
+                      <a:solidFill>
+                        <a:srgbClr val="2E3348"/>
+                      </a:solidFill>
+                    </a:lnB>
+                  </a:tcPr>
+                </a:tc>
+                <a:tc>
+                  <a:txBody>
+                    <a:bodyPr wrap="none"/>
+                    <a:lstStyle/>
+                    <a:p>
+                      <a:pPr algn="l"/>
+                      <a:r>
+                        <a:rPr sz="800" b="0">
+                          <a:solidFill>
+                            <a:srgbClr val="E2E8F0"/>
+                          </a:solidFill>
+                        </a:rPr>
+                        <a:t>Wed 16 Sep 2026  07:00 AM</a:t>
+                      </a:r>
+                    </a:p>
+                  </a:txBody>
+                  <a:tcPr>
+                    <a:solidFill>
+                      <a:srgbClr val="1A1D27"/>
+                    </a:solidFill>
+                    <a:lnL w="6350" cap="flat">
+                      <a:solidFill>
+                        <a:srgbClr val="2E3348"/>
+                      </a:solidFill>
+                    </a:lnL>
+                    <a:lnR w="6350" cap="flat">
+                      <a:solidFill>
+                        <a:srgbClr val="2E3348"/>
+                      </a:solidFill>
+                    </a:lnR>
+                    <a:lnT w="6350" cap="flat">
+                      <a:solidFill>
+                        <a:srgbClr val="2E3348"/>
+                      </a:solidFill>
+                    </a:lnT>
+                    <a:lnB w="6350" cap="flat">
+                      <a:solidFill>
+                        <a:srgbClr val="2E3348"/>
+                      </a:solidFill>
+                    </a:lnB>
+                  </a:tcPr>
+                </a:tc>
+                <a:tc>
+                  <a:txBody>
+                    <a:bodyPr wrap="square"/>
+                    <a:lstStyle/>
+                    <a:p>
+                      <a:pPr algn="l"/>
+                      <a:r>
+                        <a:rPr sz="700" b="0">
+                          <a:solidFill>
+                            <a:srgbClr val="E2E8F0"/>
+                          </a:solidFill>
+                        </a:rPr>
+                        <a:t>https://events.sumologic.com/administrationpm09152026-event-training</a:t>
+                      </a:r>
+                    </a:p>
+                  </a:txBody>
+                  <a:tcPr>
+                    <a:solidFill>
+                      <a:srgbClr val="1A1D27"/>
+                    </a:solidFill>
+                    <a:lnL w="6350" cap="flat">
+                      <a:solidFill>
+                        <a:srgbClr val="2E3348"/>
+                      </a:solidFill>
+                    </a:lnL>
+                    <a:lnR w="6350" cap="flat">
+                      <a:solidFill>
+                        <a:srgbClr val="2E3348"/>
+                      </a:solidFill>
+                    </a:lnR>
+                    <a:lnT w="6350" cap="flat">
+                      <a:solidFill>
+                        <a:srgbClr val="2E3348"/>
+                      </a:solidFill>
+                    </a:lnT>
+                    <a:lnB w="6350" cap="flat">
+                      <a:solidFill>
+                        <a:srgbClr val="2E3348"/>
+                      </a:solidFill>
+                    </a:lnB>
+                  </a:tcPr>
+                </a:tc>
+              </a:tr>
+              <a:tr h="420624">
+                <a:tc>
+                  <a:txBody>
+                    <a:bodyPr wrap="square"/>
+                    <a:lstStyle/>
+                    <a:p>
+                      <a:pPr algn="l"/>
+                      <a:r>
+                        <a:rPr sz="800" b="0">
+                          <a:solidFill>
+                            <a:srgbClr val="E2E8F0"/>
+                          </a:solidFill>
+                        </a:rPr>
+                        <a:t>Logs for Security AM</a:t>
+                      </a:r>
+                    </a:p>
+                  </a:txBody>
+                  <a:tcPr>
+                    <a:solidFill>
+                      <a:srgbClr val="0F1117"/>
+                    </a:solidFill>
+                    <a:lnL w="6350" cap="flat">
+                      <a:solidFill>
+                        <a:srgbClr val="2E3348"/>
+                      </a:solidFill>
+                    </a:lnL>
+                    <a:lnR w="6350" cap="flat">
+                      <a:solidFill>
+                        <a:srgbClr val="2E3348"/>
+                      </a:solidFill>
+                    </a:lnR>
+                    <a:lnT w="6350" cap="flat">
+                      <a:solidFill>
+                        <a:srgbClr val="2E3348"/>
+                      </a:solidFill>
+                    </a:lnT>
+                    <a:lnB w="6350" cap="flat">
+                      <a:solidFill>
+                        <a:srgbClr val="2E3348"/>
+                      </a:solidFill>
+                    </a:lnB>
+                  </a:tcPr>
+                </a:tc>
+                <a:tc>
+                  <a:txBody>
+                    <a:bodyPr wrap="none"/>
+                    <a:lstStyle/>
+                    <a:p>
+                      <a:pPr algn="l"/>
+                      <a:r>
+                        <a:rPr sz="800" b="0">
+                          <a:solidFill>
+                            <a:srgbClr val="E2E8F0"/>
+                          </a:solidFill>
+                        </a:rPr>
+                        <a:t>Wed 16 Sep 2026  07:00 AM  →  10:00 AM</a:t>
+                      </a:r>
+                    </a:p>
+                  </a:txBody>
+                  <a:tcPr>
+                    <a:solidFill>
+                      <a:srgbClr val="0F1117"/>
+                    </a:solidFill>
+                    <a:lnL w="6350" cap="flat">
+                      <a:solidFill>
+                        <a:srgbClr val="2E3348"/>
+                      </a:solidFill>
+                    </a:lnL>
+                    <a:lnR w="6350" cap="flat">
+                      <a:solidFill>
+                        <a:srgbClr val="2E3348"/>
+                      </a:solidFill>
+                    </a:lnR>
+                    <a:lnT w="6350" cap="flat">
+                      <a:solidFill>
+                        <a:srgbClr val="2E3348"/>
+                      </a:solidFill>
+                    </a:lnT>
+                    <a:lnB w="6350" cap="flat">
+                      <a:solidFill>
+                        <a:srgbClr val="2E3348"/>
+                      </a:solidFill>
+                    </a:lnB>
+                  </a:tcPr>
+                </a:tc>
+                <a:tc>
+                  <a:txBody>
+                    <a:bodyPr wrap="none"/>
+                    <a:lstStyle/>
+                    <a:p>
+                      <a:pPr algn="l"/>
+                      <a:r>
+                        <a:rPr sz="800" b="0">
+                          <a:solidFill>
+                            <a:srgbClr val="E2E8F0"/>
+                          </a:solidFill>
+                        </a:rPr>
+                        <a:t>Thu 17 Sep 2026  02:00 AM</a:t>
+                      </a:r>
+                    </a:p>
+                  </a:txBody>
+                  <a:tcPr>
+                    <a:solidFill>
+                      <a:srgbClr val="0F1117"/>
+                    </a:solidFill>
+                    <a:lnL w="6350" cap="flat">
+                      <a:solidFill>
+                        <a:srgbClr val="2E3348"/>
+                      </a:solidFill>
+                    </a:lnL>
+                    <a:lnR w="6350" cap="flat">
+                      <a:solidFill>
+                        <a:srgbClr val="2E3348"/>
+                      </a:solidFill>
+                    </a:lnR>
+                    <a:lnT w="6350" cap="flat">
+                      <a:solidFill>
+                        <a:srgbClr val="2E3348"/>
+                      </a:solidFill>
+                    </a:lnT>
+                    <a:lnB w="6350" cap="flat">
+                      <a:solidFill>
+                        <a:srgbClr val="2E3348"/>
+                      </a:solidFill>
+                    </a:lnB>
+                  </a:tcPr>
+                </a:tc>
+                <a:tc>
+                  <a:txBody>
+                    <a:bodyPr wrap="none"/>
+                    <a:lstStyle/>
+                    <a:p>
+                      <a:pPr algn="l"/>
+                      <a:r>
+                        <a:rPr sz="800" b="0">
+                          <a:solidFill>
+                            <a:srgbClr val="E2E8F0"/>
+                          </a:solidFill>
+                        </a:rPr>
+                        <a:t>Thu 17 Sep 2026  12:00 AM</a:t>
+                      </a:r>
+                    </a:p>
+                  </a:txBody>
+                  <a:tcPr>
+                    <a:solidFill>
+                      <a:srgbClr val="0F1117"/>
+                    </a:solidFill>
+                    <a:lnL w="6350" cap="flat">
+                      <a:solidFill>
+                        <a:srgbClr val="2E3348"/>
+                      </a:solidFill>
+                    </a:lnL>
+                    <a:lnR w="6350" cap="flat">
+                      <a:solidFill>
+                        <a:srgbClr val="2E3348"/>
+                      </a:solidFill>
+                    </a:lnR>
+                    <a:lnT w="6350" cap="flat">
+                      <a:solidFill>
+                        <a:srgbClr val="2E3348"/>
+                      </a:solidFill>
+                    </a:lnT>
+                    <a:lnB w="6350" cap="flat">
+                      <a:solidFill>
+                        <a:srgbClr val="2E3348"/>
+                      </a:solidFill>
+                    </a:lnB>
+                  </a:tcPr>
+                </a:tc>
+                <a:tc>
+                  <a:txBody>
+                    <a:bodyPr wrap="none"/>
+                    <a:lstStyle/>
+                    <a:p>
+                      <a:pPr algn="l"/>
+                      <a:r>
+                        <a:rPr sz="800" b="0">
+                          <a:solidFill>
+                            <a:srgbClr val="E2E8F0"/>
+                          </a:solidFill>
+                        </a:rPr>
+                        <a:t>Wed 16 Sep 2026  10:00 PM</a:t>
+                      </a:r>
+                    </a:p>
+                  </a:txBody>
+                  <a:tcPr>
+                    <a:solidFill>
+                      <a:srgbClr val="0F1117"/>
+                    </a:solidFill>
+                    <a:lnL w="6350" cap="flat">
+                      <a:solidFill>
+                        <a:srgbClr val="2E3348"/>
+                      </a:solidFill>
+                    </a:lnL>
+                    <a:lnR w="6350" cap="flat">
+                      <a:solidFill>
+                        <a:srgbClr val="2E3348"/>
+                      </a:solidFill>
+                    </a:lnR>
+                    <a:lnT w="6350" cap="flat">
+                      <a:solidFill>
+                        <a:srgbClr val="2E3348"/>
+                      </a:solidFill>
+                    </a:lnT>
+                    <a:lnB w="6350" cap="flat">
+                      <a:solidFill>
+                        <a:srgbClr val="2E3348"/>
+                      </a:solidFill>
+                    </a:lnB>
+                  </a:tcPr>
+                </a:tc>
+                <a:tc>
+                  <a:txBody>
+                    <a:bodyPr wrap="square"/>
+                    <a:lstStyle/>
+                    <a:p>
+                      <a:pPr algn="l"/>
+                      <a:r>
+                        <a:rPr sz="700" b="0">
+                          <a:solidFill>
+                            <a:srgbClr val="E2E8F0"/>
+                          </a:solidFill>
+                        </a:rPr>
+                        <a:t>https://events.sumologic.com/logsforsecurityam09162026-event-training</a:t>
+                      </a:r>
+                    </a:p>
+                  </a:txBody>
+                  <a:tcPr>
+                    <a:solidFill>
+                      <a:srgbClr val="0F1117"/>
+                    </a:solidFill>
+                    <a:lnL w="6350" cap="flat">
+                      <a:solidFill>
+                        <a:srgbClr val="2E3348"/>
+                      </a:solidFill>
+                    </a:lnL>
+                    <a:lnR w="6350" cap="flat">
+                      <a:solidFill>
+                        <a:srgbClr val="2E3348"/>
+                      </a:solidFill>
+                    </a:lnR>
+                    <a:lnT w="6350" cap="flat">
+                      <a:solidFill>
+                        <a:srgbClr val="2E3348"/>
+                      </a:solidFill>
+                    </a:lnT>
+                    <a:lnB w="6350" cap="flat">
+                      <a:solidFill>
+                        <a:srgbClr val="2E3348"/>
+                      </a:solidFill>
+                    </a:lnB>
+                  </a:tcPr>
+                </a:tc>
+              </a:tr>
+              <a:tr h="420624">
+                <a:tc>
+                  <a:txBody>
+                    <a:bodyPr wrap="square"/>
+                    <a:lstStyle/>
+                    <a:p>
+                      <a:pPr algn="l"/>
+                      <a:r>
+                        <a:rPr sz="800" b="0">
+                          <a:solidFill>
+                            <a:srgbClr val="E2E8F0"/>
+                          </a:solidFill>
+                        </a:rPr>
+                        <a:t>Logs for Security PM</a:t>
+                      </a:r>
+                    </a:p>
+                  </a:txBody>
+                  <a:tcPr>
+                    <a:solidFill>
+                      <a:srgbClr val="1A1D27"/>
+                    </a:solidFill>
+                    <a:lnL w="6350" cap="flat">
+                      <a:solidFill>
+                        <a:srgbClr val="2E3348"/>
+                      </a:solidFill>
+                    </a:lnL>
+                    <a:lnR w="6350" cap="flat">
+                      <a:solidFill>
+                        <a:srgbClr val="2E3348"/>
+                      </a:solidFill>
+                    </a:lnR>
+                    <a:lnT w="6350" cap="flat">
+                      <a:solidFill>
+                        <a:srgbClr val="2E3348"/>
+                      </a:solidFill>
+                    </a:lnT>
+                    <a:lnB w="6350" cap="flat">
+                      <a:solidFill>
+                        <a:srgbClr val="2E3348"/>
+                      </a:solidFill>
+                    </a:lnB>
+                  </a:tcPr>
+                </a:tc>
+                <a:tc>
+                  <a:txBody>
+                    <a:bodyPr wrap="none"/>
+                    <a:lstStyle/>
+                    <a:p>
+                      <a:pPr algn="l"/>
+                      <a:r>
+                        <a:rPr sz="800" b="0">
+                          <a:solidFill>
+                            <a:srgbClr val="E2E8F0"/>
+                          </a:solidFill>
+                        </a:rPr>
+                        <a:t>Wed 16 Sep 2026  04:00 PM  →  07:00 PM</a:t>
+                      </a:r>
+                    </a:p>
+                  </a:txBody>
+                  <a:tcPr>
+                    <a:solidFill>
+                      <a:srgbClr val="1A1D27"/>
+                    </a:solidFill>
+                    <a:lnL w="6350" cap="flat">
+                      <a:solidFill>
+                        <a:srgbClr val="2E3348"/>
+                      </a:solidFill>
+                    </a:lnL>
+                    <a:lnR w="6350" cap="flat">
+                      <a:solidFill>
+                        <a:srgbClr val="2E3348"/>
+                      </a:solidFill>
+                    </a:lnR>
+                    <a:lnT w="6350" cap="flat">
+                      <a:solidFill>
+                        <a:srgbClr val="2E3348"/>
+                      </a:solidFill>
+                    </a:lnT>
+                    <a:lnB w="6350" cap="flat">
+                      <a:solidFill>
+                        <a:srgbClr val="2E3348"/>
+                      </a:solidFill>
+                    </a:lnB>
+                  </a:tcPr>
+                </a:tc>
+                <a:tc>
+                  <a:txBody>
+                    <a:bodyPr wrap="none"/>
+                    <a:lstStyle/>
+                    <a:p>
+                      <a:pPr algn="l"/>
+                      <a:r>
+                        <a:rPr sz="800" b="0">
+                          <a:solidFill>
+                            <a:srgbClr val="E2E8F0"/>
+                          </a:solidFill>
+                        </a:rPr>
+                        <a:t>Thu 17 Sep 2026  11:00 AM</a:t>
+                      </a:r>
+                    </a:p>
+                  </a:txBody>
+                  <a:tcPr>
+                    <a:solidFill>
+                      <a:srgbClr val="1A1D27"/>
+                    </a:solidFill>
+                    <a:lnL w="6350" cap="flat">
+                      <a:solidFill>
+                        <a:srgbClr val="2E3348"/>
+                      </a:solidFill>
+                    </a:lnL>
+                    <a:lnR w="6350" cap="flat">
+                      <a:solidFill>
+                        <a:srgbClr val="2E3348"/>
+                      </a:solidFill>
+                    </a:lnR>
+                    <a:lnT w="6350" cap="flat">
+                      <a:solidFill>
+                        <a:srgbClr val="2E3348"/>
+                      </a:solidFill>
+                    </a:lnT>
+                    <a:lnB w="6350" cap="flat">
+                      <a:solidFill>
+                        <a:srgbClr val="2E3348"/>
+                      </a:solidFill>
+                    </a:lnB>
+                  </a:tcPr>
+                </a:tc>
+                <a:tc>
+                  <a:txBody>
+                    <a:bodyPr wrap="none"/>
+                    <a:lstStyle/>
+                    <a:p>
+                      <a:pPr algn="l"/>
+                      <a:r>
+                        <a:rPr sz="800" b="0">
+                          <a:solidFill>
+                            <a:srgbClr val="E2E8F0"/>
+                          </a:solidFill>
+                        </a:rPr>
+                        <a:t>Thu 17 Sep 2026  09:00 AM</a:t>
+                      </a:r>
+                    </a:p>
+                  </a:txBody>
+                  <a:tcPr>
+                    <a:solidFill>
+                      <a:srgbClr val="1A1D27"/>
+                    </a:solidFill>
+                    <a:lnL w="6350" cap="flat">
+                      <a:solidFill>
+                        <a:srgbClr val="2E3348"/>
+                      </a:solidFill>
+                    </a:lnL>
+                    <a:lnR w="6350" cap="flat">
+                      <a:solidFill>
+                        <a:srgbClr val="2E3348"/>
+                      </a:solidFill>
+                    </a:lnR>
+                    <a:lnT w="6350" cap="flat">
+                      <a:solidFill>
+                        <a:srgbClr val="2E3348"/>
+                      </a:solidFill>
+                    </a:lnT>
+                    <a:lnB w="6350" cap="flat">
+                      <a:solidFill>
+                        <a:srgbClr val="2E3348"/>
+                      </a:solidFill>
+                    </a:lnB>
+                  </a:tcPr>
+                </a:tc>
+                <a:tc>
+                  <a:txBody>
+                    <a:bodyPr wrap="none"/>
+                    <a:lstStyle/>
+                    <a:p>
+                      <a:pPr algn="l"/>
+                      <a:r>
+                        <a:rPr sz="800" b="0">
+                          <a:solidFill>
+                            <a:srgbClr val="E2E8F0"/>
+                          </a:solidFill>
+                        </a:rPr>
+                        <a:t>Thu 17 Sep 2026  07:00 AM</a:t>
+                      </a:r>
+                    </a:p>
+                  </a:txBody>
+                  <a:tcPr>
+                    <a:solidFill>
+                      <a:srgbClr val="1A1D27"/>
+                    </a:solidFill>
+                    <a:lnL w="6350" cap="flat">
+                      <a:solidFill>
+                        <a:srgbClr val="2E3348"/>
+                      </a:solidFill>
+                    </a:lnL>
+                    <a:lnR w="6350" cap="flat">
+                      <a:solidFill>
+                        <a:srgbClr val="2E3348"/>
+                      </a:solidFill>
+                    </a:lnR>
+                    <a:lnT w="6350" cap="flat">
+                      <a:solidFill>
+                        <a:srgbClr val="2E3348"/>
+                      </a:solidFill>
+                    </a:lnT>
+                    <a:lnB w="6350" cap="flat">
+                      <a:solidFill>
+                        <a:srgbClr val="2E3348"/>
+                      </a:solidFill>
+                    </a:lnB>
+                  </a:tcPr>
+                </a:tc>
+                <a:tc>
+                  <a:txBody>
+                    <a:bodyPr wrap="square"/>
+                    <a:lstStyle/>
+                    <a:p>
+                      <a:pPr algn="l"/>
+                      <a:r>
+                        <a:rPr sz="700" b="0">
+                          <a:solidFill>
+                            <a:srgbClr val="E2E8F0"/>
+                          </a:solidFill>
+                        </a:rPr>
+                        <a:t>https://events.sumologic.com/logsforsecuritypm09162026-event-training</a:t>
                       </a:r>
                     </a:p>
                   </a:txBody>
@@ -17173,7 +18190,2527 @@
         </p:nvSpPr>
         <p:spPr>
           <a:xfrm>
-            <a:off x="164592" y="3584448"/>
+            <a:off x="164592" y="5266944"/>
+            <a:ext cx="11795760" cy="274320"/>
+          </a:xfrm>
+          <a:prstGeom prst="rect">
+            <a:avLst/>
+          </a:prstGeom>
+          <a:noFill/>
+        </p:spPr>
+        <p:txBody>
+          <a:bodyPr wrap="none">
+            <a:spAutoFit/>
+          </a:bodyPr>
+          <a:lstStyle/>
+          <a:p>
+            <a:r>
+              <a:rPr sz="700" i="1">
+                <a:solidFill>
+                  <a:srgbClr val="94A3B8"/>
+                </a:solidFill>
+              </a:rPr>
+              <a:t>Register links are live URLs — click to open in browser.  All times shown as start time; PT column also shows end time.</a:t>
+            </a:r>
+          </a:p>
+        </p:txBody>
+      </p:sp>
+    </p:spTree>
+  </p:cSld>
+  <p:clrMapOvr>
+    <a:masterClrMapping/>
+  </p:clrMapOvr>
+</p:sld>
+</file>
+
+<file path=ppt/slides/slide6.xml><?xml version="1.0" encoding="utf-8"?>
+<p:sld xmlns:a="http://schemas.openxmlformats.org/drawingml/2006/main" xmlns:p="http://schemas.openxmlformats.org/presentationml/2006/main" xmlns:r="http://schemas.openxmlformats.org/officeDocument/2006/relationships">
+  <p:cSld>
+    <p:spTree>
+      <p:nvGrpSpPr>
+        <p:cNvPr id="1" name=""/>
+        <p:cNvGrpSpPr/>
+        <p:nvPr/>
+      </p:nvGrpSpPr>
+      <p:grpSpPr/>
+      <p:sp>
+        <p:nvSpPr>
+          <p:cNvPr id="2" name="Rectangle 1"/>
+          <p:cNvSpPr/>
+          <p:nvPr/>
+        </p:nvSpPr>
+        <p:spPr>
+          <a:xfrm>
+            <a:off x="0" y="0"/>
+            <a:ext cx="12188952" cy="6858000"/>
+          </a:xfrm>
+          <a:prstGeom prst="rect">
+            <a:avLst/>
+          </a:prstGeom>
+          <a:solidFill>
+            <a:srgbClr val="0F1117"/>
+          </a:solidFill>
+          <a:ln>
+            <a:noFill/>
+          </a:ln>
+        </p:spPr>
+        <p:style>
+          <a:lnRef idx="1">
+            <a:schemeClr val="accent1"/>
+          </a:lnRef>
+          <a:fillRef idx="3">
+            <a:schemeClr val="accent1"/>
+          </a:fillRef>
+          <a:effectRef idx="2">
+            <a:schemeClr val="accent1"/>
+          </a:effectRef>
+          <a:fontRef idx="minor">
+            <a:schemeClr val="lt1"/>
+          </a:fontRef>
+        </p:style>
+        <p:txBody>
+          <a:bodyPr rtlCol="0" anchor="ctr"/>
+          <a:lstStyle/>
+          <a:p>
+            <a:pPr algn="ctr"/>
+          </a:p>
+        </p:txBody>
+      </p:sp>
+      <p:sp>
+        <p:nvSpPr>
+          <p:cNvPr id="3" name="Rectangle 2"/>
+          <p:cNvSpPr/>
+          <p:nvPr/>
+        </p:nvSpPr>
+        <p:spPr>
+          <a:xfrm>
+            <a:off x="0" y="0"/>
+            <a:ext cx="12188952" cy="548640"/>
+          </a:xfrm>
+          <a:prstGeom prst="rect">
+            <a:avLst/>
+          </a:prstGeom>
+          <a:solidFill>
+            <a:srgbClr val="1A1D27"/>
+          </a:solidFill>
+          <a:ln>
+            <a:noFill/>
+          </a:ln>
+        </p:spPr>
+        <p:style>
+          <a:lnRef idx="1">
+            <a:schemeClr val="accent1"/>
+          </a:lnRef>
+          <a:fillRef idx="3">
+            <a:schemeClr val="accent1"/>
+          </a:fillRef>
+          <a:effectRef idx="2">
+            <a:schemeClr val="accent1"/>
+          </a:effectRef>
+          <a:fontRef idx="minor">
+            <a:schemeClr val="lt1"/>
+          </a:fontRef>
+        </p:style>
+        <p:txBody>
+          <a:bodyPr rtlCol="0" anchor="ctr"/>
+          <a:lstStyle/>
+          <a:p>
+            <a:pPr algn="ctr"/>
+          </a:p>
+        </p:txBody>
+      </p:sp>
+      <p:sp>
+        <p:nvSpPr>
+          <p:cNvPr id="4" name="TextBox 3"/>
+          <p:cNvSpPr txBox="1"/>
+          <p:nvPr/>
+        </p:nvSpPr>
+        <p:spPr>
+          <a:xfrm>
+            <a:off x="164592" y="73152"/>
+            <a:ext cx="8229600" cy="420624"/>
+          </a:xfrm>
+          <a:prstGeom prst="rect">
+            <a:avLst/>
+          </a:prstGeom>
+          <a:noFill/>
+        </p:spPr>
+        <p:txBody>
+          <a:bodyPr wrap="none">
+            <a:spAutoFit/>
+          </a:bodyPr>
+          <a:lstStyle/>
+          <a:p>
+            <a:r>
+              <a:rPr sz="1300" b="1">
+                <a:solidFill>
+                  <a:srgbClr val="00B4D8"/>
+                </a:solidFill>
+              </a:rPr>
+              <a:t>Sumo Logic — Virtual Training Schedule   ·   17 Sep – 24 Sep 2026   (6/6)</a:t>
+            </a:r>
+          </a:p>
+        </p:txBody>
+      </p:sp>
+      <p:sp>
+        <p:nvSpPr>
+          <p:cNvPr id="5" name="TextBox 4"/>
+          <p:cNvSpPr txBox="1"/>
+          <p:nvPr/>
+        </p:nvSpPr>
+        <p:spPr>
+          <a:xfrm>
+            <a:off x="10908792" y="73152"/>
+            <a:ext cx="1097280" cy="420624"/>
+          </a:xfrm>
+          <a:prstGeom prst="rect">
+            <a:avLst/>
+          </a:prstGeom>
+          <a:noFill/>
+        </p:spPr>
+        <p:txBody>
+          <a:bodyPr wrap="none">
+            <a:spAutoFit/>
+          </a:bodyPr>
+          <a:lstStyle/>
+          <a:p>
+            <a:pPr algn="r"/>
+            <a:r>
+              <a:rPr sz="900">
+                <a:solidFill>
+                  <a:srgbClr val="94A3B8"/>
+                </a:solidFill>
+              </a:rPr>
+              <a:t>p 6/6</a:t>
+            </a:r>
+          </a:p>
+        </p:txBody>
+      </p:sp>
+      <p:graphicFrame>
+        <p:nvGraphicFramePr>
+          <p:cNvPr id="6" name="Table 5"/>
+          <p:cNvGraphicFramePr>
+            <a:graphicFrameLocks noGrp="1"/>
+          </p:cNvGraphicFramePr>
+          <p:nvPr/>
+        </p:nvGraphicFramePr>
+        <p:xfrm>
+          <a:off x="164592" y="640080"/>
+          <a:ext cx="11795760" cy="3675888"/>
+        </p:xfrm>
+        <a:graphic>
+          <a:graphicData uri="http://schemas.openxmlformats.org/drawingml/2006/table">
+            <a:tbl>
+              <a:tblPr firstRow="1" bandRow="1">
+                <a:tableStyleId>{5C22544A-7EE6-4342-B048-85BDC9FD1C3A}</a:tableStyleId>
+              </a:tblPr>
+              <a:tblGrid>
+                <a:gridCol w="2286000"/>
+                <a:gridCol w="1920240"/>
+                <a:gridCol w="1920240"/>
+                <a:gridCol w="1920240"/>
+                <a:gridCol w="1920240"/>
+                <a:gridCol w="1828800"/>
+              </a:tblGrid>
+              <a:tr h="310896">
+                <a:tc>
+                  <a:txBody>
+                    <a:bodyPr wrap="square"/>
+                    <a:lstStyle/>
+                    <a:p>
+                      <a:pPr algn="ctr"/>
+                      <a:r>
+                        <a:rPr sz="900" b="1">
+                          <a:solidFill>
+                            <a:srgbClr val="00B4D8"/>
+                          </a:solidFill>
+                        </a:rPr>
+                        <a:t>Course</a:t>
+                      </a:r>
+                    </a:p>
+                  </a:txBody>
+                  <a:tcPr>
+                    <a:solidFill>
+                      <a:srgbClr val="1A1D27"/>
+                    </a:solidFill>
+                    <a:lnL w="6350" cap="flat">
+                      <a:solidFill>
+                        <a:srgbClr val="2E3348"/>
+                      </a:solidFill>
+                    </a:lnL>
+                    <a:lnR w="6350" cap="flat">
+                      <a:solidFill>
+                        <a:srgbClr val="2E3348"/>
+                      </a:solidFill>
+                    </a:lnR>
+                    <a:lnT w="6350" cap="flat">
+                      <a:solidFill>
+                        <a:srgbClr val="2E3348"/>
+                      </a:solidFill>
+                    </a:lnT>
+                    <a:lnB w="6350" cap="flat">
+                      <a:solidFill>
+                        <a:srgbClr val="2E3348"/>
+                      </a:solidFill>
+                    </a:lnB>
+                  </a:tcPr>
+                </a:tc>
+                <a:tc>
+                  <a:txBody>
+                    <a:bodyPr wrap="square"/>
+                    <a:lstStyle/>
+                    <a:p>
+                      <a:pPr algn="ctr"/>
+                      <a:r>
+                        <a:rPr sz="900" b="1">
+                          <a:solidFill>
+                            <a:srgbClr val="00B4D8"/>
+                          </a:solidFill>
+                        </a:rPr>
+                        <a:t>PT  (Los Angeles)</a:t>
+                      </a:r>
+                    </a:p>
+                  </a:txBody>
+                  <a:tcPr>
+                    <a:solidFill>
+                      <a:srgbClr val="1A1D27"/>
+                    </a:solidFill>
+                    <a:lnL w="6350" cap="flat">
+                      <a:solidFill>
+                        <a:srgbClr val="2E3348"/>
+                      </a:solidFill>
+                    </a:lnL>
+                    <a:lnR w="6350" cap="flat">
+                      <a:solidFill>
+                        <a:srgbClr val="2E3348"/>
+                      </a:solidFill>
+                    </a:lnR>
+                    <a:lnT w="6350" cap="flat">
+                      <a:solidFill>
+                        <a:srgbClr val="2E3348"/>
+                      </a:solidFill>
+                    </a:lnT>
+                    <a:lnB w="6350" cap="flat">
+                      <a:solidFill>
+                        <a:srgbClr val="2E3348"/>
+                      </a:solidFill>
+                    </a:lnB>
+                  </a:tcPr>
+                </a:tc>
+                <a:tc>
+                  <a:txBody>
+                    <a:bodyPr wrap="square"/>
+                    <a:lstStyle/>
+                    <a:p>
+                      <a:pPr algn="ctr"/>
+                      <a:r>
+                        <a:rPr sz="900" b="1">
+                          <a:solidFill>
+                            <a:srgbClr val="00B4D8"/>
+                          </a:solidFill>
+                        </a:rPr>
+                        <a:t>NZ  (Auckland)</a:t>
+                      </a:r>
+                    </a:p>
+                  </a:txBody>
+                  <a:tcPr>
+                    <a:solidFill>
+                      <a:srgbClr val="1A1D27"/>
+                    </a:solidFill>
+                    <a:lnL w="6350" cap="flat">
+                      <a:solidFill>
+                        <a:srgbClr val="2E3348"/>
+                      </a:solidFill>
+                    </a:lnL>
+                    <a:lnR w="6350" cap="flat">
+                      <a:solidFill>
+                        <a:srgbClr val="2E3348"/>
+                      </a:solidFill>
+                    </a:lnR>
+                    <a:lnT w="6350" cap="flat">
+                      <a:solidFill>
+                        <a:srgbClr val="2E3348"/>
+                      </a:solidFill>
+                    </a:lnT>
+                    <a:lnB w="6350" cap="flat">
+                      <a:solidFill>
+                        <a:srgbClr val="2E3348"/>
+                      </a:solidFill>
+                    </a:lnB>
+                  </a:tcPr>
+                </a:tc>
+                <a:tc>
+                  <a:txBody>
+                    <a:bodyPr wrap="square"/>
+                    <a:lstStyle/>
+                    <a:p>
+                      <a:pPr algn="ctr"/>
+                      <a:r>
+                        <a:rPr sz="900" b="1">
+                          <a:solidFill>
+                            <a:srgbClr val="00B4D8"/>
+                          </a:solidFill>
+                        </a:rPr>
+                        <a:t>AET  (Sydney)</a:t>
+                      </a:r>
+                    </a:p>
+                  </a:txBody>
+                  <a:tcPr>
+                    <a:solidFill>
+                      <a:srgbClr val="1A1D27"/>
+                    </a:solidFill>
+                    <a:lnL w="6350" cap="flat">
+                      <a:solidFill>
+                        <a:srgbClr val="2E3348"/>
+                      </a:solidFill>
+                    </a:lnL>
+                    <a:lnR w="6350" cap="flat">
+                      <a:solidFill>
+                        <a:srgbClr val="2E3348"/>
+                      </a:solidFill>
+                    </a:lnR>
+                    <a:lnT w="6350" cap="flat">
+                      <a:solidFill>
+                        <a:srgbClr val="2E3348"/>
+                      </a:solidFill>
+                    </a:lnT>
+                    <a:lnB w="6350" cap="flat">
+                      <a:solidFill>
+                        <a:srgbClr val="2E3348"/>
+                      </a:solidFill>
+                    </a:lnB>
+                  </a:tcPr>
+                </a:tc>
+                <a:tc>
+                  <a:txBody>
+                    <a:bodyPr wrap="square"/>
+                    <a:lstStyle/>
+                    <a:p>
+                      <a:pPr algn="ctr"/>
+                      <a:r>
+                        <a:rPr sz="900" b="1">
+                          <a:solidFill>
+                            <a:srgbClr val="00B4D8"/>
+                          </a:solidFill>
+                        </a:rPr>
+                        <a:t>SGT  (Singapore)</a:t>
+                      </a:r>
+                    </a:p>
+                  </a:txBody>
+                  <a:tcPr>
+                    <a:solidFill>
+                      <a:srgbClr val="1A1D27"/>
+                    </a:solidFill>
+                    <a:lnL w="6350" cap="flat">
+                      <a:solidFill>
+                        <a:srgbClr val="2E3348"/>
+                      </a:solidFill>
+                    </a:lnL>
+                    <a:lnR w="6350" cap="flat">
+                      <a:solidFill>
+                        <a:srgbClr val="2E3348"/>
+                      </a:solidFill>
+                    </a:lnR>
+                    <a:lnT w="6350" cap="flat">
+                      <a:solidFill>
+                        <a:srgbClr val="2E3348"/>
+                      </a:solidFill>
+                    </a:lnT>
+                    <a:lnB w="6350" cap="flat">
+                      <a:solidFill>
+                        <a:srgbClr val="2E3348"/>
+                      </a:solidFill>
+                    </a:lnB>
+                  </a:tcPr>
+                </a:tc>
+                <a:tc>
+                  <a:txBody>
+                    <a:bodyPr wrap="square"/>
+                    <a:lstStyle/>
+                    <a:p>
+                      <a:pPr algn="ctr"/>
+                      <a:r>
+                        <a:rPr sz="900" b="1">
+                          <a:solidFill>
+                            <a:srgbClr val="00B4D8"/>
+                          </a:solidFill>
+                        </a:rPr>
+                        <a:t>Register URL</a:t>
+                      </a:r>
+                    </a:p>
+                  </a:txBody>
+                  <a:tcPr>
+                    <a:solidFill>
+                      <a:srgbClr val="1A1D27"/>
+                    </a:solidFill>
+                    <a:lnL w="6350" cap="flat">
+                      <a:solidFill>
+                        <a:srgbClr val="2E3348"/>
+                      </a:solidFill>
+                    </a:lnL>
+                    <a:lnR w="6350" cap="flat">
+                      <a:solidFill>
+                        <a:srgbClr val="2E3348"/>
+                      </a:solidFill>
+                    </a:lnR>
+                    <a:lnT w="6350" cap="flat">
+                      <a:solidFill>
+                        <a:srgbClr val="2E3348"/>
+                      </a:solidFill>
+                    </a:lnT>
+                    <a:lnB w="6350" cap="flat">
+                      <a:solidFill>
+                        <a:srgbClr val="2E3348"/>
+                      </a:solidFill>
+                    </a:lnB>
+                  </a:tcPr>
+                </a:tc>
+              </a:tr>
+              <a:tr h="420624">
+                <a:tc>
+                  <a:txBody>
+                    <a:bodyPr wrap="square"/>
+                    <a:lstStyle/>
+                    <a:p>
+                      <a:pPr algn="l"/>
+                      <a:r>
+                        <a:rPr sz="800" b="0">
+                          <a:solidFill>
+                            <a:srgbClr val="E2E8F0"/>
+                          </a:solidFill>
+                        </a:rPr>
+                        <a:t>Mobot Essentials AM</a:t>
+                      </a:r>
+                    </a:p>
+                  </a:txBody>
+                  <a:tcPr>
+                    <a:solidFill>
+                      <a:srgbClr val="0F1117"/>
+                    </a:solidFill>
+                    <a:lnL w="6350" cap="flat">
+                      <a:solidFill>
+                        <a:srgbClr val="2E3348"/>
+                      </a:solidFill>
+                    </a:lnL>
+                    <a:lnR w="6350" cap="flat">
+                      <a:solidFill>
+                        <a:srgbClr val="2E3348"/>
+                      </a:solidFill>
+                    </a:lnR>
+                    <a:lnT w="6350" cap="flat">
+                      <a:solidFill>
+                        <a:srgbClr val="2E3348"/>
+                      </a:solidFill>
+                    </a:lnT>
+                    <a:lnB w="6350" cap="flat">
+                      <a:solidFill>
+                        <a:srgbClr val="2E3348"/>
+                      </a:solidFill>
+                    </a:lnB>
+                  </a:tcPr>
+                </a:tc>
+                <a:tc>
+                  <a:txBody>
+                    <a:bodyPr wrap="none"/>
+                    <a:lstStyle/>
+                    <a:p>
+                      <a:pPr algn="l"/>
+                      <a:r>
+                        <a:rPr sz="800" b="0">
+                          <a:solidFill>
+                            <a:srgbClr val="E2E8F0"/>
+                          </a:solidFill>
+                        </a:rPr>
+                        <a:t>Thu 17 Sep 2026  07:00 AM  →  08:30 AM</a:t>
+                      </a:r>
+                    </a:p>
+                  </a:txBody>
+                  <a:tcPr>
+                    <a:solidFill>
+                      <a:srgbClr val="0F1117"/>
+                    </a:solidFill>
+                    <a:lnL w="6350" cap="flat">
+                      <a:solidFill>
+                        <a:srgbClr val="2E3348"/>
+                      </a:solidFill>
+                    </a:lnL>
+                    <a:lnR w="6350" cap="flat">
+                      <a:solidFill>
+                        <a:srgbClr val="2E3348"/>
+                      </a:solidFill>
+                    </a:lnR>
+                    <a:lnT w="6350" cap="flat">
+                      <a:solidFill>
+                        <a:srgbClr val="2E3348"/>
+                      </a:solidFill>
+                    </a:lnT>
+                    <a:lnB w="6350" cap="flat">
+                      <a:solidFill>
+                        <a:srgbClr val="2E3348"/>
+                      </a:solidFill>
+                    </a:lnB>
+                  </a:tcPr>
+                </a:tc>
+                <a:tc>
+                  <a:txBody>
+                    <a:bodyPr wrap="none"/>
+                    <a:lstStyle/>
+                    <a:p>
+                      <a:pPr algn="l"/>
+                      <a:r>
+                        <a:rPr sz="800" b="0">
+                          <a:solidFill>
+                            <a:srgbClr val="E2E8F0"/>
+                          </a:solidFill>
+                        </a:rPr>
+                        <a:t>Fri 18 Sep 2026  02:00 AM</a:t>
+                      </a:r>
+                    </a:p>
+                  </a:txBody>
+                  <a:tcPr>
+                    <a:solidFill>
+                      <a:srgbClr val="0F1117"/>
+                    </a:solidFill>
+                    <a:lnL w="6350" cap="flat">
+                      <a:solidFill>
+                        <a:srgbClr val="2E3348"/>
+                      </a:solidFill>
+                    </a:lnL>
+                    <a:lnR w="6350" cap="flat">
+                      <a:solidFill>
+                        <a:srgbClr val="2E3348"/>
+                      </a:solidFill>
+                    </a:lnR>
+                    <a:lnT w="6350" cap="flat">
+                      <a:solidFill>
+                        <a:srgbClr val="2E3348"/>
+                      </a:solidFill>
+                    </a:lnT>
+                    <a:lnB w="6350" cap="flat">
+                      <a:solidFill>
+                        <a:srgbClr val="2E3348"/>
+                      </a:solidFill>
+                    </a:lnB>
+                  </a:tcPr>
+                </a:tc>
+                <a:tc>
+                  <a:txBody>
+                    <a:bodyPr wrap="none"/>
+                    <a:lstStyle/>
+                    <a:p>
+                      <a:pPr algn="l"/>
+                      <a:r>
+                        <a:rPr sz="800" b="0">
+                          <a:solidFill>
+                            <a:srgbClr val="E2E8F0"/>
+                          </a:solidFill>
+                        </a:rPr>
+                        <a:t>Fri 18 Sep 2026  12:00 AM</a:t>
+                      </a:r>
+                    </a:p>
+                  </a:txBody>
+                  <a:tcPr>
+                    <a:solidFill>
+                      <a:srgbClr val="0F1117"/>
+                    </a:solidFill>
+                    <a:lnL w="6350" cap="flat">
+                      <a:solidFill>
+                        <a:srgbClr val="2E3348"/>
+                      </a:solidFill>
+                    </a:lnL>
+                    <a:lnR w="6350" cap="flat">
+                      <a:solidFill>
+                        <a:srgbClr val="2E3348"/>
+                      </a:solidFill>
+                    </a:lnR>
+                    <a:lnT w="6350" cap="flat">
+                      <a:solidFill>
+                        <a:srgbClr val="2E3348"/>
+                      </a:solidFill>
+                    </a:lnT>
+                    <a:lnB w="6350" cap="flat">
+                      <a:solidFill>
+                        <a:srgbClr val="2E3348"/>
+                      </a:solidFill>
+                    </a:lnB>
+                  </a:tcPr>
+                </a:tc>
+                <a:tc>
+                  <a:txBody>
+                    <a:bodyPr wrap="none"/>
+                    <a:lstStyle/>
+                    <a:p>
+                      <a:pPr algn="l"/>
+                      <a:r>
+                        <a:rPr sz="800" b="0">
+                          <a:solidFill>
+                            <a:srgbClr val="E2E8F0"/>
+                          </a:solidFill>
+                        </a:rPr>
+                        <a:t>Thu 17 Sep 2026  10:00 PM</a:t>
+                      </a:r>
+                    </a:p>
+                  </a:txBody>
+                  <a:tcPr>
+                    <a:solidFill>
+                      <a:srgbClr val="0F1117"/>
+                    </a:solidFill>
+                    <a:lnL w="6350" cap="flat">
+                      <a:solidFill>
+                        <a:srgbClr val="2E3348"/>
+                      </a:solidFill>
+                    </a:lnL>
+                    <a:lnR w="6350" cap="flat">
+                      <a:solidFill>
+                        <a:srgbClr val="2E3348"/>
+                      </a:solidFill>
+                    </a:lnR>
+                    <a:lnT w="6350" cap="flat">
+                      <a:solidFill>
+                        <a:srgbClr val="2E3348"/>
+                      </a:solidFill>
+                    </a:lnT>
+                    <a:lnB w="6350" cap="flat">
+                      <a:solidFill>
+                        <a:srgbClr val="2E3348"/>
+                      </a:solidFill>
+                    </a:lnB>
+                  </a:tcPr>
+                </a:tc>
+                <a:tc>
+                  <a:txBody>
+                    <a:bodyPr wrap="square"/>
+                    <a:lstStyle/>
+                    <a:p>
+                      <a:pPr algn="l"/>
+                      <a:r>
+                        <a:rPr sz="700" b="0">
+                          <a:solidFill>
+                            <a:srgbClr val="E2E8F0"/>
+                          </a:solidFill>
+                        </a:rPr>
+                        <a:t>https://events.sumologic.com/mobotessentialsam09172026-event-training</a:t>
+                      </a:r>
+                    </a:p>
+                  </a:txBody>
+                  <a:tcPr>
+                    <a:solidFill>
+                      <a:srgbClr val="0F1117"/>
+                    </a:solidFill>
+                    <a:lnL w="6350" cap="flat">
+                      <a:solidFill>
+                        <a:srgbClr val="2E3348"/>
+                      </a:solidFill>
+                    </a:lnL>
+                    <a:lnR w="6350" cap="flat">
+                      <a:solidFill>
+                        <a:srgbClr val="2E3348"/>
+                      </a:solidFill>
+                    </a:lnR>
+                    <a:lnT w="6350" cap="flat">
+                      <a:solidFill>
+                        <a:srgbClr val="2E3348"/>
+                      </a:solidFill>
+                    </a:lnT>
+                    <a:lnB w="6350" cap="flat">
+                      <a:solidFill>
+                        <a:srgbClr val="2E3348"/>
+                      </a:solidFill>
+                    </a:lnB>
+                  </a:tcPr>
+                </a:tc>
+              </a:tr>
+              <a:tr h="420624">
+                <a:tc>
+                  <a:txBody>
+                    <a:bodyPr wrap="square"/>
+                    <a:lstStyle/>
+                    <a:p>
+                      <a:pPr algn="l"/>
+                      <a:r>
+                        <a:rPr sz="800" b="0">
+                          <a:solidFill>
+                            <a:srgbClr val="E2E8F0"/>
+                          </a:solidFill>
+                        </a:rPr>
+                        <a:t>Mobot Essentials PM</a:t>
+                      </a:r>
+                    </a:p>
+                  </a:txBody>
+                  <a:tcPr>
+                    <a:solidFill>
+                      <a:srgbClr val="1A1D27"/>
+                    </a:solidFill>
+                    <a:lnL w="6350" cap="flat">
+                      <a:solidFill>
+                        <a:srgbClr val="2E3348"/>
+                      </a:solidFill>
+                    </a:lnL>
+                    <a:lnR w="6350" cap="flat">
+                      <a:solidFill>
+                        <a:srgbClr val="2E3348"/>
+                      </a:solidFill>
+                    </a:lnR>
+                    <a:lnT w="6350" cap="flat">
+                      <a:solidFill>
+                        <a:srgbClr val="2E3348"/>
+                      </a:solidFill>
+                    </a:lnT>
+                    <a:lnB w="6350" cap="flat">
+                      <a:solidFill>
+                        <a:srgbClr val="2E3348"/>
+                      </a:solidFill>
+                    </a:lnB>
+                  </a:tcPr>
+                </a:tc>
+                <a:tc>
+                  <a:txBody>
+                    <a:bodyPr wrap="none"/>
+                    <a:lstStyle/>
+                    <a:p>
+                      <a:pPr algn="l"/>
+                      <a:r>
+                        <a:rPr sz="800" b="0">
+                          <a:solidFill>
+                            <a:srgbClr val="E2E8F0"/>
+                          </a:solidFill>
+                        </a:rPr>
+                        <a:t>Thu 17 Sep 2026  01:00 PM  →  05:25 PM</a:t>
+                      </a:r>
+                    </a:p>
+                  </a:txBody>
+                  <a:tcPr>
+                    <a:solidFill>
+                      <a:srgbClr val="1A1D27"/>
+                    </a:solidFill>
+                    <a:lnL w="6350" cap="flat">
+                      <a:solidFill>
+                        <a:srgbClr val="2E3348"/>
+                      </a:solidFill>
+                    </a:lnL>
+                    <a:lnR w="6350" cap="flat">
+                      <a:solidFill>
+                        <a:srgbClr val="2E3348"/>
+                      </a:solidFill>
+                    </a:lnR>
+                    <a:lnT w="6350" cap="flat">
+                      <a:solidFill>
+                        <a:srgbClr val="2E3348"/>
+                      </a:solidFill>
+                    </a:lnT>
+                    <a:lnB w="6350" cap="flat">
+                      <a:solidFill>
+                        <a:srgbClr val="2E3348"/>
+                      </a:solidFill>
+                    </a:lnB>
+                  </a:tcPr>
+                </a:tc>
+                <a:tc>
+                  <a:txBody>
+                    <a:bodyPr wrap="none"/>
+                    <a:lstStyle/>
+                    <a:p>
+                      <a:pPr algn="l"/>
+                      <a:r>
+                        <a:rPr sz="800" b="0">
+                          <a:solidFill>
+                            <a:srgbClr val="E2E8F0"/>
+                          </a:solidFill>
+                        </a:rPr>
+                        <a:t>Fri 18 Sep 2026  08:00 AM</a:t>
+                      </a:r>
+                    </a:p>
+                  </a:txBody>
+                  <a:tcPr>
+                    <a:solidFill>
+                      <a:srgbClr val="1A1D27"/>
+                    </a:solidFill>
+                    <a:lnL w="6350" cap="flat">
+                      <a:solidFill>
+                        <a:srgbClr val="2E3348"/>
+                      </a:solidFill>
+                    </a:lnL>
+                    <a:lnR w="6350" cap="flat">
+                      <a:solidFill>
+                        <a:srgbClr val="2E3348"/>
+                      </a:solidFill>
+                    </a:lnR>
+                    <a:lnT w="6350" cap="flat">
+                      <a:solidFill>
+                        <a:srgbClr val="2E3348"/>
+                      </a:solidFill>
+                    </a:lnT>
+                    <a:lnB w="6350" cap="flat">
+                      <a:solidFill>
+                        <a:srgbClr val="2E3348"/>
+                      </a:solidFill>
+                    </a:lnB>
+                  </a:tcPr>
+                </a:tc>
+                <a:tc>
+                  <a:txBody>
+                    <a:bodyPr wrap="none"/>
+                    <a:lstStyle/>
+                    <a:p>
+                      <a:pPr algn="l"/>
+                      <a:r>
+                        <a:rPr sz="800" b="0">
+                          <a:solidFill>
+                            <a:srgbClr val="E2E8F0"/>
+                          </a:solidFill>
+                        </a:rPr>
+                        <a:t>Fri 18 Sep 2026  06:00 AM</a:t>
+                      </a:r>
+                    </a:p>
+                  </a:txBody>
+                  <a:tcPr>
+                    <a:solidFill>
+                      <a:srgbClr val="1A1D27"/>
+                    </a:solidFill>
+                    <a:lnL w="6350" cap="flat">
+                      <a:solidFill>
+                        <a:srgbClr val="2E3348"/>
+                      </a:solidFill>
+                    </a:lnL>
+                    <a:lnR w="6350" cap="flat">
+                      <a:solidFill>
+                        <a:srgbClr val="2E3348"/>
+                      </a:solidFill>
+                    </a:lnR>
+                    <a:lnT w="6350" cap="flat">
+                      <a:solidFill>
+                        <a:srgbClr val="2E3348"/>
+                      </a:solidFill>
+                    </a:lnT>
+                    <a:lnB w="6350" cap="flat">
+                      <a:solidFill>
+                        <a:srgbClr val="2E3348"/>
+                      </a:solidFill>
+                    </a:lnB>
+                  </a:tcPr>
+                </a:tc>
+                <a:tc>
+                  <a:txBody>
+                    <a:bodyPr wrap="none"/>
+                    <a:lstStyle/>
+                    <a:p>
+                      <a:pPr algn="l"/>
+                      <a:r>
+                        <a:rPr sz="800" b="0">
+                          <a:solidFill>
+                            <a:srgbClr val="E2E8F0"/>
+                          </a:solidFill>
+                        </a:rPr>
+                        <a:t>Fri 18 Sep 2026  04:00 AM</a:t>
+                      </a:r>
+                    </a:p>
+                  </a:txBody>
+                  <a:tcPr>
+                    <a:solidFill>
+                      <a:srgbClr val="1A1D27"/>
+                    </a:solidFill>
+                    <a:lnL w="6350" cap="flat">
+                      <a:solidFill>
+                        <a:srgbClr val="2E3348"/>
+                      </a:solidFill>
+                    </a:lnL>
+                    <a:lnR w="6350" cap="flat">
+                      <a:solidFill>
+                        <a:srgbClr val="2E3348"/>
+                      </a:solidFill>
+                    </a:lnR>
+                    <a:lnT w="6350" cap="flat">
+                      <a:solidFill>
+                        <a:srgbClr val="2E3348"/>
+                      </a:solidFill>
+                    </a:lnT>
+                    <a:lnB w="6350" cap="flat">
+                      <a:solidFill>
+                        <a:srgbClr val="2E3348"/>
+                      </a:solidFill>
+                    </a:lnB>
+                  </a:tcPr>
+                </a:tc>
+                <a:tc>
+                  <a:txBody>
+                    <a:bodyPr wrap="square"/>
+                    <a:lstStyle/>
+                    <a:p>
+                      <a:pPr algn="l"/>
+                      <a:r>
+                        <a:rPr sz="700" b="0">
+                          <a:solidFill>
+                            <a:srgbClr val="E2E8F0"/>
+                          </a:solidFill>
+                        </a:rPr>
+                        <a:t>https://events.sumologic.com/mobotessentialspm09172026-event-training</a:t>
+                      </a:r>
+                    </a:p>
+                  </a:txBody>
+                  <a:tcPr>
+                    <a:solidFill>
+                      <a:srgbClr val="1A1D27"/>
+                    </a:solidFill>
+                    <a:lnL w="6350" cap="flat">
+                      <a:solidFill>
+                        <a:srgbClr val="2E3348"/>
+                      </a:solidFill>
+                    </a:lnL>
+                    <a:lnR w="6350" cap="flat">
+                      <a:solidFill>
+                        <a:srgbClr val="2E3348"/>
+                      </a:solidFill>
+                    </a:lnR>
+                    <a:lnT w="6350" cap="flat">
+                      <a:solidFill>
+                        <a:srgbClr val="2E3348"/>
+                      </a:solidFill>
+                    </a:lnT>
+                    <a:lnB w="6350" cap="flat">
+                      <a:solidFill>
+                        <a:srgbClr val="2E3348"/>
+                      </a:solidFill>
+                    </a:lnB>
+                  </a:tcPr>
+                </a:tc>
+              </a:tr>
+              <a:tr h="420624">
+                <a:tc>
+                  <a:txBody>
+                    <a:bodyPr wrap="square"/>
+                    <a:lstStyle/>
+                    <a:p>
+                      <a:pPr algn="l"/>
+                      <a:r>
+                        <a:rPr sz="800" b="0">
+                          <a:solidFill>
+                            <a:srgbClr val="E2E8F0"/>
+                          </a:solidFill>
+                        </a:rPr>
+                        <a:t>Essential Cloud SIEM Skills for SOC Analysts AM</a:t>
+                      </a:r>
+                    </a:p>
+                  </a:txBody>
+                  <a:tcPr>
+                    <a:solidFill>
+                      <a:srgbClr val="0F1117"/>
+                    </a:solidFill>
+                    <a:lnL w="6350" cap="flat">
+                      <a:solidFill>
+                        <a:srgbClr val="2E3348"/>
+                      </a:solidFill>
+                    </a:lnL>
+                    <a:lnR w="6350" cap="flat">
+                      <a:solidFill>
+                        <a:srgbClr val="2E3348"/>
+                      </a:solidFill>
+                    </a:lnR>
+                    <a:lnT w="6350" cap="flat">
+                      <a:solidFill>
+                        <a:srgbClr val="2E3348"/>
+                      </a:solidFill>
+                    </a:lnT>
+                    <a:lnB w="6350" cap="flat">
+                      <a:solidFill>
+                        <a:srgbClr val="2E3348"/>
+                      </a:solidFill>
+                    </a:lnB>
+                  </a:tcPr>
+                </a:tc>
+                <a:tc>
+                  <a:txBody>
+                    <a:bodyPr wrap="none"/>
+                    <a:lstStyle/>
+                    <a:p>
+                      <a:pPr algn="l"/>
+                      <a:r>
+                        <a:rPr sz="800" b="0">
+                          <a:solidFill>
+                            <a:srgbClr val="E2E8F0"/>
+                          </a:solidFill>
+                        </a:rPr>
+                        <a:t>Tue 22 Sep 2026  07:00 AM  →  08:30 AM</a:t>
+                      </a:r>
+                    </a:p>
+                  </a:txBody>
+                  <a:tcPr>
+                    <a:solidFill>
+                      <a:srgbClr val="0F1117"/>
+                    </a:solidFill>
+                    <a:lnL w="6350" cap="flat">
+                      <a:solidFill>
+                        <a:srgbClr val="2E3348"/>
+                      </a:solidFill>
+                    </a:lnL>
+                    <a:lnR w="6350" cap="flat">
+                      <a:solidFill>
+                        <a:srgbClr val="2E3348"/>
+                      </a:solidFill>
+                    </a:lnR>
+                    <a:lnT w="6350" cap="flat">
+                      <a:solidFill>
+                        <a:srgbClr val="2E3348"/>
+                      </a:solidFill>
+                    </a:lnT>
+                    <a:lnB w="6350" cap="flat">
+                      <a:solidFill>
+                        <a:srgbClr val="2E3348"/>
+                      </a:solidFill>
+                    </a:lnB>
+                  </a:tcPr>
+                </a:tc>
+                <a:tc>
+                  <a:txBody>
+                    <a:bodyPr wrap="none"/>
+                    <a:lstStyle/>
+                    <a:p>
+                      <a:pPr algn="l"/>
+                      <a:r>
+                        <a:rPr sz="800" b="0">
+                          <a:solidFill>
+                            <a:srgbClr val="E2E8F0"/>
+                          </a:solidFill>
+                        </a:rPr>
+                        <a:t>Wed 23 Sep 2026  02:00 AM</a:t>
+                      </a:r>
+                    </a:p>
+                  </a:txBody>
+                  <a:tcPr>
+                    <a:solidFill>
+                      <a:srgbClr val="0F1117"/>
+                    </a:solidFill>
+                    <a:lnL w="6350" cap="flat">
+                      <a:solidFill>
+                        <a:srgbClr val="2E3348"/>
+                      </a:solidFill>
+                    </a:lnL>
+                    <a:lnR w="6350" cap="flat">
+                      <a:solidFill>
+                        <a:srgbClr val="2E3348"/>
+                      </a:solidFill>
+                    </a:lnR>
+                    <a:lnT w="6350" cap="flat">
+                      <a:solidFill>
+                        <a:srgbClr val="2E3348"/>
+                      </a:solidFill>
+                    </a:lnT>
+                    <a:lnB w="6350" cap="flat">
+                      <a:solidFill>
+                        <a:srgbClr val="2E3348"/>
+                      </a:solidFill>
+                    </a:lnB>
+                  </a:tcPr>
+                </a:tc>
+                <a:tc>
+                  <a:txBody>
+                    <a:bodyPr wrap="none"/>
+                    <a:lstStyle/>
+                    <a:p>
+                      <a:pPr algn="l"/>
+                      <a:r>
+                        <a:rPr sz="800" b="0">
+                          <a:solidFill>
+                            <a:srgbClr val="E2E8F0"/>
+                          </a:solidFill>
+                        </a:rPr>
+                        <a:t>Wed 23 Sep 2026  12:00 AM</a:t>
+                      </a:r>
+                    </a:p>
+                  </a:txBody>
+                  <a:tcPr>
+                    <a:solidFill>
+                      <a:srgbClr val="0F1117"/>
+                    </a:solidFill>
+                    <a:lnL w="6350" cap="flat">
+                      <a:solidFill>
+                        <a:srgbClr val="2E3348"/>
+                      </a:solidFill>
+                    </a:lnL>
+                    <a:lnR w="6350" cap="flat">
+                      <a:solidFill>
+                        <a:srgbClr val="2E3348"/>
+                      </a:solidFill>
+                    </a:lnR>
+                    <a:lnT w="6350" cap="flat">
+                      <a:solidFill>
+                        <a:srgbClr val="2E3348"/>
+                      </a:solidFill>
+                    </a:lnT>
+                    <a:lnB w="6350" cap="flat">
+                      <a:solidFill>
+                        <a:srgbClr val="2E3348"/>
+                      </a:solidFill>
+                    </a:lnB>
+                  </a:tcPr>
+                </a:tc>
+                <a:tc>
+                  <a:txBody>
+                    <a:bodyPr wrap="none"/>
+                    <a:lstStyle/>
+                    <a:p>
+                      <a:pPr algn="l"/>
+                      <a:r>
+                        <a:rPr sz="800" b="0">
+                          <a:solidFill>
+                            <a:srgbClr val="E2E8F0"/>
+                          </a:solidFill>
+                        </a:rPr>
+                        <a:t>Tue 22 Sep 2026  10:00 PM</a:t>
+                      </a:r>
+                    </a:p>
+                  </a:txBody>
+                  <a:tcPr>
+                    <a:solidFill>
+                      <a:srgbClr val="0F1117"/>
+                    </a:solidFill>
+                    <a:lnL w="6350" cap="flat">
+                      <a:solidFill>
+                        <a:srgbClr val="2E3348"/>
+                      </a:solidFill>
+                    </a:lnL>
+                    <a:lnR w="6350" cap="flat">
+                      <a:solidFill>
+                        <a:srgbClr val="2E3348"/>
+                      </a:solidFill>
+                    </a:lnR>
+                    <a:lnT w="6350" cap="flat">
+                      <a:solidFill>
+                        <a:srgbClr val="2E3348"/>
+                      </a:solidFill>
+                    </a:lnT>
+                    <a:lnB w="6350" cap="flat">
+                      <a:solidFill>
+                        <a:srgbClr val="2E3348"/>
+                      </a:solidFill>
+                    </a:lnB>
+                  </a:tcPr>
+                </a:tc>
+                <a:tc>
+                  <a:txBody>
+                    <a:bodyPr wrap="square"/>
+                    <a:lstStyle/>
+                    <a:p>
+                      <a:pPr algn="l"/>
+                      <a:r>
+                        <a:rPr sz="700" b="0">
+                          <a:solidFill>
+                            <a:srgbClr val="E2E8F0"/>
+                          </a:solidFill>
+                        </a:rPr>
+                        <a:t>https://events.sumologic.com/esssiemam09222026-event-training</a:t>
+                      </a:r>
+                    </a:p>
+                  </a:txBody>
+                  <a:tcPr>
+                    <a:solidFill>
+                      <a:srgbClr val="0F1117"/>
+                    </a:solidFill>
+                    <a:lnL w="6350" cap="flat">
+                      <a:solidFill>
+                        <a:srgbClr val="2E3348"/>
+                      </a:solidFill>
+                    </a:lnL>
+                    <a:lnR w="6350" cap="flat">
+                      <a:solidFill>
+                        <a:srgbClr val="2E3348"/>
+                      </a:solidFill>
+                    </a:lnR>
+                    <a:lnT w="6350" cap="flat">
+                      <a:solidFill>
+                        <a:srgbClr val="2E3348"/>
+                      </a:solidFill>
+                    </a:lnT>
+                    <a:lnB w="6350" cap="flat">
+                      <a:solidFill>
+                        <a:srgbClr val="2E3348"/>
+                      </a:solidFill>
+                    </a:lnB>
+                  </a:tcPr>
+                </a:tc>
+              </a:tr>
+              <a:tr h="420624">
+                <a:tc>
+                  <a:txBody>
+                    <a:bodyPr wrap="square"/>
+                    <a:lstStyle/>
+                    <a:p>
+                      <a:pPr algn="l"/>
+                      <a:r>
+                        <a:rPr sz="800" b="0">
+                          <a:solidFill>
+                            <a:srgbClr val="E2E8F0"/>
+                          </a:solidFill>
+                        </a:rPr>
+                        <a:t>Essential Cloud SIEM Skills for SOC Analysts PM</a:t>
+                      </a:r>
+                    </a:p>
+                  </a:txBody>
+                  <a:tcPr>
+                    <a:solidFill>
+                      <a:srgbClr val="1A1D27"/>
+                    </a:solidFill>
+                    <a:lnL w="6350" cap="flat">
+                      <a:solidFill>
+                        <a:srgbClr val="2E3348"/>
+                      </a:solidFill>
+                    </a:lnL>
+                    <a:lnR w="6350" cap="flat">
+                      <a:solidFill>
+                        <a:srgbClr val="2E3348"/>
+                      </a:solidFill>
+                    </a:lnR>
+                    <a:lnT w="6350" cap="flat">
+                      <a:solidFill>
+                        <a:srgbClr val="2E3348"/>
+                      </a:solidFill>
+                    </a:lnT>
+                    <a:lnB w="6350" cap="flat">
+                      <a:solidFill>
+                        <a:srgbClr val="2E3348"/>
+                      </a:solidFill>
+                    </a:lnB>
+                  </a:tcPr>
+                </a:tc>
+                <a:tc>
+                  <a:txBody>
+                    <a:bodyPr wrap="none"/>
+                    <a:lstStyle/>
+                    <a:p>
+                      <a:pPr algn="l"/>
+                      <a:r>
+                        <a:rPr sz="800" b="0">
+                          <a:solidFill>
+                            <a:srgbClr val="E2E8F0"/>
+                          </a:solidFill>
+                        </a:rPr>
+                        <a:t>Tue 22 Sep 2026  04:00 PM  →  05:30 PM</a:t>
+                      </a:r>
+                    </a:p>
+                  </a:txBody>
+                  <a:tcPr>
+                    <a:solidFill>
+                      <a:srgbClr val="1A1D27"/>
+                    </a:solidFill>
+                    <a:lnL w="6350" cap="flat">
+                      <a:solidFill>
+                        <a:srgbClr val="2E3348"/>
+                      </a:solidFill>
+                    </a:lnL>
+                    <a:lnR w="6350" cap="flat">
+                      <a:solidFill>
+                        <a:srgbClr val="2E3348"/>
+                      </a:solidFill>
+                    </a:lnR>
+                    <a:lnT w="6350" cap="flat">
+                      <a:solidFill>
+                        <a:srgbClr val="2E3348"/>
+                      </a:solidFill>
+                    </a:lnT>
+                    <a:lnB w="6350" cap="flat">
+                      <a:solidFill>
+                        <a:srgbClr val="2E3348"/>
+                      </a:solidFill>
+                    </a:lnB>
+                  </a:tcPr>
+                </a:tc>
+                <a:tc>
+                  <a:txBody>
+                    <a:bodyPr wrap="none"/>
+                    <a:lstStyle/>
+                    <a:p>
+                      <a:pPr algn="l"/>
+                      <a:r>
+                        <a:rPr sz="800" b="0">
+                          <a:solidFill>
+                            <a:srgbClr val="E2E8F0"/>
+                          </a:solidFill>
+                        </a:rPr>
+                        <a:t>Wed 23 Sep 2026  11:00 AM</a:t>
+                      </a:r>
+                    </a:p>
+                  </a:txBody>
+                  <a:tcPr>
+                    <a:solidFill>
+                      <a:srgbClr val="1A1D27"/>
+                    </a:solidFill>
+                    <a:lnL w="6350" cap="flat">
+                      <a:solidFill>
+                        <a:srgbClr val="2E3348"/>
+                      </a:solidFill>
+                    </a:lnL>
+                    <a:lnR w="6350" cap="flat">
+                      <a:solidFill>
+                        <a:srgbClr val="2E3348"/>
+                      </a:solidFill>
+                    </a:lnR>
+                    <a:lnT w="6350" cap="flat">
+                      <a:solidFill>
+                        <a:srgbClr val="2E3348"/>
+                      </a:solidFill>
+                    </a:lnT>
+                    <a:lnB w="6350" cap="flat">
+                      <a:solidFill>
+                        <a:srgbClr val="2E3348"/>
+                      </a:solidFill>
+                    </a:lnB>
+                  </a:tcPr>
+                </a:tc>
+                <a:tc>
+                  <a:txBody>
+                    <a:bodyPr wrap="none"/>
+                    <a:lstStyle/>
+                    <a:p>
+                      <a:pPr algn="l"/>
+                      <a:r>
+                        <a:rPr sz="800" b="0">
+                          <a:solidFill>
+                            <a:srgbClr val="E2E8F0"/>
+                          </a:solidFill>
+                        </a:rPr>
+                        <a:t>Wed 23 Sep 2026  09:00 AM</a:t>
+                      </a:r>
+                    </a:p>
+                  </a:txBody>
+                  <a:tcPr>
+                    <a:solidFill>
+                      <a:srgbClr val="1A1D27"/>
+                    </a:solidFill>
+                    <a:lnL w="6350" cap="flat">
+                      <a:solidFill>
+                        <a:srgbClr val="2E3348"/>
+                      </a:solidFill>
+                    </a:lnL>
+                    <a:lnR w="6350" cap="flat">
+                      <a:solidFill>
+                        <a:srgbClr val="2E3348"/>
+                      </a:solidFill>
+                    </a:lnR>
+                    <a:lnT w="6350" cap="flat">
+                      <a:solidFill>
+                        <a:srgbClr val="2E3348"/>
+                      </a:solidFill>
+                    </a:lnT>
+                    <a:lnB w="6350" cap="flat">
+                      <a:solidFill>
+                        <a:srgbClr val="2E3348"/>
+                      </a:solidFill>
+                    </a:lnB>
+                  </a:tcPr>
+                </a:tc>
+                <a:tc>
+                  <a:txBody>
+                    <a:bodyPr wrap="none"/>
+                    <a:lstStyle/>
+                    <a:p>
+                      <a:pPr algn="l"/>
+                      <a:r>
+                        <a:rPr sz="800" b="0">
+                          <a:solidFill>
+                            <a:srgbClr val="E2E8F0"/>
+                          </a:solidFill>
+                        </a:rPr>
+                        <a:t>Wed 23 Sep 2026  07:00 AM</a:t>
+                      </a:r>
+                    </a:p>
+                  </a:txBody>
+                  <a:tcPr>
+                    <a:solidFill>
+                      <a:srgbClr val="1A1D27"/>
+                    </a:solidFill>
+                    <a:lnL w="6350" cap="flat">
+                      <a:solidFill>
+                        <a:srgbClr val="2E3348"/>
+                      </a:solidFill>
+                    </a:lnL>
+                    <a:lnR w="6350" cap="flat">
+                      <a:solidFill>
+                        <a:srgbClr val="2E3348"/>
+                      </a:solidFill>
+                    </a:lnR>
+                    <a:lnT w="6350" cap="flat">
+                      <a:solidFill>
+                        <a:srgbClr val="2E3348"/>
+                      </a:solidFill>
+                    </a:lnT>
+                    <a:lnB w="6350" cap="flat">
+                      <a:solidFill>
+                        <a:srgbClr val="2E3348"/>
+                      </a:solidFill>
+                    </a:lnB>
+                  </a:tcPr>
+                </a:tc>
+                <a:tc>
+                  <a:txBody>
+                    <a:bodyPr wrap="square"/>
+                    <a:lstStyle/>
+                    <a:p>
+                      <a:pPr algn="l"/>
+                      <a:r>
+                        <a:rPr sz="700" b="0">
+                          <a:solidFill>
+                            <a:srgbClr val="E2E8F0"/>
+                          </a:solidFill>
+                        </a:rPr>
+                        <a:t>https://events.sumologic.com/esssiempm09222026-event-training</a:t>
+                      </a:r>
+                    </a:p>
+                  </a:txBody>
+                  <a:tcPr>
+                    <a:solidFill>
+                      <a:srgbClr val="1A1D27"/>
+                    </a:solidFill>
+                    <a:lnL w="6350" cap="flat">
+                      <a:solidFill>
+                        <a:srgbClr val="2E3348"/>
+                      </a:solidFill>
+                    </a:lnL>
+                    <a:lnR w="6350" cap="flat">
+                      <a:solidFill>
+                        <a:srgbClr val="2E3348"/>
+                      </a:solidFill>
+                    </a:lnR>
+                    <a:lnT w="6350" cap="flat">
+                      <a:solidFill>
+                        <a:srgbClr val="2E3348"/>
+                      </a:solidFill>
+                    </a:lnT>
+                    <a:lnB w="6350" cap="flat">
+                      <a:solidFill>
+                        <a:srgbClr val="2E3348"/>
+                      </a:solidFill>
+                    </a:lnB>
+                  </a:tcPr>
+                </a:tc>
+              </a:tr>
+              <a:tr h="420624">
+                <a:tc>
+                  <a:txBody>
+                    <a:bodyPr wrap="square"/>
+                    <a:lstStyle/>
+                    <a:p>
+                      <a:pPr algn="l"/>
+                      <a:r>
+                        <a:rPr sz="800" b="0">
+                          <a:solidFill>
+                            <a:srgbClr val="E2E8F0"/>
+                          </a:solidFill>
+                        </a:rPr>
+                        <a:t>Cloud SIEM AM</a:t>
+                      </a:r>
+                    </a:p>
+                  </a:txBody>
+                  <a:tcPr>
+                    <a:solidFill>
+                      <a:srgbClr val="0F1117"/>
+                    </a:solidFill>
+                    <a:lnL w="6350" cap="flat">
+                      <a:solidFill>
+                        <a:srgbClr val="2E3348"/>
+                      </a:solidFill>
+                    </a:lnL>
+                    <a:lnR w="6350" cap="flat">
+                      <a:solidFill>
+                        <a:srgbClr val="2E3348"/>
+                      </a:solidFill>
+                    </a:lnR>
+                    <a:lnT w="6350" cap="flat">
+                      <a:solidFill>
+                        <a:srgbClr val="2E3348"/>
+                      </a:solidFill>
+                    </a:lnT>
+                    <a:lnB w="6350" cap="flat">
+                      <a:solidFill>
+                        <a:srgbClr val="2E3348"/>
+                      </a:solidFill>
+                    </a:lnB>
+                  </a:tcPr>
+                </a:tc>
+                <a:tc>
+                  <a:txBody>
+                    <a:bodyPr wrap="none"/>
+                    <a:lstStyle/>
+                    <a:p>
+                      <a:pPr algn="l"/>
+                      <a:r>
+                        <a:rPr sz="800" b="0">
+                          <a:solidFill>
+                            <a:srgbClr val="E2E8F0"/>
+                          </a:solidFill>
+                        </a:rPr>
+                        <a:t>Wed 23 Sep 2026  07:00 AM  →  10:00 AM</a:t>
+                      </a:r>
+                    </a:p>
+                  </a:txBody>
+                  <a:tcPr>
+                    <a:solidFill>
+                      <a:srgbClr val="0F1117"/>
+                    </a:solidFill>
+                    <a:lnL w="6350" cap="flat">
+                      <a:solidFill>
+                        <a:srgbClr val="2E3348"/>
+                      </a:solidFill>
+                    </a:lnL>
+                    <a:lnR w="6350" cap="flat">
+                      <a:solidFill>
+                        <a:srgbClr val="2E3348"/>
+                      </a:solidFill>
+                    </a:lnR>
+                    <a:lnT w="6350" cap="flat">
+                      <a:solidFill>
+                        <a:srgbClr val="2E3348"/>
+                      </a:solidFill>
+                    </a:lnT>
+                    <a:lnB w="6350" cap="flat">
+                      <a:solidFill>
+                        <a:srgbClr val="2E3348"/>
+                      </a:solidFill>
+                    </a:lnB>
+                  </a:tcPr>
+                </a:tc>
+                <a:tc>
+                  <a:txBody>
+                    <a:bodyPr wrap="none"/>
+                    <a:lstStyle/>
+                    <a:p>
+                      <a:pPr algn="l"/>
+                      <a:r>
+                        <a:rPr sz="800" b="0">
+                          <a:solidFill>
+                            <a:srgbClr val="E2E8F0"/>
+                          </a:solidFill>
+                        </a:rPr>
+                        <a:t>Thu 24 Sep 2026  02:00 AM</a:t>
+                      </a:r>
+                    </a:p>
+                  </a:txBody>
+                  <a:tcPr>
+                    <a:solidFill>
+                      <a:srgbClr val="0F1117"/>
+                    </a:solidFill>
+                    <a:lnL w="6350" cap="flat">
+                      <a:solidFill>
+                        <a:srgbClr val="2E3348"/>
+                      </a:solidFill>
+                    </a:lnL>
+                    <a:lnR w="6350" cap="flat">
+                      <a:solidFill>
+                        <a:srgbClr val="2E3348"/>
+                      </a:solidFill>
+                    </a:lnR>
+                    <a:lnT w="6350" cap="flat">
+                      <a:solidFill>
+                        <a:srgbClr val="2E3348"/>
+                      </a:solidFill>
+                    </a:lnT>
+                    <a:lnB w="6350" cap="flat">
+                      <a:solidFill>
+                        <a:srgbClr val="2E3348"/>
+                      </a:solidFill>
+                    </a:lnB>
+                  </a:tcPr>
+                </a:tc>
+                <a:tc>
+                  <a:txBody>
+                    <a:bodyPr wrap="none"/>
+                    <a:lstStyle/>
+                    <a:p>
+                      <a:pPr algn="l"/>
+                      <a:r>
+                        <a:rPr sz="800" b="0">
+                          <a:solidFill>
+                            <a:srgbClr val="E2E8F0"/>
+                          </a:solidFill>
+                        </a:rPr>
+                        <a:t>Thu 24 Sep 2026  12:00 AM</a:t>
+                      </a:r>
+                    </a:p>
+                  </a:txBody>
+                  <a:tcPr>
+                    <a:solidFill>
+                      <a:srgbClr val="0F1117"/>
+                    </a:solidFill>
+                    <a:lnL w="6350" cap="flat">
+                      <a:solidFill>
+                        <a:srgbClr val="2E3348"/>
+                      </a:solidFill>
+                    </a:lnL>
+                    <a:lnR w="6350" cap="flat">
+                      <a:solidFill>
+                        <a:srgbClr val="2E3348"/>
+                      </a:solidFill>
+                    </a:lnR>
+                    <a:lnT w="6350" cap="flat">
+                      <a:solidFill>
+                        <a:srgbClr val="2E3348"/>
+                      </a:solidFill>
+                    </a:lnT>
+                    <a:lnB w="6350" cap="flat">
+                      <a:solidFill>
+                        <a:srgbClr val="2E3348"/>
+                      </a:solidFill>
+                    </a:lnB>
+                  </a:tcPr>
+                </a:tc>
+                <a:tc>
+                  <a:txBody>
+                    <a:bodyPr wrap="none"/>
+                    <a:lstStyle/>
+                    <a:p>
+                      <a:pPr algn="l"/>
+                      <a:r>
+                        <a:rPr sz="800" b="0">
+                          <a:solidFill>
+                            <a:srgbClr val="E2E8F0"/>
+                          </a:solidFill>
+                        </a:rPr>
+                        <a:t>Wed 23 Sep 2026  10:00 PM</a:t>
+                      </a:r>
+                    </a:p>
+                  </a:txBody>
+                  <a:tcPr>
+                    <a:solidFill>
+                      <a:srgbClr val="0F1117"/>
+                    </a:solidFill>
+                    <a:lnL w="6350" cap="flat">
+                      <a:solidFill>
+                        <a:srgbClr val="2E3348"/>
+                      </a:solidFill>
+                    </a:lnL>
+                    <a:lnR w="6350" cap="flat">
+                      <a:solidFill>
+                        <a:srgbClr val="2E3348"/>
+                      </a:solidFill>
+                    </a:lnR>
+                    <a:lnT w="6350" cap="flat">
+                      <a:solidFill>
+                        <a:srgbClr val="2E3348"/>
+                      </a:solidFill>
+                    </a:lnT>
+                    <a:lnB w="6350" cap="flat">
+                      <a:solidFill>
+                        <a:srgbClr val="2E3348"/>
+                      </a:solidFill>
+                    </a:lnB>
+                  </a:tcPr>
+                </a:tc>
+                <a:tc>
+                  <a:txBody>
+                    <a:bodyPr wrap="square"/>
+                    <a:lstStyle/>
+                    <a:p>
+                      <a:pPr algn="l"/>
+                      <a:r>
+                        <a:rPr sz="700" b="0">
+                          <a:solidFill>
+                            <a:srgbClr val="E2E8F0"/>
+                          </a:solidFill>
+                        </a:rPr>
+                        <a:t>https://events.sumologic.com/cloudsiemam09232026-event-training</a:t>
+                      </a:r>
+                    </a:p>
+                  </a:txBody>
+                  <a:tcPr>
+                    <a:solidFill>
+                      <a:srgbClr val="0F1117"/>
+                    </a:solidFill>
+                    <a:lnL w="6350" cap="flat">
+                      <a:solidFill>
+                        <a:srgbClr val="2E3348"/>
+                      </a:solidFill>
+                    </a:lnL>
+                    <a:lnR w="6350" cap="flat">
+                      <a:solidFill>
+                        <a:srgbClr val="2E3348"/>
+                      </a:solidFill>
+                    </a:lnR>
+                    <a:lnT w="6350" cap="flat">
+                      <a:solidFill>
+                        <a:srgbClr val="2E3348"/>
+                      </a:solidFill>
+                    </a:lnT>
+                    <a:lnB w="6350" cap="flat">
+                      <a:solidFill>
+                        <a:srgbClr val="2E3348"/>
+                      </a:solidFill>
+                    </a:lnB>
+                  </a:tcPr>
+                </a:tc>
+              </a:tr>
+              <a:tr h="420624">
+                <a:tc>
+                  <a:txBody>
+                    <a:bodyPr wrap="square"/>
+                    <a:lstStyle/>
+                    <a:p>
+                      <a:pPr algn="l"/>
+                      <a:r>
+                        <a:rPr sz="800" b="0">
+                          <a:solidFill>
+                            <a:srgbClr val="E2E8F0"/>
+                          </a:solidFill>
+                        </a:rPr>
+                        <a:t>Cloud SIEM PM</a:t>
+                      </a:r>
+                    </a:p>
+                  </a:txBody>
+                  <a:tcPr>
+                    <a:solidFill>
+                      <a:srgbClr val="1A1D27"/>
+                    </a:solidFill>
+                    <a:lnL w="6350" cap="flat">
+                      <a:solidFill>
+                        <a:srgbClr val="2E3348"/>
+                      </a:solidFill>
+                    </a:lnL>
+                    <a:lnR w="6350" cap="flat">
+                      <a:solidFill>
+                        <a:srgbClr val="2E3348"/>
+                      </a:solidFill>
+                    </a:lnR>
+                    <a:lnT w="6350" cap="flat">
+                      <a:solidFill>
+                        <a:srgbClr val="2E3348"/>
+                      </a:solidFill>
+                    </a:lnT>
+                    <a:lnB w="6350" cap="flat">
+                      <a:solidFill>
+                        <a:srgbClr val="2E3348"/>
+                      </a:solidFill>
+                    </a:lnB>
+                  </a:tcPr>
+                </a:tc>
+                <a:tc>
+                  <a:txBody>
+                    <a:bodyPr wrap="none"/>
+                    <a:lstStyle/>
+                    <a:p>
+                      <a:pPr algn="l"/>
+                      <a:r>
+                        <a:rPr sz="800" b="0">
+                          <a:solidFill>
+                            <a:srgbClr val="E2E8F0"/>
+                          </a:solidFill>
+                        </a:rPr>
+                        <a:t>Wed 23 Sep 2026  04:00 PM  →  07:00 PM</a:t>
+                      </a:r>
+                    </a:p>
+                  </a:txBody>
+                  <a:tcPr>
+                    <a:solidFill>
+                      <a:srgbClr val="1A1D27"/>
+                    </a:solidFill>
+                    <a:lnL w="6350" cap="flat">
+                      <a:solidFill>
+                        <a:srgbClr val="2E3348"/>
+                      </a:solidFill>
+                    </a:lnL>
+                    <a:lnR w="6350" cap="flat">
+                      <a:solidFill>
+                        <a:srgbClr val="2E3348"/>
+                      </a:solidFill>
+                    </a:lnR>
+                    <a:lnT w="6350" cap="flat">
+                      <a:solidFill>
+                        <a:srgbClr val="2E3348"/>
+                      </a:solidFill>
+                    </a:lnT>
+                    <a:lnB w="6350" cap="flat">
+                      <a:solidFill>
+                        <a:srgbClr val="2E3348"/>
+                      </a:solidFill>
+                    </a:lnB>
+                  </a:tcPr>
+                </a:tc>
+                <a:tc>
+                  <a:txBody>
+                    <a:bodyPr wrap="none"/>
+                    <a:lstStyle/>
+                    <a:p>
+                      <a:pPr algn="l"/>
+                      <a:r>
+                        <a:rPr sz="800" b="0">
+                          <a:solidFill>
+                            <a:srgbClr val="E2E8F0"/>
+                          </a:solidFill>
+                        </a:rPr>
+                        <a:t>Thu 24 Sep 2026  11:00 AM</a:t>
+                      </a:r>
+                    </a:p>
+                  </a:txBody>
+                  <a:tcPr>
+                    <a:solidFill>
+                      <a:srgbClr val="1A1D27"/>
+                    </a:solidFill>
+                    <a:lnL w="6350" cap="flat">
+                      <a:solidFill>
+                        <a:srgbClr val="2E3348"/>
+                      </a:solidFill>
+                    </a:lnL>
+                    <a:lnR w="6350" cap="flat">
+                      <a:solidFill>
+                        <a:srgbClr val="2E3348"/>
+                      </a:solidFill>
+                    </a:lnR>
+                    <a:lnT w="6350" cap="flat">
+                      <a:solidFill>
+                        <a:srgbClr val="2E3348"/>
+                      </a:solidFill>
+                    </a:lnT>
+                    <a:lnB w="6350" cap="flat">
+                      <a:solidFill>
+                        <a:srgbClr val="2E3348"/>
+                      </a:solidFill>
+                    </a:lnB>
+                  </a:tcPr>
+                </a:tc>
+                <a:tc>
+                  <a:txBody>
+                    <a:bodyPr wrap="none"/>
+                    <a:lstStyle/>
+                    <a:p>
+                      <a:pPr algn="l"/>
+                      <a:r>
+                        <a:rPr sz="800" b="0">
+                          <a:solidFill>
+                            <a:srgbClr val="E2E8F0"/>
+                          </a:solidFill>
+                        </a:rPr>
+                        <a:t>Thu 24 Sep 2026  09:00 AM</a:t>
+                      </a:r>
+                    </a:p>
+                  </a:txBody>
+                  <a:tcPr>
+                    <a:solidFill>
+                      <a:srgbClr val="1A1D27"/>
+                    </a:solidFill>
+                    <a:lnL w="6350" cap="flat">
+                      <a:solidFill>
+                        <a:srgbClr val="2E3348"/>
+                      </a:solidFill>
+                    </a:lnL>
+                    <a:lnR w="6350" cap="flat">
+                      <a:solidFill>
+                        <a:srgbClr val="2E3348"/>
+                      </a:solidFill>
+                    </a:lnR>
+                    <a:lnT w="6350" cap="flat">
+                      <a:solidFill>
+                        <a:srgbClr val="2E3348"/>
+                      </a:solidFill>
+                    </a:lnT>
+                    <a:lnB w="6350" cap="flat">
+                      <a:solidFill>
+                        <a:srgbClr val="2E3348"/>
+                      </a:solidFill>
+                    </a:lnB>
+                  </a:tcPr>
+                </a:tc>
+                <a:tc>
+                  <a:txBody>
+                    <a:bodyPr wrap="none"/>
+                    <a:lstStyle/>
+                    <a:p>
+                      <a:pPr algn="l"/>
+                      <a:r>
+                        <a:rPr sz="800" b="0">
+                          <a:solidFill>
+                            <a:srgbClr val="E2E8F0"/>
+                          </a:solidFill>
+                        </a:rPr>
+                        <a:t>Thu 24 Sep 2026  07:00 AM</a:t>
+                      </a:r>
+                    </a:p>
+                  </a:txBody>
+                  <a:tcPr>
+                    <a:solidFill>
+                      <a:srgbClr val="1A1D27"/>
+                    </a:solidFill>
+                    <a:lnL w="6350" cap="flat">
+                      <a:solidFill>
+                        <a:srgbClr val="2E3348"/>
+                      </a:solidFill>
+                    </a:lnL>
+                    <a:lnR w="6350" cap="flat">
+                      <a:solidFill>
+                        <a:srgbClr val="2E3348"/>
+                      </a:solidFill>
+                    </a:lnR>
+                    <a:lnT w="6350" cap="flat">
+                      <a:solidFill>
+                        <a:srgbClr val="2E3348"/>
+                      </a:solidFill>
+                    </a:lnT>
+                    <a:lnB w="6350" cap="flat">
+                      <a:solidFill>
+                        <a:srgbClr val="2E3348"/>
+                      </a:solidFill>
+                    </a:lnB>
+                  </a:tcPr>
+                </a:tc>
+                <a:tc>
+                  <a:txBody>
+                    <a:bodyPr wrap="square"/>
+                    <a:lstStyle/>
+                    <a:p>
+                      <a:pPr algn="l"/>
+                      <a:r>
+                        <a:rPr sz="700" b="0">
+                          <a:solidFill>
+                            <a:srgbClr val="E2E8F0"/>
+                          </a:solidFill>
+                        </a:rPr>
+                        <a:t>https://events.sumologic.com/cloudsiempm09232026-event-training</a:t>
+                      </a:r>
+                    </a:p>
+                  </a:txBody>
+                  <a:tcPr>
+                    <a:solidFill>
+                      <a:srgbClr val="1A1D27"/>
+                    </a:solidFill>
+                    <a:lnL w="6350" cap="flat">
+                      <a:solidFill>
+                        <a:srgbClr val="2E3348"/>
+                      </a:solidFill>
+                    </a:lnL>
+                    <a:lnR w="6350" cap="flat">
+                      <a:solidFill>
+                        <a:srgbClr val="2E3348"/>
+                      </a:solidFill>
+                    </a:lnR>
+                    <a:lnT w="6350" cap="flat">
+                      <a:solidFill>
+                        <a:srgbClr val="2E3348"/>
+                      </a:solidFill>
+                    </a:lnT>
+                    <a:lnB w="6350" cap="flat">
+                      <a:solidFill>
+                        <a:srgbClr val="2E3348"/>
+                      </a:solidFill>
+                    </a:lnB>
+                  </a:tcPr>
+                </a:tc>
+              </a:tr>
+              <a:tr h="420624">
+                <a:tc>
+                  <a:txBody>
+                    <a:bodyPr wrap="square"/>
+                    <a:lstStyle/>
+                    <a:p>
+                      <a:pPr algn="l"/>
+                      <a:r>
+                        <a:rPr sz="800" b="0">
+                          <a:solidFill>
+                            <a:srgbClr val="E2E8F0"/>
+                          </a:solidFill>
+                        </a:rPr>
+                        <a:t>Automation AM</a:t>
+                      </a:r>
+                    </a:p>
+                  </a:txBody>
+                  <a:tcPr>
+                    <a:solidFill>
+                      <a:srgbClr val="0F1117"/>
+                    </a:solidFill>
+                    <a:lnL w="6350" cap="flat">
+                      <a:solidFill>
+                        <a:srgbClr val="2E3348"/>
+                      </a:solidFill>
+                    </a:lnL>
+                    <a:lnR w="6350" cap="flat">
+                      <a:solidFill>
+                        <a:srgbClr val="2E3348"/>
+                      </a:solidFill>
+                    </a:lnR>
+                    <a:lnT w="6350" cap="flat">
+                      <a:solidFill>
+                        <a:srgbClr val="2E3348"/>
+                      </a:solidFill>
+                    </a:lnT>
+                    <a:lnB w="6350" cap="flat">
+                      <a:solidFill>
+                        <a:srgbClr val="2E3348"/>
+                      </a:solidFill>
+                    </a:lnB>
+                  </a:tcPr>
+                </a:tc>
+                <a:tc>
+                  <a:txBody>
+                    <a:bodyPr wrap="none"/>
+                    <a:lstStyle/>
+                    <a:p>
+                      <a:pPr algn="l"/>
+                      <a:r>
+                        <a:rPr sz="800" b="0">
+                          <a:solidFill>
+                            <a:srgbClr val="E2E8F0"/>
+                          </a:solidFill>
+                        </a:rPr>
+                        <a:t>Thu 24 Sep 2026  07:00 AM  →  08:30 AM</a:t>
+                      </a:r>
+                    </a:p>
+                  </a:txBody>
+                  <a:tcPr>
+                    <a:solidFill>
+                      <a:srgbClr val="0F1117"/>
+                    </a:solidFill>
+                    <a:lnL w="6350" cap="flat">
+                      <a:solidFill>
+                        <a:srgbClr val="2E3348"/>
+                      </a:solidFill>
+                    </a:lnL>
+                    <a:lnR w="6350" cap="flat">
+                      <a:solidFill>
+                        <a:srgbClr val="2E3348"/>
+                      </a:solidFill>
+                    </a:lnR>
+                    <a:lnT w="6350" cap="flat">
+                      <a:solidFill>
+                        <a:srgbClr val="2E3348"/>
+                      </a:solidFill>
+                    </a:lnT>
+                    <a:lnB w="6350" cap="flat">
+                      <a:solidFill>
+                        <a:srgbClr val="2E3348"/>
+                      </a:solidFill>
+                    </a:lnB>
+                  </a:tcPr>
+                </a:tc>
+                <a:tc>
+                  <a:txBody>
+                    <a:bodyPr wrap="none"/>
+                    <a:lstStyle/>
+                    <a:p>
+                      <a:pPr algn="l"/>
+                      <a:r>
+                        <a:rPr sz="800" b="0">
+                          <a:solidFill>
+                            <a:srgbClr val="E2E8F0"/>
+                          </a:solidFill>
+                        </a:rPr>
+                        <a:t>Fri 25 Sep 2026  02:00 AM</a:t>
+                      </a:r>
+                    </a:p>
+                  </a:txBody>
+                  <a:tcPr>
+                    <a:solidFill>
+                      <a:srgbClr val="0F1117"/>
+                    </a:solidFill>
+                    <a:lnL w="6350" cap="flat">
+                      <a:solidFill>
+                        <a:srgbClr val="2E3348"/>
+                      </a:solidFill>
+                    </a:lnL>
+                    <a:lnR w="6350" cap="flat">
+                      <a:solidFill>
+                        <a:srgbClr val="2E3348"/>
+                      </a:solidFill>
+                    </a:lnR>
+                    <a:lnT w="6350" cap="flat">
+                      <a:solidFill>
+                        <a:srgbClr val="2E3348"/>
+                      </a:solidFill>
+                    </a:lnT>
+                    <a:lnB w="6350" cap="flat">
+                      <a:solidFill>
+                        <a:srgbClr val="2E3348"/>
+                      </a:solidFill>
+                    </a:lnB>
+                  </a:tcPr>
+                </a:tc>
+                <a:tc>
+                  <a:txBody>
+                    <a:bodyPr wrap="none"/>
+                    <a:lstStyle/>
+                    <a:p>
+                      <a:pPr algn="l"/>
+                      <a:r>
+                        <a:rPr sz="800" b="0">
+                          <a:solidFill>
+                            <a:srgbClr val="E2E8F0"/>
+                          </a:solidFill>
+                        </a:rPr>
+                        <a:t>Fri 25 Sep 2026  12:00 AM</a:t>
+                      </a:r>
+                    </a:p>
+                  </a:txBody>
+                  <a:tcPr>
+                    <a:solidFill>
+                      <a:srgbClr val="0F1117"/>
+                    </a:solidFill>
+                    <a:lnL w="6350" cap="flat">
+                      <a:solidFill>
+                        <a:srgbClr val="2E3348"/>
+                      </a:solidFill>
+                    </a:lnL>
+                    <a:lnR w="6350" cap="flat">
+                      <a:solidFill>
+                        <a:srgbClr val="2E3348"/>
+                      </a:solidFill>
+                    </a:lnR>
+                    <a:lnT w="6350" cap="flat">
+                      <a:solidFill>
+                        <a:srgbClr val="2E3348"/>
+                      </a:solidFill>
+                    </a:lnT>
+                    <a:lnB w="6350" cap="flat">
+                      <a:solidFill>
+                        <a:srgbClr val="2E3348"/>
+                      </a:solidFill>
+                    </a:lnB>
+                  </a:tcPr>
+                </a:tc>
+                <a:tc>
+                  <a:txBody>
+                    <a:bodyPr wrap="none"/>
+                    <a:lstStyle/>
+                    <a:p>
+                      <a:pPr algn="l"/>
+                      <a:r>
+                        <a:rPr sz="800" b="0">
+                          <a:solidFill>
+                            <a:srgbClr val="E2E8F0"/>
+                          </a:solidFill>
+                        </a:rPr>
+                        <a:t>Thu 24 Sep 2026  10:00 PM</a:t>
+                      </a:r>
+                    </a:p>
+                  </a:txBody>
+                  <a:tcPr>
+                    <a:solidFill>
+                      <a:srgbClr val="0F1117"/>
+                    </a:solidFill>
+                    <a:lnL w="6350" cap="flat">
+                      <a:solidFill>
+                        <a:srgbClr val="2E3348"/>
+                      </a:solidFill>
+                    </a:lnL>
+                    <a:lnR w="6350" cap="flat">
+                      <a:solidFill>
+                        <a:srgbClr val="2E3348"/>
+                      </a:solidFill>
+                    </a:lnR>
+                    <a:lnT w="6350" cap="flat">
+                      <a:solidFill>
+                        <a:srgbClr val="2E3348"/>
+                      </a:solidFill>
+                    </a:lnT>
+                    <a:lnB w="6350" cap="flat">
+                      <a:solidFill>
+                        <a:srgbClr val="2E3348"/>
+                      </a:solidFill>
+                    </a:lnB>
+                  </a:tcPr>
+                </a:tc>
+                <a:tc>
+                  <a:txBody>
+                    <a:bodyPr wrap="square"/>
+                    <a:lstStyle/>
+                    <a:p>
+                      <a:pPr algn="l"/>
+                      <a:r>
+                        <a:rPr sz="700" b="0">
+                          <a:solidFill>
+                            <a:srgbClr val="E2E8F0"/>
+                          </a:solidFill>
+                        </a:rPr>
+                        <a:t>https://events.sumologic.com/automationam09242026-event-training</a:t>
+                      </a:r>
+                    </a:p>
+                  </a:txBody>
+                  <a:tcPr>
+                    <a:solidFill>
+                      <a:srgbClr val="0F1117"/>
+                    </a:solidFill>
+                    <a:lnL w="6350" cap="flat">
+                      <a:solidFill>
+                        <a:srgbClr val="2E3348"/>
+                      </a:solidFill>
+                    </a:lnL>
+                    <a:lnR w="6350" cap="flat">
+                      <a:solidFill>
+                        <a:srgbClr val="2E3348"/>
+                      </a:solidFill>
+                    </a:lnR>
+                    <a:lnT w="6350" cap="flat">
+                      <a:solidFill>
+                        <a:srgbClr val="2E3348"/>
+                      </a:solidFill>
+                    </a:lnT>
+                    <a:lnB w="6350" cap="flat">
+                      <a:solidFill>
+                        <a:srgbClr val="2E3348"/>
+                      </a:solidFill>
+                    </a:lnB>
+                  </a:tcPr>
+                </a:tc>
+              </a:tr>
+              <a:tr h="420624">
+                <a:tc>
+                  <a:txBody>
+                    <a:bodyPr wrap="square"/>
+                    <a:lstStyle/>
+                    <a:p>
+                      <a:pPr algn="l"/>
+                      <a:r>
+                        <a:rPr sz="800" b="0">
+                          <a:solidFill>
+                            <a:srgbClr val="E2E8F0"/>
+                          </a:solidFill>
+                        </a:rPr>
+                        <a:t>Automation PM</a:t>
+                      </a:r>
+                    </a:p>
+                  </a:txBody>
+                  <a:tcPr>
+                    <a:solidFill>
+                      <a:srgbClr val="1A1D27"/>
+                    </a:solidFill>
+                    <a:lnL w="6350" cap="flat">
+                      <a:solidFill>
+                        <a:srgbClr val="2E3348"/>
+                      </a:solidFill>
+                    </a:lnL>
+                    <a:lnR w="6350" cap="flat">
+                      <a:solidFill>
+                        <a:srgbClr val="2E3348"/>
+                      </a:solidFill>
+                    </a:lnR>
+                    <a:lnT w="6350" cap="flat">
+                      <a:solidFill>
+                        <a:srgbClr val="2E3348"/>
+                      </a:solidFill>
+                    </a:lnT>
+                    <a:lnB w="6350" cap="flat">
+                      <a:solidFill>
+                        <a:srgbClr val="2E3348"/>
+                      </a:solidFill>
+                    </a:lnB>
+                  </a:tcPr>
+                </a:tc>
+                <a:tc>
+                  <a:txBody>
+                    <a:bodyPr wrap="none"/>
+                    <a:lstStyle/>
+                    <a:p>
+                      <a:pPr algn="l"/>
+                      <a:r>
+                        <a:rPr sz="800" b="0">
+                          <a:solidFill>
+                            <a:srgbClr val="E2E8F0"/>
+                          </a:solidFill>
+                        </a:rPr>
+                        <a:t>Thu 24 Sep 2026  04:00 PM  →  05:30 PM</a:t>
+                      </a:r>
+                    </a:p>
+                  </a:txBody>
+                  <a:tcPr>
+                    <a:solidFill>
+                      <a:srgbClr val="1A1D27"/>
+                    </a:solidFill>
+                    <a:lnL w="6350" cap="flat">
+                      <a:solidFill>
+                        <a:srgbClr val="2E3348"/>
+                      </a:solidFill>
+                    </a:lnL>
+                    <a:lnR w="6350" cap="flat">
+                      <a:solidFill>
+                        <a:srgbClr val="2E3348"/>
+                      </a:solidFill>
+                    </a:lnR>
+                    <a:lnT w="6350" cap="flat">
+                      <a:solidFill>
+                        <a:srgbClr val="2E3348"/>
+                      </a:solidFill>
+                    </a:lnT>
+                    <a:lnB w="6350" cap="flat">
+                      <a:solidFill>
+                        <a:srgbClr val="2E3348"/>
+                      </a:solidFill>
+                    </a:lnB>
+                  </a:tcPr>
+                </a:tc>
+                <a:tc>
+                  <a:txBody>
+                    <a:bodyPr wrap="none"/>
+                    <a:lstStyle/>
+                    <a:p>
+                      <a:pPr algn="l"/>
+                      <a:r>
+                        <a:rPr sz="800" b="0">
+                          <a:solidFill>
+                            <a:srgbClr val="E2E8F0"/>
+                          </a:solidFill>
+                        </a:rPr>
+                        <a:t>Fri 25 Sep 2026  11:00 AM</a:t>
+                      </a:r>
+                    </a:p>
+                  </a:txBody>
+                  <a:tcPr>
+                    <a:solidFill>
+                      <a:srgbClr val="1A1D27"/>
+                    </a:solidFill>
+                    <a:lnL w="6350" cap="flat">
+                      <a:solidFill>
+                        <a:srgbClr val="2E3348"/>
+                      </a:solidFill>
+                    </a:lnL>
+                    <a:lnR w="6350" cap="flat">
+                      <a:solidFill>
+                        <a:srgbClr val="2E3348"/>
+                      </a:solidFill>
+                    </a:lnR>
+                    <a:lnT w="6350" cap="flat">
+                      <a:solidFill>
+                        <a:srgbClr val="2E3348"/>
+                      </a:solidFill>
+                    </a:lnT>
+                    <a:lnB w="6350" cap="flat">
+                      <a:solidFill>
+                        <a:srgbClr val="2E3348"/>
+                      </a:solidFill>
+                    </a:lnB>
+                  </a:tcPr>
+                </a:tc>
+                <a:tc>
+                  <a:txBody>
+                    <a:bodyPr wrap="none"/>
+                    <a:lstStyle/>
+                    <a:p>
+                      <a:pPr algn="l"/>
+                      <a:r>
+                        <a:rPr sz="800" b="0">
+                          <a:solidFill>
+                            <a:srgbClr val="E2E8F0"/>
+                          </a:solidFill>
+                        </a:rPr>
+                        <a:t>Fri 25 Sep 2026  09:00 AM</a:t>
+                      </a:r>
+                    </a:p>
+                  </a:txBody>
+                  <a:tcPr>
+                    <a:solidFill>
+                      <a:srgbClr val="1A1D27"/>
+                    </a:solidFill>
+                    <a:lnL w="6350" cap="flat">
+                      <a:solidFill>
+                        <a:srgbClr val="2E3348"/>
+                      </a:solidFill>
+                    </a:lnL>
+                    <a:lnR w="6350" cap="flat">
+                      <a:solidFill>
+                        <a:srgbClr val="2E3348"/>
+                      </a:solidFill>
+                    </a:lnR>
+                    <a:lnT w="6350" cap="flat">
+                      <a:solidFill>
+                        <a:srgbClr val="2E3348"/>
+                      </a:solidFill>
+                    </a:lnT>
+                    <a:lnB w="6350" cap="flat">
+                      <a:solidFill>
+                        <a:srgbClr val="2E3348"/>
+                      </a:solidFill>
+                    </a:lnB>
+                  </a:tcPr>
+                </a:tc>
+                <a:tc>
+                  <a:txBody>
+                    <a:bodyPr wrap="none"/>
+                    <a:lstStyle/>
+                    <a:p>
+                      <a:pPr algn="l"/>
+                      <a:r>
+                        <a:rPr sz="800" b="0">
+                          <a:solidFill>
+                            <a:srgbClr val="E2E8F0"/>
+                          </a:solidFill>
+                        </a:rPr>
+                        <a:t>Fri 25 Sep 2026  07:00 AM</a:t>
+                      </a:r>
+                    </a:p>
+                  </a:txBody>
+                  <a:tcPr>
+                    <a:solidFill>
+                      <a:srgbClr val="1A1D27"/>
+                    </a:solidFill>
+                    <a:lnL w="6350" cap="flat">
+                      <a:solidFill>
+                        <a:srgbClr val="2E3348"/>
+                      </a:solidFill>
+                    </a:lnL>
+                    <a:lnR w="6350" cap="flat">
+                      <a:solidFill>
+                        <a:srgbClr val="2E3348"/>
+                      </a:solidFill>
+                    </a:lnR>
+                    <a:lnT w="6350" cap="flat">
+                      <a:solidFill>
+                        <a:srgbClr val="2E3348"/>
+                      </a:solidFill>
+                    </a:lnT>
+                    <a:lnB w="6350" cap="flat">
+                      <a:solidFill>
+                        <a:srgbClr val="2E3348"/>
+                      </a:solidFill>
+                    </a:lnB>
+                  </a:tcPr>
+                </a:tc>
+                <a:tc>
+                  <a:txBody>
+                    <a:bodyPr wrap="square"/>
+                    <a:lstStyle/>
+                    <a:p>
+                      <a:pPr algn="l"/>
+                      <a:r>
+                        <a:rPr sz="700" b="0">
+                          <a:solidFill>
+                            <a:srgbClr val="E2E8F0"/>
+                          </a:solidFill>
+                        </a:rPr>
+                        <a:t>https://events.sumologic.com/automationpm09242026-event-training</a:t>
+                      </a:r>
+                    </a:p>
+                  </a:txBody>
+                  <a:tcPr>
+                    <a:solidFill>
+                      <a:srgbClr val="1A1D27"/>
+                    </a:solidFill>
+                    <a:lnL w="6350" cap="flat">
+                      <a:solidFill>
+                        <a:srgbClr val="2E3348"/>
+                      </a:solidFill>
+                    </a:lnL>
+                    <a:lnR w="6350" cap="flat">
+                      <a:solidFill>
+                        <a:srgbClr val="2E3348"/>
+                      </a:solidFill>
+                    </a:lnR>
+                    <a:lnT w="6350" cap="flat">
+                      <a:solidFill>
+                        <a:srgbClr val="2E3348"/>
+                      </a:solidFill>
+                    </a:lnT>
+                    <a:lnB w="6350" cap="flat">
+                      <a:solidFill>
+                        <a:srgbClr val="2E3348"/>
+                      </a:solidFill>
+                    </a:lnB>
+                  </a:tcPr>
+                </a:tc>
+              </a:tr>
+            </a:tbl>
+          </a:graphicData>
+        </a:graphic>
+      </p:graphicFrame>
+      <p:sp>
+        <p:nvSpPr>
+          <p:cNvPr id="7" name="TextBox 6"/>
+          <p:cNvSpPr txBox="1"/>
+          <p:nvPr/>
+        </p:nvSpPr>
+        <p:spPr>
+          <a:xfrm>
+            <a:off x="164592" y="4425696"/>
             <a:ext cx="11795760" cy="274320"/>
           </a:xfrm>
           <a:prstGeom prst="rect">

--- a/CustomTraining/online trainings/training_schedule.pptx
+++ b/CustomTraining/online trainings/training_schedule.pptx
@@ -3207,7 +3207,7 @@
                   <a:srgbClr val="00B4D8"/>
                 </a:solidFill>
               </a:rPr>
-              <a:t>Sumo Logic — Virtual Training Schedule   ·   30 Jun 2026 – 07 Jul 2026   (1/6)</a:t>
+              <a:t>Sumo Logic — Virtual Training Schedule   ·   04 Aug – 11 Aug 2026   (1/6)</a:t>
             </a:r>
           </a:p>
         </p:txBody>
@@ -3581,7 +3581,7 @@
                             <a:srgbClr val="E2E8F0"/>
                           </a:solidFill>
                         </a:rPr>
-                        <a:t>Tue 30 Jun 2026  05:00 AM  →  06:00 AM</a:t>
+                        <a:t>Tue 04 Aug 2026  05:00 AM  →  06:00 AM</a:t>
                       </a:r>
                     </a:p>
                   </a:txBody>
@@ -3623,7 +3623,7 @@
                             <a:srgbClr val="E2E8F0"/>
                           </a:solidFill>
                         </a:rPr>
-                        <a:t>Wed 01 Jul 2026  12:00 AM</a:t>
+                        <a:t>Wed 05 Aug 2026  12:00 AM</a:t>
                       </a:r>
                     </a:p>
                   </a:txBody>
@@ -3665,7 +3665,7 @@
                             <a:srgbClr val="E2E8F0"/>
                           </a:solidFill>
                         </a:rPr>
-                        <a:t>Tue 30 Jun 2026  10:00 PM</a:t>
+                        <a:t>Tue 04 Aug 2026  10:00 PM</a:t>
                       </a:r>
                     </a:p>
                   </a:txBody>
@@ -3707,7 +3707,7 @@
                             <a:srgbClr val="E2E8F0"/>
                           </a:solidFill>
                         </a:rPr>
-                        <a:t>Tue 30 Jun 2026  08:00 PM</a:t>
+                        <a:t>Tue 04 Aug 2026  08:00 PM</a:t>
                       </a:r>
                     </a:p>
                   </a:txBody>
@@ -3749,7 +3749,7 @@
                             <a:srgbClr val="E2E8F0"/>
                           </a:solidFill>
                         </a:rPr>
-                        <a:t>https://events.sumologic.com/welcomewebinaram06302026-event-training</a:t>
+                        <a:t>https://events.sumologic.com/welcomewebinaram08042026-event-training</a:t>
                       </a:r>
                     </a:p>
                   </a:txBody>
@@ -3835,7 +3835,7 @@
                             <a:srgbClr val="E2E8F0"/>
                           </a:solidFill>
                         </a:rPr>
-                        <a:t>Tue 30 Jun 2026  07:00 AM  →  04:00 PM</a:t>
+                        <a:t>Tue 04 Aug 2026  07:00 AM  →  10:00 AM</a:t>
                       </a:r>
                     </a:p>
                   </a:txBody>
@@ -3877,7 +3877,7 @@
                             <a:srgbClr val="E2E8F0"/>
                           </a:solidFill>
                         </a:rPr>
-                        <a:t>Wed 01 Jul 2026  02:00 AM</a:t>
+                        <a:t>Wed 05 Aug 2026  02:00 AM</a:t>
                       </a:r>
                     </a:p>
                   </a:txBody>
@@ -3919,7 +3919,7 @@
                             <a:srgbClr val="E2E8F0"/>
                           </a:solidFill>
                         </a:rPr>
-                        <a:t>Wed 01 Jul 2026  12:00 AM</a:t>
+                        <a:t>Wed 05 Aug 2026  12:00 AM</a:t>
                       </a:r>
                     </a:p>
                   </a:txBody>
@@ -3961,7 +3961,7 @@
                             <a:srgbClr val="E2E8F0"/>
                           </a:solidFill>
                         </a:rPr>
-                        <a:t>Tue 30 Jun 2026  10:00 PM</a:t>
+                        <a:t>Tue 04 Aug 2026  10:00 PM</a:t>
                       </a:r>
                     </a:p>
                   </a:txBody>
@@ -4003,7 +4003,7 @@
                             <a:srgbClr val="E2E8F0"/>
                           </a:solidFill>
                         </a:rPr>
-                        <a:t>https://events.sumologic.com/fundamentalsam06302026-event-training</a:t>
+                        <a:t>https://events.sumologic.com/fundamentalsam08042026-event-training</a:t>
                       </a:r>
                     </a:p>
                   </a:txBody>
@@ -4047,7 +4047,7 @@
                             <a:srgbClr val="E2E8F0"/>
                           </a:solidFill>
                         </a:rPr>
-                        <a:t>Welcome Webinar PM</a:t>
+                        <a:t>Welcome Webinars PM</a:t>
                       </a:r>
                     </a:p>
                   </a:txBody>
@@ -4089,7 +4089,7 @@
                             <a:srgbClr val="E2E8F0"/>
                           </a:solidFill>
                         </a:rPr>
-                        <a:t>Tue 30 Jun 2026  10:00 AM  →  03:00 PM</a:t>
+                        <a:t>Tue 04 Aug 2026  02:00 PM  →  03:00 PM</a:t>
                       </a:r>
                     </a:p>
                   </a:txBody>
@@ -4131,7 +4131,7 @@
                             <a:srgbClr val="E2E8F0"/>
                           </a:solidFill>
                         </a:rPr>
-                        <a:t>Wed 01 Jul 2026  05:00 AM</a:t>
+                        <a:t>Wed 05 Aug 2026  09:00 AM</a:t>
                       </a:r>
                     </a:p>
                   </a:txBody>
@@ -4173,7 +4173,7 @@
                             <a:srgbClr val="E2E8F0"/>
                           </a:solidFill>
                         </a:rPr>
-                        <a:t>Wed 01 Jul 2026  03:00 AM</a:t>
+                        <a:t>Wed 05 Aug 2026  07:00 AM</a:t>
                       </a:r>
                     </a:p>
                   </a:txBody>
@@ -4215,7 +4215,7 @@
                             <a:srgbClr val="E2E8F0"/>
                           </a:solidFill>
                         </a:rPr>
-                        <a:t>Wed 01 Jul 2026  01:00 AM</a:t>
+                        <a:t>Wed 05 Aug 2026  05:00 AM</a:t>
                       </a:r>
                     </a:p>
                   </a:txBody>
@@ -4257,7 +4257,7 @@
                             <a:srgbClr val="E2E8F0"/>
                           </a:solidFill>
                         </a:rPr>
-                        <a:t>https://events.sumologic.com/welcomewebinarpm06302026-event-training</a:t>
+                        <a:t>https://events.sumologic.com/welcomewebinarpm08042026-event-training</a:t>
                       </a:r>
                     </a:p>
                   </a:txBody>
@@ -4343,7 +4343,7 @@
                             <a:srgbClr val="E2E8F0"/>
                           </a:solidFill>
                         </a:rPr>
-                        <a:t>Tue 30 Jun 2026  04:00 PM  →  07:00 PM</a:t>
+                        <a:t>Tue 04 Aug 2026  04:00 PM  →  07:00 PM</a:t>
                       </a:r>
                     </a:p>
                   </a:txBody>
@@ -4385,7 +4385,7 @@
                             <a:srgbClr val="E2E8F0"/>
                           </a:solidFill>
                         </a:rPr>
-                        <a:t>Wed 01 Jul 2026  11:00 AM</a:t>
+                        <a:t>Wed 05 Aug 2026  11:00 AM</a:t>
                       </a:r>
                     </a:p>
                   </a:txBody>
@@ -4427,7 +4427,7 @@
                             <a:srgbClr val="E2E8F0"/>
                           </a:solidFill>
                         </a:rPr>
-                        <a:t>Wed 01 Jul 2026  09:00 AM</a:t>
+                        <a:t>Wed 05 Aug 2026  09:00 AM</a:t>
                       </a:r>
                     </a:p>
                   </a:txBody>
@@ -4469,7 +4469,7 @@
                             <a:srgbClr val="E2E8F0"/>
                           </a:solidFill>
                         </a:rPr>
-                        <a:t>Wed 01 Jul 2026  07:00 AM</a:t>
+                        <a:t>Wed 05 Aug 2026  07:00 AM</a:t>
                       </a:r>
                     </a:p>
                   </a:txBody>
@@ -4511,7 +4511,7 @@
                             <a:srgbClr val="E2E8F0"/>
                           </a:solidFill>
                         </a:rPr>
-                        <a:t>https://events.sumologic.com/fundamentalspm06302026-event-training</a:t>
+                        <a:t>https://events.sumologic.com/fundamentalspm08042026-event-training</a:t>
                       </a:r>
                     </a:p>
                   </a:txBody>
@@ -4597,7 +4597,7 @@
                             <a:srgbClr val="E2E8F0"/>
                           </a:solidFill>
                         </a:rPr>
-                        <a:t>Wed 01 Jul 2026  07:00 AM  →  10:00 AM</a:t>
+                        <a:t>Wed 05 Aug 2026  07:00 AM  →  10:00 AM</a:t>
                       </a:r>
                     </a:p>
                   </a:txBody>
@@ -4639,7 +4639,7 @@
                             <a:srgbClr val="E2E8F0"/>
                           </a:solidFill>
                         </a:rPr>
-                        <a:t>Thu 02 Jul 2026  02:00 AM</a:t>
+                        <a:t>Thu 06 Aug 2026  02:00 AM</a:t>
                       </a:r>
                     </a:p>
                   </a:txBody>
@@ -4681,7 +4681,7 @@
                             <a:srgbClr val="E2E8F0"/>
                           </a:solidFill>
                         </a:rPr>
-                        <a:t>Thu 02 Jul 2026  12:00 AM</a:t>
+                        <a:t>Thu 06 Aug 2026  12:00 AM</a:t>
                       </a:r>
                     </a:p>
                   </a:txBody>
@@ -4723,7 +4723,7 @@
                             <a:srgbClr val="E2E8F0"/>
                           </a:solidFill>
                         </a:rPr>
-                        <a:t>Wed 01 Jul 2026  10:00 PM</a:t>
+                        <a:t>Wed 05 Aug 2026  10:00 PM</a:t>
                       </a:r>
                     </a:p>
                   </a:txBody>
@@ -4765,7 +4765,7 @@
                             <a:srgbClr val="E2E8F0"/>
                           </a:solidFill>
                         </a:rPr>
-                        <a:t>https://events.sumologic.com/searchmasteryam07012026-event-training</a:t>
+                        <a:t>https://events.sumologic.com/searchmasteryam08052026-event-training</a:t>
                       </a:r>
                     </a:p>
                   </a:txBody>
@@ -4851,7 +4851,7 @@
                             <a:srgbClr val="E2E8F0"/>
                           </a:solidFill>
                         </a:rPr>
-                        <a:t>Wed 01 Jul 2026  04:00 PM  →  07:00 PM</a:t>
+                        <a:t>Wed 05 Aug 2026  04:00 PM  →  07:00 PM</a:t>
                       </a:r>
                     </a:p>
                   </a:txBody>
@@ -4893,7 +4893,7 @@
                             <a:srgbClr val="E2E8F0"/>
                           </a:solidFill>
                         </a:rPr>
-                        <a:t>Thu 02 Jul 2026  11:00 AM</a:t>
+                        <a:t>Thu 06 Aug 2026  11:00 AM</a:t>
                       </a:r>
                     </a:p>
                   </a:txBody>
@@ -4935,7 +4935,7 @@
                             <a:srgbClr val="E2E8F0"/>
                           </a:solidFill>
                         </a:rPr>
-                        <a:t>Thu 02 Jul 2026  09:00 AM</a:t>
+                        <a:t>Thu 06 Aug 2026  09:00 AM</a:t>
                       </a:r>
                     </a:p>
                   </a:txBody>
@@ -4977,7 +4977,7 @@
                             <a:srgbClr val="E2E8F0"/>
                           </a:solidFill>
                         </a:rPr>
-                        <a:t>Thu 02 Jul 2026  07:00 AM</a:t>
+                        <a:t>Thu 06 Aug 2026  07:00 AM</a:t>
                       </a:r>
                     </a:p>
                   </a:txBody>
@@ -5019,7 +5019,7 @@
                             <a:srgbClr val="E2E8F0"/>
                           </a:solidFill>
                         </a:rPr>
-                        <a:t>https://events.sumologic.com/searchmasterypm07012026-event-training</a:t>
+                        <a:t>https://events.sumologic.com/searchmasterypm08052026-event-training</a:t>
                       </a:r>
                     </a:p>
                   </a:txBody>
@@ -5063,7 +5063,7 @@
                             <a:srgbClr val="E2E8F0"/>
                           </a:solidFill>
                         </a:rPr>
-                        <a:t>Best Practice for Query Efficiency AM</a:t>
+                        <a:t>Best Practices for Query Efficiency AM</a:t>
                       </a:r>
                     </a:p>
                   </a:txBody>
@@ -5105,7 +5105,7 @@
                             <a:srgbClr val="E2E8F0"/>
                           </a:solidFill>
                         </a:rPr>
-                        <a:t>Thu 02 Jul 2026  07:00 AM  →  08:30 AM</a:t>
+                        <a:t>Thu 06 Aug 2026  07:00 AM  →  08:30 AM</a:t>
                       </a:r>
                     </a:p>
                   </a:txBody>
@@ -5147,7 +5147,7 @@
                             <a:srgbClr val="E2E8F0"/>
                           </a:solidFill>
                         </a:rPr>
-                        <a:t>Fri 03 Jul 2026  02:00 AM</a:t>
+                        <a:t>Fri 07 Aug 2026  02:00 AM</a:t>
                       </a:r>
                     </a:p>
                   </a:txBody>
@@ -5189,7 +5189,7 @@
                             <a:srgbClr val="E2E8F0"/>
                           </a:solidFill>
                         </a:rPr>
-                        <a:t>Fri 03 Jul 2026  12:00 AM</a:t>
+                        <a:t>Fri 07 Aug 2026  12:00 AM</a:t>
                       </a:r>
                     </a:p>
                   </a:txBody>
@@ -5231,7 +5231,7 @@
                             <a:srgbClr val="E2E8F0"/>
                           </a:solidFill>
                         </a:rPr>
-                        <a:t>Thu 02 Jul 2026  10:00 PM</a:t>
+                        <a:t>Thu 06 Aug 2026  10:00 PM</a:t>
                       </a:r>
                     </a:p>
                   </a:txBody>
@@ -5273,7 +5273,7 @@
                             <a:srgbClr val="E2E8F0"/>
                           </a:solidFill>
                         </a:rPr>
-                        <a:t>https://events.sumologic.com/bp4qeam07022026-event-training</a:t>
+                        <a:t>https://events.sumologic.com/bp4qeam08062026-event-training</a:t>
                       </a:r>
                     </a:p>
                   </a:txBody>
@@ -5317,7 +5317,7 @@
                             <a:srgbClr val="E2E8F0"/>
                           </a:solidFill>
                         </a:rPr>
-                        <a:t>Best Practice for Query Efficiency PM</a:t>
+                        <a:t>Best Practices for Query Efficiency PM</a:t>
                       </a:r>
                     </a:p>
                   </a:txBody>
@@ -5359,7 +5359,7 @@
                             <a:srgbClr val="E2E8F0"/>
                           </a:solidFill>
                         </a:rPr>
-                        <a:t>Thu 02 Jul 2026  04:00 PM  →  05:25 PM</a:t>
+                        <a:t>Thu 06 Aug 2026  04:00 PM  →  05:28 PM</a:t>
                       </a:r>
                     </a:p>
                   </a:txBody>
@@ -5401,7 +5401,7 @@
                             <a:srgbClr val="E2E8F0"/>
                           </a:solidFill>
                         </a:rPr>
-                        <a:t>Fri 03 Jul 2026  11:00 AM</a:t>
+                        <a:t>Fri 07 Aug 2026  11:00 AM</a:t>
                       </a:r>
                     </a:p>
                   </a:txBody>
@@ -5443,7 +5443,7 @@
                             <a:srgbClr val="E2E8F0"/>
                           </a:solidFill>
                         </a:rPr>
-                        <a:t>Fri 03 Jul 2026  09:00 AM</a:t>
+                        <a:t>Fri 07 Aug 2026  09:00 AM</a:t>
                       </a:r>
                     </a:p>
                   </a:txBody>
@@ -5485,7 +5485,7 @@
                             <a:srgbClr val="E2E8F0"/>
                           </a:solidFill>
                         </a:rPr>
-                        <a:t>Fri 03 Jul 2026  07:00 AM</a:t>
+                        <a:t>Fri 07 Aug 2026  07:00 AM</a:t>
                       </a:r>
                     </a:p>
                   </a:txBody>
@@ -5527,7 +5527,7 @@
                             <a:srgbClr val="E2E8F0"/>
                           </a:solidFill>
                         </a:rPr>
-                        <a:t>https://events.sumologic.com/bp4qepm07022026-event-training</a:t>
+                        <a:t>https://events.sumologic.com/bp4qepm08062026-event-training</a:t>
                       </a:r>
                     </a:p>
                   </a:txBody>
@@ -5613,7 +5613,7 @@
                             <a:srgbClr val="E2E8F0"/>
                           </a:solidFill>
                         </a:rPr>
-                        <a:t>Tue 07 Jul 2026  07:00 AM  →  10:00 AM</a:t>
+                        <a:t>Tue 11 Aug 2026  07:00 AM  →  10:00 AM</a:t>
                       </a:r>
                     </a:p>
                   </a:txBody>
@@ -5655,7 +5655,7 @@
                             <a:srgbClr val="E2E8F0"/>
                           </a:solidFill>
                         </a:rPr>
-                        <a:t>Wed 08 Jul 2026  02:00 AM</a:t>
+                        <a:t>Wed 12 Aug 2026  02:00 AM</a:t>
                       </a:r>
                     </a:p>
                   </a:txBody>
@@ -5697,7 +5697,7 @@
                             <a:srgbClr val="E2E8F0"/>
                           </a:solidFill>
                         </a:rPr>
-                        <a:t>Wed 08 Jul 2026  12:00 AM</a:t>
+                        <a:t>Wed 12 Aug 2026  12:00 AM</a:t>
                       </a:r>
                     </a:p>
                   </a:txBody>
@@ -5739,7 +5739,7 @@
                             <a:srgbClr val="E2E8F0"/>
                           </a:solidFill>
                         </a:rPr>
-                        <a:t>Tue 07 Jul 2026  10:00 PM</a:t>
+                        <a:t>Tue 11 Aug 2026  10:00 PM</a:t>
                       </a:r>
                     </a:p>
                   </a:txBody>
@@ -5781,7 +5781,7 @@
                             <a:srgbClr val="E2E8F0"/>
                           </a:solidFill>
                         </a:rPr>
-                        <a:t>https://events.sumologic.com/administrationam07072026-event-training</a:t>
+                        <a:t>https://events.sumologic.com/administrationam08112026-event-training</a:t>
                       </a:r>
                     </a:p>
                   </a:txBody>
@@ -5867,7 +5867,7 @@
                             <a:srgbClr val="E2E8F0"/>
                           </a:solidFill>
                         </a:rPr>
-                        <a:t>Tue 07 Jul 2026  04:00 PM  →  07:00 PM</a:t>
+                        <a:t>Tue 11 Aug 2026  04:00 PM  →  07:00 PM</a:t>
                       </a:r>
                     </a:p>
                   </a:txBody>
@@ -5909,7 +5909,7 @@
                             <a:srgbClr val="E2E8F0"/>
                           </a:solidFill>
                         </a:rPr>
-                        <a:t>Wed 08 Jul 2026  11:00 AM</a:t>
+                        <a:t>Wed 12 Aug 2026  11:00 AM</a:t>
                       </a:r>
                     </a:p>
                   </a:txBody>
@@ -5951,7 +5951,7 @@
                             <a:srgbClr val="E2E8F0"/>
                           </a:solidFill>
                         </a:rPr>
-                        <a:t>Wed 08 Jul 2026  09:00 AM</a:t>
+                        <a:t>Wed 12 Aug 2026  09:00 AM</a:t>
                       </a:r>
                     </a:p>
                   </a:txBody>
@@ -5993,7 +5993,7 @@
                             <a:srgbClr val="E2E8F0"/>
                           </a:solidFill>
                         </a:rPr>
-                        <a:t>Wed 08 Jul 2026  07:00 AM</a:t>
+                        <a:t>Wed 12 Aug 2026  07:00 AM</a:t>
                       </a:r>
                     </a:p>
                   </a:txBody>
@@ -6035,7 +6035,7 @@
                             <a:srgbClr val="E2E8F0"/>
                           </a:solidFill>
                         </a:rPr>
-                        <a:t>https://events.sumologic.com/administrationpm07072026-event-training</a:t>
+                        <a:t>https://events.sumologic.com/administrationpm08112026-event-training</a:t>
                       </a:r>
                     </a:p>
                   </a:txBody>
@@ -6235,7 +6235,7 @@
                   <a:srgbClr val="00B4D8"/>
                 </a:solidFill>
               </a:rPr>
-              <a:t>Sumo Logic — Virtual Training Schedule   ·   08 Jul – 16 Jul 2026   (2/6)</a:t>
+              <a:t>Sumo Logic — Virtual Training Schedule   ·   12 Aug 2026 – 08 Sep 2026   (2/6)</a:t>
             </a:r>
           </a:p>
         </p:txBody>
@@ -6609,7 +6609,7 @@
                             <a:srgbClr val="E2E8F0"/>
                           </a:solidFill>
                         </a:rPr>
-                        <a:t>Wed 08 Jul 2026  07:00 AM  →  10:00 AM</a:t>
+                        <a:t>Wed 12 Aug 2026  07:00 AM  →  10:00 AM</a:t>
                       </a:r>
                     </a:p>
                   </a:txBody>
@@ -6651,7 +6651,7 @@
                             <a:srgbClr val="E2E8F0"/>
                           </a:solidFill>
                         </a:rPr>
-                        <a:t>Thu 09 Jul 2026  02:00 AM</a:t>
+                        <a:t>Thu 13 Aug 2026  02:00 AM</a:t>
                       </a:r>
                     </a:p>
                   </a:txBody>
@@ -6693,7 +6693,7 @@
                             <a:srgbClr val="E2E8F0"/>
                           </a:solidFill>
                         </a:rPr>
-                        <a:t>Thu 09 Jul 2026  12:00 AM</a:t>
+                        <a:t>Thu 13 Aug 2026  12:00 AM</a:t>
                       </a:r>
                     </a:p>
                   </a:txBody>
@@ -6735,7 +6735,7 @@
                             <a:srgbClr val="E2E8F0"/>
                           </a:solidFill>
                         </a:rPr>
-                        <a:t>Wed 08 Jul 2026  10:00 PM</a:t>
+                        <a:t>Wed 12 Aug 2026  10:00 PM</a:t>
                       </a:r>
                     </a:p>
                   </a:txBody>
@@ -6777,7 +6777,7 @@
                             <a:srgbClr val="E2E8F0"/>
                           </a:solidFill>
                         </a:rPr>
-                        <a:t>https://events.sumologic.com/metricanalyticsam07082026-event-training</a:t>
+                        <a:t>https://events.sumologic.com/metricsanalyticsam08122026-event-training</a:t>
                       </a:r>
                     </a:p>
                   </a:txBody>
@@ -6863,7 +6863,7 @@
                             <a:srgbClr val="E2E8F0"/>
                           </a:solidFill>
                         </a:rPr>
-                        <a:t>Wed 08 Jul 2026  04:00 PM  →  07:00 PM</a:t>
+                        <a:t>Wed 12 Aug 2026  04:00 PM  →  07:00 PM</a:t>
                       </a:r>
                     </a:p>
                   </a:txBody>
@@ -6905,7 +6905,7 @@
                             <a:srgbClr val="E2E8F0"/>
                           </a:solidFill>
                         </a:rPr>
-                        <a:t>Thu 09 Jul 2026  11:00 AM</a:t>
+                        <a:t>Thu 13 Aug 2026  11:00 AM</a:t>
                       </a:r>
                     </a:p>
                   </a:txBody>
@@ -6947,7 +6947,7 @@
                             <a:srgbClr val="E2E8F0"/>
                           </a:solidFill>
                         </a:rPr>
-                        <a:t>Thu 09 Jul 2026  09:00 AM</a:t>
+                        <a:t>Thu 13 Aug 2026  09:00 AM</a:t>
                       </a:r>
                     </a:p>
                   </a:txBody>
@@ -6989,7 +6989,7 @@
                             <a:srgbClr val="E2E8F0"/>
                           </a:solidFill>
                         </a:rPr>
-                        <a:t>Thu 09 Jul 2026  07:00 AM</a:t>
+                        <a:t>Thu 13 Aug 2026  07:00 AM</a:t>
                       </a:r>
                     </a:p>
                   </a:txBody>
@@ -7031,7 +7031,7 @@
                             <a:srgbClr val="E2E8F0"/>
                           </a:solidFill>
                         </a:rPr>
-                        <a:t>https://events.sumologic.com/metricanalyticspm07082026-event-training</a:t>
+                        <a:t>https://events.sumologic.com/metricsanalyticspm08122026-event-training</a:t>
                       </a:r>
                     </a:p>
                   </a:txBody>
@@ -7075,7 +7075,7 @@
                             <a:srgbClr val="E2E8F0"/>
                           </a:solidFill>
                         </a:rPr>
-                        <a:t>Mobot Essentials AM</a:t>
+                        <a:t>Hands on with Mobot and Dojo AI AM</a:t>
                       </a:r>
                     </a:p>
                   </a:txBody>
@@ -7117,7 +7117,7 @@
                             <a:srgbClr val="E2E8F0"/>
                           </a:solidFill>
                         </a:rPr>
-                        <a:t>Thu 09 Jul 2026  07:00 AM  →  08:30 AM</a:t>
+                        <a:t>Thu 13 Aug 2026  07:00 AM  →  08:30 AM</a:t>
                       </a:r>
                     </a:p>
                   </a:txBody>
@@ -7159,7 +7159,7 @@
                             <a:srgbClr val="E2E8F0"/>
                           </a:solidFill>
                         </a:rPr>
-                        <a:t>Fri 10 Jul 2026  02:00 AM</a:t>
+                        <a:t>Fri 14 Aug 2026  02:00 AM</a:t>
                       </a:r>
                     </a:p>
                   </a:txBody>
@@ -7201,7 +7201,7 @@
                             <a:srgbClr val="E2E8F0"/>
                           </a:solidFill>
                         </a:rPr>
-                        <a:t>Fri 10 Jul 2026  12:00 AM</a:t>
+                        <a:t>Fri 14 Aug 2026  12:00 AM</a:t>
                       </a:r>
                     </a:p>
                   </a:txBody>
@@ -7243,7 +7243,7 @@
                             <a:srgbClr val="E2E8F0"/>
                           </a:solidFill>
                         </a:rPr>
-                        <a:t>Thu 09 Jul 2026  10:00 PM</a:t>
+                        <a:t>Thu 13 Aug 2026  10:00 PM</a:t>
                       </a:r>
                     </a:p>
                   </a:txBody>
@@ -7285,7 +7285,7 @@
                             <a:srgbClr val="E2E8F0"/>
                           </a:solidFill>
                         </a:rPr>
-                        <a:t>https://events.sumologic.com/mobotam07092026-event-training</a:t>
+                        <a:t>https://events.sumologic.com/mobotessentialsam08132026-event-training</a:t>
                       </a:r>
                     </a:p>
                   </a:txBody>
@@ -7329,7 +7329,7 @@
                             <a:srgbClr val="E2E8F0"/>
                           </a:solidFill>
                         </a:rPr>
-                        <a:t>Mobot Essentials PM</a:t>
+                        <a:t>Hands on with Mobot and Dojo AI PM</a:t>
                       </a:r>
                     </a:p>
                   </a:txBody>
@@ -7371,7 +7371,7 @@
                             <a:srgbClr val="E2E8F0"/>
                           </a:solidFill>
                         </a:rPr>
-                        <a:t>Thu 09 Jul 2026  04:00 PM  →  05:30 PM</a:t>
+                        <a:t>Thu 13 Aug 2026  04:00 PM  →  05:30 PM</a:t>
                       </a:r>
                     </a:p>
                   </a:txBody>
@@ -7413,7 +7413,7 @@
                             <a:srgbClr val="E2E8F0"/>
                           </a:solidFill>
                         </a:rPr>
-                        <a:t>Fri 10 Jul 2026  11:00 AM</a:t>
+                        <a:t>Fri 14 Aug 2026  11:00 AM</a:t>
                       </a:r>
                     </a:p>
                   </a:txBody>
@@ -7455,7 +7455,7 @@
                             <a:srgbClr val="E2E8F0"/>
                           </a:solidFill>
                         </a:rPr>
-                        <a:t>Fri 10 Jul 2026  09:00 AM</a:t>
+                        <a:t>Fri 14 Aug 2026  09:00 AM</a:t>
                       </a:r>
                     </a:p>
                   </a:txBody>
@@ -7497,7 +7497,7 @@
                             <a:srgbClr val="E2E8F0"/>
                           </a:solidFill>
                         </a:rPr>
-                        <a:t>Fri 10 Jul 2026  07:00 AM</a:t>
+                        <a:t>Fri 14 Aug 2026  07:00 AM</a:t>
                       </a:r>
                     </a:p>
                   </a:txBody>
@@ -7539,7 +7539,7 @@
                             <a:srgbClr val="E2E8F0"/>
                           </a:solidFill>
                         </a:rPr>
-                        <a:t>https://events.sumologic.com/mobotessentialspm07092026-event-training</a:t>
+                        <a:t>https://events.sumologic.com/mobotessentialspm08132026-event-training</a:t>
                       </a:r>
                     </a:p>
                   </a:txBody>
@@ -7583,7 +7583,7 @@
                             <a:srgbClr val="E2E8F0"/>
                           </a:solidFill>
                         </a:rPr>
-                        <a:t>Essential Cloud SIEM skills for SOC Analysts AM</a:t>
+                        <a:t>Essential SIEM Skills for SOC Analysts AM</a:t>
                       </a:r>
                     </a:p>
                   </a:txBody>
@@ -7625,7 +7625,7 @@
                             <a:srgbClr val="E2E8F0"/>
                           </a:solidFill>
                         </a:rPr>
-                        <a:t>Tue 14 Jul 2026  07:00 AM  →  08:30 AM</a:t>
+                        <a:t>Tue 18 Aug 2026  07:00 AM  →  08:30 AM</a:t>
                       </a:r>
                     </a:p>
                   </a:txBody>
@@ -7667,7 +7667,7 @@
                             <a:srgbClr val="E2E8F0"/>
                           </a:solidFill>
                         </a:rPr>
-                        <a:t>Wed 15 Jul 2026  02:00 AM</a:t>
+                        <a:t>Wed 19 Aug 2026  02:00 AM</a:t>
                       </a:r>
                     </a:p>
                   </a:txBody>
@@ -7709,7 +7709,7 @@
                             <a:srgbClr val="E2E8F0"/>
                           </a:solidFill>
                         </a:rPr>
-                        <a:t>Wed 15 Jul 2026  12:00 AM</a:t>
+                        <a:t>Wed 19 Aug 2026  12:00 AM</a:t>
                       </a:r>
                     </a:p>
                   </a:txBody>
@@ -7751,7 +7751,7 @@
                             <a:srgbClr val="E2E8F0"/>
                           </a:solidFill>
                         </a:rPr>
-                        <a:t>Tue 14 Jul 2026  10:00 PM</a:t>
+                        <a:t>Tue 18 Aug 2026  10:00 PM</a:t>
                       </a:r>
                     </a:p>
                   </a:txBody>
@@ -7793,7 +7793,7 @@
                             <a:srgbClr val="E2E8F0"/>
                           </a:solidFill>
                         </a:rPr>
-                        <a:t>https://events.sumologic.com/esscloudsiemam07142026-event-training</a:t>
+                        <a:t>https://events.sumologic.com/esscloudsiemam08182026-event-training</a:t>
                       </a:r>
                     </a:p>
                   </a:txBody>
@@ -7837,7 +7837,7 @@
                             <a:srgbClr val="E2E8F0"/>
                           </a:solidFill>
                         </a:rPr>
-                        <a:t>Essential Cloud SIEM skills for SOC Analysts PM</a:t>
+                        <a:t>Essential SIEM Skills for SOC Analysts PM</a:t>
                       </a:r>
                     </a:p>
                   </a:txBody>
@@ -7879,7 +7879,7 @@
                             <a:srgbClr val="E2E8F0"/>
                           </a:solidFill>
                         </a:rPr>
-                        <a:t>Tue 14 Jul 2026  04:00 PM  →  05:30 PM</a:t>
+                        <a:t>Tue 18 Aug 2026  04:00 PM  →  05:30 PM</a:t>
                       </a:r>
                     </a:p>
                   </a:txBody>
@@ -7921,7 +7921,7 @@
                             <a:srgbClr val="E2E8F0"/>
                           </a:solidFill>
                         </a:rPr>
-                        <a:t>Wed 15 Jul 2026  11:00 AM</a:t>
+                        <a:t>Wed 19 Aug 2026  11:00 AM</a:t>
                       </a:r>
                     </a:p>
                   </a:txBody>
@@ -7963,7 +7963,7 @@
                             <a:srgbClr val="E2E8F0"/>
                           </a:solidFill>
                         </a:rPr>
-                        <a:t>Wed 15 Jul 2026  09:00 AM</a:t>
+                        <a:t>Wed 19 Aug 2026  09:00 AM</a:t>
                       </a:r>
                     </a:p>
                   </a:txBody>
@@ -8005,7 +8005,7 @@
                             <a:srgbClr val="E2E8F0"/>
                           </a:solidFill>
                         </a:rPr>
-                        <a:t>Wed 15 Jul 2026  07:00 AM</a:t>
+                        <a:t>Wed 19 Aug 2026  07:00 AM</a:t>
                       </a:r>
                     </a:p>
                   </a:txBody>
@@ -8047,7 +8047,7 @@
                             <a:srgbClr val="E2E8F0"/>
                           </a:solidFill>
                         </a:rPr>
-                        <a:t>https://events.sumologic.com/esscloudsiem07142026-event-training</a:t>
+                        <a:t>https://events.sumologic.com/esscloudsiempm08182026-event-training</a:t>
                       </a:r>
                     </a:p>
                   </a:txBody>
@@ -8133,7 +8133,7 @@
                             <a:srgbClr val="E2E8F0"/>
                           </a:solidFill>
                         </a:rPr>
-                        <a:t>Wed 15 Jul 2026  07:00 AM  →  10:00 AM</a:t>
+                        <a:t>Wed 19 Aug 2026  07:00 AM  →  10:00 AM</a:t>
                       </a:r>
                     </a:p>
                   </a:txBody>
@@ -8175,7 +8175,7 @@
                             <a:srgbClr val="E2E8F0"/>
                           </a:solidFill>
                         </a:rPr>
-                        <a:t>Thu 16 Jul 2026  02:00 AM</a:t>
+                        <a:t>Thu 20 Aug 2026  02:00 AM</a:t>
                       </a:r>
                     </a:p>
                   </a:txBody>
@@ -8217,7 +8217,7 @@
                             <a:srgbClr val="E2E8F0"/>
                           </a:solidFill>
                         </a:rPr>
-                        <a:t>Thu 16 Jul 2026  12:00 AM</a:t>
+                        <a:t>Thu 20 Aug 2026  12:00 AM</a:t>
                       </a:r>
                     </a:p>
                   </a:txBody>
@@ -8259,7 +8259,7 @@
                             <a:srgbClr val="E2E8F0"/>
                           </a:solidFill>
                         </a:rPr>
-                        <a:t>Wed 15 Jul 2026  10:00 PM</a:t>
+                        <a:t>Wed 19 Aug 2026  10:00 PM</a:t>
                       </a:r>
                     </a:p>
                   </a:txBody>
@@ -8301,7 +8301,7 @@
                             <a:srgbClr val="E2E8F0"/>
                           </a:solidFill>
                         </a:rPr>
-                        <a:t>https://events.sumologic.com/cloudsiemam07152026-event-training</a:t>
+                        <a:t>https://events.sumologic.com/cloudsiemam08192026-event-training</a:t>
                       </a:r>
                     </a:p>
                   </a:txBody>
@@ -8387,7 +8387,7 @@
                             <a:srgbClr val="E2E8F0"/>
                           </a:solidFill>
                         </a:rPr>
-                        <a:t>Wed 15 Jul 2026  04:00 PM  →  07:00 PM</a:t>
+                        <a:t>Wed 19 Aug 2026  04:00 PM  →  07:00 PM</a:t>
                       </a:r>
                     </a:p>
                   </a:txBody>
@@ -8429,7 +8429,7 @@
                             <a:srgbClr val="E2E8F0"/>
                           </a:solidFill>
                         </a:rPr>
-                        <a:t>Thu 16 Jul 2026  11:00 AM</a:t>
+                        <a:t>Thu 20 Aug 2026  11:00 AM</a:t>
                       </a:r>
                     </a:p>
                   </a:txBody>
@@ -8471,7 +8471,7 @@
                             <a:srgbClr val="E2E8F0"/>
                           </a:solidFill>
                         </a:rPr>
-                        <a:t>Thu 16 Jul 2026  09:00 AM</a:t>
+                        <a:t>Thu 20 Aug 2026  09:00 AM</a:t>
                       </a:r>
                     </a:p>
                   </a:txBody>
@@ -8513,7 +8513,7 @@
                             <a:srgbClr val="E2E8F0"/>
                           </a:solidFill>
                         </a:rPr>
-                        <a:t>Thu 16 Jul 2026  07:00 AM</a:t>
+                        <a:t>Thu 20 Aug 2026  07:00 AM</a:t>
                       </a:r>
                     </a:p>
                   </a:txBody>
@@ -8555,7 +8555,7 @@
                             <a:srgbClr val="E2E8F0"/>
                           </a:solidFill>
                         </a:rPr>
-                        <a:t>https://events.sumologic.com/cloudsiempm07152026-event-training</a:t>
+                        <a:t>https://events.sumologic.com/cloudsiempm08192026-event-training</a:t>
                       </a:r>
                     </a:p>
                   </a:txBody>
@@ -8599,7 +8599,7 @@
                             <a:srgbClr val="E2E8F0"/>
                           </a:solidFill>
                         </a:rPr>
-                        <a:t>Automation AM</a:t>
+                        <a:t>Welcome Webinar AM</a:t>
                       </a:r>
                     </a:p>
                   </a:txBody>
@@ -8641,7 +8641,7 @@
                             <a:srgbClr val="E2E8F0"/>
                           </a:solidFill>
                         </a:rPr>
-                        <a:t>Thu 16 Jul 2026  07:00 AM  →  08:30 AM</a:t>
+                        <a:t>Tue 08 Sep 2026  05:00 AM  →  06:00 AM</a:t>
                       </a:r>
                     </a:p>
                   </a:txBody>
@@ -8683,7 +8683,7 @@
                             <a:srgbClr val="E2E8F0"/>
                           </a:solidFill>
                         </a:rPr>
-                        <a:t>Fri 17 Jul 2026  02:00 AM</a:t>
+                        <a:t>Wed 09 Sep 2026  12:00 AM</a:t>
                       </a:r>
                     </a:p>
                   </a:txBody>
@@ -8725,7 +8725,7 @@
                             <a:srgbClr val="E2E8F0"/>
                           </a:solidFill>
                         </a:rPr>
-                        <a:t>Fri 17 Jul 2026  12:00 AM</a:t>
+                        <a:t>Tue 08 Sep 2026  10:00 PM</a:t>
                       </a:r>
                     </a:p>
                   </a:txBody>
@@ -8767,7 +8767,7 @@
                             <a:srgbClr val="E2E8F0"/>
                           </a:solidFill>
                         </a:rPr>
-                        <a:t>Thu 16 Jul 2026  10:00 PM</a:t>
+                        <a:t>Tue 08 Sep 2026  08:00 PM</a:t>
                       </a:r>
                     </a:p>
                   </a:txBody>
@@ -8809,7 +8809,7 @@
                             <a:srgbClr val="E2E8F0"/>
                           </a:solidFill>
                         </a:rPr>
-                        <a:t>https://events.sumologic.com/automationam07162026-event-training</a:t>
+                        <a:t>https://events.sumologic.com/welcomewebinaram09082026-event-training</a:t>
                       </a:r>
                     </a:p>
                   </a:txBody>
@@ -8853,7 +8853,7 @@
                             <a:srgbClr val="E2E8F0"/>
                           </a:solidFill>
                         </a:rPr>
-                        <a:t>Automation PM</a:t>
+                        <a:t>Fundamentals AM</a:t>
                       </a:r>
                     </a:p>
                   </a:txBody>
@@ -8895,7 +8895,7 @@
                             <a:srgbClr val="E2E8F0"/>
                           </a:solidFill>
                         </a:rPr>
-                        <a:t>Thu 16 Jul 2026  04:00 PM  →  05:30 PM</a:t>
+                        <a:t>Tue 08 Sep 2026  07:00 AM  →  10:00 AM</a:t>
                       </a:r>
                     </a:p>
                   </a:txBody>
@@ -8937,7 +8937,7 @@
                             <a:srgbClr val="E2E8F0"/>
                           </a:solidFill>
                         </a:rPr>
-                        <a:t>Fri 17 Jul 2026  11:00 AM</a:t>
+                        <a:t>Wed 09 Sep 2026  02:00 AM</a:t>
                       </a:r>
                     </a:p>
                   </a:txBody>
@@ -8979,7 +8979,7 @@
                             <a:srgbClr val="E2E8F0"/>
                           </a:solidFill>
                         </a:rPr>
-                        <a:t>Fri 17 Jul 2026  09:00 AM</a:t>
+                        <a:t>Wed 09 Sep 2026  12:00 AM</a:t>
                       </a:r>
                     </a:p>
                   </a:txBody>
@@ -9021,7 +9021,7 @@
                             <a:srgbClr val="E2E8F0"/>
                           </a:solidFill>
                         </a:rPr>
-                        <a:t>Fri 17 Jul 2026  07:00 AM</a:t>
+                        <a:t>Tue 08 Sep 2026  10:00 PM</a:t>
                       </a:r>
                     </a:p>
                   </a:txBody>
@@ -9063,7 +9063,7 @@
                             <a:srgbClr val="E2E8F0"/>
                           </a:solidFill>
                         </a:rPr>
-                        <a:t>https://events.sumologic.com/automationpm07162026-event-training</a:t>
+                        <a:t>https://events.sumologic.com/fundamentalsam09082026-event-training</a:t>
                       </a:r>
                     </a:p>
                   </a:txBody>
@@ -9263,7 +9263,7 @@
                   <a:srgbClr val="00B4D8"/>
                 </a:solidFill>
               </a:rPr>
-              <a:t>Sumo Logic — Virtual Training Schedule   ·   04 Aug – 11 Aug 2026   (3/6)</a:t>
+              <a:t>Sumo Logic — Virtual Training Schedule   ·   08 Sep – 16 Sep 2026   (3/6)</a:t>
             </a:r>
           </a:p>
         </p:txBody>
@@ -9595,7 +9595,7 @@
                             <a:srgbClr val="E2E8F0"/>
                           </a:solidFill>
                         </a:rPr>
-                        <a:t>Welcome Webinar AM</a:t>
+                        <a:t>Welcome Webinar PM</a:t>
                       </a:r>
                     </a:p>
                   </a:txBody>
@@ -9637,7 +9637,7 @@
                             <a:srgbClr val="E2E8F0"/>
                           </a:solidFill>
                         </a:rPr>
-                        <a:t>Tue 04 Aug 2026  05:00 AM  →  06:00 AM</a:t>
+                        <a:t>Tue 08 Sep 2026  02:00 PM  →  03:00 PM</a:t>
                       </a:r>
                     </a:p>
                   </a:txBody>
@@ -9679,7 +9679,7 @@
                             <a:srgbClr val="E2E8F0"/>
                           </a:solidFill>
                         </a:rPr>
-                        <a:t>Wed 05 Aug 2026  12:00 AM</a:t>
+                        <a:t>Wed 09 Sep 2026  09:00 AM</a:t>
                       </a:r>
                     </a:p>
                   </a:txBody>
@@ -9721,7 +9721,7 @@
                             <a:srgbClr val="E2E8F0"/>
                           </a:solidFill>
                         </a:rPr>
-                        <a:t>Tue 04 Aug 2026  10:00 PM</a:t>
+                        <a:t>Wed 09 Sep 2026  07:00 AM</a:t>
                       </a:r>
                     </a:p>
                   </a:txBody>
@@ -9763,7 +9763,7 @@
                             <a:srgbClr val="E2E8F0"/>
                           </a:solidFill>
                         </a:rPr>
-                        <a:t>Tue 04 Aug 2026  08:00 PM</a:t>
+                        <a:t>Wed 09 Sep 2026  05:00 AM</a:t>
                       </a:r>
                     </a:p>
                   </a:txBody>
@@ -9805,7 +9805,7 @@
                             <a:srgbClr val="E2E8F0"/>
                           </a:solidFill>
                         </a:rPr>
-                        <a:t>https://events.sumologic.com/welcomewebinaram08042026-event-training</a:t>
+                        <a:t>https://events.sumologic.com/welcomewebinarpm09082026-event-training</a:t>
                       </a:r>
                     </a:p>
                   </a:txBody>
@@ -9849,7 +9849,7 @@
                             <a:srgbClr val="E2E8F0"/>
                           </a:solidFill>
                         </a:rPr>
-                        <a:t>Fundamentals AM</a:t>
+                        <a:t>Fundamentals PM</a:t>
                       </a:r>
                     </a:p>
                   </a:txBody>
@@ -9891,7 +9891,7 @@
                             <a:srgbClr val="E2E8F0"/>
                           </a:solidFill>
                         </a:rPr>
-                        <a:t>Tue 04 Aug 2026  07:00 AM  →  10:00 AM</a:t>
+                        <a:t>Tue 08 Sep 2026  04:00 PM  →  07:00 PM</a:t>
                       </a:r>
                     </a:p>
                   </a:txBody>
@@ -9933,7 +9933,7 @@
                             <a:srgbClr val="E2E8F0"/>
                           </a:solidFill>
                         </a:rPr>
-                        <a:t>Wed 05 Aug 2026  02:00 AM</a:t>
+                        <a:t>Wed 09 Sep 2026  11:00 AM</a:t>
                       </a:r>
                     </a:p>
                   </a:txBody>
@@ -9975,7 +9975,7 @@
                             <a:srgbClr val="E2E8F0"/>
                           </a:solidFill>
                         </a:rPr>
-                        <a:t>Wed 05 Aug 2026  12:00 AM</a:t>
+                        <a:t>Wed 09 Sep 2026  09:00 AM</a:t>
                       </a:r>
                     </a:p>
                   </a:txBody>
@@ -10017,7 +10017,7 @@
                             <a:srgbClr val="E2E8F0"/>
                           </a:solidFill>
                         </a:rPr>
-                        <a:t>Tue 04 Aug 2026  10:00 PM</a:t>
+                        <a:t>Wed 09 Sep 2026  07:00 AM</a:t>
                       </a:r>
                     </a:p>
                   </a:txBody>
@@ -10059,7 +10059,7 @@
                             <a:srgbClr val="E2E8F0"/>
                           </a:solidFill>
                         </a:rPr>
-                        <a:t>https://events.sumologic.com/fundamentalsam08042026-event-training</a:t>
+                        <a:t>https://events.sumologic.com/fundamentalspm09082026-event-training</a:t>
                       </a:r>
                     </a:p>
                   </a:txBody>
@@ -10103,7 +10103,7 @@
                             <a:srgbClr val="E2E8F0"/>
                           </a:solidFill>
                         </a:rPr>
-                        <a:t>Welcome Webinars PM</a:t>
+                        <a:t>Search Mastery AM</a:t>
                       </a:r>
                     </a:p>
                   </a:txBody>
@@ -10145,7 +10145,7 @@
                             <a:srgbClr val="E2E8F0"/>
                           </a:solidFill>
                         </a:rPr>
-                        <a:t>Tue 04 Aug 2026  02:00 PM  →  03:00 PM</a:t>
+                        <a:t>Wed 09 Sep 2026  07:00 AM  →  10:00 AM</a:t>
                       </a:r>
                     </a:p>
                   </a:txBody>
@@ -10187,7 +10187,7 @@
                             <a:srgbClr val="E2E8F0"/>
                           </a:solidFill>
                         </a:rPr>
-                        <a:t>Wed 05 Aug 2026  09:00 AM</a:t>
+                        <a:t>Thu 10 Sep 2026  02:00 AM</a:t>
                       </a:r>
                     </a:p>
                   </a:txBody>
@@ -10229,7 +10229,7 @@
                             <a:srgbClr val="E2E8F0"/>
                           </a:solidFill>
                         </a:rPr>
-                        <a:t>Wed 05 Aug 2026  07:00 AM</a:t>
+                        <a:t>Thu 10 Sep 2026  12:00 AM</a:t>
                       </a:r>
                     </a:p>
                   </a:txBody>
@@ -10271,7 +10271,7 @@
                             <a:srgbClr val="E2E8F0"/>
                           </a:solidFill>
                         </a:rPr>
-                        <a:t>Wed 05 Aug 2026  05:00 AM</a:t>
+                        <a:t>Wed 09 Sep 2026  10:00 PM</a:t>
                       </a:r>
                     </a:p>
                   </a:txBody>
@@ -10313,7 +10313,7 @@
                             <a:srgbClr val="E2E8F0"/>
                           </a:solidFill>
                         </a:rPr>
-                        <a:t>https://events.sumologic.com/welcomewebinarpm08042026-event-training</a:t>
+                        <a:t>https://events.sumologic.com/searchmasteryam09092026-event-training</a:t>
                       </a:r>
                     </a:p>
                   </a:txBody>
@@ -10357,7 +10357,7 @@
                             <a:srgbClr val="E2E8F0"/>
                           </a:solidFill>
                         </a:rPr>
-                        <a:t>Fundamentals PM</a:t>
+                        <a:t>Search Mastery PM</a:t>
                       </a:r>
                     </a:p>
                   </a:txBody>
@@ -10399,7 +10399,7 @@
                             <a:srgbClr val="E2E8F0"/>
                           </a:solidFill>
                         </a:rPr>
-                        <a:t>Tue 04 Aug 2026  04:00 PM  →  07:00 PM</a:t>
+                        <a:t>Wed 09 Sep 2026  04:00 PM  →  07:00 PM</a:t>
                       </a:r>
                     </a:p>
                   </a:txBody>
@@ -10441,7 +10441,7 @@
                             <a:srgbClr val="E2E8F0"/>
                           </a:solidFill>
                         </a:rPr>
-                        <a:t>Wed 05 Aug 2026  11:00 AM</a:t>
+                        <a:t>Thu 10 Sep 2026  11:00 AM</a:t>
                       </a:r>
                     </a:p>
                   </a:txBody>
@@ -10483,7 +10483,7 @@
                             <a:srgbClr val="E2E8F0"/>
                           </a:solidFill>
                         </a:rPr>
-                        <a:t>Wed 05 Aug 2026  09:00 AM</a:t>
+                        <a:t>Thu 10 Sep 2026  09:00 AM</a:t>
                       </a:r>
                     </a:p>
                   </a:txBody>
@@ -10525,7 +10525,7 @@
                             <a:srgbClr val="E2E8F0"/>
                           </a:solidFill>
                         </a:rPr>
-                        <a:t>Wed 05 Aug 2026  07:00 AM</a:t>
+                        <a:t>Thu 10 Sep 2026  07:00 AM</a:t>
                       </a:r>
                     </a:p>
                   </a:txBody>
@@ -10567,7 +10567,7 @@
                             <a:srgbClr val="E2E8F0"/>
                           </a:solidFill>
                         </a:rPr>
-                        <a:t>https://events.sumologic.com/fundamentalspm08042026-event-training</a:t>
+                        <a:t>https://events.sumologic.com/searchmasterypm09092026-event-training</a:t>
                       </a:r>
                     </a:p>
                   </a:txBody>
@@ -10611,7 +10611,7 @@
                             <a:srgbClr val="E2E8F0"/>
                           </a:solidFill>
                         </a:rPr>
-                        <a:t>Search Mastery AM</a:t>
+                        <a:t>Best Practices for Query Efficiency AM</a:t>
                       </a:r>
                     </a:p>
                   </a:txBody>
@@ -10653,7 +10653,7 @@
                             <a:srgbClr val="E2E8F0"/>
                           </a:solidFill>
                         </a:rPr>
-                        <a:t>Wed 05 Aug 2026  07:00 AM  →  10:00 AM</a:t>
+                        <a:t>Thu 10 Sep 2026  07:00 AM  →  08:30 AM</a:t>
                       </a:r>
                     </a:p>
                   </a:txBody>
@@ -10695,7 +10695,7 @@
                             <a:srgbClr val="E2E8F0"/>
                           </a:solidFill>
                         </a:rPr>
-                        <a:t>Thu 06 Aug 2026  02:00 AM</a:t>
+                        <a:t>Fri 11 Sep 2026  02:00 AM</a:t>
                       </a:r>
                     </a:p>
                   </a:txBody>
@@ -10737,7 +10737,7 @@
                             <a:srgbClr val="E2E8F0"/>
                           </a:solidFill>
                         </a:rPr>
-                        <a:t>Thu 06 Aug 2026  12:00 AM</a:t>
+                        <a:t>Fri 11 Sep 2026  12:00 AM</a:t>
                       </a:r>
                     </a:p>
                   </a:txBody>
@@ -10779,7 +10779,7 @@
                             <a:srgbClr val="E2E8F0"/>
                           </a:solidFill>
                         </a:rPr>
-                        <a:t>Wed 05 Aug 2026  10:00 PM</a:t>
+                        <a:t>Thu 10 Sep 2026  10:00 PM</a:t>
                       </a:r>
                     </a:p>
                   </a:txBody>
@@ -10821,7 +10821,7 @@
                             <a:srgbClr val="E2E8F0"/>
                           </a:solidFill>
                         </a:rPr>
-                        <a:t>https://events.sumologic.com/searchmasteryam08052026-event-training</a:t>
+                        <a:t>https://events.sumologic.com/bp4qeam09102026-event-training</a:t>
                       </a:r>
                     </a:p>
                   </a:txBody>
@@ -10865,7 +10865,7 @@
                             <a:srgbClr val="E2E8F0"/>
                           </a:solidFill>
                         </a:rPr>
-                        <a:t>Search Mastery PM</a:t>
+                        <a:t>Best Practices for Query Efficiency PM</a:t>
                       </a:r>
                     </a:p>
                   </a:txBody>
@@ -10907,7 +10907,7 @@
                             <a:srgbClr val="E2E8F0"/>
                           </a:solidFill>
                         </a:rPr>
-                        <a:t>Wed 05 Aug 2026  04:00 PM  →  07:00 PM</a:t>
+                        <a:t>Thu 10 Sep 2026  04:00 PM  →  05:30 PM</a:t>
                       </a:r>
                     </a:p>
                   </a:txBody>
@@ -10949,7 +10949,7 @@
                             <a:srgbClr val="E2E8F0"/>
                           </a:solidFill>
                         </a:rPr>
-                        <a:t>Thu 06 Aug 2026  11:00 AM</a:t>
+                        <a:t>Fri 11 Sep 2026  11:00 AM</a:t>
                       </a:r>
                     </a:p>
                   </a:txBody>
@@ -10991,7 +10991,7 @@
                             <a:srgbClr val="E2E8F0"/>
                           </a:solidFill>
                         </a:rPr>
-                        <a:t>Thu 06 Aug 2026  09:00 AM</a:t>
+                        <a:t>Fri 11 Sep 2026  09:00 AM</a:t>
                       </a:r>
                     </a:p>
                   </a:txBody>
@@ -11033,7 +11033,7 @@
                             <a:srgbClr val="E2E8F0"/>
                           </a:solidFill>
                         </a:rPr>
-                        <a:t>Thu 06 Aug 2026  07:00 AM</a:t>
+                        <a:t>Fri 11 Sep 2026  07:00 AM</a:t>
                       </a:r>
                     </a:p>
                   </a:txBody>
@@ -11075,7 +11075,7 @@
                             <a:srgbClr val="E2E8F0"/>
                           </a:solidFill>
                         </a:rPr>
-                        <a:t>https://events.sumologic.com/searchmasterypm08052026-event-training</a:t>
+                        <a:t>https://events.sumologic.com/bp4qepm09102026-event-training</a:t>
                       </a:r>
                     </a:p>
                   </a:txBody>
@@ -11119,7 +11119,7 @@
                             <a:srgbClr val="E2E8F0"/>
                           </a:solidFill>
                         </a:rPr>
-                        <a:t>Best Practices for Query Efficiency AM</a:t>
+                        <a:t>Administration AM</a:t>
                       </a:r>
                     </a:p>
                   </a:txBody>
@@ -11161,7 +11161,7 @@
                             <a:srgbClr val="E2E8F0"/>
                           </a:solidFill>
                         </a:rPr>
-                        <a:t>Thu 06 Aug 2026  07:00 AM  →  08:30 AM</a:t>
+                        <a:t>Tue 15 Sep 2026  07:00 AM  →  10:00 AM</a:t>
                       </a:r>
                     </a:p>
                   </a:txBody>
@@ -11203,7 +11203,7 @@
                             <a:srgbClr val="E2E8F0"/>
                           </a:solidFill>
                         </a:rPr>
-                        <a:t>Fri 07 Aug 2026  02:00 AM</a:t>
+                        <a:t>Wed 16 Sep 2026  02:00 AM</a:t>
                       </a:r>
                     </a:p>
                   </a:txBody>
@@ -11245,7 +11245,7 @@
                             <a:srgbClr val="E2E8F0"/>
                           </a:solidFill>
                         </a:rPr>
-                        <a:t>Fri 07 Aug 2026  12:00 AM</a:t>
+                        <a:t>Wed 16 Sep 2026  12:00 AM</a:t>
                       </a:r>
                     </a:p>
                   </a:txBody>
@@ -11287,7 +11287,7 @@
                             <a:srgbClr val="E2E8F0"/>
                           </a:solidFill>
                         </a:rPr>
-                        <a:t>Thu 06 Aug 2026  10:00 PM</a:t>
+                        <a:t>Tue 15 Sep 2026  10:00 PM</a:t>
                       </a:r>
                     </a:p>
                   </a:txBody>
@@ -11329,7 +11329,7 @@
                             <a:srgbClr val="E2E8F0"/>
                           </a:solidFill>
                         </a:rPr>
-                        <a:t>https://events.sumologic.com/bp4qeam08062026-event-training</a:t>
+                        <a:t>https://events.sumologic.com/administrationam09152026-event-training</a:t>
                       </a:r>
                     </a:p>
                   </a:txBody>
@@ -11373,7 +11373,7 @@
                             <a:srgbClr val="E2E8F0"/>
                           </a:solidFill>
                         </a:rPr>
-                        <a:t>Best Practices for Query Efficiency PM</a:t>
+                        <a:t>Administration PM</a:t>
                       </a:r>
                     </a:p>
                   </a:txBody>
@@ -11415,7 +11415,7 @@
                             <a:srgbClr val="E2E8F0"/>
                           </a:solidFill>
                         </a:rPr>
-                        <a:t>Thu 06 Aug 2026  04:00 PM  →  05:28 PM</a:t>
+                        <a:t>Tue 15 Sep 2026  04:00 PM  →  07:00 PM</a:t>
                       </a:r>
                     </a:p>
                   </a:txBody>
@@ -11457,7 +11457,7 @@
                             <a:srgbClr val="E2E8F0"/>
                           </a:solidFill>
                         </a:rPr>
-                        <a:t>Fri 07 Aug 2026  11:00 AM</a:t>
+                        <a:t>Wed 16 Sep 2026  11:00 AM</a:t>
                       </a:r>
                     </a:p>
                   </a:txBody>
@@ -11499,7 +11499,7 @@
                             <a:srgbClr val="E2E8F0"/>
                           </a:solidFill>
                         </a:rPr>
-                        <a:t>Fri 07 Aug 2026  09:00 AM</a:t>
+                        <a:t>Wed 16 Sep 2026  09:00 AM</a:t>
                       </a:r>
                     </a:p>
                   </a:txBody>
@@ -11541,7 +11541,7 @@
                             <a:srgbClr val="E2E8F0"/>
                           </a:solidFill>
                         </a:rPr>
-                        <a:t>Fri 07 Aug 2026  07:00 AM</a:t>
+                        <a:t>Wed 16 Sep 2026  07:00 AM</a:t>
                       </a:r>
                     </a:p>
                   </a:txBody>
@@ -11583,7 +11583,7 @@
                             <a:srgbClr val="E2E8F0"/>
                           </a:solidFill>
                         </a:rPr>
-                        <a:t>https://events.sumologic.com/bp4qepm08062026-event-training</a:t>
+                        <a:t>https://events.sumologic.com/administrationpm09152026-event-training</a:t>
                       </a:r>
                     </a:p>
                   </a:txBody>
@@ -11627,7 +11627,7 @@
                             <a:srgbClr val="E2E8F0"/>
                           </a:solidFill>
                         </a:rPr>
-                        <a:t>Administration AM</a:t>
+                        <a:t>Logs for Security AM</a:t>
                       </a:r>
                     </a:p>
                   </a:txBody>
@@ -11669,7 +11669,7 @@
                             <a:srgbClr val="E2E8F0"/>
                           </a:solidFill>
                         </a:rPr>
-                        <a:t>Tue 11 Aug 2026  07:00 AM  →  10:00 AM</a:t>
+                        <a:t>Wed 16 Sep 2026  07:00 AM  →  10:00 AM</a:t>
                       </a:r>
                     </a:p>
                   </a:txBody>
@@ -11711,7 +11711,7 @@
                             <a:srgbClr val="E2E8F0"/>
                           </a:solidFill>
                         </a:rPr>
-                        <a:t>Wed 12 Aug 2026  02:00 AM</a:t>
+                        <a:t>Thu 17 Sep 2026  02:00 AM</a:t>
                       </a:r>
                     </a:p>
                   </a:txBody>
@@ -11753,7 +11753,7 @@
                             <a:srgbClr val="E2E8F0"/>
                           </a:solidFill>
                         </a:rPr>
-                        <a:t>Wed 12 Aug 2026  12:00 AM</a:t>
+                        <a:t>Thu 17 Sep 2026  12:00 AM</a:t>
                       </a:r>
                     </a:p>
                   </a:txBody>
@@ -11795,7 +11795,7 @@
                             <a:srgbClr val="E2E8F0"/>
                           </a:solidFill>
                         </a:rPr>
-                        <a:t>Tue 11 Aug 2026  10:00 PM</a:t>
+                        <a:t>Wed 16 Sep 2026  10:00 PM</a:t>
                       </a:r>
                     </a:p>
                   </a:txBody>
@@ -11837,7 +11837,7 @@
                             <a:srgbClr val="E2E8F0"/>
                           </a:solidFill>
                         </a:rPr>
-                        <a:t>https://events.sumologic.com/administrationam08112026-event-training</a:t>
+                        <a:t>https://events.sumologic.com/logsforsecurityam09162026-event-training</a:t>
                       </a:r>
                     </a:p>
                   </a:txBody>
@@ -11881,7 +11881,7 @@
                             <a:srgbClr val="E2E8F0"/>
                           </a:solidFill>
                         </a:rPr>
-                        <a:t>Administration PM</a:t>
+                        <a:t>Logs for Security PM</a:t>
                       </a:r>
                     </a:p>
                   </a:txBody>
@@ -11923,7 +11923,7 @@
                             <a:srgbClr val="E2E8F0"/>
                           </a:solidFill>
                         </a:rPr>
-                        <a:t>Tue 11 Aug 2026  04:00 PM  →  07:00 PM</a:t>
+                        <a:t>Wed 16 Sep 2026  04:00 PM  →  07:00 PM</a:t>
                       </a:r>
                     </a:p>
                   </a:txBody>
@@ -11965,7 +11965,7 @@
                             <a:srgbClr val="E2E8F0"/>
                           </a:solidFill>
                         </a:rPr>
-                        <a:t>Wed 12 Aug 2026  11:00 AM</a:t>
+                        <a:t>Thu 17 Sep 2026  11:00 AM</a:t>
                       </a:r>
                     </a:p>
                   </a:txBody>
@@ -12007,7 +12007,7 @@
                             <a:srgbClr val="E2E8F0"/>
                           </a:solidFill>
                         </a:rPr>
-                        <a:t>Wed 12 Aug 2026  09:00 AM</a:t>
+                        <a:t>Thu 17 Sep 2026  09:00 AM</a:t>
                       </a:r>
                     </a:p>
                   </a:txBody>
@@ -12049,7 +12049,7 @@
                             <a:srgbClr val="E2E8F0"/>
                           </a:solidFill>
                         </a:rPr>
-                        <a:t>Wed 12 Aug 2026  07:00 AM</a:t>
+                        <a:t>Thu 17 Sep 2026  07:00 AM</a:t>
                       </a:r>
                     </a:p>
                   </a:txBody>
@@ -12091,7 +12091,7 @@
                             <a:srgbClr val="E2E8F0"/>
                           </a:solidFill>
                         </a:rPr>
-                        <a:t>https://events.sumologic.com/administrationpm08112026-event-training</a:t>
+                        <a:t>https://events.sumologic.com/logsforsecuritypm09162026-event-training</a:t>
                       </a:r>
                     </a:p>
                   </a:txBody>
@@ -12291,7 +12291,7 @@
                   <a:srgbClr val="00B4D8"/>
                 </a:solidFill>
               </a:rPr>
-              <a:t>Sumo Logic — Virtual Training Schedule   ·   12 Aug 2026 – 08 Sep 2026   (4/6)</a:t>
+              <a:t>Sumo Logic — Virtual Training Schedule   ·   17 Sep 2026 – 06 Oct 2026   (4/6)</a:t>
             </a:r>
           </a:p>
         </p:txBody>
@@ -12623,7 +12623,7 @@
                             <a:srgbClr val="E2E8F0"/>
                           </a:solidFill>
                         </a:rPr>
-                        <a:t>Metrics Analytics AM</a:t>
+                        <a:t>Hands on with Mobot and Dojo AI AM</a:t>
                       </a:r>
                     </a:p>
                   </a:txBody>
@@ -12665,7 +12665,7 @@
                             <a:srgbClr val="E2E8F0"/>
                           </a:solidFill>
                         </a:rPr>
-                        <a:t>Wed 12 Aug 2026  07:00 AM  →  10:00 AM</a:t>
+                        <a:t>Thu 17 Sep 2026  07:00 AM  →  08:30 AM</a:t>
                       </a:r>
                     </a:p>
                   </a:txBody>
@@ -12707,7 +12707,7 @@
                             <a:srgbClr val="E2E8F0"/>
                           </a:solidFill>
                         </a:rPr>
-                        <a:t>Thu 13 Aug 2026  02:00 AM</a:t>
+                        <a:t>Fri 18 Sep 2026  02:00 AM</a:t>
                       </a:r>
                     </a:p>
                   </a:txBody>
@@ -12749,7 +12749,7 @@
                             <a:srgbClr val="E2E8F0"/>
                           </a:solidFill>
                         </a:rPr>
-                        <a:t>Thu 13 Aug 2026  12:00 AM</a:t>
+                        <a:t>Fri 18 Sep 2026  12:00 AM</a:t>
                       </a:r>
                     </a:p>
                   </a:txBody>
@@ -12791,7 +12791,7 @@
                             <a:srgbClr val="E2E8F0"/>
                           </a:solidFill>
                         </a:rPr>
-                        <a:t>Wed 12 Aug 2026  10:00 PM</a:t>
+                        <a:t>Thu 17 Sep 2026  10:00 PM</a:t>
                       </a:r>
                     </a:p>
                   </a:txBody>
@@ -12833,7 +12833,7 @@
                             <a:srgbClr val="E2E8F0"/>
                           </a:solidFill>
                         </a:rPr>
-                        <a:t>https://events.sumologic.com/metricsanalyticsam08122026-event-training</a:t>
+                        <a:t>https://events.sumologic.com/mobotessentialsam09172026-event-training</a:t>
                       </a:r>
                     </a:p>
                   </a:txBody>
@@ -12877,7 +12877,7 @@
                             <a:srgbClr val="E2E8F0"/>
                           </a:solidFill>
                         </a:rPr>
-                        <a:t>Metrics Analytics PM</a:t>
+                        <a:t>Hands on with Mobot and Dojo AI PM</a:t>
                       </a:r>
                     </a:p>
                   </a:txBody>
@@ -12919,7 +12919,7 @@
                             <a:srgbClr val="E2E8F0"/>
                           </a:solidFill>
                         </a:rPr>
-                        <a:t>Wed 12 Aug 2026  04:00 PM  →  07:00 PM</a:t>
+                        <a:t>Thu 17 Sep 2026  01:00 PM  →  05:25 PM</a:t>
                       </a:r>
                     </a:p>
                   </a:txBody>
@@ -12961,7 +12961,7 @@
                             <a:srgbClr val="E2E8F0"/>
                           </a:solidFill>
                         </a:rPr>
-                        <a:t>Thu 13 Aug 2026  11:00 AM</a:t>
+                        <a:t>Fri 18 Sep 2026  08:00 AM</a:t>
                       </a:r>
                     </a:p>
                   </a:txBody>
@@ -13003,7 +13003,7 @@
                             <a:srgbClr val="E2E8F0"/>
                           </a:solidFill>
                         </a:rPr>
-                        <a:t>Thu 13 Aug 2026  09:00 AM</a:t>
+                        <a:t>Fri 18 Sep 2026  06:00 AM</a:t>
                       </a:r>
                     </a:p>
                   </a:txBody>
@@ -13045,7 +13045,7 @@
                             <a:srgbClr val="E2E8F0"/>
                           </a:solidFill>
                         </a:rPr>
-                        <a:t>Thu 13 Aug 2026  07:00 AM</a:t>
+                        <a:t>Fri 18 Sep 2026  04:00 AM</a:t>
                       </a:r>
                     </a:p>
                   </a:txBody>
@@ -13087,7 +13087,7 @@
                             <a:srgbClr val="E2E8F0"/>
                           </a:solidFill>
                         </a:rPr>
-                        <a:t>https://events.sumologic.com/metricsanalyticspm08122026-event-training</a:t>
+                        <a:t>https://events.sumologic.com/mobotessentialspm09172026-event-training</a:t>
                       </a:r>
                     </a:p>
                   </a:txBody>
@@ -13131,7 +13131,7 @@
                             <a:srgbClr val="E2E8F0"/>
                           </a:solidFill>
                         </a:rPr>
-                        <a:t>Mobot Essentials AM</a:t>
+                        <a:t>Essential SIEM Skills for SOC Analysts AM</a:t>
                       </a:r>
                     </a:p>
                   </a:txBody>
@@ -13173,7 +13173,7 @@
                             <a:srgbClr val="E2E8F0"/>
                           </a:solidFill>
                         </a:rPr>
-                        <a:t>Thu 13 Aug 2026  07:00 AM  →  08:30 AM</a:t>
+                        <a:t>Tue 22 Sep 2026  07:00 AM  →  08:30 AM</a:t>
                       </a:r>
                     </a:p>
                   </a:txBody>
@@ -13215,7 +13215,7 @@
                             <a:srgbClr val="E2E8F0"/>
                           </a:solidFill>
                         </a:rPr>
-                        <a:t>Fri 14 Aug 2026  02:00 AM</a:t>
+                        <a:t>Wed 23 Sep 2026  02:00 AM</a:t>
                       </a:r>
                     </a:p>
                   </a:txBody>
@@ -13257,7 +13257,7 @@
                             <a:srgbClr val="E2E8F0"/>
                           </a:solidFill>
                         </a:rPr>
-                        <a:t>Fri 14 Aug 2026  12:00 AM</a:t>
+                        <a:t>Wed 23 Sep 2026  12:00 AM</a:t>
                       </a:r>
                     </a:p>
                   </a:txBody>
@@ -13299,7 +13299,7 @@
                             <a:srgbClr val="E2E8F0"/>
                           </a:solidFill>
                         </a:rPr>
-                        <a:t>Thu 13 Aug 2026  10:00 PM</a:t>
+                        <a:t>Tue 22 Sep 2026  10:00 PM</a:t>
                       </a:r>
                     </a:p>
                   </a:txBody>
@@ -13341,7 +13341,7 @@
                             <a:srgbClr val="E2E8F0"/>
                           </a:solidFill>
                         </a:rPr>
-                        <a:t>https://events.sumologic.com/mobotessentialsam08132026-event-training</a:t>
+                        <a:t>https://events.sumologic.com/esssiemam09222026-event-training</a:t>
                       </a:r>
                     </a:p>
                   </a:txBody>
@@ -13385,7 +13385,7 @@
                             <a:srgbClr val="E2E8F0"/>
                           </a:solidFill>
                         </a:rPr>
-                        <a:t>Mobot Essentials PM</a:t>
+                        <a:t>Essential SIEM Skills for SOC Analysts PM</a:t>
                       </a:r>
                     </a:p>
                   </a:txBody>
@@ -13427,7 +13427,7 @@
                             <a:srgbClr val="E2E8F0"/>
                           </a:solidFill>
                         </a:rPr>
-                        <a:t>Thu 13 Aug 2026  04:00 PM  →  05:30 PM</a:t>
+                        <a:t>Tue 22 Sep 2026  04:00 PM  →  05:30 PM</a:t>
                       </a:r>
                     </a:p>
                   </a:txBody>
@@ -13469,7 +13469,7 @@
                             <a:srgbClr val="E2E8F0"/>
                           </a:solidFill>
                         </a:rPr>
-                        <a:t>Fri 14 Aug 2026  11:00 AM</a:t>
+                        <a:t>Wed 23 Sep 2026  11:00 AM</a:t>
                       </a:r>
                     </a:p>
                   </a:txBody>
@@ -13511,7 +13511,7 @@
                             <a:srgbClr val="E2E8F0"/>
                           </a:solidFill>
                         </a:rPr>
-                        <a:t>Fri 14 Aug 2026  09:00 AM</a:t>
+                        <a:t>Wed 23 Sep 2026  09:00 AM</a:t>
                       </a:r>
                     </a:p>
                   </a:txBody>
@@ -13553,7 +13553,7 @@
                             <a:srgbClr val="E2E8F0"/>
                           </a:solidFill>
                         </a:rPr>
-                        <a:t>Fri 14 Aug 2026  07:00 AM</a:t>
+                        <a:t>Wed 23 Sep 2026  07:00 AM</a:t>
                       </a:r>
                     </a:p>
                   </a:txBody>
@@ -13595,7 +13595,7 @@
                             <a:srgbClr val="E2E8F0"/>
                           </a:solidFill>
                         </a:rPr>
-                        <a:t>https://events.sumologic.com/mobotessentialspm08132026-event-training</a:t>
+                        <a:t>https://events.sumologic.com/esssiempm09222026-event-training</a:t>
                       </a:r>
                     </a:p>
                   </a:txBody>
@@ -13639,7 +13639,7 @@
                             <a:srgbClr val="E2E8F0"/>
                           </a:solidFill>
                         </a:rPr>
-                        <a:t>Essential Cloud SIEM Skills for SOC Analysts AM</a:t>
+                        <a:t>Cloud SIEM AM</a:t>
                       </a:r>
                     </a:p>
                   </a:txBody>
@@ -13681,7 +13681,7 @@
                             <a:srgbClr val="E2E8F0"/>
                           </a:solidFill>
                         </a:rPr>
-                        <a:t>Tue 18 Aug 2026  07:00 AM  →  08:30 AM</a:t>
+                        <a:t>Wed 23 Sep 2026  07:00 AM  →  10:00 AM</a:t>
                       </a:r>
                     </a:p>
                   </a:txBody>
@@ -13723,7 +13723,7 @@
                             <a:srgbClr val="E2E8F0"/>
                           </a:solidFill>
                         </a:rPr>
-                        <a:t>Wed 19 Aug 2026  02:00 AM</a:t>
+                        <a:t>Thu 24 Sep 2026  02:00 AM</a:t>
                       </a:r>
                     </a:p>
                   </a:txBody>
@@ -13765,7 +13765,7 @@
                             <a:srgbClr val="E2E8F0"/>
                           </a:solidFill>
                         </a:rPr>
-                        <a:t>Wed 19 Aug 2026  12:00 AM</a:t>
+                        <a:t>Thu 24 Sep 2026  12:00 AM</a:t>
                       </a:r>
                     </a:p>
                   </a:txBody>
@@ -13807,7 +13807,7 @@
                             <a:srgbClr val="E2E8F0"/>
                           </a:solidFill>
                         </a:rPr>
-                        <a:t>Tue 18 Aug 2026  10:00 PM</a:t>
+                        <a:t>Wed 23 Sep 2026  10:00 PM</a:t>
                       </a:r>
                     </a:p>
                   </a:txBody>
@@ -13849,7 +13849,7 @@
                             <a:srgbClr val="E2E8F0"/>
                           </a:solidFill>
                         </a:rPr>
-                        <a:t>https://events.sumologic.com/esscloudsiemam08182026-event-training</a:t>
+                        <a:t>https://events.sumologic.com/cloudsiemam09232026-event-training</a:t>
                       </a:r>
                     </a:p>
                   </a:txBody>
@@ -13893,7 +13893,7 @@
                             <a:srgbClr val="E2E8F0"/>
                           </a:solidFill>
                         </a:rPr>
-                        <a:t>Essential Cloud SIEM Skills for SOC Analysts PM</a:t>
+                        <a:t>Cloud SIEM PM</a:t>
                       </a:r>
                     </a:p>
                   </a:txBody>
@@ -13935,7 +13935,7 @@
                             <a:srgbClr val="E2E8F0"/>
                           </a:solidFill>
                         </a:rPr>
-                        <a:t>Tue 18 Aug 2026  04:00 PM  →  05:30 PM</a:t>
+                        <a:t>Wed 23 Sep 2026  04:00 PM  →  07:00 PM</a:t>
                       </a:r>
                     </a:p>
                   </a:txBody>
@@ -13977,7 +13977,7 @@
                             <a:srgbClr val="E2E8F0"/>
                           </a:solidFill>
                         </a:rPr>
-                        <a:t>Wed 19 Aug 2026  11:00 AM</a:t>
+                        <a:t>Thu 24 Sep 2026  11:00 AM</a:t>
                       </a:r>
                     </a:p>
                   </a:txBody>
@@ -14019,7 +14019,7 @@
                             <a:srgbClr val="E2E8F0"/>
                           </a:solidFill>
                         </a:rPr>
-                        <a:t>Wed 19 Aug 2026  09:00 AM</a:t>
+                        <a:t>Thu 24 Sep 2026  09:00 AM</a:t>
                       </a:r>
                     </a:p>
                   </a:txBody>
@@ -14061,7 +14061,7 @@
                             <a:srgbClr val="E2E8F0"/>
                           </a:solidFill>
                         </a:rPr>
-                        <a:t>Wed 19 Aug 2026  07:00 AM</a:t>
+                        <a:t>Thu 24 Sep 2026  07:00 AM</a:t>
                       </a:r>
                     </a:p>
                   </a:txBody>
@@ -14103,7 +14103,7 @@
                             <a:srgbClr val="E2E8F0"/>
                           </a:solidFill>
                         </a:rPr>
-                        <a:t>https://events.sumologic.com/esscloudsiempm08182026-event-training</a:t>
+                        <a:t>https://events.sumologic.com/cloudsiempm09232026-event-training</a:t>
                       </a:r>
                     </a:p>
                   </a:txBody>
@@ -14147,7 +14147,7 @@
                             <a:srgbClr val="E2E8F0"/>
                           </a:solidFill>
                         </a:rPr>
-                        <a:t>Cloud SIEM AM</a:t>
+                        <a:t>Automation AM</a:t>
                       </a:r>
                     </a:p>
                   </a:txBody>
@@ -14189,7 +14189,7 @@
                             <a:srgbClr val="E2E8F0"/>
                           </a:solidFill>
                         </a:rPr>
-                        <a:t>Wed 19 Aug 2026  07:00 AM  →  10:00 AM</a:t>
+                        <a:t>Thu 24 Sep 2026  07:00 AM  →  08:30 AM</a:t>
                       </a:r>
                     </a:p>
                   </a:txBody>
@@ -14231,7 +14231,7 @@
                             <a:srgbClr val="E2E8F0"/>
                           </a:solidFill>
                         </a:rPr>
-                        <a:t>Thu 20 Aug 2026  02:00 AM</a:t>
+                        <a:t>Fri 25 Sep 2026  02:00 AM</a:t>
                       </a:r>
                     </a:p>
                   </a:txBody>
@@ -14273,7 +14273,7 @@
                             <a:srgbClr val="E2E8F0"/>
                           </a:solidFill>
                         </a:rPr>
-                        <a:t>Thu 20 Aug 2026  12:00 AM</a:t>
+                        <a:t>Fri 25 Sep 2026  12:00 AM</a:t>
                       </a:r>
                     </a:p>
                   </a:txBody>
@@ -14315,7 +14315,7 @@
                             <a:srgbClr val="E2E8F0"/>
                           </a:solidFill>
                         </a:rPr>
-                        <a:t>Wed 19 Aug 2026  10:00 PM</a:t>
+                        <a:t>Thu 24 Sep 2026  10:00 PM</a:t>
                       </a:r>
                     </a:p>
                   </a:txBody>
@@ -14357,7 +14357,7 @@
                             <a:srgbClr val="E2E8F0"/>
                           </a:solidFill>
                         </a:rPr>
-                        <a:t>https://events.sumologic.com/cloudsiemam08192026-event-training</a:t>
+                        <a:t>https://events.sumologic.com/automationam09242026-event-training</a:t>
                       </a:r>
                     </a:p>
                   </a:txBody>
@@ -14401,7 +14401,7 @@
                             <a:srgbClr val="E2E8F0"/>
                           </a:solidFill>
                         </a:rPr>
-                        <a:t>Cloud SIEM PM</a:t>
+                        <a:t>Automation PM</a:t>
                       </a:r>
                     </a:p>
                   </a:txBody>
@@ -14443,7 +14443,7 @@
                             <a:srgbClr val="E2E8F0"/>
                           </a:solidFill>
                         </a:rPr>
-                        <a:t>Wed 19 Aug 2026  04:00 PM  →  07:00 PM</a:t>
+                        <a:t>Thu 24 Sep 2026  04:00 PM  →  05:30 PM</a:t>
                       </a:r>
                     </a:p>
                   </a:txBody>
@@ -14485,7 +14485,7 @@
                             <a:srgbClr val="E2E8F0"/>
                           </a:solidFill>
                         </a:rPr>
-                        <a:t>Thu 20 Aug 2026  11:00 AM</a:t>
+                        <a:t>Fri 25 Sep 2026  11:00 AM</a:t>
                       </a:r>
                     </a:p>
                   </a:txBody>
@@ -14527,7 +14527,7 @@
                             <a:srgbClr val="E2E8F0"/>
                           </a:solidFill>
                         </a:rPr>
-                        <a:t>Thu 20 Aug 2026  09:00 AM</a:t>
+                        <a:t>Fri 25 Sep 2026  09:00 AM</a:t>
                       </a:r>
                     </a:p>
                   </a:txBody>
@@ -14569,7 +14569,7 @@
                             <a:srgbClr val="E2E8F0"/>
                           </a:solidFill>
                         </a:rPr>
-                        <a:t>Thu 20 Aug 2026  07:00 AM</a:t>
+                        <a:t>Fri 25 Sep 2026  07:00 AM</a:t>
                       </a:r>
                     </a:p>
                   </a:txBody>
@@ -14611,7 +14611,7 @@
                             <a:srgbClr val="E2E8F0"/>
                           </a:solidFill>
                         </a:rPr>
-                        <a:t>https://events.sumologic.com/cloudsiempm08192026-event-training</a:t>
+                        <a:t>https://events.sumologic.com/automationpm09242026-event-training</a:t>
                       </a:r>
                     </a:p>
                   </a:txBody>
@@ -14697,7 +14697,7 @@
                             <a:srgbClr val="E2E8F0"/>
                           </a:solidFill>
                         </a:rPr>
-                        <a:t>Tue 08 Sep 2026  05:00 AM  →  06:00 AM</a:t>
+                        <a:t>Tue 06 Oct 2026  05:00 AM  →  06:00 AM</a:t>
                       </a:r>
                     </a:p>
                   </a:txBody>
@@ -14739,7 +14739,7 @@
                             <a:srgbClr val="E2E8F0"/>
                           </a:solidFill>
                         </a:rPr>
-                        <a:t>Wed 09 Sep 2026  12:00 AM</a:t>
+                        <a:t>Wed 07 Oct 2026  01:00 AM</a:t>
                       </a:r>
                     </a:p>
                   </a:txBody>
@@ -14781,7 +14781,7 @@
                             <a:srgbClr val="E2E8F0"/>
                           </a:solidFill>
                         </a:rPr>
-                        <a:t>Tue 08 Sep 2026  10:00 PM</a:t>
+                        <a:t>Tue 06 Oct 2026  11:00 PM</a:t>
                       </a:r>
                     </a:p>
                   </a:txBody>
@@ -14823,7 +14823,7 @@
                             <a:srgbClr val="E2E8F0"/>
                           </a:solidFill>
                         </a:rPr>
-                        <a:t>Tue 08 Sep 2026  08:00 PM</a:t>
+                        <a:t>Tue 06 Oct 2026  08:00 PM</a:t>
                       </a:r>
                     </a:p>
                   </a:txBody>
@@ -14865,7 +14865,7 @@
                             <a:srgbClr val="E2E8F0"/>
                           </a:solidFill>
                         </a:rPr>
-                        <a:t>https://events.sumologic.com/welcomewebinaram09082026-event-training</a:t>
+                        <a:t>https://events.sumologic.com/welcomewebinaram10062026-event-training</a:t>
                       </a:r>
                     </a:p>
                   </a:txBody>
@@ -14951,7 +14951,7 @@
                             <a:srgbClr val="E2E8F0"/>
                           </a:solidFill>
                         </a:rPr>
-                        <a:t>Tue 08 Sep 2026  07:00 AM  →  10:00 AM</a:t>
+                        <a:t>Tue 06 Oct 2026  07:00 AM  →  10:00 AM</a:t>
                       </a:r>
                     </a:p>
                   </a:txBody>
@@ -14993,7 +14993,7 @@
                             <a:srgbClr val="E2E8F0"/>
                           </a:solidFill>
                         </a:rPr>
-                        <a:t>Wed 09 Sep 2026  02:00 AM</a:t>
+                        <a:t>Wed 07 Oct 2026  03:00 AM</a:t>
                       </a:r>
                     </a:p>
                   </a:txBody>
@@ -15035,7 +15035,7 @@
                             <a:srgbClr val="E2E8F0"/>
                           </a:solidFill>
                         </a:rPr>
-                        <a:t>Wed 09 Sep 2026  12:00 AM</a:t>
+                        <a:t>Wed 07 Oct 2026  01:00 AM</a:t>
                       </a:r>
                     </a:p>
                   </a:txBody>
@@ -15077,7 +15077,7 @@
                             <a:srgbClr val="E2E8F0"/>
                           </a:solidFill>
                         </a:rPr>
-                        <a:t>Tue 08 Sep 2026  10:00 PM</a:t>
+                        <a:t>Tue 06 Oct 2026  10:00 PM</a:t>
                       </a:r>
                     </a:p>
                   </a:txBody>
@@ -15119,7 +15119,7 @@
                             <a:srgbClr val="E2E8F0"/>
                           </a:solidFill>
                         </a:rPr>
-                        <a:t>https://events.sumologic.com/fundamentalsam09082026-event-training</a:t>
+                        <a:t>https://events.sumologic.com/fundamentalsam10062026-event-training</a:t>
                       </a:r>
                     </a:p>
                   </a:txBody>
@@ -15319,7 +15319,7 @@
                   <a:srgbClr val="00B4D8"/>
                 </a:solidFill>
               </a:rPr>
-              <a:t>Sumo Logic — Virtual Training Schedule   ·   08 Sep – 16 Sep 2026   (5/6)</a:t>
+              <a:t>Sumo Logic — Virtual Training Schedule   ·   06 Oct – 14 Oct 2026   (5/6)</a:t>
             </a:r>
           </a:p>
         </p:txBody>
@@ -15693,7 +15693,7 @@
                             <a:srgbClr val="E2E8F0"/>
                           </a:solidFill>
                         </a:rPr>
-                        <a:t>Tue 08 Sep 2026  02:00 PM  →  03:00 PM</a:t>
+                        <a:t>Tue 06 Oct 2026  02:00 PM  →  03:00 PM</a:t>
                       </a:r>
                     </a:p>
                   </a:txBody>
@@ -15735,7 +15735,7 @@
                             <a:srgbClr val="E2E8F0"/>
                           </a:solidFill>
                         </a:rPr>
-                        <a:t>Wed 09 Sep 2026  09:00 AM</a:t>
+                        <a:t>Wed 07 Oct 2026  10:00 AM</a:t>
                       </a:r>
                     </a:p>
                   </a:txBody>
@@ -15777,7 +15777,7 @@
                             <a:srgbClr val="E2E8F0"/>
                           </a:solidFill>
                         </a:rPr>
-                        <a:t>Wed 09 Sep 2026  07:00 AM</a:t>
+                        <a:t>Wed 07 Oct 2026  08:00 AM</a:t>
                       </a:r>
                     </a:p>
                   </a:txBody>
@@ -15819,7 +15819,7 @@
                             <a:srgbClr val="E2E8F0"/>
                           </a:solidFill>
                         </a:rPr>
-                        <a:t>Wed 09 Sep 2026  05:00 AM</a:t>
+                        <a:t>Wed 07 Oct 2026  05:00 AM</a:t>
                       </a:r>
                     </a:p>
                   </a:txBody>
@@ -15861,7 +15861,7 @@
                             <a:srgbClr val="E2E8F0"/>
                           </a:solidFill>
                         </a:rPr>
-                        <a:t>https://events.sumologic.com/welcomewebinarpm09082026-event-training</a:t>
+                        <a:t>https://events.sumologic.com/welcomewebinarpm10062026-event-training</a:t>
                       </a:r>
                     </a:p>
                   </a:txBody>
@@ -15947,7 +15947,7 @@
                             <a:srgbClr val="E2E8F0"/>
                           </a:solidFill>
                         </a:rPr>
-                        <a:t>Tue 08 Sep 2026  04:00 PM  →  07:00 PM</a:t>
+                        <a:t>Tue 06 Oct 2026  04:00 PM  →  07:00 PM</a:t>
                       </a:r>
                     </a:p>
                   </a:txBody>
@@ -15989,7 +15989,7 @@
                             <a:srgbClr val="E2E8F0"/>
                           </a:solidFill>
                         </a:rPr>
-                        <a:t>Wed 09 Sep 2026  11:00 AM</a:t>
+                        <a:t>Wed 07 Oct 2026  12:00 PM</a:t>
                       </a:r>
                     </a:p>
                   </a:txBody>
@@ -16031,7 +16031,7 @@
                             <a:srgbClr val="E2E8F0"/>
                           </a:solidFill>
                         </a:rPr>
-                        <a:t>Wed 09 Sep 2026  09:00 AM</a:t>
+                        <a:t>Wed 07 Oct 2026  10:00 AM</a:t>
                       </a:r>
                     </a:p>
                   </a:txBody>
@@ -16073,7 +16073,7 @@
                             <a:srgbClr val="E2E8F0"/>
                           </a:solidFill>
                         </a:rPr>
-                        <a:t>Wed 09 Sep 2026  07:00 AM</a:t>
+                        <a:t>Wed 07 Oct 2026  07:00 AM</a:t>
                       </a:r>
                     </a:p>
                   </a:txBody>
@@ -16115,7 +16115,7 @@
                             <a:srgbClr val="E2E8F0"/>
                           </a:solidFill>
                         </a:rPr>
-                        <a:t>https://events.sumologic.com/fundamentalspm09082026-event-training</a:t>
+                        <a:t>https://events.sumologic.com/fundamentalspm10062026-event-training</a:t>
                       </a:r>
                     </a:p>
                   </a:txBody>
@@ -16201,7 +16201,7 @@
                             <a:srgbClr val="E2E8F0"/>
                           </a:solidFill>
                         </a:rPr>
-                        <a:t>Wed 09 Sep 2026  07:00 AM  →  10:00 AM</a:t>
+                        <a:t>Wed 07 Oct 2026  07:00 AM  →  10:00 AM</a:t>
                       </a:r>
                     </a:p>
                   </a:txBody>
@@ -16243,7 +16243,7 @@
                             <a:srgbClr val="E2E8F0"/>
                           </a:solidFill>
                         </a:rPr>
-                        <a:t>Thu 10 Sep 2026  02:00 AM</a:t>
+                        <a:t>Thu 08 Oct 2026  03:00 AM</a:t>
                       </a:r>
                     </a:p>
                   </a:txBody>
@@ -16285,7 +16285,7 @@
                             <a:srgbClr val="E2E8F0"/>
                           </a:solidFill>
                         </a:rPr>
-                        <a:t>Thu 10 Sep 2026  12:00 AM</a:t>
+                        <a:t>Thu 08 Oct 2026  01:00 AM</a:t>
                       </a:r>
                     </a:p>
                   </a:txBody>
@@ -16327,7 +16327,7 @@
                             <a:srgbClr val="E2E8F0"/>
                           </a:solidFill>
                         </a:rPr>
-                        <a:t>Wed 09 Sep 2026  10:00 PM</a:t>
+                        <a:t>Wed 07 Oct 2026  10:00 PM</a:t>
                       </a:r>
                     </a:p>
                   </a:txBody>
@@ -16369,7 +16369,7 @@
                             <a:srgbClr val="E2E8F0"/>
                           </a:solidFill>
                         </a:rPr>
-                        <a:t>https://events.sumologic.com/searchmasteryam09092026-event-training</a:t>
+                        <a:t>https://events.sumologic.com/searchmasteryam10072026-event-training</a:t>
                       </a:r>
                     </a:p>
                   </a:txBody>
@@ -16455,7 +16455,7 @@
                             <a:srgbClr val="E2E8F0"/>
                           </a:solidFill>
                         </a:rPr>
-                        <a:t>Wed 09 Sep 2026  04:00 PM  →  07:00 PM</a:t>
+                        <a:t>Wed 07 Oct 2026  04:00 PM  →  07:00 PM</a:t>
                       </a:r>
                     </a:p>
                   </a:txBody>
@@ -16497,7 +16497,7 @@
                             <a:srgbClr val="E2E8F0"/>
                           </a:solidFill>
                         </a:rPr>
-                        <a:t>Thu 10 Sep 2026  11:00 AM</a:t>
+                        <a:t>Thu 08 Oct 2026  12:00 PM</a:t>
                       </a:r>
                     </a:p>
                   </a:txBody>
@@ -16539,7 +16539,7 @@
                             <a:srgbClr val="E2E8F0"/>
                           </a:solidFill>
                         </a:rPr>
-                        <a:t>Thu 10 Sep 2026  09:00 AM</a:t>
+                        <a:t>Thu 08 Oct 2026  10:00 AM</a:t>
                       </a:r>
                     </a:p>
                   </a:txBody>
@@ -16581,7 +16581,7 @@
                             <a:srgbClr val="E2E8F0"/>
                           </a:solidFill>
                         </a:rPr>
-                        <a:t>Thu 10 Sep 2026  07:00 AM</a:t>
+                        <a:t>Thu 08 Oct 2026  07:00 AM</a:t>
                       </a:r>
                     </a:p>
                   </a:txBody>
@@ -16623,7 +16623,7 @@
                             <a:srgbClr val="E2E8F0"/>
                           </a:solidFill>
                         </a:rPr>
-                        <a:t>https://events.sumologic.com/searchmasterypm09092026-event-training</a:t>
+                        <a:t>https://events.sumologic.com/searchmasterypm10072026-event-training</a:t>
                       </a:r>
                     </a:p>
                   </a:txBody>
@@ -16667,7 +16667,7 @@
                             <a:srgbClr val="E2E8F0"/>
                           </a:solidFill>
                         </a:rPr>
-                        <a:t>Best Practices for Query Efficiency AM</a:t>
+                        <a:t>Best Practice for Query Efficiency  AM</a:t>
                       </a:r>
                     </a:p>
                   </a:txBody>
@@ -16709,7 +16709,7 @@
                             <a:srgbClr val="E2E8F0"/>
                           </a:solidFill>
                         </a:rPr>
-                        <a:t>Thu 10 Sep 2026  07:00 AM  →  08:30 AM</a:t>
+                        <a:t>Thu 08 Oct 2026  07:00 AM  →  08:30 AM</a:t>
                       </a:r>
                     </a:p>
                   </a:txBody>
@@ -16751,7 +16751,7 @@
                             <a:srgbClr val="E2E8F0"/>
                           </a:solidFill>
                         </a:rPr>
-                        <a:t>Fri 11 Sep 2026  02:00 AM</a:t>
+                        <a:t>Fri 09 Oct 2026  03:00 AM</a:t>
                       </a:r>
                     </a:p>
                   </a:txBody>
@@ -16793,7 +16793,7 @@
                             <a:srgbClr val="E2E8F0"/>
                           </a:solidFill>
                         </a:rPr>
-                        <a:t>Fri 11 Sep 2026  12:00 AM</a:t>
+                        <a:t>Fri 09 Oct 2026  01:00 AM</a:t>
                       </a:r>
                     </a:p>
                   </a:txBody>
@@ -16835,7 +16835,7 @@
                             <a:srgbClr val="E2E8F0"/>
                           </a:solidFill>
                         </a:rPr>
-                        <a:t>Thu 10 Sep 2026  10:00 PM</a:t>
+                        <a:t>Thu 08 Oct 2026  10:00 PM</a:t>
                       </a:r>
                     </a:p>
                   </a:txBody>
@@ -16877,7 +16877,7 @@
                             <a:srgbClr val="E2E8F0"/>
                           </a:solidFill>
                         </a:rPr>
-                        <a:t>https://events.sumologic.com/bp4qeam09102026-event-training</a:t>
+                        <a:t/>
                       </a:r>
                     </a:p>
                   </a:txBody>
@@ -16921,7 +16921,7 @@
                             <a:srgbClr val="E2E8F0"/>
                           </a:solidFill>
                         </a:rPr>
-                        <a:t>Best Practices for Query Efficiency PM</a:t>
+                        <a:t>Best Practice for Query Efficiency PM</a:t>
                       </a:r>
                     </a:p>
                   </a:txBody>
@@ -16963,7 +16963,7 @@
                             <a:srgbClr val="E2E8F0"/>
                           </a:solidFill>
                         </a:rPr>
-                        <a:t>Thu 10 Sep 2026  04:00 PM  →  05:30 PM</a:t>
+                        <a:t>Thu 08 Oct 2026  04:00 PM  →  05:30 PM</a:t>
                       </a:r>
                     </a:p>
                   </a:txBody>
@@ -17005,7 +17005,7 @@
                             <a:srgbClr val="E2E8F0"/>
                           </a:solidFill>
                         </a:rPr>
-                        <a:t>Fri 11 Sep 2026  11:00 AM</a:t>
+                        <a:t>Fri 09 Oct 2026  12:00 PM</a:t>
                       </a:r>
                     </a:p>
                   </a:txBody>
@@ -17047,7 +17047,7 @@
                             <a:srgbClr val="E2E8F0"/>
                           </a:solidFill>
                         </a:rPr>
-                        <a:t>Fri 11 Sep 2026  09:00 AM</a:t>
+                        <a:t>Fri 09 Oct 2026  10:00 AM</a:t>
                       </a:r>
                     </a:p>
                   </a:txBody>
@@ -17089,7 +17089,7 @@
                             <a:srgbClr val="E2E8F0"/>
                           </a:solidFill>
                         </a:rPr>
-                        <a:t>Fri 11 Sep 2026  07:00 AM</a:t>
+                        <a:t>Fri 09 Oct 2026  07:00 AM</a:t>
                       </a:r>
                     </a:p>
                   </a:txBody>
@@ -17131,7 +17131,7 @@
                             <a:srgbClr val="E2E8F0"/>
                           </a:solidFill>
                         </a:rPr>
-                        <a:t>https://events.sumologic.com/bp4qepm09102026-event-training</a:t>
+                        <a:t>https://events.sumologic.com/bp4qepm10082026-event-training</a:t>
                       </a:r>
                     </a:p>
                   </a:txBody>
@@ -17217,7 +17217,7 @@
                             <a:srgbClr val="E2E8F0"/>
                           </a:solidFill>
                         </a:rPr>
-                        <a:t>Tue 15 Sep 2026  07:00 AM  →  10:00 AM</a:t>
+                        <a:t>Tue 13 Oct 2026  07:00 AM  →  10:00 AM</a:t>
                       </a:r>
                     </a:p>
                   </a:txBody>
@@ -17259,7 +17259,7 @@
                             <a:srgbClr val="E2E8F0"/>
                           </a:solidFill>
                         </a:rPr>
-                        <a:t>Wed 16 Sep 2026  02:00 AM</a:t>
+                        <a:t>Wed 14 Oct 2026  03:00 AM</a:t>
                       </a:r>
                     </a:p>
                   </a:txBody>
@@ -17301,7 +17301,7 @@
                             <a:srgbClr val="E2E8F0"/>
                           </a:solidFill>
                         </a:rPr>
-                        <a:t>Wed 16 Sep 2026  12:00 AM</a:t>
+                        <a:t>Wed 14 Oct 2026  01:00 AM</a:t>
                       </a:r>
                     </a:p>
                   </a:txBody>
@@ -17343,7 +17343,7 @@
                             <a:srgbClr val="E2E8F0"/>
                           </a:solidFill>
                         </a:rPr>
-                        <a:t>Tue 15 Sep 2026  10:00 PM</a:t>
+                        <a:t>Tue 13 Oct 2026  10:00 PM</a:t>
                       </a:r>
                     </a:p>
                   </a:txBody>
@@ -17385,7 +17385,7 @@
                             <a:srgbClr val="E2E8F0"/>
                           </a:solidFill>
                         </a:rPr>
-                        <a:t>https://events.sumologic.com/administrationam09152026-event-training</a:t>
+                        <a:t>https://events.sumologic.com/administrationam10132026-event-training</a:t>
                       </a:r>
                     </a:p>
                   </a:txBody>
@@ -17471,7 +17471,7 @@
                             <a:srgbClr val="E2E8F0"/>
                           </a:solidFill>
                         </a:rPr>
-                        <a:t>Tue 15 Sep 2026  04:00 PM  →  07:00 PM</a:t>
+                        <a:t>Tue 13 Oct 2026  04:00 PM  →  07:00 PM</a:t>
                       </a:r>
                     </a:p>
                   </a:txBody>
@@ -17513,7 +17513,7 @@
                             <a:srgbClr val="E2E8F0"/>
                           </a:solidFill>
                         </a:rPr>
-                        <a:t>Wed 16 Sep 2026  11:00 AM</a:t>
+                        <a:t>Wed 14 Oct 2026  12:00 PM</a:t>
                       </a:r>
                     </a:p>
                   </a:txBody>
@@ -17555,7 +17555,7 @@
                             <a:srgbClr val="E2E8F0"/>
                           </a:solidFill>
                         </a:rPr>
-                        <a:t>Wed 16 Sep 2026  09:00 AM</a:t>
+                        <a:t>Wed 14 Oct 2026  10:00 AM</a:t>
                       </a:r>
                     </a:p>
                   </a:txBody>
@@ -17597,7 +17597,7 @@
                             <a:srgbClr val="E2E8F0"/>
                           </a:solidFill>
                         </a:rPr>
-                        <a:t>Wed 16 Sep 2026  07:00 AM</a:t>
+                        <a:t>Wed 14 Oct 2026  07:00 AM</a:t>
                       </a:r>
                     </a:p>
                   </a:txBody>
@@ -17639,7 +17639,7 @@
                             <a:srgbClr val="E2E8F0"/>
                           </a:solidFill>
                         </a:rPr>
-                        <a:t>https://events.sumologic.com/administrationpm09152026-event-training</a:t>
+                        <a:t>https://events.sumologic.com/administrationpm10132026-event-training</a:t>
                       </a:r>
                     </a:p>
                   </a:txBody>
@@ -17683,7 +17683,7 @@
                             <a:srgbClr val="E2E8F0"/>
                           </a:solidFill>
                         </a:rPr>
-                        <a:t>Logs for Security AM</a:t>
+                        <a:t>Metrics Analytics AM</a:t>
                       </a:r>
                     </a:p>
                   </a:txBody>
@@ -17725,7 +17725,7 @@
                             <a:srgbClr val="E2E8F0"/>
                           </a:solidFill>
                         </a:rPr>
-                        <a:t>Wed 16 Sep 2026  07:00 AM  →  10:00 AM</a:t>
+                        <a:t>Wed 14 Oct 2026  07:00 AM  →  10:00 AM</a:t>
                       </a:r>
                     </a:p>
                   </a:txBody>
@@ -17767,7 +17767,7 @@
                             <a:srgbClr val="E2E8F0"/>
                           </a:solidFill>
                         </a:rPr>
-                        <a:t>Thu 17 Sep 2026  02:00 AM</a:t>
+                        <a:t>Thu 15 Oct 2026  03:00 AM</a:t>
                       </a:r>
                     </a:p>
                   </a:txBody>
@@ -17809,7 +17809,7 @@
                             <a:srgbClr val="E2E8F0"/>
                           </a:solidFill>
                         </a:rPr>
-                        <a:t>Thu 17 Sep 2026  12:00 AM</a:t>
+                        <a:t>Thu 15 Oct 2026  01:00 AM</a:t>
                       </a:r>
                     </a:p>
                   </a:txBody>
@@ -17851,7 +17851,7 @@
                             <a:srgbClr val="E2E8F0"/>
                           </a:solidFill>
                         </a:rPr>
-                        <a:t>Wed 16 Sep 2026  10:00 PM</a:t>
+                        <a:t>Wed 14 Oct 2026  10:00 PM</a:t>
                       </a:r>
                     </a:p>
                   </a:txBody>
@@ -17893,7 +17893,7 @@
                             <a:srgbClr val="E2E8F0"/>
                           </a:solidFill>
                         </a:rPr>
-                        <a:t>https://events.sumologic.com/logsforsecurityam09162026-event-training</a:t>
+                        <a:t>https://events.sumologic.com/metricsanalyticsam10142026-event-training</a:t>
                       </a:r>
                     </a:p>
                   </a:txBody>
@@ -17937,7 +17937,7 @@
                             <a:srgbClr val="E2E8F0"/>
                           </a:solidFill>
                         </a:rPr>
-                        <a:t>Logs for Security PM</a:t>
+                        <a:t>Metrics Analytics PM</a:t>
                       </a:r>
                     </a:p>
                   </a:txBody>
@@ -17979,7 +17979,7 @@
                             <a:srgbClr val="E2E8F0"/>
                           </a:solidFill>
                         </a:rPr>
-                        <a:t>Wed 16 Sep 2026  04:00 PM  →  07:00 PM</a:t>
+                        <a:t>Wed 14 Oct 2026  04:00 PM  →  07:00 PM</a:t>
                       </a:r>
                     </a:p>
                   </a:txBody>
@@ -18021,7 +18021,7 @@
                             <a:srgbClr val="E2E8F0"/>
                           </a:solidFill>
                         </a:rPr>
-                        <a:t>Thu 17 Sep 2026  11:00 AM</a:t>
+                        <a:t>Thu 15 Oct 2026  12:00 PM</a:t>
                       </a:r>
                     </a:p>
                   </a:txBody>
@@ -18063,7 +18063,7 @@
                             <a:srgbClr val="E2E8F0"/>
                           </a:solidFill>
                         </a:rPr>
-                        <a:t>Thu 17 Sep 2026  09:00 AM</a:t>
+                        <a:t>Thu 15 Oct 2026  10:00 AM</a:t>
                       </a:r>
                     </a:p>
                   </a:txBody>
@@ -18105,7 +18105,7 @@
                             <a:srgbClr val="E2E8F0"/>
                           </a:solidFill>
                         </a:rPr>
-                        <a:t>Thu 17 Sep 2026  07:00 AM</a:t>
+                        <a:t>Thu 15 Oct 2026  07:00 AM</a:t>
                       </a:r>
                     </a:p>
                   </a:txBody>
@@ -18147,7 +18147,7 @@
                             <a:srgbClr val="E2E8F0"/>
                           </a:solidFill>
                         </a:rPr>
-                        <a:t>https://events.sumologic.com/logsforsecuritypm09162026-event-training</a:t>
+                        <a:t>https://events.sumologic.com/metricsanalyticspm10142026-event-training</a:t>
                       </a:r>
                     </a:p>
                   </a:txBody>
@@ -18347,7 +18347,7 @@
                   <a:srgbClr val="00B4D8"/>
                 </a:solidFill>
               </a:rPr>
-              <a:t>Sumo Logic — Virtual Training Schedule   ·   17 Sep – 24 Sep 2026   (6/6)</a:t>
+              <a:t>Sumo Logic — Virtual Training Schedule   ·   15 Oct – 22 Oct 2026   (6/6)</a:t>
             </a:r>
           </a:p>
         </p:txBody>
@@ -18396,7 +18396,7 @@
         </p:nvGraphicFramePr>
         <p:xfrm>
           <a:off x="164592" y="640080"/>
-          <a:ext cx="11795760" cy="3675888"/>
+          <a:ext cx="11795760" cy="3255264"/>
         </p:xfrm>
         <a:graphic>
           <a:graphicData uri="http://schemas.openxmlformats.org/drawingml/2006/table">
@@ -18679,7 +18679,7 @@
                             <a:srgbClr val="E2E8F0"/>
                           </a:solidFill>
                         </a:rPr>
-                        <a:t>Mobot Essentials AM</a:t>
+                        <a:t>Hands on with Mobot and Dojo AI AM</a:t>
                       </a:r>
                     </a:p>
                   </a:txBody>
@@ -18721,7 +18721,7 @@
                             <a:srgbClr val="E2E8F0"/>
                           </a:solidFill>
                         </a:rPr>
-                        <a:t>Thu 17 Sep 2026  07:00 AM  →  08:30 AM</a:t>
+                        <a:t>Thu 15 Oct 2026  07:00 AM  →  08:30 AM</a:t>
                       </a:r>
                     </a:p>
                   </a:txBody>
@@ -18763,7 +18763,7 @@
                             <a:srgbClr val="E2E8F0"/>
                           </a:solidFill>
                         </a:rPr>
-                        <a:t>Fri 18 Sep 2026  02:00 AM</a:t>
+                        <a:t>Fri 16 Oct 2026  03:00 AM</a:t>
                       </a:r>
                     </a:p>
                   </a:txBody>
@@ -18805,7 +18805,7 @@
                             <a:srgbClr val="E2E8F0"/>
                           </a:solidFill>
                         </a:rPr>
-                        <a:t>Fri 18 Sep 2026  12:00 AM</a:t>
+                        <a:t>Fri 16 Oct 2026  01:00 AM</a:t>
                       </a:r>
                     </a:p>
                   </a:txBody>
@@ -18847,7 +18847,7 @@
                             <a:srgbClr val="E2E8F0"/>
                           </a:solidFill>
                         </a:rPr>
-                        <a:t>Thu 17 Sep 2026  10:00 PM</a:t>
+                        <a:t>Thu 15 Oct 2026  10:00 PM</a:t>
                       </a:r>
                     </a:p>
                   </a:txBody>
@@ -18889,7 +18889,7 @@
                             <a:srgbClr val="E2E8F0"/>
                           </a:solidFill>
                         </a:rPr>
-                        <a:t>https://events.sumologic.com/mobotessentialsam09172026-event-training</a:t>
+                        <a:t>https://events.sumologic.com/mobotworkshopam10152026-event-training</a:t>
                       </a:r>
                     </a:p>
                   </a:txBody>
@@ -18933,7 +18933,7 @@
                             <a:srgbClr val="E2E8F0"/>
                           </a:solidFill>
                         </a:rPr>
-                        <a:t>Mobot Essentials PM</a:t>
+                        <a:t>Hands on with Mobot and Dojo AI PM</a:t>
                       </a:r>
                     </a:p>
                   </a:txBody>
@@ -18975,7 +18975,7 @@
                             <a:srgbClr val="E2E8F0"/>
                           </a:solidFill>
                         </a:rPr>
-                        <a:t>Thu 17 Sep 2026  01:00 PM  →  05:25 PM</a:t>
+                        <a:t>Thu 15 Oct 2026  04:00 PM  →  05:30 PM</a:t>
                       </a:r>
                     </a:p>
                   </a:txBody>
@@ -19017,7 +19017,7 @@
                             <a:srgbClr val="E2E8F0"/>
                           </a:solidFill>
                         </a:rPr>
-                        <a:t>Fri 18 Sep 2026  08:00 AM</a:t>
+                        <a:t>Fri 16 Oct 2026  12:00 PM</a:t>
                       </a:r>
                     </a:p>
                   </a:txBody>
@@ -19059,7 +19059,7 @@
                             <a:srgbClr val="E2E8F0"/>
                           </a:solidFill>
                         </a:rPr>
-                        <a:t>Fri 18 Sep 2026  06:00 AM</a:t>
+                        <a:t>Fri 16 Oct 2026  10:00 AM</a:t>
                       </a:r>
                     </a:p>
                   </a:txBody>
@@ -19101,7 +19101,7 @@
                             <a:srgbClr val="E2E8F0"/>
                           </a:solidFill>
                         </a:rPr>
-                        <a:t>Fri 18 Sep 2026  04:00 AM</a:t>
+                        <a:t>Fri 16 Oct 2026  07:00 AM</a:t>
                       </a:r>
                     </a:p>
                   </a:txBody>
@@ -19143,7 +19143,7 @@
                             <a:srgbClr val="E2E8F0"/>
                           </a:solidFill>
                         </a:rPr>
-                        <a:t>https://events.sumologic.com/mobotessentialspm09172026-event-training</a:t>
+                        <a:t>https://events.sumologic.com/mobotworkshoppm10152026-event-training</a:t>
                       </a:r>
                     </a:p>
                   </a:txBody>
@@ -19187,7 +19187,7 @@
                             <a:srgbClr val="E2E8F0"/>
                           </a:solidFill>
                         </a:rPr>
-                        <a:t>Essential Cloud SIEM Skills for SOC Analysts AM</a:t>
+                        <a:t>Essential SIEM Skills for SOC Analysts AM</a:t>
                       </a:r>
                     </a:p>
                   </a:txBody>
@@ -19229,7 +19229,7 @@
                             <a:srgbClr val="E2E8F0"/>
                           </a:solidFill>
                         </a:rPr>
-                        <a:t>Tue 22 Sep 2026  07:00 AM  →  08:30 AM</a:t>
+                        <a:t>Tue 20 Oct 2026  07:00 AM  →  08:30 AM</a:t>
                       </a:r>
                     </a:p>
                   </a:txBody>
@@ -19271,7 +19271,7 @@
                             <a:srgbClr val="E2E8F0"/>
                           </a:solidFill>
                         </a:rPr>
-                        <a:t>Wed 23 Sep 2026  02:00 AM</a:t>
+                        <a:t>Wed 21 Oct 2026  03:00 AM</a:t>
                       </a:r>
                     </a:p>
                   </a:txBody>
@@ -19313,7 +19313,7 @@
                             <a:srgbClr val="E2E8F0"/>
                           </a:solidFill>
                         </a:rPr>
-                        <a:t>Wed 23 Sep 2026  12:00 AM</a:t>
+                        <a:t>Wed 21 Oct 2026  01:00 AM</a:t>
                       </a:r>
                     </a:p>
                   </a:txBody>
@@ -19355,7 +19355,7 @@
                             <a:srgbClr val="E2E8F0"/>
                           </a:solidFill>
                         </a:rPr>
-                        <a:t>Tue 22 Sep 2026  10:00 PM</a:t>
+                        <a:t>Tue 20 Oct 2026  10:00 PM</a:t>
                       </a:r>
                     </a:p>
                   </a:txBody>
@@ -19397,7 +19397,7 @@
                             <a:srgbClr val="E2E8F0"/>
                           </a:solidFill>
                         </a:rPr>
-                        <a:t>https://events.sumologic.com/esssiemam09222026-event-training</a:t>
+                        <a:t>https://events.sumologic.com/esssiemam10202026-event-training</a:t>
                       </a:r>
                     </a:p>
                   </a:txBody>
@@ -19441,7 +19441,7 @@
                             <a:srgbClr val="E2E8F0"/>
                           </a:solidFill>
                         </a:rPr>
-                        <a:t>Essential Cloud SIEM Skills for SOC Analysts PM</a:t>
+                        <a:t>Essential SIEM Skills for SOC Analysts PM</a:t>
                       </a:r>
                     </a:p>
                   </a:txBody>
@@ -19483,7 +19483,7 @@
                             <a:srgbClr val="E2E8F0"/>
                           </a:solidFill>
                         </a:rPr>
-                        <a:t>Tue 22 Sep 2026  04:00 PM  →  05:30 PM</a:t>
+                        <a:t>Tue 20 Oct 2026  04:00 PM  →  05:30 PM</a:t>
                       </a:r>
                     </a:p>
                   </a:txBody>
@@ -19525,7 +19525,7 @@
                             <a:srgbClr val="E2E8F0"/>
                           </a:solidFill>
                         </a:rPr>
-                        <a:t>Wed 23 Sep 2026  11:00 AM</a:t>
+                        <a:t>Wed 21 Oct 2026  12:00 PM</a:t>
                       </a:r>
                     </a:p>
                   </a:txBody>
@@ -19567,7 +19567,7 @@
                             <a:srgbClr val="E2E8F0"/>
                           </a:solidFill>
                         </a:rPr>
-                        <a:t>Wed 23 Sep 2026  09:00 AM</a:t>
+                        <a:t>Wed 21 Oct 2026  10:00 AM</a:t>
                       </a:r>
                     </a:p>
                   </a:txBody>
@@ -19609,7 +19609,7 @@
                             <a:srgbClr val="E2E8F0"/>
                           </a:solidFill>
                         </a:rPr>
-                        <a:t>Wed 23 Sep 2026  07:00 AM</a:t>
+                        <a:t>Wed 21 Oct 2026  07:00 AM</a:t>
                       </a:r>
                     </a:p>
                   </a:txBody>
@@ -19651,7 +19651,7 @@
                             <a:srgbClr val="E2E8F0"/>
                           </a:solidFill>
                         </a:rPr>
-                        <a:t>https://events.sumologic.com/esssiempm09222026-event-training</a:t>
+                        <a:t>https://events.sumologic.com/esssiempm10202026-event-training</a:t>
                       </a:r>
                     </a:p>
                   </a:txBody>
@@ -19737,7 +19737,7 @@
                             <a:srgbClr val="E2E8F0"/>
                           </a:solidFill>
                         </a:rPr>
-                        <a:t>Wed 23 Sep 2026  07:00 AM  →  10:00 AM</a:t>
+                        <a:t>Wed 21 Oct 2026  07:00 AM  →  10:00 AM</a:t>
                       </a:r>
                     </a:p>
                   </a:txBody>
@@ -19779,7 +19779,7 @@
                             <a:srgbClr val="E2E8F0"/>
                           </a:solidFill>
                         </a:rPr>
-                        <a:t>Thu 24 Sep 2026  02:00 AM</a:t>
+                        <a:t>Thu 22 Oct 2026  03:00 AM</a:t>
                       </a:r>
                     </a:p>
                   </a:txBody>
@@ -19821,7 +19821,7 @@
                             <a:srgbClr val="E2E8F0"/>
                           </a:solidFill>
                         </a:rPr>
-                        <a:t>Thu 24 Sep 2026  12:00 AM</a:t>
+                        <a:t>Thu 22 Oct 2026  01:00 AM</a:t>
                       </a:r>
                     </a:p>
                   </a:txBody>
@@ -19863,7 +19863,7 @@
                             <a:srgbClr val="E2E8F0"/>
                           </a:solidFill>
                         </a:rPr>
-                        <a:t>Wed 23 Sep 2026  10:00 PM</a:t>
+                        <a:t>Wed 21 Oct 2026  10:00 PM</a:t>
                       </a:r>
                     </a:p>
                   </a:txBody>
@@ -19905,7 +19905,7 @@
                             <a:srgbClr val="E2E8F0"/>
                           </a:solidFill>
                         </a:rPr>
-                        <a:t>https://events.sumologic.com/cloudsiemam09232026-event-training</a:t>
+                        <a:t/>
                       </a:r>
                     </a:p>
                   </a:txBody>
@@ -19949,7 +19949,7 @@
                             <a:srgbClr val="E2E8F0"/>
                           </a:solidFill>
                         </a:rPr>
-                        <a:t>Cloud SIEM PM</a:t>
+                        <a:t>Automation AM</a:t>
                       </a:r>
                     </a:p>
                   </a:txBody>
@@ -19991,7 +19991,7 @@
                             <a:srgbClr val="E2E8F0"/>
                           </a:solidFill>
                         </a:rPr>
-                        <a:t>Wed 23 Sep 2026  04:00 PM  →  07:00 PM</a:t>
+                        <a:t>Thu 22 Oct 2026  07:00 AM  →  08:30 AM</a:t>
                       </a:r>
                     </a:p>
                   </a:txBody>
@@ -20033,7 +20033,7 @@
                             <a:srgbClr val="E2E8F0"/>
                           </a:solidFill>
                         </a:rPr>
-                        <a:t>Thu 24 Sep 2026  11:00 AM</a:t>
+                        <a:t>Fri 23 Oct 2026  03:00 AM</a:t>
                       </a:r>
                     </a:p>
                   </a:txBody>
@@ -20075,7 +20075,7 @@
                             <a:srgbClr val="E2E8F0"/>
                           </a:solidFill>
                         </a:rPr>
-                        <a:t>Thu 24 Sep 2026  09:00 AM</a:t>
+                        <a:t>Fri 23 Oct 2026  01:00 AM</a:t>
                       </a:r>
                     </a:p>
                   </a:txBody>
@@ -20117,7 +20117,7 @@
                             <a:srgbClr val="E2E8F0"/>
                           </a:solidFill>
                         </a:rPr>
-                        <a:t>Thu 24 Sep 2026  07:00 AM</a:t>
+                        <a:t>Thu 22 Oct 2026  10:00 PM</a:t>
                       </a:r>
                     </a:p>
                   </a:txBody>
@@ -20159,7 +20159,7 @@
                             <a:srgbClr val="E2E8F0"/>
                           </a:solidFill>
                         </a:rPr>
-                        <a:t>https://events.sumologic.com/cloudsiempm09232026-event-training</a:t>
+                        <a:t>https://events.sumologic.com/automationam10222026-event-training</a:t>
                       </a:r>
                     </a:p>
                   </a:txBody>
@@ -20203,7 +20203,7 @@
                             <a:srgbClr val="E2E8F0"/>
                           </a:solidFill>
                         </a:rPr>
-                        <a:t>Automation AM</a:t>
+                        <a:t>Automation PM</a:t>
                       </a:r>
                     </a:p>
                   </a:txBody>
@@ -20245,7 +20245,7 @@
                             <a:srgbClr val="E2E8F0"/>
                           </a:solidFill>
                         </a:rPr>
-                        <a:t>Thu 24 Sep 2026  07:00 AM  →  08:30 AM</a:t>
+                        <a:t>Thu 22 Oct 2026  04:00 PM  →  05:30 PM</a:t>
                       </a:r>
                     </a:p>
                   </a:txBody>
@@ -20287,7 +20287,7 @@
                             <a:srgbClr val="E2E8F0"/>
                           </a:solidFill>
                         </a:rPr>
-                        <a:t>Fri 25 Sep 2026  02:00 AM</a:t>
+                        <a:t>Fri 23 Oct 2026  12:00 PM</a:t>
                       </a:r>
                     </a:p>
                   </a:txBody>
@@ -20329,7 +20329,7 @@
                             <a:srgbClr val="E2E8F0"/>
                           </a:solidFill>
                         </a:rPr>
-                        <a:t>Fri 25 Sep 2026  12:00 AM</a:t>
+                        <a:t>Fri 23 Oct 2026  10:00 AM</a:t>
                       </a:r>
                     </a:p>
                   </a:txBody>
@@ -20371,7 +20371,7 @@
                             <a:srgbClr val="E2E8F0"/>
                           </a:solidFill>
                         </a:rPr>
-                        <a:t>Thu 24 Sep 2026  10:00 PM</a:t>
+                        <a:t>Fri 23 Oct 2026  07:00 AM</a:t>
                       </a:r>
                     </a:p>
                   </a:txBody>
@@ -20413,267 +20413,13 @@
                             <a:srgbClr val="E2E8F0"/>
                           </a:solidFill>
                         </a:rPr>
-                        <a:t>https://events.sumologic.com/automationam09242026-event-training</a:t>
+                        <a:t>https://events.sumologic.com/automationpm10222026-event-training</a:t>
                       </a:r>
                     </a:p>
                   </a:txBody>
                   <a:tcPr>
                     <a:solidFill>
                       <a:srgbClr val="0F1117"/>
-                    </a:solidFill>
-                    <a:lnL w="6350" cap="flat">
-                      <a:solidFill>
-                        <a:srgbClr val="2E3348"/>
-                      </a:solidFill>
-                    </a:lnL>
-                    <a:lnR w="6350" cap="flat">
-                      <a:solidFill>
-                        <a:srgbClr val="2E3348"/>
-                      </a:solidFill>
-                    </a:lnR>
-                    <a:lnT w="6350" cap="flat">
-                      <a:solidFill>
-                        <a:srgbClr val="2E3348"/>
-                      </a:solidFill>
-                    </a:lnT>
-                    <a:lnB w="6350" cap="flat">
-                      <a:solidFill>
-                        <a:srgbClr val="2E3348"/>
-                      </a:solidFill>
-                    </a:lnB>
-                  </a:tcPr>
-                </a:tc>
-              </a:tr>
-              <a:tr h="420624">
-                <a:tc>
-                  <a:txBody>
-                    <a:bodyPr wrap="square"/>
-                    <a:lstStyle/>
-                    <a:p>
-                      <a:pPr algn="l"/>
-                      <a:r>
-                        <a:rPr sz="800" b="0">
-                          <a:solidFill>
-                            <a:srgbClr val="E2E8F0"/>
-                          </a:solidFill>
-                        </a:rPr>
-                        <a:t>Automation PM</a:t>
-                      </a:r>
-                    </a:p>
-                  </a:txBody>
-                  <a:tcPr>
-                    <a:solidFill>
-                      <a:srgbClr val="1A1D27"/>
-                    </a:solidFill>
-                    <a:lnL w="6350" cap="flat">
-                      <a:solidFill>
-                        <a:srgbClr val="2E3348"/>
-                      </a:solidFill>
-                    </a:lnL>
-                    <a:lnR w="6350" cap="flat">
-                      <a:solidFill>
-                        <a:srgbClr val="2E3348"/>
-                      </a:solidFill>
-                    </a:lnR>
-                    <a:lnT w="6350" cap="flat">
-                      <a:solidFill>
-                        <a:srgbClr val="2E3348"/>
-                      </a:solidFill>
-                    </a:lnT>
-                    <a:lnB w="6350" cap="flat">
-                      <a:solidFill>
-                        <a:srgbClr val="2E3348"/>
-                      </a:solidFill>
-                    </a:lnB>
-                  </a:tcPr>
-                </a:tc>
-                <a:tc>
-                  <a:txBody>
-                    <a:bodyPr wrap="none"/>
-                    <a:lstStyle/>
-                    <a:p>
-                      <a:pPr algn="l"/>
-                      <a:r>
-                        <a:rPr sz="800" b="0">
-                          <a:solidFill>
-                            <a:srgbClr val="E2E8F0"/>
-                          </a:solidFill>
-                        </a:rPr>
-                        <a:t>Thu 24 Sep 2026  04:00 PM  →  05:30 PM</a:t>
-                      </a:r>
-                    </a:p>
-                  </a:txBody>
-                  <a:tcPr>
-                    <a:solidFill>
-                      <a:srgbClr val="1A1D27"/>
-                    </a:solidFill>
-                    <a:lnL w="6350" cap="flat">
-                      <a:solidFill>
-                        <a:srgbClr val="2E3348"/>
-                      </a:solidFill>
-                    </a:lnL>
-                    <a:lnR w="6350" cap="flat">
-                      <a:solidFill>
-                        <a:srgbClr val="2E3348"/>
-                      </a:solidFill>
-                    </a:lnR>
-                    <a:lnT w="6350" cap="flat">
-                      <a:solidFill>
-                        <a:srgbClr val="2E3348"/>
-                      </a:solidFill>
-                    </a:lnT>
-                    <a:lnB w="6350" cap="flat">
-                      <a:solidFill>
-                        <a:srgbClr val="2E3348"/>
-                      </a:solidFill>
-                    </a:lnB>
-                  </a:tcPr>
-                </a:tc>
-                <a:tc>
-                  <a:txBody>
-                    <a:bodyPr wrap="none"/>
-                    <a:lstStyle/>
-                    <a:p>
-                      <a:pPr algn="l"/>
-                      <a:r>
-                        <a:rPr sz="800" b="0">
-                          <a:solidFill>
-                            <a:srgbClr val="E2E8F0"/>
-                          </a:solidFill>
-                        </a:rPr>
-                        <a:t>Fri 25 Sep 2026  11:00 AM</a:t>
-                      </a:r>
-                    </a:p>
-                  </a:txBody>
-                  <a:tcPr>
-                    <a:solidFill>
-                      <a:srgbClr val="1A1D27"/>
-                    </a:solidFill>
-                    <a:lnL w="6350" cap="flat">
-                      <a:solidFill>
-                        <a:srgbClr val="2E3348"/>
-                      </a:solidFill>
-                    </a:lnL>
-                    <a:lnR w="6350" cap="flat">
-                      <a:solidFill>
-                        <a:srgbClr val="2E3348"/>
-                      </a:solidFill>
-                    </a:lnR>
-                    <a:lnT w="6350" cap="flat">
-                      <a:solidFill>
-                        <a:srgbClr val="2E3348"/>
-                      </a:solidFill>
-                    </a:lnT>
-                    <a:lnB w="6350" cap="flat">
-                      <a:solidFill>
-                        <a:srgbClr val="2E3348"/>
-                      </a:solidFill>
-                    </a:lnB>
-                  </a:tcPr>
-                </a:tc>
-                <a:tc>
-                  <a:txBody>
-                    <a:bodyPr wrap="none"/>
-                    <a:lstStyle/>
-                    <a:p>
-                      <a:pPr algn="l"/>
-                      <a:r>
-                        <a:rPr sz="800" b="0">
-                          <a:solidFill>
-                            <a:srgbClr val="E2E8F0"/>
-                          </a:solidFill>
-                        </a:rPr>
-                        <a:t>Fri 25 Sep 2026  09:00 AM</a:t>
-                      </a:r>
-                    </a:p>
-                  </a:txBody>
-                  <a:tcPr>
-                    <a:solidFill>
-                      <a:srgbClr val="1A1D27"/>
-                    </a:solidFill>
-                    <a:lnL w="6350" cap="flat">
-                      <a:solidFill>
-                        <a:srgbClr val="2E3348"/>
-                      </a:solidFill>
-                    </a:lnL>
-                    <a:lnR w="6350" cap="flat">
-                      <a:solidFill>
-                        <a:srgbClr val="2E3348"/>
-                      </a:solidFill>
-                    </a:lnR>
-                    <a:lnT w="6350" cap="flat">
-                      <a:solidFill>
-                        <a:srgbClr val="2E3348"/>
-                      </a:solidFill>
-                    </a:lnT>
-                    <a:lnB w="6350" cap="flat">
-                      <a:solidFill>
-                        <a:srgbClr val="2E3348"/>
-                      </a:solidFill>
-                    </a:lnB>
-                  </a:tcPr>
-                </a:tc>
-                <a:tc>
-                  <a:txBody>
-                    <a:bodyPr wrap="none"/>
-                    <a:lstStyle/>
-                    <a:p>
-                      <a:pPr algn="l"/>
-                      <a:r>
-                        <a:rPr sz="800" b="0">
-                          <a:solidFill>
-                            <a:srgbClr val="E2E8F0"/>
-                          </a:solidFill>
-                        </a:rPr>
-                        <a:t>Fri 25 Sep 2026  07:00 AM</a:t>
-                      </a:r>
-                    </a:p>
-                  </a:txBody>
-                  <a:tcPr>
-                    <a:solidFill>
-                      <a:srgbClr val="1A1D27"/>
-                    </a:solidFill>
-                    <a:lnL w="6350" cap="flat">
-                      <a:solidFill>
-                        <a:srgbClr val="2E3348"/>
-                      </a:solidFill>
-                    </a:lnL>
-                    <a:lnR w="6350" cap="flat">
-                      <a:solidFill>
-                        <a:srgbClr val="2E3348"/>
-                      </a:solidFill>
-                    </a:lnR>
-                    <a:lnT w="6350" cap="flat">
-                      <a:solidFill>
-                        <a:srgbClr val="2E3348"/>
-                      </a:solidFill>
-                    </a:lnT>
-                    <a:lnB w="6350" cap="flat">
-                      <a:solidFill>
-                        <a:srgbClr val="2E3348"/>
-                      </a:solidFill>
-                    </a:lnB>
-                  </a:tcPr>
-                </a:tc>
-                <a:tc>
-                  <a:txBody>
-                    <a:bodyPr wrap="square"/>
-                    <a:lstStyle/>
-                    <a:p>
-                      <a:pPr algn="l"/>
-                      <a:r>
-                        <a:rPr sz="700" b="0">
-                          <a:solidFill>
-                            <a:srgbClr val="E2E8F0"/>
-                          </a:solidFill>
-                        </a:rPr>
-                        <a:t>https://events.sumologic.com/automationpm09242026-event-training</a:t>
-                      </a:r>
-                    </a:p>
-                  </a:txBody>
-                  <a:tcPr>
-                    <a:solidFill>
-                      <a:srgbClr val="1A1D27"/>
                     </a:solidFill>
                     <a:lnL w="6350" cap="flat">
                       <a:solidFill>
@@ -20710,7 +20456,7 @@
         </p:nvSpPr>
         <p:spPr>
           <a:xfrm>
-            <a:off x="164592" y="4425696"/>
+            <a:off x="164592" y="4005072"/>
             <a:ext cx="11795760" cy="274320"/>
           </a:xfrm>
           <a:prstGeom prst="rect">
